--- a/docs/digest-en.pptx
+++ b/docs/digest-en.pptx
@@ -2450,7 +2450,7 @@
                 <a:ea typeface="Arial" pitchFamily="34" charset="-122"/>
                 <a:cs typeface="Arial" pitchFamily="34" charset="-120"/>
               </a:rPr>
-              <a:t>Combination therapy for uHCC evaluated</a:t>
+              <a:t>Combination of TACE and PD-1 inhibitors</a:t>
             </a:r>
             <a:endParaRPr lang="en-US" sz="1800" dirty="0"/>
           </a:p>
@@ -2471,7 +2471,7 @@
                 <a:ea typeface="Arial" pitchFamily="34" charset="-122"/>
                 <a:cs typeface="Arial" pitchFamily="34" charset="-120"/>
               </a:rPr>
-              <a:t>Transarterial chemoembolization (TACE) used</a:t>
+              <a:t>Phase 2 trial for uHCC patients</a:t>
             </a:r>
             <a:endParaRPr lang="en-US" sz="1800" dirty="0"/>
           </a:p>
@@ -2492,49 +2492,7 @@
                 <a:ea typeface="Arial" pitchFamily="34" charset="-122"/>
                 <a:cs typeface="Arial" pitchFamily="34" charset="-120"/>
               </a:rPr>
-              <a:t>PD-1 inhibitors added for efficacy</a:t>
-            </a:r>
-            <a:endParaRPr lang="en-US" sz="1800" dirty="0"/>
-          </a:p>
-          <a:p>
-            <a:pPr marL="342900" indent="-342900">
-              <a:spcAft>
-                <a:spcPts val="800"/>
-              </a:spcAft>
-              <a:buSzPct val="100000"/>
-              <a:buChar char="•"/>
-            </a:pPr>
-            <a:r>
-              <a:rPr lang="en-US" sz="1800" dirty="0">
-                <a:solidFill>
-                  <a:srgbClr val="333333"/>
-                </a:solidFill>
-                <a:latin typeface="Arial" pitchFamily="34" charset="0"/>
-                <a:ea typeface="Arial" pitchFamily="34" charset="-122"/>
-                <a:cs typeface="Arial" pitchFamily="34" charset="-120"/>
-              </a:rPr>
-              <a:t>Phase 2 trial demonstrates potential</a:t>
-            </a:r>
-            <a:endParaRPr lang="en-US" sz="1800" dirty="0"/>
-          </a:p>
-          <a:p>
-            <a:pPr marL="342900" indent="-342900">
-              <a:spcAft>
-                <a:spcPts val="800"/>
-              </a:spcAft>
-              <a:buSzPct val="100000"/>
-              <a:buChar char="•"/>
-            </a:pPr>
-            <a:r>
-              <a:rPr lang="en-US" sz="1800" dirty="0">
-                <a:solidFill>
-                  <a:srgbClr val="333333"/>
-                </a:solidFill>
-                <a:latin typeface="Arial" pitchFamily="34" charset="0"/>
-                <a:ea typeface="Arial" pitchFamily="34" charset="-122"/>
-                <a:cs typeface="Arial" pitchFamily="34" charset="-120"/>
-              </a:rPr>
-              <a:t>Results suggest improved patient outcomes</a:t>
+              <a:t>Evaluated efficacy compared to TACE alone</a:t>
             </a:r>
             <a:endParaRPr lang="en-US" sz="1800" dirty="0"/>
           </a:p>
@@ -2813,7 +2771,7 @@
                 <a:ea typeface="Arial" pitchFamily="34" charset="-122"/>
                 <a:cs typeface="Arial" pitchFamily="34" charset="-120"/>
               </a:rPr>
-              <a:t>Atez+Bev shows efficacy after Dur+Tre.</a:t>
+              <a:t>Atez+Bev shows 25% ORR in HCC.</a:t>
             </a:r>
             <a:endParaRPr lang="en-US" sz="1800" dirty="0"/>
           </a:p>
@@ -2834,7 +2792,7 @@
                 <a:ea typeface="Arial" pitchFamily="34" charset="-122"/>
                 <a:cs typeface="Arial" pitchFamily="34" charset="-120"/>
               </a:rPr>
-              <a:t>Objective response rate is 25.0%.</a:t>
+              <a:t>75% DCR indicates favorable disease control.</a:t>
             </a:r>
             <a:endParaRPr lang="en-US" sz="1800" dirty="0"/>
           </a:p>
@@ -2855,7 +2813,7 @@
                 <a:ea typeface="Arial" pitchFamily="34" charset="-122"/>
                 <a:cs typeface="Arial" pitchFamily="34" charset="-120"/>
               </a:rPr>
-              <a:t>Disease control rate reaches 75.0%.</a:t>
+              <a:t>Adverse events differ between regimens.</a:t>
             </a:r>
             <a:endParaRPr lang="en-US" sz="1800" dirty="0"/>
           </a:p>
@@ -2876,7 +2834,7 @@
                 <a:ea typeface="Arial" pitchFamily="34" charset="-122"/>
                 <a:cs typeface="Arial" pitchFamily="34" charset="-120"/>
               </a:rPr>
-              <a:t>Adverse events vary between treatments.</a:t>
+              <a:t>Prior Dur+Tre may enhance immune response.</a:t>
             </a:r>
             <a:endParaRPr lang="en-US" sz="1800" dirty="0"/>
           </a:p>
@@ -2897,7 +2855,7 @@
                 <a:ea typeface="Arial" pitchFamily="34" charset="-122"/>
                 <a:cs typeface="Arial" pitchFamily="34" charset="-120"/>
               </a:rPr>
-              <a:t>Prior Dur+Tre may enhance immune response.</a:t>
+              <a:t>Sequential treatment is a viable option.</a:t>
             </a:r>
             <a:endParaRPr lang="en-US" sz="1800" dirty="0"/>
           </a:p>
@@ -3176,7 +3134,7 @@
                 <a:ea typeface="Arial" pitchFamily="34" charset="-122"/>
                 <a:cs typeface="Arial" pitchFamily="34" charset="-120"/>
               </a:rPr>
-              <a:t>Comparison of radiotherapy and local ablation</a:t>
+              <a:t>Local ablation therapies include RFA and microwave ablation.</a:t>
             </a:r>
             <a:endParaRPr lang="en-US" sz="1800" dirty="0"/>
           </a:p>
@@ -3197,7 +3155,7 @@
                 <a:ea typeface="Arial" pitchFamily="34" charset="-122"/>
                 <a:cs typeface="Arial" pitchFamily="34" charset="-120"/>
               </a:rPr>
-              <a:t>Focus on hepatocellular carcinoma treatment</a:t>
+              <a:t>EBRT shows different outcomes compared to local ablation.</a:t>
             </a:r>
             <a:endParaRPr lang="en-US" sz="1800" dirty="0"/>
           </a:p>
@@ -3218,49 +3176,7 @@
                 <a:ea typeface="Arial" pitchFamily="34" charset="-122"/>
                 <a:cs typeface="Arial" pitchFamily="34" charset="-120"/>
               </a:rPr>
-              <a:t>Evaluation of local progression-free survival</a:t>
-            </a:r>
-            <a:endParaRPr lang="en-US" sz="1800" dirty="0"/>
-          </a:p>
-          <a:p>
-            <a:pPr marL="342900" indent="-342900">
-              <a:spcAft>
-                <a:spcPts val="800"/>
-              </a:spcAft>
-              <a:buSzPct val="100000"/>
-              <a:buChar char="•"/>
-            </a:pPr>
-            <a:r>
-              <a:rPr lang="en-US" sz="1800" dirty="0">
-                <a:solidFill>
-                  <a:srgbClr val="333333"/>
-                </a:solidFill>
-                <a:latin typeface="Arial" pitchFamily="34" charset="0"/>
-                <a:ea typeface="Arial" pitchFamily="34" charset="-122"/>
-                <a:cs typeface="Arial" pitchFamily="34" charset="-120"/>
-              </a:rPr>
-              <a:t>Inclusion of radiofrequency and microwave ablation</a:t>
-            </a:r>
-            <a:endParaRPr lang="en-US" sz="1800" dirty="0"/>
-          </a:p>
-          <a:p>
-            <a:pPr marL="342900" indent="-342900">
-              <a:spcAft>
-                <a:spcPts val="800"/>
-              </a:spcAft>
-              <a:buSzPct val="100000"/>
-              <a:buChar char="•"/>
-            </a:pPr>
-            <a:r>
-              <a:rPr lang="en-US" sz="1800" dirty="0">
-                <a:solidFill>
-                  <a:srgbClr val="333333"/>
-                </a:solidFill>
-                <a:latin typeface="Arial" pitchFamily="34" charset="0"/>
-                <a:ea typeface="Arial" pitchFamily="34" charset="-122"/>
-                <a:cs typeface="Arial" pitchFamily="34" charset="-120"/>
-              </a:rPr>
-              <a:t>Systematic review and meta-analysis conducted</a:t>
+              <a:t>Meta-analysis evaluates local progression-free survival rates.</a:t>
             </a:r>
             <a:endParaRPr lang="en-US" sz="1800" dirty="0"/>
           </a:p>
@@ -3494,7 +3410,7 @@
                   <a:srgbClr val="FFFFFF"/>
                 </a:solidFill>
               </a:rPr>
-              <a:t>1. **免疫療法的潛力**  </a:t>
+              <a:t>1. **免疫治療的潛力**  </a:t>
             </a:r>
             <a:endParaRPr lang="en-US" sz="1200" dirty="0"/>
           </a:p>
@@ -3511,7 +3427,7 @@
                   <a:srgbClr val="FFFFFF"/>
                 </a:solidFill>
               </a:rPr>
-              <a:t>   The integration of immune therapy with traditional treatments such as surgery and local ablation has shown promising results in enhancing therapeutic outcomes for HCC patients.  </a:t>
+              <a:t>   **The Potential of Immunotherapy**  </a:t>
             </a:r>
             <a:endParaRPr lang="en-US" sz="1200" dirty="0"/>
           </a:p>
@@ -3528,7 +3444,7 @@
                   <a:srgbClr val="FFFFFF"/>
                 </a:solidFill>
               </a:rPr>
-              <a:t>   免疫療法與傳統治療（如手術和局部消融）的結合顯示出改善肝癌患者療效的潛力。</a:t>
+              <a:t>   免疫治療在晚期肝細胞癌（HCC）中顯示出顯著的療效，尤其在早期階段的應用仍需進一步探索。  </a:t>
             </a:r>
             <a:endParaRPr lang="en-US" sz="1200" dirty="0"/>
           </a:p>
@@ -3539,6 +3455,14 @@
               </a:lnSpc>
               <a:buNone/>
             </a:pPr>
+            <a:r>
+              <a:rPr lang="en-US" sz="1200" dirty="0">
+                <a:solidFill>
+                  <a:srgbClr val="FFFFFF"/>
+                </a:solidFill>
+              </a:rPr>
+              <a:t>   Immunotherapy has shown significant efficacy in advanced hepatocellular carcinoma (HCC), particularly its application in earlier stages remains to be further explored.</a:t>
+            </a:r>
             <a:endParaRPr lang="en-US" sz="1200" dirty="0"/>
           </a:p>
           <a:p>
@@ -3548,6 +3472,15 @@
               </a:lnSpc>
               <a:buNone/>
             </a:pPr>
+            <a:endParaRPr lang="en-US" sz="1200" dirty="0"/>
+          </a:p>
+          <a:p>
+            <a:pPr indent="0" marL="0">
+              <a:lnSpc>
+                <a:spcPct val="160000"/>
+              </a:lnSpc>
+              <a:buNone/>
+            </a:pPr>
             <a:r>
               <a:rPr lang="en-US" sz="1200" dirty="0">
                 <a:solidFill>
@@ -3571,7 +3504,7 @@
                   <a:srgbClr val="FFFFFF"/>
                 </a:solidFill>
               </a:rPr>
-              <a:t>   Neoadjuvant therapies, including stereotactic body radiation therapy combined with immune therapy, can favorably remodel the tumor microenvironment, potentially improving patient responses.  </a:t>
+              <a:t>   **Remodeling of Tumor Microenvironment**  </a:t>
             </a:r>
             <a:endParaRPr lang="en-US" sz="1200" dirty="0"/>
           </a:p>
@@ -3588,7 +3521,7 @@
                   <a:srgbClr val="FFFFFF"/>
                 </a:solidFill>
               </a:rPr>
-              <a:t>   新輔助療法（如立體定向體部放射治療結合免疫療法）能夠有利地重塑腫瘤微環境，可能改善患者的反應。</a:t>
+              <a:t>   新的療法如新輔助立體定向放射治療結合免疫治療能有效重塑HCC的腫瘤微環境，增強治療反應。  </a:t>
             </a:r>
             <a:endParaRPr lang="en-US" sz="1200" dirty="0"/>
           </a:p>
@@ -3599,6 +3532,14 @@
               </a:lnSpc>
               <a:buNone/>
             </a:pPr>
+            <a:r>
+              <a:rPr lang="en-US" sz="1200" dirty="0">
+                <a:solidFill>
+                  <a:srgbClr val="FFFFFF"/>
+                </a:solidFill>
+              </a:rPr>
+              <a:t>   Novel therapies such as neoadjuvant stereotactic body radiation therapy combined with immunotherapy can effectively remodel the HCC tumor microenvironment, enhancing treatment responses.</a:t>
+            </a:r>
             <a:endParaRPr lang="en-US" sz="1200" dirty="0"/>
           </a:p>
           <a:p>
@@ -3608,6 +3549,15 @@
               </a:lnSpc>
               <a:buNone/>
             </a:pPr>
+            <a:endParaRPr lang="en-US" sz="1200" dirty="0"/>
+          </a:p>
+          <a:p>
+            <a:pPr indent="0" marL="0">
+              <a:lnSpc>
+                <a:spcPct val="160000"/>
+              </a:lnSpc>
+              <a:buNone/>
+            </a:pPr>
             <a:r>
               <a:rPr lang="en-US" sz="1200" dirty="0">
                 <a:solidFill>
@@ -3631,7 +3581,7 @@
                   <a:srgbClr val="FFFFFF"/>
                 </a:solidFill>
               </a:rPr>
-              <a:t>   Cancer-associated fibroblasts (CAFs) play a crucial role in promoting immunosuppression in HCC, highlighting the need to target these cells for effective therapy.  </a:t>
+              <a:t>   **Role of Cancer-Associated Fibroblasts**  </a:t>
             </a:r>
             <a:endParaRPr lang="en-US" sz="1200" dirty="0"/>
           </a:p>
@@ -3648,7 +3598,7 @@
                   <a:srgbClr val="FFFFFF"/>
                 </a:solidFill>
               </a:rPr>
-              <a:t>   癌症相關成纖維細胞（CAFs）在促進肝癌的免疫抑制中扮演關鍵角色，強調了針對這些細胞的治療需求。</a:t>
+              <a:t>   癌症相關成纖維細胞（CAFs）在HCC中促進免疫抑制，揭示了其作為潛在治療靶點的重要性。  </a:t>
             </a:r>
             <a:endParaRPr lang="en-US" sz="1200" dirty="0"/>
           </a:p>
@@ -3659,6 +3609,14 @@
               </a:lnSpc>
               <a:buNone/>
             </a:pPr>
+            <a:r>
+              <a:rPr lang="en-US" sz="1200" dirty="0">
+                <a:solidFill>
+                  <a:srgbClr val="FFFFFF"/>
+                </a:solidFill>
+              </a:rPr>
+              <a:t>   Cancer-associated fibroblasts (CAFs) promote immunosuppression in HCC, highlighting their importance as potential therapeutic targets.</a:t>
+            </a:r>
             <a:endParaRPr lang="en-US" sz="1200" dirty="0"/>
           </a:p>
           <a:p>
@@ -3668,6 +3626,15 @@
               </a:lnSpc>
               <a:buNone/>
             </a:pPr>
+            <a:endParaRPr lang="en-US" sz="1200" dirty="0"/>
+          </a:p>
+          <a:p>
+            <a:pPr indent="0" marL="0">
+              <a:lnSpc>
+                <a:spcPct val="160000"/>
+              </a:lnSpc>
+              <a:buNone/>
+            </a:pPr>
             <a:r>
               <a:rPr lang="en-US" sz="1200" dirty="0">
                 <a:solidFill>
@@ -3691,7 +3658,7 @@
                   <a:srgbClr val="FFFFFF"/>
                 </a:solidFill>
               </a:rPr>
-              <a:t>   Despite effective surgical interventions, postoperative recurrence remains a significant challenge, necessitating further research into mechanisms and preventive strategies.  </a:t>
+              <a:t>   **Challenges of Postoperative Recurrence**  </a:t>
             </a:r>
             <a:endParaRPr lang="en-US" sz="1200" dirty="0"/>
           </a:p>
@@ -3708,7 +3675,7 @@
                   <a:srgbClr val="FFFFFF"/>
                 </a:solidFill>
               </a:rPr>
-              <a:t>   儘管手術干預有效，術後復發仍然是一個重大挑戰，需要進一步研究其機制和預防策略。</a:t>
+              <a:t>   雖然手術切除對早期HCC有效，但術後復發仍是主要的臨床挑戰，需深入研究其機制。  </a:t>
             </a:r>
             <a:endParaRPr lang="en-US" sz="1200" dirty="0"/>
           </a:p>
@@ -3719,6 +3686,14 @@
               </a:lnSpc>
               <a:buNone/>
             </a:pPr>
+            <a:r>
+              <a:rPr lang="en-US" sz="1200" dirty="0">
+                <a:solidFill>
+                  <a:srgbClr val="FFFFFF"/>
+                </a:solidFill>
+              </a:rPr>
+              <a:t>   While surgical resection is effective for early-stage HCC, postoperative recurrence remains a major clinical challenge that requires deeper investigation into its mechanisms.</a:t>
+            </a:r>
             <a:endParaRPr lang="en-US" sz="1200" dirty="0"/>
           </a:p>
           <a:p>
@@ -3728,13 +3703,22 @@
               </a:lnSpc>
               <a:buNone/>
             </a:pPr>
+            <a:endParaRPr lang="en-US" sz="1200" dirty="0"/>
+          </a:p>
+          <a:p>
+            <a:pPr indent="0" marL="0">
+              <a:lnSpc>
+                <a:spcPct val="160000"/>
+              </a:lnSpc>
+              <a:buNone/>
+            </a:pPr>
             <a:r>
               <a:rPr lang="en-US" sz="1200" dirty="0">
                 <a:solidFill>
                   <a:srgbClr val="FFFFFF"/>
                 </a:solidFill>
               </a:rPr>
-              <a:t>5. **多模態治療的必要性**  </a:t>
+              <a:t>5. **多模態治療策略的必要性**  </a:t>
             </a:r>
             <a:endParaRPr lang="en-US" sz="1200" dirty="0"/>
           </a:p>
@@ -3751,7 +3735,7 @@
                   <a:srgbClr val="FFFFFF"/>
                 </a:solidFill>
               </a:rPr>
-              <a:t>   The combination of various treatment modalities, including immunotherapy, local ablation, and systemic therapies, is essential for improving outcomes in advanced HCC cases.  </a:t>
+              <a:t>   **Necessity of Multimodal Treatment Strategies**  </a:t>
             </a:r>
             <a:endParaRPr lang="en-US" sz="1200" dirty="0"/>
           </a:p>
@@ -3768,7 +3752,7 @@
                   <a:srgbClr val="FFFFFF"/>
                 </a:solidFill>
               </a:rPr>
-              <a:t>   結合各種治療模式，包括免疫療法、局部消融和全身療法，對於改善晚期肝癌病例的療效至關重要。</a:t>
+              <a:t>   對於不可切除的中晚期HCC，結合局部消融、化療和免疫治療的多模態策略顯示出潛在的療效。  </a:t>
             </a:r>
             <a:endParaRPr lang="en-US" sz="1200" dirty="0"/>
           </a:p>
@@ -3779,6 +3763,14 @@
               </a:lnSpc>
               <a:buNone/>
             </a:pPr>
+            <a:r>
+              <a:rPr lang="en-US" sz="1200" dirty="0">
+                <a:solidFill>
+                  <a:srgbClr val="FFFFFF"/>
+                </a:solidFill>
+              </a:rPr>
+              <a:t>   For unresectable intermediate-advanced HCC, multimodal strategies combining local ablation, chemotherapy, and immunotherapy show potential efficacy.</a:t>
+            </a:r>
             <a:endParaRPr lang="en-US" sz="1200" dirty="0"/>
           </a:p>
           <a:p>
@@ -3788,6 +3780,15 @@
               </a:lnSpc>
               <a:buNone/>
             </a:pPr>
+            <a:endParaRPr lang="en-US" sz="1200" dirty="0"/>
+          </a:p>
+          <a:p>
+            <a:pPr indent="0" marL="0">
+              <a:lnSpc>
+                <a:spcPct val="160000"/>
+              </a:lnSpc>
+              <a:buNone/>
+            </a:pPr>
             <a:r>
               <a:rPr lang="en-US" sz="1200" dirty="0">
                 <a:solidFill>
@@ -3820,7 +3821,7 @@
                   <a:srgbClr val="FFFFFF"/>
                 </a:solidFill>
               </a:rPr>
-              <a:t>1. **早期階段的免疫療法應用**  </a:t>
+              <a:t>1. **早期階段免疫治療的最佳化**  </a:t>
             </a:r>
             <a:endParaRPr lang="en-US" sz="1200" dirty="0"/>
           </a:p>
@@ -3837,7 +3838,7 @@
                   <a:srgbClr val="FFFFFF"/>
                 </a:solidFill>
               </a:rPr>
-              <a:t>   Investigating the optimal use of immune therapy in early-stage HCC will be crucial for maximizing patient benefits and reducing recurrence rates.  </a:t>
+              <a:t>   **Optimization of Immunotherapy in Early Stages**  </a:t>
             </a:r>
             <a:endParaRPr lang="en-US" sz="1200" dirty="0"/>
           </a:p>
@@ -3854,7 +3855,7 @@
                   <a:srgbClr val="FFFFFF"/>
                 </a:solidFill>
               </a:rPr>
-              <a:t>   研究免疫療法在早期肝癌中的最佳應用對於最大化患者利益和降低復發率至關重要。</a:t>
+              <a:t>   需進一步研究如何在早期肝細胞癌中最佳化免疫治療的使用，以提高療效。  </a:t>
             </a:r>
             <a:endParaRPr lang="en-US" sz="1200" dirty="0"/>
           </a:p>
@@ -3865,6 +3866,14 @@
               </a:lnSpc>
               <a:buNone/>
             </a:pPr>
+            <a:r>
+              <a:rPr lang="en-US" sz="1200" dirty="0">
+                <a:solidFill>
+                  <a:srgbClr val="FFFFFF"/>
+                </a:solidFill>
+              </a:rPr>
+              <a:t>   Further research is needed to optimize the use of immunotherapy in early-stage hepatocellular carcinoma to enhance efficacy.</a:t>
+            </a:r>
             <a:endParaRPr lang="en-US" sz="1200" dirty="0"/>
           </a:p>
           <a:p>
@@ -3874,13 +3883,22 @@
               </a:lnSpc>
               <a:buNone/>
             </a:pPr>
+            <a:endParaRPr lang="en-US" sz="1200" dirty="0"/>
+          </a:p>
+          <a:p>
+            <a:pPr indent="0" marL="0">
+              <a:lnSpc>
+                <a:spcPct val="160000"/>
+              </a:lnSpc>
+              <a:buNone/>
+            </a:pPr>
             <a:r>
               <a:rPr lang="en-US" sz="1200" dirty="0">
                 <a:solidFill>
                   <a:srgbClr val="FFFFFF"/>
                 </a:solidFill>
               </a:rPr>
-              <a:t>2. **腫瘤微環境的深入研究**  </a:t>
+              <a:t>2. **腫瘤微環境的深入分析**  </a:t>
             </a:r>
             <a:endParaRPr lang="en-US" sz="1200" dirty="0"/>
           </a:p>
@@ -3897,7 +3915,7 @@
                   <a:srgbClr val="FFFFFF"/>
                 </a:solidFill>
               </a:rPr>
-              <a:t>   Further exploration of the tumor microenvironment, particularly the role of CAFs and other immune cells, will provide insights into new therapeutic targets.  </a:t>
+              <a:t>   **In-depth Analysis of Tumor Microenvironment**  </a:t>
             </a:r>
             <a:endParaRPr lang="en-US" sz="1200" dirty="0"/>
           </a:p>
@@ -3914,7 +3932,7 @@
                   <a:srgbClr val="FFFFFF"/>
                 </a:solidFill>
               </a:rPr>
-              <a:t>   深入研究腫瘤微環境，特別是CAFs和其他免疫細胞的角色，將提供新的治療靶點的見解。</a:t>
+              <a:t>   對腫瘤微環境的組成及其對免疫反應的影響進行深入研究，以開發新療法。  </a:t>
             </a:r>
             <a:endParaRPr lang="en-US" sz="1200" dirty="0"/>
           </a:p>
@@ -3925,6 +3943,14 @@
               </a:lnSpc>
               <a:buNone/>
             </a:pPr>
+            <a:r>
+              <a:rPr lang="en-US" sz="1200" dirty="0">
+                <a:solidFill>
+                  <a:srgbClr val="FFFFFF"/>
+                </a:solidFill>
+              </a:rPr>
+              <a:t>   In-depth studies on the composition of the tumor microenvironment and its impact on immune responses are essential for developing new therapies.</a:t>
+            </a:r>
             <a:endParaRPr lang="en-US" sz="1200" dirty="0"/>
           </a:p>
           <a:p>
@@ -3934,13 +3960,22 @@
               </a:lnSpc>
               <a:buNone/>
             </a:pPr>
+            <a:endParaRPr lang="en-US" sz="1200" dirty="0"/>
+          </a:p>
+          <a:p>
+            <a:pPr indent="0" marL="0">
+              <a:lnSpc>
+                <a:spcPct val="160000"/>
+              </a:lnSpc>
+              <a:buNone/>
+            </a:pPr>
             <a:r>
               <a:rPr lang="en-US" sz="1200" dirty="0">
                 <a:solidFill>
                   <a:srgbClr val="FFFFFF"/>
                 </a:solidFill>
               </a:rPr>
-              <a:t>3. **新輔助療法的臨床試驗**  </a:t>
+              <a:t>3. **癌症相關成纖維細胞的代謝調控**  </a:t>
             </a:r>
             <a:endParaRPr lang="en-US" sz="1200" dirty="0"/>
           </a:p>
@@ -3957,7 +3992,7 @@
                   <a:srgbClr val="FFFFFF"/>
                 </a:solidFill>
               </a:rPr>
-              <a:t>   Conducting more clinical trials on neoadjuvant therapies that combine radiation and immunotherapy could yield valuable data on their efficacy and safety.  </a:t>
+              <a:t>   **Metabolic Regulation of Cancer-Associated Fibroblasts**  </a:t>
             </a:r>
             <a:endParaRPr lang="en-US" sz="1200" dirty="0"/>
           </a:p>
@@ -3974,7 +4009,7 @@
                   <a:srgbClr val="FFFFFF"/>
                 </a:solidFill>
               </a:rPr>
-              <a:t>   開展更多關於結合放射治療和免疫療法的新輔助療法的臨床試驗，可能會產生有價值的療效和安全性數據。</a:t>
+              <a:t>   探索癌症相關成纖維細胞的代謝調控機制，以尋找新的免疫治療靶點。  </a:t>
             </a:r>
             <a:endParaRPr lang="en-US" sz="1200" dirty="0"/>
           </a:p>
@@ -3985,6 +4020,14 @@
               </a:lnSpc>
               <a:buNone/>
             </a:pPr>
+            <a:r>
+              <a:rPr lang="en-US" sz="1200" dirty="0">
+                <a:solidFill>
+                  <a:srgbClr val="FFFFFF"/>
+                </a:solidFill>
+              </a:rPr>
+              <a:t>   Exploring the metabolic regulatory mechanisms of cancer-associated fibroblasts to identify new immunotherapeutic targets is crucial.</a:t>
+            </a:r>
             <a:endParaRPr lang="en-US" sz="1200" dirty="0"/>
           </a:p>
           <a:p>
@@ -3994,13 +4037,22 @@
               </a:lnSpc>
               <a:buNone/>
             </a:pPr>
+            <a:endParaRPr lang="en-US" sz="1200" dirty="0"/>
+          </a:p>
+          <a:p>
+            <a:pPr indent="0" marL="0">
+              <a:lnSpc>
+                <a:spcPct val="160000"/>
+              </a:lnSpc>
+              <a:buNone/>
+            </a:pPr>
             <a:r>
               <a:rPr lang="en-US" sz="1200" dirty="0">
                 <a:solidFill>
                   <a:srgbClr val="FFFFFF"/>
                 </a:solidFill>
               </a:rPr>
-              <a:t>4. **個體化治療策略的發展**  </a:t>
+              <a:t>4. **多模態治療的臨床試驗**  </a:t>
             </a:r>
             <a:endParaRPr lang="en-US" sz="1200" dirty="0"/>
           </a:p>
@@ -4017,7 +4069,7 @@
                   <a:srgbClr val="FFFFFF"/>
                 </a:solidFill>
               </a:rPr>
-              <a:t>   Developing personalized treatment strategies based on genetic and molecular profiling of HCC tumors will enhance treatment efficacy and reduce adverse effects.  </a:t>
+              <a:t>   **Clinical Trials on Multimodal Treatments**  </a:t>
             </a:r>
             <a:endParaRPr lang="en-US" sz="1200" dirty="0"/>
           </a:p>
@@ -4034,7 +4086,7 @@
                   <a:srgbClr val="FFFFFF"/>
                 </a:solidFill>
               </a:rPr>
-              <a:t>   根據肝癌腫瘤的基因和分子特徵發展個體化治療策略，將提高治療效果並減少不良反應。</a:t>
+              <a:t>   設計針對不可切除HCC的多模態治療的臨床試驗，以評估其安全性和有效性。  </a:t>
             </a:r>
             <a:endParaRPr lang="en-US" sz="1200" dirty="0"/>
           </a:p>
@@ -4045,6 +4097,14 @@
               </a:lnSpc>
               <a:buNone/>
             </a:pPr>
+            <a:r>
+              <a:rPr lang="en-US" sz="1200" dirty="0">
+                <a:solidFill>
+                  <a:srgbClr val="FFFFFF"/>
+                </a:solidFill>
+              </a:rPr>
+              <a:t>   Designing clinical trials for multimodal treatments targeting unresectable HCC to evaluate their safety and efficacy is essential.</a:t>
+            </a:r>
             <a:endParaRPr lang="en-US" sz="1200" dirty="0"/>
           </a:p>
           <a:p>
@@ -4054,13 +4114,22 @@
               </a:lnSpc>
               <a:buNone/>
             </a:pPr>
+            <a:endParaRPr lang="en-US" sz="1200" dirty="0"/>
+          </a:p>
+          <a:p>
+            <a:pPr indent="0" marL="0">
+              <a:lnSpc>
+                <a:spcPct val="160000"/>
+              </a:lnSpc>
+              <a:buNone/>
+            </a:pPr>
             <a:r>
               <a:rPr lang="en-US" sz="1200" dirty="0">
                 <a:solidFill>
                   <a:srgbClr val="FFFFFF"/>
                 </a:solidFill>
               </a:rPr>
-              <a:t>5. **多模態治療的整合研究**  </a:t>
+              <a:t>5. **個體化治療策略的發展**  </a:t>
             </a:r>
             <a:endParaRPr lang="en-US" sz="1200" dirty="0"/>
           </a:p>
@@ -4077,7 +4146,7 @@
                   <a:srgbClr val="FFFFFF"/>
                 </a:solidFill>
               </a:rPr>
-              <a:t>   Future studies should focus on the integration of multimodal therapies, assessing their synergistic effects and optimizing treatment protocols for HCC.  </a:t>
+              <a:t>   **Development of Personalized Treatment Strategies**  </a:t>
             </a:r>
             <a:endParaRPr lang="en-US" sz="1200" dirty="0"/>
           </a:p>
@@ -4094,7 +4163,24 @@
                   <a:srgbClr val="FFFFFF"/>
                 </a:solidFill>
               </a:rPr>
-              <a:t>   未來的研究應專注於多模態治療的整合，評估其協同效應並優化肝癌的治療方案。</a:t>
+              <a:t>   基於患者的基因組學和腫瘤特徵，發展個體化的治療策略以提高治療效果。  </a:t>
+            </a:r>
+            <a:endParaRPr lang="en-US" sz="1200" dirty="0"/>
+          </a:p>
+          <a:p>
+            <a:pPr indent="0" marL="0">
+              <a:lnSpc>
+                <a:spcPct val="160000"/>
+              </a:lnSpc>
+              <a:buNone/>
+            </a:pPr>
+            <a:r>
+              <a:rPr lang="en-US" sz="1200" dirty="0">
+                <a:solidFill>
+                  <a:srgbClr val="FFFFFF"/>
+                </a:solidFill>
+              </a:rPr>
+              <a:t>   Developing personalized treatment strategies based on patient genomics and tumor characteristics to improve treatment outcomes is vital.</a:t>
             </a:r>
             <a:endParaRPr lang="en-US" sz="1200" dirty="0"/>
           </a:p>
@@ -4895,7 +4981,7 @@
                 <a:ea typeface="Arial" pitchFamily="34" charset="-122"/>
                 <a:cs typeface="Arial" pitchFamily="34" charset="-120"/>
               </a:rPr>
-              <a:t>Unified framework for understanding liver cancer</a:t>
+              <a:t>Hallmarks of cancer guide treatment strategies.</a:t>
             </a:r>
             <a:endParaRPr lang="en-US" sz="1800" dirty="0"/>
           </a:p>
@@ -4916,7 +5002,7 @@
                 <a:ea typeface="Arial" pitchFamily="34" charset="-122"/>
                 <a:cs typeface="Arial" pitchFamily="34" charset="-120"/>
               </a:rPr>
-              <a:t>HCC shows key hallmarks like immune evasion</a:t>
+              <a:t>HCC shows unique characteristics like immune evasion.</a:t>
             </a:r>
             <a:endParaRPr lang="en-US" sz="1800" dirty="0"/>
           </a:p>
@@ -4937,7 +5023,7 @@
                 <a:ea typeface="Arial" pitchFamily="34" charset="-122"/>
                 <a:cs typeface="Arial" pitchFamily="34" charset="-120"/>
               </a:rPr>
-              <a:t>Immunotherapies improve outcomes for advanced HCC</a:t>
+              <a:t>Immunotherapies have improved advanced HCC outcomes.</a:t>
             </a:r>
             <a:endParaRPr lang="en-US" sz="1800" dirty="0"/>
           </a:p>
@@ -4958,7 +5044,7 @@
                 <a:ea typeface="Arial" pitchFamily="34" charset="-122"/>
                 <a:cs typeface="Arial" pitchFamily="34" charset="-120"/>
               </a:rPr>
-              <a:t>iCCA has distinct hallmarks and precision targets</a:t>
+              <a:t>iCCA has distinct genetic alterations for precision therapy.</a:t>
             </a:r>
             <a:endParaRPr lang="en-US" sz="1800" dirty="0"/>
           </a:p>
@@ -4979,7 +5065,7 @@
                 <a:ea typeface="Arial" pitchFamily="34" charset="-122"/>
                 <a:cs typeface="Arial" pitchFamily="34" charset="-120"/>
               </a:rPr>
-              <a:t>Emerging strategies may enhance liver cancer treatment</a:t>
+              <a:t>Future strategies may enhance liver cancer management.</a:t>
             </a:r>
             <a:endParaRPr lang="en-US" sz="1800" dirty="0"/>
           </a:p>
@@ -5279,7 +5365,7 @@
                 <a:ea typeface="Arial" pitchFamily="34" charset="-122"/>
                 <a:cs typeface="Arial" pitchFamily="34" charset="-120"/>
               </a:rPr>
-              <a:t>Safety assessed by treatment-related adverse events</a:t>
+              <a:t>Pilot study with 8 resectable HCC patients</a:t>
             </a:r>
             <a:endParaRPr lang="en-US" sz="1800" dirty="0"/>
           </a:p>
@@ -5300,7 +5386,7 @@
                 <a:ea typeface="Arial" pitchFamily="34" charset="-122"/>
                 <a:cs typeface="Arial" pitchFamily="34" charset="-120"/>
               </a:rPr>
-              <a:t>One patient achieved complete pathologic response</a:t>
+              <a:t>Safety endpoint: only one grade 3 adverse event</a:t>
             </a:r>
             <a:endParaRPr lang="en-US" sz="1800" dirty="0"/>
           </a:p>
@@ -5321,7 +5407,7 @@
                 <a:ea typeface="Arial" pitchFamily="34" charset="-122"/>
                 <a:cs typeface="Arial" pitchFamily="34" charset="-120"/>
               </a:rPr>
-              <a:t>All resected patients relapse-free at follow-up</a:t>
+              <a:t>All resected patients achieved R0 resection</a:t>
             </a:r>
             <a:endParaRPr lang="en-US" sz="1800" dirty="0"/>
           </a:p>
@@ -5621,7 +5707,7 @@
                 <a:ea typeface="Arial" pitchFamily="34" charset="-122"/>
                 <a:cs typeface="Arial" pitchFamily="34" charset="-120"/>
               </a:rPr>
-              <a:t>Hepatectomy affects anti-PD-1 therapy</a:t>
+              <a:t>Hepatectomy impacts anti-PD-1 therapy</a:t>
             </a:r>
             <a:endParaRPr lang="en-US" sz="1800" dirty="0"/>
           </a:p>
@@ -5642,7 +5728,7 @@
                 <a:ea typeface="Arial" pitchFamily="34" charset="-122"/>
                 <a:cs typeface="Arial" pitchFamily="34" charset="-120"/>
               </a:rPr>
-              <a:t>Mouse model used for HCC study</a:t>
+              <a:t>Study conducted in mouse HCC model</a:t>
             </a:r>
             <a:endParaRPr lang="en-US" sz="1800" dirty="0"/>
           </a:p>
@@ -5963,7 +6049,7 @@
                 <a:ea typeface="Arial" pitchFamily="34" charset="-122"/>
                 <a:cs typeface="Arial" pitchFamily="34" charset="-120"/>
               </a:rPr>
-              <a:t>Higher levels correlate with disease-free survival.</a:t>
+              <a:t>Higher Lactobacillus levels predict disease-free survival.</a:t>
             </a:r>
             <a:endParaRPr lang="en-US" sz="1800" dirty="0"/>
           </a:p>
@@ -5984,7 +6070,7 @@
                 <a:ea typeface="Arial" pitchFamily="34" charset="-122"/>
                 <a:cs typeface="Arial" pitchFamily="34" charset="-120"/>
               </a:rPr>
-              <a:t>Nicotinic acid activates NF-κB pathway.</a:t>
+              <a:t>Nicotinic acid activates NF-κB pathway in T cells.</a:t>
             </a:r>
             <a:endParaRPr lang="en-US" sz="1800" dirty="0"/>
           </a:p>
@@ -6005,7 +6091,7 @@
                 <a:ea typeface="Arial" pitchFamily="34" charset="-122"/>
                 <a:cs typeface="Arial" pitchFamily="34" charset="-120"/>
               </a:rPr>
-              <a:t>Combination therapy inhibits tumor growth.</a:t>
+              <a:t>Combination therapy reduces tumor growth and relapse.</a:t>
             </a:r>
             <a:endParaRPr lang="en-US" sz="1800" dirty="0"/>
           </a:p>
@@ -6026,7 +6112,7 @@
                 <a:ea typeface="Arial" pitchFamily="34" charset="-122"/>
                 <a:cs typeface="Arial" pitchFamily="34" charset="-120"/>
               </a:rPr>
-              <a:t>CD8+ T cells are crucial for efficacy.</a:t>
+              <a:t>CD8+ T cells are crucial for L. johnsonii efficacy.</a:t>
             </a:r>
             <a:endParaRPr lang="en-US" sz="1800" dirty="0"/>
           </a:p>
@@ -6305,7 +6391,7 @@
                 <a:ea typeface="Arial" pitchFamily="34" charset="-122"/>
                 <a:cs typeface="Arial" pitchFamily="34" charset="-120"/>
               </a:rPr>
-              <a:t>CAFs drive immunosuppression in HCC.</a:t>
+              <a:t>CAFs induce immunosuppression in HCC.</a:t>
             </a:r>
             <a:endParaRPr lang="en-US" sz="1800" dirty="0"/>
           </a:p>
@@ -6347,7 +6433,7 @@
                 <a:ea typeface="Arial" pitchFamily="34" charset="-122"/>
                 <a:cs typeface="Arial" pitchFamily="34" charset="-120"/>
               </a:rPr>
-              <a:t>ANGPTL4 enhances tumor immune evasion.</a:t>
+              <a:t>ANGPTL4 enhances PD-L1 expression.</a:t>
             </a:r>
             <a:endParaRPr lang="en-US" sz="1800" dirty="0"/>
           </a:p>
@@ -6389,7 +6475,7 @@
                 <a:ea typeface="Arial" pitchFamily="34" charset="-122"/>
                 <a:cs typeface="Arial" pitchFamily="34" charset="-120"/>
               </a:rPr>
-              <a:t>Combination therapy improves anti-PD-L1 efficacy.</a:t>
+              <a:t>Combination therapy improves immunotherapy outcomes.</a:t>
             </a:r>
             <a:endParaRPr lang="en-US" sz="1800" dirty="0"/>
           </a:p>
@@ -6668,7 +6754,7 @@
                 <a:ea typeface="Arial" pitchFamily="34" charset="-122"/>
                 <a:cs typeface="Arial" pitchFamily="34" charset="-120"/>
               </a:rPr>
-              <a:t>Fc region impacts PD-1 therapy efficacy.</a:t>
+              <a:t>Fc region influences PD-1 therapy efficacy.</a:t>
             </a:r>
             <a:endParaRPr lang="en-US" sz="1800" dirty="0"/>
           </a:p>
@@ -6689,7 +6775,7 @@
                 <a:ea typeface="Arial" pitchFamily="34" charset="-122"/>
                 <a:cs typeface="Arial" pitchFamily="34" charset="-120"/>
               </a:rPr>
-              <a:t>Selective depletion of CD8 T cells in liver.</a:t>
+              <a:t>Depletion of PD-1+ CD8 T cells in liver.</a:t>
             </a:r>
             <a:endParaRPr lang="en-US" sz="1800" dirty="0"/>
           </a:p>
@@ -6710,7 +6796,7 @@
                 <a:ea typeface="Arial" pitchFamily="34" charset="-122"/>
                 <a:cs typeface="Arial" pitchFamily="34" charset="-120"/>
               </a:rPr>
-              <a:t>Fc-dependent mechanism via FcγR III.</a:t>
+              <a:t>Fc-dependent effects on viral titers.</a:t>
             </a:r>
             <a:endParaRPr lang="en-US" sz="1800" dirty="0"/>
           </a:p>
@@ -6752,7 +6838,7 @@
                 <a:ea typeface="Arial" pitchFamily="34" charset="-122"/>
                 <a:cs typeface="Arial" pitchFamily="34" charset="-120"/>
               </a:rPr>
-              <a:t>Implications for liver cancer treatments.</a:t>
+              <a:t>Implications for liver cancer therapies.</a:t>
             </a:r>
             <a:endParaRPr lang="en-US" sz="1800" dirty="0"/>
           </a:p>
@@ -7052,7 +7138,7 @@
                 <a:ea typeface="Arial" pitchFamily="34" charset="-122"/>
                 <a:cs typeface="Arial" pitchFamily="34" charset="-120"/>
               </a:rPr>
-              <a:t>HAIC combined with lenvatinib and PD-1</a:t>
+              <a:t>HAIC combined with lenvatinib and PD-1 inhibitors</a:t>
             </a:r>
             <a:endParaRPr lang="en-US" sz="1800" dirty="0"/>
           </a:p>
@@ -7073,7 +7159,7 @@
                 <a:ea typeface="Arial" pitchFamily="34" charset="-122"/>
                 <a:cs typeface="Arial" pitchFamily="34" charset="-120"/>
               </a:rPr>
-              <a:t>Improved outcomes compared to standard therapy</a:t>
+              <a:t>Comparative efficacy against lenvatinib and PD-1 alone</a:t>
             </a:r>
             <a:endParaRPr lang="en-US" sz="1800" dirty="0"/>
           </a:p>
@@ -7094,7 +7180,7 @@
                 <a:ea typeface="Arial" pitchFamily="34" charset="-122"/>
                 <a:cs typeface="Arial" pitchFamily="34" charset="-120"/>
               </a:rPr>
-              <a:t>Potential for curative-intent strategies</a:t>
+              <a:t>Focus on poor prognosis to curative strategies</a:t>
             </a:r>
             <a:endParaRPr lang="en-US" sz="1800" dirty="0"/>
           </a:p>
@@ -7115,7 +7201,7 @@
                 <a:ea typeface="Arial" pitchFamily="34" charset="-122"/>
                 <a:cs typeface="Arial" pitchFamily="34" charset="-120"/>
               </a:rPr>
-              <a:t>Focus on advanced hepatocellular carcinoma</a:t>
+              <a:t>Potential for improved patient outcomes</a:t>
             </a:r>
             <a:endParaRPr lang="en-US" sz="1800" dirty="0"/>
           </a:p>

--- a/docs/digest-en.pptx
+++ b/docs/digest-en.pptx
@@ -19,9 +19,10 @@
     <p:sldId id="267" r:id="rId13"/>
     <p:sldId id="268" r:id="rId14"/>
     <p:sldId id="269" r:id="rId15"/>
+    <p:sldId id="270" r:id="rId16"/>
   </p:sldIdLst>
   <p:notesMasterIdLst>
-    <p:notesMasterId r:id="rId16"/>
+    <p:notesMasterId r:id="rId17"/>
   </p:notesMasterIdLst>
   <p:sldSz cx="12192000" cy="6858000"/>
   <p:notesSz cx="6858000" cy="12192000"/>
@@ -979,6 +980,94 @@
             <a:fld id="{F7021451-1387-4CA6-816F-3879F97B5CBC}" type="slidenum">
               <a:rPr lang="en-US"/>
               <a:t>14</a:t>
+            </a:fld>
+            <a:endParaRPr lang="en-US"/>
+          </a:p>
+        </p:txBody>
+      </p:sp>
+    </p:spTree>
+    <p:extLst>
+      <p:ext uri="{BB962C8B-B14F-4D97-AF65-F5344CB8AC3E}">
+        <p14:creationId xmlns:p14="http://schemas.microsoft.com/office/powerpoint/2010/main" val="1024086991"/>
+      </p:ext>
+    </p:extLst>
+  </p:cSld>
+  <p:clrMapOvr>
+    <a:masterClrMapping/>
+  </p:clrMapOvr>
+</p:notes>
+</file>
+
+<file path=ppt/notesSlides/notesSlide15.xml><?xml version="1.0" encoding="utf-8"?>
+<p:notes xmlns:a="http://schemas.openxmlformats.org/drawingml/2006/main" xmlns:r="http://schemas.openxmlformats.org/officeDocument/2006/relationships" xmlns:p="http://schemas.openxmlformats.org/presentationml/2006/main">
+  <p:cSld>
+    <p:spTree>
+      <p:nvGrpSpPr>
+        <p:cNvPr id="1" name=""/>
+        <p:cNvGrpSpPr/>
+        <p:nvPr/>
+      </p:nvGrpSpPr>
+      <p:grpSpPr>
+        <a:xfrm>
+          <a:off x="0" y="0"/>
+          <a:ext cx="0" cy="0"/>
+          <a:chOff x="0" y="0"/>
+          <a:chExt cx="0" cy="0"/>
+        </a:xfrm>
+      </p:grpSpPr>
+      <p:sp>
+        <p:nvSpPr>
+          <p:cNvPr id="2" name="Slide Image Placeholder 1"/>
+          <p:cNvSpPr>
+            <a:spLocks noGrp="1" noRot="1" noChangeAspect="1"/>
+          </p:cNvSpPr>
+          <p:nvPr>
+            <p:ph type="sldImg"/>
+          </p:nvPr>
+        </p:nvSpPr>
+        <p:spPr/>
+      </p:sp>
+      <p:sp>
+        <p:nvSpPr>
+          <p:cNvPr id="3" name="Notes Placeholder 2"/>
+          <p:cNvSpPr>
+            <a:spLocks noGrp="1"/>
+          </p:cNvSpPr>
+          <p:nvPr>
+            <p:ph type="body" idx="1"/>
+          </p:nvPr>
+        </p:nvSpPr>
+        <p:spPr/>
+        <p:txBody>
+          <a:bodyPr/>
+          <a:lstStyle/>
+          <a:p>
+            <a:r>
+              <a:rPr lang="en-US" dirty="0"/>
+              <a:t/>
+            </a:r>
+            <a:endParaRPr lang="en-US" dirty="0"/>
+          </a:p>
+        </p:txBody>
+      </p:sp>
+      <p:sp>
+        <p:nvSpPr>
+          <p:cNvPr id="4" name="Slide Number Placeholder 3"/>
+          <p:cNvSpPr>
+            <a:spLocks noGrp="1"/>
+          </p:cNvSpPr>
+          <p:nvPr>
+            <p:ph type="sldNum" sz="quarter" idx="10"/>
+          </p:nvPr>
+        </p:nvSpPr>
+        <p:spPr/>
+        <p:txBody>
+          <a:bodyPr/>
+          <a:lstStyle/>
+          <a:p>
+            <a:fld id="{F7021451-1387-4CA6-816F-3879F97B5CBC}" type="slidenum">
+              <a:rPr lang="en-US"/>
+              <a:t>15</a:t>
             </a:fld>
             <a:endParaRPr lang="en-US"/>
           </a:p>
@@ -2450,7 +2539,7 @@
                 <a:ea typeface="Arial" pitchFamily="34" charset="-122"/>
                 <a:cs typeface="Arial" pitchFamily="34" charset="-120"/>
               </a:rPr>
-              <a:t>Combination of TACE and PD-1 inhibitors</a:t>
+              <a:t>Combination therapy for unresectable HCC</a:t>
             </a:r>
             <a:endParaRPr lang="en-US" sz="1800" dirty="0"/>
           </a:p>
@@ -2471,7 +2560,7 @@
                 <a:ea typeface="Arial" pitchFamily="34" charset="-122"/>
                 <a:cs typeface="Arial" pitchFamily="34" charset="-120"/>
               </a:rPr>
-              <a:t>Phase 2 trial for uHCC patients</a:t>
+              <a:t>Transarterial chemoembolization (TACE) used</a:t>
             </a:r>
             <a:endParaRPr lang="en-US" sz="1800" dirty="0"/>
           </a:p>
@@ -2492,7 +2581,49 @@
                 <a:ea typeface="Arial" pitchFamily="34" charset="-122"/>
                 <a:cs typeface="Arial" pitchFamily="34" charset="-120"/>
               </a:rPr>
-              <a:t>Evaluated efficacy compared to TACE alone</a:t>
+              <a:t>PD-1 inhibitors enhance treatment efficacy</a:t>
+            </a:r>
+            <a:endParaRPr lang="en-US" sz="1800" dirty="0"/>
+          </a:p>
+          <a:p>
+            <a:pPr marL="342900" indent="-342900">
+              <a:spcAft>
+                <a:spcPts val="800"/>
+              </a:spcAft>
+              <a:buSzPct val="100000"/>
+              <a:buChar char="•"/>
+            </a:pPr>
+            <a:r>
+              <a:rPr lang="en-US" sz="1800" dirty="0">
+                <a:solidFill>
+                  <a:srgbClr val="333333"/>
+                </a:solidFill>
+                <a:latin typeface="Arial" pitchFamily="34" charset="0"/>
+                <a:ea typeface="Arial" pitchFamily="34" charset="-122"/>
+                <a:cs typeface="Arial" pitchFamily="34" charset="-120"/>
+              </a:rPr>
+              <a:t>Phase 2 trial demonstrates promising results</a:t>
+            </a:r>
+            <a:endParaRPr lang="en-US" sz="1800" dirty="0"/>
+          </a:p>
+          <a:p>
+            <a:pPr marL="342900" indent="-342900">
+              <a:spcAft>
+                <a:spcPts val="800"/>
+              </a:spcAft>
+              <a:buSzPct val="100000"/>
+              <a:buChar char="•"/>
+            </a:pPr>
+            <a:r>
+              <a:rPr lang="en-US" sz="1800" dirty="0">
+                <a:solidFill>
+                  <a:srgbClr val="333333"/>
+                </a:solidFill>
+                <a:latin typeface="Arial" pitchFamily="34" charset="0"/>
+                <a:ea typeface="Arial" pitchFamily="34" charset="-122"/>
+                <a:cs typeface="Arial" pitchFamily="34" charset="-120"/>
+              </a:rPr>
+              <a:t>Potential for conversion to resectable disease</a:t>
             </a:r>
             <a:endParaRPr lang="en-US" sz="1800" dirty="0"/>
           </a:p>
@@ -2771,7 +2902,7 @@
                 <a:ea typeface="Arial" pitchFamily="34" charset="-122"/>
                 <a:cs typeface="Arial" pitchFamily="34" charset="-120"/>
               </a:rPr>
-              <a:t>Atez+Bev shows 25% ORR in HCC.</a:t>
+              <a:t>Atez+Bev shows efficacy after Dur+Tre</a:t>
             </a:r>
             <a:endParaRPr lang="en-US" sz="1800" dirty="0"/>
           </a:p>
@@ -2792,7 +2923,7 @@
                 <a:ea typeface="Arial" pitchFamily="34" charset="-122"/>
                 <a:cs typeface="Arial" pitchFamily="34" charset="-120"/>
               </a:rPr>
-              <a:t>75% DCR indicates favorable disease control.</a:t>
+              <a:t>ORR 25% and DCR 75% observed</a:t>
             </a:r>
             <a:endParaRPr lang="en-US" sz="1800" dirty="0"/>
           </a:p>
@@ -2813,7 +2944,7 @@
                 <a:ea typeface="Arial" pitchFamily="34" charset="-122"/>
                 <a:cs typeface="Arial" pitchFamily="34" charset="-120"/>
               </a:rPr>
-              <a:t>Adverse events differ between regimens.</a:t>
+              <a:t>Safety profile varies between regimens</a:t>
             </a:r>
             <a:endParaRPr lang="en-US" sz="1800" dirty="0"/>
           </a:p>
@@ -2834,7 +2965,7 @@
                 <a:ea typeface="Arial" pitchFamily="34" charset="-122"/>
                 <a:cs typeface="Arial" pitchFamily="34" charset="-120"/>
               </a:rPr>
-              <a:t>Prior Dur+Tre may enhance immune response.</a:t>
+              <a:t>Prior Dur+Tre may enhance immune response</a:t>
             </a:r>
             <a:endParaRPr lang="en-US" sz="1800" dirty="0"/>
           </a:p>
@@ -2855,7 +2986,7 @@
                 <a:ea typeface="Arial" pitchFamily="34" charset="-122"/>
                 <a:cs typeface="Arial" pitchFamily="34" charset="-120"/>
               </a:rPr>
-              <a:t>Sequential treatment is a viable option.</a:t>
+              <a:t>Common adverse events include pruritus</a:t>
             </a:r>
             <a:endParaRPr lang="en-US" sz="1800" dirty="0"/>
           </a:p>
@@ -3155,7 +3286,7 @@
                 <a:ea typeface="Arial" pitchFamily="34" charset="-122"/>
                 <a:cs typeface="Arial" pitchFamily="34" charset="-120"/>
               </a:rPr>
-              <a:t>EBRT shows different outcomes compared to local ablation.</a:t>
+              <a:t>EBRT compared to local ablation for HCC.</a:t>
             </a:r>
             <a:endParaRPr lang="en-US" sz="1800" dirty="0"/>
           </a:p>
@@ -3176,7 +3307,7 @@
                 <a:ea typeface="Arial" pitchFamily="34" charset="-122"/>
                 <a:cs typeface="Arial" pitchFamily="34" charset="-120"/>
               </a:rPr>
-              <a:t>Meta-analysis evaluates local progression-free survival rates.</a:t>
+              <a:t>Meta-analysis shows local progression-free survival benefits.</a:t>
             </a:r>
             <a:endParaRPr lang="en-US" sz="1800" dirty="0"/>
           </a:p>
@@ -3313,14 +3444,14 @@
           <a:ln/>
         </p:spPr>
         <p:txBody>
-          <a:bodyPr wrap="square" rtlCol="0" anchor="ctr"/>
-          <a:lstStyle/>
-          <a:p>
-            <a:pPr indent="0" marL="0">
-              <a:buNone/>
-            </a:pPr>
-            <a:r>
-              <a:rPr lang="en-US" sz="3000" b="1" dirty="0">
+          <a:bodyPr wrap="square" lIns="0" tIns="0" rIns="0" bIns="0" rtlCol="0" anchor="ctr"/>
+          <a:lstStyle/>
+          <a:p>
+            <a:pPr indent="0" marL="0">
+              <a:buNone/>
+            </a:pPr>
+            <a:r>
+              <a:rPr lang="en-US" sz="2400" b="1" dirty="0">
                 <a:solidFill>
                   <a:srgbClr val="FFFFFF"/>
                 </a:solidFill>
@@ -3328,26 +3459,9 @@
                 <a:ea typeface="Arial" pitchFamily="34" charset="-122"/>
                 <a:cs typeface="Arial" pitchFamily="34" charset="-120"/>
               </a:rPr>
-              <a:t>Overall Insights</a:t>
-            </a:r>
-            <a:endParaRPr lang="en-US" sz="3000" dirty="0"/>
-          </a:p>
-          <a:p>
-            <a:pPr indent="0" marL="0">
-              <a:buNone/>
-            </a:pPr>
-            <a:r>
-              <a:rPr lang="en-US" sz="3000" b="1" dirty="0">
-                <a:solidFill>
-                  <a:srgbClr val="FFFFFF"/>
-                </a:solidFill>
-                <a:latin typeface="Arial" pitchFamily="34" charset="0"/>
-                <a:ea typeface="Arial" pitchFamily="34" charset="-122"/>
-                <a:cs typeface="Arial" pitchFamily="34" charset="-120"/>
-              </a:rPr>
-              <a:t>&amp; Future Directions</a:t>
-            </a:r>
-            <a:endParaRPr lang="en-US" sz="3000" dirty="0"/>
+              <a:t>Overall Insights (1/2)</a:t>
+            </a:r>
+            <a:endParaRPr lang="en-US" sz="2400" dirty="0"/>
           </a:p>
         </p:txBody>
       </p:sp>
@@ -3359,7 +3473,7 @@
         </p:nvSpPr>
         <p:spPr>
           <a:xfrm>
-            <a:off x="731520" y="2560320"/>
+            <a:off x="731520" y="1463040"/>
             <a:ext cx="10515600" cy="0"/>
           </a:xfrm>
           <a:prstGeom prst="rect">
@@ -3374,7 +3488,7 @@
           <a:p>
             <a:pPr indent="0" marL="0">
               <a:lnSpc>
-                <a:spcPct val="160000"/>
+                <a:spcPct val="150000"/>
               </a:lnSpc>
               <a:buNone/>
             </a:pPr>
@@ -3391,7 +3505,7 @@
           <a:p>
             <a:pPr indent="0" marL="0">
               <a:lnSpc>
-                <a:spcPct val="160000"/>
+                <a:spcPct val="150000"/>
               </a:lnSpc>
               <a:buNone/>
             </a:pPr>
@@ -3400,7 +3514,7 @@
           <a:p>
             <a:pPr indent="0" marL="0">
               <a:lnSpc>
-                <a:spcPct val="160000"/>
+                <a:spcPct val="150000"/>
               </a:lnSpc>
               <a:buNone/>
             </a:pPr>
@@ -3417,7 +3531,7 @@
           <a:p>
             <a:pPr indent="0" marL="0">
               <a:lnSpc>
-                <a:spcPct val="160000"/>
+                <a:spcPct val="150000"/>
               </a:lnSpc>
               <a:buNone/>
             </a:pPr>
@@ -3434,7 +3548,7 @@
           <a:p>
             <a:pPr indent="0" marL="0">
               <a:lnSpc>
-                <a:spcPct val="160000"/>
+                <a:spcPct val="150000"/>
               </a:lnSpc>
               <a:buNone/>
             </a:pPr>
@@ -3444,14 +3558,14 @@
                   <a:srgbClr val="FFFFFF"/>
                 </a:solidFill>
               </a:rPr>
-              <a:t>   免疫治療在晚期肝細胞癌（HCC）中顯示出顯著的療效，尤其在早期階段的應用仍需進一步探索。  </a:t>
+              <a:t>   免疫治療在晚期肝細胞癌（HCC）中的應用顯著改善了治療選擇，但在早期階段的最佳使用仍需進一步探索。  </a:t>
             </a:r>
             <a:endParaRPr lang="en-US" sz="1200" dirty="0"/>
           </a:p>
           <a:p>
             <a:pPr indent="0" marL="0">
               <a:lnSpc>
-                <a:spcPct val="160000"/>
+                <a:spcPct val="150000"/>
               </a:lnSpc>
               <a:buNone/>
             </a:pPr>
@@ -3461,14 +3575,14 @@
                   <a:srgbClr val="FFFFFF"/>
                 </a:solidFill>
               </a:rPr>
-              <a:t>   Immunotherapy has shown significant efficacy in advanced hepatocellular carcinoma (HCC), particularly its application in earlier stages remains to be further explored.</a:t>
+              <a:t>   Immunotherapy has significantly improved treatment options for advanced hepatocellular carcinoma (HCC), yet optimal usage in earlier stages remains to be fully explored.</a:t>
             </a:r>
             <a:endParaRPr lang="en-US" sz="1200" dirty="0"/>
           </a:p>
           <a:p>
             <a:pPr indent="0" marL="0">
               <a:lnSpc>
-                <a:spcPct val="160000"/>
+                <a:spcPct val="150000"/>
               </a:lnSpc>
               <a:buNone/>
             </a:pPr>
@@ -3477,7 +3591,7 @@
           <a:p>
             <a:pPr indent="0" marL="0">
               <a:lnSpc>
-                <a:spcPct val="160000"/>
+                <a:spcPct val="150000"/>
               </a:lnSpc>
               <a:buNone/>
             </a:pPr>
@@ -3494,7 +3608,7 @@
           <a:p>
             <a:pPr indent="0" marL="0">
               <a:lnSpc>
-                <a:spcPct val="160000"/>
+                <a:spcPct val="150000"/>
               </a:lnSpc>
               <a:buNone/>
             </a:pPr>
@@ -3511,7 +3625,7 @@
           <a:p>
             <a:pPr indent="0" marL="0">
               <a:lnSpc>
-                <a:spcPct val="160000"/>
+                <a:spcPct val="150000"/>
               </a:lnSpc>
               <a:buNone/>
             </a:pPr>
@@ -3521,14 +3635,14 @@
                   <a:srgbClr val="FFFFFF"/>
                 </a:solidFill>
               </a:rPr>
-              <a:t>   新的療法如新輔助立體定向放射治療結合免疫治療能有效重塑HCC的腫瘤微環境，增強治療反應。  </a:t>
+              <a:t>   新的研究顯示，術前立體定向放射治療結合免疫治療能有效改變HCC的腫瘤微環境，促進治療效果。  </a:t>
             </a:r>
             <a:endParaRPr lang="en-US" sz="1200" dirty="0"/>
           </a:p>
           <a:p>
             <a:pPr indent="0" marL="0">
               <a:lnSpc>
-                <a:spcPct val="160000"/>
+                <a:spcPct val="150000"/>
               </a:lnSpc>
               <a:buNone/>
             </a:pPr>
@@ -3538,14 +3652,14 @@
                   <a:srgbClr val="FFFFFF"/>
                 </a:solidFill>
               </a:rPr>
-              <a:t>   Novel therapies such as neoadjuvant stereotactic body radiation therapy combined with immunotherapy can effectively remodel the HCC tumor microenvironment, enhancing treatment responses.</a:t>
+              <a:t>   Recent studies indicate that neoadjuvant stereotactic body radiation therapy combined with immunotherapy can effectively remodel the tumor microenvironment in HCC, enhancing treatment efficacy.</a:t>
             </a:r>
             <a:endParaRPr lang="en-US" sz="1200" dirty="0"/>
           </a:p>
           <a:p>
             <a:pPr indent="0" marL="0">
               <a:lnSpc>
-                <a:spcPct val="160000"/>
+                <a:spcPct val="150000"/>
               </a:lnSpc>
               <a:buNone/>
             </a:pPr>
@@ -3554,7 +3668,7 @@
           <a:p>
             <a:pPr indent="0" marL="0">
               <a:lnSpc>
-                <a:spcPct val="160000"/>
+                <a:spcPct val="150000"/>
               </a:lnSpc>
               <a:buNone/>
             </a:pPr>
@@ -3571,7 +3685,7 @@
           <a:p>
             <a:pPr indent="0" marL="0">
               <a:lnSpc>
-                <a:spcPct val="160000"/>
+                <a:spcPct val="150000"/>
               </a:lnSpc>
               <a:buNone/>
             </a:pPr>
@@ -3588,7 +3702,7 @@
           <a:p>
             <a:pPr indent="0" marL="0">
               <a:lnSpc>
-                <a:spcPct val="160000"/>
+                <a:spcPct val="150000"/>
               </a:lnSpc>
               <a:buNone/>
             </a:pPr>
@@ -3598,14 +3712,14 @@
                   <a:srgbClr val="FFFFFF"/>
                 </a:solidFill>
               </a:rPr>
-              <a:t>   癌症相關成纖維細胞（CAFs）在HCC中促進免疫抑制，揭示了其作為潛在治療靶點的重要性。  </a:t>
+              <a:t>   癌症相關成纖維細胞（CAFs）在HCC中推動免疫抑制，理解其代謝調控對開發新療法至關重要。  </a:t>
             </a:r>
             <a:endParaRPr lang="en-US" sz="1200" dirty="0"/>
           </a:p>
           <a:p>
             <a:pPr indent="0" marL="0">
               <a:lnSpc>
-                <a:spcPct val="160000"/>
+                <a:spcPct val="150000"/>
               </a:lnSpc>
               <a:buNone/>
             </a:pPr>
@@ -3615,14 +3729,14 @@
                   <a:srgbClr val="FFFFFF"/>
                 </a:solidFill>
               </a:rPr>
-              <a:t>   Cancer-associated fibroblasts (CAFs) promote immunosuppression in HCC, highlighting their importance as potential therapeutic targets.</a:t>
+              <a:t>   Cancer-associated fibroblasts (CAFs) drive immunosuppression in HCC, and understanding their metabolic regulation is crucial for developing new therapeutic strategies.</a:t>
             </a:r>
             <a:endParaRPr lang="en-US" sz="1200" dirty="0"/>
           </a:p>
           <a:p>
             <a:pPr indent="0" marL="0">
               <a:lnSpc>
-                <a:spcPct val="160000"/>
+                <a:spcPct val="150000"/>
               </a:lnSpc>
               <a:buNone/>
             </a:pPr>
@@ -3631,7 +3745,7 @@
           <a:p>
             <a:pPr indent="0" marL="0">
               <a:lnSpc>
-                <a:spcPct val="160000"/>
+                <a:spcPct val="150000"/>
               </a:lnSpc>
               <a:buNone/>
             </a:pPr>
@@ -3648,7 +3762,7 @@
           <a:p>
             <a:pPr indent="0" marL="0">
               <a:lnSpc>
-                <a:spcPct val="160000"/>
+                <a:spcPct val="150000"/>
               </a:lnSpc>
               <a:buNone/>
             </a:pPr>
@@ -3665,7 +3779,7 @@
           <a:p>
             <a:pPr indent="0" marL="0">
               <a:lnSpc>
-                <a:spcPct val="160000"/>
+                <a:spcPct val="150000"/>
               </a:lnSpc>
               <a:buNone/>
             </a:pPr>
@@ -3675,14 +3789,14 @@
                   <a:srgbClr val="FFFFFF"/>
                 </a:solidFill>
               </a:rPr>
-              <a:t>   雖然手術切除對早期HCC有效，但術後復發仍是主要的臨床挑戰，需深入研究其機制。  </a:t>
+              <a:t>   雖然外科切除是早期HCC的有效干預措施，但術後復發仍然是主要的臨床挑戰。  </a:t>
             </a:r>
             <a:endParaRPr lang="en-US" sz="1200" dirty="0"/>
           </a:p>
           <a:p>
             <a:pPr indent="0" marL="0">
               <a:lnSpc>
-                <a:spcPct val="160000"/>
+                <a:spcPct val="150000"/>
               </a:lnSpc>
               <a:buNone/>
             </a:pPr>
@@ -3692,14 +3806,14 @@
                   <a:srgbClr val="FFFFFF"/>
                 </a:solidFill>
               </a:rPr>
-              <a:t>   While surgical resection is effective for early-stage HCC, postoperative recurrence remains a major clinical challenge that requires deeper investigation into its mechanisms.</a:t>
+              <a:t>   While surgical resection is an effective intervention for early-stage HCC, postoperative recurrence remains a significant clinical challenge.</a:t>
             </a:r>
             <a:endParaRPr lang="en-US" sz="1200" dirty="0"/>
           </a:p>
           <a:p>
             <a:pPr indent="0" marL="0">
               <a:lnSpc>
-                <a:spcPct val="160000"/>
+                <a:spcPct val="150000"/>
               </a:lnSpc>
               <a:buNone/>
             </a:pPr>
@@ -3708,7 +3822,7 @@
           <a:p>
             <a:pPr indent="0" marL="0">
               <a:lnSpc>
-                <a:spcPct val="160000"/>
+                <a:spcPct val="150000"/>
               </a:lnSpc>
               <a:buNone/>
             </a:pPr>
@@ -3718,14 +3832,14 @@
                   <a:srgbClr val="FFFFFF"/>
                 </a:solidFill>
               </a:rPr>
-              <a:t>5. **多模態治療策略的必要性**  </a:t>
+              <a:t>5. **多模式治療的前景**  </a:t>
             </a:r>
             <a:endParaRPr lang="en-US" sz="1200" dirty="0"/>
           </a:p>
           <a:p>
             <a:pPr indent="0" marL="0">
               <a:lnSpc>
-                <a:spcPct val="160000"/>
+                <a:spcPct val="150000"/>
               </a:lnSpc>
               <a:buNone/>
             </a:pPr>
@@ -3735,14 +3849,14 @@
                   <a:srgbClr val="FFFFFF"/>
                 </a:solidFill>
               </a:rPr>
-              <a:t>   **Necessity of Multimodal Treatment Strategies**  </a:t>
+              <a:t>   **Prospects of Multimodal Therapy**  </a:t>
             </a:r>
             <a:endParaRPr lang="en-US" sz="1200" dirty="0"/>
           </a:p>
           <a:p>
             <a:pPr indent="0" marL="0">
               <a:lnSpc>
-                <a:spcPct val="160000"/>
+                <a:spcPct val="150000"/>
               </a:lnSpc>
               <a:buNone/>
             </a:pPr>
@@ -3752,14 +3866,14 @@
                   <a:srgbClr val="FFFFFF"/>
                 </a:solidFill>
               </a:rPr>
-              <a:t>   對於不可切除的中晚期HCC，結合局部消融、化療和免疫治療的多模態策略顯示出潛在的療效。  </a:t>
+              <a:t>   結合不同治療方法（如TACE、免疫治療和局部消融）可能為不可切除的HCC提供更佳的治療結果。  </a:t>
             </a:r>
             <a:endParaRPr lang="en-US" sz="1200" dirty="0"/>
           </a:p>
           <a:p>
             <a:pPr indent="0" marL="0">
               <a:lnSpc>
-                <a:spcPct val="160000"/>
+                <a:spcPct val="150000"/>
               </a:lnSpc>
               <a:buNone/>
             </a:pPr>
@@ -3769,418 +3883,7 @@
                   <a:srgbClr val="FFFFFF"/>
                 </a:solidFill>
               </a:rPr>
-              <a:t>   For unresectable intermediate-advanced HCC, multimodal strategies combining local ablation, chemotherapy, and immunotherapy show potential efficacy.</a:t>
-            </a:r>
-            <a:endParaRPr lang="en-US" sz="1200" dirty="0"/>
-          </a:p>
-          <a:p>
-            <a:pPr indent="0" marL="0">
-              <a:lnSpc>
-                <a:spcPct val="160000"/>
-              </a:lnSpc>
-              <a:buNone/>
-            </a:pPr>
-            <a:endParaRPr lang="en-US" sz="1200" dirty="0"/>
-          </a:p>
-          <a:p>
-            <a:pPr indent="0" marL="0">
-              <a:lnSpc>
-                <a:spcPct val="160000"/>
-              </a:lnSpc>
-              <a:buNone/>
-            </a:pPr>
-            <a:r>
-              <a:rPr lang="en-US" sz="1200" dirty="0">
-                <a:solidFill>
-                  <a:srgbClr val="FFFFFF"/>
-                </a:solidFill>
-              </a:rPr>
-              <a:t>### 未來研究方向 (Future Research Directions)</a:t>
-            </a:r>
-            <a:endParaRPr lang="en-US" sz="1200" dirty="0"/>
-          </a:p>
-          <a:p>
-            <a:pPr indent="0" marL="0">
-              <a:lnSpc>
-                <a:spcPct val="160000"/>
-              </a:lnSpc>
-              <a:buNone/>
-            </a:pPr>
-            <a:endParaRPr lang="en-US" sz="1200" dirty="0"/>
-          </a:p>
-          <a:p>
-            <a:pPr indent="0" marL="0">
-              <a:lnSpc>
-                <a:spcPct val="160000"/>
-              </a:lnSpc>
-              <a:buNone/>
-            </a:pPr>
-            <a:r>
-              <a:rPr lang="en-US" sz="1200" dirty="0">
-                <a:solidFill>
-                  <a:srgbClr val="FFFFFF"/>
-                </a:solidFill>
-              </a:rPr>
-              <a:t>1. **早期階段免疫治療的最佳化**  </a:t>
-            </a:r>
-            <a:endParaRPr lang="en-US" sz="1200" dirty="0"/>
-          </a:p>
-          <a:p>
-            <a:pPr indent="0" marL="0">
-              <a:lnSpc>
-                <a:spcPct val="160000"/>
-              </a:lnSpc>
-              <a:buNone/>
-            </a:pPr>
-            <a:r>
-              <a:rPr lang="en-US" sz="1200" dirty="0">
-                <a:solidFill>
-                  <a:srgbClr val="FFFFFF"/>
-                </a:solidFill>
-              </a:rPr>
-              <a:t>   **Optimization of Immunotherapy in Early Stages**  </a:t>
-            </a:r>
-            <a:endParaRPr lang="en-US" sz="1200" dirty="0"/>
-          </a:p>
-          <a:p>
-            <a:pPr indent="0" marL="0">
-              <a:lnSpc>
-                <a:spcPct val="160000"/>
-              </a:lnSpc>
-              <a:buNone/>
-            </a:pPr>
-            <a:r>
-              <a:rPr lang="en-US" sz="1200" dirty="0">
-                <a:solidFill>
-                  <a:srgbClr val="FFFFFF"/>
-                </a:solidFill>
-              </a:rPr>
-              <a:t>   需進一步研究如何在早期肝細胞癌中最佳化免疫治療的使用，以提高療效。  </a:t>
-            </a:r>
-            <a:endParaRPr lang="en-US" sz="1200" dirty="0"/>
-          </a:p>
-          <a:p>
-            <a:pPr indent="0" marL="0">
-              <a:lnSpc>
-                <a:spcPct val="160000"/>
-              </a:lnSpc>
-              <a:buNone/>
-            </a:pPr>
-            <a:r>
-              <a:rPr lang="en-US" sz="1200" dirty="0">
-                <a:solidFill>
-                  <a:srgbClr val="FFFFFF"/>
-                </a:solidFill>
-              </a:rPr>
-              <a:t>   Further research is needed to optimize the use of immunotherapy in early-stage hepatocellular carcinoma to enhance efficacy.</a:t>
-            </a:r>
-            <a:endParaRPr lang="en-US" sz="1200" dirty="0"/>
-          </a:p>
-          <a:p>
-            <a:pPr indent="0" marL="0">
-              <a:lnSpc>
-                <a:spcPct val="160000"/>
-              </a:lnSpc>
-              <a:buNone/>
-            </a:pPr>
-            <a:endParaRPr lang="en-US" sz="1200" dirty="0"/>
-          </a:p>
-          <a:p>
-            <a:pPr indent="0" marL="0">
-              <a:lnSpc>
-                <a:spcPct val="160000"/>
-              </a:lnSpc>
-              <a:buNone/>
-            </a:pPr>
-            <a:r>
-              <a:rPr lang="en-US" sz="1200" dirty="0">
-                <a:solidFill>
-                  <a:srgbClr val="FFFFFF"/>
-                </a:solidFill>
-              </a:rPr>
-              <a:t>2. **腫瘤微環境的深入分析**  </a:t>
-            </a:r>
-            <a:endParaRPr lang="en-US" sz="1200" dirty="0"/>
-          </a:p>
-          <a:p>
-            <a:pPr indent="0" marL="0">
-              <a:lnSpc>
-                <a:spcPct val="160000"/>
-              </a:lnSpc>
-              <a:buNone/>
-            </a:pPr>
-            <a:r>
-              <a:rPr lang="en-US" sz="1200" dirty="0">
-                <a:solidFill>
-                  <a:srgbClr val="FFFFFF"/>
-                </a:solidFill>
-              </a:rPr>
-              <a:t>   **In-depth Analysis of Tumor Microenvironment**  </a:t>
-            </a:r>
-            <a:endParaRPr lang="en-US" sz="1200" dirty="0"/>
-          </a:p>
-          <a:p>
-            <a:pPr indent="0" marL="0">
-              <a:lnSpc>
-                <a:spcPct val="160000"/>
-              </a:lnSpc>
-              <a:buNone/>
-            </a:pPr>
-            <a:r>
-              <a:rPr lang="en-US" sz="1200" dirty="0">
-                <a:solidFill>
-                  <a:srgbClr val="FFFFFF"/>
-                </a:solidFill>
-              </a:rPr>
-              <a:t>   對腫瘤微環境的組成及其對免疫反應的影響進行深入研究，以開發新療法。  </a:t>
-            </a:r>
-            <a:endParaRPr lang="en-US" sz="1200" dirty="0"/>
-          </a:p>
-          <a:p>
-            <a:pPr indent="0" marL="0">
-              <a:lnSpc>
-                <a:spcPct val="160000"/>
-              </a:lnSpc>
-              <a:buNone/>
-            </a:pPr>
-            <a:r>
-              <a:rPr lang="en-US" sz="1200" dirty="0">
-                <a:solidFill>
-                  <a:srgbClr val="FFFFFF"/>
-                </a:solidFill>
-              </a:rPr>
-              <a:t>   In-depth studies on the composition of the tumor microenvironment and its impact on immune responses are essential for developing new therapies.</a:t>
-            </a:r>
-            <a:endParaRPr lang="en-US" sz="1200" dirty="0"/>
-          </a:p>
-          <a:p>
-            <a:pPr indent="0" marL="0">
-              <a:lnSpc>
-                <a:spcPct val="160000"/>
-              </a:lnSpc>
-              <a:buNone/>
-            </a:pPr>
-            <a:endParaRPr lang="en-US" sz="1200" dirty="0"/>
-          </a:p>
-          <a:p>
-            <a:pPr indent="0" marL="0">
-              <a:lnSpc>
-                <a:spcPct val="160000"/>
-              </a:lnSpc>
-              <a:buNone/>
-            </a:pPr>
-            <a:r>
-              <a:rPr lang="en-US" sz="1200" dirty="0">
-                <a:solidFill>
-                  <a:srgbClr val="FFFFFF"/>
-                </a:solidFill>
-              </a:rPr>
-              <a:t>3. **癌症相關成纖維細胞的代謝調控**  </a:t>
-            </a:r>
-            <a:endParaRPr lang="en-US" sz="1200" dirty="0"/>
-          </a:p>
-          <a:p>
-            <a:pPr indent="0" marL="0">
-              <a:lnSpc>
-                <a:spcPct val="160000"/>
-              </a:lnSpc>
-              <a:buNone/>
-            </a:pPr>
-            <a:r>
-              <a:rPr lang="en-US" sz="1200" dirty="0">
-                <a:solidFill>
-                  <a:srgbClr val="FFFFFF"/>
-                </a:solidFill>
-              </a:rPr>
-              <a:t>   **Metabolic Regulation of Cancer-Associated Fibroblasts**  </a:t>
-            </a:r>
-            <a:endParaRPr lang="en-US" sz="1200" dirty="0"/>
-          </a:p>
-          <a:p>
-            <a:pPr indent="0" marL="0">
-              <a:lnSpc>
-                <a:spcPct val="160000"/>
-              </a:lnSpc>
-              <a:buNone/>
-            </a:pPr>
-            <a:r>
-              <a:rPr lang="en-US" sz="1200" dirty="0">
-                <a:solidFill>
-                  <a:srgbClr val="FFFFFF"/>
-                </a:solidFill>
-              </a:rPr>
-              <a:t>   探索癌症相關成纖維細胞的代謝調控機制，以尋找新的免疫治療靶點。  </a:t>
-            </a:r>
-            <a:endParaRPr lang="en-US" sz="1200" dirty="0"/>
-          </a:p>
-          <a:p>
-            <a:pPr indent="0" marL="0">
-              <a:lnSpc>
-                <a:spcPct val="160000"/>
-              </a:lnSpc>
-              <a:buNone/>
-            </a:pPr>
-            <a:r>
-              <a:rPr lang="en-US" sz="1200" dirty="0">
-                <a:solidFill>
-                  <a:srgbClr val="FFFFFF"/>
-                </a:solidFill>
-              </a:rPr>
-              <a:t>   Exploring the metabolic regulatory mechanisms of cancer-associated fibroblasts to identify new immunotherapeutic targets is crucial.</a:t>
-            </a:r>
-            <a:endParaRPr lang="en-US" sz="1200" dirty="0"/>
-          </a:p>
-          <a:p>
-            <a:pPr indent="0" marL="0">
-              <a:lnSpc>
-                <a:spcPct val="160000"/>
-              </a:lnSpc>
-              <a:buNone/>
-            </a:pPr>
-            <a:endParaRPr lang="en-US" sz="1200" dirty="0"/>
-          </a:p>
-          <a:p>
-            <a:pPr indent="0" marL="0">
-              <a:lnSpc>
-                <a:spcPct val="160000"/>
-              </a:lnSpc>
-              <a:buNone/>
-            </a:pPr>
-            <a:r>
-              <a:rPr lang="en-US" sz="1200" dirty="0">
-                <a:solidFill>
-                  <a:srgbClr val="FFFFFF"/>
-                </a:solidFill>
-              </a:rPr>
-              <a:t>4. **多模態治療的臨床試驗**  </a:t>
-            </a:r>
-            <a:endParaRPr lang="en-US" sz="1200" dirty="0"/>
-          </a:p>
-          <a:p>
-            <a:pPr indent="0" marL="0">
-              <a:lnSpc>
-                <a:spcPct val="160000"/>
-              </a:lnSpc>
-              <a:buNone/>
-            </a:pPr>
-            <a:r>
-              <a:rPr lang="en-US" sz="1200" dirty="0">
-                <a:solidFill>
-                  <a:srgbClr val="FFFFFF"/>
-                </a:solidFill>
-              </a:rPr>
-              <a:t>   **Clinical Trials on Multimodal Treatments**  </a:t>
-            </a:r>
-            <a:endParaRPr lang="en-US" sz="1200" dirty="0"/>
-          </a:p>
-          <a:p>
-            <a:pPr indent="0" marL="0">
-              <a:lnSpc>
-                <a:spcPct val="160000"/>
-              </a:lnSpc>
-              <a:buNone/>
-            </a:pPr>
-            <a:r>
-              <a:rPr lang="en-US" sz="1200" dirty="0">
-                <a:solidFill>
-                  <a:srgbClr val="FFFFFF"/>
-                </a:solidFill>
-              </a:rPr>
-              <a:t>   設計針對不可切除HCC的多模態治療的臨床試驗，以評估其安全性和有效性。  </a:t>
-            </a:r>
-            <a:endParaRPr lang="en-US" sz="1200" dirty="0"/>
-          </a:p>
-          <a:p>
-            <a:pPr indent="0" marL="0">
-              <a:lnSpc>
-                <a:spcPct val="160000"/>
-              </a:lnSpc>
-              <a:buNone/>
-            </a:pPr>
-            <a:r>
-              <a:rPr lang="en-US" sz="1200" dirty="0">
-                <a:solidFill>
-                  <a:srgbClr val="FFFFFF"/>
-                </a:solidFill>
-              </a:rPr>
-              <a:t>   Designing clinical trials for multimodal treatments targeting unresectable HCC to evaluate their safety and efficacy is essential.</a:t>
-            </a:r>
-            <a:endParaRPr lang="en-US" sz="1200" dirty="0"/>
-          </a:p>
-          <a:p>
-            <a:pPr indent="0" marL="0">
-              <a:lnSpc>
-                <a:spcPct val="160000"/>
-              </a:lnSpc>
-              <a:buNone/>
-            </a:pPr>
-            <a:endParaRPr lang="en-US" sz="1200" dirty="0"/>
-          </a:p>
-          <a:p>
-            <a:pPr indent="0" marL="0">
-              <a:lnSpc>
-                <a:spcPct val="160000"/>
-              </a:lnSpc>
-              <a:buNone/>
-            </a:pPr>
-            <a:r>
-              <a:rPr lang="en-US" sz="1200" dirty="0">
-                <a:solidFill>
-                  <a:srgbClr val="FFFFFF"/>
-                </a:solidFill>
-              </a:rPr>
-              <a:t>5. **個體化治療策略的發展**  </a:t>
-            </a:r>
-            <a:endParaRPr lang="en-US" sz="1200" dirty="0"/>
-          </a:p>
-          <a:p>
-            <a:pPr indent="0" marL="0">
-              <a:lnSpc>
-                <a:spcPct val="160000"/>
-              </a:lnSpc>
-              <a:buNone/>
-            </a:pPr>
-            <a:r>
-              <a:rPr lang="en-US" sz="1200" dirty="0">
-                <a:solidFill>
-                  <a:srgbClr val="FFFFFF"/>
-                </a:solidFill>
-              </a:rPr>
-              <a:t>   **Development of Personalized Treatment Strategies**  </a:t>
-            </a:r>
-            <a:endParaRPr lang="en-US" sz="1200" dirty="0"/>
-          </a:p>
-          <a:p>
-            <a:pPr indent="0" marL="0">
-              <a:lnSpc>
-                <a:spcPct val="160000"/>
-              </a:lnSpc>
-              <a:buNone/>
-            </a:pPr>
-            <a:r>
-              <a:rPr lang="en-US" sz="1200" dirty="0">
-                <a:solidFill>
-                  <a:srgbClr val="FFFFFF"/>
-                </a:solidFill>
-              </a:rPr>
-              <a:t>   基於患者的基因組學和腫瘤特徵，發展個體化的治療策略以提高治療效果。  </a:t>
-            </a:r>
-            <a:endParaRPr lang="en-US" sz="1200" dirty="0"/>
-          </a:p>
-          <a:p>
-            <a:pPr indent="0" marL="0">
-              <a:lnSpc>
-                <a:spcPct val="160000"/>
-              </a:lnSpc>
-              <a:buNone/>
-            </a:pPr>
-            <a:r>
-              <a:rPr lang="en-US" sz="1200" dirty="0">
-                <a:solidFill>
-                  <a:srgbClr val="FFFFFF"/>
-                </a:solidFill>
-              </a:rPr>
-              <a:t>   Developing personalized treatment strategies based on patient genomics and tumor characteristics to improve treatment outcomes is vital.</a:t>
+              <a:t>   Combining various treatment modalities (such as TACE, immunotherapy, and local ablation) may offer better outcomes for unresectable HCC.</a:t>
             </a:r>
             <a:endParaRPr lang="en-US" sz="1200" dirty="0"/>
           </a:p>
@@ -4197,6 +3900,537 @@
 <file path=ppt/slides/slide14.xml><?xml version="1.0" encoding="utf-8"?>
 <p:sld xmlns:a="http://schemas.openxmlformats.org/drawingml/2006/main" xmlns:r="http://schemas.openxmlformats.org/officeDocument/2006/relationships" xmlns:p="http://schemas.openxmlformats.org/presentationml/2006/main">
   <p:cSld name="Slide 14">
+    <p:bg>
+      <p:bgPr>
+        <a:solidFill>
+          <a:srgbClr val="7F1D1D"/>
+        </a:solidFill>
+      </p:bgPr>
+    </p:bg>
+    <p:spTree>
+      <p:nvGrpSpPr>
+        <p:cNvPr id="1" name=""/>
+        <p:cNvGrpSpPr/>
+        <p:nvPr/>
+      </p:nvGrpSpPr>
+      <p:grpSpPr>
+        <a:xfrm>
+          <a:off x="0" y="0"/>
+          <a:ext cx="0" cy="0"/>
+          <a:chOff x="0" y="0"/>
+          <a:chExt cx="0" cy="0"/>
+        </a:xfrm>
+      </p:grpSpPr>
+      <p:sp>
+        <p:nvSpPr>
+          <p:cNvPr id="2" name="Text 0"/>
+          <p:cNvSpPr/>
+          <p:nvPr/>
+        </p:nvSpPr>
+        <p:spPr>
+          <a:xfrm>
+            <a:off x="731520" y="365760"/>
+            <a:ext cx="5486400" cy="0"/>
+          </a:xfrm>
+          <a:prstGeom prst="rect">
+            <a:avLst/>
+          </a:prstGeom>
+          <a:noFill/>
+          <a:ln/>
+        </p:spPr>
+        <p:txBody>
+          <a:bodyPr wrap="square" lIns="0" tIns="0" rIns="0" bIns="0" rtlCol="0" anchor="ctr"/>
+          <a:lstStyle/>
+          <a:p>
+            <a:pPr indent="0" marL="0">
+              <a:buNone/>
+            </a:pPr>
+            <a:r>
+              <a:rPr lang="en-US" sz="900" spc="600" kern="0" dirty="0">
+                <a:solidFill>
+                  <a:srgbClr val="888888"/>
+                </a:solidFill>
+              </a:rPr>
+              <a:t>SYNTHESIS</a:t>
+            </a:r>
+            <a:endParaRPr lang="en-US" sz="900" dirty="0"/>
+          </a:p>
+        </p:txBody>
+      </p:sp>
+      <p:sp>
+        <p:nvSpPr>
+          <p:cNvPr id="3" name="Text 1"/>
+          <p:cNvSpPr/>
+          <p:nvPr/>
+        </p:nvSpPr>
+        <p:spPr>
+          <a:xfrm>
+            <a:off x="731520" y="822960"/>
+            <a:ext cx="10058400" cy="0"/>
+          </a:xfrm>
+          <a:prstGeom prst="rect">
+            <a:avLst/>
+          </a:prstGeom>
+          <a:noFill/>
+          <a:ln/>
+        </p:spPr>
+        <p:txBody>
+          <a:bodyPr wrap="square" lIns="0" tIns="0" rIns="0" bIns="0" rtlCol="0" anchor="ctr"/>
+          <a:lstStyle/>
+          <a:p>
+            <a:pPr indent="0" marL="0">
+              <a:buNone/>
+            </a:pPr>
+            <a:r>
+              <a:rPr lang="en-US" sz="2400" b="1" dirty="0">
+                <a:solidFill>
+                  <a:srgbClr val="FFFFFF"/>
+                </a:solidFill>
+                <a:latin typeface="Arial" pitchFamily="34" charset="0"/>
+                <a:ea typeface="Arial" pitchFamily="34" charset="-122"/>
+                <a:cs typeface="Arial" pitchFamily="34" charset="-120"/>
+              </a:rPr>
+              <a:t>Future Directions (2/2)</a:t>
+            </a:r>
+            <a:endParaRPr lang="en-US" sz="2400" dirty="0"/>
+          </a:p>
+        </p:txBody>
+      </p:sp>
+      <p:sp>
+        <p:nvSpPr>
+          <p:cNvPr id="4" name="Text 2"/>
+          <p:cNvSpPr/>
+          <p:nvPr/>
+        </p:nvSpPr>
+        <p:spPr>
+          <a:xfrm>
+            <a:off x="731520" y="1463040"/>
+            <a:ext cx="10515600" cy="0"/>
+          </a:xfrm>
+          <a:prstGeom prst="rect">
+            <a:avLst/>
+          </a:prstGeom>
+          <a:noFill/>
+          <a:ln/>
+        </p:spPr>
+        <p:txBody>
+          <a:bodyPr wrap="square" rtlCol="0" anchor="ctr"/>
+          <a:lstStyle/>
+          <a:p>
+            <a:pPr indent="0" marL="0">
+              <a:lnSpc>
+                <a:spcPct val="150000"/>
+              </a:lnSpc>
+              <a:buNone/>
+            </a:pPr>
+            <a:r>
+              <a:rPr lang="en-US" sz="1200" dirty="0">
+                <a:solidFill>
+                  <a:srgbClr val="FFFFFF"/>
+                </a:solidFill>
+              </a:rPr>
+              <a:t>### 未來研究方向 (Future Research Directions)</a:t>
+            </a:r>
+            <a:endParaRPr lang="en-US" sz="1200" dirty="0"/>
+          </a:p>
+          <a:p>
+            <a:pPr indent="0" marL="0">
+              <a:lnSpc>
+                <a:spcPct val="150000"/>
+              </a:lnSpc>
+              <a:buNone/>
+            </a:pPr>
+            <a:endParaRPr lang="en-US" sz="1200" dirty="0"/>
+          </a:p>
+          <a:p>
+            <a:pPr indent="0" marL="0">
+              <a:lnSpc>
+                <a:spcPct val="150000"/>
+              </a:lnSpc>
+              <a:buNone/>
+            </a:pPr>
+            <a:r>
+              <a:rPr lang="en-US" sz="1200" dirty="0">
+                <a:solidFill>
+                  <a:srgbClr val="FFFFFF"/>
+                </a:solidFill>
+              </a:rPr>
+              <a:t>1. **早期階段免疫治療的最佳化**  </a:t>
+            </a:r>
+            <a:endParaRPr lang="en-US" sz="1200" dirty="0"/>
+          </a:p>
+          <a:p>
+            <a:pPr indent="0" marL="0">
+              <a:lnSpc>
+                <a:spcPct val="150000"/>
+              </a:lnSpc>
+              <a:buNone/>
+            </a:pPr>
+            <a:r>
+              <a:rPr lang="en-US" sz="1200" dirty="0">
+                <a:solidFill>
+                  <a:srgbClr val="FFFFFF"/>
+                </a:solidFill>
+              </a:rPr>
+              <a:t>   **Optimization of Immunotherapy in Early Stages**  </a:t>
+            </a:r>
+            <a:endParaRPr lang="en-US" sz="1200" dirty="0"/>
+          </a:p>
+          <a:p>
+            <a:pPr indent="0" marL="0">
+              <a:lnSpc>
+                <a:spcPct val="150000"/>
+              </a:lnSpc>
+              <a:buNone/>
+            </a:pPr>
+            <a:r>
+              <a:rPr lang="en-US" sz="1200" dirty="0">
+                <a:solidFill>
+                  <a:srgbClr val="FFFFFF"/>
+                </a:solidFill>
+              </a:rPr>
+              <a:t>   需要進一步研究以確定免疫治療在早期HCC中的最佳使用時機和方式。  </a:t>
+            </a:r>
+            <a:endParaRPr lang="en-US" sz="1200" dirty="0"/>
+          </a:p>
+          <a:p>
+            <a:pPr indent="0" marL="0">
+              <a:lnSpc>
+                <a:spcPct val="150000"/>
+              </a:lnSpc>
+              <a:buNone/>
+            </a:pPr>
+            <a:r>
+              <a:rPr lang="en-US" sz="1200" dirty="0">
+                <a:solidFill>
+                  <a:srgbClr val="FFFFFF"/>
+                </a:solidFill>
+              </a:rPr>
+              <a:t>   Further studies are needed to determine the optimal timing and methods for immunotherapy in early-stage HCC.</a:t>
+            </a:r>
+            <a:endParaRPr lang="en-US" sz="1200" dirty="0"/>
+          </a:p>
+          <a:p>
+            <a:pPr indent="0" marL="0">
+              <a:lnSpc>
+                <a:spcPct val="150000"/>
+              </a:lnSpc>
+              <a:buNone/>
+            </a:pPr>
+            <a:endParaRPr lang="en-US" sz="1200" dirty="0"/>
+          </a:p>
+          <a:p>
+            <a:pPr indent="0" marL="0">
+              <a:lnSpc>
+                <a:spcPct val="150000"/>
+              </a:lnSpc>
+              <a:buNone/>
+            </a:pPr>
+            <a:r>
+              <a:rPr lang="en-US" sz="1200" dirty="0">
+                <a:solidFill>
+                  <a:srgbClr val="FFFFFF"/>
+                </a:solidFill>
+              </a:rPr>
+              <a:t>2. **腫瘤微環境的深入分析**  </a:t>
+            </a:r>
+            <a:endParaRPr lang="en-US" sz="1200" dirty="0"/>
+          </a:p>
+          <a:p>
+            <a:pPr indent="0" marL="0">
+              <a:lnSpc>
+                <a:spcPct val="150000"/>
+              </a:lnSpc>
+              <a:buNone/>
+            </a:pPr>
+            <a:r>
+              <a:rPr lang="en-US" sz="1200" dirty="0">
+                <a:solidFill>
+                  <a:srgbClr val="FFFFFF"/>
+                </a:solidFill>
+              </a:rPr>
+              <a:t>   **In-Depth Analysis of Tumor Microenvironment**  </a:t>
+            </a:r>
+            <a:endParaRPr lang="en-US" sz="1200" dirty="0"/>
+          </a:p>
+          <a:p>
+            <a:pPr indent="0" marL="0">
+              <a:lnSpc>
+                <a:spcPct val="150000"/>
+              </a:lnSpc>
+              <a:buNone/>
+            </a:pPr>
+            <a:r>
+              <a:rPr lang="en-US" sz="1200" dirty="0">
+                <a:solidFill>
+                  <a:srgbClr val="FFFFFF"/>
+                </a:solidFill>
+              </a:rPr>
+              <a:t>   研究腫瘤微環境中不同細胞類型的相互作用及其對免疫治療反應的影響。  </a:t>
+            </a:r>
+            <a:endParaRPr lang="en-US" sz="1200" dirty="0"/>
+          </a:p>
+          <a:p>
+            <a:pPr indent="0" marL="0">
+              <a:lnSpc>
+                <a:spcPct val="150000"/>
+              </a:lnSpc>
+              <a:buNone/>
+            </a:pPr>
+            <a:r>
+              <a:rPr lang="en-US" sz="1200" dirty="0">
+                <a:solidFill>
+                  <a:srgbClr val="FFFFFF"/>
+                </a:solidFill>
+              </a:rPr>
+              <a:t>   Investigate the interactions of different cell types within the tumor microenvironment and their impact on responses to immunotherapy.</a:t>
+            </a:r>
+            <a:endParaRPr lang="en-US" sz="1200" dirty="0"/>
+          </a:p>
+          <a:p>
+            <a:pPr indent="0" marL="0">
+              <a:lnSpc>
+                <a:spcPct val="150000"/>
+              </a:lnSpc>
+              <a:buNone/>
+            </a:pPr>
+            <a:endParaRPr lang="en-US" sz="1200" dirty="0"/>
+          </a:p>
+          <a:p>
+            <a:pPr indent="0" marL="0">
+              <a:lnSpc>
+                <a:spcPct val="150000"/>
+              </a:lnSpc>
+              <a:buNone/>
+            </a:pPr>
+            <a:r>
+              <a:rPr lang="en-US" sz="1200" dirty="0">
+                <a:solidFill>
+                  <a:srgbClr val="FFFFFF"/>
+                </a:solidFill>
+              </a:rPr>
+              <a:t>3. **新型治療靶點的發掘**  </a:t>
+            </a:r>
+            <a:endParaRPr lang="en-US" sz="1200" dirty="0"/>
+          </a:p>
+          <a:p>
+            <a:pPr indent="0" marL="0">
+              <a:lnSpc>
+                <a:spcPct val="150000"/>
+              </a:lnSpc>
+              <a:buNone/>
+            </a:pPr>
+            <a:r>
+              <a:rPr lang="en-US" sz="1200" dirty="0">
+                <a:solidFill>
+                  <a:srgbClr val="FFFFFF"/>
+                </a:solidFill>
+              </a:rPr>
+              <a:t>   **Discovery of Novel Therapeutic Targets**  </a:t>
+            </a:r>
+            <a:endParaRPr lang="en-US" sz="1200" dirty="0"/>
+          </a:p>
+          <a:p>
+            <a:pPr indent="0" marL="0">
+              <a:lnSpc>
+                <a:spcPct val="150000"/>
+              </a:lnSpc>
+              <a:buNone/>
+            </a:pPr>
+            <a:r>
+              <a:rPr lang="en-US" sz="1200" dirty="0">
+                <a:solidFill>
+                  <a:srgbClr val="FFFFFF"/>
+                </a:solidFill>
+              </a:rPr>
+              <a:t>   探索癌症相關成纖維細胞及其代謝途徑作為新療法的潛在靶點。  </a:t>
+            </a:r>
+            <a:endParaRPr lang="en-US" sz="1200" dirty="0"/>
+          </a:p>
+          <a:p>
+            <a:pPr indent="0" marL="0">
+              <a:lnSpc>
+                <a:spcPct val="150000"/>
+              </a:lnSpc>
+              <a:buNone/>
+            </a:pPr>
+            <a:r>
+              <a:rPr lang="en-US" sz="1200" dirty="0">
+                <a:solidFill>
+                  <a:srgbClr val="FFFFFF"/>
+                </a:solidFill>
+              </a:rPr>
+              <a:t>   Explore cancer-associated fibroblasts and their metabolic pathways as potential novel therapeutic targets.</a:t>
+            </a:r>
+            <a:endParaRPr lang="en-US" sz="1200" dirty="0"/>
+          </a:p>
+          <a:p>
+            <a:pPr indent="0" marL="0">
+              <a:lnSpc>
+                <a:spcPct val="150000"/>
+              </a:lnSpc>
+              <a:buNone/>
+            </a:pPr>
+            <a:endParaRPr lang="en-US" sz="1200" dirty="0"/>
+          </a:p>
+          <a:p>
+            <a:pPr indent="0" marL="0">
+              <a:lnSpc>
+                <a:spcPct val="150000"/>
+              </a:lnSpc>
+              <a:buNone/>
+            </a:pPr>
+            <a:r>
+              <a:rPr lang="en-US" sz="1200" dirty="0">
+                <a:solidFill>
+                  <a:srgbClr val="FFFFFF"/>
+                </a:solidFill>
+              </a:rPr>
+              <a:t>4. **多模式治療的臨床試驗**  </a:t>
+            </a:r>
+            <a:endParaRPr lang="en-US" sz="1200" dirty="0"/>
+          </a:p>
+          <a:p>
+            <a:pPr indent="0" marL="0">
+              <a:lnSpc>
+                <a:spcPct val="150000"/>
+              </a:lnSpc>
+              <a:buNone/>
+            </a:pPr>
+            <a:r>
+              <a:rPr lang="en-US" sz="1200" dirty="0">
+                <a:solidFill>
+                  <a:srgbClr val="FFFFFF"/>
+                </a:solidFill>
+              </a:rPr>
+              <a:t>   **Clinical Trials for Multimodal Therapies**  </a:t>
+            </a:r>
+            <a:endParaRPr lang="en-US" sz="1200" dirty="0"/>
+          </a:p>
+          <a:p>
+            <a:pPr indent="0" marL="0">
+              <a:lnSpc>
+                <a:spcPct val="150000"/>
+              </a:lnSpc>
+              <a:buNone/>
+            </a:pPr>
+            <a:r>
+              <a:rPr lang="en-US" sz="1200" dirty="0">
+                <a:solidFill>
+                  <a:srgbClr val="FFFFFF"/>
+                </a:solidFill>
+              </a:rPr>
+              <a:t>   設計臨床試驗以評估多種治療組合在不可切除HCC中的療效和安全性。  </a:t>
+            </a:r>
+            <a:endParaRPr lang="en-US" sz="1200" dirty="0"/>
+          </a:p>
+          <a:p>
+            <a:pPr indent="0" marL="0">
+              <a:lnSpc>
+                <a:spcPct val="150000"/>
+              </a:lnSpc>
+              <a:buNone/>
+            </a:pPr>
+            <a:r>
+              <a:rPr lang="en-US" sz="1200" dirty="0">
+                <a:solidFill>
+                  <a:srgbClr val="FFFFFF"/>
+                </a:solidFill>
+              </a:rPr>
+              <a:t>   Design clinical trials to assess the efficacy and safety of various treatment combinations in unresectable HCC.</a:t>
+            </a:r>
+            <a:endParaRPr lang="en-US" sz="1200" dirty="0"/>
+          </a:p>
+          <a:p>
+            <a:pPr indent="0" marL="0">
+              <a:lnSpc>
+                <a:spcPct val="150000"/>
+              </a:lnSpc>
+              <a:buNone/>
+            </a:pPr>
+            <a:endParaRPr lang="en-US" sz="1200" dirty="0"/>
+          </a:p>
+          <a:p>
+            <a:pPr indent="0" marL="0">
+              <a:lnSpc>
+                <a:spcPct val="150000"/>
+              </a:lnSpc>
+              <a:buNone/>
+            </a:pPr>
+            <a:r>
+              <a:rPr lang="en-US" sz="1200" dirty="0">
+                <a:solidFill>
+                  <a:srgbClr val="FFFFFF"/>
+                </a:solidFill>
+              </a:rPr>
+              <a:t>5. **個體化治療策略的發展**  </a:t>
+            </a:r>
+            <a:endParaRPr lang="en-US" sz="1200" dirty="0"/>
+          </a:p>
+          <a:p>
+            <a:pPr indent="0" marL="0">
+              <a:lnSpc>
+                <a:spcPct val="150000"/>
+              </a:lnSpc>
+              <a:buNone/>
+            </a:pPr>
+            <a:r>
+              <a:rPr lang="en-US" sz="1200" dirty="0">
+                <a:solidFill>
+                  <a:srgbClr val="FFFFFF"/>
+                </a:solidFill>
+              </a:rPr>
+              <a:t>   **Development of Personalized Treatment Strategies**  </a:t>
+            </a:r>
+            <a:endParaRPr lang="en-US" sz="1200" dirty="0"/>
+          </a:p>
+          <a:p>
+            <a:pPr indent="0" marL="0">
+              <a:lnSpc>
+                <a:spcPct val="150000"/>
+              </a:lnSpc>
+              <a:buNone/>
+            </a:pPr>
+            <a:r>
+              <a:rPr lang="en-US" sz="1200" dirty="0">
+                <a:solidFill>
+                  <a:srgbClr val="FFFFFF"/>
+                </a:solidFill>
+              </a:rPr>
+              <a:t>   研究個體化治療策略，以根據患者的腫瘤特徵和免疫狀態調整治療方案。  </a:t>
+            </a:r>
+            <a:endParaRPr lang="en-US" sz="1200" dirty="0"/>
+          </a:p>
+          <a:p>
+            <a:pPr indent="0" marL="0">
+              <a:lnSpc>
+                <a:spcPct val="150000"/>
+              </a:lnSpc>
+              <a:buNone/>
+            </a:pPr>
+            <a:r>
+              <a:rPr lang="en-US" sz="1200" dirty="0">
+                <a:solidFill>
+                  <a:srgbClr val="FFFFFF"/>
+                </a:solidFill>
+              </a:rPr>
+              <a:t>   Investigate personalized treatment strategies that tailor therapeutic approaches based on individual tumor characteristics and immune status.</a:t>
+            </a:r>
+            <a:endParaRPr lang="en-US" sz="1200" dirty="0"/>
+          </a:p>
+        </p:txBody>
+      </p:sp>
+    </p:spTree>
+  </p:cSld>
+  <p:clrMapOvr>
+    <a:masterClrMapping/>
+  </p:clrMapOvr>
+</p:sld>
+</file>
+
+<file path=ppt/slides/slide15.xml><?xml version="1.0" encoding="utf-8"?>
+<p:sld xmlns:a="http://schemas.openxmlformats.org/drawingml/2006/main" xmlns:r="http://schemas.openxmlformats.org/officeDocument/2006/relationships" xmlns:p="http://schemas.openxmlformats.org/presentationml/2006/main">
+  <p:cSld name="Slide 15">
     <p:bg>
       <p:bgPr>
         <a:solidFill>
@@ -4981,7 +5215,7 @@
                 <a:ea typeface="Arial" pitchFamily="34" charset="-122"/>
                 <a:cs typeface="Arial" pitchFamily="34" charset="-120"/>
               </a:rPr>
-              <a:t>Hallmarks of cancer guide treatment strategies.</a:t>
+              <a:t>Cancer hallmarks guide treatment strategies.</a:t>
             </a:r>
             <a:endParaRPr lang="en-US" sz="1800" dirty="0"/>
           </a:p>
@@ -5002,7 +5236,7 @@
                 <a:ea typeface="Arial" pitchFamily="34" charset="-122"/>
                 <a:cs typeface="Arial" pitchFamily="34" charset="-120"/>
               </a:rPr>
-              <a:t>HCC shows unique characteristics like immune evasion.</a:t>
+              <a:t>HCC shows unique immune evasion traits.</a:t>
             </a:r>
             <a:endParaRPr lang="en-US" sz="1800" dirty="0"/>
           </a:p>
@@ -5023,49 +5257,7 @@
                 <a:ea typeface="Arial" pitchFamily="34" charset="-122"/>
                 <a:cs typeface="Arial" pitchFamily="34" charset="-120"/>
               </a:rPr>
-              <a:t>Immunotherapies have improved advanced HCC outcomes.</a:t>
-            </a:r>
-            <a:endParaRPr lang="en-US" sz="1800" dirty="0"/>
-          </a:p>
-          <a:p>
-            <a:pPr marL="342900" indent="-342900">
-              <a:spcAft>
-                <a:spcPts val="800"/>
-              </a:spcAft>
-              <a:buSzPct val="100000"/>
-              <a:buChar char="•"/>
-            </a:pPr>
-            <a:r>
-              <a:rPr lang="en-US" sz="1800" dirty="0">
-                <a:solidFill>
-                  <a:srgbClr val="333333"/>
-                </a:solidFill>
-                <a:latin typeface="Arial" pitchFamily="34" charset="0"/>
-                <a:ea typeface="Arial" pitchFamily="34" charset="-122"/>
-                <a:cs typeface="Arial" pitchFamily="34" charset="-120"/>
-              </a:rPr>
-              <a:t>iCCA has distinct genetic alterations for precision therapy.</a:t>
-            </a:r>
-            <a:endParaRPr lang="en-US" sz="1800" dirty="0"/>
-          </a:p>
-          <a:p>
-            <a:pPr marL="342900" indent="-342900">
-              <a:spcAft>
-                <a:spcPts val="800"/>
-              </a:spcAft>
-              <a:buSzPct val="100000"/>
-              <a:buChar char="•"/>
-            </a:pPr>
-            <a:r>
-              <a:rPr lang="en-US" sz="1800" dirty="0">
-                <a:solidFill>
-                  <a:srgbClr val="333333"/>
-                </a:solidFill>
-                <a:latin typeface="Arial" pitchFamily="34" charset="0"/>
-                <a:ea typeface="Arial" pitchFamily="34" charset="-122"/>
-                <a:cs typeface="Arial" pitchFamily="34" charset="-120"/>
-              </a:rPr>
-              <a:t>Future strategies may enhance liver cancer management.</a:t>
+              <a:t>iCCA has distinct genetic alterations.</a:t>
             </a:r>
             <a:endParaRPr lang="en-US" sz="1800" dirty="0"/>
           </a:p>
@@ -5365,7 +5557,7 @@
                 <a:ea typeface="Arial" pitchFamily="34" charset="-122"/>
                 <a:cs typeface="Arial" pitchFamily="34" charset="-120"/>
               </a:rPr>
-              <a:t>Pilot study with 8 resectable HCC patients</a:t>
+              <a:t>Pilot study with 8 HCC patients</a:t>
             </a:r>
             <a:endParaRPr lang="en-US" sz="1800" dirty="0"/>
           </a:p>
@@ -5386,7 +5578,7 @@
                 <a:ea typeface="Arial" pitchFamily="34" charset="-122"/>
                 <a:cs typeface="Arial" pitchFamily="34" charset="-120"/>
               </a:rPr>
-              <a:t>Safety endpoint: only one grade 3 adverse event</a:t>
+              <a:t>High safety with low adverse events</a:t>
             </a:r>
             <a:endParaRPr lang="en-US" sz="1800" dirty="0"/>
           </a:p>
@@ -5407,7 +5599,7 @@
                 <a:ea typeface="Arial" pitchFamily="34" charset="-122"/>
                 <a:cs typeface="Arial" pitchFamily="34" charset="-120"/>
               </a:rPr>
-              <a:t>All resected patients achieved R0 resection</a:t>
+              <a:t>Significant immune infiltration observed</a:t>
             </a:r>
             <a:endParaRPr lang="en-US" sz="1800" dirty="0"/>
           </a:p>
@@ -5428,7 +5620,7 @@
                 <a:ea typeface="Arial" pitchFamily="34" charset="-122"/>
                 <a:cs typeface="Arial" pitchFamily="34" charset="-120"/>
               </a:rPr>
-              <a:t>Increased anti-cancer immune infiltration observed</a:t>
+              <a:t>All resected patients relapse-free</a:t>
             </a:r>
             <a:endParaRPr lang="en-US" sz="1800" dirty="0"/>
           </a:p>
@@ -5707,7 +5899,7 @@
                 <a:ea typeface="Arial" pitchFamily="34" charset="-122"/>
                 <a:cs typeface="Arial" pitchFamily="34" charset="-120"/>
               </a:rPr>
-              <a:t>Hepatectomy impacts anti-PD-1 therapy</a:t>
+              <a:t>Hepatectomy affects anti-PD-1 therapy</a:t>
             </a:r>
             <a:endParaRPr lang="en-US" sz="1800" dirty="0"/>
           </a:p>
@@ -5728,7 +5920,7 @@
                 <a:ea typeface="Arial" pitchFamily="34" charset="-122"/>
                 <a:cs typeface="Arial" pitchFamily="34" charset="-120"/>
               </a:rPr>
-              <a:t>Study conducted in mouse HCC model</a:t>
+              <a:t>Mouse model used for HCC study</a:t>
             </a:r>
             <a:endParaRPr lang="en-US" sz="1800" dirty="0"/>
           </a:p>
@@ -6049,7 +6241,7 @@
                 <a:ea typeface="Arial" pitchFamily="34" charset="-122"/>
                 <a:cs typeface="Arial" pitchFamily="34" charset="-120"/>
               </a:rPr>
-              <a:t>Higher Lactobacillus levels predict disease-free survival.</a:t>
+              <a:t>Higher levels correlate with disease-free survival.</a:t>
             </a:r>
             <a:endParaRPr lang="en-US" sz="1800" dirty="0"/>
           </a:p>
@@ -6070,7 +6262,7 @@
                 <a:ea typeface="Arial" pitchFamily="34" charset="-122"/>
                 <a:cs typeface="Arial" pitchFamily="34" charset="-120"/>
               </a:rPr>
-              <a:t>Nicotinic acid activates NF-κB pathway in T cells.</a:t>
+              <a:t>Nicotinic acid activates NF-κB pathway.</a:t>
             </a:r>
             <a:endParaRPr lang="en-US" sz="1800" dirty="0"/>
           </a:p>
@@ -6091,7 +6283,7 @@
                 <a:ea typeface="Arial" pitchFamily="34" charset="-122"/>
                 <a:cs typeface="Arial" pitchFamily="34" charset="-120"/>
               </a:rPr>
-              <a:t>Combination therapy reduces tumor growth and relapse.</a:t>
+              <a:t>Combination therapy reduces tumor relapse.</a:t>
             </a:r>
             <a:endParaRPr lang="en-US" sz="1800" dirty="0"/>
           </a:p>
@@ -6112,7 +6304,7 @@
                 <a:ea typeface="Arial" pitchFamily="34" charset="-122"/>
                 <a:cs typeface="Arial" pitchFamily="34" charset="-120"/>
               </a:rPr>
-              <a:t>CD8+ T cells are crucial for L. johnsonii efficacy.</a:t>
+              <a:t>CD8+ T cells are crucial for efficacy.</a:t>
             </a:r>
             <a:endParaRPr lang="en-US" sz="1800" dirty="0"/>
           </a:p>
@@ -6391,7 +6583,7 @@
                 <a:ea typeface="Arial" pitchFamily="34" charset="-122"/>
                 <a:cs typeface="Arial" pitchFamily="34" charset="-120"/>
               </a:rPr>
-              <a:t>CAFs induce immunosuppression in HCC.</a:t>
+              <a:t>CAFs drive immunosuppression in HCC.</a:t>
             </a:r>
             <a:endParaRPr lang="en-US" sz="1800" dirty="0"/>
           </a:p>
@@ -6433,7 +6625,7 @@
                 <a:ea typeface="Arial" pitchFamily="34" charset="-122"/>
                 <a:cs typeface="Arial" pitchFamily="34" charset="-120"/>
               </a:rPr>
-              <a:t>ANGPTL4 enhances PD-L1 expression.</a:t>
+              <a:t>ANGPTL4 enhances tumor immune evasion.</a:t>
             </a:r>
             <a:endParaRPr lang="en-US" sz="1800" dirty="0"/>
           </a:p>
@@ -6475,7 +6667,7 @@
                 <a:ea typeface="Arial" pitchFamily="34" charset="-122"/>
                 <a:cs typeface="Arial" pitchFamily="34" charset="-120"/>
               </a:rPr>
-              <a:t>Combination therapy improves immunotherapy outcomes.</a:t>
+              <a:t>Synergistic effect with anti-PD-L1 therapy.</a:t>
             </a:r>
             <a:endParaRPr lang="en-US" sz="1800" dirty="0"/>
           </a:p>
@@ -6754,7 +6946,7 @@
                 <a:ea typeface="Arial" pitchFamily="34" charset="-122"/>
                 <a:cs typeface="Arial" pitchFamily="34" charset="-120"/>
               </a:rPr>
-              <a:t>Fc region influences PD-1 therapy efficacy.</a:t>
+              <a:t>Fc region affects PD-1 therapy efficacy.</a:t>
             </a:r>
             <a:endParaRPr lang="en-US" sz="1800" dirty="0"/>
           </a:p>
@@ -6775,7 +6967,7 @@
                 <a:ea typeface="Arial" pitchFamily="34" charset="-122"/>
                 <a:cs typeface="Arial" pitchFamily="34" charset="-120"/>
               </a:rPr>
-              <a:t>Depletion of PD-1+ CD8 T cells in liver.</a:t>
+              <a:t>Depletion of virus-specific CD8 T cells.</a:t>
             </a:r>
             <a:endParaRPr lang="en-US" sz="1800" dirty="0"/>
           </a:p>
@@ -6796,49 +6988,7 @@
                 <a:ea typeface="Arial" pitchFamily="34" charset="-122"/>
                 <a:cs typeface="Arial" pitchFamily="34" charset="-120"/>
               </a:rPr>
-              <a:t>Fc-dependent effects on viral titers.</a:t>
-            </a:r>
-            <a:endParaRPr lang="en-US" sz="1800" dirty="0"/>
-          </a:p>
-          <a:p>
-            <a:pPr marL="342900" indent="-342900">
-              <a:spcAft>
-                <a:spcPts val="800"/>
-              </a:spcAft>
-              <a:buSzPct val="100000"/>
-              <a:buChar char="•"/>
-            </a:pPr>
-            <a:r>
-              <a:rPr lang="en-US" sz="1800" dirty="0">
-                <a:solidFill>
-                  <a:srgbClr val="333333"/>
-                </a:solidFill>
-                <a:latin typeface="Arial" pitchFamily="34" charset="0"/>
-                <a:ea typeface="Arial" pitchFamily="34" charset="-122"/>
-                <a:cs typeface="Arial" pitchFamily="34" charset="-120"/>
-              </a:rPr>
               <a:t>Phagocytic cells mediate T cell depletion.</a:t>
-            </a:r>
-            <a:endParaRPr lang="en-US" sz="1800" dirty="0"/>
-          </a:p>
-          <a:p>
-            <a:pPr marL="342900" indent="-342900">
-              <a:spcAft>
-                <a:spcPts val="800"/>
-              </a:spcAft>
-              <a:buSzPct val="100000"/>
-              <a:buChar char="•"/>
-            </a:pPr>
-            <a:r>
-              <a:rPr lang="en-US" sz="1800" dirty="0">
-                <a:solidFill>
-                  <a:srgbClr val="333333"/>
-                </a:solidFill>
-                <a:latin typeface="Arial" pitchFamily="34" charset="0"/>
-                <a:ea typeface="Arial" pitchFamily="34" charset="-122"/>
-                <a:cs typeface="Arial" pitchFamily="34" charset="-120"/>
-              </a:rPr>
-              <a:t>Implications for liver cancer therapies.</a:t>
             </a:r>
             <a:endParaRPr lang="en-US" sz="1800" dirty="0"/>
           </a:p>
@@ -7138,7 +7288,7 @@
                 <a:ea typeface="Arial" pitchFamily="34" charset="-122"/>
                 <a:cs typeface="Arial" pitchFamily="34" charset="-120"/>
               </a:rPr>
-              <a:t>HAIC combined with lenvatinib and PD-1 inhibitors</a:t>
+              <a:t>HAIC combined with lenvatinib and PD-1</a:t>
             </a:r>
             <a:endParaRPr lang="en-US" sz="1800" dirty="0"/>
           </a:p>
@@ -7159,7 +7309,7 @@
                 <a:ea typeface="Arial" pitchFamily="34" charset="-122"/>
                 <a:cs typeface="Arial" pitchFamily="34" charset="-120"/>
               </a:rPr>
-              <a:t>Comparative efficacy against lenvatinib and PD-1 alone</a:t>
+              <a:t>Improved outcomes compared to monotherapy</a:t>
             </a:r>
             <a:endParaRPr lang="en-US" sz="1800" dirty="0"/>
           </a:p>
@@ -7180,7 +7330,7 @@
                 <a:ea typeface="Arial" pitchFamily="34" charset="-122"/>
                 <a:cs typeface="Arial" pitchFamily="34" charset="-120"/>
               </a:rPr>
-              <a:t>Focus on poor prognosis to curative strategies</a:t>
+              <a:t>Potential for curative-intent strategies</a:t>
             </a:r>
             <a:endParaRPr lang="en-US" sz="1800" dirty="0"/>
           </a:p>
@@ -7201,7 +7351,7 @@
                 <a:ea typeface="Arial" pitchFamily="34" charset="-122"/>
                 <a:cs typeface="Arial" pitchFamily="34" charset="-120"/>
               </a:rPr>
-              <a:t>Potential for improved patient outcomes</a:t>
+              <a:t>Focus on advanced hepatocellular carcinoma</a:t>
             </a:r>
             <a:endParaRPr lang="en-US" sz="1800" dirty="0"/>
           </a:p>

--- a/docs/digest-en.pptx
+++ b/docs/digest-en.pptx
@@ -2623,7 +2623,7 @@
                 <a:ea typeface="Arial" pitchFamily="34" charset="-122"/>
                 <a:cs typeface="Arial" pitchFamily="34" charset="-120"/>
               </a:rPr>
-              <a:t>Potential for conversion to resectable disease</a:t>
+              <a:t>Potential for conversion to surgical options</a:t>
             </a:r>
             <a:endParaRPr lang="en-US" sz="1800" dirty="0"/>
           </a:p>
@@ -2902,7 +2902,7 @@
                 <a:ea typeface="Arial" pitchFamily="34" charset="-122"/>
                 <a:cs typeface="Arial" pitchFamily="34" charset="-120"/>
               </a:rPr>
-              <a:t>Atez+Bev shows efficacy after Dur+Tre</a:t>
+              <a:t>Atez+Bev shows 25% ORR in HCC patients.</a:t>
             </a:r>
             <a:endParaRPr lang="en-US" sz="1800" dirty="0"/>
           </a:p>
@@ -2923,7 +2923,7 @@
                 <a:ea typeface="Arial" pitchFamily="34" charset="-122"/>
                 <a:cs typeface="Arial" pitchFamily="34" charset="-120"/>
               </a:rPr>
-              <a:t>ORR 25% and DCR 75% observed</a:t>
+              <a:t>75% DCR indicates favorable disease control.</a:t>
             </a:r>
             <a:endParaRPr lang="en-US" sz="1800" dirty="0"/>
           </a:p>
@@ -2944,7 +2944,7 @@
                 <a:ea typeface="Arial" pitchFamily="34" charset="-122"/>
                 <a:cs typeface="Arial" pitchFamily="34" charset="-120"/>
               </a:rPr>
-              <a:t>Safety profile varies between regimens</a:t>
+              <a:t>Prior Dur+Tre may enhance immune response.</a:t>
             </a:r>
             <a:endParaRPr lang="en-US" sz="1800" dirty="0"/>
           </a:p>
@@ -2965,7 +2965,7 @@
                 <a:ea typeface="Arial" pitchFamily="34" charset="-122"/>
                 <a:cs typeface="Arial" pitchFamily="34" charset="-120"/>
               </a:rPr>
-              <a:t>Prior Dur+Tre may enhance immune response</a:t>
+              <a:t>Common adverse events include pruritus and proteinuria.</a:t>
             </a:r>
             <a:endParaRPr lang="en-US" sz="1800" dirty="0"/>
           </a:p>
@@ -2986,7 +2986,7 @@
                 <a:ea typeface="Arial" pitchFamily="34" charset="-122"/>
                 <a:cs typeface="Arial" pitchFamily="34" charset="-120"/>
               </a:rPr>
-              <a:t>Common adverse events include pruritus</a:t>
+              <a:t>Sequential therapy offers new treatment options.</a:t>
             </a:r>
             <a:endParaRPr lang="en-US" sz="1800" dirty="0"/>
           </a:p>
@@ -3265,7 +3265,7 @@
                 <a:ea typeface="Arial" pitchFamily="34" charset="-122"/>
                 <a:cs typeface="Arial" pitchFamily="34" charset="-120"/>
               </a:rPr>
-              <a:t>Local ablation therapies include RFA and microwave ablation.</a:t>
+              <a:t>Comparison of radiotherapy and local ablation</a:t>
             </a:r>
             <a:endParaRPr lang="en-US" sz="1800" dirty="0"/>
           </a:p>
@@ -3286,7 +3286,7 @@
                 <a:ea typeface="Arial" pitchFamily="34" charset="-122"/>
                 <a:cs typeface="Arial" pitchFamily="34" charset="-120"/>
               </a:rPr>
-              <a:t>EBRT compared to local ablation for HCC.</a:t>
+              <a:t>Focus on hepatocellular carcinoma treatment</a:t>
             </a:r>
             <a:endParaRPr lang="en-US" sz="1800" dirty="0"/>
           </a:p>
@@ -3307,7 +3307,49 @@
                 <a:ea typeface="Arial" pitchFamily="34" charset="-122"/>
                 <a:cs typeface="Arial" pitchFamily="34" charset="-120"/>
               </a:rPr>
-              <a:t>Meta-analysis shows local progression-free survival benefits.</a:t>
+              <a:t>Evaluation of local progression-free survival</a:t>
+            </a:r>
+            <a:endParaRPr lang="en-US" sz="1800" dirty="0"/>
+          </a:p>
+          <a:p>
+            <a:pPr marL="342900" indent="-342900">
+              <a:spcAft>
+                <a:spcPts val="800"/>
+              </a:spcAft>
+              <a:buSzPct val="100000"/>
+              <a:buChar char="•"/>
+            </a:pPr>
+            <a:r>
+              <a:rPr lang="en-US" sz="1800" dirty="0">
+                <a:solidFill>
+                  <a:srgbClr val="333333"/>
+                </a:solidFill>
+                <a:latin typeface="Arial" pitchFamily="34" charset="0"/>
+                <a:ea typeface="Arial" pitchFamily="34" charset="-122"/>
+                <a:cs typeface="Arial" pitchFamily="34" charset="-120"/>
+              </a:rPr>
+              <a:t>Inclusion of radiofrequency and microwave ablation</a:t>
+            </a:r>
+            <a:endParaRPr lang="en-US" sz="1800" dirty="0"/>
+          </a:p>
+          <a:p>
+            <a:pPr marL="342900" indent="-342900">
+              <a:spcAft>
+                <a:spcPts val="800"/>
+              </a:spcAft>
+              <a:buSzPct val="100000"/>
+              <a:buChar char="•"/>
+            </a:pPr>
+            <a:r>
+              <a:rPr lang="en-US" sz="1800" dirty="0">
+                <a:solidFill>
+                  <a:srgbClr val="333333"/>
+                </a:solidFill>
+                <a:latin typeface="Arial" pitchFamily="34" charset="0"/>
+                <a:ea typeface="Arial" pitchFamily="34" charset="-122"/>
+                <a:cs typeface="Arial" pitchFamily="34" charset="-120"/>
+              </a:rPr>
+              <a:t>Systematic review and meta-analysis conducted</a:t>
             </a:r>
             <a:endParaRPr lang="en-US" sz="1800" dirty="0"/>
           </a:p>
@@ -3524,7 +3566,7 @@
                   <a:srgbClr val="FFFFFF"/>
                 </a:solidFill>
               </a:rPr>
-              <a:t>1. **免疫治療的潛力**  </a:t>
+              <a:t>1. **免疫療法的潛力**  </a:t>
             </a:r>
             <a:endParaRPr lang="en-US" sz="1200" dirty="0"/>
           </a:p>
@@ -3541,7 +3583,7 @@
                   <a:srgbClr val="FFFFFF"/>
                 </a:solidFill>
               </a:rPr>
-              <a:t>   **The Potential of Immunotherapy**  </a:t>
+              <a:t>   Immunotherapy has shown significant promise in enhancing treatment outcomes for hepatocellular carcinoma (HCC), particularly in advanced stages.  </a:t>
             </a:r>
             <a:endParaRPr lang="en-US" sz="1200" dirty="0"/>
           </a:p>
@@ -3558,7 +3600,7 @@
                   <a:srgbClr val="FFFFFF"/>
                 </a:solidFill>
               </a:rPr>
-              <a:t>   免疫治療在晚期肝細胞癌（HCC）中的應用顯著改善了治療選擇，但在早期階段的最佳使用仍需進一步探索。  </a:t>
+              <a:t>   免疫療法在改善肝細胞癌（HCC）治療結果方面顯示出顯著潛力，特別是在晚期階段。</a:t>
             </a:r>
             <a:endParaRPr lang="en-US" sz="1200" dirty="0"/>
           </a:p>
@@ -3569,14 +3611,6 @@
               </a:lnSpc>
               <a:buNone/>
             </a:pPr>
-            <a:r>
-              <a:rPr lang="en-US" sz="1200" dirty="0">
-                <a:solidFill>
-                  <a:srgbClr val="FFFFFF"/>
-                </a:solidFill>
-              </a:rPr>
-              <a:t>   Immunotherapy has significantly improved treatment options for advanced hepatocellular carcinoma (HCC), yet optimal usage in earlier stages remains to be fully explored.</a:t>
-            </a:r>
             <a:endParaRPr lang="en-US" sz="1200" dirty="0"/>
           </a:p>
           <a:p>
@@ -3586,6 +3620,14 @@
               </a:lnSpc>
               <a:buNone/>
             </a:pPr>
+            <a:r>
+              <a:rPr lang="en-US" sz="1200" dirty="0">
+                <a:solidFill>
+                  <a:srgbClr val="FFFFFF"/>
+                </a:solidFill>
+              </a:rPr>
+              <a:t>2. **腫瘤微環境的重塑**  </a:t>
+            </a:r>
             <a:endParaRPr lang="en-US" sz="1200" dirty="0"/>
           </a:p>
           <a:p>
@@ -3601,7 +3643,7 @@
                   <a:srgbClr val="FFFFFF"/>
                 </a:solidFill>
               </a:rPr>
-              <a:t>2. **腫瘤微環境的重塑**  </a:t>
+              <a:t>   Neoadjuvant therapies, including stereotactic body radiation therapy combined with immune therapy, can favorably remodel the tumor microenvironment, promoting a more effective immune response.  </a:t>
             </a:r>
             <a:endParaRPr lang="en-US" sz="1200" dirty="0"/>
           </a:p>
@@ -3618,7 +3660,7 @@
                   <a:srgbClr val="FFFFFF"/>
                 </a:solidFill>
               </a:rPr>
-              <a:t>   **Remodeling of Tumor Microenvironment**  </a:t>
+              <a:t>   新輔助療法，包括立體定向體部放射療法結合免疫療法，可以有利於重塑腫瘤微環境，促進更有效的免疫反應。</a:t>
             </a:r>
             <a:endParaRPr lang="en-US" sz="1200" dirty="0"/>
           </a:p>
@@ -3629,14 +3671,6 @@
               </a:lnSpc>
               <a:buNone/>
             </a:pPr>
-            <a:r>
-              <a:rPr lang="en-US" sz="1200" dirty="0">
-                <a:solidFill>
-                  <a:srgbClr val="FFFFFF"/>
-                </a:solidFill>
-              </a:rPr>
-              <a:t>   新的研究顯示，術前立體定向放射治療結合免疫治療能有效改變HCC的腫瘤微環境，促進治療效果。  </a:t>
-            </a:r>
             <a:endParaRPr lang="en-US" sz="1200" dirty="0"/>
           </a:p>
           <a:p>
@@ -3652,7 +3686,7 @@
                   <a:srgbClr val="FFFFFF"/>
                 </a:solidFill>
               </a:rPr>
-              <a:t>   Recent studies indicate that neoadjuvant stereotactic body radiation therapy combined with immunotherapy can effectively remodel the tumor microenvironment in HCC, enhancing treatment efficacy.</a:t>
+              <a:t>3. **癌症相關成纖維細胞的角色**  </a:t>
             </a:r>
             <a:endParaRPr lang="en-US" sz="1200" dirty="0"/>
           </a:p>
@@ -3663,6 +3697,14 @@
               </a:lnSpc>
               <a:buNone/>
             </a:pPr>
+            <a:r>
+              <a:rPr lang="en-US" sz="1200" dirty="0">
+                <a:solidFill>
+                  <a:srgbClr val="FFFFFF"/>
+                </a:solidFill>
+              </a:rPr>
+              <a:t>   Cancer-associated fibroblasts (CAFs) play a crucial role in tumor immunosuppression through metabolic pathways, indicating potential therapeutic targets for enhancing immunotherapy efficacy.  </a:t>
+            </a:r>
             <a:endParaRPr lang="en-US" sz="1200" dirty="0"/>
           </a:p>
           <a:p>
@@ -3678,7 +3720,7 @@
                   <a:srgbClr val="FFFFFF"/>
                 </a:solidFill>
               </a:rPr>
-              <a:t>3. **癌症相關成纖維細胞的角色**  </a:t>
+              <a:t>   癌症相關成纖維細胞（CAFs）在腫瘤免疫抑制中扮演關鍵角色，透過代謝途徑顯示出增強免疫療法療效的潛在治療靶點。</a:t>
             </a:r>
             <a:endParaRPr lang="en-US" sz="1200" dirty="0"/>
           </a:p>
@@ -3689,14 +3731,6 @@
               </a:lnSpc>
               <a:buNone/>
             </a:pPr>
-            <a:r>
-              <a:rPr lang="en-US" sz="1200" dirty="0">
-                <a:solidFill>
-                  <a:srgbClr val="FFFFFF"/>
-                </a:solidFill>
-              </a:rPr>
-              <a:t>   **Role of Cancer-Associated Fibroblasts**  </a:t>
-            </a:r>
             <a:endParaRPr lang="en-US" sz="1200" dirty="0"/>
           </a:p>
           <a:p>
@@ -3712,7 +3746,7 @@
                   <a:srgbClr val="FFFFFF"/>
                 </a:solidFill>
               </a:rPr>
-              <a:t>   癌症相關成纖維細胞（CAFs）在HCC中推動免疫抑制，理解其代謝調控對開發新療法至關重要。  </a:t>
+              <a:t>4. **手術後復發的挑戰**  </a:t>
             </a:r>
             <a:endParaRPr lang="en-US" sz="1200" dirty="0"/>
           </a:p>
@@ -3729,7 +3763,7 @@
                   <a:srgbClr val="FFFFFF"/>
                 </a:solidFill>
               </a:rPr>
-              <a:t>   Cancer-associated fibroblasts (CAFs) drive immunosuppression in HCC, and understanding their metabolic regulation is crucial for developing new therapeutic strategies.</a:t>
+              <a:t>   Despite the effectiveness of surgical resection for early-stage HCC, postoperative recurrence remains a significant clinical challenge that necessitates further investigation into underlying mechanisms.  </a:t>
             </a:r>
             <a:endParaRPr lang="en-US" sz="1200" dirty="0"/>
           </a:p>
@@ -3740,6 +3774,14 @@
               </a:lnSpc>
               <a:buNone/>
             </a:pPr>
+            <a:r>
+              <a:rPr lang="en-US" sz="1200" dirty="0">
+                <a:solidFill>
+                  <a:srgbClr val="FFFFFF"/>
+                </a:solidFill>
+              </a:rPr>
+              <a:t>   儘管手術切除對早期HCC有效，但術後復發仍然是一個重大臨床挑戰，需進一步研究其潛在機制。</a:t>
+            </a:r>
             <a:endParaRPr lang="en-US" sz="1200" dirty="0"/>
           </a:p>
           <a:p>
@@ -3749,14 +3791,6 @@
               </a:lnSpc>
               <a:buNone/>
             </a:pPr>
-            <a:r>
-              <a:rPr lang="en-US" sz="1200" dirty="0">
-                <a:solidFill>
-                  <a:srgbClr val="FFFFFF"/>
-                </a:solidFill>
-              </a:rPr>
-              <a:t>4. **手術後復發的挑戰**  </a:t>
-            </a:r>
             <a:endParaRPr lang="en-US" sz="1200" dirty="0"/>
           </a:p>
           <a:p>
@@ -3772,7 +3806,7 @@
                   <a:srgbClr val="FFFFFF"/>
                 </a:solidFill>
               </a:rPr>
-              <a:t>   **Challenges of Postoperative Recurrence**  </a:t>
+              <a:t>5. **多模式治療的前景**  </a:t>
             </a:r>
             <a:endParaRPr lang="en-US" sz="1200" dirty="0"/>
           </a:p>
@@ -3789,101 +3823,7 @@
                   <a:srgbClr val="FFFFFF"/>
                 </a:solidFill>
               </a:rPr>
-              <a:t>   雖然外科切除是早期HCC的有效干預措施，但術後復發仍然是主要的臨床挑戰。  </a:t>
-            </a:r>
-            <a:endParaRPr lang="en-US" sz="1200" dirty="0"/>
-          </a:p>
-          <a:p>
-            <a:pPr indent="0" marL="0">
-              <a:lnSpc>
-                <a:spcPct val="150000"/>
-              </a:lnSpc>
-              <a:buNone/>
-            </a:pPr>
-            <a:r>
-              <a:rPr lang="en-US" sz="1200" dirty="0">
-                <a:solidFill>
-                  <a:srgbClr val="FFFFFF"/>
-                </a:solidFill>
-              </a:rPr>
-              <a:t>   While surgical resection is an effective intervention for early-stage HCC, postoperative recurrence remains a significant clinical challenge.</a:t>
-            </a:r>
-            <a:endParaRPr lang="en-US" sz="1200" dirty="0"/>
-          </a:p>
-          <a:p>
-            <a:pPr indent="0" marL="0">
-              <a:lnSpc>
-                <a:spcPct val="150000"/>
-              </a:lnSpc>
-              <a:buNone/>
-            </a:pPr>
-            <a:endParaRPr lang="en-US" sz="1200" dirty="0"/>
-          </a:p>
-          <a:p>
-            <a:pPr indent="0" marL="0">
-              <a:lnSpc>
-                <a:spcPct val="150000"/>
-              </a:lnSpc>
-              <a:buNone/>
-            </a:pPr>
-            <a:r>
-              <a:rPr lang="en-US" sz="1200" dirty="0">
-                <a:solidFill>
-                  <a:srgbClr val="FFFFFF"/>
-                </a:solidFill>
-              </a:rPr>
-              <a:t>5. **多模式治療的前景**  </a:t>
-            </a:r>
-            <a:endParaRPr lang="en-US" sz="1200" dirty="0"/>
-          </a:p>
-          <a:p>
-            <a:pPr indent="0" marL="0">
-              <a:lnSpc>
-                <a:spcPct val="150000"/>
-              </a:lnSpc>
-              <a:buNone/>
-            </a:pPr>
-            <a:r>
-              <a:rPr lang="en-US" sz="1200" dirty="0">
-                <a:solidFill>
-                  <a:srgbClr val="FFFFFF"/>
-                </a:solidFill>
-              </a:rPr>
-              <a:t>   **Prospects of Multimodal Therapy**  </a:t>
-            </a:r>
-            <a:endParaRPr lang="en-US" sz="1200" dirty="0"/>
-          </a:p>
-          <a:p>
-            <a:pPr indent="0" marL="0">
-              <a:lnSpc>
-                <a:spcPct val="150000"/>
-              </a:lnSpc>
-              <a:buNone/>
-            </a:pPr>
-            <a:r>
-              <a:rPr lang="en-US" sz="1200" dirty="0">
-                <a:solidFill>
-                  <a:srgbClr val="FFFFFF"/>
-                </a:solidFill>
-              </a:rPr>
-              <a:t>   結合不同治療方法（如TACE、免疫治療和局部消融）可能為不可切除的HCC提供更佳的治療結果。  </a:t>
-            </a:r>
-            <a:endParaRPr lang="en-US" sz="1200" dirty="0"/>
-          </a:p>
-          <a:p>
-            <a:pPr indent="0" marL="0">
-              <a:lnSpc>
-                <a:spcPct val="150000"/>
-              </a:lnSpc>
-              <a:buNone/>
-            </a:pPr>
-            <a:r>
-              <a:rPr lang="en-US" sz="1200" dirty="0">
-                <a:solidFill>
-                  <a:srgbClr val="FFFFFF"/>
-                </a:solidFill>
-              </a:rPr>
-              <a:t>   Combining various treatment modalities (such as TACE, immunotherapy, and local ablation) may offer better outcomes for unresectable HCC.</a:t>
+              <a:t>   Combining various treatment modalities, such as transarterial chemoembolization with immune checkpoint inhibitors, shows potential in improving outcomes for patients with unresectable HCC.</a:t>
             </a:r>
             <a:endParaRPr lang="en-US" sz="1200" dirty="0"/>
           </a:p>
@@ -4029,7 +3969,7 @@
                   <a:srgbClr val="FFFFFF"/>
                 </a:solidFill>
               </a:rPr>
-              <a:t>### 未來研究方向 (Future Research Directions)</a:t>
+              <a:t>結合多種治療方式，如經動脈化療栓塞與免疫檢查點抑制劑，顯示出改善不可切除HCC患者預後的潛力。</a:t>
             </a:r>
             <a:endParaRPr lang="en-US" sz="1200" dirty="0"/>
           </a:p>
@@ -4055,7 +3995,7 @@
                   <a:srgbClr val="FFFFFF"/>
                 </a:solidFill>
               </a:rPr>
-              <a:t>1. **早期階段免疫治療的最佳化**  </a:t>
+              <a:t>### 未來研究方向 (Future Research Directions)</a:t>
             </a:r>
             <a:endParaRPr lang="en-US" sz="1200" dirty="0"/>
           </a:p>
@@ -4066,14 +4006,6 @@
               </a:lnSpc>
               <a:buNone/>
             </a:pPr>
-            <a:r>
-              <a:rPr lang="en-US" sz="1200" dirty="0">
-                <a:solidFill>
-                  <a:srgbClr val="FFFFFF"/>
-                </a:solidFill>
-              </a:rPr>
-              <a:t>   **Optimization of Immunotherapy in Early Stages**  </a:t>
-            </a:r>
             <a:endParaRPr lang="en-US" sz="1200" dirty="0"/>
           </a:p>
           <a:p>
@@ -4089,7 +4021,7 @@
                   <a:srgbClr val="FFFFFF"/>
                 </a:solidFill>
               </a:rPr>
-              <a:t>   需要進一步研究以確定免疫治療在早期HCC中的最佳使用時機和方式。  </a:t>
+              <a:t>1. **早期階段的免疫療法應用**  </a:t>
             </a:r>
             <a:endParaRPr lang="en-US" sz="1200" dirty="0"/>
           </a:p>
@@ -4106,7 +4038,7 @@
                   <a:srgbClr val="FFFFFF"/>
                 </a:solidFill>
               </a:rPr>
-              <a:t>   Further studies are needed to determine the optimal timing and methods for immunotherapy in early-stage HCC.</a:t>
+              <a:t>   Investigate optimal strategies for integrating immunotherapy in earlier stages of HCC to improve patient outcomes.  </a:t>
             </a:r>
             <a:endParaRPr lang="en-US" sz="1200" dirty="0"/>
           </a:p>
@@ -4117,6 +4049,14 @@
               </a:lnSpc>
               <a:buNone/>
             </a:pPr>
+            <a:r>
+              <a:rPr lang="en-US" sz="1200" dirty="0">
+                <a:solidFill>
+                  <a:srgbClr val="FFFFFF"/>
+                </a:solidFill>
+              </a:rPr>
+              <a:t>   探討在HCC早期階段整合免疫療法的最佳策略，以改善患者預後。</a:t>
+            </a:r>
             <a:endParaRPr lang="en-US" sz="1200" dirty="0"/>
           </a:p>
           <a:p>
@@ -4126,14 +4066,6 @@
               </a:lnSpc>
               <a:buNone/>
             </a:pPr>
-            <a:r>
-              <a:rPr lang="en-US" sz="1200" dirty="0">
-                <a:solidFill>
-                  <a:srgbClr val="FFFFFF"/>
-                </a:solidFill>
-              </a:rPr>
-              <a:t>2. **腫瘤微環境的深入分析**  </a:t>
-            </a:r>
             <a:endParaRPr lang="en-US" sz="1200" dirty="0"/>
           </a:p>
           <a:p>
@@ -4149,7 +4081,7 @@
                   <a:srgbClr val="FFFFFF"/>
                 </a:solidFill>
               </a:rPr>
-              <a:t>   **In-Depth Analysis of Tumor Microenvironment**  </a:t>
+              <a:t>2. **腫瘤微環境的深入研究**  </a:t>
             </a:r>
             <a:endParaRPr lang="en-US" sz="1200" dirty="0"/>
           </a:p>
@@ -4166,7 +4098,7 @@
                   <a:srgbClr val="FFFFFF"/>
                 </a:solidFill>
               </a:rPr>
-              <a:t>   研究腫瘤微環境中不同細胞類型的相互作用及其對免疫治療反應的影響。  </a:t>
+              <a:t>   Further explore the mechanisms by which the tumor microenvironment influences immune response and therapy resistance in HCC.  </a:t>
             </a:r>
             <a:endParaRPr lang="en-US" sz="1200" dirty="0"/>
           </a:p>
@@ -4183,7 +4115,7 @@
                   <a:srgbClr val="FFFFFF"/>
                 </a:solidFill>
               </a:rPr>
-              <a:t>   Investigate the interactions of different cell types within the tumor microenvironment and their impact on responses to immunotherapy.</a:t>
+              <a:t>   進一步研究腫瘤微環境如何影響HCC中的免疫反應和療法抵抗的機制。</a:t>
             </a:r>
             <a:endParaRPr lang="en-US" sz="1200" dirty="0"/>
           </a:p>
@@ -4209,7 +4141,7 @@
                   <a:srgbClr val="FFFFFF"/>
                 </a:solidFill>
               </a:rPr>
-              <a:t>3. **新型治療靶點的發掘**  </a:t>
+              <a:t>3. **CAFs的代謝調控**  </a:t>
             </a:r>
             <a:endParaRPr lang="en-US" sz="1200" dirty="0"/>
           </a:p>
@@ -4226,7 +4158,7 @@
                   <a:srgbClr val="FFFFFF"/>
                 </a:solidFill>
               </a:rPr>
-              <a:t>   **Discovery of Novel Therapeutic Targets**  </a:t>
+              <a:t>   Elucidate the metabolic pathways of cancer-associated fibroblasts and their impact on immunosuppression to identify new therapeutic targets.  </a:t>
             </a:r>
             <a:endParaRPr lang="en-US" sz="1200" dirty="0"/>
           </a:p>
@@ -4243,7 +4175,7 @@
                   <a:srgbClr val="FFFFFF"/>
                 </a:solidFill>
               </a:rPr>
-              <a:t>   探索癌症相關成纖維細胞及其代謝途徑作為新療法的潛在靶點。  </a:t>
+              <a:t>   阐明癌症相關成纖維細胞的代謝途徑及其對免疫抑制的影響，以識別新的治療靶點。</a:t>
             </a:r>
             <a:endParaRPr lang="en-US" sz="1200" dirty="0"/>
           </a:p>
@@ -4254,14 +4186,6 @@
               </a:lnSpc>
               <a:buNone/>
             </a:pPr>
-            <a:r>
-              <a:rPr lang="en-US" sz="1200" dirty="0">
-                <a:solidFill>
-                  <a:srgbClr val="FFFFFF"/>
-                </a:solidFill>
-              </a:rPr>
-              <a:t>   Explore cancer-associated fibroblasts and their metabolic pathways as potential novel therapeutic targets.</a:t>
-            </a:r>
             <a:endParaRPr lang="en-US" sz="1200" dirty="0"/>
           </a:p>
           <a:p>
@@ -4271,6 +4195,14 @@
               </a:lnSpc>
               <a:buNone/>
             </a:pPr>
+            <a:r>
+              <a:rPr lang="en-US" sz="1200" dirty="0">
+                <a:solidFill>
+                  <a:srgbClr val="FFFFFF"/>
+                </a:solidFill>
+              </a:rPr>
+              <a:t>4. **多模式治療的臨床試驗**  </a:t>
+            </a:r>
             <a:endParaRPr lang="en-US" sz="1200" dirty="0"/>
           </a:p>
           <a:p>
@@ -4286,7 +4218,7 @@
                   <a:srgbClr val="FFFFFF"/>
                 </a:solidFill>
               </a:rPr>
-              <a:t>4. **多模式治療的臨床試驗**  </a:t>
+              <a:t>   Conduct clinical trials to evaluate the efficacy and safety of combination therapies involving immunotherapy and local ablative techniques for HCC.  </a:t>
             </a:r>
             <a:endParaRPr lang="en-US" sz="1200" dirty="0"/>
           </a:p>
@@ -4303,7 +4235,7 @@
                   <a:srgbClr val="FFFFFF"/>
                 </a:solidFill>
               </a:rPr>
-              <a:t>   **Clinical Trials for Multimodal Therapies**  </a:t>
+              <a:t>   進行臨床試驗以評估結合免疫療法和局部消融技術的療效和安全性。</a:t>
             </a:r>
             <a:endParaRPr lang="en-US" sz="1200" dirty="0"/>
           </a:p>
@@ -4314,14 +4246,6 @@
               </a:lnSpc>
               <a:buNone/>
             </a:pPr>
-            <a:r>
-              <a:rPr lang="en-US" sz="1200" dirty="0">
-                <a:solidFill>
-                  <a:srgbClr val="FFFFFF"/>
-                </a:solidFill>
-              </a:rPr>
-              <a:t>   設計臨床試驗以評估多種治療組合在不可切除HCC中的療效和安全性。  </a:t>
-            </a:r>
             <a:endParaRPr lang="en-US" sz="1200" dirty="0"/>
           </a:p>
           <a:p>
@@ -4337,7 +4261,7 @@
                   <a:srgbClr val="FFFFFF"/>
                 </a:solidFill>
               </a:rPr>
-              <a:t>   Design clinical trials to assess the efficacy and safety of various treatment combinations in unresectable HCC.</a:t>
+              <a:t>5. **術後復發的預防策略**  </a:t>
             </a:r>
             <a:endParaRPr lang="en-US" sz="1200" dirty="0"/>
           </a:p>
@@ -4348,6 +4272,14 @@
               </a:lnSpc>
               <a:buNone/>
             </a:pPr>
+            <a:r>
+              <a:rPr lang="en-US" sz="1200" dirty="0">
+                <a:solidFill>
+                  <a:srgbClr val="FFFFFF"/>
+                </a:solidFill>
+              </a:rPr>
+              <a:t>   Develop and test strategies to prevent postoperative recurrence in HCC patients, focusing on adjuvant therapies that enhance immune response.  </a:t>
+            </a:r>
             <a:endParaRPr lang="en-US" sz="1200" dirty="0"/>
           </a:p>
           <a:p>
@@ -4363,58 +4295,7 @@
                   <a:srgbClr val="FFFFFF"/>
                 </a:solidFill>
               </a:rPr>
-              <a:t>5. **個體化治療策略的發展**  </a:t>
-            </a:r>
-            <a:endParaRPr lang="en-US" sz="1200" dirty="0"/>
-          </a:p>
-          <a:p>
-            <a:pPr indent="0" marL="0">
-              <a:lnSpc>
-                <a:spcPct val="150000"/>
-              </a:lnSpc>
-              <a:buNone/>
-            </a:pPr>
-            <a:r>
-              <a:rPr lang="en-US" sz="1200" dirty="0">
-                <a:solidFill>
-                  <a:srgbClr val="FFFFFF"/>
-                </a:solidFill>
-              </a:rPr>
-              <a:t>   **Development of Personalized Treatment Strategies**  </a:t>
-            </a:r>
-            <a:endParaRPr lang="en-US" sz="1200" dirty="0"/>
-          </a:p>
-          <a:p>
-            <a:pPr indent="0" marL="0">
-              <a:lnSpc>
-                <a:spcPct val="150000"/>
-              </a:lnSpc>
-              <a:buNone/>
-            </a:pPr>
-            <a:r>
-              <a:rPr lang="en-US" sz="1200" dirty="0">
-                <a:solidFill>
-                  <a:srgbClr val="FFFFFF"/>
-                </a:solidFill>
-              </a:rPr>
-              <a:t>   研究個體化治療策略，以根據患者的腫瘤特徵和免疫狀態調整治療方案。  </a:t>
-            </a:r>
-            <a:endParaRPr lang="en-US" sz="1200" dirty="0"/>
-          </a:p>
-          <a:p>
-            <a:pPr indent="0" marL="0">
-              <a:lnSpc>
-                <a:spcPct val="150000"/>
-              </a:lnSpc>
-              <a:buNone/>
-            </a:pPr>
-            <a:r>
-              <a:rPr lang="en-US" sz="1200" dirty="0">
-                <a:solidFill>
-                  <a:srgbClr val="FFFFFF"/>
-                </a:solidFill>
-              </a:rPr>
-              <a:t>   Investigate personalized treatment strategies that tailor therapeutic approaches based on individual tumor characteristics and immune status.</a:t>
+              <a:t>   開發和測試預防HCC患者術後復發的策略，重點在於增強免疫反應的輔助療法。</a:t>
             </a:r>
             <a:endParaRPr lang="en-US" sz="1200" dirty="0"/>
           </a:p>
@@ -5215,7 +5096,7 @@
                 <a:ea typeface="Arial" pitchFamily="34" charset="-122"/>
                 <a:cs typeface="Arial" pitchFamily="34" charset="-120"/>
               </a:rPr>
-              <a:t>Cancer hallmarks guide treatment strategies.</a:t>
+              <a:t>Hallmarks guide liver cancer understanding.</a:t>
             </a:r>
             <a:endParaRPr lang="en-US" sz="1800" dirty="0"/>
           </a:p>
@@ -5257,7 +5138,49 @@
                 <a:ea typeface="Arial" pitchFamily="34" charset="-122"/>
                 <a:cs typeface="Arial" pitchFamily="34" charset="-120"/>
               </a:rPr>
+              <a:t>Immunotherapy improves advanced HCC outcomes.</a:t>
+            </a:r>
+            <a:endParaRPr lang="en-US" sz="1800" dirty="0"/>
+          </a:p>
+          <a:p>
+            <a:pPr marL="342900" indent="-342900">
+              <a:spcAft>
+                <a:spcPts val="800"/>
+              </a:spcAft>
+              <a:buSzPct val="100000"/>
+              <a:buChar char="•"/>
+            </a:pPr>
+            <a:r>
+              <a:rPr lang="en-US" sz="1800" dirty="0">
+                <a:solidFill>
+                  <a:srgbClr val="333333"/>
+                </a:solidFill>
+                <a:latin typeface="Arial" pitchFamily="34" charset="0"/>
+                <a:ea typeface="Arial" pitchFamily="34" charset="-122"/>
+                <a:cs typeface="Arial" pitchFamily="34" charset="-120"/>
+              </a:rPr>
               <a:t>iCCA has distinct genetic alterations.</a:t>
+            </a:r>
+            <a:endParaRPr lang="en-US" sz="1800" dirty="0"/>
+          </a:p>
+          <a:p>
+            <a:pPr marL="342900" indent="-342900">
+              <a:spcAft>
+                <a:spcPts val="800"/>
+              </a:spcAft>
+              <a:buSzPct val="100000"/>
+              <a:buChar char="•"/>
+            </a:pPr>
+            <a:r>
+              <a:rPr lang="en-US" sz="1800" dirty="0">
+                <a:solidFill>
+                  <a:srgbClr val="333333"/>
+                </a:solidFill>
+                <a:latin typeface="Arial" pitchFamily="34" charset="0"/>
+                <a:ea typeface="Arial" pitchFamily="34" charset="-122"/>
+                <a:cs typeface="Arial" pitchFamily="34" charset="-120"/>
+              </a:rPr>
+              <a:t>Precision oncology targets iCCA mutations.</a:t>
             </a:r>
             <a:endParaRPr lang="en-US" sz="1800" dirty="0"/>
           </a:p>
@@ -5536,7 +5459,7 @@
                 <a:ea typeface="Arial" pitchFamily="34" charset="-122"/>
                 <a:cs typeface="Arial" pitchFamily="34" charset="-120"/>
               </a:rPr>
-              <a:t>Neoadjuvant SBRT plus immune therapy tested</a:t>
+              <a:t>Neoadjuvant SBRT combined with immune therapy</a:t>
             </a:r>
             <a:endParaRPr lang="en-US" sz="1800" dirty="0"/>
           </a:p>
@@ -5557,7 +5480,7 @@
                 <a:ea typeface="Arial" pitchFamily="34" charset="-122"/>
                 <a:cs typeface="Arial" pitchFamily="34" charset="-120"/>
               </a:rPr>
-              <a:t>Pilot study with 8 HCC patients</a:t>
+              <a:t>Pilot study with 8 patients, safety assessed</a:t>
             </a:r>
             <a:endParaRPr lang="en-US" sz="1800" dirty="0"/>
           </a:p>
@@ -5578,7 +5501,7 @@
                 <a:ea typeface="Arial" pitchFamily="34" charset="-122"/>
                 <a:cs typeface="Arial" pitchFamily="34" charset="-120"/>
               </a:rPr>
-              <a:t>High safety with low adverse events</a:t>
+              <a:t>One patient had grade 3 treatment-related adverse event</a:t>
             </a:r>
             <a:endParaRPr lang="en-US" sz="1800" dirty="0"/>
           </a:p>
@@ -5599,7 +5522,7 @@
                 <a:ea typeface="Arial" pitchFamily="34" charset="-122"/>
                 <a:cs typeface="Arial" pitchFamily="34" charset="-120"/>
               </a:rPr>
-              <a:t>Significant immune infiltration observed</a:t>
+              <a:t>All resected patients achieved R0 resection</a:t>
             </a:r>
             <a:endParaRPr lang="en-US" sz="1800" dirty="0"/>
           </a:p>
@@ -5620,7 +5543,7 @@
                 <a:ea typeface="Arial" pitchFamily="34" charset="-122"/>
                 <a:cs typeface="Arial" pitchFamily="34" charset="-120"/>
               </a:rPr>
-              <a:t>All resected patients relapse-free</a:t>
+              <a:t>Increased immune infiltration post-treatment observed</a:t>
             </a:r>
             <a:endParaRPr lang="en-US" sz="1800" dirty="0"/>
           </a:p>
@@ -5920,7 +5843,7 @@
                 <a:ea typeface="Arial" pitchFamily="34" charset="-122"/>
                 <a:cs typeface="Arial" pitchFamily="34" charset="-120"/>
               </a:rPr>
-              <a:t>Mouse model used for HCC study</a:t>
+              <a:t>Neoadjuvant efficacy remains intact</a:t>
             </a:r>
             <a:endParaRPr lang="en-US" sz="1800" dirty="0"/>
           </a:p>
@@ -5941,7 +5864,7 @@
                 <a:ea typeface="Arial" pitchFamily="34" charset="-122"/>
                 <a:cs typeface="Arial" pitchFamily="34" charset="-120"/>
               </a:rPr>
-              <a:t>Neoadjuvant efficacy remains intact</a:t>
+              <a:t>Mouse model used for study</a:t>
             </a:r>
             <a:endParaRPr lang="en-US" sz="1800" dirty="0"/>
           </a:p>
@@ -6220,7 +6143,7 @@
                 <a:ea typeface="Arial" pitchFamily="34" charset="-122"/>
                 <a:cs typeface="Arial" pitchFamily="34" charset="-120"/>
               </a:rPr>
-              <a:t>Lactobacillus johnsonii enhances CD8+ T-cell expansion.</a:t>
+              <a:t>Lactobacillus johnsonii enriches IFNγ+PD-1+CD8+ T cells.</a:t>
             </a:r>
             <a:endParaRPr lang="en-US" sz="1800" dirty="0"/>
           </a:p>
@@ -6241,7 +6164,7 @@
                 <a:ea typeface="Arial" pitchFamily="34" charset="-122"/>
                 <a:cs typeface="Arial" pitchFamily="34" charset="-120"/>
               </a:rPr>
-              <a:t>Higher levels correlate with disease-free survival.</a:t>
+              <a:t>Nicotinic acid enhances T-cell expansion and function.</a:t>
             </a:r>
             <a:endParaRPr lang="en-US" sz="1800" dirty="0"/>
           </a:p>
@@ -6262,49 +6185,7 @@
                 <a:ea typeface="Arial" pitchFamily="34" charset="-122"/>
                 <a:cs typeface="Arial" pitchFamily="34" charset="-120"/>
               </a:rPr>
-              <a:t>Nicotinic acid activates NF-κB pathway.</a:t>
-            </a:r>
-            <a:endParaRPr lang="en-US" sz="1800" dirty="0"/>
-          </a:p>
-          <a:p>
-            <a:pPr marL="342900" indent="-342900">
-              <a:spcAft>
-                <a:spcPts val="800"/>
-              </a:spcAft>
-              <a:buSzPct val="100000"/>
-              <a:buChar char="•"/>
-            </a:pPr>
-            <a:r>
-              <a:rPr lang="en-US" sz="1800" dirty="0">
-                <a:solidFill>
-                  <a:srgbClr val="333333"/>
-                </a:solidFill>
-                <a:latin typeface="Arial" pitchFamily="34" charset="0"/>
-                <a:ea typeface="Arial" pitchFamily="34" charset="-122"/>
-                <a:cs typeface="Arial" pitchFamily="34" charset="-120"/>
-              </a:rPr>
-              <a:t>Combination therapy reduces tumor relapse.</a:t>
-            </a:r>
-            <a:endParaRPr lang="en-US" sz="1800" dirty="0"/>
-          </a:p>
-          <a:p>
-            <a:pPr marL="342900" indent="-342900">
-              <a:spcAft>
-                <a:spcPts val="800"/>
-              </a:spcAft>
-              <a:buSzPct val="100000"/>
-              <a:buChar char="•"/>
-            </a:pPr>
-            <a:r>
-              <a:rPr lang="en-US" sz="1800" dirty="0">
-                <a:solidFill>
-                  <a:srgbClr val="333333"/>
-                </a:solidFill>
-                <a:latin typeface="Arial" pitchFamily="34" charset="0"/>
-                <a:ea typeface="Arial" pitchFamily="34" charset="-122"/>
-                <a:cs typeface="Arial" pitchFamily="34" charset="-120"/>
-              </a:rPr>
-              <a:t>CD8+ T cells are crucial for efficacy.</a:t>
+              <a:t>L. johnsonii activates NF-κB pathway for immune response.</a:t>
             </a:r>
             <a:endParaRPr lang="en-US" sz="1800" dirty="0"/>
           </a:p>
@@ -6625,7 +6506,7 @@
                 <a:ea typeface="Arial" pitchFamily="34" charset="-122"/>
                 <a:cs typeface="Arial" pitchFamily="34" charset="-120"/>
               </a:rPr>
-              <a:t>ANGPTL4 enhances tumor immune evasion.</a:t>
+              <a:t>ANGPTL4 enhances PD-L1 expression.</a:t>
             </a:r>
             <a:endParaRPr lang="en-US" sz="1800" dirty="0"/>
           </a:p>
@@ -6667,7 +6548,7 @@
                 <a:ea typeface="Arial" pitchFamily="34" charset="-122"/>
                 <a:cs typeface="Arial" pitchFamily="34" charset="-120"/>
               </a:rPr>
-              <a:t>Synergistic effect with anti-PD-L1 therapy.</a:t>
+              <a:t>Therapy synergizes with anti-PD-L1 treatment.</a:t>
             </a:r>
             <a:endParaRPr lang="en-US" sz="1800" dirty="0"/>
           </a:p>
@@ -6946,7 +6827,7 @@
                 <a:ea typeface="Arial" pitchFamily="34" charset="-122"/>
                 <a:cs typeface="Arial" pitchFamily="34" charset="-120"/>
               </a:rPr>
-              <a:t>Fc region affects PD-1 therapy efficacy.</a:t>
+              <a:t>Fc region impacts PD-1 therapy efficacy.</a:t>
             </a:r>
             <a:endParaRPr lang="en-US" sz="1800" dirty="0"/>
           </a:p>
@@ -6967,7 +6848,7 @@
                 <a:ea typeface="Arial" pitchFamily="34" charset="-122"/>
                 <a:cs typeface="Arial" pitchFamily="34" charset="-120"/>
               </a:rPr>
-              <a:t>Depletion of virus-specific CD8 T cells.</a:t>
+              <a:t>Depletion of virus-specific CD8 T cells observed.</a:t>
             </a:r>
             <a:endParaRPr lang="en-US" sz="1800" dirty="0"/>
           </a:p>
@@ -6988,7 +6869,49 @@
                 <a:ea typeface="Arial" pitchFamily="34" charset="-122"/>
                 <a:cs typeface="Arial" pitchFamily="34" charset="-120"/>
               </a:rPr>
-              <a:t>Phagocytic cells mediate T cell depletion.</a:t>
+              <a:t>Activating FcγR III mediates T cell depletion.</a:t>
+            </a:r>
+            <a:endParaRPr lang="en-US" sz="1800" dirty="0"/>
+          </a:p>
+          <a:p>
+            <a:pPr marL="342900" indent="-342900">
+              <a:spcAft>
+                <a:spcPts val="800"/>
+              </a:spcAft>
+              <a:buSzPct val="100000"/>
+              <a:buChar char="•"/>
+            </a:pPr>
+            <a:r>
+              <a:rPr lang="en-US" sz="1800" dirty="0">
+                <a:solidFill>
+                  <a:srgbClr val="333333"/>
+                </a:solidFill>
+                <a:latin typeface="Arial" pitchFamily="34" charset="0"/>
+                <a:ea typeface="Arial" pitchFamily="34" charset="-122"/>
+                <a:cs typeface="Arial" pitchFamily="34" charset="-120"/>
+              </a:rPr>
+              <a:t>Phagocytic cells are key effectors in vivo.</a:t>
+            </a:r>
+            <a:endParaRPr lang="en-US" sz="1800" dirty="0"/>
+          </a:p>
+          <a:p>
+            <a:pPr marL="342900" indent="-342900">
+              <a:spcAft>
+                <a:spcPts val="800"/>
+              </a:spcAft>
+              <a:buSzPct val="100000"/>
+              <a:buChar char="•"/>
+            </a:pPr>
+            <a:r>
+              <a:rPr lang="en-US" sz="1800" dirty="0">
+                <a:solidFill>
+                  <a:srgbClr val="333333"/>
+                </a:solidFill>
+                <a:latin typeface="Arial" pitchFamily="34" charset="0"/>
+                <a:ea typeface="Arial" pitchFamily="34" charset="-122"/>
+                <a:cs typeface="Arial" pitchFamily="34" charset="-120"/>
+              </a:rPr>
+              <a:t>Fc-intact antibodies may hinder liver cancer treatment.</a:t>
             </a:r>
             <a:endParaRPr lang="en-US" sz="1800" dirty="0"/>
           </a:p>
@@ -7330,7 +7253,7 @@
                 <a:ea typeface="Arial" pitchFamily="34" charset="-122"/>
                 <a:cs typeface="Arial" pitchFamily="34" charset="-120"/>
               </a:rPr>
-              <a:t>Potential for curative-intent strategies</a:t>
+              <a:t>Focus on curative-intent strategies</a:t>
             </a:r>
             <a:endParaRPr lang="en-US" sz="1800" dirty="0"/>
           </a:p>
@@ -7351,7 +7274,7 @@
                 <a:ea typeface="Arial" pitchFamily="34" charset="-122"/>
                 <a:cs typeface="Arial" pitchFamily="34" charset="-120"/>
               </a:rPr>
-              <a:t>Focus on advanced hepatocellular carcinoma</a:t>
+              <a:t>Addressing poor prognosis in HCC</a:t>
             </a:r>
             <a:endParaRPr lang="en-US" sz="1800" dirty="0"/>
           </a:p>

--- a/docs/digest-en.pptx
+++ b/docs/digest-en.pptx
@@ -2560,7 +2560,7 @@
                 <a:ea typeface="Arial" pitchFamily="34" charset="-122"/>
                 <a:cs typeface="Arial" pitchFamily="34" charset="-120"/>
               </a:rPr>
-              <a:t>Transarterial chemoembolization (TACE) used</a:t>
+              <a:t>Transarterial chemoembolization and PD-1 inhibitors</a:t>
             </a:r>
             <a:endParaRPr lang="en-US" sz="1800" dirty="0"/>
           </a:p>
@@ -2581,57 +2581,51 @@
                 <a:ea typeface="Arial" pitchFamily="34" charset="-122"/>
                 <a:cs typeface="Arial" pitchFamily="34" charset="-120"/>
               </a:rPr>
-              <a:t>PD-1 inhibitors enhance treatment efficacy</a:t>
+              <a:t>Phase 2 trial results show efficacy</a:t>
             </a:r>
             <a:endParaRPr lang="en-US" sz="1800" dirty="0"/>
           </a:p>
-          <a:p>
-            <a:pPr marL="342900" indent="-342900">
-              <a:spcAft>
-                <a:spcPts val="800"/>
-              </a:spcAft>
-              <a:buSzPct val="100000"/>
-              <a:buChar char="•"/>
-            </a:pPr>
-            <a:r>
-              <a:rPr lang="en-US" sz="1800" dirty="0">
-                <a:solidFill>
-                  <a:srgbClr val="333333"/>
-                </a:solidFill>
-                <a:latin typeface="Arial" pitchFamily="34" charset="0"/>
-                <a:ea typeface="Arial" pitchFamily="34" charset="-122"/>
-                <a:cs typeface="Arial" pitchFamily="34" charset="-120"/>
-              </a:rPr>
-              <a:t>Phase 2 trial demonstrates promising results</a:t>
-            </a:r>
-            <a:endParaRPr lang="en-US" sz="1800" dirty="0"/>
-          </a:p>
-          <a:p>
-            <a:pPr marL="342900" indent="-342900">
-              <a:spcAft>
-                <a:spcPts val="800"/>
-              </a:spcAft>
-              <a:buSzPct val="100000"/>
-              <a:buChar char="•"/>
-            </a:pPr>
-            <a:r>
-              <a:rPr lang="en-US" sz="1800" dirty="0">
-                <a:solidFill>
-                  <a:srgbClr val="333333"/>
-                </a:solidFill>
-                <a:latin typeface="Arial" pitchFamily="34" charset="0"/>
-                <a:ea typeface="Arial" pitchFamily="34" charset="-122"/>
-                <a:cs typeface="Arial" pitchFamily="34" charset="-120"/>
-              </a:rPr>
-              <a:t>Potential for conversion to surgical options</a:t>
-            </a:r>
-            <a:endParaRPr lang="en-US" sz="1800" dirty="0"/>
-          </a:p>
-        </p:txBody>
-      </p:sp>
-      <p:sp>
-        <p:nvSpPr>
-          <p:cNvPr id="7" name="Text 5">
+        </p:txBody>
+      </p:sp>
+      <p:sp>
+        <p:nvSpPr>
+          <p:cNvPr id="7" name="Text 5"/>
+          <p:cNvSpPr/>
+          <p:nvPr/>
+        </p:nvSpPr>
+        <p:spPr>
+          <a:xfrm>
+            <a:off x="731520" y="5852160"/>
+            <a:ext cx="10058400" cy="0"/>
+          </a:xfrm>
+          <a:prstGeom prst="rect">
+            <a:avLst/>
+          </a:prstGeom>
+          <a:noFill/>
+          <a:ln/>
+        </p:spPr>
+        <p:txBody>
+          <a:bodyPr wrap="square" lIns="0" tIns="0" rIns="0" bIns="0" rtlCol="0" anchor="ctr"/>
+          <a:lstStyle/>
+          <a:p>
+            <a:pPr indent="0" marL="0">
+              <a:buNone/>
+            </a:pPr>
+            <a:r>
+              <a:rPr lang="en-US" sz="800" dirty="0">
+                <a:solidFill>
+                  <a:srgbClr val="888888"/>
+                </a:solidFill>
+              </a:rPr>
+              <a:t>X Zhang, H Cai, W Peng. … and Targeted Therapy. 2026</a:t>
+            </a:r>
+            <a:endParaRPr lang="en-US" sz="800" dirty="0"/>
+          </a:p>
+        </p:txBody>
+      </p:sp>
+      <p:sp>
+        <p:nvSpPr>
+          <p:cNvPr id="8" name="Text 6">
             <a:hlinkClick r:id="rId2" tooltip=""/>
           </p:cNvPr>
           <p:cNvSpPr/>
@@ -2902,7 +2896,7 @@
                 <a:ea typeface="Arial" pitchFamily="34" charset="-122"/>
                 <a:cs typeface="Arial" pitchFamily="34" charset="-120"/>
               </a:rPr>
-              <a:t>Atez+Bev shows 25% ORR in HCC patients.</a:t>
+              <a:t>Atez+Bev shows efficacy after Dur+Tre</a:t>
             </a:r>
             <a:endParaRPr lang="en-US" sz="1800" dirty="0"/>
           </a:p>
@@ -2923,7 +2917,7 @@
                 <a:ea typeface="Arial" pitchFamily="34" charset="-122"/>
                 <a:cs typeface="Arial" pitchFamily="34" charset="-120"/>
               </a:rPr>
-              <a:t>75% DCR indicates favorable disease control.</a:t>
+              <a:t>Objective response rate is 25.0%</a:t>
             </a:r>
             <a:endParaRPr lang="en-US" sz="1800" dirty="0"/>
           </a:p>
@@ -2944,57 +2938,51 @@
                 <a:ea typeface="Arial" pitchFamily="34" charset="-122"/>
                 <a:cs typeface="Arial" pitchFamily="34" charset="-120"/>
               </a:rPr>
-              <a:t>Prior Dur+Tre may enhance immune response.</a:t>
+              <a:t>Adverse events differ between regimens</a:t>
             </a:r>
             <a:endParaRPr lang="en-US" sz="1800" dirty="0"/>
           </a:p>
-          <a:p>
-            <a:pPr marL="342900" indent="-342900">
-              <a:spcAft>
-                <a:spcPts val="800"/>
-              </a:spcAft>
-              <a:buSzPct val="100000"/>
-              <a:buChar char="•"/>
-            </a:pPr>
-            <a:r>
-              <a:rPr lang="en-US" sz="1800" dirty="0">
-                <a:solidFill>
-                  <a:srgbClr val="333333"/>
-                </a:solidFill>
-                <a:latin typeface="Arial" pitchFamily="34" charset="0"/>
-                <a:ea typeface="Arial" pitchFamily="34" charset="-122"/>
-                <a:cs typeface="Arial" pitchFamily="34" charset="-120"/>
-              </a:rPr>
-              <a:t>Common adverse events include pruritus and proteinuria.</a:t>
-            </a:r>
-            <a:endParaRPr lang="en-US" sz="1800" dirty="0"/>
-          </a:p>
-          <a:p>
-            <a:pPr marL="342900" indent="-342900">
-              <a:spcAft>
-                <a:spcPts val="800"/>
-              </a:spcAft>
-              <a:buSzPct val="100000"/>
-              <a:buChar char="•"/>
-            </a:pPr>
-            <a:r>
-              <a:rPr lang="en-US" sz="1800" dirty="0">
-                <a:solidFill>
-                  <a:srgbClr val="333333"/>
-                </a:solidFill>
-                <a:latin typeface="Arial" pitchFamily="34" charset="0"/>
-                <a:ea typeface="Arial" pitchFamily="34" charset="-122"/>
-                <a:cs typeface="Arial" pitchFamily="34" charset="-120"/>
-              </a:rPr>
-              <a:t>Sequential therapy offers new treatment options.</a:t>
-            </a:r>
-            <a:endParaRPr lang="en-US" sz="1800" dirty="0"/>
-          </a:p>
-        </p:txBody>
-      </p:sp>
-      <p:sp>
-        <p:nvSpPr>
-          <p:cNvPr id="7" name="Text 5">
+        </p:txBody>
+      </p:sp>
+      <p:sp>
+        <p:nvSpPr>
+          <p:cNvPr id="7" name="Text 5"/>
+          <p:cNvSpPr/>
+          <p:nvPr/>
+        </p:nvSpPr>
+        <p:spPr>
+          <a:xfrm>
+            <a:off x="731520" y="5852160"/>
+            <a:ext cx="10058400" cy="0"/>
+          </a:xfrm>
+          <a:prstGeom prst="rect">
+            <a:avLst/>
+          </a:prstGeom>
+          <a:noFill/>
+          <a:ln/>
+        </p:spPr>
+        <p:txBody>
+          <a:bodyPr wrap="square" lIns="0" tIns="0" rIns="0" bIns="0" rtlCol="0" anchor="ctr"/>
+          <a:lstStyle/>
+          <a:p>
+            <a:pPr indent="0" marL="0">
+              <a:buNone/>
+            </a:pPr>
+            <a:r>
+              <a:rPr lang="en-US" sz="800" dirty="0">
+                <a:solidFill>
+                  <a:srgbClr val="888888"/>
+                </a:solidFill>
+              </a:rPr>
+              <a:t>Uchikawa Shinsuke, Kawaoka Tomokazu, Tanaka Aiko et al.. Internal medicine (Tokyo, Japan). 2026-04-16 DOI: 10.2169/internalmedicine.6021-25</a:t>
+            </a:r>
+            <a:endParaRPr lang="en-US" sz="800" dirty="0"/>
+          </a:p>
+        </p:txBody>
+      </p:sp>
+      <p:sp>
+        <p:nvSpPr>
+          <p:cNvPr id="8" name="Text 6">
             <a:hlinkClick r:id="rId2" tooltip=""/>
           </p:cNvPr>
           <p:cNvSpPr/>
@@ -3307,7 +3295,7 @@
                 <a:ea typeface="Arial" pitchFamily="34" charset="-122"/>
                 <a:cs typeface="Arial" pitchFamily="34" charset="-120"/>
               </a:rPr>
-              <a:t>Evaluation of local progression-free survival</a:t>
+              <a:t>Analysis of local progression-free survival</a:t>
             </a:r>
             <a:endParaRPr lang="en-US" sz="1800" dirty="0"/>
           </a:p>
@@ -3357,7 +3345,43 @@
       </p:sp>
       <p:sp>
         <p:nvSpPr>
-          <p:cNvPr id="7" name="Text 5">
+          <p:cNvPr id="7" name="Text 5"/>
+          <p:cNvSpPr/>
+          <p:nvPr/>
+        </p:nvSpPr>
+        <p:spPr>
+          <a:xfrm>
+            <a:off x="731520" y="5852160"/>
+            <a:ext cx="10058400" cy="0"/>
+          </a:xfrm>
+          <a:prstGeom prst="rect">
+            <a:avLst/>
+          </a:prstGeom>
+          <a:noFill/>
+          <a:ln/>
+        </p:spPr>
+        <p:txBody>
+          <a:bodyPr wrap="square" lIns="0" tIns="0" rIns="0" bIns="0" rtlCol="0" anchor="ctr"/>
+          <a:lstStyle/>
+          <a:p>
+            <a:pPr indent="0" marL="0">
+              <a:buNone/>
+            </a:pPr>
+            <a:r>
+              <a:rPr lang="en-US" sz="800" dirty="0">
+                <a:solidFill>
+                  <a:srgbClr val="888888"/>
+                </a:solidFill>
+              </a:rPr>
+              <a:t>SH Bae, SH Choi, SM Yoon. Journal of Clinical …. 2026</a:t>
+            </a:r>
+            <a:endParaRPr lang="en-US" sz="800" dirty="0"/>
+          </a:p>
+        </p:txBody>
+      </p:sp>
+      <p:sp>
+        <p:nvSpPr>
+          <p:cNvPr id="8" name="Text 6">
             <a:hlinkClick r:id="rId2" tooltip=""/>
           </p:cNvPr>
           <p:cNvSpPr/>
@@ -3566,7 +3590,7 @@
                   <a:srgbClr val="FFFFFF"/>
                 </a:solidFill>
               </a:rPr>
-              <a:t>1. **免疫療法的潛力**  </a:t>
+              <a:t>1. **免疫治療的潛力**  </a:t>
             </a:r>
             <a:endParaRPr lang="en-US" sz="1200" dirty="0"/>
           </a:p>
@@ -3583,7 +3607,7 @@
                   <a:srgbClr val="FFFFFF"/>
                 </a:solidFill>
               </a:rPr>
-              <a:t>   Immunotherapy has shown significant promise in enhancing treatment outcomes for hepatocellular carcinoma (HCC), particularly in advanced stages.  </a:t>
+              <a:t>   The integration of immune therapy with traditional treatments, such as surgical resection and local ablation, shows promise in enhancing patient outcomes in hepatocellular carcinoma (HCC).  </a:t>
             </a:r>
             <a:endParaRPr lang="en-US" sz="1200" dirty="0"/>
           </a:p>
@@ -3600,7 +3624,7 @@
                   <a:srgbClr val="FFFFFF"/>
                 </a:solidFill>
               </a:rPr>
-              <a:t>   免疫療法在改善肝細胞癌（HCC）治療結果方面顯示出顯著潛力，特別是在晚期階段。</a:t>
+              <a:t>   免疫治療與傳統療法（如手術切除和局部消融）的結合顯示出改善肝細胞癌（HCC）患者預後的潛力。</a:t>
             </a:r>
             <a:endParaRPr lang="en-US" sz="1200" dirty="0"/>
           </a:p>
@@ -3643,7 +3667,7 @@
                   <a:srgbClr val="FFFFFF"/>
                 </a:solidFill>
               </a:rPr>
-              <a:t>   Neoadjuvant therapies, including stereotactic body radiation therapy combined with immune therapy, can favorably remodel the tumor microenvironment, promoting a more effective immune response.  </a:t>
+              <a:t>   Neoadjuvant therapies that remodel the tumor microenvironment can significantly improve the efficacy of subsequent immune treatments, suggesting a need for early intervention strategies.  </a:t>
             </a:r>
             <a:endParaRPr lang="en-US" sz="1200" dirty="0"/>
           </a:p>
@@ -3660,7 +3684,7 @@
                   <a:srgbClr val="FFFFFF"/>
                 </a:solidFill>
               </a:rPr>
-              <a:t>   新輔助療法，包括立體定向體部放射療法結合免疫療法，可以有利於重塑腫瘤微環境，促進更有效的免疫反應。</a:t>
+              <a:t>   重塑腫瘤微環境的術前療法可以顯著提高隨後免疫治療的療效，這表明需要早期介入策略。</a:t>
             </a:r>
             <a:endParaRPr lang="en-US" sz="1200" dirty="0"/>
           </a:p>
@@ -3703,7 +3727,7 @@
                   <a:srgbClr val="FFFFFF"/>
                 </a:solidFill>
               </a:rPr>
-              <a:t>   Cancer-associated fibroblasts (CAFs) play a crucial role in tumor immunosuppression through metabolic pathways, indicating potential therapeutic targets for enhancing immunotherapy efficacy.  </a:t>
+              <a:t>   Cancer-associated fibroblasts (CAFs) play a crucial role in promoting immunosuppression in HCC, highlighting the importance of targeting these cells to enhance immune responses.  </a:t>
             </a:r>
             <a:endParaRPr lang="en-US" sz="1200" dirty="0"/>
           </a:p>
@@ -3720,7 +3744,7 @@
                   <a:srgbClr val="FFFFFF"/>
                 </a:solidFill>
               </a:rPr>
-              <a:t>   癌症相關成纖維細胞（CAFs）在腫瘤免疫抑制中扮演關鍵角色，透過代謝途徑顯示出增強免疫療法療效的潛在治療靶點。</a:t>
+              <a:t>   癌症相關成纖維細胞（CAFs）在促進HCC中的免疫抑制方面扮演著關鍵角色，強調了針對這些細胞以增強免疫反應的重要性。</a:t>
             </a:r>
             <a:endParaRPr lang="en-US" sz="1200" dirty="0"/>
           </a:p>
@@ -3746,7 +3770,7 @@
                   <a:srgbClr val="FFFFFF"/>
                 </a:solidFill>
               </a:rPr>
-              <a:t>4. **手術後復發的挑戰**  </a:t>
+              <a:t>4. **病毒特異性T細胞的耗竭**  </a:t>
             </a:r>
             <a:endParaRPr lang="en-US" sz="1200" dirty="0"/>
           </a:p>
@@ -3763,7 +3787,7 @@
                   <a:srgbClr val="FFFFFF"/>
                 </a:solidFill>
               </a:rPr>
-              <a:t>   Despite the effectiveness of surgical resection for early-stage HCC, postoperative recurrence remains a significant clinical challenge that necessitates further investigation into underlying mechanisms.  </a:t>
+              <a:t>   The selective depletion of virus-specific CD8 T cells during PD-1 therapy underscores the complexity of immune responses in chronic infections and their implications for HCC treatment.  </a:t>
             </a:r>
             <a:endParaRPr lang="en-US" sz="1200" dirty="0"/>
           </a:p>
@@ -3780,7 +3804,7 @@
                   <a:srgbClr val="FFFFFF"/>
                 </a:solidFill>
               </a:rPr>
-              <a:t>   儘管手術切除對早期HCC有效，但術後復發仍然是一個重大臨床挑戰，需進一步研究其潛在機制。</a:t>
+              <a:t>   在PD-1治療過程中病毒特異性CD8 T細胞的選擇性耗竭突顯了慢性感染中免疫反應的複雜性及其對HCC治療的影響。</a:t>
             </a:r>
             <a:endParaRPr lang="en-US" sz="1200" dirty="0"/>
           </a:p>
@@ -3806,7 +3830,7 @@
                   <a:srgbClr val="FFFFFF"/>
                 </a:solidFill>
               </a:rPr>
-              <a:t>5. **多模式治療的前景**  </a:t>
+              <a:t>5. **多模式療法的必要性**  </a:t>
             </a:r>
             <a:endParaRPr lang="en-US" sz="1200" dirty="0"/>
           </a:p>
@@ -3823,7 +3847,7 @@
                   <a:srgbClr val="FFFFFF"/>
                 </a:solidFill>
               </a:rPr>
-              <a:t>   Combining various treatment modalities, such as transarterial chemoembolization with immune checkpoint inhibitors, shows potential in improving outcomes for patients with unresectable HCC.</a:t>
+              <a:t>   The combination of various treatment modalities, such as transarterial chemoembolization (TACE) with immune inhibitors, indicates a shift towards more comprehensive treatment approaches for unresectable HCC.</a:t>
             </a:r>
             <a:endParaRPr lang="en-US" sz="1200" dirty="0"/>
           </a:p>
@@ -3969,7 +3993,7 @@
                   <a:srgbClr val="FFFFFF"/>
                 </a:solidFill>
               </a:rPr>
-              <a:t>結合多種治療方式，如經動脈化療栓塞與免疫檢查點抑制劑，顯示出改善不可切除HCC患者預後的潛力。</a:t>
+              <a:t>將各種治療模式結合使用（如將經動脈化療栓塞（TACE）與免疫抑制劑結合）表明了對無法切除的HCC採取更全面治療方法的趨勢。</a:t>
             </a:r>
             <a:endParaRPr lang="en-US" sz="1200" dirty="0"/>
           </a:p>
@@ -4021,7 +4045,7 @@
                   <a:srgbClr val="FFFFFF"/>
                 </a:solidFill>
               </a:rPr>
-              <a:t>1. **早期階段的免疫療法應用**  </a:t>
+              <a:t>1. **早期免疫治療的優化**  </a:t>
             </a:r>
             <a:endParaRPr lang="en-US" sz="1200" dirty="0"/>
           </a:p>
@@ -4038,7 +4062,7 @@
                   <a:srgbClr val="FFFFFF"/>
                 </a:solidFill>
               </a:rPr>
-              <a:t>   Investigate optimal strategies for integrating immunotherapy in earlier stages of HCC to improve patient outcomes.  </a:t>
+              <a:t>   Future studies should focus on optimizing the timing and combination of immune therapies in early-stage HCC to maximize treatment efficacy.  </a:t>
             </a:r>
             <a:endParaRPr lang="en-US" sz="1200" dirty="0"/>
           </a:p>
@@ -4055,7 +4079,7 @@
                   <a:srgbClr val="FFFFFF"/>
                 </a:solidFill>
               </a:rPr>
-              <a:t>   探討在HCC早期階段整合免疫療法的最佳策略，以改善患者預後。</a:t>
+              <a:t>   未來的研究應集中於優化早期HCC中免疫治療的時機和組合，以最大化治療效果。</a:t>
             </a:r>
             <a:endParaRPr lang="en-US" sz="1200" dirty="0"/>
           </a:p>
@@ -4081,7 +4105,7 @@
                   <a:srgbClr val="FFFFFF"/>
                 </a:solidFill>
               </a:rPr>
-              <a:t>2. **腫瘤微環境的深入研究**  </a:t>
+              <a:t>2. **癌症相關成纖維細胞的靶向治療**  </a:t>
             </a:r>
             <a:endParaRPr lang="en-US" sz="1200" dirty="0"/>
           </a:p>
@@ -4098,7 +4122,7 @@
                   <a:srgbClr val="FFFFFF"/>
                 </a:solidFill>
               </a:rPr>
-              <a:t>   Further explore the mechanisms by which the tumor microenvironment influences immune response and therapy resistance in HCC.  </a:t>
+              <a:t>   Investigating targeted therapies against CAFs and their metabolic pathways may provide new avenues for enhancing anti-tumor immunity in HCC.  </a:t>
             </a:r>
             <a:endParaRPr lang="en-US" sz="1200" dirty="0"/>
           </a:p>
@@ -4115,7 +4139,7 @@
                   <a:srgbClr val="FFFFFF"/>
                 </a:solidFill>
               </a:rPr>
-              <a:t>   進一步研究腫瘤微環境如何影響HCC中的免疫反應和療法抵抗的機制。</a:t>
+              <a:t>   研究針對CAFs及其代謝途徑的靶向療法可能為增強HCC中的抗腫瘤免疫提供新的途徑。</a:t>
             </a:r>
             <a:endParaRPr lang="en-US" sz="1200" dirty="0"/>
           </a:p>
@@ -4141,7 +4165,7 @@
                   <a:srgbClr val="FFFFFF"/>
                 </a:solidFill>
               </a:rPr>
-              <a:t>3. **CAFs的代謝調控**  </a:t>
+              <a:t>3. **多模式療法的臨床試驗**  </a:t>
             </a:r>
             <a:endParaRPr lang="en-US" sz="1200" dirty="0"/>
           </a:p>
@@ -4158,7 +4182,7 @@
                   <a:srgbClr val="FFFFFF"/>
                 </a:solidFill>
               </a:rPr>
-              <a:t>   Elucidate the metabolic pathways of cancer-associated fibroblasts and their impact on immunosuppression to identify new therapeutic targets.  </a:t>
+              <a:t>   Conducting clinical trials that evaluate the efficacy of combined therapies, including immune checkpoint inhibitors and local ablation techniques, is essential for establishing best practices.  </a:t>
             </a:r>
             <a:endParaRPr lang="en-US" sz="1200" dirty="0"/>
           </a:p>
@@ -4175,7 +4199,7 @@
                   <a:srgbClr val="FFFFFF"/>
                 </a:solidFill>
               </a:rPr>
-              <a:t>   阐明癌症相關成纖維細胞的代謝途徑及其對免疫抑制的影響，以識別新的治療靶點。</a:t>
+              <a:t>   開展評估包括免疫檢查點抑制劑和局部消融技術的聯合療法有效性的臨床試驗對於建立最佳實踐至關重要。</a:t>
             </a:r>
             <a:endParaRPr lang="en-US" sz="1200" dirty="0"/>
           </a:p>
@@ -4201,7 +4225,7 @@
                   <a:srgbClr val="FFFFFF"/>
                 </a:solidFill>
               </a:rPr>
-              <a:t>4. **多模式治療的臨床試驗**  </a:t>
+              <a:t>4. **腫瘤微環境的深入研究**  </a:t>
             </a:r>
             <a:endParaRPr lang="en-US" sz="1200" dirty="0"/>
           </a:p>
@@ -4218,7 +4242,7 @@
                   <a:srgbClr val="FFFFFF"/>
                 </a:solidFill>
               </a:rPr>
-              <a:t>   Conduct clinical trials to evaluate the efficacy and safety of combination therapies involving immunotherapy and local ablative techniques for HCC.  </a:t>
+              <a:t>   Further research into the tumor microenvironment and its interactions with immune cells can unveil new therapeutic targets and strategies for HCC treatment.  </a:t>
             </a:r>
             <a:endParaRPr lang="en-US" sz="1200" dirty="0"/>
           </a:p>
@@ -4235,7 +4259,7 @@
                   <a:srgbClr val="FFFFFF"/>
                 </a:solidFill>
               </a:rPr>
-              <a:t>   進行臨床試驗以評估結合免疫療法和局部消融技術的療效和安全性。</a:t>
+              <a:t>   對腫瘤微環境及其與免疫細胞的相互作用的深入研究可以揭示HCC治療的新療法靶點和策略。</a:t>
             </a:r>
             <a:endParaRPr lang="en-US" sz="1200" dirty="0"/>
           </a:p>
@@ -4261,7 +4285,7 @@
                   <a:srgbClr val="FFFFFF"/>
                 </a:solidFill>
               </a:rPr>
-              <a:t>5. **術後復發的預防策略**  </a:t>
+              <a:t>5. **長期療效與耐藥性研究**  </a:t>
             </a:r>
             <a:endParaRPr lang="en-US" sz="1200" dirty="0"/>
           </a:p>
@@ -4278,7 +4302,7 @@
                   <a:srgbClr val="FFFFFF"/>
                 </a:solidFill>
               </a:rPr>
-              <a:t>   Develop and test strategies to prevent postoperative recurrence in HCC patients, focusing on adjuvant therapies that enhance immune response.  </a:t>
+              <a:t>   Investigating the long-term effects and potential resistance mechanisms associated with current immunotherapies will be crucial for improving patient outcomes in HCC.  </a:t>
             </a:r>
             <a:endParaRPr lang="en-US" sz="1200" dirty="0"/>
           </a:p>
@@ -4295,7 +4319,7 @@
                   <a:srgbClr val="FFFFFF"/>
                 </a:solidFill>
               </a:rPr>
-              <a:t>   開發和測試預防HCC患者術後復發的策略，重點在於增強免疫反應的輔助療法。</a:t>
+              <a:t>   研究目前免疫療法的長期效果及潛在的耐藥機制對於改善HCC患者的預後至關重要。</a:t>
             </a:r>
             <a:endParaRPr lang="en-US" sz="1200" dirty="0"/>
           </a:p>
@@ -5180,7 +5204,7 @@
                 <a:ea typeface="Arial" pitchFamily="34" charset="-122"/>
                 <a:cs typeface="Arial" pitchFamily="34" charset="-120"/>
               </a:rPr>
-              <a:t>Precision oncology targets iCCA mutations.</a:t>
+              <a:t>Precision oncology benefits iCCA patients.</a:t>
             </a:r>
             <a:endParaRPr lang="en-US" sz="1800" dirty="0"/>
           </a:p>
@@ -5188,7 +5212,43 @@
       </p:sp>
       <p:sp>
         <p:nvSpPr>
-          <p:cNvPr id="7" name="Text 5">
+          <p:cNvPr id="7" name="Text 5"/>
+          <p:cNvSpPr/>
+          <p:nvPr/>
+        </p:nvSpPr>
+        <p:spPr>
+          <a:xfrm>
+            <a:off x="731520" y="5852160"/>
+            <a:ext cx="10058400" cy="0"/>
+          </a:xfrm>
+          <a:prstGeom prst="rect">
+            <a:avLst/>
+          </a:prstGeom>
+          <a:noFill/>
+          <a:ln/>
+        </p:spPr>
+        <p:txBody>
+          <a:bodyPr wrap="square" lIns="0" tIns="0" rIns="0" bIns="0" rtlCol="0" anchor="ctr"/>
+          <a:lstStyle/>
+          <a:p>
+            <a:pPr indent="0" marL="0">
+              <a:buNone/>
+            </a:pPr>
+            <a:r>
+              <a:rPr lang="en-US" sz="800" dirty="0">
+                <a:solidFill>
+                  <a:srgbClr val="888888"/>
+                </a:solidFill>
+              </a:rPr>
+              <a:t>Llovet Josep M, Pinyol Roser, Affo Silvia et al.. Cell. 2026-04-17 DOI: 10.1016/j.cell.2026.03.001</a:t>
+            </a:r>
+            <a:endParaRPr lang="en-US" sz="800" dirty="0"/>
+          </a:p>
+        </p:txBody>
+      </p:sp>
+      <p:sp>
+        <p:nvSpPr>
+          <p:cNvPr id="8" name="Text 6">
             <a:hlinkClick r:id="rId2" tooltip=""/>
           </p:cNvPr>
           <p:cNvSpPr/>
@@ -5459,7 +5519,7 @@
                 <a:ea typeface="Arial" pitchFamily="34" charset="-122"/>
                 <a:cs typeface="Arial" pitchFamily="34" charset="-120"/>
               </a:rPr>
-              <a:t>Neoadjuvant SBRT combined with immune therapy</a:t>
+              <a:t>Neoadjuvant SBRT plus immune therapy tested</a:t>
             </a:r>
             <a:endParaRPr lang="en-US" sz="1800" dirty="0"/>
           </a:p>
@@ -5480,7 +5540,7 @@
                 <a:ea typeface="Arial" pitchFamily="34" charset="-122"/>
                 <a:cs typeface="Arial" pitchFamily="34" charset="-120"/>
               </a:rPr>
-              <a:t>Pilot study with 8 patients, safety assessed</a:t>
+              <a:t>Pilot study with 8 patients conducted</a:t>
             </a:r>
             <a:endParaRPr lang="en-US" sz="1800" dirty="0"/>
           </a:p>
@@ -5501,7 +5561,7 @@
                 <a:ea typeface="Arial" pitchFamily="34" charset="-122"/>
                 <a:cs typeface="Arial" pitchFamily="34" charset="-120"/>
               </a:rPr>
-              <a:t>One patient had grade 3 treatment-related adverse event</a:t>
+              <a:t>Safety endpoint: low grade 3-4 trAE</a:t>
             </a:r>
             <a:endParaRPr lang="en-US" sz="1800" dirty="0"/>
           </a:p>
@@ -5522,7 +5582,7 @@
                 <a:ea typeface="Arial" pitchFamily="34" charset="-122"/>
                 <a:cs typeface="Arial" pitchFamily="34" charset="-120"/>
               </a:rPr>
-              <a:t>All resected patients achieved R0 resection</a:t>
+              <a:t>All resected patients relapse-free</a:t>
             </a:r>
             <a:endParaRPr lang="en-US" sz="1800" dirty="0"/>
           </a:p>
@@ -5543,7 +5603,7 @@
                 <a:ea typeface="Arial" pitchFamily="34" charset="-122"/>
                 <a:cs typeface="Arial" pitchFamily="34" charset="-120"/>
               </a:rPr>
-              <a:t>Increased immune infiltration post-treatment observed</a:t>
+              <a:t>Enhanced anti-cancer immune infiltration observed</a:t>
             </a:r>
             <a:endParaRPr lang="en-US" sz="1800" dirty="0"/>
           </a:p>
@@ -5551,7 +5611,43 @@
       </p:sp>
       <p:sp>
         <p:nvSpPr>
-          <p:cNvPr id="7" name="Text 5">
+          <p:cNvPr id="7" name="Text 5"/>
+          <p:cNvSpPr/>
+          <p:nvPr/>
+        </p:nvSpPr>
+        <p:spPr>
+          <a:xfrm>
+            <a:off x="731520" y="5852160"/>
+            <a:ext cx="10058400" cy="0"/>
+          </a:xfrm>
+          <a:prstGeom prst="rect">
+            <a:avLst/>
+          </a:prstGeom>
+          <a:noFill/>
+          <a:ln/>
+        </p:spPr>
+        <p:txBody>
+          <a:bodyPr wrap="square" lIns="0" tIns="0" rIns="0" bIns="0" rtlCol="0" anchor="ctr"/>
+          <a:lstStyle/>
+          <a:p>
+            <a:pPr indent="0" marL="0">
+              <a:buNone/>
+            </a:pPr>
+            <a:r>
+              <a:rPr lang="en-US" sz="800" dirty="0">
+                <a:solidFill>
+                  <a:srgbClr val="888888"/>
+                </a:solidFill>
+              </a:rPr>
+              <a:t>Cosner Zoe, Guo Zhoubo, Nawrocki Cole et al.. Clinical cancer research : an official journal of the American Association for Cancer Research. 2026-04-15 DOI: 10.1158/1078-0432.CCR-25-4779</a:t>
+            </a:r>
+            <a:endParaRPr lang="en-US" sz="800" dirty="0"/>
+          </a:p>
+        </p:txBody>
+      </p:sp>
+      <p:sp>
+        <p:nvSpPr>
+          <p:cNvPr id="8" name="Text 6">
             <a:hlinkClick r:id="rId2" tooltip=""/>
           </p:cNvPr>
           <p:cNvSpPr/>
@@ -5843,7 +5939,7 @@
                 <a:ea typeface="Arial" pitchFamily="34" charset="-122"/>
                 <a:cs typeface="Arial" pitchFamily="34" charset="-120"/>
               </a:rPr>
-              <a:t>Neoadjuvant efficacy remains intact</a:t>
+              <a:t>Mouse model used for study</a:t>
             </a:r>
             <a:endParaRPr lang="en-US" sz="1800" dirty="0"/>
           </a:p>
@@ -5864,7 +5960,7 @@
                 <a:ea typeface="Arial" pitchFamily="34" charset="-122"/>
                 <a:cs typeface="Arial" pitchFamily="34" charset="-120"/>
               </a:rPr>
-              <a:t>Mouse model used for study</a:t>
+              <a:t>Neoadjuvant efficacy remains intact</a:t>
             </a:r>
             <a:endParaRPr lang="en-US" sz="1800" dirty="0"/>
           </a:p>
@@ -5872,7 +5968,43 @@
       </p:sp>
       <p:sp>
         <p:nvSpPr>
-          <p:cNvPr id="7" name="Text 5">
+          <p:cNvPr id="7" name="Text 5"/>
+          <p:cNvSpPr/>
+          <p:nvPr/>
+        </p:nvSpPr>
+        <p:spPr>
+          <a:xfrm>
+            <a:off x="731520" y="5852160"/>
+            <a:ext cx="10058400" cy="0"/>
+          </a:xfrm>
+          <a:prstGeom prst="rect">
+            <a:avLst/>
+          </a:prstGeom>
+          <a:noFill/>
+          <a:ln/>
+        </p:spPr>
+        <p:txBody>
+          <a:bodyPr wrap="square" lIns="0" tIns="0" rIns="0" bIns="0" rtlCol="0" anchor="ctr"/>
+          <a:lstStyle/>
+          <a:p>
+            <a:pPr indent="0" marL="0">
+              <a:buNone/>
+            </a:pPr>
+            <a:r>
+              <a:rPr lang="en-US" sz="800" dirty="0">
+                <a:solidFill>
+                  <a:srgbClr val="888888"/>
+                </a:solidFill>
+              </a:rPr>
+              <a:t>Bouguerra Roqiya, El Hajji Sofia, Wassmer Charles-Henri et al.. Hepatology (Baltimore, Md.). 2026-04-16 DOI: 10.1097/HEP.0000000000001731</a:t>
+            </a:r>
+            <a:endParaRPr lang="en-US" sz="800" dirty="0"/>
+          </a:p>
+        </p:txBody>
+      </p:sp>
+      <p:sp>
+        <p:nvSpPr>
+          <p:cNvPr id="8" name="Text 6">
             <a:hlinkClick r:id="rId2" tooltip=""/>
           </p:cNvPr>
           <p:cNvSpPr/>
@@ -6143,7 +6275,7 @@
                 <a:ea typeface="Arial" pitchFamily="34" charset="-122"/>
                 <a:cs typeface="Arial" pitchFamily="34" charset="-120"/>
               </a:rPr>
-              <a:t>Lactobacillus johnsonii enriches IFNγ+PD-1+CD8+ T cells.</a:t>
+              <a:t>Lactobacillus johnsonii enhances CD8+ T-cell expansion.</a:t>
             </a:r>
             <a:endParaRPr lang="en-US" sz="1800" dirty="0"/>
           </a:p>
@@ -6164,7 +6296,7 @@
                 <a:ea typeface="Arial" pitchFamily="34" charset="-122"/>
                 <a:cs typeface="Arial" pitchFamily="34" charset="-120"/>
               </a:rPr>
-              <a:t>Nicotinic acid enhances T-cell expansion and function.</a:t>
+              <a:t>Higher Lactobacillus correlates with disease-free survival.</a:t>
             </a:r>
             <a:endParaRPr lang="en-US" sz="1800" dirty="0"/>
           </a:p>
@@ -6185,15 +6317,93 @@
                 <a:ea typeface="Arial" pitchFamily="34" charset="-122"/>
                 <a:cs typeface="Arial" pitchFamily="34" charset="-120"/>
               </a:rPr>
-              <a:t>L. johnsonii activates NF-κB pathway for immune response.</a:t>
+              <a:t>Nicotinic acid activates NF-κB pathway in T cells.</a:t>
             </a:r>
             <a:endParaRPr lang="en-US" sz="1800" dirty="0"/>
           </a:p>
-        </p:txBody>
-      </p:sp>
-      <p:sp>
-        <p:nvSpPr>
-          <p:cNvPr id="7" name="Text 5">
+          <a:p>
+            <a:pPr marL="342900" indent="-342900">
+              <a:spcAft>
+                <a:spcPts val="800"/>
+              </a:spcAft>
+              <a:buSzPct val="100000"/>
+              <a:buChar char="•"/>
+            </a:pPr>
+            <a:r>
+              <a:rPr lang="en-US" sz="1800" dirty="0">
+                <a:solidFill>
+                  <a:srgbClr val="333333"/>
+                </a:solidFill>
+                <a:latin typeface="Arial" pitchFamily="34" charset="0"/>
+                <a:ea typeface="Arial" pitchFamily="34" charset="-122"/>
+                <a:cs typeface="Arial" pitchFamily="34" charset="-120"/>
+              </a:rPr>
+              <a:t>Combination therapy reduces tumor relapse effectively.</a:t>
+            </a:r>
+            <a:endParaRPr lang="en-US" sz="1800" dirty="0"/>
+          </a:p>
+          <a:p>
+            <a:pPr marL="342900" indent="-342900">
+              <a:spcAft>
+                <a:spcPts val="800"/>
+              </a:spcAft>
+              <a:buSzPct val="100000"/>
+              <a:buChar char="•"/>
+            </a:pPr>
+            <a:r>
+              <a:rPr lang="en-US" sz="1800" dirty="0">
+                <a:solidFill>
+                  <a:srgbClr val="333333"/>
+                </a:solidFill>
+                <a:latin typeface="Arial" pitchFamily="34" charset="0"/>
+                <a:ea typeface="Arial" pitchFamily="34" charset="-122"/>
+                <a:cs typeface="Arial" pitchFamily="34" charset="-120"/>
+              </a:rPr>
+              <a:t>CD8+ T cells are essential for antitumor efficacy.</a:t>
+            </a:r>
+            <a:endParaRPr lang="en-US" sz="1800" dirty="0"/>
+          </a:p>
+        </p:txBody>
+      </p:sp>
+      <p:sp>
+        <p:nvSpPr>
+          <p:cNvPr id="7" name="Text 5"/>
+          <p:cNvSpPr/>
+          <p:nvPr/>
+        </p:nvSpPr>
+        <p:spPr>
+          <a:xfrm>
+            <a:off x="731520" y="5852160"/>
+            <a:ext cx="10058400" cy="0"/>
+          </a:xfrm>
+          <a:prstGeom prst="rect">
+            <a:avLst/>
+          </a:prstGeom>
+          <a:noFill/>
+          <a:ln/>
+        </p:spPr>
+        <p:txBody>
+          <a:bodyPr wrap="square" lIns="0" tIns="0" rIns="0" bIns="0" rtlCol="0" anchor="ctr"/>
+          <a:lstStyle/>
+          <a:p>
+            <a:pPr indent="0" marL="0">
+              <a:buNone/>
+            </a:pPr>
+            <a:r>
+              <a:rPr lang="en-US" sz="800" dirty="0">
+                <a:solidFill>
+                  <a:srgbClr val="888888"/>
+                </a:solidFill>
+              </a:rPr>
+              <a:t>Liu Qianshi, Liu Yiqiang, Zhou Yue et al.. Cancer research. 2026-04-15 DOI: 10.1158/0008-5472.CAN-25-0346</a:t>
+            </a:r>
+            <a:endParaRPr lang="en-US" sz="800" dirty="0"/>
+          </a:p>
+        </p:txBody>
+      </p:sp>
+      <p:sp>
+        <p:nvSpPr>
+          <p:cNvPr id="8" name="Text 6">
             <a:hlinkClick r:id="rId2" tooltip=""/>
           </p:cNvPr>
           <p:cNvSpPr/>
@@ -6506,7 +6716,7 @@
                 <a:ea typeface="Arial" pitchFamily="34" charset="-122"/>
                 <a:cs typeface="Arial" pitchFamily="34" charset="-120"/>
               </a:rPr>
-              <a:t>ANGPTL4 enhances PD-L1 expression.</a:t>
+              <a:t>ANGPTL4 enhances immune evasion via PD-L1.</a:t>
             </a:r>
             <a:endParaRPr lang="en-US" sz="1800" dirty="0"/>
           </a:p>
@@ -6548,7 +6758,7 @@
                 <a:ea typeface="Arial" pitchFamily="34" charset="-122"/>
                 <a:cs typeface="Arial" pitchFamily="34" charset="-120"/>
               </a:rPr>
-              <a:t>Therapy synergizes with anti-PD-L1 treatment.</a:t>
+              <a:t>Therapeutic strategy for HCC immunotherapy.</a:t>
             </a:r>
             <a:endParaRPr lang="en-US" sz="1800" dirty="0"/>
           </a:p>
@@ -6556,7 +6766,43 @@
       </p:sp>
       <p:sp>
         <p:nvSpPr>
-          <p:cNvPr id="7" name="Text 5">
+          <p:cNvPr id="7" name="Text 5"/>
+          <p:cNvSpPr/>
+          <p:nvPr/>
+        </p:nvSpPr>
+        <p:spPr>
+          <a:xfrm>
+            <a:off x="731520" y="5852160"/>
+            <a:ext cx="10058400" cy="0"/>
+          </a:xfrm>
+          <a:prstGeom prst="rect">
+            <a:avLst/>
+          </a:prstGeom>
+          <a:noFill/>
+          <a:ln/>
+        </p:spPr>
+        <p:txBody>
+          <a:bodyPr wrap="square" lIns="0" tIns="0" rIns="0" bIns="0" rtlCol="0" anchor="ctr"/>
+          <a:lstStyle/>
+          <a:p>
+            <a:pPr indent="0" marL="0">
+              <a:buNone/>
+            </a:pPr>
+            <a:r>
+              <a:rPr lang="en-US" sz="800" dirty="0">
+                <a:solidFill>
+                  <a:srgbClr val="888888"/>
+                </a:solidFill>
+              </a:rPr>
+              <a:t>Lu Shounan, Ke Shanjia, Yu Hongjun et al.. Advanced science (Weinheim, Baden-Wurttemberg, Germany). 2026-04-14 DOI: 10.1002/advs.202521418</a:t>
+            </a:r>
+            <a:endParaRPr lang="en-US" sz="800" dirty="0"/>
+          </a:p>
+        </p:txBody>
+      </p:sp>
+      <p:sp>
+        <p:nvSpPr>
+          <p:cNvPr id="8" name="Text 6">
             <a:hlinkClick r:id="rId2" tooltip=""/>
           </p:cNvPr>
           <p:cNvSpPr/>
@@ -6848,7 +7094,7 @@
                 <a:ea typeface="Arial" pitchFamily="34" charset="-122"/>
                 <a:cs typeface="Arial" pitchFamily="34" charset="-120"/>
               </a:rPr>
-              <a:t>Depletion of virus-specific CD8 T cells observed.</a:t>
+              <a:t>Depletion of PD-1+ CD8 T cells observed.</a:t>
             </a:r>
             <a:endParaRPr lang="en-US" sz="1800" dirty="0"/>
           </a:p>
@@ -6869,7 +7115,7 @@
                 <a:ea typeface="Arial" pitchFamily="34" charset="-122"/>
                 <a:cs typeface="Arial" pitchFamily="34" charset="-120"/>
               </a:rPr>
-              <a:t>Activating FcγR III mediates T cell depletion.</a:t>
+              <a:t>FcγR III mediates T cell depletion.</a:t>
             </a:r>
             <a:endParaRPr lang="en-US" sz="1800" dirty="0"/>
           </a:p>
@@ -6890,7 +7136,7 @@
                 <a:ea typeface="Arial" pitchFamily="34" charset="-122"/>
                 <a:cs typeface="Arial" pitchFamily="34" charset="-120"/>
               </a:rPr>
-              <a:t>Phagocytic cells are key effectors in vivo.</a:t>
+              <a:t>Phagocytic cells are key effectors.</a:t>
             </a:r>
             <a:endParaRPr lang="en-US" sz="1800" dirty="0"/>
           </a:p>
@@ -6911,7 +7157,7 @@
                 <a:ea typeface="Arial" pitchFamily="34" charset="-122"/>
                 <a:cs typeface="Arial" pitchFamily="34" charset="-120"/>
               </a:rPr>
-              <a:t>Fc-intact antibodies may hinder liver cancer treatment.</a:t>
+              <a:t>Findings affect liver cancer treatment strategies.</a:t>
             </a:r>
             <a:endParaRPr lang="en-US" sz="1800" dirty="0"/>
           </a:p>
@@ -6919,7 +7165,43 @@
       </p:sp>
       <p:sp>
         <p:nvSpPr>
-          <p:cNvPr id="7" name="Text 5">
+          <p:cNvPr id="7" name="Text 5"/>
+          <p:cNvSpPr/>
+          <p:nvPr/>
+        </p:nvSpPr>
+        <p:spPr>
+          <a:xfrm>
+            <a:off x="731520" y="5852160"/>
+            <a:ext cx="10058400" cy="0"/>
+          </a:xfrm>
+          <a:prstGeom prst="rect">
+            <a:avLst/>
+          </a:prstGeom>
+          <a:noFill/>
+          <a:ln/>
+        </p:spPr>
+        <p:txBody>
+          <a:bodyPr wrap="square" lIns="0" tIns="0" rIns="0" bIns="0" rtlCol="0" anchor="ctr"/>
+          <a:lstStyle/>
+          <a:p>
+            <a:pPr indent="0" marL="0">
+              <a:buNone/>
+            </a:pPr>
+            <a:r>
+              <a:rPr lang="en-US" sz="800" dirty="0">
+                <a:solidFill>
+                  <a:srgbClr val="888888"/>
+                </a:solidFill>
+              </a:rPr>
+              <a:t>Hashimoto Masao, Nasti Tahseen H, Jin Hyun-Tak et al.. Proceedings of the National Academy of Sciences of the United States of America. 2026-04-08 DOI: 10.1073/pnas.2427192123</a:t>
+            </a:r>
+            <a:endParaRPr lang="en-US" sz="800" dirty="0"/>
+          </a:p>
+        </p:txBody>
+      </p:sp>
+      <p:sp>
+        <p:nvSpPr>
+          <p:cNvPr id="8" name="Text 6">
             <a:hlinkClick r:id="rId2" tooltip=""/>
           </p:cNvPr>
           <p:cNvSpPr/>
@@ -7232,7 +7514,7 @@
                 <a:ea typeface="Arial" pitchFamily="34" charset="-122"/>
                 <a:cs typeface="Arial" pitchFamily="34" charset="-120"/>
               </a:rPr>
-              <a:t>Improved outcomes compared to monotherapy</a:t>
+              <a:t>Improved outcomes compared to standard therapy</a:t>
             </a:r>
             <a:endParaRPr lang="en-US" sz="1800" dirty="0"/>
           </a:p>
@@ -7274,7 +7556,7 @@
                 <a:ea typeface="Arial" pitchFamily="34" charset="-122"/>
                 <a:cs typeface="Arial" pitchFamily="34" charset="-120"/>
               </a:rPr>
-              <a:t>Addressing poor prognosis in HCC</a:t>
+              <a:t>Potential shift in treatment paradigms</a:t>
             </a:r>
             <a:endParaRPr lang="en-US" sz="1800" dirty="0"/>
           </a:p>
@@ -7282,7 +7564,43 @@
       </p:sp>
       <p:sp>
         <p:nvSpPr>
-          <p:cNvPr id="7" name="Text 5">
+          <p:cNvPr id="7" name="Text 5"/>
+          <p:cNvSpPr/>
+          <p:nvPr/>
+        </p:nvSpPr>
+        <p:spPr>
+          <a:xfrm>
+            <a:off x="731520" y="5852160"/>
+            <a:ext cx="10058400" cy="0"/>
+          </a:xfrm>
+          <a:prstGeom prst="rect">
+            <a:avLst/>
+          </a:prstGeom>
+          <a:noFill/>
+          <a:ln/>
+        </p:spPr>
+        <p:txBody>
+          <a:bodyPr wrap="square" lIns="0" tIns="0" rIns="0" bIns="0" rtlCol="0" anchor="ctr"/>
+          <a:lstStyle/>
+          <a:p>
+            <a:pPr indent="0" marL="0">
+              <a:buNone/>
+            </a:pPr>
+            <a:r>
+              <a:rPr lang="en-US" sz="800" dirty="0">
+                <a:solidFill>
+                  <a:srgbClr val="888888"/>
+                </a:solidFill>
+              </a:rPr>
+              <a:t>L Marzi, R Sacco, L Siciliani. …. 2026</a:t>
+            </a:r>
+            <a:endParaRPr lang="en-US" sz="800" dirty="0"/>
+          </a:p>
+        </p:txBody>
+      </p:sp>
+      <p:sp>
+        <p:nvSpPr>
+          <p:cNvPr id="8" name="Text 6">
             <a:hlinkClick r:id="rId2" tooltip=""/>
           </p:cNvPr>
           <p:cNvSpPr/>

--- a/docs/digest-en.pptx
+++ b/docs/digest-en.pptx
@@ -2269,7 +2269,7 @@
                   <a:srgbClr val="888888"/>
                 </a:solidFill>
               </a:rPr>
-              <a:t>2026-04-12 — 2026-04-19</a:t>
+              <a:t>2026-04-13 — 2026-04-20</a:t>
             </a:r>
             <a:endParaRPr lang="en-US" sz="1400" dirty="0"/>
           </a:p>
@@ -2460,7 +2460,7 @@
                   </a:extLst>
                 </a:hlinkClick>
               </a:rPr>
-              <a:t>… plus transarterial chemoembolization and PD-1 inhibitors as conversion therapies for unresectable intermediate-advanced hepatocellular carcinoma: a phase 2 trial …</a:t>
+              <a:t>Prognostic nutritional index and the survival of patients with hepatocellular carcinoma on immune checkpoint inhibitors: a meta-analysis</a:t>
             </a:r>
             <a:endParaRPr lang="en-US" sz="2400" dirty="0"/>
           </a:p>
@@ -2496,7 +2496,7 @@
                   <a:srgbClr val="888888"/>
                 </a:solidFill>
               </a:rPr>
-              <a:t>… and Targeted Therapy  ·  RCT Phase 2</a:t>
+              <a:t>BMC cancer  ·  Meta-Analysis</a:t>
             </a:r>
             <a:endParaRPr lang="en-US" sz="1000" dirty="0"/>
           </a:p>
@@ -2539,7 +2539,7 @@
                 <a:ea typeface="Arial" pitchFamily="34" charset="-122"/>
                 <a:cs typeface="Arial" pitchFamily="34" charset="-120"/>
               </a:rPr>
-              <a:t>Combination therapy for unresectable HCC</a:t>
+              <a:t>Prognostic nutritional index (PNI) impacts survival</a:t>
             </a:r>
             <a:endParaRPr lang="en-US" sz="1800" dirty="0"/>
           </a:p>
@@ -2560,7 +2560,7 @@
                 <a:ea typeface="Arial" pitchFamily="34" charset="-122"/>
                 <a:cs typeface="Arial" pitchFamily="34" charset="-120"/>
               </a:rPr>
-              <a:t>Transarterial chemoembolization and PD-1 inhibitors</a:t>
+              <a:t>Meta-analysis of HCC patients on ICIs</a:t>
             </a:r>
             <a:endParaRPr lang="en-US" sz="1800" dirty="0"/>
           </a:p>
@@ -2581,7 +2581,7 @@
                 <a:ea typeface="Arial" pitchFamily="34" charset="-122"/>
                 <a:cs typeface="Arial" pitchFamily="34" charset="-120"/>
               </a:rPr>
-              <a:t>Phase 2 trial results show efficacy</a:t>
+              <a:t>Nutritional status correlates with immune response</a:t>
             </a:r>
             <a:endParaRPr lang="en-US" sz="1800" dirty="0"/>
           </a:p>
@@ -2617,7 +2617,7 @@
                   <a:srgbClr val="888888"/>
                 </a:solidFill>
               </a:rPr>
-              <a:t>X Zhang, H Cai, W Peng. … and Targeted Therapy. 2026</a:t>
+              <a:t>J Fu, W Peng, J Jiang. BMC cancer. 2026</a:t>
             </a:r>
             <a:endParaRPr lang="en-US" sz="800" dirty="0"/>
           </a:p>
@@ -2817,7 +2817,7 @@
                   </a:extLst>
                 </a:hlinkClick>
               </a:rPr>
-              <a:t>The Efficacy and Safety of Atezolizumab Plus Bevacizumab after Durvalumab Plus Tremelimumab for the Treatment of Hepatocellular Carcinoma.</a:t>
+              <a:t>Radiotherapy versus local ablation therapy for the treatment of hepatocellular carcinoma: A systematic review and meta-analysis.</a:t>
             </a:r>
             <a:endParaRPr lang="en-US" sz="2400" dirty="0"/>
           </a:p>
@@ -2853,7 +2853,7 @@
                   <a:srgbClr val="888888"/>
                 </a:solidFill>
               </a:rPr>
-              <a:t>Internal medicine (Tokyo, Japan)  ·  Retrospective Study  ·  🌏 Asia</a:t>
+              <a:t>Journal of Clinical …  ·  Meta-Analysis</a:t>
             </a:r>
             <a:endParaRPr lang="en-US" sz="1000" dirty="0"/>
           </a:p>
@@ -2896,7 +2896,7 @@
                 <a:ea typeface="Arial" pitchFamily="34" charset="-122"/>
                 <a:cs typeface="Arial" pitchFamily="34" charset="-120"/>
               </a:rPr>
-              <a:t>Atez+Bev shows efficacy after Dur+Tre</a:t>
+              <a:t>Comparison of radiotherapy and local ablation</a:t>
             </a:r>
             <a:endParaRPr lang="en-US" sz="1800" dirty="0"/>
           </a:p>
@@ -2917,7 +2917,7 @@
                 <a:ea typeface="Arial" pitchFamily="34" charset="-122"/>
                 <a:cs typeface="Arial" pitchFamily="34" charset="-120"/>
               </a:rPr>
-              <a:t>Objective response rate is 25.0%</a:t>
+              <a:t>Focus on hepatocellular carcinoma treatment</a:t>
             </a:r>
             <a:endParaRPr lang="en-US" sz="1800" dirty="0"/>
           </a:p>
@@ -2938,7 +2938,49 @@
                 <a:ea typeface="Arial" pitchFamily="34" charset="-122"/>
                 <a:cs typeface="Arial" pitchFamily="34" charset="-120"/>
               </a:rPr>
-              <a:t>Adverse events differ between regimens</a:t>
+              <a:t>Analysis of local progression-free survival</a:t>
+            </a:r>
+            <a:endParaRPr lang="en-US" sz="1800" dirty="0"/>
+          </a:p>
+          <a:p>
+            <a:pPr marL="342900" indent="-342900">
+              <a:spcAft>
+                <a:spcPts val="800"/>
+              </a:spcAft>
+              <a:buSzPct val="100000"/>
+              <a:buChar char="•"/>
+            </a:pPr>
+            <a:r>
+              <a:rPr lang="en-US" sz="1800" dirty="0">
+                <a:solidFill>
+                  <a:srgbClr val="333333"/>
+                </a:solidFill>
+                <a:latin typeface="Arial" pitchFamily="34" charset="0"/>
+                <a:ea typeface="Arial" pitchFamily="34" charset="-122"/>
+                <a:cs typeface="Arial" pitchFamily="34" charset="-120"/>
+              </a:rPr>
+              <a:t>Inclusion of radiofrequency and microwave ablation</a:t>
+            </a:r>
+            <a:endParaRPr lang="en-US" sz="1800" dirty="0"/>
+          </a:p>
+          <a:p>
+            <a:pPr marL="342900" indent="-342900">
+              <a:spcAft>
+                <a:spcPts val="800"/>
+              </a:spcAft>
+              <a:buSzPct val="100000"/>
+              <a:buChar char="•"/>
+            </a:pPr>
+            <a:r>
+              <a:rPr lang="en-US" sz="1800" dirty="0">
+                <a:solidFill>
+                  <a:srgbClr val="333333"/>
+                </a:solidFill>
+                <a:latin typeface="Arial" pitchFamily="34" charset="0"/>
+                <a:ea typeface="Arial" pitchFamily="34" charset="-122"/>
+                <a:cs typeface="Arial" pitchFamily="34" charset="-120"/>
+              </a:rPr>
+              <a:t>Systematic review and meta-analysis conducted</a:t>
             </a:r>
             <a:endParaRPr lang="en-US" sz="1800" dirty="0"/>
           </a:p>
@@ -2974,7 +3016,7 @@
                   <a:srgbClr val="888888"/>
                 </a:solidFill>
               </a:rPr>
-              <a:t>Uchikawa Shinsuke, Kawaoka Tomokazu, Tanaka Aiko et al.. Internal medicine (Tokyo, Japan). 2026-04-16 DOI: 10.2169/internalmedicine.6021-25</a:t>
+              <a:t>SH Bae, SH Choi, SM Yoon. Journal of Clinical …. 2026</a:t>
             </a:r>
             <a:endParaRPr lang="en-US" sz="800" dirty="0"/>
           </a:p>
@@ -3174,7 +3216,7 @@
                   </a:extLst>
                 </a:hlinkClick>
               </a:rPr>
-              <a:t>Radiotherapy versus local ablation therapy for the treatment of hepatocellular carcinoma: A systematic review and meta-analysis.</a:t>
+              <a:t>… on interventional therapy and immune checkpoint inhibitors (ICIs) in patients with intermediate-and advanced-stage hepatocellular carcinoma: a systematic review …</a:t>
             </a:r>
             <a:endParaRPr lang="en-US" sz="2400" dirty="0"/>
           </a:p>
@@ -3210,7 +3252,7 @@
                   <a:srgbClr val="888888"/>
                 </a:solidFill>
               </a:rPr>
-              <a:t>Journal of Clinical …  ·  Meta-Analysis</a:t>
+              <a:t>… , Immunotherapy  ·  Systematic Review</a:t>
             </a:r>
             <a:endParaRPr lang="en-US" sz="1000" dirty="0"/>
           </a:p>
@@ -3253,7 +3295,7 @@
                 <a:ea typeface="Arial" pitchFamily="34" charset="-122"/>
                 <a:cs typeface="Arial" pitchFamily="34" charset="-120"/>
               </a:rPr>
-              <a:t>Comparison of radiotherapy and local ablation</a:t>
+              <a:t>Combination therapy shows promising results.</a:t>
             </a:r>
             <a:endParaRPr lang="en-US" sz="1800" dirty="0"/>
           </a:p>
@@ -3274,7 +3316,7 @@
                 <a:ea typeface="Arial" pitchFamily="34" charset="-122"/>
                 <a:cs typeface="Arial" pitchFamily="34" charset="-120"/>
               </a:rPr>
-              <a:t>Focus on hepatocellular carcinoma treatment</a:t>
+              <a:t>ICIs enhance immune response in HCC.</a:t>
             </a:r>
             <a:endParaRPr lang="en-US" sz="1800" dirty="0"/>
           </a:p>
@@ -3295,49 +3337,7 @@
                 <a:ea typeface="Arial" pitchFamily="34" charset="-122"/>
                 <a:cs typeface="Arial" pitchFamily="34" charset="-120"/>
               </a:rPr>
-              <a:t>Analysis of local progression-free survival</a:t>
-            </a:r>
-            <a:endParaRPr lang="en-US" sz="1800" dirty="0"/>
-          </a:p>
-          <a:p>
-            <a:pPr marL="342900" indent="-342900">
-              <a:spcAft>
-                <a:spcPts val="800"/>
-              </a:spcAft>
-              <a:buSzPct val="100000"/>
-              <a:buChar char="•"/>
-            </a:pPr>
-            <a:r>
-              <a:rPr lang="en-US" sz="1800" dirty="0">
-                <a:solidFill>
-                  <a:srgbClr val="333333"/>
-                </a:solidFill>
-                <a:latin typeface="Arial" pitchFamily="34" charset="0"/>
-                <a:ea typeface="Arial" pitchFamily="34" charset="-122"/>
-                <a:cs typeface="Arial" pitchFamily="34" charset="-120"/>
-              </a:rPr>
-              <a:t>Inclusion of radiofrequency and microwave ablation</a:t>
-            </a:r>
-            <a:endParaRPr lang="en-US" sz="1800" dirty="0"/>
-          </a:p>
-          <a:p>
-            <a:pPr marL="342900" indent="-342900">
-              <a:spcAft>
-                <a:spcPts val="800"/>
-              </a:spcAft>
-              <a:buSzPct val="100000"/>
-              <a:buChar char="•"/>
-            </a:pPr>
-            <a:r>
-              <a:rPr lang="en-US" sz="1800" dirty="0">
-                <a:solidFill>
-                  <a:srgbClr val="333333"/>
-                </a:solidFill>
-                <a:latin typeface="Arial" pitchFamily="34" charset="0"/>
-                <a:ea typeface="Arial" pitchFamily="34" charset="-122"/>
-                <a:cs typeface="Arial" pitchFamily="34" charset="-120"/>
-              </a:rPr>
-              <a:t>Systematic review and meta-analysis conducted</a:t>
+              <a:t>Interventional therapy improves patient outcomes.</a:t>
             </a:r>
             <a:endParaRPr lang="en-US" sz="1800" dirty="0"/>
           </a:p>
@@ -3373,7 +3373,7 @@
                   <a:srgbClr val="888888"/>
                 </a:solidFill>
               </a:rPr>
-              <a:t>SH Bae, SH Choi, SM Yoon. Journal of Clinical …. 2026</a:t>
+              <a:t>J Su, Y Su, R Mai. … , Immunotherapy. 2026</a:t>
             </a:r>
             <a:endParaRPr lang="en-US" sz="800" dirty="0"/>
           </a:p>
@@ -3590,7 +3590,7 @@
                   <a:srgbClr val="FFFFFF"/>
                 </a:solidFill>
               </a:rPr>
-              <a:t>1. **免疫治療的潛力**  </a:t>
+              <a:t>1. **癌症的標誌與治療的關聯性**  </a:t>
             </a:r>
             <a:endParaRPr lang="en-US" sz="1200" dirty="0"/>
           </a:p>
@@ -3607,7 +3607,7 @@
                   <a:srgbClr val="FFFFFF"/>
                 </a:solidFill>
               </a:rPr>
-              <a:t>   The integration of immune therapy with traditional treatments, such as surgical resection and local ablation, shows promise in enhancing patient outcomes in hepatocellular carcinoma (HCC).  </a:t>
+              <a:t>   The hallmarks of cancer provide a comprehensive framework for understanding hepatocellular carcinoma (HCC) and guiding therapeutic strategies.  </a:t>
             </a:r>
             <a:endParaRPr lang="en-US" sz="1200" dirty="0"/>
           </a:p>
@@ -3624,7 +3624,7 @@
                   <a:srgbClr val="FFFFFF"/>
                 </a:solidFill>
               </a:rPr>
-              <a:t>   免疫治療與傳統療法（如手術切除和局部消融）的結合顯示出改善肝細胞癌（HCC）患者預後的潛力。</a:t>
+              <a:t>   癌症的標誌為理解肝細胞癌（HCC）及指導治療策略提供了全面的框架。</a:t>
             </a:r>
             <a:endParaRPr lang="en-US" sz="1200" dirty="0"/>
           </a:p>
@@ -3650,7 +3650,7 @@
                   <a:srgbClr val="FFFFFF"/>
                 </a:solidFill>
               </a:rPr>
-              <a:t>2. **腫瘤微環境的重塑**  </a:t>
+              <a:t>2. **免疫治療的潛力與挑戰**  </a:t>
             </a:r>
             <a:endParaRPr lang="en-US" sz="1200" dirty="0"/>
           </a:p>
@@ -3667,7 +3667,7 @@
                   <a:srgbClr val="FFFFFF"/>
                 </a:solidFill>
               </a:rPr>
-              <a:t>   Neoadjuvant therapies that remodel the tumor microenvironment can significantly improve the efficacy of subsequent immune treatments, suggesting a need for early intervention strategies.  </a:t>
+              <a:t>   Neoadjuvant immune therapy shows promise in remodeling the tumor microenvironment, yet its optimal application in early-stage HCC remains to be established.  </a:t>
             </a:r>
             <a:endParaRPr lang="en-US" sz="1200" dirty="0"/>
           </a:p>
@@ -3684,7 +3684,7 @@
                   <a:srgbClr val="FFFFFF"/>
                 </a:solidFill>
               </a:rPr>
-              <a:t>   重塑腫瘤微環境的術前療法可以顯著提高隨後免疫治療的療效，這表明需要早期介入策略。</a:t>
+              <a:t>   新輔助免疫治療在重塑腫瘤微環境方面顯示出潛力，但其在早期HCC中的最佳應用仍需確立。</a:t>
             </a:r>
             <a:endParaRPr lang="en-US" sz="1200" dirty="0"/>
           </a:p>
@@ -3727,7 +3727,7 @@
                   <a:srgbClr val="FFFFFF"/>
                 </a:solidFill>
               </a:rPr>
-              <a:t>   Cancer-associated fibroblasts (CAFs) play a crucial role in promoting immunosuppression in HCC, highlighting the importance of targeting these cells to enhance immune responses.  </a:t>
+              <a:t>   Cancer-associated fibroblasts (CAFs) are crucial in promoting immunosuppression in HCC through metabolic pathways, highlighting new therapeutic targets.  </a:t>
             </a:r>
             <a:endParaRPr lang="en-US" sz="1200" dirty="0"/>
           </a:p>
@@ -3744,7 +3744,7 @@
                   <a:srgbClr val="FFFFFF"/>
                 </a:solidFill>
               </a:rPr>
-              <a:t>   癌症相關成纖維細胞（CAFs）在促進HCC中的免疫抑制方面扮演著關鍵角色，強調了針對這些細胞以增強免疫反應的重要性。</a:t>
+              <a:t>   癌症相關成纖維細胞（CAFs）在HCC中透過代謝途徑促進免疫抑制，突顯了新的治療靶點。</a:t>
             </a:r>
             <a:endParaRPr lang="en-US" sz="1200" dirty="0"/>
           </a:p>
@@ -3770,7 +3770,7 @@
                   <a:srgbClr val="FFFFFF"/>
                 </a:solidFill>
               </a:rPr>
-              <a:t>4. **病毒特異性T細胞的耗竭**  </a:t>
+              <a:t>4. **手術後復發的挑戰**  </a:t>
             </a:r>
             <a:endParaRPr lang="en-US" sz="1200" dirty="0"/>
           </a:p>
@@ -3787,7 +3787,7 @@
                   <a:srgbClr val="FFFFFF"/>
                 </a:solidFill>
               </a:rPr>
-              <a:t>   The selective depletion of virus-specific CD8 T cells during PD-1 therapy underscores the complexity of immune responses in chronic infections and their implications for HCC treatment.  </a:t>
+              <a:t>   Postoperative recurrence in HCC remains a significant clinical challenge, necessitating further exploration of underlying mechanisms and therapeutic strategies.  </a:t>
             </a:r>
             <a:endParaRPr lang="en-US" sz="1200" dirty="0"/>
           </a:p>
@@ -3804,7 +3804,7 @@
                   <a:srgbClr val="FFFFFF"/>
                 </a:solidFill>
               </a:rPr>
-              <a:t>   在PD-1治療過程中病毒特異性CD8 T細胞的選擇性耗竭突顯了慢性感染中免疫反應的複雜性及其對HCC治療的影響。</a:t>
+              <a:t>   HCC的手術後復發仍然是一個重大臨床挑戰，需要進一步探索其潛在機制和治療策略。</a:t>
             </a:r>
             <a:endParaRPr lang="en-US" sz="1200" dirty="0"/>
           </a:p>
@@ -3830,7 +3830,7 @@
                   <a:srgbClr val="FFFFFF"/>
                 </a:solidFill>
               </a:rPr>
-              <a:t>5. **多模式療法的必要性**  </a:t>
+              <a:t>5. **結合治療的前景**  </a:t>
             </a:r>
             <a:endParaRPr lang="en-US" sz="1200" dirty="0"/>
           </a:p>
@@ -3847,7 +3847,7 @@
                   <a:srgbClr val="FFFFFF"/>
                 </a:solidFill>
               </a:rPr>
-              <a:t>   The combination of various treatment modalities, such as transarterial chemoembolization (TACE) with immune inhibitors, indicates a shift towards more comprehensive treatment approaches for unresectable HCC.</a:t>
+              <a:t>   Combining interventional therapies with immune checkpoint inhibitors may enhance treatment outcomes in advanced HCC, warranting further investigation.</a:t>
             </a:r>
             <a:endParaRPr lang="en-US" sz="1200" dirty="0"/>
           </a:p>
@@ -3993,7 +3993,7 @@
                   <a:srgbClr val="FFFFFF"/>
                 </a:solidFill>
               </a:rPr>
-              <a:t>將各種治療模式結合使用（如將經動脈化療栓塞（TACE）與免疫抑制劑結合）表明了對無法切除的HCC採取更全面治療方法的趨勢。</a:t>
+              <a:t>將介入治療與免疫檢查點抑制劑結合可能提高晚期HCC的治療效果，值得進一步研究。</a:t>
             </a:r>
             <a:endParaRPr lang="en-US" sz="1200" dirty="0"/>
           </a:p>
@@ -4045,7 +4045,7 @@
                   <a:srgbClr val="FFFFFF"/>
                 </a:solidFill>
               </a:rPr>
-              <a:t>1. **早期免疫治療的優化**  </a:t>
+              <a:t>1. **早期階段免疫治療的最佳化**  </a:t>
             </a:r>
             <a:endParaRPr lang="en-US" sz="1200" dirty="0"/>
           </a:p>
@@ -4062,7 +4062,7 @@
                   <a:srgbClr val="FFFFFF"/>
                 </a:solidFill>
               </a:rPr>
-              <a:t>   Future studies should focus on optimizing the timing and combination of immune therapies in early-stage HCC to maximize treatment efficacy.  </a:t>
+              <a:t>   Investigate the optimal timing and combinations of immune therapies in early-stage HCC to maximize patient outcomes.  </a:t>
             </a:r>
             <a:endParaRPr lang="en-US" sz="1200" dirty="0"/>
           </a:p>
@@ -4079,7 +4079,7 @@
                   <a:srgbClr val="FFFFFF"/>
                 </a:solidFill>
               </a:rPr>
-              <a:t>   未來的研究應集中於優化早期HCC中免疫治療的時機和組合，以最大化治療效果。</a:t>
+              <a:t>   探討早期HCC中免疫治療的最佳時機和組合，以最大化患者的治療效果。</a:t>
             </a:r>
             <a:endParaRPr lang="en-US" sz="1200" dirty="0"/>
           </a:p>
@@ -4105,7 +4105,7 @@
                   <a:srgbClr val="FFFFFF"/>
                 </a:solidFill>
               </a:rPr>
-              <a:t>2. **癌症相關成纖維細胞的靶向治療**  </a:t>
+              <a:t>2. **靶向癌症相關成纖維細胞的療法**  </a:t>
             </a:r>
             <a:endParaRPr lang="en-US" sz="1200" dirty="0"/>
           </a:p>
@@ -4122,7 +4122,7 @@
                   <a:srgbClr val="FFFFFF"/>
                 </a:solidFill>
               </a:rPr>
-              <a:t>   Investigating targeted therapies against CAFs and their metabolic pathways may provide new avenues for enhancing anti-tumor immunity in HCC.  </a:t>
+              <a:t>   Develop targeted therapies against CAFs to mitigate their immunosuppressive effects in HCC and improve treatment efficacy.  </a:t>
             </a:r>
             <a:endParaRPr lang="en-US" sz="1200" dirty="0"/>
           </a:p>
@@ -4139,7 +4139,7 @@
                   <a:srgbClr val="FFFFFF"/>
                 </a:solidFill>
               </a:rPr>
-              <a:t>   研究針對CAFs及其代謝途徑的靶向療法可能為增強HCC中的抗腫瘤免疫提供新的途徑。</a:t>
+              <a:t>   開發針對CAFs的靶向療法，以減少其在HCC中的免疫抑制作用，並提高治療效果。</a:t>
             </a:r>
             <a:endParaRPr lang="en-US" sz="1200" dirty="0"/>
           </a:p>
@@ -4165,7 +4165,7 @@
                   <a:srgbClr val="FFFFFF"/>
                 </a:solidFill>
               </a:rPr>
-              <a:t>3. **多模式療法的臨床試驗**  </a:t>
+              <a:t>3. **探索腫瘤微環境的調控**  </a:t>
             </a:r>
             <a:endParaRPr lang="en-US" sz="1200" dirty="0"/>
           </a:p>
@@ -4182,7 +4182,7 @@
                   <a:srgbClr val="FFFFFF"/>
                 </a:solidFill>
               </a:rPr>
-              <a:t>   Conducting clinical trials that evaluate the efficacy of combined therapies, including immune checkpoint inhibitors and local ablation techniques, is essential for establishing best practices.  </a:t>
+              <a:t>   Further research on the tumor microenvironment's role in HCC progression and response to therapies, focusing on metabolic and immune interactions.  </a:t>
             </a:r>
             <a:endParaRPr lang="en-US" sz="1200" dirty="0"/>
           </a:p>
@@ -4199,7 +4199,7 @@
                   <a:srgbClr val="FFFFFF"/>
                 </a:solidFill>
               </a:rPr>
-              <a:t>   開展評估包括免疫檢查點抑制劑和局部消融技術的聯合療法有效性的臨床試驗對於建立最佳實踐至關重要。</a:t>
+              <a:t>   進一步研究腫瘤微環境在HCC進展和治療反應中的作用，重點關注代謝和免疫相互作用。</a:t>
             </a:r>
             <a:endParaRPr lang="en-US" sz="1200" dirty="0"/>
           </a:p>
@@ -4225,7 +4225,7 @@
                   <a:srgbClr val="FFFFFF"/>
                 </a:solidFill>
               </a:rPr>
-              <a:t>4. **腫瘤微環境的深入研究**  </a:t>
+              <a:t>4. **多模態治療策略的評估**  </a:t>
             </a:r>
             <a:endParaRPr lang="en-US" sz="1200" dirty="0"/>
           </a:p>
@@ -4242,7 +4242,7 @@
                   <a:srgbClr val="FFFFFF"/>
                 </a:solidFill>
               </a:rPr>
-              <a:t>   Further research into the tumor microenvironment and its interactions with immune cells can unveil new therapeutic targets and strategies for HCC treatment.  </a:t>
+              <a:t>   Evaluate the efficacy of multimodal treatment strategies combining surgery, ablation, and immunotherapy in improving survival rates in HCC.  </a:t>
             </a:r>
             <a:endParaRPr lang="en-US" sz="1200" dirty="0"/>
           </a:p>
@@ -4259,7 +4259,7 @@
                   <a:srgbClr val="FFFFFF"/>
                 </a:solidFill>
               </a:rPr>
-              <a:t>   對腫瘤微環境及其與免疫細胞的相互作用的深入研究可以揭示HCC治療的新療法靶點和策略。</a:t>
+              <a:t>   評估結合手術、消融和免疫治療的多模態治療策略在提高HCC生存率方面的有效性。</a:t>
             </a:r>
             <a:endParaRPr lang="en-US" sz="1200" dirty="0"/>
           </a:p>
@@ -4285,7 +4285,7 @@
                   <a:srgbClr val="FFFFFF"/>
                 </a:solidFill>
               </a:rPr>
-              <a:t>5. **長期療效與耐藥性研究**  </a:t>
+              <a:t>5. **個體化治療的發展**  </a:t>
             </a:r>
             <a:endParaRPr lang="en-US" sz="1200" dirty="0"/>
           </a:p>
@@ -4302,7 +4302,7 @@
                   <a:srgbClr val="FFFFFF"/>
                 </a:solidFill>
               </a:rPr>
-              <a:t>   Investigating the long-term effects and potential resistance mechanisms associated with current immunotherapies will be crucial for improving patient outcomes in HCC.  </a:t>
+              <a:t>   Explore personalized medicine approaches based on genetic and immunological profiling to tailor therapies for HCC patients.  </a:t>
             </a:r>
             <a:endParaRPr lang="en-US" sz="1200" dirty="0"/>
           </a:p>
@@ -4319,7 +4319,7 @@
                   <a:srgbClr val="FFFFFF"/>
                 </a:solidFill>
               </a:rPr>
-              <a:t>   研究目前免疫療法的長期效果及潛在的耐藥機制對於改善HCC患者的預後至關重要。</a:t>
+              <a:t>   探索基於基因和免疫學特徵的個體化治療方法，以為HCC患者量身定制療法。</a:t>
             </a:r>
             <a:endParaRPr lang="en-US" sz="1200" dirty="0"/>
           </a:p>
@@ -4775,7 +4775,7 @@
                 <a:ea typeface="Arial" pitchFamily="34" charset="-122"/>
                 <a:cs typeface="Arial" pitchFamily="34" charset="-120"/>
               </a:rPr>
-              <a:t>Immunotherapy in Hepatocellular Carcinoma with Portal Vein Tumour Thrombosis: Fr…</a:t>
+              <a:t>… plus transarterial chemoembolization and PD-1 inhibitors as conversion therapi…</a:t>
             </a:r>
             <a:endParaRPr lang="en-US" sz="1400" dirty="0"/>
           </a:p>
@@ -4812,7 +4812,7 @@
                 <a:ea typeface="Arial" pitchFamily="34" charset="-122"/>
                 <a:cs typeface="Arial" pitchFamily="34" charset="-120"/>
               </a:rPr>
-              <a:t>… plus transarterial chemoembolization and PD-1 inhibitors as conversion therapi…</a:t>
+              <a:t>Prognostic nutritional index and the survival of patients with hepatocellular ca…</a:t>
             </a:r>
             <a:endParaRPr lang="en-US" sz="1400" dirty="0"/>
           </a:p>
@@ -4849,7 +4849,7 @@
                 <a:ea typeface="Arial" pitchFamily="34" charset="-122"/>
                 <a:cs typeface="Arial" pitchFamily="34" charset="-120"/>
               </a:rPr>
-              <a:t>The Efficacy and Safety of Atezolizumab Plus Bevacizumab after Durvalumab Plus T…</a:t>
+              <a:t>Radiotherapy versus local ablation therapy for the treatment of hepatocellular c…</a:t>
             </a:r>
             <a:endParaRPr lang="en-US" sz="1400" dirty="0"/>
           </a:p>
@@ -4886,7 +4886,7 @@
                 <a:ea typeface="Arial" pitchFamily="34" charset="-122"/>
                 <a:cs typeface="Arial" pitchFamily="34" charset="-120"/>
               </a:rPr>
-              <a:t>Radiotherapy versus local ablation therapy for the treatment of hepatocellular c…</a:t>
+              <a:t>… on interventional therapy and immune checkpoint inhibitors (ICIs) in patients …</a:t>
             </a:r>
             <a:endParaRPr lang="en-US" sz="1400" dirty="0"/>
           </a:p>
@@ -5141,7 +5141,7 @@
                 <a:ea typeface="Arial" pitchFamily="34" charset="-122"/>
                 <a:cs typeface="Arial" pitchFamily="34" charset="-120"/>
               </a:rPr>
-              <a:t>HCC shows unique immune evasion traits.</a:t>
+              <a:t>HCC shows unique proliferative signaling.</a:t>
             </a:r>
             <a:endParaRPr lang="en-US" sz="1800" dirty="0"/>
           </a:p>
@@ -5162,7 +5162,7 @@
                 <a:ea typeface="Arial" pitchFamily="34" charset="-122"/>
                 <a:cs typeface="Arial" pitchFamily="34" charset="-120"/>
               </a:rPr>
-              <a:t>Immunotherapy improves advanced HCC outcomes.</a:t>
+              <a:t>Immunotherapies improve advanced HCC outcomes.</a:t>
             </a:r>
             <a:endParaRPr lang="en-US" sz="1800" dirty="0"/>
           </a:p>
@@ -5204,7 +5204,7 @@
                 <a:ea typeface="Arial" pitchFamily="34" charset="-122"/>
                 <a:cs typeface="Arial" pitchFamily="34" charset="-120"/>
               </a:rPr>
-              <a:t>Precision oncology benefits iCCA patients.</a:t>
+              <a:t>Precision oncology targets iCCA mutations.</a:t>
             </a:r>
             <a:endParaRPr lang="en-US" sz="1800" dirty="0"/>
           </a:p>
@@ -5519,7 +5519,7 @@
                 <a:ea typeface="Arial" pitchFamily="34" charset="-122"/>
                 <a:cs typeface="Arial" pitchFamily="34" charset="-120"/>
               </a:rPr>
-              <a:t>Neoadjuvant SBRT plus immune therapy tested</a:t>
+              <a:t>Neoadjuvant SBRT plus immune therapy used.</a:t>
             </a:r>
             <a:endParaRPr lang="en-US" sz="1800" dirty="0"/>
           </a:p>
@@ -5540,7 +5540,7 @@
                 <a:ea typeface="Arial" pitchFamily="34" charset="-122"/>
                 <a:cs typeface="Arial" pitchFamily="34" charset="-120"/>
               </a:rPr>
-              <a:t>Pilot study with 8 patients conducted</a:t>
+              <a:t>Pilot study with 8 resectable HCC patients.</a:t>
             </a:r>
             <a:endParaRPr lang="en-US" sz="1800" dirty="0"/>
           </a:p>
@@ -5561,7 +5561,7 @@
                 <a:ea typeface="Arial" pitchFamily="34" charset="-122"/>
                 <a:cs typeface="Arial" pitchFamily="34" charset="-120"/>
               </a:rPr>
-              <a:t>Safety endpoint: low grade 3-4 trAE</a:t>
+              <a:t>Safety confirmed with low grade 3 trAE.</a:t>
             </a:r>
             <a:endParaRPr lang="en-US" sz="1800" dirty="0"/>
           </a:p>
@@ -5582,7 +5582,7 @@
                 <a:ea typeface="Arial" pitchFamily="34" charset="-122"/>
                 <a:cs typeface="Arial" pitchFamily="34" charset="-120"/>
               </a:rPr>
-              <a:t>All resected patients relapse-free</a:t>
+              <a:t>All patients achieved R0 surgical resection.</a:t>
             </a:r>
             <a:endParaRPr lang="en-US" sz="1800" dirty="0"/>
           </a:p>
@@ -5603,7 +5603,7 @@
                 <a:ea typeface="Arial" pitchFamily="34" charset="-122"/>
                 <a:cs typeface="Arial" pitchFamily="34" charset="-120"/>
               </a:rPr>
-              <a:t>Enhanced anti-cancer immune infiltration observed</a:t>
+              <a:t>Significant immune remodeling observed post-treatment.</a:t>
             </a:r>
             <a:endParaRPr lang="en-US" sz="1800" dirty="0"/>
           </a:p>
@@ -5918,7 +5918,7 @@
                 <a:ea typeface="Arial" pitchFamily="34" charset="-122"/>
                 <a:cs typeface="Arial" pitchFamily="34" charset="-120"/>
               </a:rPr>
-              <a:t>Hepatectomy affects anti-PD-1 therapy</a:t>
+              <a:t>Hepatectomy impacts anti-PD-1 therapy</a:t>
             </a:r>
             <a:endParaRPr lang="en-US" sz="1800" dirty="0"/>
           </a:p>
@@ -5939,7 +5939,7 @@
                 <a:ea typeface="Arial" pitchFamily="34" charset="-122"/>
                 <a:cs typeface="Arial" pitchFamily="34" charset="-120"/>
               </a:rPr>
-              <a:t>Mouse model used for study</a:t>
+              <a:t>Adjuvant treatment effectiveness varies</a:t>
             </a:r>
             <a:endParaRPr lang="en-US" sz="1800" dirty="0"/>
           </a:p>
@@ -6275,7 +6275,7 @@
                 <a:ea typeface="Arial" pitchFamily="34" charset="-122"/>
                 <a:cs typeface="Arial" pitchFamily="34" charset="-120"/>
               </a:rPr>
-              <a:t>Lactobacillus johnsonii enhances CD8+ T-cell expansion.</a:t>
+              <a:t>Lactobacillus johnsonii enriches IFNγ+PD-1+CD8+ T cells.</a:t>
             </a:r>
             <a:endParaRPr lang="en-US" sz="1800" dirty="0"/>
           </a:p>
@@ -6296,7 +6296,7 @@
                 <a:ea typeface="Arial" pitchFamily="34" charset="-122"/>
                 <a:cs typeface="Arial" pitchFamily="34" charset="-120"/>
               </a:rPr>
-              <a:t>Higher Lactobacillus correlates with disease-free survival.</a:t>
+              <a:t>Nicotinic acid expands cytotoxic T-cell populations.</a:t>
             </a:r>
             <a:endParaRPr lang="en-US" sz="1800" dirty="0"/>
           </a:p>
@@ -6317,49 +6317,7 @@
                 <a:ea typeface="Arial" pitchFamily="34" charset="-122"/>
                 <a:cs typeface="Arial" pitchFamily="34" charset="-120"/>
               </a:rPr>
-              <a:t>Nicotinic acid activates NF-κB pathway in T cells.</a:t>
-            </a:r>
-            <a:endParaRPr lang="en-US" sz="1800" dirty="0"/>
-          </a:p>
-          <a:p>
-            <a:pPr marL="342900" indent="-342900">
-              <a:spcAft>
-                <a:spcPts val="800"/>
-              </a:spcAft>
-              <a:buSzPct val="100000"/>
-              <a:buChar char="•"/>
-            </a:pPr>
-            <a:r>
-              <a:rPr lang="en-US" sz="1800" dirty="0">
-                <a:solidFill>
-                  <a:srgbClr val="333333"/>
-                </a:solidFill>
-                <a:latin typeface="Arial" pitchFamily="34" charset="0"/>
-                <a:ea typeface="Arial" pitchFamily="34" charset="-122"/>
-                <a:cs typeface="Arial" pitchFamily="34" charset="-120"/>
-              </a:rPr>
-              <a:t>Combination therapy reduces tumor relapse effectively.</a:t>
-            </a:r>
-            <a:endParaRPr lang="en-US" sz="1800" dirty="0"/>
-          </a:p>
-          <a:p>
-            <a:pPr marL="342900" indent="-342900">
-              <a:spcAft>
-                <a:spcPts val="800"/>
-              </a:spcAft>
-              <a:buSzPct val="100000"/>
-              <a:buChar char="•"/>
-            </a:pPr>
-            <a:r>
-              <a:rPr lang="en-US" sz="1800" dirty="0">
-                <a:solidFill>
-                  <a:srgbClr val="333333"/>
-                </a:solidFill>
-                <a:latin typeface="Arial" pitchFamily="34" charset="0"/>
-                <a:ea typeface="Arial" pitchFamily="34" charset="-122"/>
-                <a:cs typeface="Arial" pitchFamily="34" charset="-120"/>
-              </a:rPr>
-              <a:t>CD8+ T cells are essential for antitumor efficacy.</a:t>
+              <a:t>Combination therapy reduces tumor relapse significantly.</a:t>
             </a:r>
             <a:endParaRPr lang="en-US" sz="1800" dirty="0"/>
           </a:p>
@@ -6716,49 +6674,7 @@
                 <a:ea typeface="Arial" pitchFamily="34" charset="-122"/>
                 <a:cs typeface="Arial" pitchFamily="34" charset="-120"/>
               </a:rPr>
-              <a:t>ANGPTL4 enhances immune evasion via PD-L1.</a:t>
-            </a:r>
-            <a:endParaRPr lang="en-US" sz="1800" dirty="0"/>
-          </a:p>
-          <a:p>
-            <a:pPr marL="342900" indent="-342900">
-              <a:spcAft>
-                <a:spcPts val="800"/>
-              </a:spcAft>
-              <a:buSzPct val="100000"/>
-              <a:buChar char="•"/>
-            </a:pPr>
-            <a:r>
-              <a:rPr lang="en-US" sz="1800" dirty="0">
-                <a:solidFill>
-                  <a:srgbClr val="333333"/>
-                </a:solidFill>
-                <a:latin typeface="Arial" pitchFamily="34" charset="0"/>
-                <a:ea typeface="Arial" pitchFamily="34" charset="-122"/>
-                <a:cs typeface="Arial" pitchFamily="34" charset="-120"/>
-              </a:rPr>
-              <a:t>Targeting NNMT-ANGPTL4 restores T-cell activity.</a:t>
-            </a:r>
-            <a:endParaRPr lang="en-US" sz="1800" dirty="0"/>
-          </a:p>
-          <a:p>
-            <a:pPr marL="342900" indent="-342900">
-              <a:spcAft>
-                <a:spcPts val="800"/>
-              </a:spcAft>
-              <a:buSzPct val="100000"/>
-              <a:buChar char="•"/>
-            </a:pPr>
-            <a:r>
-              <a:rPr lang="en-US" sz="1800" dirty="0">
-                <a:solidFill>
-                  <a:srgbClr val="333333"/>
-                </a:solidFill>
-                <a:latin typeface="Arial" pitchFamily="34" charset="0"/>
-                <a:ea typeface="Arial" pitchFamily="34" charset="-122"/>
-                <a:cs typeface="Arial" pitchFamily="34" charset="-120"/>
-              </a:rPr>
-              <a:t>Therapeutic strategy for HCC immunotherapy.</a:t>
+              <a:t>ANGPTL4 enhances tumor immune evasion.</a:t>
             </a:r>
             <a:endParaRPr lang="en-US" sz="1800" dirty="0"/>
           </a:p>
@@ -7094,7 +7010,7 @@
                 <a:ea typeface="Arial" pitchFamily="34" charset="-122"/>
                 <a:cs typeface="Arial" pitchFamily="34" charset="-120"/>
               </a:rPr>
-              <a:t>Depletion of PD-1+ CD8 T cells observed.</a:t>
+              <a:t>Selective depletion of virus-specific CD8 T cells.</a:t>
             </a:r>
             <a:endParaRPr lang="en-US" sz="1800" dirty="0"/>
           </a:p>
@@ -7115,7 +7031,7 @@
                 <a:ea typeface="Arial" pitchFamily="34" charset="-122"/>
                 <a:cs typeface="Arial" pitchFamily="34" charset="-120"/>
               </a:rPr>
-              <a:t>FcγR III mediates T cell depletion.</a:t>
+              <a:t>Depletion mediated by activating FcγR III.</a:t>
             </a:r>
             <a:endParaRPr lang="en-US" sz="1800" dirty="0"/>
           </a:p>
@@ -7157,7 +7073,7 @@
                 <a:ea typeface="Arial" pitchFamily="34" charset="-122"/>
                 <a:cs typeface="Arial" pitchFamily="34" charset="-120"/>
               </a:rPr>
-              <a:t>Findings affect liver cancer treatment strategies.</a:t>
+              <a:t>Implications for liver cancer therapies.</a:t>
             </a:r>
             <a:endParaRPr lang="en-US" sz="1800" dirty="0"/>
           </a:p>
@@ -7393,7 +7309,7 @@
                   </a:extLst>
                 </a:hlinkClick>
               </a:rPr>
-              <a:t>Immunotherapy in Hepatocellular Carcinoma with Portal Vein Tumour Thrombosis: From Poor Prognosis to Curative-Intent Strategies</a:t>
+              <a:t>… plus transarterial chemoembolization and PD-1 inhibitors as conversion therapies for unresectable intermediate-advanced hepatocellular carcinoma: a phase 2 trial …</a:t>
             </a:r>
             <a:endParaRPr lang="en-US" sz="2400" dirty="0"/>
           </a:p>
@@ -7429,7 +7345,7 @@
                   <a:srgbClr val="888888"/>
                 </a:solidFill>
               </a:rPr>
-              <a:t>…  ·  RCT Phase 2</a:t>
+              <a:t>… and Targeted Therapy  ·  RCT Phase 2</a:t>
             </a:r>
             <a:endParaRPr lang="en-US" sz="1000" dirty="0"/>
           </a:p>
@@ -7472,7 +7388,7 @@
                 <a:ea typeface="Arial" pitchFamily="34" charset="-122"/>
                 <a:cs typeface="Arial" pitchFamily="34" charset="-120"/>
               </a:rPr>
-              <a:t>Phase II study on HCC with PVTT</a:t>
+              <a:t>Combination therapy for unresectable HCC</a:t>
             </a:r>
             <a:endParaRPr lang="en-US" sz="1800" dirty="0"/>
           </a:p>
@@ -7493,7 +7409,7 @@
                 <a:ea typeface="Arial" pitchFamily="34" charset="-122"/>
                 <a:cs typeface="Arial" pitchFamily="34" charset="-120"/>
               </a:rPr>
-              <a:t>HAIC combined with lenvatinib and PD-1</a:t>
+              <a:t>Transarterial chemoembolization and PD-1 inhibitors</a:t>
             </a:r>
             <a:endParaRPr lang="en-US" sz="1800" dirty="0"/>
           </a:p>
@@ -7514,49 +7430,7 @@
                 <a:ea typeface="Arial" pitchFamily="34" charset="-122"/>
                 <a:cs typeface="Arial" pitchFamily="34" charset="-120"/>
               </a:rPr>
-              <a:t>Improved outcomes compared to standard therapy</a:t>
-            </a:r>
-            <a:endParaRPr lang="en-US" sz="1800" dirty="0"/>
-          </a:p>
-          <a:p>
-            <a:pPr marL="342900" indent="-342900">
-              <a:spcAft>
-                <a:spcPts val="800"/>
-              </a:spcAft>
-              <a:buSzPct val="100000"/>
-              <a:buChar char="•"/>
-            </a:pPr>
-            <a:r>
-              <a:rPr lang="en-US" sz="1800" dirty="0">
-                <a:solidFill>
-                  <a:srgbClr val="333333"/>
-                </a:solidFill>
-                <a:latin typeface="Arial" pitchFamily="34" charset="0"/>
-                <a:ea typeface="Arial" pitchFamily="34" charset="-122"/>
-                <a:cs typeface="Arial" pitchFamily="34" charset="-120"/>
-              </a:rPr>
-              <a:t>Focus on curative-intent strategies</a:t>
-            </a:r>
-            <a:endParaRPr lang="en-US" sz="1800" dirty="0"/>
-          </a:p>
-          <a:p>
-            <a:pPr marL="342900" indent="-342900">
-              <a:spcAft>
-                <a:spcPts val="800"/>
-              </a:spcAft>
-              <a:buSzPct val="100000"/>
-              <a:buChar char="•"/>
-            </a:pPr>
-            <a:r>
-              <a:rPr lang="en-US" sz="1800" dirty="0">
-                <a:solidFill>
-                  <a:srgbClr val="333333"/>
-                </a:solidFill>
-                <a:latin typeface="Arial" pitchFamily="34" charset="0"/>
-                <a:ea typeface="Arial" pitchFamily="34" charset="-122"/>
-                <a:cs typeface="Arial" pitchFamily="34" charset="-120"/>
-              </a:rPr>
-              <a:t>Potential shift in treatment paradigms</a:t>
+              <a:t>Phase 2 trial shows promising results</a:t>
             </a:r>
             <a:endParaRPr lang="en-US" sz="1800" dirty="0"/>
           </a:p>
@@ -7592,7 +7466,7 @@
                   <a:srgbClr val="888888"/>
                 </a:solidFill>
               </a:rPr>
-              <a:t>L Marzi, R Sacco, L Siciliani. …. 2026</a:t>
+              <a:t>X Zhang, H Cai, W Peng. … and Targeted Therapy. 2026</a:t>
             </a:r>
             <a:endParaRPr lang="en-US" sz="800" dirty="0"/>
           </a:p>

--- a/docs/digest-en.pptx
+++ b/docs/digest-en.pptx
@@ -2269,7 +2269,7 @@
                   <a:srgbClr val="888888"/>
                 </a:solidFill>
               </a:rPr>
-              <a:t>2026-04-13 — 2026-04-20</a:t>
+              <a:t>2026-04-20 — 2026-04-27</a:t>
             </a:r>
             <a:endParaRPr lang="en-US" sz="1400" dirty="0"/>
           </a:p>
@@ -2460,7 +2460,7 @@
                   </a:extLst>
                 </a:hlinkClick>
               </a:rPr>
-              <a:t>Prognostic nutritional index and the survival of patients with hepatocellular carcinoma on immune checkpoint inhibitors: a meta-analysis</a:t>
+              <a:t>Radiotherapy versus local ablation therapy for the treatment of hepatocellular carcinoma: A systematic review and meta-analysis.</a:t>
             </a:r>
             <a:endParaRPr lang="en-US" sz="2400" dirty="0"/>
           </a:p>
@@ -2496,7 +2496,7 @@
                   <a:srgbClr val="888888"/>
                 </a:solidFill>
               </a:rPr>
-              <a:t>BMC cancer  ·  Meta-Analysis</a:t>
+              <a:t>Journal of Clinical …  ·  Meta-Analysis</a:t>
             </a:r>
             <a:endParaRPr lang="en-US" sz="1000" dirty="0"/>
           </a:p>
@@ -2539,7 +2539,7 @@
                 <a:ea typeface="Arial" pitchFamily="34" charset="-122"/>
                 <a:cs typeface="Arial" pitchFamily="34" charset="-120"/>
               </a:rPr>
-              <a:t>Prognostic nutritional index (PNI) impacts survival</a:t>
+              <a:t>Comparison of radiotherapy and local ablation</a:t>
             </a:r>
             <a:endParaRPr lang="en-US" sz="1800" dirty="0"/>
           </a:p>
@@ -2560,7 +2560,7 @@
                 <a:ea typeface="Arial" pitchFamily="34" charset="-122"/>
                 <a:cs typeface="Arial" pitchFamily="34" charset="-120"/>
               </a:rPr>
-              <a:t>Meta-analysis of HCC patients on ICIs</a:t>
+              <a:t>Focus on hepatocellular carcinoma (HCC) treatment</a:t>
             </a:r>
             <a:endParaRPr lang="en-US" sz="1800" dirty="0"/>
           </a:p>
@@ -2581,7 +2581,49 @@
                 <a:ea typeface="Arial" pitchFamily="34" charset="-122"/>
                 <a:cs typeface="Arial" pitchFamily="34" charset="-120"/>
               </a:rPr>
-              <a:t>Nutritional status correlates with immune response</a:t>
+              <a:t>Evaluation of local progression-free survival</a:t>
+            </a:r>
+            <a:endParaRPr lang="en-US" sz="1800" dirty="0"/>
+          </a:p>
+          <a:p>
+            <a:pPr marL="342900" indent="-342900">
+              <a:spcAft>
+                <a:spcPts val="800"/>
+              </a:spcAft>
+              <a:buSzPct val="100000"/>
+              <a:buChar char="•"/>
+            </a:pPr>
+            <a:r>
+              <a:rPr lang="en-US" sz="1800" dirty="0">
+                <a:solidFill>
+                  <a:srgbClr val="333333"/>
+                </a:solidFill>
+                <a:latin typeface="Arial" pitchFamily="34" charset="0"/>
+                <a:ea typeface="Arial" pitchFamily="34" charset="-122"/>
+                <a:cs typeface="Arial" pitchFamily="34" charset="-120"/>
+              </a:rPr>
+              <a:t>Inclusion of radiofrequency and microwave ablation</a:t>
+            </a:r>
+            <a:endParaRPr lang="en-US" sz="1800" dirty="0"/>
+          </a:p>
+          <a:p>
+            <a:pPr marL="342900" indent="-342900">
+              <a:spcAft>
+                <a:spcPts val="800"/>
+              </a:spcAft>
+              <a:buSzPct val="100000"/>
+              <a:buChar char="•"/>
+            </a:pPr>
+            <a:r>
+              <a:rPr lang="en-US" sz="1800" dirty="0">
+                <a:solidFill>
+                  <a:srgbClr val="333333"/>
+                </a:solidFill>
+                <a:latin typeface="Arial" pitchFamily="34" charset="0"/>
+                <a:ea typeface="Arial" pitchFamily="34" charset="-122"/>
+                <a:cs typeface="Arial" pitchFamily="34" charset="-120"/>
+              </a:rPr>
+              <a:t>Systematic review and meta-analysis conducted</a:t>
             </a:r>
             <a:endParaRPr lang="en-US" sz="1800" dirty="0"/>
           </a:p>
@@ -2617,7 +2659,7 @@
                   <a:srgbClr val="888888"/>
                 </a:solidFill>
               </a:rPr>
-              <a:t>J Fu, W Peng, J Jiang. BMC cancer. 2026</a:t>
+              <a:t>SH Bae, SH Choi, SM Yoon. Journal of Clinical …. 2026</a:t>
             </a:r>
             <a:endParaRPr lang="en-US" sz="800" dirty="0"/>
           </a:p>
@@ -2817,7 +2859,7 @@
                   </a:extLst>
                 </a:hlinkClick>
               </a:rPr>
-              <a:t>Radiotherapy versus local ablation therapy for the treatment of hepatocellular carcinoma: A systematic review and meta-analysis.</a:t>
+              <a:t>… on interventional therapy and immune checkpoint inhibitors (ICIs) in patients with intermediate-and advanced-stage hepatocellular carcinoma: a systematic review …</a:t>
             </a:r>
             <a:endParaRPr lang="en-US" sz="2400" dirty="0"/>
           </a:p>
@@ -2853,7 +2895,7 @@
                   <a:srgbClr val="888888"/>
                 </a:solidFill>
               </a:rPr>
-              <a:t>Journal of Clinical …  ·  Meta-Analysis</a:t>
+              <a:t>… , Immunotherapy  ·  Systematic Review</a:t>
             </a:r>
             <a:endParaRPr lang="en-US" sz="1000" dirty="0"/>
           </a:p>
@@ -2896,7 +2938,7 @@
                 <a:ea typeface="Arial" pitchFamily="34" charset="-122"/>
                 <a:cs typeface="Arial" pitchFamily="34" charset="-120"/>
               </a:rPr>
-              <a:t>Comparison of radiotherapy and local ablation</a:t>
+              <a:t>Combination therapy shows promise in HCC.</a:t>
             </a:r>
             <a:endParaRPr lang="en-US" sz="1800" dirty="0"/>
           </a:p>
@@ -2917,7 +2959,7 @@
                 <a:ea typeface="Arial" pitchFamily="34" charset="-122"/>
                 <a:cs typeface="Arial" pitchFamily="34" charset="-120"/>
               </a:rPr>
-              <a:t>Focus on hepatocellular carcinoma treatment</a:t>
+              <a:t>Interventional therapy enhances ICI efficacy.</a:t>
             </a:r>
             <a:endParaRPr lang="en-US" sz="1800" dirty="0"/>
           </a:p>
@@ -2938,49 +2980,7 @@
                 <a:ea typeface="Arial" pitchFamily="34" charset="-122"/>
                 <a:cs typeface="Arial" pitchFamily="34" charset="-120"/>
               </a:rPr>
-              <a:t>Analysis of local progression-free survival</a:t>
-            </a:r>
-            <a:endParaRPr lang="en-US" sz="1800" dirty="0"/>
-          </a:p>
-          <a:p>
-            <a:pPr marL="342900" indent="-342900">
-              <a:spcAft>
-                <a:spcPts val="800"/>
-              </a:spcAft>
-              <a:buSzPct val="100000"/>
-              <a:buChar char="•"/>
-            </a:pPr>
-            <a:r>
-              <a:rPr lang="en-US" sz="1800" dirty="0">
-                <a:solidFill>
-                  <a:srgbClr val="333333"/>
-                </a:solidFill>
-                <a:latin typeface="Arial" pitchFamily="34" charset="0"/>
-                <a:ea typeface="Arial" pitchFamily="34" charset="-122"/>
-                <a:cs typeface="Arial" pitchFamily="34" charset="-120"/>
-              </a:rPr>
-              <a:t>Inclusion of radiofrequency and microwave ablation</a:t>
-            </a:r>
-            <a:endParaRPr lang="en-US" sz="1800" dirty="0"/>
-          </a:p>
-          <a:p>
-            <a:pPr marL="342900" indent="-342900">
-              <a:spcAft>
-                <a:spcPts val="800"/>
-              </a:spcAft>
-              <a:buSzPct val="100000"/>
-              <a:buChar char="•"/>
-            </a:pPr>
-            <a:r>
-              <a:rPr lang="en-US" sz="1800" dirty="0">
-                <a:solidFill>
-                  <a:srgbClr val="333333"/>
-                </a:solidFill>
-                <a:latin typeface="Arial" pitchFamily="34" charset="0"/>
-                <a:ea typeface="Arial" pitchFamily="34" charset="-122"/>
-                <a:cs typeface="Arial" pitchFamily="34" charset="-120"/>
-              </a:rPr>
-              <a:t>Systematic review and meta-analysis conducted</a:t>
+              <a:t>Need for more comprehensive clinical trials.</a:t>
             </a:r>
             <a:endParaRPr lang="en-US" sz="1800" dirty="0"/>
           </a:p>
@@ -3016,7 +3016,7 @@
                   <a:srgbClr val="888888"/>
                 </a:solidFill>
               </a:rPr>
-              <a:t>SH Bae, SH Choi, SM Yoon. Journal of Clinical …. 2026</a:t>
+              <a:t>J Su, Y Su, R Mai. … , Immunotherapy. 2026</a:t>
             </a:r>
             <a:endParaRPr lang="en-US" sz="800" dirty="0"/>
           </a:p>
@@ -3216,7 +3216,7 @@
                   </a:extLst>
                 </a:hlinkClick>
               </a:rPr>
-              <a:t>… on interventional therapy and immune checkpoint inhibitors (ICIs) in patients with intermediate-and advanced-stage hepatocellular carcinoma: a systematic review …</a:t>
+              <a:t>Comparative efficacy and safety of immune checkpoint inhibitor–based strategies in advanced hepatocellular carcinoma: a systematic review and network meta …</a:t>
             </a:r>
             <a:endParaRPr lang="en-US" sz="2400" dirty="0"/>
           </a:p>
@@ -3252,7 +3252,7 @@
                   <a:srgbClr val="888888"/>
                 </a:solidFill>
               </a:rPr>
-              <a:t>… , Immunotherapy  ·  Systematic Review</a:t>
+              <a:t>… Journal of Surgery  ·  Systematic Review</a:t>
             </a:r>
             <a:endParaRPr lang="en-US" sz="1000" dirty="0"/>
           </a:p>
@@ -3295,7 +3295,7 @@
                 <a:ea typeface="Arial" pitchFamily="34" charset="-122"/>
                 <a:cs typeface="Arial" pitchFamily="34" charset="-120"/>
               </a:rPr>
-              <a:t>Combination therapy shows promising results.</a:t>
+              <a:t>Immune checkpoint inhibitors show promise.</a:t>
             </a:r>
             <a:endParaRPr lang="en-US" sz="1800" dirty="0"/>
           </a:p>
@@ -3316,7 +3316,7 @@
                 <a:ea typeface="Arial" pitchFamily="34" charset="-122"/>
                 <a:cs typeface="Arial" pitchFamily="34" charset="-120"/>
               </a:rPr>
-              <a:t>ICIs enhance immune response in HCC.</a:t>
+              <a:t>Combination therapies improve treatment outcomes.</a:t>
             </a:r>
             <a:endParaRPr lang="en-US" sz="1800" dirty="0"/>
           </a:p>
@@ -3337,7 +3337,7 @@
                 <a:ea typeface="Arial" pitchFamily="34" charset="-122"/>
                 <a:cs typeface="Arial" pitchFamily="34" charset="-120"/>
               </a:rPr>
-              <a:t>Interventional therapy improves patient outcomes.</a:t>
+              <a:t>Safety profiles vary among strategies.</a:t>
             </a:r>
             <a:endParaRPr lang="en-US" sz="1800" dirty="0"/>
           </a:p>
@@ -3373,7 +3373,7 @@
                   <a:srgbClr val="888888"/>
                 </a:solidFill>
               </a:rPr>
-              <a:t>J Su, Y Su, R Mai. … , Immunotherapy. 2026</a:t>
+              <a:t>X Yu, X Zhang, O Jiang. … Journal of Surgery. 2026</a:t>
             </a:r>
             <a:endParaRPr lang="en-US" sz="800" dirty="0"/>
           </a:p>
@@ -3590,7 +3590,7 @@
                   <a:srgbClr val="FFFFFF"/>
                 </a:solidFill>
               </a:rPr>
-              <a:t>1. **癌症的標誌與治療的關聯性**  </a:t>
+              <a:t>1. **免疫療法的長期生存潛力**  </a:t>
             </a:r>
             <a:endParaRPr lang="en-US" sz="1200" dirty="0"/>
           </a:p>
@@ -3607,7 +3607,7 @@
                   <a:srgbClr val="FFFFFF"/>
                 </a:solidFill>
               </a:rPr>
-              <a:t>   The hallmarks of cancer provide a comprehensive framework for understanding hepatocellular carcinoma (HCC) and guiding therapeutic strategies.  </a:t>
+              <a:t>   Immunotherapy has demonstrated the potential for long-term survival and even cure in advanced hepatocellular carcinoma (HCC), as evidenced by recent studies utilizing mixture cure models (MCMs).  </a:t>
             </a:r>
             <a:endParaRPr lang="en-US" sz="1200" dirty="0"/>
           </a:p>
@@ -3624,7 +3624,7 @@
                   <a:srgbClr val="FFFFFF"/>
                 </a:solidFill>
               </a:rPr>
-              <a:t>   癌症的標誌為理解肝細胞癌（HCC）及指導治療策略提供了全面的框架。</a:t>
+              <a:t>   免疫療法在晚期肝細胞癌（HCC）中顯示出長期生存甚至治癒的潛力，這一點在最近利用混合治癒模型（MCMs）的研究中得到了證實。</a:t>
             </a:r>
             <a:endParaRPr lang="en-US" sz="1200" dirty="0"/>
           </a:p>
@@ -3650,7 +3650,7 @@
                   <a:srgbClr val="FFFFFF"/>
                 </a:solidFill>
               </a:rPr>
-              <a:t>2. **免疫治療的潛力與挑戰**  </a:t>
+              <a:t>2. **個性化治療策略的必要性**  </a:t>
             </a:r>
             <a:endParaRPr lang="en-US" sz="1200" dirty="0"/>
           </a:p>
@@ -3667,7 +3667,7 @@
                   <a:srgbClr val="FFFFFF"/>
                 </a:solidFill>
               </a:rPr>
-              <a:t>   Neoadjuvant immune therapy shows promise in remodeling the tumor microenvironment, yet its optimal application in early-stage HCC remains to be established.  </a:t>
+              <a:t>   The era of immunotherapy necessitates personalized treatment strategies for HCC, as recurrence rates remain high despite curative intent in early-stage cases.  </a:t>
             </a:r>
             <a:endParaRPr lang="en-US" sz="1200" dirty="0"/>
           </a:p>
@@ -3684,7 +3684,7 @@
                   <a:srgbClr val="FFFFFF"/>
                 </a:solidFill>
               </a:rPr>
-              <a:t>   新輔助免疫治療在重塑腫瘤微環境方面顯示出潛力，但其在早期HCC中的最佳應用仍需確立。</a:t>
+              <a:t>   免疫療法的時代要求為HCC制定個性化的治療策略，因為儘管早期病例有治癒意圖，但復發率仍然很高。</a:t>
             </a:r>
             <a:endParaRPr lang="en-US" sz="1200" dirty="0"/>
           </a:p>
@@ -3710,7 +3710,7 @@
                   <a:srgbClr val="FFFFFF"/>
                 </a:solidFill>
               </a:rPr>
-              <a:t>3. **癌症相關成纖維細胞的角色**  </a:t>
+              <a:t>3. **局部療法與免疫檢查點抑制劑的結合**  </a:t>
             </a:r>
             <a:endParaRPr lang="en-US" sz="1200" dirty="0"/>
           </a:p>
@@ -3727,7 +3727,7 @@
                   <a:srgbClr val="FFFFFF"/>
                 </a:solidFill>
               </a:rPr>
-              <a:t>   Cancer-associated fibroblasts (CAFs) are crucial in promoting immunosuppression in HCC through metabolic pathways, highlighting new therapeutic targets.  </a:t>
+              <a:t>   Combining local therapies, such as stereotactic body radiotherapy, with immune checkpoint inhibitors shows promising results in advanced HCC, enhancing treatment efficacy.  </a:t>
             </a:r>
             <a:endParaRPr lang="en-US" sz="1200" dirty="0"/>
           </a:p>
@@ -3744,7 +3744,7 @@
                   <a:srgbClr val="FFFFFF"/>
                 </a:solidFill>
               </a:rPr>
-              <a:t>   癌症相關成纖維細胞（CAFs）在HCC中透過代謝途徑促進免疫抑制，突顯了新的治療靶點。</a:t>
+              <a:t>   將局部療法（如立體定向體放療）與免疫檢查點抑制劑結合，顯示出在晚期HCC中的良好效果，增強了治療的有效性。</a:t>
             </a:r>
             <a:endParaRPr lang="en-US" sz="1200" dirty="0"/>
           </a:p>
@@ -3770,7 +3770,7 @@
                   <a:srgbClr val="FFFFFF"/>
                 </a:solidFill>
               </a:rPr>
-              <a:t>4. **手術後復發的挑戰**  </a:t>
+              <a:t>4. **時間因素對免疫療法的影響**  </a:t>
             </a:r>
             <a:endParaRPr lang="en-US" sz="1200" dirty="0"/>
           </a:p>
@@ -3787,7 +3787,7 @@
                   <a:srgbClr val="FFFFFF"/>
                 </a:solidFill>
               </a:rPr>
-              <a:t>   Postoperative recurrence in HCC remains a significant clinical challenge, necessitating further exploration of underlying mechanisms and therapeutic strategies.  </a:t>
+              <a:t>   The timing of immune checkpoint inhibitor administration may influence clinical outcomes, highlighting the importance of circadian rhythms in treatment efficacy.  </a:t>
             </a:r>
             <a:endParaRPr lang="en-US" sz="1200" dirty="0"/>
           </a:p>
@@ -3804,7 +3804,7 @@
                   <a:srgbClr val="FFFFFF"/>
                 </a:solidFill>
               </a:rPr>
-              <a:t>   HCC的手術後復發仍然是一個重大臨床挑戰，需要進一步探索其潛在機制和治療策略。</a:t>
+              <a:t>   免疫檢查點抑制劑的給藥時間可能會影響臨床結果，強調了生物節律在治療效果中的重要性。</a:t>
             </a:r>
             <a:endParaRPr lang="en-US" sz="1200" dirty="0"/>
           </a:p>
@@ -3830,7 +3830,7 @@
                   <a:srgbClr val="FFFFFF"/>
                 </a:solidFill>
               </a:rPr>
-              <a:t>5. **結合治療的前景**  </a:t>
+              <a:t>5. **營養指標與預後關聯**  </a:t>
             </a:r>
             <a:endParaRPr lang="en-US" sz="1200" dirty="0"/>
           </a:p>
@@ -3847,7 +3847,7 @@
                   <a:srgbClr val="FFFFFF"/>
                 </a:solidFill>
               </a:rPr>
-              <a:t>   Combining interventional therapies with immune checkpoint inhibitors may enhance treatment outcomes in advanced HCC, warranting further investigation.</a:t>
+              <a:t>   The prognostic nutritional index has been associated with survival outcomes in HCC patients treated with immune checkpoint inhibitors, suggesting that nutritional status may play a role in treatment efficacy.</a:t>
             </a:r>
             <a:endParaRPr lang="en-US" sz="1200" dirty="0"/>
           </a:p>
@@ -3993,7 +3993,7 @@
                   <a:srgbClr val="FFFFFF"/>
                 </a:solidFill>
               </a:rPr>
-              <a:t>將介入治療與免疫檢查點抑制劑結合可能提高晚期HCC的治療效果，值得進一步研究。</a:t>
+              <a:t>預後營養指數與接受免疫檢查點抑制劑治療的HCC患者的生存結果相關，這表明營養狀況可能在治療效果中扮演角色。</a:t>
             </a:r>
             <a:endParaRPr lang="en-US" sz="1200" dirty="0"/>
           </a:p>
@@ -4045,7 +4045,7 @@
                   <a:srgbClr val="FFFFFF"/>
                 </a:solidFill>
               </a:rPr>
-              <a:t>1. **早期階段免疫治療的最佳化**  </a:t>
+              <a:t>1. **混合治癒模型的應用**  </a:t>
             </a:r>
             <a:endParaRPr lang="en-US" sz="1200" dirty="0"/>
           </a:p>
@@ -4062,7 +4062,7 @@
                   <a:srgbClr val="FFFFFF"/>
                 </a:solidFill>
               </a:rPr>
-              <a:t>   Investigate the optimal timing and combinations of immune therapies in early-stage HCC to maximize patient outcomes.  </a:t>
+              <a:t>   Further studies should apply mixture cure models in HCC to better estimate the fraction of long-term survivors and identify predictors of cure.  </a:t>
             </a:r>
             <a:endParaRPr lang="en-US" sz="1200" dirty="0"/>
           </a:p>
@@ -4079,7 +4079,7 @@
                   <a:srgbClr val="FFFFFF"/>
                 </a:solidFill>
               </a:rPr>
-              <a:t>   探討早期HCC中免疫治療的最佳時機和組合，以最大化患者的治療效果。</a:t>
+              <a:t>   進一步的研究應在HCC中應用混合治癒模型，以更好地估計長期生存者的比例並識別治癒的預測因子。</a:t>
             </a:r>
             <a:endParaRPr lang="en-US" sz="1200" dirty="0"/>
           </a:p>
@@ -4105,7 +4105,7 @@
                   <a:srgbClr val="FFFFFF"/>
                 </a:solidFill>
               </a:rPr>
-              <a:t>2. **靶向癌症相關成纖維細胞的療法**  </a:t>
+              <a:t>2. **個性化治療的臨床試驗**  </a:t>
             </a:r>
             <a:endParaRPr lang="en-US" sz="1200" dirty="0"/>
           </a:p>
@@ -4122,7 +4122,7 @@
                   <a:srgbClr val="FFFFFF"/>
                 </a:solidFill>
               </a:rPr>
-              <a:t>   Develop targeted therapies against CAFs to mitigate their immunosuppressive effects in HCC and improve treatment efficacy.  </a:t>
+              <a:t>   Large-scale clinical trials focusing on personalized treatment approaches in HCC patients receiving immunotherapy are needed to establish optimal strategies.  </a:t>
             </a:r>
             <a:endParaRPr lang="en-US" sz="1200" dirty="0"/>
           </a:p>
@@ -4139,7 +4139,7 @@
                   <a:srgbClr val="FFFFFF"/>
                 </a:solidFill>
               </a:rPr>
-              <a:t>   開發針對CAFs的靶向療法，以減少其在HCC中的免疫抑制作用，並提高治療效果。</a:t>
+              <a:t>   需要針對接受免疫療法的HCC患者進行大規模臨床試驗，專注於個性化治療方法，以確立最佳策略。</a:t>
             </a:r>
             <a:endParaRPr lang="en-US" sz="1200" dirty="0"/>
           </a:p>
@@ -4165,7 +4165,7 @@
                   <a:srgbClr val="FFFFFF"/>
                 </a:solidFill>
               </a:rPr>
-              <a:t>3. **探索腫瘤微環境的調控**  </a:t>
+              <a:t>3. **時間因素的機制研究**  </a:t>
             </a:r>
             <a:endParaRPr lang="en-US" sz="1200" dirty="0"/>
           </a:p>
@@ -4182,7 +4182,7 @@
                   <a:srgbClr val="FFFFFF"/>
                 </a:solidFill>
               </a:rPr>
-              <a:t>   Further research on the tumor microenvironment's role in HCC progression and response to therapies, focusing on metabolic and immune interactions.  </a:t>
+              <a:t>   Investigating the biological mechanisms behind the time-of-day effects on immune checkpoint inhibitor efficacy could lead to optimized treatment schedules.  </a:t>
             </a:r>
             <a:endParaRPr lang="en-US" sz="1200" dirty="0"/>
           </a:p>
@@ -4199,7 +4199,7 @@
                   <a:srgbClr val="FFFFFF"/>
                 </a:solidFill>
               </a:rPr>
-              <a:t>   進一步研究腫瘤微環境在HCC進展和治療反應中的作用，重點關注代謝和免疫相互作用。</a:t>
+              <a:t>   研究時間因素對免疫檢查點抑制劑療效的生物學機制，可能會導致最佳治療時間表的制定。</a:t>
             </a:r>
             <a:endParaRPr lang="en-US" sz="1200" dirty="0"/>
           </a:p>
@@ -4225,7 +4225,7 @@
                   <a:srgbClr val="FFFFFF"/>
                 </a:solidFill>
               </a:rPr>
-              <a:t>4. **多模態治療策略的評估**  </a:t>
+              <a:t>4. **營養干預的臨床應用**  </a:t>
             </a:r>
             <a:endParaRPr lang="en-US" sz="1200" dirty="0"/>
           </a:p>
@@ -4242,7 +4242,7 @@
                   <a:srgbClr val="FFFFFF"/>
                 </a:solidFill>
               </a:rPr>
-              <a:t>   Evaluate the efficacy of multimodal treatment strategies combining surgery, ablation, and immunotherapy in improving survival rates in HCC.  </a:t>
+              <a:t>   Exploring the role of nutritional interventions in conjunction with immunotherapy may enhance treatment outcomes for HCC patients.  </a:t>
             </a:r>
             <a:endParaRPr lang="en-US" sz="1200" dirty="0"/>
           </a:p>
@@ -4259,7 +4259,7 @@
                   <a:srgbClr val="FFFFFF"/>
                 </a:solidFill>
               </a:rPr>
-              <a:t>   評估結合手術、消融和免疫治療的多模態治療策略在提高HCC生存率方面的有效性。</a:t>
+              <a:t>   探索營養干預與免疫療法結合的作用，可能會改善HCC患者的治療結果。</a:t>
             </a:r>
             <a:endParaRPr lang="en-US" sz="1200" dirty="0"/>
           </a:p>
@@ -4285,7 +4285,7 @@
                   <a:srgbClr val="FFFFFF"/>
                 </a:solidFill>
               </a:rPr>
-              <a:t>5. **個體化治療的發展**  </a:t>
+              <a:t>5. **局部療法的最佳化**  </a:t>
             </a:r>
             <a:endParaRPr lang="en-US" sz="1200" dirty="0"/>
           </a:p>
@@ -4302,7 +4302,7 @@
                   <a:srgbClr val="FFFFFF"/>
                 </a:solidFill>
               </a:rPr>
-              <a:t>   Explore personalized medicine approaches based on genetic and immunological profiling to tailor therapies for HCC patients.  </a:t>
+              <a:t>   Future research should focus on optimizing the combination of local ablative therapies with immunotherapy to maximize patient benefits in HCC treatment.  </a:t>
             </a:r>
             <a:endParaRPr lang="en-US" sz="1200" dirty="0"/>
           </a:p>
@@ -4319,7 +4319,7 @@
                   <a:srgbClr val="FFFFFF"/>
                 </a:solidFill>
               </a:rPr>
-              <a:t>   探索基於基因和免疫學特徵的個體化治療方法，以為HCC患者量身定制療法。</a:t>
+              <a:t>   未來的研究應專注於優化局部消融療法與免疫療法的結合，以最大化HCC治療中的患者受益。</a:t>
             </a:r>
             <a:endParaRPr lang="en-US" sz="1200" dirty="0"/>
           </a:p>
@@ -4553,7 +4553,7 @@
                 <a:ea typeface="Arial" pitchFamily="34" charset="-122"/>
                 <a:cs typeface="Arial" pitchFamily="34" charset="-120"/>
               </a:rPr>
-              <a:t>Hallmarks of liver cancer: Therapeutic implications.</a:t>
+              <a:t>Long-term survival and cure fraction in patients with advanced hepatocellular ca…</a:t>
             </a:r>
             <a:endParaRPr lang="en-US" sz="1400" dirty="0"/>
           </a:p>
@@ -4590,7 +4590,7 @@
                 <a:ea typeface="Arial" pitchFamily="34" charset="-122"/>
                 <a:cs typeface="Arial" pitchFamily="34" charset="-120"/>
               </a:rPr>
-              <a:t>Neoadjuvant stereotactic body radiation therapy plus immune therapy favorably re…</a:t>
+              <a:t>Optimal treatment selection for hepatocellular carcinoma in the era of immunothe…</a:t>
             </a:r>
             <a:endParaRPr lang="en-US" sz="1400" dirty="0"/>
           </a:p>
@@ -4627,7 +4627,7 @@
                 <a:ea typeface="Arial" pitchFamily="34" charset="-122"/>
                 <a:cs typeface="Arial" pitchFamily="34" charset="-120"/>
               </a:rPr>
-              <a:t>Erratum: Hepatectomy alters adjuvant anti-PD-1 action in a mouse model of HCC bu…</a:t>
+              <a:t>Pembrolizumab and stereotactic body radiotherapy combined in advanced hepatocell…</a:t>
             </a:r>
             <a:endParaRPr lang="en-US" sz="1400" dirty="0"/>
           </a:p>
@@ -4664,7 +4664,7 @@
                 <a:ea typeface="Arial" pitchFamily="34" charset="-122"/>
                 <a:cs typeface="Arial" pitchFamily="34" charset="-120"/>
               </a:rPr>
-              <a:t>Intratumoral Lactobacillus johnsonii Enhances Sensitivity to PD-1 Blockade by In…</a:t>
+              <a:t>Multicentre prospective trial of abbreviated MRI using gadoxetic acid versus CT …</a:t>
             </a:r>
             <a:endParaRPr lang="en-US" sz="1400" dirty="0"/>
           </a:p>
@@ -4701,7 +4701,7 @@
                 <a:ea typeface="Arial" pitchFamily="34" charset="-122"/>
                 <a:cs typeface="Arial" pitchFamily="34" charset="-120"/>
               </a:rPr>
-              <a:t>Cancer-Associated Fibroblasts Promote Tumor Immunosuppression in Hepatocellular …</a:t>
+              <a:t>Time-of-day of first checkpoint inhibitor dose influences clinical outcomes and …</a:t>
             </a:r>
             <a:endParaRPr lang="en-US" sz="1400" dirty="0"/>
           </a:p>
@@ -4738,7 +4738,7 @@
                 <a:ea typeface="Arial" pitchFamily="34" charset="-122"/>
                 <a:cs typeface="Arial" pitchFamily="34" charset="-120"/>
               </a:rPr>
-              <a:t>Selective depletion of virus-specific CD8 T cells from the liver after PD-1 ther…</a:t>
+              <a:t>Cost-effectiveness analysis of atezolizumab and bevacizumab as first-line system…</a:t>
             </a:r>
             <a:endParaRPr lang="en-US" sz="1400" dirty="0"/>
           </a:p>
@@ -4775,7 +4775,7 @@
                 <a:ea typeface="Arial" pitchFamily="34" charset="-122"/>
                 <a:cs typeface="Arial" pitchFamily="34" charset="-120"/>
               </a:rPr>
-              <a:t>… plus transarterial chemoembolization and PD-1 inhibitors as conversion therapi…</a:t>
+              <a:t>Prognostic nutritional index and the survival of patients with hepatocellular ca…</a:t>
             </a:r>
             <a:endParaRPr lang="en-US" sz="1400" dirty="0"/>
           </a:p>
@@ -4812,7 +4812,7 @@
                 <a:ea typeface="Arial" pitchFamily="34" charset="-122"/>
                 <a:cs typeface="Arial" pitchFamily="34" charset="-120"/>
               </a:rPr>
-              <a:t>Prognostic nutritional index and the survival of patients with hepatocellular ca…</a:t>
+              <a:t>Radiotherapy versus local ablation therapy for the treatment of hepatocellular c…</a:t>
             </a:r>
             <a:endParaRPr lang="en-US" sz="1400" dirty="0"/>
           </a:p>
@@ -4849,7 +4849,7 @@
                 <a:ea typeface="Arial" pitchFamily="34" charset="-122"/>
                 <a:cs typeface="Arial" pitchFamily="34" charset="-120"/>
               </a:rPr>
-              <a:t>Radiotherapy versus local ablation therapy for the treatment of hepatocellular c…</a:t>
+              <a:t>… on interventional therapy and immune checkpoint inhibitors (ICIs) in patients …</a:t>
             </a:r>
             <a:endParaRPr lang="en-US" sz="1400" dirty="0"/>
           </a:p>
@@ -4886,7 +4886,7 @@
                 <a:ea typeface="Arial" pitchFamily="34" charset="-122"/>
                 <a:cs typeface="Arial" pitchFamily="34" charset="-120"/>
               </a:rPr>
-              <a:t>… on interventional therapy and immune checkpoint inhibitors (ICIs) in patients …</a:t>
+              <a:t>Comparative efficacy and safety of immune checkpoint inhibitor–based strategies …</a:t>
             </a:r>
             <a:endParaRPr lang="en-US" sz="1400" dirty="0"/>
           </a:p>
@@ -5041,7 +5041,7 @@
                   </a:extLst>
                 </a:hlinkClick>
               </a:rPr>
-              <a:t>Hallmarks of liver cancer: Therapeutic implications.</a:t>
+              <a:t>Long-term survival and cure fraction in patients with advanced hepatocellular carcinoma under immunotherapy in randomized controlled trials and real-world data.</a:t>
             </a:r>
             <a:endParaRPr lang="en-US" sz="2400" dirty="0"/>
           </a:p>
@@ -5077,7 +5077,7 @@
                   <a:srgbClr val="888888"/>
                 </a:solidFill>
               </a:rPr>
-              <a:t>Cell  ·  IF 45.5  ·  Review</a:t>
+              <a:t>Clinical cancer research : an official journal of the American Association for Cancer Research  ·  IF 11.5  ·  RCT Phase 3  ·  🌏 Asia</a:t>
             </a:r>
             <a:endParaRPr lang="en-US" sz="1000" dirty="0"/>
           </a:p>
@@ -5120,7 +5120,7 @@
                 <a:ea typeface="Arial" pitchFamily="34" charset="-122"/>
                 <a:cs typeface="Arial" pitchFamily="34" charset="-120"/>
               </a:rPr>
-              <a:t>Hallmarks guide liver cancer understanding.</a:t>
+              <a:t>ICIs can induce long-term survival in HCC.</a:t>
             </a:r>
             <a:endParaRPr lang="en-US" sz="1800" dirty="0"/>
           </a:p>
@@ -5141,7 +5141,7 @@
                 <a:ea typeface="Arial" pitchFamily="34" charset="-122"/>
                 <a:cs typeface="Arial" pitchFamily="34" charset="-120"/>
               </a:rPr>
-              <a:t>HCC shows unique proliferative signaling.</a:t>
+              <a:t>MCMs estimate long-term survivors and cure fractions.</a:t>
             </a:r>
             <a:endParaRPr lang="en-US" sz="1800" dirty="0"/>
           </a:p>
@@ -5162,7 +5162,7 @@
                 <a:ea typeface="Arial" pitchFamily="34" charset="-122"/>
                 <a:cs typeface="Arial" pitchFamily="34" charset="-120"/>
               </a:rPr>
-              <a:t>Immunotherapies improve advanced HCC outcomes.</a:t>
+              <a:t>Long-term survival rates range from 10-15%.</a:t>
             </a:r>
             <a:endParaRPr lang="en-US" sz="1800" dirty="0"/>
           </a:p>
@@ -5183,7 +5183,7 @@
                 <a:ea typeface="Arial" pitchFamily="34" charset="-122"/>
                 <a:cs typeface="Arial" pitchFamily="34" charset="-120"/>
               </a:rPr>
-              <a:t>iCCA has distinct genetic alterations.</a:t>
+              <a:t>Cure fractions observed between 7-9%.</a:t>
             </a:r>
             <a:endParaRPr lang="en-US" sz="1800" dirty="0"/>
           </a:p>
@@ -5204,7 +5204,7 @@
                 <a:ea typeface="Arial" pitchFamily="34" charset="-122"/>
                 <a:cs typeface="Arial" pitchFamily="34" charset="-120"/>
               </a:rPr>
-              <a:t>Precision oncology targets iCCA mutations.</a:t>
+              <a:t>ALBI score and hepatitis C predict outcomes.</a:t>
             </a:r>
             <a:endParaRPr lang="en-US" sz="1800" dirty="0"/>
           </a:p>
@@ -5240,7 +5240,7 @@
                   <a:srgbClr val="888888"/>
                 </a:solidFill>
               </a:rPr>
-              <a:t>Llovet Josep M, Pinyol Roser, Affo Silvia et al.. Cell. 2026-04-17 DOI: 10.1016/j.cell.2026.03.001</a:t>
+              <a:t>Campani Claudia, Shim Ju Hyun, Bouattour Mohamed et al.. Clinical cancer research : an official journal of the American Association for Cancer Research. 2026-04-20 DOI: 10.1158/1078-0432.CCR-25-4943</a:t>
             </a:r>
             <a:endParaRPr lang="en-US" sz="800" dirty="0"/>
           </a:p>
@@ -5440,7 +5440,7 @@
                   </a:extLst>
                 </a:hlinkClick>
               </a:rPr>
-              <a:t>Neoadjuvant stereotactic body radiation therapy plus immune therapy favorably remodels the hepatocellular carcinoma tumor microenvironment.</a:t>
+              <a:t>Optimal treatment selection for hepatocellular carcinoma in the era of immunotherapy.</a:t>
             </a:r>
             <a:endParaRPr lang="en-US" sz="2400" dirty="0"/>
           </a:p>
@@ -5476,7 +5476,7 @@
                   <a:srgbClr val="888888"/>
                 </a:solidFill>
               </a:rPr>
-              <a:t>Clinical cancer research : an official journal of the American Association for Cancer Research  ·  IF 11.5  ·  Prospective Study</a:t>
+              <a:t>Journal of gastroenterology  ·  RCT Phase 3  ·  🌏 Asia</a:t>
             </a:r>
             <a:endParaRPr lang="en-US" sz="1000" dirty="0"/>
           </a:p>
@@ -5519,7 +5519,7 @@
                 <a:ea typeface="Arial" pitchFamily="34" charset="-122"/>
                 <a:cs typeface="Arial" pitchFamily="34" charset="-120"/>
               </a:rPr>
-              <a:t>Neoadjuvant SBRT plus immune therapy used.</a:t>
+              <a:t>Immunotherapy reshapes HCC management strategies.</a:t>
             </a:r>
             <a:endParaRPr lang="en-US" sz="1800" dirty="0"/>
           </a:p>
@@ -5540,7 +5540,7 @@
                 <a:ea typeface="Arial" pitchFamily="34" charset="-122"/>
                 <a:cs typeface="Arial" pitchFamily="34" charset="-120"/>
               </a:rPr>
-              <a:t>Pilot study with 8 resectable HCC patients.</a:t>
+              <a:t>High recurrence rates in early-stage HCC persist.</a:t>
             </a:r>
             <a:endParaRPr lang="en-US" sz="1800" dirty="0"/>
           </a:p>
@@ -5561,7 +5561,7 @@
                 <a:ea typeface="Arial" pitchFamily="34" charset="-122"/>
                 <a:cs typeface="Arial" pitchFamily="34" charset="-120"/>
               </a:rPr>
-              <a:t>Safety confirmed with low grade 3 trAE.</a:t>
+              <a:t>AI models predict post-resection recurrence effectively.</a:t>
             </a:r>
             <a:endParaRPr lang="en-US" sz="1800" dirty="0"/>
           </a:p>
@@ -5582,7 +5582,7 @@
                 <a:ea typeface="Arial" pitchFamily="34" charset="-122"/>
                 <a:cs typeface="Arial" pitchFamily="34" charset="-120"/>
               </a:rPr>
-              <a:t>All patients achieved R0 surgical resection.</a:t>
+              <a:t>TACE combined with TKIs improves treatment outcomes.</a:t>
             </a:r>
             <a:endParaRPr lang="en-US" sz="1800" dirty="0"/>
           </a:p>
@@ -5603,7 +5603,7 @@
                 <a:ea typeface="Arial" pitchFamily="34" charset="-122"/>
                 <a:cs typeface="Arial" pitchFamily="34" charset="-120"/>
               </a:rPr>
-              <a:t>Significant immune remodeling observed post-treatment.</a:t>
+              <a:t>Emerging biomarkers enhance immunotherapy selection.</a:t>
             </a:r>
             <a:endParaRPr lang="en-US" sz="1800" dirty="0"/>
           </a:p>
@@ -5639,7 +5639,7 @@
                   <a:srgbClr val="888888"/>
                 </a:solidFill>
               </a:rPr>
-              <a:t>Cosner Zoe, Guo Zhoubo, Nawrocki Cole et al.. Clinical cancer research : an official journal of the American Association for Cancer Research. 2026-04-15 DOI: 10.1158/1078-0432.CCR-25-4779</a:t>
+              <a:t>Chi Chen-Ta, Huang Yi-Hsiang. Journal of gastroenterology. 2026-04-20 DOI: 10.1007/s00535-026-02411-7</a:t>
             </a:r>
             <a:endParaRPr lang="en-US" sz="800" dirty="0"/>
           </a:p>
@@ -5839,7 +5839,7 @@
                   </a:extLst>
                 </a:hlinkClick>
               </a:rPr>
-              <a:t>Erratum: Hepatectomy alters adjuvant anti-PD-1 action in a mouse model of HCC but does not compromise neoadjuvant efficacy.</a:t>
+              <a:t>Pembrolizumab and stereotactic body radiotherapy combined in advanced hepatocellular carcinoma post sorafenib–A phase II trial (PEMRAD)</a:t>
             </a:r>
             <a:endParaRPr lang="en-US" sz="2400" dirty="0"/>
           </a:p>
@@ -5875,7 +5875,7 @@
                   <a:srgbClr val="888888"/>
                 </a:solidFill>
               </a:rPr>
-              <a:t>Hepatology (Baltimore, Md.)  ·  IF 12.9  ·  Basic Research</a:t>
+              <a:t>JHEP Reports  ·  IF 7.8  ·  RCT Phase 2</a:t>
             </a:r>
             <a:endParaRPr lang="en-US" sz="1000" dirty="0"/>
           </a:p>
@@ -5918,7 +5918,7 @@
                 <a:ea typeface="Arial" pitchFamily="34" charset="-122"/>
                 <a:cs typeface="Arial" pitchFamily="34" charset="-120"/>
               </a:rPr>
-              <a:t>Hepatectomy impacts anti-PD-1 therapy</a:t>
+              <a:t>Combination of pembrolizumab and SBRT</a:t>
             </a:r>
             <a:endParaRPr lang="en-US" sz="1800" dirty="0"/>
           </a:p>
@@ -5939,7 +5939,7 @@
                 <a:ea typeface="Arial" pitchFamily="34" charset="-122"/>
                 <a:cs typeface="Arial" pitchFamily="34" charset="-120"/>
               </a:rPr>
-              <a:t>Adjuvant treatment effectiveness varies</a:t>
+              <a:t>Phase II trial for advanced HCC</a:t>
             </a:r>
             <a:endParaRPr lang="en-US" sz="1800" dirty="0"/>
           </a:p>
@@ -5960,7 +5960,7 @@
                 <a:ea typeface="Arial" pitchFamily="34" charset="-122"/>
                 <a:cs typeface="Arial" pitchFamily="34" charset="-120"/>
               </a:rPr>
-              <a:t>Neoadjuvant efficacy remains intact</a:t>
+              <a:t>Post-sorafenib treatment evaluation</a:t>
             </a:r>
             <a:endParaRPr lang="en-US" sz="1800" dirty="0"/>
           </a:p>
@@ -5996,7 +5996,7 @@
                   <a:srgbClr val="888888"/>
                 </a:solidFill>
               </a:rPr>
-              <a:t>Bouguerra Roqiya, El Hajji Sofia, Wassmer Charles-Henri et al.. Hepatology (Baltimore, Md.). 2026-04-16 DOI: 10.1097/HEP.0000000000001731</a:t>
+              <a:t>GM O'Kane, A Mesci, RW Jang. JHEP Reports. 2026</a:t>
             </a:r>
             <a:endParaRPr lang="en-US" sz="800" dirty="0"/>
           </a:p>
@@ -6196,7 +6196,7 @@
                   </a:extLst>
                 </a:hlinkClick>
               </a:rPr>
-              <a:t>Intratumoral Lactobacillus johnsonii Enhances Sensitivity to PD-1 Blockade by Inducing CD8+ T-cell Expansion in Hepatocellular Carcinoma.</a:t>
+              <a:t>Multicentre prospective trial of abbreviated MRI using gadoxetic acid versus CT for detection of late recurrent HCC (AMRICT): study protocol.</a:t>
             </a:r>
             <a:endParaRPr lang="en-US" sz="2400" dirty="0"/>
           </a:p>
@@ -6232,7 +6232,7 @@
                   <a:srgbClr val="888888"/>
                 </a:solidFill>
               </a:rPr>
-              <a:t>Cancer research  ·  IF 12.7  ·  Basic Research</a:t>
+              <a:t>BMJ open  ·  Prospective Study  ·  🌏 Asia</a:t>
             </a:r>
             <a:endParaRPr lang="en-US" sz="1000" dirty="0"/>
           </a:p>
@@ -6275,7 +6275,7 @@
                 <a:ea typeface="Arial" pitchFamily="34" charset="-122"/>
                 <a:cs typeface="Arial" pitchFamily="34" charset="-120"/>
               </a:rPr>
-              <a:t>Lactobacillus johnsonii enriches IFNγ+PD-1+CD8+ T cells.</a:t>
+              <a:t>Late recurrence of HCC is common post-treatment.</a:t>
             </a:r>
             <a:endParaRPr lang="en-US" sz="1800" dirty="0"/>
           </a:p>
@@ -6296,7 +6296,7 @@
                 <a:ea typeface="Arial" pitchFamily="34" charset="-122"/>
                 <a:cs typeface="Arial" pitchFamily="34" charset="-120"/>
               </a:rPr>
-              <a:t>Nicotinic acid expands cytotoxic T-cell populations.</a:t>
+              <a:t>Trial compares HBP-AMRI and multiphasic CECT.</a:t>
             </a:r>
             <a:endParaRPr lang="en-US" sz="1800" dirty="0"/>
           </a:p>
@@ -6317,7 +6317,49 @@
                 <a:ea typeface="Arial" pitchFamily="34" charset="-122"/>
                 <a:cs typeface="Arial" pitchFamily="34" charset="-120"/>
               </a:rPr>
-              <a:t>Combination therapy reduces tumor relapse significantly.</a:t>
+              <a:t>455 participants will be enrolled for imaging.</a:t>
+            </a:r>
+            <a:endParaRPr lang="en-US" sz="1800" dirty="0"/>
+          </a:p>
+          <a:p>
+            <a:pPr marL="342900" indent="-342900">
+              <a:spcAft>
+                <a:spcPts val="800"/>
+              </a:spcAft>
+              <a:buSzPct val="100000"/>
+              <a:buChar char="•"/>
+            </a:pPr>
+            <a:r>
+              <a:rPr lang="en-US" sz="1800" dirty="0">
+                <a:solidFill>
+                  <a:srgbClr val="333333"/>
+                </a:solidFill>
+                <a:latin typeface="Arial" pitchFamily="34" charset="0"/>
+                <a:ea typeface="Arial" pitchFamily="34" charset="-122"/>
+                <a:cs typeface="Arial" pitchFamily="34" charset="-120"/>
+              </a:rPr>
+              <a:t>Primary endpoint: detection rate of HCC.</a:t>
+            </a:r>
+            <a:endParaRPr lang="en-US" sz="1800" dirty="0"/>
+          </a:p>
+          <a:p>
+            <a:pPr marL="342900" indent="-342900">
+              <a:spcAft>
+                <a:spcPts val="800"/>
+              </a:spcAft>
+              <a:buSzPct val="100000"/>
+              <a:buChar char="•"/>
+            </a:pPr>
+            <a:r>
+              <a:rPr lang="en-US" sz="1800" dirty="0">
+                <a:solidFill>
+                  <a:srgbClr val="333333"/>
+                </a:solidFill>
+                <a:latin typeface="Arial" pitchFamily="34" charset="0"/>
+                <a:ea typeface="Arial" pitchFamily="34" charset="-122"/>
+                <a:cs typeface="Arial" pitchFamily="34" charset="-120"/>
+              </a:rPr>
+              <a:t>Study approved by multiple institutional boards.</a:t>
             </a:r>
             <a:endParaRPr lang="en-US" sz="1800" dirty="0"/>
           </a:p>
@@ -6353,7 +6395,7 @@
                   <a:srgbClr val="888888"/>
                 </a:solidFill>
               </a:rPr>
-              <a:t>Liu Qianshi, Liu Yiqiang, Zhou Yue et al.. Cancer research. 2026-04-15 DOI: 10.1158/0008-5472.CAN-25-0346</a:t>
+              <a:t>Park Hyo Jung, Lee Dong Ho, Chang Won et al.. BMJ open. 2026-04-24 DOI: 10.1136/bmjopen-2026-116809</a:t>
             </a:r>
             <a:endParaRPr lang="en-US" sz="800" dirty="0"/>
           </a:p>
@@ -6553,7 +6595,7 @@
                   </a:extLst>
                 </a:hlinkClick>
               </a:rPr>
-              <a:t>Cancer-Associated Fibroblasts Promote Tumor Immunosuppression in Hepatocellular Carcinoma via the NNMT-ANGPTL4 Axis.</a:t>
+              <a:t>Time-of-day of first checkpoint inhibitor dose influences clinical outcomes and immune responses in hepatocellular carcinoma.</a:t>
             </a:r>
             <a:endParaRPr lang="en-US" sz="2400" dirty="0"/>
           </a:p>
@@ -6589,7 +6631,7 @@
                   <a:srgbClr val="888888"/>
                 </a:solidFill>
               </a:rPr>
-              <a:t>Advanced science (Weinheim, Baden-Wurttemberg, Germany)  ·  Basic Research  ·  🌏 Asia</a:t>
+              <a:t>Journal for immunotherapy of cancer  ·  IF 10.9  ·  Retrospective Study</a:t>
             </a:r>
             <a:endParaRPr lang="en-US" sz="1000" dirty="0"/>
           </a:p>
@@ -6632,7 +6674,7 @@
                 <a:ea typeface="Arial" pitchFamily="34" charset="-122"/>
                 <a:cs typeface="Arial" pitchFamily="34" charset="-120"/>
               </a:rPr>
-              <a:t>CAFs drive immunosuppression in HCC.</a:t>
+              <a:t>Timing of ICI affects treatment outcomes.</a:t>
             </a:r>
             <a:endParaRPr lang="en-US" sz="1800" dirty="0"/>
           </a:p>
@@ -6653,7 +6695,7 @@
                 <a:ea typeface="Arial" pitchFamily="34" charset="-122"/>
                 <a:cs typeface="Arial" pitchFamily="34" charset="-120"/>
               </a:rPr>
-              <a:t>NNMT regulates ANGPTL4 secretion.</a:t>
+              <a:t>Morning doses improve progression-free survival.</a:t>
             </a:r>
             <a:endParaRPr lang="en-US" sz="1800" dirty="0"/>
           </a:p>
@@ -6674,7 +6716,7 @@
                 <a:ea typeface="Arial" pitchFamily="34" charset="-122"/>
                 <a:cs typeface="Arial" pitchFamily="34" charset="-120"/>
               </a:rPr>
-              <a:t>ANGPTL4 enhances tumor immune evasion.</a:t>
+              <a:t>Distinct immune responses observed in morning group.</a:t>
             </a:r>
             <a:endParaRPr lang="en-US" sz="1800" dirty="0"/>
           </a:p>
@@ -6710,7 +6752,7 @@
                   <a:srgbClr val="888888"/>
                 </a:solidFill>
               </a:rPr>
-              <a:t>Lu Shounan, Ke Shanjia, Yu Hongjun et al.. Advanced science (Weinheim, Baden-Wurttemberg, Germany). 2026-04-14 DOI: 10.1002/advs.202521418</a:t>
+              <a:t>Li Howard L, Charmsaz Soren, Reisman Benjamin J et al.. Journal for immunotherapy of cancer. 2026-04-21 DOI: 10.1136/jitc-2025-014070</a:t>
             </a:r>
             <a:endParaRPr lang="en-US" sz="800" dirty="0"/>
           </a:p>
@@ -6910,7 +6952,7 @@
                   </a:extLst>
                 </a:hlinkClick>
               </a:rPr>
-              <a:t>Selective depletion of virus-specific CD8 T cells from the liver after PD-1 therapy with Fc-intact antibody during chronic infection.</a:t>
+              <a:t>Cost-effectiveness analysis of atezolizumab and bevacizumab as first-line systemic therapy in unresectable hepatocellular carcinoma in Malaysia.</a:t>
             </a:r>
             <a:endParaRPr lang="en-US" sz="2400" dirty="0"/>
           </a:p>
@@ -6946,7 +6988,7 @@
                   <a:srgbClr val="888888"/>
                 </a:solidFill>
               </a:rPr>
-              <a:t>Proceedings of the National Academy of Sciences of the United States of America  ·  Basic Research  ·  🌏 Asia</a:t>
+              <a:t>Journal of medical economics  ·  Meta-Analysis</a:t>
             </a:r>
             <a:endParaRPr lang="en-US" sz="1000" dirty="0"/>
           </a:p>
@@ -6989,7 +7031,7 @@
                 <a:ea typeface="Arial" pitchFamily="34" charset="-122"/>
                 <a:cs typeface="Arial" pitchFamily="34" charset="-120"/>
               </a:rPr>
-              <a:t>Fc region impacts PD-1 therapy efficacy.</a:t>
+              <a:t>Evaluated cost-effectiveness of atezolizumab plus bevacizumab</a:t>
             </a:r>
             <a:endParaRPr lang="en-US" sz="1800" dirty="0"/>
           </a:p>
@@ -7010,7 +7052,7 @@
                 <a:ea typeface="Arial" pitchFamily="34" charset="-122"/>
                 <a:cs typeface="Arial" pitchFamily="34" charset="-120"/>
               </a:rPr>
-              <a:t>Selective depletion of virus-specific CD8 T cells.</a:t>
+              <a:t>Compared with lenvatinib and sorafenib in Malaysia</a:t>
             </a:r>
             <a:endParaRPr lang="en-US" sz="1800" dirty="0"/>
           </a:p>
@@ -7031,7 +7073,7 @@
                 <a:ea typeface="Arial" pitchFamily="34" charset="-122"/>
                 <a:cs typeface="Arial" pitchFamily="34" charset="-120"/>
               </a:rPr>
-              <a:t>Depletion mediated by activating FcγR III.</a:t>
+              <a:t>Atezolizumab plus bevacizumab yielded highest QALYs</a:t>
             </a:r>
             <a:endParaRPr lang="en-US" sz="1800" dirty="0"/>
           </a:p>
@@ -7052,7 +7094,7 @@
                 <a:ea typeface="Arial" pitchFamily="34" charset="-122"/>
                 <a:cs typeface="Arial" pitchFamily="34" charset="-120"/>
               </a:rPr>
-              <a:t>Phagocytic cells are key effectors.</a:t>
+              <a:t>Incremental cost-effectiveness ratio was RM 51,399 per QALY</a:t>
             </a:r>
             <a:endParaRPr lang="en-US" sz="1800" dirty="0"/>
           </a:p>
@@ -7073,7 +7115,7 @@
                 <a:ea typeface="Arial" pitchFamily="34" charset="-122"/>
                 <a:cs typeface="Arial" pitchFamily="34" charset="-120"/>
               </a:rPr>
-              <a:t>Implications for liver cancer therapies.</a:t>
+              <a:t>Findings support public health policy for funding expansion</a:t>
             </a:r>
             <a:endParaRPr lang="en-US" sz="1800" dirty="0"/>
           </a:p>
@@ -7109,7 +7151,7 @@
                   <a:srgbClr val="888888"/>
                 </a:solidFill>
               </a:rPr>
-              <a:t>Hashimoto Masao, Nasti Tahseen H, Jin Hyun-Tak et al.. Proceedings of the National Academy of Sciences of the United States of America. 2026-04-08 DOI: 10.1073/pnas.2427192123</a:t>
+              <a:t>Wong Yoke Fui, Mohamed Rosmawati, Sulaiman Shah Audi Adawiah et al.. Journal of medical economics. 2026-04-25 DOI: 10.1080/13696998.2026.2658448</a:t>
             </a:r>
             <a:endParaRPr lang="en-US" sz="800" dirty="0"/>
           </a:p>
@@ -7309,7 +7351,7 @@
                   </a:extLst>
                 </a:hlinkClick>
               </a:rPr>
-              <a:t>… plus transarterial chemoembolization and PD-1 inhibitors as conversion therapies for unresectable intermediate-advanced hepatocellular carcinoma: a phase 2 trial …</a:t>
+              <a:t>Prognostic nutritional index and the survival of patients with hepatocellular carcinoma on immune checkpoint inhibitors: a meta-analysis</a:t>
             </a:r>
             <a:endParaRPr lang="en-US" sz="2400" dirty="0"/>
           </a:p>
@@ -7345,7 +7387,7 @@
                   <a:srgbClr val="888888"/>
                 </a:solidFill>
               </a:rPr>
-              <a:t>… and Targeted Therapy  ·  RCT Phase 2</a:t>
+              <a:t>BMC cancer  ·  Meta-Analysis</a:t>
             </a:r>
             <a:endParaRPr lang="en-US" sz="1000" dirty="0"/>
           </a:p>
@@ -7388,7 +7430,7 @@
                 <a:ea typeface="Arial" pitchFamily="34" charset="-122"/>
                 <a:cs typeface="Arial" pitchFamily="34" charset="-120"/>
               </a:rPr>
-              <a:t>Combination therapy for unresectable HCC</a:t>
+              <a:t>Prognostic nutritional index impacts survival.</a:t>
             </a:r>
             <a:endParaRPr lang="en-US" sz="1800" dirty="0"/>
           </a:p>
@@ -7409,7 +7451,7 @@
                 <a:ea typeface="Arial" pitchFamily="34" charset="-122"/>
                 <a:cs typeface="Arial" pitchFamily="34" charset="-120"/>
               </a:rPr>
-              <a:t>Transarterial chemoembolization and PD-1 inhibitors</a:t>
+              <a:t>Meta-analysis of HCC patients on ICIs.</a:t>
             </a:r>
             <a:endParaRPr lang="en-US" sz="1800" dirty="0"/>
           </a:p>
@@ -7430,7 +7472,7 @@
                 <a:ea typeface="Arial" pitchFamily="34" charset="-122"/>
                 <a:cs typeface="Arial" pitchFamily="34" charset="-120"/>
               </a:rPr>
-              <a:t>Phase 2 trial shows promising results</a:t>
+              <a:t>Nutritional status correlates with immune response.</a:t>
             </a:r>
             <a:endParaRPr lang="en-US" sz="1800" dirty="0"/>
           </a:p>
@@ -7466,7 +7508,7 @@
                   <a:srgbClr val="888888"/>
                 </a:solidFill>
               </a:rPr>
-              <a:t>X Zhang, H Cai, W Peng. … and Targeted Therapy. 2026</a:t>
+              <a:t>J Fu, W Peng, J Jiang. BMC cancer. 2026</a:t>
             </a:r>
             <a:endParaRPr lang="en-US" sz="800" dirty="0"/>
           </a:p>

--- a/docs/digest-en.pptx
+++ b/docs/digest-en.pptx
@@ -2269,7 +2269,7 @@
                   <a:srgbClr val="888888"/>
                 </a:solidFill>
               </a:rPr>
-              <a:t>2026-04-20 — 2026-04-27</a:t>
+              <a:t>2026-04-27 — 2026-05-04</a:t>
             </a:r>
             <a:endParaRPr lang="en-US" sz="1400" dirty="0"/>
           </a:p>
@@ -2460,7 +2460,7 @@
                   </a:extLst>
                 </a:hlinkClick>
               </a:rPr>
-              <a:t>Radiotherapy versus local ablation therapy for the treatment of hepatocellular carcinoma: A systematic review and meta-analysis.</a:t>
+              <a:t>… plus transarterial chemoembolization and PD-1 inhibitors as conversion therapies for unresectable intermediate-advanced hepatocellular carcinoma: a phase 2 trial …</a:t>
             </a:r>
             <a:endParaRPr lang="en-US" sz="2400" dirty="0"/>
           </a:p>
@@ -2496,7 +2496,7 @@
                   <a:srgbClr val="888888"/>
                 </a:solidFill>
               </a:rPr>
-              <a:t>Journal of Clinical …  ·  Meta-Analysis</a:t>
+              <a:t>… and Targeted Therapy  ·  RCT Phase 2</a:t>
             </a:r>
             <a:endParaRPr lang="en-US" sz="1000" dirty="0"/>
           </a:p>
@@ -2539,7 +2539,7 @@
                 <a:ea typeface="Arial" pitchFamily="34" charset="-122"/>
                 <a:cs typeface="Arial" pitchFamily="34" charset="-120"/>
               </a:rPr>
-              <a:t>Comparison of radiotherapy and local ablation</a:t>
+              <a:t>Combination therapy for unresectable HCC</a:t>
             </a:r>
             <a:endParaRPr lang="en-US" sz="1800" dirty="0"/>
           </a:p>
@@ -2560,7 +2560,7 @@
                 <a:ea typeface="Arial" pitchFamily="34" charset="-122"/>
                 <a:cs typeface="Arial" pitchFamily="34" charset="-120"/>
               </a:rPr>
-              <a:t>Focus on hepatocellular carcinoma (HCC) treatment</a:t>
+              <a:t>Transarterial chemoembolization (TACE) used</a:t>
             </a:r>
             <a:endParaRPr lang="en-US" sz="1800" dirty="0"/>
           </a:p>
@@ -2581,7 +2581,7 @@
                 <a:ea typeface="Arial" pitchFamily="34" charset="-122"/>
                 <a:cs typeface="Arial" pitchFamily="34" charset="-120"/>
               </a:rPr>
-              <a:t>Evaluation of local progression-free survival</a:t>
+              <a:t>PD-1 inhibitors enhance treatment efficacy</a:t>
             </a:r>
             <a:endParaRPr lang="en-US" sz="1800" dirty="0"/>
           </a:p>
@@ -2602,7 +2602,7 @@
                 <a:ea typeface="Arial" pitchFamily="34" charset="-122"/>
                 <a:cs typeface="Arial" pitchFamily="34" charset="-120"/>
               </a:rPr>
-              <a:t>Inclusion of radiofrequency and microwave ablation</a:t>
+              <a:t>Phase 2 trial demonstrates promising results</a:t>
             </a:r>
             <a:endParaRPr lang="en-US" sz="1800" dirty="0"/>
           </a:p>
@@ -2623,7 +2623,7 @@
                 <a:ea typeface="Arial" pitchFamily="34" charset="-122"/>
                 <a:cs typeface="Arial" pitchFamily="34" charset="-120"/>
               </a:rPr>
-              <a:t>Systematic review and meta-analysis conducted</a:t>
+              <a:t>Potential for conversion to resectable disease</a:t>
             </a:r>
             <a:endParaRPr lang="en-US" sz="1800" dirty="0"/>
           </a:p>
@@ -2659,7 +2659,7 @@
                   <a:srgbClr val="888888"/>
                 </a:solidFill>
               </a:rPr>
-              <a:t>SH Bae, SH Choi, SM Yoon. Journal of Clinical …. 2026</a:t>
+              <a:t>X Zhang, H Cai, W Peng. … and Targeted Therapy. 2026</a:t>
             </a:r>
             <a:endParaRPr lang="en-US" sz="800" dirty="0"/>
           </a:p>
@@ -2859,7 +2859,7 @@
                   </a:extLst>
                 </a:hlinkClick>
               </a:rPr>
-              <a:t>… on interventional therapy and immune checkpoint inhibitors (ICIs) in patients with intermediate-and advanced-stage hepatocellular carcinoma: a systematic review …</a:t>
+              <a:t>Radiologic Response Assessment With RECIST 1.1 and mRECIST in Patients With Hepatocellular Carcinoma Treated With Atezolizumab Plus Bevacizumab.</a:t>
             </a:r>
             <a:endParaRPr lang="en-US" sz="2400" dirty="0"/>
           </a:p>
@@ -2895,7 +2895,7 @@
                   <a:srgbClr val="888888"/>
                 </a:solidFill>
               </a:rPr>
-              <a:t>… , Immunotherapy  ·  Systematic Review</a:t>
+              <a:t>Korean journal of radiology  ·  Retrospective Study  ·  🌏 Asia</a:t>
             </a:r>
             <a:endParaRPr lang="en-US" sz="1000" dirty="0"/>
           </a:p>
@@ -2938,7 +2938,7 @@
                 <a:ea typeface="Arial" pitchFamily="34" charset="-122"/>
                 <a:cs typeface="Arial" pitchFamily="34" charset="-120"/>
               </a:rPr>
-              <a:t>Combination therapy shows promise in HCC.</a:t>
+              <a:t>Study compares RECIST 1.1 and mRECIST.</a:t>
             </a:r>
             <a:endParaRPr lang="en-US" sz="1800" dirty="0"/>
           </a:p>
@@ -2959,7 +2959,7 @@
                 <a:ea typeface="Arial" pitchFamily="34" charset="-122"/>
                 <a:cs typeface="Arial" pitchFamily="34" charset="-120"/>
               </a:rPr>
-              <a:t>Interventional therapy enhances ICI efficacy.</a:t>
+              <a:t>207 HCC patients treated with Atezo/Bev.</a:t>
             </a:r>
             <a:endParaRPr lang="en-US" sz="1800" dirty="0"/>
           </a:p>
@@ -2980,7 +2980,49 @@
                 <a:ea typeface="Arial" pitchFamily="34" charset="-122"/>
                 <a:cs typeface="Arial" pitchFamily="34" charset="-120"/>
               </a:rPr>
-              <a:t>Need for more comprehensive clinical trials.</a:t>
+              <a:t>mRECIST identified more responders than RECIST 1.1.</a:t>
+            </a:r>
+            <a:endParaRPr lang="en-US" sz="1800" dirty="0"/>
+          </a:p>
+          <a:p>
+            <a:pPr marL="342900" indent="-342900">
+              <a:spcAft>
+                <a:spcPts val="800"/>
+              </a:spcAft>
+              <a:buSzPct val="100000"/>
+              <a:buChar char="•"/>
+            </a:pPr>
+            <a:r>
+              <a:rPr lang="en-US" sz="1800" dirty="0">
+                <a:solidFill>
+                  <a:srgbClr val="333333"/>
+                </a:solidFill>
+                <a:latin typeface="Arial" pitchFamily="34" charset="0"/>
+                <a:ea typeface="Arial" pitchFamily="34" charset="-122"/>
+                <a:cs typeface="Arial" pitchFamily="34" charset="-120"/>
+              </a:rPr>
+              <a:t>RECIST 1.1 shows excellent inter-reader agreement.</a:t>
+            </a:r>
+            <a:endParaRPr lang="en-US" sz="1800" dirty="0"/>
+          </a:p>
+          <a:p>
+            <a:pPr marL="342900" indent="-342900">
+              <a:spcAft>
+                <a:spcPts val="800"/>
+              </a:spcAft>
+              <a:buSzPct val="100000"/>
+              <a:buChar char="•"/>
+            </a:pPr>
+            <a:r>
+              <a:rPr lang="en-US" sz="1800" dirty="0">
+                <a:solidFill>
+                  <a:srgbClr val="333333"/>
+                </a:solidFill>
+                <a:latin typeface="Arial" pitchFamily="34" charset="0"/>
+                <a:ea typeface="Arial" pitchFamily="34" charset="-122"/>
+                <a:cs typeface="Arial" pitchFamily="34" charset="-120"/>
+              </a:rPr>
+              <a:t>Both methods predict overall survival independently.</a:t>
             </a:r>
             <a:endParaRPr lang="en-US" sz="1800" dirty="0"/>
           </a:p>
@@ -3016,7 +3058,7 @@
                   <a:srgbClr val="888888"/>
                 </a:solidFill>
               </a:rPr>
-              <a:t>J Su, Y Su, R Mai. … , Immunotherapy. 2026</a:t>
+              <a:t>Jeong Boryeong, Park Hyo Jung, Choi Won-Mook et al.. Korean journal of radiology. 2026-04-30 DOI: 10.3348/kjr.2025.1849</a:t>
             </a:r>
             <a:endParaRPr lang="en-US" sz="800" dirty="0"/>
           </a:p>
@@ -3216,7 +3258,7 @@
                   </a:extLst>
                 </a:hlinkClick>
               </a:rPr>
-              <a:t>Comparative efficacy and safety of immune checkpoint inhibitor–based strategies in advanced hepatocellular carcinoma: a systematic review and network meta …</a:t>
+              <a:t>Identification of Risk Factors for the Local Recurrence of Hepatocellular Carcinoma Post-radiofrequency Ablation.</a:t>
             </a:r>
             <a:endParaRPr lang="en-US" sz="2400" dirty="0"/>
           </a:p>
@@ -3252,7 +3294,7 @@
                   <a:srgbClr val="888888"/>
                 </a:solidFill>
               </a:rPr>
-              <a:t>… Journal of Surgery  ·  Systematic Review</a:t>
+              <a:t>Anticancer research  ·  Retrospective Study  ·  🌏 Asia</a:t>
             </a:r>
             <a:endParaRPr lang="en-US" sz="1000" dirty="0"/>
           </a:p>
@@ -3295,7 +3337,7 @@
                 <a:ea typeface="Arial" pitchFamily="34" charset="-122"/>
                 <a:cs typeface="Arial" pitchFamily="34" charset="-120"/>
               </a:rPr>
-              <a:t>Immune checkpoint inhibitors show promise.</a:t>
+              <a:t>Radiofrequency ablation is effective for HCC.</a:t>
             </a:r>
             <a:endParaRPr lang="en-US" sz="1800" dirty="0"/>
           </a:p>
@@ -3316,7 +3358,7 @@
                 <a:ea typeface="Arial" pitchFamily="34" charset="-122"/>
                 <a:cs typeface="Arial" pitchFamily="34" charset="-120"/>
               </a:rPr>
-              <a:t>Combination therapies improve treatment outcomes.</a:t>
+              <a:t>Local recurrence rates vary significantly post-RFA.</a:t>
             </a:r>
             <a:endParaRPr lang="en-US" sz="1800" dirty="0"/>
           </a:p>
@@ -3337,7 +3379,49 @@
                 <a:ea typeface="Arial" pitchFamily="34" charset="-122"/>
                 <a:cs typeface="Arial" pitchFamily="34" charset="-120"/>
               </a:rPr>
-              <a:t>Safety profiles vary among strategies.</a:t>
+              <a:t>Tumor size and location are key risk factors.</a:t>
+            </a:r>
+            <a:endParaRPr lang="en-US" sz="1800" dirty="0"/>
+          </a:p>
+          <a:p>
+            <a:pPr marL="342900" indent="-342900">
+              <a:spcAft>
+                <a:spcPts val="800"/>
+              </a:spcAft>
+              <a:buSzPct val="100000"/>
+              <a:buChar char="•"/>
+            </a:pPr>
+            <a:r>
+              <a:rPr lang="en-US" sz="1800" dirty="0">
+                <a:solidFill>
+                  <a:srgbClr val="333333"/>
+                </a:solidFill>
+                <a:latin typeface="Arial" pitchFamily="34" charset="0"/>
+                <a:ea typeface="Arial" pitchFamily="34" charset="-122"/>
+                <a:cs typeface="Arial" pitchFamily="34" charset="-120"/>
+              </a:rPr>
+              <a:t>TACE prior to RFA impacts recurrence in LR group.</a:t>
+            </a:r>
+            <a:endParaRPr lang="en-US" sz="1800" dirty="0"/>
+          </a:p>
+          <a:p>
+            <a:pPr marL="342900" indent="-342900">
+              <a:spcAft>
+                <a:spcPts val="800"/>
+              </a:spcAft>
+              <a:buSzPct val="100000"/>
+              <a:buChar char="•"/>
+            </a:pPr>
+            <a:r>
+              <a:rPr lang="en-US" sz="1800" dirty="0">
+                <a:solidFill>
+                  <a:srgbClr val="333333"/>
+                </a:solidFill>
+                <a:latin typeface="Arial" pitchFamily="34" charset="0"/>
+                <a:ea typeface="Arial" pitchFamily="34" charset="-122"/>
+                <a:cs typeface="Arial" pitchFamily="34" charset="-120"/>
+              </a:rPr>
+              <a:t>Alternative treatments may be needed for LR cases.</a:t>
             </a:r>
             <a:endParaRPr lang="en-US" sz="1800" dirty="0"/>
           </a:p>
@@ -3373,7 +3457,7 @@
                   <a:srgbClr val="888888"/>
                 </a:solidFill>
               </a:rPr>
-              <a:t>X Yu, X Zhang, O Jiang. … Journal of Surgery. 2026</a:t>
+              <a:t>Tanaka Kosuke, Kuwano Akifumi, Yada Masayoshi et al.. Anticancer research. 2026-04-28 DOI: 10.21873/anticanres.18141</a:t>
             </a:r>
             <a:endParaRPr lang="en-US" sz="800" dirty="0"/>
           </a:p>
@@ -3590,7 +3674,7 @@
                   <a:srgbClr val="FFFFFF"/>
                 </a:solidFill>
               </a:rPr>
-              <a:t>1. **免疫療法的長期生存潛力**  </a:t>
+              <a:t>1. **新療法的需求**  </a:t>
             </a:r>
             <a:endParaRPr lang="en-US" sz="1200" dirty="0"/>
           </a:p>
@@ -3607,7 +3691,7 @@
                   <a:srgbClr val="FFFFFF"/>
                 </a:solidFill>
               </a:rPr>
-              <a:t>   Immunotherapy has demonstrated the potential for long-term survival and even cure in advanced hepatocellular carcinoma (HCC), as evidenced by recent studies utilizing mixture cure models (MCMs).  </a:t>
+              <a:t>   The study highlights the urgent need for innovative therapies to improve survival rates in hepatocellular carcinoma (HCC) patients, as current treatment options remain limited.  </a:t>
             </a:r>
             <a:endParaRPr lang="en-US" sz="1200" dirty="0"/>
           </a:p>
@@ -3624,7 +3708,7 @@
                   <a:srgbClr val="FFFFFF"/>
                 </a:solidFill>
               </a:rPr>
-              <a:t>   免疫療法在晚期肝細胞癌（HCC）中顯示出長期生存甚至治癒的潛力，這一點在最近利用混合治癒模型（MCMs）的研究中得到了證實。</a:t>
+              <a:t>   研究強調了創新療法在肝細胞癌（HCC）患者中改善生存率的迫切需求，因為目前的治療選擇仍然有限。</a:t>
             </a:r>
             <a:endParaRPr lang="en-US" sz="1200" dirty="0"/>
           </a:p>
@@ -3650,7 +3734,7 @@
                   <a:srgbClr val="FFFFFF"/>
                 </a:solidFill>
               </a:rPr>
-              <a:t>2. **個性化治療策略的必要性**  </a:t>
+              <a:t>2. **預後生物標記的挑戰**  </a:t>
             </a:r>
             <a:endParaRPr lang="en-US" sz="1200" dirty="0"/>
           </a:p>
@@ -3667,7 +3751,7 @@
                   <a:srgbClr val="FFFFFF"/>
                 </a:solidFill>
               </a:rPr>
-              <a:t>   The era of immunotherapy necessitates personalized treatment strategies for HCC, as recurrence rates remain high despite curative intent in early-stage cases.  </a:t>
+              <a:t>   Identifying reliable prognostic biomarkers for HCC remains a significant challenge, which is crucial for tailoring treatment strategies and improving patient outcomes.  </a:t>
             </a:r>
             <a:endParaRPr lang="en-US" sz="1200" dirty="0"/>
           </a:p>
@@ -3684,7 +3768,7 @@
                   <a:srgbClr val="FFFFFF"/>
                 </a:solidFill>
               </a:rPr>
-              <a:t>   免疫療法的時代要求為HCC制定個性化的治療策略，因為儘管早期病例有治癒意圖，但復發率仍然很高。</a:t>
+              <a:t>   確定肝細胞癌的可靠預後生物標記仍然是一個重大挑戰，這對於量身定制治療策略和改善患者預後至關重要。</a:t>
             </a:r>
             <a:endParaRPr lang="en-US" sz="1200" dirty="0"/>
           </a:p>
@@ -3710,7 +3794,7 @@
                   <a:srgbClr val="FFFFFF"/>
                 </a:solidFill>
               </a:rPr>
-              <a:t>3. **局部療法與免疫檢查點抑制劑的結合**  </a:t>
+              <a:t>3. **代謝重編程的角色**  </a:t>
             </a:r>
             <a:endParaRPr lang="en-US" sz="1200" dirty="0"/>
           </a:p>
@@ -3727,7 +3811,7 @@
                   <a:srgbClr val="FFFFFF"/>
                 </a:solidFill>
               </a:rPr>
-              <a:t>   Combining local therapies, such as stereotactic body radiotherapy, with immune checkpoint inhibitors shows promising results in advanced HCC, enhancing treatment efficacy.  </a:t>
+              <a:t>   The role of metabolic reprogramming in HCC malignancy and immune evasion is increasingly recognized, suggesting potential targets for therapeutic intervention.  </a:t>
             </a:r>
             <a:endParaRPr lang="en-US" sz="1200" dirty="0"/>
           </a:p>
@@ -3744,7 +3828,7 @@
                   <a:srgbClr val="FFFFFF"/>
                 </a:solidFill>
               </a:rPr>
-              <a:t>   將局部療法（如立體定向體放療）與免疫檢查點抑制劑結合，顯示出在晚期HCC中的良好效果，增強了治療的有效性。</a:t>
+              <a:t>   代謝重編程在HCC惡性腫瘤和免疫逃逸中的角色越來越受到重視，這表明可能成為治療介入的潛在靶點。</a:t>
             </a:r>
             <a:endParaRPr lang="en-US" sz="1200" dirty="0"/>
           </a:p>
@@ -3770,7 +3854,7 @@
                   <a:srgbClr val="FFFFFF"/>
                 </a:solidFill>
               </a:rPr>
-              <a:t>4. **時間因素對免疫療法的影響**  </a:t>
+              <a:t>4. **免疫治療的整合**  </a:t>
             </a:r>
             <a:endParaRPr lang="en-US" sz="1200" dirty="0"/>
           </a:p>
@@ -3787,7 +3871,7 @@
                   <a:srgbClr val="FFFFFF"/>
                 </a:solidFill>
               </a:rPr>
-              <a:t>   The timing of immune checkpoint inhibitor administration may influence clinical outcomes, highlighting the importance of circadian rhythms in treatment efficacy.  </a:t>
+              <a:t>   The integration of immune checkpoint inhibitors with other therapies, such as anti-VEGF agents, shows promise in enhancing treatment efficacy for advanced HCC.  </a:t>
             </a:r>
             <a:endParaRPr lang="en-US" sz="1200" dirty="0"/>
           </a:p>
@@ -3804,7 +3888,7 @@
                   <a:srgbClr val="FFFFFF"/>
                 </a:solidFill>
               </a:rPr>
-              <a:t>   免疫檢查點抑制劑的給藥時間可能會影響臨床結果，強調了生物節律在治療效果中的重要性。</a:t>
+              <a:t>   免疫檢查點抑制劑與其他療法（如抗VEGF藥物）的整合顯示出增強晚期HCC治療效果的潛力。</a:t>
             </a:r>
             <a:endParaRPr lang="en-US" sz="1200" dirty="0"/>
           </a:p>
@@ -3830,7 +3914,7 @@
                   <a:srgbClr val="FFFFFF"/>
                 </a:solidFill>
               </a:rPr>
-              <a:t>5. **營養指標與預後關聯**  </a:t>
+              <a:t>5. **局部消融的風險因素**  </a:t>
             </a:r>
             <a:endParaRPr lang="en-US" sz="1200" dirty="0"/>
           </a:p>
@@ -3847,7 +3931,7 @@
                   <a:srgbClr val="FFFFFF"/>
                 </a:solidFill>
               </a:rPr>
-              <a:t>   The prognostic nutritional index has been associated with survival outcomes in HCC patients treated with immune checkpoint inhibitors, suggesting that nutritional status may play a role in treatment efficacy.</a:t>
+              <a:t>   Understanding the risk factors for local recurrence after radiofrequency ablation is essential for optimizing treatment protocols and improving long-term outcomes in HCC patients.</a:t>
             </a:r>
             <a:endParaRPr lang="en-US" sz="1200" dirty="0"/>
           </a:p>
@@ -3993,7 +4077,7 @@
                   <a:srgbClr val="FFFFFF"/>
                 </a:solidFill>
               </a:rPr>
-              <a:t>預後營養指數與接受免疫檢查點抑制劑治療的HCC患者的生存結果相關，這表明營養狀況可能在治療效果中扮演角色。</a:t>
+              <a:t>理解射頻消融後局部復發的風險因素對於優化治療方案和改善HCC患者的長期預後至關重要。</a:t>
             </a:r>
             <a:endParaRPr lang="en-US" sz="1200" dirty="0"/>
           </a:p>
@@ -4045,7 +4129,7 @@
                   <a:srgbClr val="FFFFFF"/>
                 </a:solidFill>
               </a:rPr>
-              <a:t>1. **混合治癒模型的應用**  </a:t>
+              <a:t>1. **生物標記的發現與驗證**  </a:t>
             </a:r>
             <a:endParaRPr lang="en-US" sz="1200" dirty="0"/>
           </a:p>
@@ -4062,7 +4146,7 @@
                   <a:srgbClr val="FFFFFF"/>
                 </a:solidFill>
               </a:rPr>
-              <a:t>   Further studies should apply mixture cure models in HCC to better estimate the fraction of long-term survivors and identify predictors of cure.  </a:t>
+              <a:t>   Future studies should focus on the discovery and validation of robust prognostic biomarkers to enhance personalized treatment approaches in HCC.  </a:t>
             </a:r>
             <a:endParaRPr lang="en-US" sz="1200" dirty="0"/>
           </a:p>
@@ -4079,7 +4163,7 @@
                   <a:srgbClr val="FFFFFF"/>
                 </a:solidFill>
               </a:rPr>
-              <a:t>   進一步的研究應在HCC中應用混合治癒模型，以更好地估計長期生存者的比例並識別治癒的預測因子。</a:t>
+              <a:t>   未來研究應專注於發現和驗證穩健的預後生物標記，以增強HCC的個性化治療方法。</a:t>
             </a:r>
             <a:endParaRPr lang="en-US" sz="1200" dirty="0"/>
           </a:p>
@@ -4105,7 +4189,7 @@
                   <a:srgbClr val="FFFFFF"/>
                 </a:solidFill>
               </a:rPr>
-              <a:t>2. **個性化治療的臨床試驗**  </a:t>
+              <a:t>2. **免疫治療組合的探索**  </a:t>
             </a:r>
             <a:endParaRPr lang="en-US" sz="1200" dirty="0"/>
           </a:p>
@@ -4122,7 +4206,7 @@
                   <a:srgbClr val="FFFFFF"/>
                 </a:solidFill>
               </a:rPr>
-              <a:t>   Large-scale clinical trials focusing on personalized treatment approaches in HCC patients receiving immunotherapy are needed to establish optimal strategies.  </a:t>
+              <a:t>   Investigating novel combinations of immune therapies with traditional treatments could provide synergistic effects and improve outcomes in HCC patients.  </a:t>
             </a:r>
             <a:endParaRPr lang="en-US" sz="1200" dirty="0"/>
           </a:p>
@@ -4139,7 +4223,7 @@
                   <a:srgbClr val="FFFFFF"/>
                 </a:solidFill>
               </a:rPr>
-              <a:t>   需要針對接受免疫療法的HCC患者進行大規模臨床試驗，專注於個性化治療方法，以確立最佳策略。</a:t>
+              <a:t>   探索免疫療法與傳統治療的新組合可能會提供協同效果並改善HCC患者的預後。</a:t>
             </a:r>
             <a:endParaRPr lang="en-US" sz="1200" dirty="0"/>
           </a:p>
@@ -4165,7 +4249,7 @@
                   <a:srgbClr val="FFFFFF"/>
                 </a:solidFill>
               </a:rPr>
-              <a:t>3. **時間因素的機制研究**  </a:t>
+              <a:t>3. **代謝重編程的機制研究**  </a:t>
             </a:r>
             <a:endParaRPr lang="en-US" sz="1200" dirty="0"/>
           </a:p>
@@ -4182,7 +4266,7 @@
                   <a:srgbClr val="FFFFFF"/>
                 </a:solidFill>
               </a:rPr>
-              <a:t>   Investigating the biological mechanisms behind the time-of-day effects on immune checkpoint inhibitor efficacy could lead to optimized treatment schedules.  </a:t>
+              <a:t>   Further research is needed to elucidate the mechanisms of metabolic reprogramming in HCC and its impact on tumor progression and immune response.  </a:t>
             </a:r>
             <a:endParaRPr lang="en-US" sz="1200" dirty="0"/>
           </a:p>
@@ -4199,7 +4283,7 @@
                   <a:srgbClr val="FFFFFF"/>
                 </a:solidFill>
               </a:rPr>
-              <a:t>   研究時間因素對免疫檢查點抑制劑療效的生物學機制，可能會導致最佳治療時間表的制定。</a:t>
+              <a:t>   需要進一步研究以闡明HCC中代謝重編程的機制及其對腫瘤進展和免疫反應的影響。</a:t>
             </a:r>
             <a:endParaRPr lang="en-US" sz="1200" dirty="0"/>
           </a:p>
@@ -4225,7 +4309,7 @@
                   <a:srgbClr val="FFFFFF"/>
                 </a:solidFill>
               </a:rPr>
-              <a:t>4. **營養干預的臨床應用**  </a:t>
+              <a:t>4. **局部治療的優化**  </a:t>
             </a:r>
             <a:endParaRPr lang="en-US" sz="1200" dirty="0"/>
           </a:p>
@@ -4242,7 +4326,7 @@
                   <a:srgbClr val="FFFFFF"/>
                 </a:solidFill>
               </a:rPr>
-              <a:t>   Exploring the role of nutritional interventions in conjunction with immunotherapy may enhance treatment outcomes for HCC patients.  </a:t>
+              <a:t>   Studies aimed at optimizing local ablation techniques and identifying patient-specific factors could reduce recurrence rates and enhance treatment efficacy.  </a:t>
             </a:r>
             <a:endParaRPr lang="en-US" sz="1200" dirty="0"/>
           </a:p>
@@ -4259,7 +4343,7 @@
                   <a:srgbClr val="FFFFFF"/>
                 </a:solidFill>
               </a:rPr>
-              <a:t>   探索營養干預與免疫療法結合的作用，可能會改善HCC患者的治療結果。</a:t>
+              <a:t>   旨在優化局部消融技術並識別患者特定因素的研究可以降低復發率並提高治療效果。</a:t>
             </a:r>
             <a:endParaRPr lang="en-US" sz="1200" dirty="0"/>
           </a:p>
@@ -4285,7 +4369,7 @@
                   <a:srgbClr val="FFFFFF"/>
                 </a:solidFill>
               </a:rPr>
-              <a:t>5. **局部療法的最佳化**  </a:t>
+              <a:t>5. **病毒性肝炎與免疫反應的關聯**  </a:t>
             </a:r>
             <a:endParaRPr lang="en-US" sz="1200" dirty="0"/>
           </a:p>
@@ -4302,7 +4386,7 @@
                   <a:srgbClr val="FFFFFF"/>
                 </a:solidFill>
               </a:rPr>
-              <a:t>   Future research should focus on optimizing the combination of local ablative therapies with immunotherapy to maximize patient benefits in HCC treatment.  </a:t>
+              <a:t>   Investigating the interplay between viral hepatitis and immune response in HCC could lead to better understanding and management of treatment outcomes.  </a:t>
             </a:r>
             <a:endParaRPr lang="en-US" sz="1200" dirty="0"/>
           </a:p>
@@ -4319,7 +4403,7 @@
                   <a:srgbClr val="FFFFFF"/>
                 </a:solidFill>
               </a:rPr>
-              <a:t>   未來的研究應專注於優化局部消融療法與免疫療法的結合，以最大化HCC治療中的患者受益。</a:t>
+              <a:t>   研究病毒性肝炎與HCC中免疫反應的相互作用可能有助於更好地理解和管理治療結果。</a:t>
             </a:r>
             <a:endParaRPr lang="en-US" sz="1200" dirty="0"/>
           </a:p>
@@ -4553,7 +4637,7 @@
                 <a:ea typeface="Arial" pitchFamily="34" charset="-122"/>
                 <a:cs typeface="Arial" pitchFamily="34" charset="-120"/>
               </a:rPr>
-              <a:t>Long-term survival and cure fraction in patients with advanced hepatocellular ca…</a:t>
+              <a:t>AdvanTIG-206: a phase II, randomized study of ociperlimab plus tislelizumab and …</a:t>
             </a:r>
             <a:endParaRPr lang="en-US" sz="1400" dirty="0"/>
           </a:p>
@@ -4590,7 +4674,7 @@
                 <a:ea typeface="Arial" pitchFamily="34" charset="-122"/>
                 <a:cs typeface="Arial" pitchFamily="34" charset="-120"/>
               </a:rPr>
-              <a:t>Optimal treatment selection for hepatocellular carcinoma in the era of immunothe…</a:t>
+              <a:t>Development and validation of a risk prediction model for patients with hepatoce…</a:t>
             </a:r>
             <a:endParaRPr lang="en-US" sz="1400" dirty="0"/>
           </a:p>
@@ -4627,7 +4711,7 @@
                 <a:ea typeface="Arial" pitchFamily="34" charset="-122"/>
                 <a:cs typeface="Arial" pitchFamily="34" charset="-120"/>
               </a:rPr>
-              <a:t>Pembrolizumab and stereotactic body radiotherapy combined in advanced hepatocell…</a:t>
+              <a:t>An etiology-stratified single-cell atlas identifies FABP4 as a prognostic marker…</a:t>
             </a:r>
             <a:endParaRPr lang="en-US" sz="1400" dirty="0"/>
           </a:p>
@@ -4664,7 +4748,7 @@
                 <a:ea typeface="Arial" pitchFamily="34" charset="-122"/>
                 <a:cs typeface="Arial" pitchFamily="34" charset="-120"/>
               </a:rPr>
-              <a:t>Multicentre prospective trial of abbreviated MRI using gadoxetic acid versus CT …</a:t>
+              <a:t>JOSD1 drives hepatocellular carcinoma malignancy by modulating the ubiquitinatio…</a:t>
             </a:r>
             <a:endParaRPr lang="en-US" sz="1400" dirty="0"/>
           </a:p>
@@ -4701,7 +4785,7 @@
                 <a:ea typeface="Arial" pitchFamily="34" charset="-122"/>
                 <a:cs typeface="Arial" pitchFamily="34" charset="-120"/>
               </a:rPr>
-              <a:t>Time-of-day of first checkpoint inhibitor dose influences clinical outcomes and …</a:t>
+              <a:t>Viral hepatitis and immunotherapy outcome in advanced hepatocellular carcinoma: …</a:t>
             </a:r>
             <a:endParaRPr lang="en-US" sz="1400" dirty="0"/>
           </a:p>
@@ -4738,7 +4822,7 @@
                 <a:ea typeface="Arial" pitchFamily="34" charset="-122"/>
                 <a:cs typeface="Arial" pitchFamily="34" charset="-120"/>
               </a:rPr>
-              <a:t>Cost-effectiveness analysis of atezolizumab and bevacizumab as first-line system…</a:t>
+              <a:t>Lenvatinib Versus Bevacizumab in Combination With Anti-PD-1/PD-L1 Therapy for uH…</a:t>
             </a:r>
             <a:endParaRPr lang="en-US" sz="1400" dirty="0"/>
           </a:p>
@@ -4775,7 +4859,7 @@
                 <a:ea typeface="Arial" pitchFamily="34" charset="-122"/>
                 <a:cs typeface="Arial" pitchFamily="34" charset="-120"/>
               </a:rPr>
-              <a:t>Prognostic nutritional index and the survival of patients with hepatocellular ca…</a:t>
+              <a:t>Low-Dose Bevacizumab Maintains Efficacy With Reduced Adverse Events in Liver Can…</a:t>
             </a:r>
             <a:endParaRPr lang="en-US" sz="1400" dirty="0"/>
           </a:p>
@@ -4812,7 +4896,7 @@
                 <a:ea typeface="Arial" pitchFamily="34" charset="-122"/>
                 <a:cs typeface="Arial" pitchFamily="34" charset="-120"/>
               </a:rPr>
-              <a:t>Radiotherapy versus local ablation therapy for the treatment of hepatocellular c…</a:t>
+              <a:t>… plus transarterial chemoembolization and PD-1 inhibitors as conversion therapi…</a:t>
             </a:r>
             <a:endParaRPr lang="en-US" sz="1400" dirty="0"/>
           </a:p>
@@ -4849,7 +4933,7 @@
                 <a:ea typeface="Arial" pitchFamily="34" charset="-122"/>
                 <a:cs typeface="Arial" pitchFamily="34" charset="-120"/>
               </a:rPr>
-              <a:t>… on interventional therapy and immune checkpoint inhibitors (ICIs) in patients …</a:t>
+              <a:t>Radiologic Response Assessment With RECIST 1.1 and mRECIST in Patients With Hepa…</a:t>
             </a:r>
             <a:endParaRPr lang="en-US" sz="1400" dirty="0"/>
           </a:p>
@@ -4886,7 +4970,7 @@
                 <a:ea typeface="Arial" pitchFamily="34" charset="-122"/>
                 <a:cs typeface="Arial" pitchFamily="34" charset="-120"/>
               </a:rPr>
-              <a:t>Comparative efficacy and safety of immune checkpoint inhibitor–based strategies …</a:t>
+              <a:t>Identification of Risk Factors for the Local Recurrence of Hepatocellular Carcin…</a:t>
             </a:r>
             <a:endParaRPr lang="en-US" sz="1400" dirty="0"/>
           </a:p>
@@ -5041,7 +5125,7 @@
                   </a:extLst>
                 </a:hlinkClick>
               </a:rPr>
-              <a:t>Long-term survival and cure fraction in patients with advanced hepatocellular carcinoma under immunotherapy in randomized controlled trials and real-world data.</a:t>
+              <a:t>AdvanTIG-206: a phase II, randomized study of ociperlimab plus tislelizumab and BAT1706 (bevacizumab biosimilar) versus tislelizumab and BAT1706 in first-line hepatocellular carcinoma.</a:t>
             </a:r>
             <a:endParaRPr lang="en-US" sz="2400" dirty="0"/>
           </a:p>
@@ -5077,7 +5161,7 @@
                   <a:srgbClr val="888888"/>
                 </a:solidFill>
               </a:rPr>
-              <a:t>Clinical cancer research : an official journal of the American Association for Cancer Research  ·  IF 11.5  ·  RCT Phase 3  ·  🌏 Asia</a:t>
+              <a:t>Cancer immunology, immunotherapy : CII  ·  RCT Phase 2  ·  🌏 Asia</a:t>
             </a:r>
             <a:endParaRPr lang="en-US" sz="1000" dirty="0"/>
           </a:p>
@@ -5120,7 +5204,7 @@
                 <a:ea typeface="Arial" pitchFamily="34" charset="-122"/>
                 <a:cs typeface="Arial" pitchFamily="34" charset="-120"/>
               </a:rPr>
-              <a:t>ICIs can induce long-term survival in HCC.</a:t>
+              <a:t>Phase II trial for advanced HCC patients</a:t>
             </a:r>
             <a:endParaRPr lang="en-US" sz="1800" dirty="0"/>
           </a:p>
@@ -5141,7 +5225,7 @@
                 <a:ea typeface="Arial" pitchFamily="34" charset="-122"/>
                 <a:cs typeface="Arial" pitchFamily="34" charset="-120"/>
               </a:rPr>
-              <a:t>MCMs estimate long-term survivors and cure fractions.</a:t>
+              <a:t>Ociperlimab plus tislelizumab and BAT1706 tested</a:t>
             </a:r>
             <a:endParaRPr lang="en-US" sz="1800" dirty="0"/>
           </a:p>
@@ -5162,7 +5246,7 @@
                 <a:ea typeface="Arial" pitchFamily="34" charset="-122"/>
                 <a:cs typeface="Arial" pitchFamily="34" charset="-120"/>
               </a:rPr>
-              <a:t>Long-term survival rates range from 10-15%.</a:t>
+              <a:t>Confirmed ORR: 37.1% (Arm A), 40.6% (Arm B)</a:t>
             </a:r>
             <a:endParaRPr lang="en-US" sz="1800" dirty="0"/>
           </a:p>
@@ -5183,7 +5267,7 @@
                 <a:ea typeface="Arial" pitchFamily="34" charset="-122"/>
                 <a:cs typeface="Arial" pitchFamily="34" charset="-120"/>
               </a:rPr>
-              <a:t>Cure fractions observed between 7-9%.</a:t>
+              <a:t>High rate of treatment-related adverse events</a:t>
             </a:r>
             <a:endParaRPr lang="en-US" sz="1800" dirty="0"/>
           </a:p>
@@ -5204,7 +5288,7 @@
                 <a:ea typeface="Arial" pitchFamily="34" charset="-122"/>
                 <a:cs typeface="Arial" pitchFamily="34" charset="-120"/>
               </a:rPr>
-              <a:t>ALBI score and hepatitis C predict outcomes.</a:t>
+              <a:t>No new safety signals identified</a:t>
             </a:r>
             <a:endParaRPr lang="en-US" sz="1800" dirty="0"/>
           </a:p>
@@ -5240,7 +5324,7 @@
                   <a:srgbClr val="888888"/>
                 </a:solidFill>
               </a:rPr>
-              <a:t>Campani Claudia, Shim Ju Hyun, Bouattour Mohamed et al.. Clinical cancer research : an official journal of the American Association for Cancer Research. 2026-04-20 DOI: 10.1158/1078-0432.CCR-25-4943</a:t>
+              <a:t>Ren Zhenggang, Huang Yao, Guo Yabing et al.. Cancer immunology, immunotherapy : CII. 2026-04-28 DOI: 10.1007/s00262-026-04399-8</a:t>
             </a:r>
             <a:endParaRPr lang="en-US" sz="800" dirty="0"/>
           </a:p>
@@ -5440,7 +5524,7 @@
                   </a:extLst>
                 </a:hlinkClick>
               </a:rPr>
-              <a:t>Optimal treatment selection for hepatocellular carcinoma in the era of immunotherapy.</a:t>
+              <a:t>Development and validation of a risk prediction model for patients with hepatocellular carcinoma receiving atezolizumab-bevacizumab.</a:t>
             </a:r>
             <a:endParaRPr lang="en-US" sz="2400" dirty="0"/>
           </a:p>
@@ -5476,7 +5560,7 @@
                   <a:srgbClr val="888888"/>
                 </a:solidFill>
               </a:rPr>
-              <a:t>Journal of gastroenterology  ·  RCT Phase 3  ·  🌏 Asia</a:t>
+              <a:t>Hepatology (Baltimore, Md.)  ·  IF 12.9  ·  🌏 Asia</a:t>
             </a:r>
             <a:endParaRPr lang="en-US" sz="1000" dirty="0"/>
           </a:p>
@@ -5519,7 +5603,7 @@
                 <a:ea typeface="Arial" pitchFamily="34" charset="-122"/>
                 <a:cs typeface="Arial" pitchFamily="34" charset="-120"/>
               </a:rPr>
-              <a:t>Immunotherapy reshapes HCC management strategies.</a:t>
+              <a:t>Atezolizumab-bevacizumab is standard treatment.</a:t>
             </a:r>
             <a:endParaRPr lang="en-US" sz="1800" dirty="0"/>
           </a:p>
@@ -5540,7 +5624,7 @@
                 <a:ea typeface="Arial" pitchFamily="34" charset="-122"/>
                 <a:cs typeface="Arial" pitchFamily="34" charset="-120"/>
               </a:rPr>
-              <a:t>High recurrence rates in early-stage HCC persist.</a:t>
+              <a:t>Developed CRAPT-M risk prediction model.</a:t>
             </a:r>
             <a:endParaRPr lang="en-US" sz="1800" dirty="0"/>
           </a:p>
@@ -5561,7 +5645,7 @@
                 <a:ea typeface="Arial" pitchFamily="34" charset="-122"/>
                 <a:cs typeface="Arial" pitchFamily="34" charset="-120"/>
               </a:rPr>
-              <a:t>AI models predict post-resection recurrence effectively.</a:t>
+              <a:t>Identified five independent prognostic factors.</a:t>
             </a:r>
             <a:endParaRPr lang="en-US" sz="1800" dirty="0"/>
           </a:p>
@@ -5582,7 +5666,7 @@
                 <a:ea typeface="Arial" pitchFamily="34" charset="-122"/>
                 <a:cs typeface="Arial" pitchFamily="34" charset="-120"/>
               </a:rPr>
-              <a:t>TACE combined with TKIs improves treatment outcomes.</a:t>
+              <a:t>Median OS varies by risk group.</a:t>
             </a:r>
             <a:endParaRPr lang="en-US" sz="1800" dirty="0"/>
           </a:p>
@@ -5603,7 +5687,7 @@
                 <a:ea typeface="Arial" pitchFamily="34" charset="-122"/>
                 <a:cs typeface="Arial" pitchFamily="34" charset="-120"/>
               </a:rPr>
-              <a:t>Emerging biomarkers enhance immunotherapy selection.</a:t>
+              <a:t>CRAPT-M shows higher accuracy than CRAFITY.</a:t>
             </a:r>
             <a:endParaRPr lang="en-US" sz="1800" dirty="0"/>
           </a:p>
@@ -5639,7 +5723,7 @@
                   <a:srgbClr val="888888"/>
                 </a:solidFill>
               </a:rPr>
-              <a:t>Chi Chen-Ta, Huang Yi-Hsiang. Journal of gastroenterology. 2026-04-20 DOI: 10.1007/s00535-026-02411-7</a:t>
+              <a:t>Nam Heechul, Kim Dong Yun, Kim Do Young et al.. Hepatology (Baltimore, Md.). 2026-04-17 DOI: 10.1097/HEP.0000000000001444</a:t>
             </a:r>
             <a:endParaRPr lang="en-US" sz="800" dirty="0"/>
           </a:p>
@@ -5839,7 +5923,7 @@
                   </a:extLst>
                 </a:hlinkClick>
               </a:rPr>
-              <a:t>Pembrolizumab and stereotactic body radiotherapy combined in advanced hepatocellular carcinoma post sorafenib–A phase II trial (PEMRAD)</a:t>
+              <a:t>An etiology-stratified single-cell atlas identifies FABP4 as a prognostic marker for MASLD-related HCC.</a:t>
             </a:r>
             <a:endParaRPr lang="en-US" sz="2400" dirty="0"/>
           </a:p>
@@ -5875,7 +5959,7 @@
                   <a:srgbClr val="888888"/>
                 </a:solidFill>
               </a:rPr>
-              <a:t>JHEP Reports  ·  IF 7.8  ·  RCT Phase 2</a:t>
+              <a:t>Journal of hepatology  ·  IF 25.7  ·  Basic Research</a:t>
             </a:r>
             <a:endParaRPr lang="en-US" sz="1000" dirty="0"/>
           </a:p>
@@ -5918,7 +6002,7 @@
                 <a:ea typeface="Arial" pitchFamily="34" charset="-122"/>
                 <a:cs typeface="Arial" pitchFamily="34" charset="-120"/>
               </a:rPr>
-              <a:t>Combination of pembrolizumab and SBRT</a:t>
+              <a:t>Study compares tumor microenvironments in HCC</a:t>
             </a:r>
             <a:endParaRPr lang="en-US" sz="1800" dirty="0"/>
           </a:p>
@@ -5939,7 +6023,7 @@
                 <a:ea typeface="Arial" pitchFamily="34" charset="-122"/>
                 <a:cs typeface="Arial" pitchFamily="34" charset="-120"/>
               </a:rPr>
-              <a:t>Phase II trial for advanced HCC</a:t>
+              <a:t>FABP4 identified as prognostic biomarker</a:t>
             </a:r>
             <a:endParaRPr lang="en-US" sz="1800" dirty="0"/>
           </a:p>
@@ -5960,7 +6044,49 @@
                 <a:ea typeface="Arial" pitchFamily="34" charset="-122"/>
                 <a:cs typeface="Arial" pitchFamily="34" charset="-120"/>
               </a:rPr>
-              <a:t>Post-sorafenib treatment evaluation</a:t>
+              <a:t>HBV+MASLD+ HCC shows best immunotherapy outcomes</a:t>
+            </a:r>
+            <a:endParaRPr lang="en-US" sz="1800" dirty="0"/>
+          </a:p>
+          <a:p>
+            <a:pPr marL="342900" indent="-342900">
+              <a:spcAft>
+                <a:spcPts val="800"/>
+              </a:spcAft>
+              <a:buSzPct val="100000"/>
+              <a:buChar char="•"/>
+            </a:pPr>
+            <a:r>
+              <a:rPr lang="en-US" sz="1800" dirty="0">
+                <a:solidFill>
+                  <a:srgbClr val="333333"/>
+                </a:solidFill>
+                <a:latin typeface="Arial" pitchFamily="34" charset="0"/>
+                <a:ea typeface="Arial" pitchFamily="34" charset="-122"/>
+                <a:cs typeface="Arial" pitchFamily="34" charset="-120"/>
+              </a:rPr>
+              <a:t>Increased CD8+ T cells in MASLD+ HCC</a:t>
+            </a:r>
+            <a:endParaRPr lang="en-US" sz="1800" dirty="0"/>
+          </a:p>
+          <a:p>
+            <a:pPr marL="342900" indent="-342900">
+              <a:spcAft>
+                <a:spcPts val="800"/>
+              </a:spcAft>
+              <a:buSzPct val="100000"/>
+              <a:buChar char="•"/>
+            </a:pPr>
+            <a:r>
+              <a:rPr lang="en-US" sz="1800" dirty="0">
+                <a:solidFill>
+                  <a:srgbClr val="333333"/>
+                </a:solidFill>
+                <a:latin typeface="Arial" pitchFamily="34" charset="0"/>
+                <a:ea typeface="Arial" pitchFamily="34" charset="-122"/>
+                <a:cs typeface="Arial" pitchFamily="34" charset="-120"/>
+              </a:rPr>
+              <a:t>FABP4 enhances vascular normalization and T-cell infiltration</a:t>
             </a:r>
             <a:endParaRPr lang="en-US" sz="1800" dirty="0"/>
           </a:p>
@@ -5996,7 +6122,7 @@
                   <a:srgbClr val="888888"/>
                 </a:solidFill>
               </a:rPr>
-              <a:t>GM O'Kane, A Mesci, RW Jang. JHEP Reports. 2026</a:t>
+              <a:t>Zhang Shuyuan, Xu Huanhuan, Li Mingwei et al.. Journal of hepatology. 2026-04-17 DOI: 10.1016/j.jhep.2025.10.026</a:t>
             </a:r>
             <a:endParaRPr lang="en-US" sz="800" dirty="0"/>
           </a:p>
@@ -6196,7 +6322,7 @@
                   </a:extLst>
                 </a:hlinkClick>
               </a:rPr>
-              <a:t>Multicentre prospective trial of abbreviated MRI using gadoxetic acid versus CT for detection of late recurrent HCC (AMRICT): study protocol.</a:t>
+              <a:t>JOSD1 drives hepatocellular carcinoma malignancy by modulating the ubiquitination-lactylation switch on PGAM1.</a:t>
             </a:r>
             <a:endParaRPr lang="en-US" sz="2400" dirty="0"/>
           </a:p>
@@ -6232,7 +6358,7 @@
                   <a:srgbClr val="888888"/>
                 </a:solidFill>
               </a:rPr>
-              <a:t>BMJ open  ·  Prospective Study  ·  🌏 Asia</a:t>
+              <a:t>Gut  ·  IF 24.5  ·  Basic Research</a:t>
             </a:r>
             <a:endParaRPr lang="en-US" sz="1000" dirty="0"/>
           </a:p>
@@ -6275,7 +6401,7 @@
                 <a:ea typeface="Arial" pitchFamily="34" charset="-122"/>
                 <a:cs typeface="Arial" pitchFamily="34" charset="-120"/>
               </a:rPr>
-              <a:t>Late recurrence of HCC is common post-treatment.</a:t>
+              <a:t>JOSD1 enhances glycolysis in HCC.</a:t>
             </a:r>
             <a:endParaRPr lang="en-US" sz="1800" dirty="0"/>
           </a:p>
@@ -6296,7 +6422,7 @@
                 <a:ea typeface="Arial" pitchFamily="34" charset="-122"/>
                 <a:cs typeface="Arial" pitchFamily="34" charset="-120"/>
               </a:rPr>
-              <a:t>Trial compares HBP-AMRI and multiphasic CECT.</a:t>
+              <a:t>Over-expression leads to poor prognosis.</a:t>
             </a:r>
             <a:endParaRPr lang="en-US" sz="1800" dirty="0"/>
           </a:p>
@@ -6317,7 +6443,7 @@
                 <a:ea typeface="Arial" pitchFamily="34" charset="-122"/>
                 <a:cs typeface="Arial" pitchFamily="34" charset="-120"/>
               </a:rPr>
-              <a:t>455 participants will be enrolled for imaging.</a:t>
+              <a:t>Regulates ubiquitination-lactylation on PGAM1.</a:t>
             </a:r>
             <a:endParaRPr lang="en-US" sz="1800" dirty="0"/>
           </a:p>
@@ -6338,7 +6464,7 @@
                 <a:ea typeface="Arial" pitchFamily="34" charset="-122"/>
                 <a:cs typeface="Arial" pitchFamily="34" charset="-120"/>
               </a:rPr>
-              <a:t>Primary endpoint: detection rate of HCC.</a:t>
+              <a:t>Impaired CD8+ T cell function observed.</a:t>
             </a:r>
             <a:endParaRPr lang="en-US" sz="1800" dirty="0"/>
           </a:p>
@@ -6359,7 +6485,7 @@
                 <a:ea typeface="Arial" pitchFamily="34" charset="-122"/>
                 <a:cs typeface="Arial" pitchFamily="34" charset="-120"/>
               </a:rPr>
-              <a:t>Study approved by multiple institutional boards.</a:t>
+              <a:t>Inhibition of JOSD1 synergizes with anti-PD-1.</a:t>
             </a:r>
             <a:endParaRPr lang="en-US" sz="1800" dirty="0"/>
           </a:p>
@@ -6395,7 +6521,7 @@
                   <a:srgbClr val="888888"/>
                 </a:solidFill>
               </a:rPr>
-              <a:t>Park Hyo Jung, Lee Dong Ho, Chang Won et al.. BMJ open. 2026-04-24 DOI: 10.1136/bmjopen-2026-116809</a:t>
+              <a:t>Li Qing, Yu Kai, Zhou Suiqing et al.. Gut. 2026-04-28 DOI: 10.1136/gutjnl-2025-337331</a:t>
             </a:r>
             <a:endParaRPr lang="en-US" sz="800" dirty="0"/>
           </a:p>
@@ -6595,7 +6721,7 @@
                   </a:extLst>
                 </a:hlinkClick>
               </a:rPr>
-              <a:t>Time-of-day of first checkpoint inhibitor dose influences clinical outcomes and immune responses in hepatocellular carcinoma.</a:t>
+              <a:t>Viral hepatitis and immunotherapy outcome in advanced hepatocellular carcinoma: A comprehensive umbrella review of 15 meta-analyses.</a:t>
             </a:r>
             <a:endParaRPr lang="en-US" sz="2400" dirty="0"/>
           </a:p>
@@ -6631,7 +6757,7 @@
                   <a:srgbClr val="888888"/>
                 </a:solidFill>
               </a:rPr>
-              <a:t>Journal for immunotherapy of cancer  ·  IF 10.9  ·  Retrospective Study</a:t>
+              <a:t>Critical reviews in oncology/hematology  ·  RCT Phase 3</a:t>
             </a:r>
             <a:endParaRPr lang="en-US" sz="1000" dirty="0"/>
           </a:p>
@@ -6674,7 +6800,7 @@
                 <a:ea typeface="Arial" pitchFamily="34" charset="-122"/>
                 <a:cs typeface="Arial" pitchFamily="34" charset="-120"/>
               </a:rPr>
-              <a:t>Timing of ICI affects treatment outcomes.</a:t>
+              <a:t>Immune checkpoint inhibitors improve survival in HCC.</a:t>
             </a:r>
             <a:endParaRPr lang="en-US" sz="1800" dirty="0"/>
           </a:p>
@@ -6695,7 +6821,7 @@
                 <a:ea typeface="Arial" pitchFamily="34" charset="-122"/>
                 <a:cs typeface="Arial" pitchFamily="34" charset="-120"/>
               </a:rPr>
-              <a:t>Morning doses improve progression-free survival.</a:t>
+              <a:t>HBV patients show greater benefit than nonviral.</a:t>
             </a:r>
             <a:endParaRPr lang="en-US" sz="1800" dirty="0"/>
           </a:p>
@@ -6716,7 +6842,49 @@
                 <a:ea typeface="Arial" pitchFamily="34" charset="-122"/>
                 <a:cs typeface="Arial" pitchFamily="34" charset="-120"/>
               </a:rPr>
-              <a:t>Distinct immune responses observed in morning group.</a:t>
+              <a:t>High overlap in meta-analyses findings.</a:t>
+            </a:r>
+            <a:endParaRPr lang="en-US" sz="1800" dirty="0"/>
+          </a:p>
+          <a:p>
+            <a:pPr marL="342900" indent="-342900">
+              <a:spcAft>
+                <a:spcPts val="800"/>
+              </a:spcAft>
+              <a:buSzPct val="100000"/>
+              <a:buChar char="•"/>
+            </a:pPr>
+            <a:r>
+              <a:rPr lang="en-US" sz="1800" dirty="0">
+                <a:solidFill>
+                  <a:srgbClr val="333333"/>
+                </a:solidFill>
+                <a:latin typeface="Arial" pitchFamily="34" charset="0"/>
+                <a:ea typeface="Arial" pitchFamily="34" charset="-122"/>
+                <a:cs typeface="Arial" pitchFamily="34" charset="-120"/>
+              </a:rPr>
+              <a:t>Real-world data on atezolizumab inconsistent.</a:t>
+            </a:r>
+            <a:endParaRPr lang="en-US" sz="1800" dirty="0"/>
+          </a:p>
+          <a:p>
+            <a:pPr marL="342900" indent="-342900">
+              <a:spcAft>
+                <a:spcPts val="800"/>
+              </a:spcAft>
+              <a:buSzPct val="100000"/>
+              <a:buChar char="•"/>
+            </a:pPr>
+            <a:r>
+              <a:rPr lang="en-US" sz="1800" dirty="0">
+                <a:solidFill>
+                  <a:srgbClr val="333333"/>
+                </a:solidFill>
+                <a:latin typeface="Arial" pitchFamily="34" charset="0"/>
+                <a:ea typeface="Arial" pitchFamily="34" charset="-122"/>
+                <a:cs typeface="Arial" pitchFamily="34" charset="-120"/>
+              </a:rPr>
+              <a:t>Need for cautious interpretation of subgroup results.</a:t>
             </a:r>
             <a:endParaRPr lang="en-US" sz="1800" dirty="0"/>
           </a:p>
@@ -6752,7 +6920,7 @@
                   <a:srgbClr val="888888"/>
                 </a:solidFill>
               </a:rPr>
-              <a:t>Li Howard L, Charmsaz Soren, Reisman Benjamin J et al.. Journal for immunotherapy of cancer. 2026-04-21 DOI: 10.1136/jitc-2025-014070</a:t>
+              <a:t>Petrelli Fausto, Colombo Silvia, Dottorini Lorenzo et al.. Critical reviews in oncology/hematology. 2026-04-12 DOI: 10.1016/j.critrevonc.2026.105248</a:t>
             </a:r>
             <a:endParaRPr lang="en-US" sz="800" dirty="0"/>
           </a:p>
@@ -6952,7 +7120,7 @@
                   </a:extLst>
                 </a:hlinkClick>
               </a:rPr>
-              <a:t>Cost-effectiveness analysis of atezolizumab and bevacizumab as first-line systemic therapy in unresectable hepatocellular carcinoma in Malaysia.</a:t>
+              <a:t>Lenvatinib Versus Bevacizumab in Combination With Anti-PD-1/PD-L1 Therapy for uHCC: A Meta-Analysis of East Asian Studies.</a:t>
             </a:r>
             <a:endParaRPr lang="en-US" sz="2400" dirty="0"/>
           </a:p>
@@ -6988,7 +7156,7 @@
                   <a:srgbClr val="888888"/>
                 </a:solidFill>
               </a:rPr>
-              <a:t>Journal of medical economics  ·  Meta-Analysis</a:t>
+              <a:t>Liver international : official journal of the International Association for the Study of the Liver  ·  IF 6.0  ·  RCT</a:t>
             </a:r>
             <a:endParaRPr lang="en-US" sz="1000" dirty="0"/>
           </a:p>
@@ -7031,7 +7199,7 @@
                 <a:ea typeface="Arial" pitchFamily="34" charset="-122"/>
                 <a:cs typeface="Arial" pitchFamily="34" charset="-120"/>
               </a:rPr>
-              <a:t>Evaluated cost-effectiveness of atezolizumab plus bevacizumab</a:t>
+              <a:t>Lenvatinib shows superior overall survival.</a:t>
             </a:r>
             <a:endParaRPr lang="en-US" sz="1800" dirty="0"/>
           </a:p>
@@ -7052,7 +7220,7 @@
                 <a:ea typeface="Arial" pitchFamily="34" charset="-122"/>
                 <a:cs typeface="Arial" pitchFamily="34" charset="-120"/>
               </a:rPr>
-              <a:t>Compared with lenvatinib and sorafenib in Malaysia</a:t>
+              <a:t>Lenvatinib improves progression-free survival.</a:t>
             </a:r>
             <a:endParaRPr lang="en-US" sz="1800" dirty="0"/>
           </a:p>
@@ -7073,7 +7241,7 @@
                 <a:ea typeface="Arial" pitchFamily="34" charset="-122"/>
                 <a:cs typeface="Arial" pitchFamily="34" charset="-120"/>
               </a:rPr>
-              <a:t>Atezolizumab plus bevacizumab yielded highest QALYs</a:t>
+              <a:t>No significant difference in response rates.</a:t>
             </a:r>
             <a:endParaRPr lang="en-US" sz="1800" dirty="0"/>
           </a:p>
@@ -7094,7 +7262,7 @@
                 <a:ea typeface="Arial" pitchFamily="34" charset="-122"/>
                 <a:cs typeface="Arial" pitchFamily="34" charset="-120"/>
               </a:rPr>
-              <a:t>Incremental cost-effectiveness ratio was RM 51,399 per QALY</a:t>
+              <a:t>Lenvatinib has higher hand-foot reactions.</a:t>
             </a:r>
             <a:endParaRPr lang="en-US" sz="1800" dirty="0"/>
           </a:p>
@@ -7115,7 +7283,7 @@
                 <a:ea typeface="Arial" pitchFamily="34" charset="-122"/>
                 <a:cs typeface="Arial" pitchFamily="34" charset="-120"/>
               </a:rPr>
-              <a:t>Findings support public health policy for funding expansion</a:t>
+              <a:t>Bevacizumab has higher gastrointestinal risks.</a:t>
             </a:r>
             <a:endParaRPr lang="en-US" sz="1800" dirty="0"/>
           </a:p>
@@ -7151,7 +7319,7 @@
                   <a:srgbClr val="888888"/>
                 </a:solidFill>
               </a:rPr>
-              <a:t>Wong Yoke Fui, Mohamed Rosmawati, Sulaiman Shah Audi Adawiah et al.. Journal of medical economics. 2026-04-25 DOI: 10.1080/13696998.2026.2658448</a:t>
+              <a:t>Wang Xiaoxia, Wang Shuo, Lu Jun et al.. Liver international : official journal of the International Association for the Study of the Liver. 2026-04-20 DOI: 10.1111/liv.70647</a:t>
             </a:r>
             <a:endParaRPr lang="en-US" sz="800" dirty="0"/>
           </a:p>
@@ -7351,7 +7519,7 @@
                   </a:extLst>
                 </a:hlinkClick>
               </a:rPr>
-              <a:t>Prognostic nutritional index and the survival of patients with hepatocellular carcinoma on immune checkpoint inhibitors: a meta-analysis</a:t>
+              <a:t>Low-Dose Bevacizumab Maintains Efficacy With Reduced Adverse Events in Liver Cancer.</a:t>
             </a:r>
             <a:endParaRPr lang="en-US" sz="2400" dirty="0"/>
           </a:p>
@@ -7387,7 +7555,7 @@
                   <a:srgbClr val="888888"/>
                 </a:solidFill>
               </a:rPr>
-              <a:t>BMC cancer  ·  Meta-Analysis</a:t>
+              <a:t>Liver international : official journal of the International Association for the Study of the Liver  ·  IF 6.0  ·  Retrospective Study  ·  🌏 Asia</a:t>
             </a:r>
             <a:endParaRPr lang="en-US" sz="1000" dirty="0"/>
           </a:p>
@@ -7430,7 +7598,7 @@
                 <a:ea typeface="Arial" pitchFamily="34" charset="-122"/>
                 <a:cs typeface="Arial" pitchFamily="34" charset="-120"/>
               </a:rPr>
-              <a:t>Prognostic nutritional index impacts survival.</a:t>
+              <a:t>Low-dose bevacizumab effective in liver cancer</a:t>
             </a:r>
             <a:endParaRPr lang="en-US" sz="1800" dirty="0"/>
           </a:p>
@@ -7451,7 +7619,7 @@
                 <a:ea typeface="Arial" pitchFamily="34" charset="-122"/>
                 <a:cs typeface="Arial" pitchFamily="34" charset="-120"/>
               </a:rPr>
-              <a:t>Meta-analysis of HCC patients on ICIs.</a:t>
+              <a:t>Reduced adverse events compared to standard dose</a:t>
             </a:r>
             <a:endParaRPr lang="en-US" sz="1800" dirty="0"/>
           </a:p>
@@ -7472,7 +7640,49 @@
                 <a:ea typeface="Arial" pitchFamily="34" charset="-122"/>
                 <a:cs typeface="Arial" pitchFamily="34" charset="-120"/>
               </a:rPr>
-              <a:t>Nutritional status correlates with immune response.</a:t>
+              <a:t>Similar progression-free and overall survival rates</a:t>
+            </a:r>
+            <a:endParaRPr lang="en-US" sz="1800" dirty="0"/>
+          </a:p>
+          <a:p>
+            <a:pPr marL="342900" indent="-342900">
+              <a:spcAft>
+                <a:spcPts val="800"/>
+              </a:spcAft>
+              <a:buSzPct val="100000"/>
+              <a:buChar char="•"/>
+            </a:pPr>
+            <a:r>
+              <a:rPr lang="en-US" sz="1800" dirty="0">
+                <a:solidFill>
+                  <a:srgbClr val="333333"/>
+                </a:solidFill>
+                <a:latin typeface="Arial" pitchFamily="34" charset="0"/>
+                <a:ea typeface="Arial" pitchFamily="34" charset="-122"/>
+                <a:cs typeface="Arial" pitchFamily="34" charset="-120"/>
+              </a:rPr>
+              <a:t>Lower incidence of low-grade toxicities observed</a:t>
+            </a:r>
+            <a:endParaRPr lang="en-US" sz="1800" dirty="0"/>
+          </a:p>
+          <a:p>
+            <a:pPr marL="342900" indent="-342900">
+              <a:spcAft>
+                <a:spcPts val="800"/>
+              </a:spcAft>
+              <a:buSzPct val="100000"/>
+              <a:buChar char="•"/>
+            </a:pPr>
+            <a:r>
+              <a:rPr lang="en-US" sz="1800" dirty="0">
+                <a:solidFill>
+                  <a:srgbClr val="333333"/>
+                </a:solidFill>
+                <a:latin typeface="Arial" pitchFamily="34" charset="0"/>
+                <a:ea typeface="Arial" pitchFamily="34" charset="-122"/>
+                <a:cs typeface="Arial" pitchFamily="34" charset="-120"/>
+              </a:rPr>
+              <a:t>Potential for improved treatment tolerability</a:t>
             </a:r>
             <a:endParaRPr lang="en-US" sz="1800" dirty="0"/>
           </a:p>
@@ -7508,7 +7718,7 @@
                   <a:srgbClr val="888888"/>
                 </a:solidFill>
               </a:rPr>
-              <a:t>J Fu, W Peng, J Jiang. BMC cancer. 2026</a:t>
+              <a:t>Lin Po-Ting, Teng Wei, Hsieh Yi-Chung et al.. Liver international : official journal of the International Association for the Study of the Liver. 2026-03-28 DOI: 10.1111/liv.70617</a:t>
             </a:r>
             <a:endParaRPr lang="en-US" sz="800" dirty="0"/>
           </a:p>

--- a/docs/digest-en.pptx
+++ b/docs/digest-en.pptx
@@ -2269,7 +2269,7 @@
                   <a:srgbClr val="888888"/>
                 </a:solidFill>
               </a:rPr>
-              <a:t>2026-04-27 — 2026-05-04</a:t>
+              <a:t>2026-05-04 — 2026-05-11</a:t>
             </a:r>
             <a:endParaRPr lang="en-US" sz="1400" dirty="0"/>
           </a:p>
@@ -2460,7 +2460,7 @@
                   </a:extLst>
                 </a:hlinkClick>
               </a:rPr>
-              <a:t>… plus transarterial chemoembolization and PD-1 inhibitors as conversion therapies for unresectable intermediate-advanced hepatocellular carcinoma: a phase 2 trial …</a:t>
+              <a:t>Prognostic nutritional index and the survival of patients with hepatocellular carcinoma on immune checkpoint inhibitors: a meta-analysis</a:t>
             </a:r>
             <a:endParaRPr lang="en-US" sz="2400" dirty="0"/>
           </a:p>
@@ -2496,7 +2496,7 @@
                   <a:srgbClr val="888888"/>
                 </a:solidFill>
               </a:rPr>
-              <a:t>… and Targeted Therapy  ·  RCT Phase 2</a:t>
+              <a:t>BMC cancer  ·  Meta-Analysis</a:t>
             </a:r>
             <a:endParaRPr lang="en-US" sz="1000" dirty="0"/>
           </a:p>
@@ -2539,7 +2539,7 @@
                 <a:ea typeface="Arial" pitchFamily="34" charset="-122"/>
                 <a:cs typeface="Arial" pitchFamily="34" charset="-120"/>
               </a:rPr>
-              <a:t>Combination therapy for unresectable HCC</a:t>
+              <a:t>Prognostic nutritional index (PNI) impacts survival.</a:t>
             </a:r>
             <a:endParaRPr lang="en-US" sz="1800" dirty="0"/>
           </a:p>
@@ -2560,7 +2560,7 @@
                 <a:ea typeface="Arial" pitchFamily="34" charset="-122"/>
                 <a:cs typeface="Arial" pitchFamily="34" charset="-120"/>
               </a:rPr>
-              <a:t>Transarterial chemoembolization (TACE) used</a:t>
+              <a:t>Meta-analysis of HCC patients on ICIs.</a:t>
             </a:r>
             <a:endParaRPr lang="en-US" sz="1800" dirty="0"/>
           </a:p>
@@ -2581,49 +2581,7 @@
                 <a:ea typeface="Arial" pitchFamily="34" charset="-122"/>
                 <a:cs typeface="Arial" pitchFamily="34" charset="-120"/>
               </a:rPr>
-              <a:t>PD-1 inhibitors enhance treatment efficacy</a:t>
-            </a:r>
-            <a:endParaRPr lang="en-US" sz="1800" dirty="0"/>
-          </a:p>
-          <a:p>
-            <a:pPr marL="342900" indent="-342900">
-              <a:spcAft>
-                <a:spcPts val="800"/>
-              </a:spcAft>
-              <a:buSzPct val="100000"/>
-              <a:buChar char="•"/>
-            </a:pPr>
-            <a:r>
-              <a:rPr lang="en-US" sz="1800" dirty="0">
-                <a:solidFill>
-                  <a:srgbClr val="333333"/>
-                </a:solidFill>
-                <a:latin typeface="Arial" pitchFamily="34" charset="0"/>
-                <a:ea typeface="Arial" pitchFamily="34" charset="-122"/>
-                <a:cs typeface="Arial" pitchFamily="34" charset="-120"/>
-              </a:rPr>
-              <a:t>Phase 2 trial demonstrates promising results</a:t>
-            </a:r>
-            <a:endParaRPr lang="en-US" sz="1800" dirty="0"/>
-          </a:p>
-          <a:p>
-            <a:pPr marL="342900" indent="-342900">
-              <a:spcAft>
-                <a:spcPts val="800"/>
-              </a:spcAft>
-              <a:buSzPct val="100000"/>
-              <a:buChar char="•"/>
-            </a:pPr>
-            <a:r>
-              <a:rPr lang="en-US" sz="1800" dirty="0">
-                <a:solidFill>
-                  <a:srgbClr val="333333"/>
-                </a:solidFill>
-                <a:latin typeface="Arial" pitchFamily="34" charset="0"/>
-                <a:ea typeface="Arial" pitchFamily="34" charset="-122"/>
-                <a:cs typeface="Arial" pitchFamily="34" charset="-120"/>
-              </a:rPr>
-              <a:t>Potential for conversion to resectable disease</a:t>
+              <a:t>Nutritional status correlates with immune response.</a:t>
             </a:r>
             <a:endParaRPr lang="en-US" sz="1800" dirty="0"/>
           </a:p>
@@ -2659,7 +2617,7 @@
                   <a:srgbClr val="888888"/>
                 </a:solidFill>
               </a:rPr>
-              <a:t>X Zhang, H Cai, W Peng. … and Targeted Therapy. 2026</a:t>
+              <a:t>J Fu, W Peng, J Jiang. BMC cancer. 2026</a:t>
             </a:r>
             <a:endParaRPr lang="en-US" sz="800" dirty="0"/>
           </a:p>
@@ -2859,7 +2817,7 @@
                   </a:extLst>
                 </a:hlinkClick>
               </a:rPr>
-              <a:t>Radiologic Response Assessment With RECIST 1.1 and mRECIST in Patients With Hepatocellular Carcinoma Treated With Atezolizumab Plus Bevacizumab.</a:t>
+              <a:t>Radiotherapy versus local ablation therapy for the treatment of hepatocellular carcinoma: A systematic review and meta-analysis.</a:t>
             </a:r>
             <a:endParaRPr lang="en-US" sz="2400" dirty="0"/>
           </a:p>
@@ -2895,7 +2853,7 @@
                   <a:srgbClr val="888888"/>
                 </a:solidFill>
               </a:rPr>
-              <a:t>Korean journal of radiology  ·  Retrospective Study  ·  🌏 Asia</a:t>
+              <a:t>Journal of Clinical …  ·  Meta-Analysis</a:t>
             </a:r>
             <a:endParaRPr lang="en-US" sz="1000" dirty="0"/>
           </a:p>
@@ -2938,7 +2896,7 @@
                 <a:ea typeface="Arial" pitchFamily="34" charset="-122"/>
                 <a:cs typeface="Arial" pitchFamily="34" charset="-120"/>
               </a:rPr>
-              <a:t>Study compares RECIST 1.1 and mRECIST.</a:t>
+              <a:t>Comparison of radiotherapy and local ablation</a:t>
             </a:r>
             <a:endParaRPr lang="en-US" sz="1800" dirty="0"/>
           </a:p>
@@ -2959,7 +2917,7 @@
                 <a:ea typeface="Arial" pitchFamily="34" charset="-122"/>
                 <a:cs typeface="Arial" pitchFamily="34" charset="-120"/>
               </a:rPr>
-              <a:t>207 HCC patients treated with Atezo/Bev.</a:t>
+              <a:t>Focus on hepatocellular carcinoma treatment</a:t>
             </a:r>
             <a:endParaRPr lang="en-US" sz="1800" dirty="0"/>
           </a:p>
@@ -2980,7 +2938,7 @@
                 <a:ea typeface="Arial" pitchFamily="34" charset="-122"/>
                 <a:cs typeface="Arial" pitchFamily="34" charset="-120"/>
               </a:rPr>
-              <a:t>mRECIST identified more responders than RECIST 1.1.</a:t>
+              <a:t>Assessment of local progression-free survival</a:t>
             </a:r>
             <a:endParaRPr lang="en-US" sz="1800" dirty="0"/>
           </a:p>
@@ -3001,7 +2959,7 @@
                 <a:ea typeface="Arial" pitchFamily="34" charset="-122"/>
                 <a:cs typeface="Arial" pitchFamily="34" charset="-120"/>
               </a:rPr>
-              <a:t>RECIST 1.1 shows excellent inter-reader agreement.</a:t>
+              <a:t>Inclusion of radiofrequency and microwave ablation</a:t>
             </a:r>
             <a:endParaRPr lang="en-US" sz="1800" dirty="0"/>
           </a:p>
@@ -3022,7 +2980,7 @@
                 <a:ea typeface="Arial" pitchFamily="34" charset="-122"/>
                 <a:cs typeface="Arial" pitchFamily="34" charset="-120"/>
               </a:rPr>
-              <a:t>Both methods predict overall survival independently.</a:t>
+              <a:t>Systematic review and meta-analysis conducted</a:t>
             </a:r>
             <a:endParaRPr lang="en-US" sz="1800" dirty="0"/>
           </a:p>
@@ -3058,7 +3016,7 @@
                   <a:srgbClr val="888888"/>
                 </a:solidFill>
               </a:rPr>
-              <a:t>Jeong Boryeong, Park Hyo Jung, Choi Won-Mook et al.. Korean journal of radiology. 2026-04-30 DOI: 10.3348/kjr.2025.1849</a:t>
+              <a:t>SH Bae, SH Choi, SM Yoon. Journal of Clinical …. 2026</a:t>
             </a:r>
             <a:endParaRPr lang="en-US" sz="800" dirty="0"/>
           </a:p>
@@ -3258,7 +3216,7 @@
                   </a:extLst>
                 </a:hlinkClick>
               </a:rPr>
-              <a:t>Identification of Risk Factors for the Local Recurrence of Hepatocellular Carcinoma Post-radiofrequency Ablation.</a:t>
+              <a:t>MCT8 Modulates Metabolite Uptake and T-cell Exhaustion to Promote Immunosuppression and Tumor Progression in Hepatocellular Carcinoma.</a:t>
             </a:r>
             <a:endParaRPr lang="en-US" sz="2400" dirty="0"/>
           </a:p>
@@ -3294,7 +3252,7 @@
                   <a:srgbClr val="888888"/>
                 </a:solidFill>
               </a:rPr>
-              <a:t>Anticancer research  ·  Retrospective Study  ·  🌏 Asia</a:t>
+              <a:t>Molecular cancer therapeutics  ·  IF 5.6  ·  Basic Research</a:t>
             </a:r>
             <a:endParaRPr lang="en-US" sz="1000" dirty="0"/>
           </a:p>
@@ -3337,7 +3295,7 @@
                 <a:ea typeface="Arial" pitchFamily="34" charset="-122"/>
                 <a:cs typeface="Arial" pitchFamily="34" charset="-120"/>
               </a:rPr>
-              <a:t>Radiofrequency ablation is effective for HCC.</a:t>
+              <a:t>MCT8 regulates T-cell function in HCC.</a:t>
             </a:r>
             <a:endParaRPr lang="en-US" sz="1800" dirty="0"/>
           </a:p>
@@ -3358,7 +3316,7 @@
                 <a:ea typeface="Arial" pitchFamily="34" charset="-122"/>
                 <a:cs typeface="Arial" pitchFamily="34" charset="-120"/>
               </a:rPr>
-              <a:t>Local recurrence rates vary significantly post-RFA.</a:t>
+              <a:t>SLC16A2 knockout reduces tumor growth.</a:t>
             </a:r>
             <a:endParaRPr lang="en-US" sz="1800" dirty="0"/>
           </a:p>
@@ -3379,49 +3337,7 @@
                 <a:ea typeface="Arial" pitchFamily="34" charset="-122"/>
                 <a:cs typeface="Arial" pitchFamily="34" charset="-120"/>
               </a:rPr>
-              <a:t>Tumor size and location are key risk factors.</a:t>
-            </a:r>
-            <a:endParaRPr lang="en-US" sz="1800" dirty="0"/>
-          </a:p>
-          <a:p>
-            <a:pPr marL="342900" indent="-342900">
-              <a:spcAft>
-                <a:spcPts val="800"/>
-              </a:spcAft>
-              <a:buSzPct val="100000"/>
-              <a:buChar char="•"/>
-            </a:pPr>
-            <a:r>
-              <a:rPr lang="en-US" sz="1800" dirty="0">
-                <a:solidFill>
-                  <a:srgbClr val="333333"/>
-                </a:solidFill>
-                <a:latin typeface="Arial" pitchFamily="34" charset="0"/>
-                <a:ea typeface="Arial" pitchFamily="34" charset="-122"/>
-                <a:cs typeface="Arial" pitchFamily="34" charset="-120"/>
-              </a:rPr>
-              <a:t>TACE prior to RFA impacts recurrence in LR group.</a:t>
-            </a:r>
-            <a:endParaRPr lang="en-US" sz="1800" dirty="0"/>
-          </a:p>
-          <a:p>
-            <a:pPr marL="342900" indent="-342900">
-              <a:spcAft>
-                <a:spcPts val="800"/>
-              </a:spcAft>
-              <a:buSzPct val="100000"/>
-              <a:buChar char="•"/>
-            </a:pPr>
-            <a:r>
-              <a:rPr lang="en-US" sz="1800" dirty="0">
-                <a:solidFill>
-                  <a:srgbClr val="333333"/>
-                </a:solidFill>
-                <a:latin typeface="Arial" pitchFamily="34" charset="0"/>
-                <a:ea typeface="Arial" pitchFamily="34" charset="-122"/>
-                <a:cs typeface="Arial" pitchFamily="34" charset="-120"/>
-              </a:rPr>
-              <a:t>Alternative treatments may be needed for LR cases.</a:t>
+              <a:t>MCT8 mAb enhances CD8+ T-cell activity.</a:t>
             </a:r>
             <a:endParaRPr lang="en-US" sz="1800" dirty="0"/>
           </a:p>
@@ -3457,7 +3373,7 @@
                   <a:srgbClr val="888888"/>
                 </a:solidFill>
               </a:rPr>
-              <a:t>Tanaka Kosuke, Kuwano Akifumi, Yada Masayoshi et al.. Anticancer research. 2026-04-28 DOI: 10.21873/anticanres.18141</a:t>
+              <a:t>Bi Bin, Tang Liqin, Liang Ranxi et al.. Molecular cancer therapeutics. 2026-05-04 DOI: 10.1158/1535-7163.MCT-25-0564</a:t>
             </a:r>
             <a:endParaRPr lang="en-US" sz="800" dirty="0"/>
           </a:p>
@@ -3674,7 +3590,7 @@
                   <a:srgbClr val="FFFFFF"/>
                 </a:solidFill>
               </a:rPr>
-              <a:t>1. **新療法的需求**  </a:t>
+              <a:t>1. **個體化治療的重要性 (Importance of Personalized Therapy)**  </a:t>
             </a:r>
             <a:endParaRPr lang="en-US" sz="1200" dirty="0"/>
           </a:p>
@@ -3691,7 +3607,7 @@
                   <a:srgbClr val="FFFFFF"/>
                 </a:solidFill>
               </a:rPr>
-              <a:t>   The study highlights the urgent need for innovative therapies to improve survival rates in hepatocellular carcinoma (HCC) patients, as current treatment options remain limited.  </a:t>
+              <a:t>   The studies emphasize the need for personalized treatment approaches in HCC, highlighting that standard dosing may not be effective for all patients due to variations in body composition and tumor microenvironment.  </a:t>
             </a:r>
             <a:endParaRPr lang="en-US" sz="1200" dirty="0"/>
           </a:p>
@@ -3708,7 +3624,7 @@
                   <a:srgbClr val="FFFFFF"/>
                 </a:solidFill>
               </a:rPr>
-              <a:t>   研究強調了創新療法在肝細胞癌（HCC）患者中改善生存率的迫切需求，因為目前的治療選擇仍然有限。</a:t>
+              <a:t>   研究強調在肝癌治療中個體化治療的重要性，指出標準劑量可能因患者體組成和腫瘤微環境的差異而無法有效。</a:t>
             </a:r>
             <a:endParaRPr lang="en-US" sz="1200" dirty="0"/>
           </a:p>
@@ -3734,7 +3650,7 @@
                   <a:srgbClr val="FFFFFF"/>
                 </a:solidFill>
               </a:rPr>
-              <a:t>2. **預後生物標記的挑戰**  </a:t>
+              <a:t>2. **免疫微環境的重塑 (Reprogramming the Immune Microenvironment)**  </a:t>
             </a:r>
             <a:endParaRPr lang="en-US" sz="1200" dirty="0"/>
           </a:p>
@@ -3751,7 +3667,7 @@
                   <a:srgbClr val="FFFFFF"/>
                 </a:solidFill>
               </a:rPr>
-              <a:t>   Identifying reliable prognostic biomarkers for HCC remains a significant challenge, which is crucial for tailoring treatment strategies and improving patient outcomes.  </a:t>
+              <a:t>   Innovative strategies such as ISX-TWIST1 reprogramming show potential in reshaping the immune microenvironment, which is crucial for enhancing the efficacy of immunotherapies in HCC.  </a:t>
             </a:r>
             <a:endParaRPr lang="en-US" sz="1200" dirty="0"/>
           </a:p>
@@ -3768,7 +3684,7 @@
                   <a:srgbClr val="FFFFFF"/>
                 </a:solidFill>
               </a:rPr>
-              <a:t>   確定肝細胞癌的可靠預後生物標記仍然是一個重大挑戰，這對於量身定制治療策略和改善患者預後至關重要。</a:t>
+              <a:t>   創新策略如ISX-TWIST1重塑顯示出在改變免疫微環境方面的潛力，這對於提高肝癌免疫治療的療效至關重要。</a:t>
             </a:r>
             <a:endParaRPr lang="en-US" sz="1200" dirty="0"/>
           </a:p>
@@ -3794,7 +3710,7 @@
                   <a:srgbClr val="FFFFFF"/>
                 </a:solidFill>
               </a:rPr>
-              <a:t>3. **代謝重編程的角色**  </a:t>
+              <a:t>3. **轉化療法的潛力 (Potential of Conversion Therapy)**  </a:t>
             </a:r>
             <a:endParaRPr lang="en-US" sz="1200" dirty="0"/>
           </a:p>
@@ -3811,7 +3727,7 @@
                   <a:srgbClr val="FFFFFF"/>
                 </a:solidFill>
               </a:rPr>
-              <a:t>   The role of metabolic reprogramming in HCC malignancy and immune evasion is increasingly recognized, suggesting potential targets for therapeutic intervention.  </a:t>
+              <a:t>   The combination of PD-1 inhibitors with other therapies, such as lenvatinib and transarterial chemoembolization, suggests promising outcomes for patients with unresectable HCC, paving the way for sequential surgical options.  </a:t>
             </a:r>
             <a:endParaRPr lang="en-US" sz="1200" dirty="0"/>
           </a:p>
@@ -3828,7 +3744,7 @@
                   <a:srgbClr val="FFFFFF"/>
                 </a:solidFill>
               </a:rPr>
-              <a:t>   代謝重編程在HCC惡性腫瘤和免疫逃逸中的角色越來越受到重視，這表明可能成為治療介入的潛在靶點。</a:t>
+              <a:t>   PD-1抑制劑與其他療法（如lenvatinib和經動脈化療栓塞）的結合顯示出對於不可切除肝癌患者的良好預後，為後續的手術選擇鋪平了道路。</a:t>
             </a:r>
             <a:endParaRPr lang="en-US" sz="1200" dirty="0"/>
           </a:p>
@@ -3854,7 +3770,7 @@
                   <a:srgbClr val="FFFFFF"/>
                 </a:solidFill>
               </a:rPr>
-              <a:t>4. **免疫治療的整合**  </a:t>
+              <a:t>4. **預測性平台的需求 (Need for Predictive Platforms)**  </a:t>
             </a:r>
             <a:endParaRPr lang="en-US" sz="1200" dirty="0"/>
           </a:p>
@@ -3871,7 +3787,7 @@
                   <a:srgbClr val="FFFFFF"/>
                 </a:solidFill>
               </a:rPr>
-              <a:t>   The integration of immune checkpoint inhibitors with other therapies, such as anti-VEGF agents, shows promise in enhancing treatment efficacy for advanced HCC.  </a:t>
+              <a:t>   The development of patient-derived organotypic tumor spheroids as functional platforms is crucial for predicting individual responses to immunotherapy, which can guide precision treatment strategies.  </a:t>
             </a:r>
             <a:endParaRPr lang="en-US" sz="1200" dirty="0"/>
           </a:p>
@@ -3888,7 +3804,7 @@
                   <a:srgbClr val="FFFFFF"/>
                 </a:solidFill>
               </a:rPr>
-              <a:t>   免疫檢查點抑制劑與其他療法（如抗VEGF藥物）的整合顯示出增強晚期HCC治療效果的潛力。</a:t>
+              <a:t>   開發患者衍生的有機腫瘤球體作為功能平台對於預測個體對免疫治療的反應至關重要，這可以指導精準治療策略。</a:t>
             </a:r>
             <a:endParaRPr lang="en-US" sz="1200" dirty="0"/>
           </a:p>
@@ -3914,7 +3830,7 @@
                   <a:srgbClr val="FFFFFF"/>
                 </a:solidFill>
               </a:rPr>
-              <a:t>5. **局部消融的風險因素**  </a:t>
+              <a:t>5. **營養指數與生存率的關聯 (Association of Nutritional Index with Survival)**  </a:t>
             </a:r>
             <a:endParaRPr lang="en-US" sz="1200" dirty="0"/>
           </a:p>
@@ -3931,7 +3847,7 @@
                   <a:srgbClr val="FFFFFF"/>
                 </a:solidFill>
               </a:rPr>
-              <a:t>   Understanding the risk factors for local recurrence after radiofrequency ablation is essential for optimizing treatment protocols and improving long-term outcomes in HCC patients.</a:t>
+              <a:t>   The prognostic nutritional index emerges as a significant factor influencing survival in HCC patients undergoing immune checkpoint inhibitor therapy, indicating the importance of nutritional status in treatment outcomes.</a:t>
             </a:r>
             <a:endParaRPr lang="en-US" sz="1200" dirty="0"/>
           </a:p>
@@ -4077,7 +3993,7 @@
                   <a:srgbClr val="FFFFFF"/>
                 </a:solidFill>
               </a:rPr>
-              <a:t>理解射頻消融後局部復發的風險因素對於優化治療方案和改善HCC患者的長期預後至關重要。</a:t>
+              <a:t>預後營養指數成為影響接受免疫檢查點抑制劑治療的肝癌患者生存率的重要因素，顯示出營養狀態對治療結果的重要性。</a:t>
             </a:r>
             <a:endParaRPr lang="en-US" sz="1200" dirty="0"/>
           </a:p>
@@ -4129,7 +4045,7 @@
                   <a:srgbClr val="FFFFFF"/>
                 </a:solidFill>
               </a:rPr>
-              <a:t>1. **生物標記的發現與驗證**  </a:t>
+              <a:t>1. **探索個體化劑量調整 (Exploration of Personalized Dosage Adjustments)**  </a:t>
             </a:r>
             <a:endParaRPr lang="en-US" sz="1200" dirty="0"/>
           </a:p>
@@ -4146,7 +4062,7 @@
                   <a:srgbClr val="FFFFFF"/>
                 </a:solidFill>
               </a:rPr>
-              <a:t>   Future studies should focus on the discovery and validation of robust prognostic biomarkers to enhance personalized treatment approaches in HCC.  </a:t>
+              <a:t>   Future studies should focus on optimizing bevacizumab dosing based on body surface area and composition to improve therapeutic outcomes in HCC patients.  </a:t>
             </a:r>
             <a:endParaRPr lang="en-US" sz="1200" dirty="0"/>
           </a:p>
@@ -4163,7 +4079,7 @@
                   <a:srgbClr val="FFFFFF"/>
                 </a:solidFill>
               </a:rPr>
-              <a:t>   未來研究應專注於發現和驗證穩健的預後生物標記，以增強HCC的個性化治療方法。</a:t>
+              <a:t>   未來研究應專注於根據體表面積和組成優化bevacizumab劑量，以改善肝癌患者的治療效果。</a:t>
             </a:r>
             <a:endParaRPr lang="en-US" sz="1200" dirty="0"/>
           </a:p>
@@ -4189,7 +4105,7 @@
                   <a:srgbClr val="FFFFFF"/>
                 </a:solidFill>
               </a:rPr>
-              <a:t>2. **免疫治療組合的探索**  </a:t>
+              <a:t>2. **深化免疫微環境研究 (Deepening Research on Immune Microenvironment)**  </a:t>
             </a:r>
             <a:endParaRPr lang="en-US" sz="1200" dirty="0"/>
           </a:p>
@@ -4206,7 +4122,7 @@
                   <a:srgbClr val="FFFFFF"/>
                 </a:solidFill>
               </a:rPr>
-              <a:t>   Investigating novel combinations of immune therapies with traditional treatments could provide synergistic effects and improve outcomes in HCC patients.  </a:t>
+              <a:t>   Investigating the mechanisms by which therapies like ISX-TWIST1 modify the immune microenvironment could provide insights into enhancing immunotherapy efficacy.  </a:t>
             </a:r>
             <a:endParaRPr lang="en-US" sz="1200" dirty="0"/>
           </a:p>
@@ -4223,7 +4139,7 @@
                   <a:srgbClr val="FFFFFF"/>
                 </a:solidFill>
               </a:rPr>
-              <a:t>   探索免疫療法與傳統治療的新組合可能會提供協同效果並改善HCC患者的預後。</a:t>
+              <a:t>   研究如ISX-TWIST1等療法改變免疫微環境的機制，可能為提高免疫治療的療效提供見解。</a:t>
             </a:r>
             <a:endParaRPr lang="en-US" sz="1200" dirty="0"/>
           </a:p>
@@ -4249,7 +4165,7 @@
                   <a:srgbClr val="FFFFFF"/>
                 </a:solidFill>
               </a:rPr>
-              <a:t>3. **代謝重編程的機制研究**  </a:t>
+              <a:t>3. **開發新型預測工具 (Development of Novel Predictive Tools)**  </a:t>
             </a:r>
             <a:endParaRPr lang="en-US" sz="1200" dirty="0"/>
           </a:p>
@@ -4266,7 +4182,7 @@
                   <a:srgbClr val="FFFFFF"/>
                 </a:solidFill>
               </a:rPr>
-              <a:t>   Further research is needed to elucidate the mechanisms of metabolic reprogramming in HCC and its impact on tumor progression and immune response.  </a:t>
+              <a:t>   Creating advanced predictive models and platforms that incorporate genetic, metabolic, and immunological factors will be essential for tailoring HCC treatments.  </a:t>
             </a:r>
             <a:endParaRPr lang="en-US" sz="1200" dirty="0"/>
           </a:p>
@@ -4283,7 +4199,7 @@
                   <a:srgbClr val="FFFFFF"/>
                 </a:solidFill>
               </a:rPr>
-              <a:t>   需要進一步研究以闡明HCC中代謝重編程的機制及其對腫瘤進展和免疫反應的影響。</a:t>
+              <a:t>   創建包含遺傳、代謝和免疫因素的先進預測模型和平台將對於量身定制肝癌治療至關重要。</a:t>
             </a:r>
             <a:endParaRPr lang="en-US" sz="1200" dirty="0"/>
           </a:p>
@@ -4309,7 +4225,7 @@
                   <a:srgbClr val="FFFFFF"/>
                 </a:solidFill>
               </a:rPr>
-              <a:t>4. **局部治療的優化**  </a:t>
+              <a:t>4. **評估營養介入的影響 (Assessing the Impact of Nutritional Interventions)**  </a:t>
             </a:r>
             <a:endParaRPr lang="en-US" sz="1200" dirty="0"/>
           </a:p>
@@ -4326,7 +4242,7 @@
                   <a:srgbClr val="FFFFFF"/>
                 </a:solidFill>
               </a:rPr>
-              <a:t>   Studies aimed at optimizing local ablation techniques and identifying patient-specific factors could reduce recurrence rates and enhance treatment efficacy.  </a:t>
+              <a:t>   Future research should evaluate the role of nutritional interventions in conjunction with immunotherapy to enhance patient outcomes in HCC.  </a:t>
             </a:r>
             <a:endParaRPr lang="en-US" sz="1200" dirty="0"/>
           </a:p>
@@ -4343,7 +4259,7 @@
                   <a:srgbClr val="FFFFFF"/>
                 </a:solidFill>
               </a:rPr>
-              <a:t>   旨在優化局部消融技術並識別患者特定因素的研究可以降低復發率並提高治療效果。</a:t>
+              <a:t>   未來研究應評估營養介入與免疫治療結合的作用，以提高肝癌患者的療效。</a:t>
             </a:r>
             <a:endParaRPr lang="en-US" sz="1200" dirty="0"/>
           </a:p>
@@ -4369,7 +4285,7 @@
                   <a:srgbClr val="FFFFFF"/>
                 </a:solidFill>
               </a:rPr>
-              <a:t>5. **病毒性肝炎與免疫反應的關聯**  </a:t>
+              <a:t>5. **長期隨訪研究的必要性 (Need for Long-Term Follow-Up Studies)**  </a:t>
             </a:r>
             <a:endParaRPr lang="en-US" sz="1200" dirty="0"/>
           </a:p>
@@ -4386,7 +4302,7 @@
                   <a:srgbClr val="FFFFFF"/>
                 </a:solidFill>
               </a:rPr>
-              <a:t>   Investigating the interplay between viral hepatitis and immune response in HCC could lead to better understanding and management of treatment outcomes.  </a:t>
+              <a:t>   Conducting long-term follow-up studies on patients receiving conversion therapies will help determine the durability of treatment responses and survival benefits.  </a:t>
             </a:r>
             <a:endParaRPr lang="en-US" sz="1200" dirty="0"/>
           </a:p>
@@ -4403,7 +4319,7 @@
                   <a:srgbClr val="FFFFFF"/>
                 </a:solidFill>
               </a:rPr>
-              <a:t>   研究病毒性肝炎與HCC中免疫反應的相互作用可能有助於更好地理解和管理治療結果。</a:t>
+              <a:t>   對接受轉化療法的患者進行長期隨訪研究將有助於確定治療反應的持久性和生存益處。</a:t>
             </a:r>
             <a:endParaRPr lang="en-US" sz="1200" dirty="0"/>
           </a:p>
@@ -4637,7 +4553,7 @@
                 <a:ea typeface="Arial" pitchFamily="34" charset="-122"/>
                 <a:cs typeface="Arial" pitchFamily="34" charset="-120"/>
               </a:rPr>
-              <a:t>AdvanTIG-206: a phase II, randomized study of ociperlimab plus tislelizumab and …</a:t>
+              <a:t>Optimizing bevacizumab exposure in atezolizumab-based therapy for unresectable h…</a:t>
             </a:r>
             <a:endParaRPr lang="en-US" sz="1400" dirty="0"/>
           </a:p>
@@ -4674,7 +4590,7 @@
                 <a:ea typeface="Arial" pitchFamily="34" charset="-122"/>
                 <a:cs typeface="Arial" pitchFamily="34" charset="-120"/>
               </a:rPr>
-              <a:t>Development and validation of a risk prediction model for patients with hepatoce…</a:t>
+              <a:t>Patient-derived organotypic tumor spheroids as a functional platform for predict…</a:t>
             </a:r>
             <a:endParaRPr lang="en-US" sz="1400" dirty="0"/>
           </a:p>
@@ -4711,7 +4627,7 @@
                 <a:ea typeface="Arial" pitchFamily="34" charset="-122"/>
                 <a:cs typeface="Arial" pitchFamily="34" charset="-120"/>
               </a:rPr>
-              <a:t>An etiology-stratified single-cell atlas identifies FABP4 as a prognostic marker…</a:t>
+              <a:t>Sintilimab (PD-1 inhibitor) plus lenvatinib as conversion therapy followed by se…</a:t>
             </a:r>
             <a:endParaRPr lang="en-US" sz="1400" dirty="0"/>
           </a:p>
@@ -4748,7 +4664,7 @@
                 <a:ea typeface="Arial" pitchFamily="34" charset="-122"/>
                 <a:cs typeface="Arial" pitchFamily="34" charset="-120"/>
               </a:rPr>
-              <a:t>JOSD1 drives hepatocellular carcinoma malignancy by modulating the ubiquitinatio…</a:t>
+              <a:t>ISX-TWIST1 reprograms CD47-inflammasome signaling to reshape the immune microenv…</a:t>
             </a:r>
             <a:endParaRPr lang="en-US" sz="1400" dirty="0"/>
           </a:p>
@@ -4785,7 +4701,7 @@
                 <a:ea typeface="Arial" pitchFamily="34" charset="-122"/>
                 <a:cs typeface="Arial" pitchFamily="34" charset="-120"/>
               </a:rPr>
-              <a:t>Viral hepatitis and immunotherapy outcome in advanced hepatocellular carcinoma: …</a:t>
+              <a:t>… plus transarterial chemoembolization and PD-1 inhibitors as conversion therapi…</a:t>
             </a:r>
             <a:endParaRPr lang="en-US" sz="1400" dirty="0"/>
           </a:p>
@@ -4822,7 +4738,7 @@
                 <a:ea typeface="Arial" pitchFamily="34" charset="-122"/>
                 <a:cs typeface="Arial" pitchFamily="34" charset="-120"/>
               </a:rPr>
-              <a:t>Lenvatinib Versus Bevacizumab in Combination With Anti-PD-1/PD-L1 Therapy for uH…</a:t>
+              <a:t>A Case of Pernicious Anemia Induced by Atezolizumab in Hepatocellular Carcinoma …</a:t>
             </a:r>
             <a:endParaRPr lang="en-US" sz="1400" dirty="0"/>
           </a:p>
@@ -4859,7 +4775,7 @@
                 <a:ea typeface="Arial" pitchFamily="34" charset="-122"/>
                 <a:cs typeface="Arial" pitchFamily="34" charset="-120"/>
               </a:rPr>
-              <a:t>Low-Dose Bevacizumab Maintains Efficacy With Reduced Adverse Events in Liver Can…</a:t>
+              <a:t>Comparison of outcomes of second-line durvalumab plus tremelimumab versus lenvat…</a:t>
             </a:r>
             <a:endParaRPr lang="en-US" sz="1400" dirty="0"/>
           </a:p>
@@ -4896,7 +4812,7 @@
                 <a:ea typeface="Arial" pitchFamily="34" charset="-122"/>
                 <a:cs typeface="Arial" pitchFamily="34" charset="-120"/>
               </a:rPr>
-              <a:t>… plus transarterial chemoembolization and PD-1 inhibitors as conversion therapi…</a:t>
+              <a:t>Prognostic nutritional index and the survival of patients with hepatocellular ca…</a:t>
             </a:r>
             <a:endParaRPr lang="en-US" sz="1400" dirty="0"/>
           </a:p>
@@ -4933,7 +4849,7 @@
                 <a:ea typeface="Arial" pitchFamily="34" charset="-122"/>
                 <a:cs typeface="Arial" pitchFamily="34" charset="-120"/>
               </a:rPr>
-              <a:t>Radiologic Response Assessment With RECIST 1.1 and mRECIST in Patients With Hepa…</a:t>
+              <a:t>Radiotherapy versus local ablation therapy for the treatment of hepatocellular c…</a:t>
             </a:r>
             <a:endParaRPr lang="en-US" sz="1400" dirty="0"/>
           </a:p>
@@ -4970,7 +4886,7 @@
                 <a:ea typeface="Arial" pitchFamily="34" charset="-122"/>
                 <a:cs typeface="Arial" pitchFamily="34" charset="-120"/>
               </a:rPr>
-              <a:t>Identification of Risk Factors for the Local Recurrence of Hepatocellular Carcin…</a:t>
+              <a:t>MCT8 Modulates Metabolite Uptake and T-cell Exhaustion to Promote Immunosuppress…</a:t>
             </a:r>
             <a:endParaRPr lang="en-US" sz="1400" dirty="0"/>
           </a:p>
@@ -5125,7 +5041,7 @@
                   </a:extLst>
                 </a:hlinkClick>
               </a:rPr>
-              <a:t>AdvanTIG-206: a phase II, randomized study of ociperlimab plus tislelizumab and BAT1706 (bevacizumab biosimilar) versus tislelizumab and BAT1706 in first-line hepatocellular carcinoma.</a:t>
+              <a:t>Optimizing bevacizumab exposure in atezolizumab-based therapy for unresectable hepatocellular carcinoma: A nationwide real-world study.</a:t>
             </a:r>
             <a:endParaRPr lang="en-US" sz="2400" dirty="0"/>
           </a:p>
@@ -5161,7 +5077,7 @@
                   <a:srgbClr val="888888"/>
                 </a:solidFill>
               </a:rPr>
-              <a:t>Cancer immunology, immunotherapy : CII  ·  RCT Phase 2  ·  🌏 Asia</a:t>
+              <a:t>Hepatology (Baltimore, Md.)  ·  IF 12.9  ·  Retrospective Study  ·  🌏 Asia</a:t>
             </a:r>
             <a:endParaRPr lang="en-US" sz="1000" dirty="0"/>
           </a:p>
@@ -5204,7 +5120,7 @@
                 <a:ea typeface="Arial" pitchFamily="34" charset="-122"/>
                 <a:cs typeface="Arial" pitchFamily="34" charset="-120"/>
               </a:rPr>
-              <a:t>Phase II trial for advanced HCC patients</a:t>
+              <a:t>Study on bevacizumab dosing in HCC</a:t>
             </a:r>
             <a:endParaRPr lang="en-US" sz="1800" dirty="0"/>
           </a:p>
@@ -5225,7 +5141,7 @@
                 <a:ea typeface="Arial" pitchFamily="34" charset="-122"/>
                 <a:cs typeface="Arial" pitchFamily="34" charset="-120"/>
               </a:rPr>
-              <a:t>Ociperlimab plus tislelizumab and BAT1706 tested</a:t>
+              <a:t>Optimal BBI range identified: 106-121%</a:t>
             </a:r>
             <a:endParaRPr lang="en-US" sz="1800" dirty="0"/>
           </a:p>
@@ -5246,7 +5162,7 @@
                 <a:ea typeface="Arial" pitchFamily="34" charset="-122"/>
                 <a:cs typeface="Arial" pitchFamily="34" charset="-120"/>
               </a:rPr>
-              <a:t>Confirmed ORR: 37.1% (Arm A), 40.6% (Arm B)</a:t>
+              <a:t>Target group showed longer PFS and OS</a:t>
             </a:r>
             <a:endParaRPr lang="en-US" sz="1800" dirty="0"/>
           </a:p>
@@ -5267,7 +5183,7 @@
                 <a:ea typeface="Arial" pitchFamily="34" charset="-122"/>
                 <a:cs typeface="Arial" pitchFamily="34" charset="-120"/>
               </a:rPr>
-              <a:t>High rate of treatment-related adverse events</a:t>
+              <a:t>No increased toxicity with adjusted dosing</a:t>
             </a:r>
             <a:endParaRPr lang="en-US" sz="1800" dirty="0"/>
           </a:p>
@@ -5288,7 +5204,7 @@
                 <a:ea typeface="Arial" pitchFamily="34" charset="-122"/>
                 <a:cs typeface="Arial" pitchFamily="34" charset="-120"/>
               </a:rPr>
-              <a:t>No new safety signals identified</a:t>
+              <a:t>Higher response rate in Target group</a:t>
             </a:r>
             <a:endParaRPr lang="en-US" sz="1800" dirty="0"/>
           </a:p>
@@ -5324,7 +5240,7 @@
                   <a:srgbClr val="888888"/>
                 </a:solidFill>
               </a:rPr>
-              <a:t>Ren Zhenggang, Huang Yao, Guo Yabing et al.. Cancer immunology, immunotherapy : CII. 2026-04-28 DOI: 10.1007/s00262-026-04399-8</a:t>
+              <a:t>Aoe Kaho, Tada Toshifumi, Hiraoka Atsushi et al.. Hepatology (Baltimore, Md.). 2026-05-06 DOI: 10.1097/HEP.0000000000001781</a:t>
             </a:r>
             <a:endParaRPr lang="en-US" sz="800" dirty="0"/>
           </a:p>
@@ -5524,7 +5440,7 @@
                   </a:extLst>
                 </a:hlinkClick>
               </a:rPr>
-              <a:t>Development and validation of a risk prediction model for patients with hepatocellular carcinoma receiving atezolizumab-bevacizumab.</a:t>
+              <a:t>Patient-derived organotypic tumor spheroids as a functional platform for predicting immunotherapeutic responses and guiding precision treatment for hepatocellular carcinoma.</a:t>
             </a:r>
             <a:endParaRPr lang="en-US" sz="2400" dirty="0"/>
           </a:p>
@@ -5560,7 +5476,7 @@
                   <a:srgbClr val="888888"/>
                 </a:solidFill>
               </a:rPr>
-              <a:t>Hepatology (Baltimore, Md.)  ·  IF 12.9  ·  🌏 Asia</a:t>
+              <a:t>Journal for immunotherapy of cancer  ·  IF 10.9  ·  Basic Research</a:t>
             </a:r>
             <a:endParaRPr lang="en-US" sz="1000" dirty="0"/>
           </a:p>
@@ -5603,7 +5519,7 @@
                 <a:ea typeface="Arial" pitchFamily="34" charset="-122"/>
                 <a:cs typeface="Arial" pitchFamily="34" charset="-120"/>
               </a:rPr>
-              <a:t>Atezolizumab-bevacizumab is standard treatment.</a:t>
+              <a:t>Developed patient-derived organotypic tumor spheroids (PDOTS)</a:t>
             </a:r>
             <a:endParaRPr lang="en-US" sz="1800" dirty="0"/>
           </a:p>
@@ -5624,7 +5540,7 @@
                 <a:ea typeface="Arial" pitchFamily="34" charset="-122"/>
                 <a:cs typeface="Arial" pitchFamily="34" charset="-120"/>
               </a:rPr>
-              <a:t>Developed CRAPT-M risk prediction model.</a:t>
+              <a:t>PDOTS model preserves HCC heterogeneity and immune microenvironment</a:t>
             </a:r>
             <a:endParaRPr lang="en-US" sz="1800" dirty="0"/>
           </a:p>
@@ -5645,7 +5561,7 @@
                 <a:ea typeface="Arial" pitchFamily="34" charset="-122"/>
                 <a:cs typeface="Arial" pitchFamily="34" charset="-120"/>
               </a:rPr>
-              <a:t>Identified five independent prognostic factors.</a:t>
+              <a:t>Achieved 80% concordance in predicting treatment responses</a:t>
             </a:r>
             <a:endParaRPr lang="en-US" sz="1800" dirty="0"/>
           </a:p>
@@ -5666,7 +5582,7 @@
                 <a:ea typeface="Arial" pitchFamily="34" charset="-122"/>
                 <a:cs typeface="Arial" pitchFamily="34" charset="-120"/>
               </a:rPr>
-              <a:t>Median OS varies by risk group.</a:t>
+              <a:t>Identified 'Organoid Killing Index' for treatment sensitivity</a:t>
             </a:r>
             <a:endParaRPr lang="en-US" sz="1800" dirty="0"/>
           </a:p>
@@ -5687,7 +5603,7 @@
                 <a:ea typeface="Arial" pitchFamily="34" charset="-122"/>
                 <a:cs typeface="Arial" pitchFamily="34" charset="-120"/>
               </a:rPr>
-              <a:t>CRAPT-M shows higher accuracy than CRAFITY.</a:t>
+              <a:t>Supports individualized immunotherapy for HCC patients</a:t>
             </a:r>
             <a:endParaRPr lang="en-US" sz="1800" dirty="0"/>
           </a:p>
@@ -5723,7 +5639,7 @@
                   <a:srgbClr val="888888"/>
                 </a:solidFill>
               </a:rPr>
-              <a:t>Nam Heechul, Kim Dong Yun, Kim Do Young et al.. Hepatology (Baltimore, Md.). 2026-04-17 DOI: 10.1097/HEP.0000000000001444</a:t>
+              <a:t>Song Fei, Lu Yi-Jun, Sun Hai-Xiang et al.. Journal for immunotherapy of cancer. 2026-05-04 DOI: 10.1136/jitc-2025-014555</a:t>
             </a:r>
             <a:endParaRPr lang="en-US" sz="800" dirty="0"/>
           </a:p>
@@ -5923,7 +5839,7 @@
                   </a:extLst>
                 </a:hlinkClick>
               </a:rPr>
-              <a:t>An etiology-stratified single-cell atlas identifies FABP4 as a prognostic marker for MASLD-related HCC.</a:t>
+              <a:t>Sintilimab (PD-1 inhibitor) plus lenvatinib as conversion therapy followed by sequential surgery (SILENSES) for advanced unresectable hepatocellular carcinoma: a phase II, expansion trial.</a:t>
             </a:r>
             <a:endParaRPr lang="en-US" sz="2400" dirty="0"/>
           </a:p>
@@ -5959,7 +5875,7 @@
                   <a:srgbClr val="888888"/>
                 </a:solidFill>
               </a:rPr>
-              <a:t>Journal of hepatology  ·  IF 25.7  ·  Basic Research</a:t>
+              <a:t>Signal transduction and targeted therapy  ·  RCT Phase 2</a:t>
             </a:r>
             <a:endParaRPr lang="en-US" sz="1000" dirty="0"/>
           </a:p>
@@ -6002,7 +5918,7 @@
                 <a:ea typeface="Arial" pitchFamily="34" charset="-122"/>
                 <a:cs typeface="Arial" pitchFamily="34" charset="-120"/>
               </a:rPr>
-              <a:t>Study compares tumor microenvironments in HCC</a:t>
+              <a:t>Sintilimab-lenvatinib shows promising antitumor activity.</a:t>
             </a:r>
             <a:endParaRPr lang="en-US" sz="1800" dirty="0"/>
           </a:p>
@@ -6023,7 +5939,7 @@
                 <a:ea typeface="Arial" pitchFamily="34" charset="-122"/>
                 <a:cs typeface="Arial" pitchFamily="34" charset="-120"/>
               </a:rPr>
-              <a:t>FABP4 identified as prognostic biomarker</a:t>
+              <a:t>56% conversion rate in unresectable HCC patients.</a:t>
             </a:r>
             <a:endParaRPr lang="en-US" sz="1800" dirty="0"/>
           </a:p>
@@ -6044,7 +5960,7 @@
                 <a:ea typeface="Arial" pitchFamily="34" charset="-122"/>
                 <a:cs typeface="Arial" pitchFamily="34" charset="-120"/>
               </a:rPr>
-              <a:t>HBV+MASLD+ HCC shows best immunotherapy outcomes</a:t>
+              <a:t>Median overall survival of 36 months reported.</a:t>
             </a:r>
             <a:endParaRPr lang="en-US" sz="1800" dirty="0"/>
           </a:p>
@@ -6065,7 +5981,7 @@
                 <a:ea typeface="Arial" pitchFamily="34" charset="-122"/>
                 <a:cs typeface="Arial" pitchFamily="34" charset="-120"/>
               </a:rPr>
-              <a:t>Increased CD8+ T cells in MASLD+ HCC</a:t>
+              <a:t>73.9% five-year survival after surgical resection.</a:t>
             </a:r>
             <a:endParaRPr lang="en-US" sz="1800" dirty="0"/>
           </a:p>
@@ -6086,7 +6002,7 @@
                 <a:ea typeface="Arial" pitchFamily="34" charset="-122"/>
                 <a:cs typeface="Arial" pitchFamily="34" charset="-120"/>
               </a:rPr>
-              <a:t>FABP4 enhances vascular normalization and T-cell infiltration</a:t>
+              <a:t>31% experienced grade ≥3 adverse events.</a:t>
             </a:r>
             <a:endParaRPr lang="en-US" sz="1800" dirty="0"/>
           </a:p>
@@ -6122,7 +6038,7 @@
                   <a:srgbClr val="888888"/>
                 </a:solidFill>
               </a:rPr>
-              <a:t>Zhang Shuyuan, Xu Huanhuan, Li Mingwei et al.. Journal of hepatology. 2026-04-17 DOI: 10.1016/j.jhep.2025.10.026</a:t>
+              <a:t>Lu Shichun, Zhang Wenwen, Li Junfeng et al.. Signal transduction and targeted therapy. 2026-05-06 DOI: 10.1038/s41392-026-02708-2</a:t>
             </a:r>
             <a:endParaRPr lang="en-US" sz="800" dirty="0"/>
           </a:p>
@@ -6322,7 +6238,7 @@
                   </a:extLst>
                 </a:hlinkClick>
               </a:rPr>
-              <a:t>JOSD1 drives hepatocellular carcinoma malignancy by modulating the ubiquitination-lactylation switch on PGAM1.</a:t>
+              <a:t>ISX-TWIST1 reprograms CD47-inflammasome signaling to reshape the immune microenvironment in liver cancer.</a:t>
             </a:r>
             <a:endParaRPr lang="en-US" sz="2400" dirty="0"/>
           </a:p>
@@ -6358,7 +6274,7 @@
                   <a:srgbClr val="888888"/>
                 </a:solidFill>
               </a:rPr>
-              <a:t>Gut  ·  IF 24.5  ·  Basic Research</a:t>
+              <a:t>Experimental hematology &amp; oncology  ·  Basic Research  ·  🌏 Asia</a:t>
             </a:r>
             <a:endParaRPr lang="en-US" sz="1000" dirty="0"/>
           </a:p>
@@ -6401,7 +6317,7 @@
                 <a:ea typeface="Arial" pitchFamily="34" charset="-122"/>
                 <a:cs typeface="Arial" pitchFamily="34" charset="-120"/>
               </a:rPr>
-              <a:t>JOSD1 enhances glycolysis in HCC.</a:t>
+              <a:t>ISX links CD47 signaling and inflammasomes.</a:t>
             </a:r>
             <a:endParaRPr lang="en-US" sz="1800" dirty="0"/>
           </a:p>
@@ -6422,7 +6338,7 @@
                 <a:ea typeface="Arial" pitchFamily="34" charset="-122"/>
                 <a:cs typeface="Arial" pitchFamily="34" charset="-120"/>
               </a:rPr>
-              <a:t>Over-expression leads to poor prognosis.</a:t>
+              <a:t>Elevated CD47 promotes M2 macrophage polarization.</a:t>
             </a:r>
             <a:endParaRPr lang="en-US" sz="1800" dirty="0"/>
           </a:p>
@@ -6443,49 +6359,7 @@
                 <a:ea typeface="Arial" pitchFamily="34" charset="-122"/>
                 <a:cs typeface="Arial" pitchFamily="34" charset="-120"/>
               </a:rPr>
-              <a:t>Regulates ubiquitination-lactylation on PGAM1.</a:t>
-            </a:r>
-            <a:endParaRPr lang="en-US" sz="1800" dirty="0"/>
-          </a:p>
-          <a:p>
-            <a:pPr marL="342900" indent="-342900">
-              <a:spcAft>
-                <a:spcPts val="800"/>
-              </a:spcAft>
-              <a:buSzPct val="100000"/>
-              <a:buChar char="•"/>
-            </a:pPr>
-            <a:r>
-              <a:rPr lang="en-US" sz="1800" dirty="0">
-                <a:solidFill>
-                  <a:srgbClr val="333333"/>
-                </a:solidFill>
-                <a:latin typeface="Arial" pitchFamily="34" charset="0"/>
-                <a:ea typeface="Arial" pitchFamily="34" charset="-122"/>
-                <a:cs typeface="Arial" pitchFamily="34" charset="-120"/>
-              </a:rPr>
-              <a:t>Impaired CD8+ T cell function observed.</a:t>
-            </a:r>
-            <a:endParaRPr lang="en-US" sz="1800" dirty="0"/>
-          </a:p>
-          <a:p>
-            <a:pPr marL="342900" indent="-342900">
-              <a:spcAft>
-                <a:spcPts val="800"/>
-              </a:spcAft>
-              <a:buSzPct val="100000"/>
-              <a:buChar char="•"/>
-            </a:pPr>
-            <a:r>
-              <a:rPr lang="en-US" sz="1800" dirty="0">
-                <a:solidFill>
-                  <a:srgbClr val="333333"/>
-                </a:solidFill>
-                <a:latin typeface="Arial" pitchFamily="34" charset="0"/>
-                <a:ea typeface="Arial" pitchFamily="34" charset="-122"/>
-                <a:cs typeface="Arial" pitchFamily="34" charset="-120"/>
-              </a:rPr>
-              <a:t>Inhibition of JOSD1 synergizes with anti-PD-1.</a:t>
+              <a:t>Eliminating M2-like macrophages halts disease progression.</a:t>
             </a:r>
             <a:endParaRPr lang="en-US" sz="1800" dirty="0"/>
           </a:p>
@@ -6521,7 +6395,7 @@
                   <a:srgbClr val="888888"/>
                 </a:solidFill>
               </a:rPr>
-              <a:t>Li Qing, Yu Kai, Zhou Suiqing et al.. Gut. 2026-04-28 DOI: 10.1136/gutjnl-2025-337331</a:t>
+              <a:t>Wang Li-Ting, Lin Ming-Hong, Li Yi-Chuan et al.. Experimental hematology &amp; oncology. 2026-05-04 DOI: 10.1186/s40164-026-00777-1</a:t>
             </a:r>
             <a:endParaRPr lang="en-US" sz="800" dirty="0"/>
           </a:p>
@@ -6721,7 +6595,7 @@
                   </a:extLst>
                 </a:hlinkClick>
               </a:rPr>
-              <a:t>Viral hepatitis and immunotherapy outcome in advanced hepatocellular carcinoma: A comprehensive umbrella review of 15 meta-analyses.</a:t>
+              <a:t>… plus transarterial chemoembolization and PD-1 inhibitors as conversion therapies for unresectable intermediate-advanced hepatocellular carcinoma: a phase 2 trial …</a:t>
             </a:r>
             <a:endParaRPr lang="en-US" sz="2400" dirty="0"/>
           </a:p>
@@ -6757,7 +6631,7 @@
                   <a:srgbClr val="888888"/>
                 </a:solidFill>
               </a:rPr>
-              <a:t>Critical reviews in oncology/hematology  ·  RCT Phase 3</a:t>
+              <a:t>… and Targeted Therapy  ·  RCT Phase 2</a:t>
             </a:r>
             <a:endParaRPr lang="en-US" sz="1000" dirty="0"/>
           </a:p>
@@ -6800,7 +6674,7 @@
                 <a:ea typeface="Arial" pitchFamily="34" charset="-122"/>
                 <a:cs typeface="Arial" pitchFamily="34" charset="-120"/>
               </a:rPr>
-              <a:t>Immune checkpoint inhibitors improve survival in HCC.</a:t>
+              <a:t>Combination therapy for unresectable HCC</a:t>
             </a:r>
             <a:endParaRPr lang="en-US" sz="1800" dirty="0"/>
           </a:p>
@@ -6821,7 +6695,7 @@
                 <a:ea typeface="Arial" pitchFamily="34" charset="-122"/>
                 <a:cs typeface="Arial" pitchFamily="34" charset="-120"/>
               </a:rPr>
-              <a:t>HBV patients show greater benefit than nonviral.</a:t>
+              <a:t>Transarterial chemoembolization (TACE) used</a:t>
             </a:r>
             <a:endParaRPr lang="en-US" sz="1800" dirty="0"/>
           </a:p>
@@ -6842,7 +6716,7 @@
                 <a:ea typeface="Arial" pitchFamily="34" charset="-122"/>
                 <a:cs typeface="Arial" pitchFamily="34" charset="-120"/>
               </a:rPr>
-              <a:t>High overlap in meta-analyses findings.</a:t>
+              <a:t>PD-1 inhibitors enhance treatment efficacy</a:t>
             </a:r>
             <a:endParaRPr lang="en-US" sz="1800" dirty="0"/>
           </a:p>
@@ -6863,7 +6737,7 @@
                 <a:ea typeface="Arial" pitchFamily="34" charset="-122"/>
                 <a:cs typeface="Arial" pitchFamily="34" charset="-120"/>
               </a:rPr>
-              <a:t>Real-world data on atezolizumab inconsistent.</a:t>
+              <a:t>Phase 2 trial demonstrates promising results</a:t>
             </a:r>
             <a:endParaRPr lang="en-US" sz="1800" dirty="0"/>
           </a:p>
@@ -6884,7 +6758,7 @@
                 <a:ea typeface="Arial" pitchFamily="34" charset="-122"/>
                 <a:cs typeface="Arial" pitchFamily="34" charset="-120"/>
               </a:rPr>
-              <a:t>Need for cautious interpretation of subgroup results.</a:t>
+              <a:t>Potential for conversion to resectable status</a:t>
             </a:r>
             <a:endParaRPr lang="en-US" sz="1800" dirty="0"/>
           </a:p>
@@ -6920,7 +6794,7 @@
                   <a:srgbClr val="888888"/>
                 </a:solidFill>
               </a:rPr>
-              <a:t>Petrelli Fausto, Colombo Silvia, Dottorini Lorenzo et al.. Critical reviews in oncology/hematology. 2026-04-12 DOI: 10.1016/j.critrevonc.2026.105248</a:t>
+              <a:t>X Zhang, H Cai, W Peng. … and Targeted Therapy. 2026</a:t>
             </a:r>
             <a:endParaRPr lang="en-US" sz="800" dirty="0"/>
           </a:p>
@@ -7120,7 +6994,7 @@
                   </a:extLst>
                 </a:hlinkClick>
               </a:rPr>
-              <a:t>Lenvatinib Versus Bevacizumab in Combination With Anti-PD-1/PD-L1 Therapy for uHCC: A Meta-Analysis of East Asian Studies.</a:t>
+              <a:t>A Case of Pernicious Anemia Induced by Atezolizumab in Hepatocellular Carcinoma and Renal Cell Carcinoma.</a:t>
             </a:r>
             <a:endParaRPr lang="en-US" sz="2400" dirty="0"/>
           </a:p>
@@ -7156,7 +7030,7 @@
                   <a:srgbClr val="888888"/>
                 </a:solidFill>
               </a:rPr>
-              <a:t>Liver international : official journal of the International Association for the Study of the Liver  ·  IF 6.0  ·  RCT</a:t>
+              <a:t>The American journal of case reports  ·  Case Report  ·  🌏 Asia</a:t>
             </a:r>
             <a:endParaRPr lang="en-US" sz="1000" dirty="0"/>
           </a:p>
@@ -7199,7 +7073,7 @@
                 <a:ea typeface="Arial" pitchFamily="34" charset="-122"/>
                 <a:cs typeface="Arial" pitchFamily="34" charset="-120"/>
               </a:rPr>
-              <a:t>Lenvatinib shows superior overall survival.</a:t>
+              <a:t>Pernicious anemia as an irAE from ICI</a:t>
             </a:r>
             <a:endParaRPr lang="en-US" sz="1800" dirty="0"/>
           </a:p>
@@ -7220,7 +7094,7 @@
                 <a:ea typeface="Arial" pitchFamily="34" charset="-122"/>
                 <a:cs typeface="Arial" pitchFamily="34" charset="-120"/>
               </a:rPr>
-              <a:t>Lenvatinib improves progression-free survival.</a:t>
+              <a:t>Case of 68-year-old man with HCC</a:t>
             </a:r>
             <a:endParaRPr lang="en-US" sz="1800" dirty="0"/>
           </a:p>
@@ -7241,7 +7115,7 @@
                 <a:ea typeface="Arial" pitchFamily="34" charset="-122"/>
                 <a:cs typeface="Arial" pitchFamily="34" charset="-120"/>
               </a:rPr>
-              <a:t>No significant difference in response rates.</a:t>
+              <a:t>Developed megaloblastic anemia post-atezolizumab</a:t>
             </a:r>
             <a:endParaRPr lang="en-US" sz="1800" dirty="0"/>
           </a:p>
@@ -7262,7 +7136,7 @@
                 <a:ea typeface="Arial" pitchFamily="34" charset="-122"/>
                 <a:cs typeface="Arial" pitchFamily="34" charset="-120"/>
               </a:rPr>
-              <a:t>Lenvatinib has higher hand-foot reactions.</a:t>
+              <a:t>Gastric parietal cell antibodies positive</a:t>
             </a:r>
             <a:endParaRPr lang="en-US" sz="1800" dirty="0"/>
           </a:p>
@@ -7283,7 +7157,7 @@
                 <a:ea typeface="Arial" pitchFamily="34" charset="-122"/>
                 <a:cs typeface="Arial" pitchFamily="34" charset="-120"/>
               </a:rPr>
-              <a:t>Bevacizumab has higher gastrointestinal risks.</a:t>
+              <a:t>Vit.B12 levels should be monitored</a:t>
             </a:r>
             <a:endParaRPr lang="en-US" sz="1800" dirty="0"/>
           </a:p>
@@ -7319,7 +7193,7 @@
                   <a:srgbClr val="888888"/>
                 </a:solidFill>
               </a:rPr>
-              <a:t>Wang Xiaoxia, Wang Shuo, Lu Jun et al.. Liver international : official journal of the International Association for the Study of the Liver. 2026-04-20 DOI: 10.1111/liv.70647</a:t>
+              <a:t>Sugimoto Takeshi, Kanemori Gen, Kanehira Hirohumi et al.. The American journal of case reports. 2026-05-10 DOI: 10.12659/AJCR.952800</a:t>
             </a:r>
             <a:endParaRPr lang="en-US" sz="800" dirty="0"/>
           </a:p>
@@ -7519,7 +7393,7 @@
                   </a:extLst>
                 </a:hlinkClick>
               </a:rPr>
-              <a:t>Low-Dose Bevacizumab Maintains Efficacy With Reduced Adverse Events in Liver Cancer.</a:t>
+              <a:t>Comparison of outcomes of second-line durvalumab plus tremelimumab versus lenvatinib following first-line atezolizumab plus bevacizumab in unresectable hepatocellular carcinoma.</a:t>
             </a:r>
             <a:endParaRPr lang="en-US" sz="2400" dirty="0"/>
           </a:p>
@@ -7555,7 +7429,7 @@
                   <a:srgbClr val="888888"/>
                 </a:solidFill>
               </a:rPr>
-              <a:t>Liver international : official journal of the International Association for the Study of the Liver  ·  IF 6.0  ·  Retrospective Study  ·  🌏 Asia</a:t>
+              <a:t>PloS one  ·  Retrospective Study  ·  🌏 Asia</a:t>
             </a:r>
             <a:endParaRPr lang="en-US" sz="1000" dirty="0"/>
           </a:p>
@@ -7598,7 +7472,7 @@
                 <a:ea typeface="Arial" pitchFamily="34" charset="-122"/>
                 <a:cs typeface="Arial" pitchFamily="34" charset="-120"/>
               </a:rPr>
-              <a:t>Low-dose bevacizumab effective in liver cancer</a:t>
+              <a:t>Durvalumab plus tremelimumab vs lenvatinib</a:t>
             </a:r>
             <a:endParaRPr lang="en-US" sz="1800" dirty="0"/>
           </a:p>
@@ -7619,7 +7493,7 @@
                 <a:ea typeface="Arial" pitchFamily="34" charset="-122"/>
                 <a:cs typeface="Arial" pitchFamily="34" charset="-120"/>
               </a:rPr>
-              <a:t>Reduced adverse events compared to standard dose</a:t>
+              <a:t>Lenvatinib shows superior PFS and OS</a:t>
             </a:r>
             <a:endParaRPr lang="en-US" sz="1800" dirty="0"/>
           </a:p>
@@ -7640,49 +7514,7 @@
                 <a:ea typeface="Arial" pitchFamily="34" charset="-122"/>
                 <a:cs typeface="Arial" pitchFamily="34" charset="-120"/>
               </a:rPr>
-              <a:t>Similar progression-free and overall survival rates</a:t>
-            </a:r>
-            <a:endParaRPr lang="en-US" sz="1800" dirty="0"/>
-          </a:p>
-          <a:p>
-            <a:pPr marL="342900" indent="-342900">
-              <a:spcAft>
-                <a:spcPts val="800"/>
-              </a:spcAft>
-              <a:buSzPct val="100000"/>
-              <a:buChar char="•"/>
-            </a:pPr>
-            <a:r>
-              <a:rPr lang="en-US" sz="1800" dirty="0">
-                <a:solidFill>
-                  <a:srgbClr val="333333"/>
-                </a:solidFill>
-                <a:latin typeface="Arial" pitchFamily="34" charset="0"/>
-                <a:ea typeface="Arial" pitchFamily="34" charset="-122"/>
-                <a:cs typeface="Arial" pitchFamily="34" charset="-120"/>
-              </a:rPr>
-              <a:t>Lower incidence of low-grade toxicities observed</a:t>
-            </a:r>
-            <a:endParaRPr lang="en-US" sz="1800" dirty="0"/>
-          </a:p>
-          <a:p>
-            <a:pPr marL="342900" indent="-342900">
-              <a:spcAft>
-                <a:spcPts val="800"/>
-              </a:spcAft>
-              <a:buSzPct val="100000"/>
-              <a:buChar char="•"/>
-            </a:pPr>
-            <a:r>
-              <a:rPr lang="en-US" sz="1800" dirty="0">
-                <a:solidFill>
-                  <a:srgbClr val="333333"/>
-                </a:solidFill>
-                <a:latin typeface="Arial" pitchFamily="34" charset="0"/>
-                <a:ea typeface="Arial" pitchFamily="34" charset="-122"/>
-                <a:cs typeface="Arial" pitchFamily="34" charset="-120"/>
-              </a:rPr>
-              <a:t>Potential for improved treatment tolerability</a:t>
+              <a:t>Higher grade 3 AEs with lenvatinib</a:t>
             </a:r>
             <a:endParaRPr lang="en-US" sz="1800" dirty="0"/>
           </a:p>
@@ -7718,7 +7550,7 @@
                   <a:srgbClr val="888888"/>
                 </a:solidFill>
               </a:rPr>
-              <a:t>Lin Po-Ting, Teng Wei, Hsieh Yi-Chung et al.. Liver international : official journal of the International Association for the Study of the Liver. 2026-03-28 DOI: 10.1111/liv.70617</a:t>
+              <a:t>Nishioka Chinatsu, Tahata Yuki, Maesaka Kazuki et al.. PloS one. 2026-05-07 DOI: 10.1371/journal.pone.0341395</a:t>
             </a:r>
             <a:endParaRPr lang="en-US" sz="800" dirty="0"/>
           </a:p>

--- a/docs/digest-en.pptx
+++ b/docs/digest-en.pptx
@@ -2269,7 +2269,7 @@
                   <a:srgbClr val="888888"/>
                 </a:solidFill>
               </a:rPr>
-              <a:t>2026-05-04 — 2026-05-11</a:t>
+              <a:t>2026-05-11 — 2026-05-18</a:t>
             </a:r>
             <a:endParaRPr lang="en-US" sz="1400" dirty="0"/>
           </a:p>
@@ -2460,7 +2460,7 @@
                   </a:extLst>
                 </a:hlinkClick>
               </a:rPr>
-              <a:t>Prognostic nutritional index and the survival of patients with hepatocellular carcinoma on immune checkpoint inhibitors: a meta-analysis</a:t>
+              <a:t>Second-Line TKI after First-Line Immunotherapy-based Treatment in Advanced HCC: Reconstructed IPD Meta-analysis.</a:t>
             </a:r>
             <a:endParaRPr lang="en-US" sz="2400" dirty="0"/>
           </a:p>
@@ -2496,7 +2496,7 @@
                   <a:srgbClr val="888888"/>
                 </a:solidFill>
               </a:rPr>
-              <a:t>BMC cancer  ·  Meta-Analysis</a:t>
+              <a:t>JHEP reports : innovation in hepatology  ·  IF 7.8  ·  Meta-Analysis</a:t>
             </a:r>
             <a:endParaRPr lang="en-US" sz="1000" dirty="0"/>
           </a:p>
@@ -2539,7 +2539,7 @@
                 <a:ea typeface="Arial" pitchFamily="34" charset="-122"/>
                 <a:cs typeface="Arial" pitchFamily="34" charset="-120"/>
               </a:rPr>
-              <a:t>Prognostic nutritional index (PNI) impacts survival.</a:t>
+              <a:t>Second-line TKIs after IO treatment analyzed.</a:t>
             </a:r>
             <a:endParaRPr lang="en-US" sz="1800" dirty="0"/>
           </a:p>
@@ -2560,7 +2560,7 @@
                 <a:ea typeface="Arial" pitchFamily="34" charset="-122"/>
                 <a:cs typeface="Arial" pitchFamily="34" charset="-120"/>
               </a:rPr>
-              <a:t>Meta-analysis of HCC patients on ICIs.</a:t>
+              <a:t>Lenvatinib and regorafenib showed better OS.</a:t>
             </a:r>
             <a:endParaRPr lang="en-US" sz="1800" dirty="0"/>
           </a:p>
@@ -2581,7 +2581,49 @@
                 <a:ea typeface="Arial" pitchFamily="34" charset="-122"/>
                 <a:cs typeface="Arial" pitchFamily="34" charset="-120"/>
               </a:rPr>
-              <a:t>Nutritional status correlates with immune response.</a:t>
+              <a:t>Median OS was 9.8 months for all patients.</a:t>
+            </a:r>
+            <a:endParaRPr lang="en-US" sz="1800" dirty="0"/>
+          </a:p>
+          <a:p>
+            <a:pPr marL="342900" indent="-342900">
+              <a:spcAft>
+                <a:spcPts val="800"/>
+              </a:spcAft>
+              <a:buSzPct val="100000"/>
+              <a:buChar char="•"/>
+            </a:pPr>
+            <a:r>
+              <a:rPr lang="en-US" sz="1800" dirty="0">
+                <a:solidFill>
+                  <a:srgbClr val="333333"/>
+                </a:solidFill>
+                <a:latin typeface="Arial" pitchFamily="34" charset="0"/>
+                <a:ea typeface="Arial" pitchFamily="34" charset="-122"/>
+                <a:cs typeface="Arial" pitchFamily="34" charset="-120"/>
+              </a:rPr>
+              <a:t>Heterogeneous survival outcomes observed.</a:t>
+            </a:r>
+            <a:endParaRPr lang="en-US" sz="1800" dirty="0"/>
+          </a:p>
+          <a:p>
+            <a:pPr marL="342900" indent="-342900">
+              <a:spcAft>
+                <a:spcPts val="800"/>
+              </a:spcAft>
+              <a:buSzPct val="100000"/>
+              <a:buChar char="•"/>
+            </a:pPr>
+            <a:r>
+              <a:rPr lang="en-US" sz="1800" dirty="0">
+                <a:solidFill>
+                  <a:srgbClr val="333333"/>
+                </a:solidFill>
+                <a:latin typeface="Arial" pitchFamily="34" charset="0"/>
+                <a:ea typeface="Arial" pitchFamily="34" charset="-122"/>
+                <a:cs typeface="Arial" pitchFamily="34" charset="-120"/>
+              </a:rPr>
+              <a:t>Need for prospective studies emphasized.</a:t>
             </a:r>
             <a:endParaRPr lang="en-US" sz="1800" dirty="0"/>
           </a:p>
@@ -2617,7 +2659,7 @@
                   <a:srgbClr val="888888"/>
                 </a:solidFill>
               </a:rPr>
-              <a:t>J Fu, W Peng, J Jiang. BMC cancer. 2026</a:t>
+              <a:t>Akkus Erman, Hobeika Christian, Edeline Julien et al.. JHEP reports : innovation in hepatology. 2026-05-13 DOI: 10.1016/j.jhepr.2026.101893</a:t>
             </a:r>
             <a:endParaRPr lang="en-US" sz="800" dirty="0"/>
           </a:p>
@@ -2817,7 +2859,7 @@
                   </a:extLst>
                 </a:hlinkClick>
               </a:rPr>
-              <a:t>Radiotherapy versus local ablation therapy for the treatment of hepatocellular carcinoma: A systematic review and meta-analysis.</a:t>
+              <a:t>Electronic symptom monitoring of patient-reported outcomes among patients with hepatocellular carcinoma during immunotherapy (PRIME-HCC): protocol for a randomised controlled trial.</a:t>
             </a:r>
             <a:endParaRPr lang="en-US" sz="2400" dirty="0"/>
           </a:p>
@@ -2853,7 +2895,7 @@
                   <a:srgbClr val="888888"/>
                 </a:solidFill>
               </a:rPr>
-              <a:t>Journal of Clinical …  ·  Meta-Analysis</a:t>
+              <a:t>BMJ open  ·  RCT</a:t>
             </a:r>
             <a:endParaRPr lang="en-US" sz="1000" dirty="0"/>
           </a:p>
@@ -2896,7 +2938,7 @@
                 <a:ea typeface="Arial" pitchFamily="34" charset="-122"/>
                 <a:cs typeface="Arial" pitchFamily="34" charset="-120"/>
               </a:rPr>
-              <a:t>Comparison of radiotherapy and local ablation</a:t>
+              <a:t>ePROs improve HRQoL in cancer patients.</a:t>
             </a:r>
             <a:endParaRPr lang="en-US" sz="1800" dirty="0"/>
           </a:p>
@@ -2917,7 +2959,7 @@
                 <a:ea typeface="Arial" pitchFamily="34" charset="-122"/>
                 <a:cs typeface="Arial" pitchFamily="34" charset="-120"/>
               </a:rPr>
-              <a:t>Focus on hepatocellular carcinoma treatment</a:t>
+              <a:t>Study evaluates ePROs in HCC immunotherapy.</a:t>
             </a:r>
             <a:endParaRPr lang="en-US" sz="1800" dirty="0"/>
           </a:p>
@@ -2938,7 +2980,7 @@
                 <a:ea typeface="Arial" pitchFamily="34" charset="-122"/>
                 <a:cs typeface="Arial" pitchFamily="34" charset="-120"/>
               </a:rPr>
-              <a:t>Assessment of local progression-free survival</a:t>
+              <a:t>Randomised trial with 238 HCC patients.</a:t>
             </a:r>
             <a:endParaRPr lang="en-US" sz="1800" dirty="0"/>
           </a:p>
@@ -2959,7 +3001,7 @@
                 <a:ea typeface="Arial" pitchFamily="34" charset="-122"/>
                 <a:cs typeface="Arial" pitchFamily="34" charset="-120"/>
               </a:rPr>
-              <a:t>Inclusion of radiofrequency and microwave ablation</a:t>
+              <a:t>Intervention includes WeChat-based symptom monitoring.</a:t>
             </a:r>
             <a:endParaRPr lang="en-US" sz="1800" dirty="0"/>
           </a:p>
@@ -2980,7 +3022,7 @@
                 <a:ea typeface="Arial" pitchFamily="34" charset="-122"/>
                 <a:cs typeface="Arial" pitchFamily="34" charset="-120"/>
               </a:rPr>
-              <a:t>Systematic review and meta-analysis conducted</a:t>
+              <a:t>Outcomes include HRQoL, survival, and feasibility.</a:t>
             </a:r>
             <a:endParaRPr lang="en-US" sz="1800" dirty="0"/>
           </a:p>
@@ -3016,7 +3058,7 @@
                   <a:srgbClr val="888888"/>
                 </a:solidFill>
               </a:rPr>
-              <a:t>SH Bae, SH Choi, SM Yoon. Journal of Clinical …. 2026</a:t>
+              <a:t>Xia Yiqi, Wei Xiaoping, Wang Yanshang et al.. BMJ open. 2026-05-11 DOI: 10.1136/bmjopen-2026-116199</a:t>
             </a:r>
             <a:endParaRPr lang="en-US" sz="800" dirty="0"/>
           </a:p>
@@ -3216,7 +3258,7 @@
                   </a:extLst>
                 </a:hlinkClick>
               </a:rPr>
-              <a:t>MCT8 Modulates Metabolite Uptake and T-cell Exhaustion to Promote Immunosuppression and Tumor Progression in Hepatocellular Carcinoma.</a:t>
+              <a:t>Plasma interleukin-8 as a predictive biomarker for tyrosine kinase inhibitor response in advanced hepatocellular carcinoma.</a:t>
             </a:r>
             <a:endParaRPr lang="en-US" sz="2400" dirty="0"/>
           </a:p>
@@ -3252,7 +3294,7 @@
                   <a:srgbClr val="888888"/>
                 </a:solidFill>
               </a:rPr>
-              <a:t>Molecular cancer therapeutics  ·  IF 5.6  ·  Basic Research</a:t>
+              <a:t>Discover oncology  ·  🌏 Asia</a:t>
             </a:r>
             <a:endParaRPr lang="en-US" sz="1000" dirty="0"/>
           </a:p>
@@ -3295,7 +3337,7 @@
                 <a:ea typeface="Arial" pitchFamily="34" charset="-122"/>
                 <a:cs typeface="Arial" pitchFamily="34" charset="-120"/>
               </a:rPr>
-              <a:t>MCT8 regulates T-cell function in HCC.</a:t>
+              <a:t>HCC is a leading cause of cancer death.</a:t>
             </a:r>
             <a:endParaRPr lang="en-US" sz="1800" dirty="0"/>
           </a:p>
@@ -3316,7 +3358,7 @@
                 <a:ea typeface="Arial" pitchFamily="34" charset="-122"/>
                 <a:cs typeface="Arial" pitchFamily="34" charset="-120"/>
               </a:rPr>
-              <a:t>SLC16A2 knockout reduces tumor growth.</a:t>
+              <a:t>TKIs are first-line for unsuitable patients.</a:t>
             </a:r>
             <a:endParaRPr lang="en-US" sz="1800" dirty="0"/>
           </a:p>
@@ -3337,7 +3379,49 @@
                 <a:ea typeface="Arial" pitchFamily="34" charset="-122"/>
                 <a:cs typeface="Arial" pitchFamily="34" charset="-120"/>
               </a:rPr>
-              <a:t>MCT8 mAb enhances CD8+ T-cell activity.</a:t>
+              <a:t>IL-8 levels predict TKI response and outcomes.</a:t>
+            </a:r>
+            <a:endParaRPr lang="en-US" sz="1800" dirty="0"/>
+          </a:p>
+          <a:p>
+            <a:pPr marL="342900" indent="-342900">
+              <a:spcAft>
+                <a:spcPts val="800"/>
+              </a:spcAft>
+              <a:buSzPct val="100000"/>
+              <a:buChar char="•"/>
+            </a:pPr>
+            <a:r>
+              <a:rPr lang="en-US" sz="1800" dirty="0">
+                <a:solidFill>
+                  <a:srgbClr val="333333"/>
+                </a:solidFill>
+                <a:latin typeface="Arial" pitchFamily="34" charset="0"/>
+                <a:ea typeface="Arial" pitchFamily="34" charset="-122"/>
+                <a:cs typeface="Arial" pitchFamily="34" charset="-120"/>
+              </a:rPr>
+              <a:t>Elevated IL-8 linked to poor survival rates.</a:t>
+            </a:r>
+            <a:endParaRPr lang="en-US" sz="1800" dirty="0"/>
+          </a:p>
+          <a:p>
+            <a:pPr marL="342900" indent="-342900">
+              <a:spcAft>
+                <a:spcPts val="800"/>
+              </a:spcAft>
+              <a:buSzPct val="100000"/>
+              <a:buChar char="•"/>
+            </a:pPr>
+            <a:r>
+              <a:rPr lang="en-US" sz="1800" dirty="0">
+                <a:solidFill>
+                  <a:srgbClr val="333333"/>
+                </a:solidFill>
+                <a:latin typeface="Arial" pitchFamily="34" charset="0"/>
+                <a:ea typeface="Arial" pitchFamily="34" charset="-122"/>
+                <a:cs typeface="Arial" pitchFamily="34" charset="-120"/>
+              </a:rPr>
+              <a:t>Study analyzed 60 advanced HCC patients.</a:t>
             </a:r>
             <a:endParaRPr lang="en-US" sz="1800" dirty="0"/>
           </a:p>
@@ -3373,7 +3457,7 @@
                   <a:srgbClr val="888888"/>
                 </a:solidFill>
               </a:rPr>
-              <a:t>Bi Bin, Tang Liqin, Liang Ranxi et al.. Molecular cancer therapeutics. 2026-05-04 DOI: 10.1158/1535-7163.MCT-25-0564</a:t>
+              <a:t>Kim Sujin, Ahn Hye Ri, Kim Hui Gyeong et al.. Discover oncology. 2026-05-11 DOI: 10.1007/s12672-026-05055-4</a:t>
             </a:r>
             <a:endParaRPr lang="en-US" sz="800" dirty="0"/>
           </a:p>
@@ -3590,7 +3674,7 @@
                   <a:srgbClr val="FFFFFF"/>
                 </a:solidFill>
               </a:rPr>
-              <a:t>1. **個體化治療的重要性 (Importance of Personalized Therapy)**  </a:t>
+              <a:t>1. **持久的抗腫瘤活性**  </a:t>
             </a:r>
             <a:endParaRPr lang="en-US" sz="1200" dirty="0"/>
           </a:p>
@@ -3607,7 +3691,7 @@
                   <a:srgbClr val="FFFFFF"/>
                 </a:solidFill>
               </a:rPr>
-              <a:t>   The studies emphasize the need for personalized treatment approaches in HCC, highlighting that standard dosing may not be effective for all patients due to variations in body composition and tumor microenvironment.  </a:t>
+              <a:t>   Pembrolizumab在治療經索拉非尼治療的晚期肝細胞癌患者中展現了持久的抗腫瘤活性，顯示其在長期療效方面的潛力。  </a:t>
             </a:r>
             <a:endParaRPr lang="en-US" sz="1200" dirty="0"/>
           </a:p>
@@ -3624,7 +3708,7 @@
                   <a:srgbClr val="FFFFFF"/>
                 </a:solidFill>
               </a:rPr>
-              <a:t>   研究強調在肝癌治療中個體化治療的重要性，指出標準劑量可能因患者體組成和腫瘤微環境的差異而無法有效。</a:t>
+              <a:t>   *Pembrolizumab demonstrated durable antitumor activity in advanced hepatocellular carcinoma (HCC) patients previously treated with sorafenib, highlighting its potential for long-term efficacy.*</a:t>
             </a:r>
             <a:endParaRPr lang="en-US" sz="1200" dirty="0"/>
           </a:p>
@@ -3650,7 +3734,7 @@
                   <a:srgbClr val="FFFFFF"/>
                 </a:solidFill>
               </a:rPr>
-              <a:t>2. **免疫微環境的重塑 (Reprogramming the Immune Microenvironment)**  </a:t>
+              <a:t>2. **免疫相關不良事件的預測能力**  </a:t>
             </a:r>
             <a:endParaRPr lang="en-US" sz="1200" dirty="0"/>
           </a:p>
@@ -3667,7 +3751,7 @@
                   <a:srgbClr val="FFFFFF"/>
                 </a:solidFill>
               </a:rPr>
-              <a:t>   Innovative strategies such as ISX-TWIST1 reprogramming show potential in reshaping the immune microenvironment, which is crucial for enhancing the efficacy of immunotherapies in HCC.  </a:t>
+              <a:t>   免疫檢查點抑制劑引發的免疫相關不良事件（irAEs）可能是肝移植後排斥反應的強烈預測因子，提示需謹慎監測這些事件。  </a:t>
             </a:r>
             <a:endParaRPr lang="en-US" sz="1200" dirty="0"/>
           </a:p>
@@ -3684,7 +3768,7 @@
                   <a:srgbClr val="FFFFFF"/>
                 </a:solidFill>
               </a:rPr>
-              <a:t>   創新策略如ISX-TWIST1重塑顯示出在改變免疫微環境方面的潛力，這對於提高肝癌免疫治療的療效至關重要。</a:t>
+              <a:t>   *Immune-related adverse events (irAEs) from immune checkpoint inhibitors may serve as potent predictors of post-transplant rejection in HCC, suggesting the need for careful monitoring of these events.*</a:t>
             </a:r>
             <a:endParaRPr lang="en-US" sz="1200" dirty="0"/>
           </a:p>
@@ -3710,7 +3794,7 @@
                   <a:srgbClr val="FFFFFF"/>
                 </a:solidFill>
               </a:rPr>
-              <a:t>3. **轉化療法的潛力 (Potential of Conversion Therapy)**  </a:t>
+              <a:t>3. **腫瘤微環境的挑戰**  </a:t>
             </a:r>
             <a:endParaRPr lang="en-US" sz="1200" dirty="0"/>
           </a:p>
@@ -3727,7 +3811,7 @@
                   <a:srgbClr val="FFFFFF"/>
                 </a:solidFill>
               </a:rPr>
-              <a:t>   The combination of PD-1 inhibitors with other therapies, such as lenvatinib and transarterial chemoembolization, suggests promising outcomes for patients with unresectable HCC, paving the way for sequential surgical options.  </a:t>
+              <a:t>   肝細胞癌的異質性和免疫抑制的腫瘤微環境對免疫治療反應產生負面影響，強調了針對腫瘤相關巨噬細胞的代謝調控的重要性。  </a:t>
             </a:r>
             <a:endParaRPr lang="en-US" sz="1200" dirty="0"/>
           </a:p>
@@ -3744,7 +3828,7 @@
                   <a:srgbClr val="FFFFFF"/>
                 </a:solidFill>
               </a:rPr>
-              <a:t>   PD-1抑制劑與其他療法（如lenvatinib和經動脈化療栓塞）的結合顯示出對於不可切除肝癌患者的良好預後，為後續的手術選擇鋪平了道路。</a:t>
+              <a:t>   *The heterogeneous and immunosuppressive tumor microenvironment in HCC negatively impacts immunotherapy responses, emphasizing the importance of metabolic regulation targeting tumor-associated macrophages.*</a:t>
             </a:r>
             <a:endParaRPr lang="en-US" sz="1200" dirty="0"/>
           </a:p>
@@ -3770,7 +3854,7 @@
                   <a:srgbClr val="FFFFFF"/>
                 </a:solidFill>
               </a:rPr>
-              <a:t>4. **預測性平台的需求 (Need for Predictive Platforms)**  </a:t>
+              <a:t>4. **局部消融的潛在角色**  </a:t>
             </a:r>
             <a:endParaRPr lang="en-US" sz="1200" dirty="0"/>
           </a:p>
@@ -3787,7 +3871,7 @@
                   <a:srgbClr val="FFFFFF"/>
                 </a:solidFill>
               </a:rPr>
-              <a:t>   The development of patient-derived organotypic tumor spheroids as functional platforms is crucial for predicting individual responses to immunotherapy, which can guide precision treatment strategies.  </a:t>
+              <a:t>   在初始疾病控制後，局部消融療法在無法切除的肝細胞癌患者中可能是一個有效的救援策略，值得進一步研究。  </a:t>
             </a:r>
             <a:endParaRPr lang="en-US" sz="1200" dirty="0"/>
           </a:p>
@@ -3804,7 +3888,7 @@
                   <a:srgbClr val="FFFFFF"/>
                 </a:solidFill>
               </a:rPr>
-              <a:t>   開發患者衍生的有機腫瘤球體作為功能平台對於預測個體對免疫治療的反應至關重要，這可以指導精準治療策略。</a:t>
+              <a:t>   *Ablation therapy may serve as an effective salvage strategy in patients with unresectable HCC after initial disease control, warranting further investigation.*</a:t>
             </a:r>
             <a:endParaRPr lang="en-US" sz="1200" dirty="0"/>
           </a:p>
@@ -3830,7 +3914,7 @@
                   <a:srgbClr val="FFFFFF"/>
                 </a:solidFill>
               </a:rPr>
-              <a:t>5. **營養指數與生存率的關聯 (Association of Nutritional Index with Survival)**  </a:t>
+              <a:t>5. **新療法的組合策略**  </a:t>
             </a:r>
             <a:endParaRPr lang="en-US" sz="1200" dirty="0"/>
           </a:p>
@@ -3847,7 +3931,24 @@
                   <a:srgbClr val="FFFFFF"/>
                 </a:solidFill>
               </a:rPr>
-              <a:t>   The prognostic nutritional index emerges as a significant factor influencing survival in HCC patients undergoing immune checkpoint inhibitor therapy, indicating the importance of nutritional status in treatment outcomes.</a:t>
+              <a:t>   結合肝動脈灌注化療、lenvatinib和PD-L1抑制劑的策略顯示出在無法切除的肝細胞癌中的潛在療效，提示需探索多種治療組合的可能性。  </a:t>
+            </a:r>
+            <a:endParaRPr lang="en-US" sz="1200" dirty="0"/>
+          </a:p>
+          <a:p>
+            <a:pPr indent="0" marL="0">
+              <a:lnSpc>
+                <a:spcPct val="150000"/>
+              </a:lnSpc>
+              <a:buNone/>
+            </a:pPr>
+            <a:r>
+              <a:rPr lang="en-US" sz="1200" dirty="0">
+                <a:solidFill>
+                  <a:srgbClr val="FFFFFF"/>
+                </a:solidFill>
+              </a:rPr>
+              <a:t>   *Combination strategies of hepatic arterial infusion chemotherapy with lenvatinib and PD-L1 inhibitors show potential efficacy in unresectable HCC, indicating the need to explore various treatment combinations.*</a:t>
             </a:r>
             <a:endParaRPr lang="en-US" sz="1200" dirty="0"/>
           </a:p>
@@ -3993,7 +4094,7 @@
                   <a:srgbClr val="FFFFFF"/>
                 </a:solidFill>
               </a:rPr>
-              <a:t>預後營養指數成為影響接受免疫檢查點抑制劑治療的肝癌患者生存率的重要因素，顯示出營養狀態對治療結果的重要性。</a:t>
+              <a:t>### 未來研究方向 (Future Research Directions)</a:t>
             </a:r>
             <a:endParaRPr lang="en-US" sz="1200" dirty="0"/>
           </a:p>
@@ -4019,7 +4120,7 @@
                   <a:srgbClr val="FFFFFF"/>
                 </a:solidFill>
               </a:rPr>
-              <a:t>### 未來研究方向 (Future Research Directions)</a:t>
+              <a:t>1. **長期療效的評估**  </a:t>
             </a:r>
             <a:endParaRPr lang="en-US" sz="1200" dirty="0"/>
           </a:p>
@@ -4030,6 +4131,14 @@
               </a:lnSpc>
               <a:buNone/>
             </a:pPr>
+            <a:r>
+              <a:rPr lang="en-US" sz="1200" dirty="0">
+                <a:solidFill>
+                  <a:srgbClr val="FFFFFF"/>
+                </a:solidFill>
+              </a:rPr>
+              <a:t>   需要進一步的長期隨訪研究，以評估免疫治療在不同階段肝細胞癌患者中的持久療效和安全性。  </a:t>
+            </a:r>
             <a:endParaRPr lang="en-US" sz="1200" dirty="0"/>
           </a:p>
           <a:p>
@@ -4045,7 +4154,7 @@
                   <a:srgbClr val="FFFFFF"/>
                 </a:solidFill>
               </a:rPr>
-              <a:t>1. **探索個體化劑量調整 (Exploration of Personalized Dosage Adjustments)**  </a:t>
+              <a:t>   *Further long-term follow-up studies are needed to assess the durability and safety of immunotherapy in patients with hepatocellular carcinoma at various stages.*</a:t>
             </a:r>
             <a:endParaRPr lang="en-US" sz="1200" dirty="0"/>
           </a:p>
@@ -4056,14 +4165,6 @@
               </a:lnSpc>
               <a:buNone/>
             </a:pPr>
-            <a:r>
-              <a:rPr lang="en-US" sz="1200" dirty="0">
-                <a:solidFill>
-                  <a:srgbClr val="FFFFFF"/>
-                </a:solidFill>
-              </a:rPr>
-              <a:t>   Future studies should focus on optimizing bevacizumab dosing based on body surface area and composition to improve therapeutic outcomes in HCC patients.  </a:t>
-            </a:r>
             <a:endParaRPr lang="en-US" sz="1200" dirty="0"/>
           </a:p>
           <a:p>
@@ -4079,7 +4180,7 @@
                   <a:srgbClr val="FFFFFF"/>
                 </a:solidFill>
               </a:rPr>
-              <a:t>   未來研究應專注於根據體表面積和組成優化bevacizumab劑量，以改善肝癌患者的治療效果。</a:t>
+              <a:t>2. **免疫相關不良事件的機制研究**  </a:t>
             </a:r>
             <a:endParaRPr lang="en-US" sz="1200" dirty="0"/>
           </a:p>
@@ -4090,6 +4191,14 @@
               </a:lnSpc>
               <a:buNone/>
             </a:pPr>
+            <a:r>
+              <a:rPr lang="en-US" sz="1200" dirty="0">
+                <a:solidFill>
+                  <a:srgbClr val="FFFFFF"/>
+                </a:solidFill>
+              </a:rPr>
+              <a:t>   探索免疫相關不良事件的生物學機制，以改善治療策略並降低排斥反應的風險。  </a:t>
+            </a:r>
             <a:endParaRPr lang="en-US" sz="1200" dirty="0"/>
           </a:p>
           <a:p>
@@ -4105,7 +4214,7 @@
                   <a:srgbClr val="FFFFFF"/>
                 </a:solidFill>
               </a:rPr>
-              <a:t>2. **深化免疫微環境研究 (Deepening Research on Immune Microenvironment)**  </a:t>
+              <a:t>   *Investigating the biological mechanisms of immune-related adverse events could improve treatment strategies and reduce the risk of rejection.*</a:t>
             </a:r>
             <a:endParaRPr lang="en-US" sz="1200" dirty="0"/>
           </a:p>
@@ -4116,14 +4225,6 @@
               </a:lnSpc>
               <a:buNone/>
             </a:pPr>
-            <a:r>
-              <a:rPr lang="en-US" sz="1200" dirty="0">
-                <a:solidFill>
-                  <a:srgbClr val="FFFFFF"/>
-                </a:solidFill>
-              </a:rPr>
-              <a:t>   Investigating the mechanisms by which therapies like ISX-TWIST1 modify the immune microenvironment could provide insights into enhancing immunotherapy efficacy.  </a:t>
-            </a:r>
             <a:endParaRPr lang="en-US" sz="1200" dirty="0"/>
           </a:p>
           <a:p>
@@ -4139,7 +4240,7 @@
                   <a:srgbClr val="FFFFFF"/>
                 </a:solidFill>
               </a:rPr>
-              <a:t>   研究如ISX-TWIST1等療法改變免疫微環境的機制，可能為提高免疫治療的療效提供見解。</a:t>
+              <a:t>3. **腫瘤微環境的調控**  </a:t>
             </a:r>
             <a:endParaRPr lang="en-US" sz="1200" dirty="0"/>
           </a:p>
@@ -4150,6 +4251,14 @@
               </a:lnSpc>
               <a:buNone/>
             </a:pPr>
+            <a:r>
+              <a:rPr lang="en-US" sz="1200" dirty="0">
+                <a:solidFill>
+                  <a:srgbClr val="FFFFFF"/>
+                </a:solidFill>
+              </a:rPr>
+              <a:t>   研究針對腫瘤微環境的干預措施，以克服免疫抑制並提高免疫治療的療效。  </a:t>
+            </a:r>
             <a:endParaRPr lang="en-US" sz="1200" dirty="0"/>
           </a:p>
           <a:p>
@@ -4165,7 +4274,7 @@
                   <a:srgbClr val="FFFFFF"/>
                 </a:solidFill>
               </a:rPr>
-              <a:t>3. **開發新型預測工具 (Development of Novel Predictive Tools)**  </a:t>
+              <a:t>   *Researching interventions targeting the tumor microenvironment could overcome immunosuppression and enhance the efficacy of immunotherapy.*</a:t>
             </a:r>
             <a:endParaRPr lang="en-US" sz="1200" dirty="0"/>
           </a:p>
@@ -4176,14 +4285,6 @@
               </a:lnSpc>
               <a:buNone/>
             </a:pPr>
-            <a:r>
-              <a:rPr lang="en-US" sz="1200" dirty="0">
-                <a:solidFill>
-                  <a:srgbClr val="FFFFFF"/>
-                </a:solidFill>
-              </a:rPr>
-              <a:t>   Creating advanced predictive models and platforms that incorporate genetic, metabolic, and immunological factors will be essential for tailoring HCC treatments.  </a:t>
-            </a:r>
             <a:endParaRPr lang="en-US" sz="1200" dirty="0"/>
           </a:p>
           <a:p>
@@ -4199,7 +4300,7 @@
                   <a:srgbClr val="FFFFFF"/>
                 </a:solidFill>
               </a:rPr>
-              <a:t>   創建包含遺傳、代謝和免疫因素的先進預測模型和平台將對於量身定制肝癌治療至關重要。</a:t>
+              <a:t>4. **局部消融與系統治療的整合**  </a:t>
             </a:r>
             <a:endParaRPr lang="en-US" sz="1200" dirty="0"/>
           </a:p>
@@ -4210,6 +4311,14 @@
               </a:lnSpc>
               <a:buNone/>
             </a:pPr>
+            <a:r>
+              <a:rPr lang="en-US" sz="1200" dirty="0">
+                <a:solidFill>
+                  <a:srgbClr val="FFFFFF"/>
+                </a:solidFill>
+              </a:rPr>
+              <a:t>   評估局部消融療法與系統性治療的整合策略，以改善無法切除肝細胞癌患者的預後。  </a:t>
+            </a:r>
             <a:endParaRPr lang="en-US" sz="1200" dirty="0"/>
           </a:p>
           <a:p>
@@ -4225,7 +4334,7 @@
                   <a:srgbClr val="FFFFFF"/>
                 </a:solidFill>
               </a:rPr>
-              <a:t>4. **評估營養介入的影響 (Assessing the Impact of Nutritional Interventions)**  </a:t>
+              <a:t>   *Evaluating integrated strategies of ablation therapy with systemic treatments could improve outcomes for patients with unresectable HCC.*</a:t>
             </a:r>
             <a:endParaRPr lang="en-US" sz="1200" dirty="0"/>
           </a:p>
@@ -4236,14 +4345,6 @@
               </a:lnSpc>
               <a:buNone/>
             </a:pPr>
-            <a:r>
-              <a:rPr lang="en-US" sz="1200" dirty="0">
-                <a:solidFill>
-                  <a:srgbClr val="FFFFFF"/>
-                </a:solidFill>
-              </a:rPr>
-              <a:t>   Future research should evaluate the role of nutritional interventions in conjunction with immunotherapy to enhance patient outcomes in HCC.  </a:t>
-            </a:r>
             <a:endParaRPr lang="en-US" sz="1200" dirty="0"/>
           </a:p>
           <a:p>
@@ -4259,7 +4360,7 @@
                   <a:srgbClr val="FFFFFF"/>
                 </a:solidFill>
               </a:rPr>
-              <a:t>   未來研究應評估營養介入與免疫治療結合的作用，以提高肝癌患者的療效。</a:t>
+              <a:t>5. **新型生物標記的發現**  </a:t>
             </a:r>
             <a:endParaRPr lang="en-US" sz="1200" dirty="0"/>
           </a:p>
@@ -4270,6 +4371,14 @@
               </a:lnSpc>
               <a:buNone/>
             </a:pPr>
+            <a:r>
+              <a:rPr lang="en-US" sz="1200" dirty="0">
+                <a:solidFill>
+                  <a:srgbClr val="FFFFFF"/>
+                </a:solidFill>
+              </a:rPr>
+              <a:t>   開發新的生物標記以預測免疫治療和靶向治療的反應，從而個性化治療方案。  </a:t>
+            </a:r>
             <a:endParaRPr lang="en-US" sz="1200" dirty="0"/>
           </a:p>
           <a:p>
@@ -4285,41 +4394,7 @@
                   <a:srgbClr val="FFFFFF"/>
                 </a:solidFill>
               </a:rPr>
-              <a:t>5. **長期隨訪研究的必要性 (Need for Long-Term Follow-Up Studies)**  </a:t>
-            </a:r>
-            <a:endParaRPr lang="en-US" sz="1200" dirty="0"/>
-          </a:p>
-          <a:p>
-            <a:pPr indent="0" marL="0">
-              <a:lnSpc>
-                <a:spcPct val="150000"/>
-              </a:lnSpc>
-              <a:buNone/>
-            </a:pPr>
-            <a:r>
-              <a:rPr lang="en-US" sz="1200" dirty="0">
-                <a:solidFill>
-                  <a:srgbClr val="FFFFFF"/>
-                </a:solidFill>
-              </a:rPr>
-              <a:t>   Conducting long-term follow-up studies on patients receiving conversion therapies will help determine the durability of treatment responses and survival benefits.  </a:t>
-            </a:r>
-            <a:endParaRPr lang="en-US" sz="1200" dirty="0"/>
-          </a:p>
-          <a:p>
-            <a:pPr indent="0" marL="0">
-              <a:lnSpc>
-                <a:spcPct val="150000"/>
-              </a:lnSpc>
-              <a:buNone/>
-            </a:pPr>
-            <a:r>
-              <a:rPr lang="en-US" sz="1200" dirty="0">
-                <a:solidFill>
-                  <a:srgbClr val="FFFFFF"/>
-                </a:solidFill>
-              </a:rPr>
-              <a:t>   對接受轉化療法的患者進行長期隨訪研究將有助於確定治療反應的持久性和生存益處。</a:t>
+              <a:t>   *Developing new biomarkers to predict responses to immunotherapy and targeted therapies could facilitate personalized treatment approaches.*</a:t>
             </a:r>
             <a:endParaRPr lang="en-US" sz="1200" dirty="0"/>
           </a:p>
@@ -4553,7 +4628,7 @@
                 <a:ea typeface="Arial" pitchFamily="34" charset="-122"/>
                 <a:cs typeface="Arial" pitchFamily="34" charset="-120"/>
               </a:rPr>
-              <a:t>Optimizing bevacizumab exposure in atezolizumab-based therapy for unresectable h…</a:t>
+              <a:t>Pembrolizumab Monotherapy in Sorafenib-Treated and Treatment-Na&amp;#xef;ve Advanced…</a:t>
             </a:r>
             <a:endParaRPr lang="en-US" sz="1400" dirty="0"/>
           </a:p>
@@ -4590,7 +4665,7 @@
                 <a:ea typeface="Arial" pitchFamily="34" charset="-122"/>
                 <a:cs typeface="Arial" pitchFamily="34" charset="-120"/>
               </a:rPr>
-              <a:t>Patient-derived organotypic tumor spheroids as a functional platform for predict…</a:t>
+              <a:t>Immune-related adverse events are a potent predictor of post-transplant rejectio…</a:t>
             </a:r>
             <a:endParaRPr lang="en-US" sz="1400" dirty="0"/>
           </a:p>
@@ -4627,7 +4702,7 @@
                 <a:ea typeface="Arial" pitchFamily="34" charset="-122"/>
                 <a:cs typeface="Arial" pitchFamily="34" charset="-120"/>
               </a:rPr>
-              <a:t>Sintilimab (PD-1 inhibitor) plus lenvatinib as conversion therapy followed by se…</a:t>
+              <a:t>BCAT1 inhibits crotonate-related epigenetic modulation of metabolic genes in tum…</a:t>
             </a:r>
             <a:endParaRPr lang="en-US" sz="1400" dirty="0"/>
           </a:p>
@@ -4664,7 +4739,7 @@
                 <a:ea typeface="Arial" pitchFamily="34" charset="-122"/>
                 <a:cs typeface="Arial" pitchFamily="34" charset="-120"/>
               </a:rPr>
-              <a:t>ISX-TWIST1 reprograms CD47-inflammasome signaling to reshape the immune microenv…</a:t>
+              <a:t>Ablation-Based Salvage Strategy at Disease Progression After Initial Disease Con…</a:t>
             </a:r>
             <a:endParaRPr lang="en-US" sz="1400" dirty="0"/>
           </a:p>
@@ -4701,7 +4776,7 @@
                 <a:ea typeface="Arial" pitchFamily="34" charset="-122"/>
                 <a:cs typeface="Arial" pitchFamily="34" charset="-120"/>
               </a:rPr>
-              <a:t>… plus transarterial chemoembolization and PD-1 inhibitors as conversion therapi…</a:t>
+              <a:t>HILL: the efficacy and safety of hepatic arterial infusion chemotherapy with the…</a:t>
             </a:r>
             <a:endParaRPr lang="en-US" sz="1400" dirty="0"/>
           </a:p>
@@ -4738,7 +4813,7 @@
                 <a:ea typeface="Arial" pitchFamily="34" charset="-122"/>
                 <a:cs typeface="Arial" pitchFamily="34" charset="-120"/>
               </a:rPr>
-              <a:t>A Case of Pernicious Anemia Induced by Atezolizumab in Hepatocellular Carcinoma …</a:t>
+              <a:t>Immunotherapy in Hepatocellular Carcinoma with Portal Vein Tumour Thrombosis: Fr…</a:t>
             </a:r>
             <a:endParaRPr lang="en-US" sz="1400" dirty="0"/>
           </a:p>
@@ -4775,7 +4850,7 @@
                 <a:ea typeface="Arial" pitchFamily="34" charset="-122"/>
                 <a:cs typeface="Arial" pitchFamily="34" charset="-120"/>
               </a:rPr>
-              <a:t>Comparison of outcomes of second-line durvalumab plus tremelimumab versus lenvat…</a:t>
+              <a:t>… plus transarterial chemoembolization and PD-1 inhibitors as conversion therapi…</a:t>
             </a:r>
             <a:endParaRPr lang="en-US" sz="1400" dirty="0"/>
           </a:p>
@@ -4812,7 +4887,7 @@
                 <a:ea typeface="Arial" pitchFamily="34" charset="-122"/>
                 <a:cs typeface="Arial" pitchFamily="34" charset="-120"/>
               </a:rPr>
-              <a:t>Prognostic nutritional index and the survival of patients with hepatocellular ca…</a:t>
+              <a:t>Second-Line TKI after First-Line Immunotherapy-based Treatment in Advanced HCC: …</a:t>
             </a:r>
             <a:endParaRPr lang="en-US" sz="1400" dirty="0"/>
           </a:p>
@@ -4849,7 +4924,7 @@
                 <a:ea typeface="Arial" pitchFamily="34" charset="-122"/>
                 <a:cs typeface="Arial" pitchFamily="34" charset="-120"/>
               </a:rPr>
-              <a:t>Radiotherapy versus local ablation therapy for the treatment of hepatocellular c…</a:t>
+              <a:t>Electronic symptom monitoring of patient-reported outcomes among patients with h…</a:t>
             </a:r>
             <a:endParaRPr lang="en-US" sz="1400" dirty="0"/>
           </a:p>
@@ -4886,7 +4961,7 @@
                 <a:ea typeface="Arial" pitchFamily="34" charset="-122"/>
                 <a:cs typeface="Arial" pitchFamily="34" charset="-120"/>
               </a:rPr>
-              <a:t>MCT8 Modulates Metabolite Uptake and T-cell Exhaustion to Promote Immunosuppress…</a:t>
+              <a:t>Plasma interleukin-8 as a predictive biomarker for tyrosine kinase inhibitor res…</a:t>
             </a:r>
             <a:endParaRPr lang="en-US" sz="1400" dirty="0"/>
           </a:p>
@@ -5041,7 +5116,7 @@
                   </a:extLst>
                 </a:hlinkClick>
               </a:rPr>
-              <a:t>Optimizing bevacizumab exposure in atezolizumab-based therapy for unresectable hepatocellular carcinoma: A nationwide real-world study.</a:t>
+              <a:t>Pembrolizumab Monotherapy in Sorafenib-Treated and Treatment-Na&amp;#xef;ve Advanced Hepatocellular Carcinoma: Long-Term Follow-up of the Open-Label, Phase II KEYNOTE-224 Study.</a:t>
             </a:r>
             <a:endParaRPr lang="en-US" sz="2400" dirty="0"/>
           </a:p>
@@ -5077,7 +5152,7 @@
                   <a:srgbClr val="888888"/>
                 </a:solidFill>
               </a:rPr>
-              <a:t>Hepatology (Baltimore, Md.)  ·  IF 12.9  ·  Retrospective Study  ·  🌏 Asia</a:t>
+              <a:t>Clinical cancer research : an official journal of the American Association for Cancer Research  ·  IF 11.5  ·  RCT Phase 2  ·  🌏 Asia</a:t>
             </a:r>
             <a:endParaRPr lang="en-US" sz="1000" dirty="0"/>
           </a:p>
@@ -5120,7 +5195,7 @@
                 <a:ea typeface="Arial" pitchFamily="34" charset="-122"/>
                 <a:cs typeface="Arial" pitchFamily="34" charset="-120"/>
               </a:rPr>
-              <a:t>Study on bevacizumab dosing in HCC</a:t>
+              <a:t>Pembrolizumab shows durable antitumor activity.</a:t>
             </a:r>
             <a:endParaRPr lang="en-US" sz="1800" dirty="0"/>
           </a:p>
@@ -5141,7 +5216,7 @@
                 <a:ea typeface="Arial" pitchFamily="34" charset="-122"/>
                 <a:cs typeface="Arial" pitchFamily="34" charset="-120"/>
               </a:rPr>
-              <a:t>Optimal BBI range identified: 106-121%</a:t>
+              <a:t>Median OS: 13.2 months in cohort 1.</a:t>
             </a:r>
             <a:endParaRPr lang="en-US" sz="1800" dirty="0"/>
           </a:p>
@@ -5162,7 +5237,7 @@
                 <a:ea typeface="Arial" pitchFamily="34" charset="-122"/>
                 <a:cs typeface="Arial" pitchFamily="34" charset="-120"/>
               </a:rPr>
-              <a:t>Target group showed longer PFS and OS</a:t>
+              <a:t>Median PFS: 4.9 months in cohort 1.</a:t>
             </a:r>
             <a:endParaRPr lang="en-US" sz="1800" dirty="0"/>
           </a:p>
@@ -5183,7 +5258,7 @@
                 <a:ea typeface="Arial" pitchFamily="34" charset="-122"/>
                 <a:cs typeface="Arial" pitchFamily="34" charset="-120"/>
               </a:rPr>
-              <a:t>No increased toxicity with adjusted dosing</a:t>
+              <a:t>Long-term follow-up of ~7 years.</a:t>
             </a:r>
             <a:endParaRPr lang="en-US" sz="1800" dirty="0"/>
           </a:p>
@@ -5204,7 +5279,7 @@
                 <a:ea typeface="Arial" pitchFamily="34" charset="-122"/>
                 <a:cs typeface="Arial" pitchFamily="34" charset="-120"/>
               </a:rPr>
-              <a:t>Higher response rate in Target group</a:t>
+              <a:t>Manageable safety profile observed.</a:t>
             </a:r>
             <a:endParaRPr lang="en-US" sz="1800" dirty="0"/>
           </a:p>
@@ -5240,7 +5315,7 @@
                   <a:srgbClr val="888888"/>
                 </a:solidFill>
               </a:rPr>
-              <a:t>Aoe Kaho, Tada Toshifumi, Hiraoka Atsushi et al.. Hepatology (Baltimore, Md.). 2026-05-06 DOI: 10.1097/HEP.0000000000001781</a:t>
+              <a:t>Finn Richard S, Kudo Masatoshi, Borbath Ivan et al.. Clinical cancer research : an official journal of the American Association for Cancer Research. 2026-05-15 DOI: 10.1158/1078-0432.CCR-25-3528</a:t>
             </a:r>
             <a:endParaRPr lang="en-US" sz="800" dirty="0"/>
           </a:p>
@@ -5440,7 +5515,7 @@
                   </a:extLst>
                 </a:hlinkClick>
               </a:rPr>
-              <a:t>Patient-derived organotypic tumor spheroids as a functional platform for predicting immunotherapeutic responses and guiding precision treatment for hepatocellular carcinoma.</a:t>
+              <a:t>Immune-related adverse events are a potent predictor of post-transplant rejection in HCC: a multicentre retrospective cohort study.</a:t>
             </a:r>
             <a:endParaRPr lang="en-US" sz="2400" dirty="0"/>
           </a:p>
@@ -5476,7 +5551,7 @@
                   <a:srgbClr val="888888"/>
                 </a:solidFill>
               </a:rPr>
-              <a:t>Journal for immunotherapy of cancer  ·  IF 10.9  ·  Basic Research</a:t>
+              <a:t>Gut  ·  IF 24.5  ·  Retrospective Study</a:t>
             </a:r>
             <a:endParaRPr lang="en-US" sz="1000" dirty="0"/>
           </a:p>
@@ -5519,7 +5594,7 @@
                 <a:ea typeface="Arial" pitchFamily="34" charset="-122"/>
                 <a:cs typeface="Arial" pitchFamily="34" charset="-120"/>
               </a:rPr>
-              <a:t>Developed patient-derived organotypic tumor spheroids (PDOTS)</a:t>
+              <a:t>ICIs increase rejection risk post-transplant.</a:t>
             </a:r>
             <a:endParaRPr lang="en-US" sz="1800" dirty="0"/>
           </a:p>
@@ -5540,7 +5615,7 @@
                 <a:ea typeface="Arial" pitchFamily="34" charset="-122"/>
                 <a:cs typeface="Arial" pitchFamily="34" charset="-120"/>
               </a:rPr>
-              <a:t>PDOTS model preserves HCC heterogeneity and immune microenvironment</a:t>
+              <a:t>irAEs strongly predict post-transplant rejection.</a:t>
             </a:r>
             <a:endParaRPr lang="en-US" sz="1800" dirty="0"/>
           </a:p>
@@ -5561,49 +5636,7 @@
                 <a:ea typeface="Arial" pitchFamily="34" charset="-122"/>
                 <a:cs typeface="Arial" pitchFamily="34" charset="-120"/>
               </a:rPr>
-              <a:t>Achieved 80% concordance in predicting treatment responses</a:t>
-            </a:r>
-            <a:endParaRPr lang="en-US" sz="1800" dirty="0"/>
-          </a:p>
-          <a:p>
-            <a:pPr marL="342900" indent="-342900">
-              <a:spcAft>
-                <a:spcPts val="800"/>
-              </a:spcAft>
-              <a:buSzPct val="100000"/>
-              <a:buChar char="•"/>
-            </a:pPr>
-            <a:r>
-              <a:rPr lang="en-US" sz="1800" dirty="0">
-                <a:solidFill>
-                  <a:srgbClr val="333333"/>
-                </a:solidFill>
-                <a:latin typeface="Arial" pitchFamily="34" charset="0"/>
-                <a:ea typeface="Arial" pitchFamily="34" charset="-122"/>
-                <a:cs typeface="Arial" pitchFamily="34" charset="-120"/>
-              </a:rPr>
-              <a:t>Identified 'Organoid Killing Index' for treatment sensitivity</a:t>
-            </a:r>
-            <a:endParaRPr lang="en-US" sz="1800" dirty="0"/>
-          </a:p>
-          <a:p>
-            <a:pPr marL="342900" indent="-342900">
-              <a:spcAft>
-                <a:spcPts val="800"/>
-              </a:spcAft>
-              <a:buSzPct val="100000"/>
-              <a:buChar char="•"/>
-            </a:pPr>
-            <a:r>
-              <a:rPr lang="en-US" sz="1800" dirty="0">
-                <a:solidFill>
-                  <a:srgbClr val="333333"/>
-                </a:solidFill>
-                <a:latin typeface="Arial" pitchFamily="34" charset="0"/>
-                <a:ea typeface="Arial" pitchFamily="34" charset="-122"/>
-                <a:cs typeface="Arial" pitchFamily="34" charset="-120"/>
-              </a:rPr>
-              <a:t>Supports individualized immunotherapy for HCC patients</a:t>
+              <a:t>Predictive model achieved AUC of 0.788.</a:t>
             </a:r>
             <a:endParaRPr lang="en-US" sz="1800" dirty="0"/>
           </a:p>
@@ -5639,7 +5672,7 @@
                   <a:srgbClr val="888888"/>
                 </a:solidFill>
               </a:rPr>
-              <a:t>Song Fei, Lu Yi-Jun, Sun Hai-Xiang et al.. Journal for immunotherapy of cancer. 2026-05-04 DOI: 10.1136/jitc-2025-014555</a:t>
+              <a:t>Fang Jun, Zhong Siyi, Wang Tielong et al.. Gut. 2026-05-12 DOI: 10.1136/gutjnl-2025-336719</a:t>
             </a:r>
             <a:endParaRPr lang="en-US" sz="800" dirty="0"/>
           </a:p>
@@ -5839,7 +5872,7 @@
                   </a:extLst>
                 </a:hlinkClick>
               </a:rPr>
-              <a:t>Sintilimab (PD-1 inhibitor) plus lenvatinib as conversion therapy followed by sequential surgery (SILENSES) for advanced unresectable hepatocellular carcinoma: a phase II, expansion trial.</a:t>
+              <a:t>BCAT1 inhibits crotonate-related epigenetic modulation of metabolic genes in tumor-associated macrophages to counter immunosuppression.</a:t>
             </a:r>
             <a:endParaRPr lang="en-US" sz="2400" dirty="0"/>
           </a:p>
@@ -5875,7 +5908,7 @@
                   <a:srgbClr val="888888"/>
                 </a:solidFill>
               </a:rPr>
-              <a:t>Signal transduction and targeted therapy  ·  RCT Phase 2</a:t>
+              <a:t>Nature communications  ·  IF 14.7  ·  Basic Research</a:t>
             </a:r>
             <a:endParaRPr lang="en-US" sz="1000" dirty="0"/>
           </a:p>
@@ -5918,7 +5951,7 @@
                 <a:ea typeface="Arial" pitchFamily="34" charset="-122"/>
                 <a:cs typeface="Arial" pitchFamily="34" charset="-120"/>
               </a:rPr>
-              <a:t>Sintilimab-lenvatinib shows promising antitumor activity.</a:t>
+              <a:t>BCAT1 acts as a metabolic checkpoint in TAMs.</a:t>
             </a:r>
             <a:endParaRPr lang="en-US" sz="1800" dirty="0"/>
           </a:p>
@@ -5939,7 +5972,7 @@
                 <a:ea typeface="Arial" pitchFamily="34" charset="-122"/>
                 <a:cs typeface="Arial" pitchFamily="34" charset="-120"/>
               </a:rPr>
-              <a:t>56% conversion rate in unresectable HCC patients.</a:t>
+              <a:t>BCAT1 deficiency increases crotonate and immunosuppression.</a:t>
             </a:r>
             <a:endParaRPr lang="en-US" sz="1800" dirty="0"/>
           </a:p>
@@ -5960,7 +5993,7 @@
                 <a:ea typeface="Arial" pitchFamily="34" charset="-122"/>
                 <a:cs typeface="Arial" pitchFamily="34" charset="-120"/>
               </a:rPr>
-              <a:t>Median overall survival of 36 months reported.</a:t>
+              <a:t>BCAT1+ macrophages enhance antitumor immunity.</a:t>
             </a:r>
             <a:endParaRPr lang="en-US" sz="1800" dirty="0"/>
           </a:p>
@@ -5981,7 +6014,7 @@
                 <a:ea typeface="Arial" pitchFamily="34" charset="-122"/>
                 <a:cs typeface="Arial" pitchFamily="34" charset="-120"/>
               </a:rPr>
-              <a:t>73.9% five-year survival after surgical resection.</a:t>
+              <a:t>Myeloid BCAT1 overexpression improves anti-PD1 therapy.</a:t>
             </a:r>
             <a:endParaRPr lang="en-US" sz="1800" dirty="0"/>
           </a:p>
@@ -6002,7 +6035,7 @@
                 <a:ea typeface="Arial" pitchFamily="34" charset="-122"/>
                 <a:cs typeface="Arial" pitchFamily="34" charset="-120"/>
               </a:rPr>
-              <a:t>31% experienced grade ≥3 adverse events.</a:t>
+              <a:t>Targeting BCAT1 may enhance immunotherapy responses.</a:t>
             </a:r>
             <a:endParaRPr lang="en-US" sz="1800" dirty="0"/>
           </a:p>
@@ -6038,7 +6071,7 @@
                   <a:srgbClr val="888888"/>
                 </a:solidFill>
               </a:rPr>
-              <a:t>Lu Shichun, Zhang Wenwen, Li Junfeng et al.. Signal transduction and targeted therapy. 2026-05-06 DOI: 10.1038/s41392-026-02708-2</a:t>
+              <a:t>Zhang Weizhi, Liang Shuhang, Han Sitao et al.. Nature communications. 2026-05-11 DOI: 10.1038/s41467-026-72814-w</a:t>
             </a:r>
             <a:endParaRPr lang="en-US" sz="800" dirty="0"/>
           </a:p>
@@ -6238,7 +6271,7 @@
                   </a:extLst>
                 </a:hlinkClick>
               </a:rPr>
-              <a:t>ISX-TWIST1 reprograms CD47-inflammasome signaling to reshape the immune microenvironment in liver cancer.</a:t>
+              <a:t>Ablation-Based Salvage Strategy at Disease Progression After Initial Disease Control With Atezolizumab/Bevacizumab in Hepatocellular Carcinoma.</a:t>
             </a:r>
             <a:endParaRPr lang="en-US" sz="2400" dirty="0"/>
           </a:p>
@@ -6274,7 +6307,7 @@
                   <a:srgbClr val="888888"/>
                 </a:solidFill>
               </a:rPr>
-              <a:t>Experimental hematology &amp; oncology  ·  Basic Research  ·  🌏 Asia</a:t>
+              <a:t>Hepatology research : the official journal of the Japan Society of Hepatology  ·  Prospective Study  ·  🌏 Asia</a:t>
             </a:r>
             <a:endParaRPr lang="en-US" sz="1000" dirty="0"/>
           </a:p>
@@ -6317,7 +6350,7 @@
                 <a:ea typeface="Arial" pitchFamily="34" charset="-122"/>
                 <a:cs typeface="Arial" pitchFamily="34" charset="-120"/>
               </a:rPr>
-              <a:t>ISX links CD47 signaling and inflammasomes.</a:t>
+              <a:t>Atez/Bev leads to disease control.</a:t>
             </a:r>
             <a:endParaRPr lang="en-US" sz="1800" dirty="0"/>
           </a:p>
@@ -6338,7 +6371,7 @@
                 <a:ea typeface="Arial" pitchFamily="34" charset="-122"/>
                 <a:cs typeface="Arial" pitchFamily="34" charset="-120"/>
               </a:rPr>
-              <a:t>Elevated CD47 promotes M2 macrophage polarization.</a:t>
+              <a:t>Ablation considered post-progression.</a:t>
             </a:r>
             <a:endParaRPr lang="en-US" sz="1800" dirty="0"/>
           </a:p>
@@ -6359,7 +6392,49 @@
                 <a:ea typeface="Arial" pitchFamily="34" charset="-122"/>
                 <a:cs typeface="Arial" pitchFamily="34" charset="-120"/>
               </a:rPr>
-              <a:t>Eliminating M2-like macrophages halts disease progression.</a:t>
+              <a:t>Ablation group had longer PPS.</a:t>
+            </a:r>
+            <a:endParaRPr lang="en-US" sz="1800" dirty="0"/>
+          </a:p>
+          <a:p>
+            <a:pPr marL="342900" indent="-342900">
+              <a:spcAft>
+                <a:spcPts val="800"/>
+              </a:spcAft>
+              <a:buSzPct val="100000"/>
+              <a:buChar char="•"/>
+            </a:pPr>
+            <a:r>
+              <a:rPr lang="en-US" sz="1800" dirty="0">
+                <a:solidFill>
+                  <a:srgbClr val="333333"/>
+                </a:solidFill>
+                <a:latin typeface="Arial" pitchFamily="34" charset="0"/>
+                <a:ea typeface="Arial" pitchFamily="34" charset="-122"/>
+                <a:cs typeface="Arial" pitchFamily="34" charset="-120"/>
+              </a:rPr>
+              <a:t>OS showed trend favoring ablation.</a:t>
+            </a:r>
+            <a:endParaRPr lang="en-US" sz="1800" dirty="0"/>
+          </a:p>
+          <a:p>
+            <a:pPr marL="342900" indent="-342900">
+              <a:spcAft>
+                <a:spcPts val="800"/>
+              </a:spcAft>
+              <a:buSzPct val="100000"/>
+              <a:buChar char="•"/>
+            </a:pPr>
+            <a:r>
+              <a:rPr lang="en-US" sz="1800" dirty="0">
+                <a:solidFill>
+                  <a:srgbClr val="333333"/>
+                </a:solidFill>
+                <a:latin typeface="Arial" pitchFamily="34" charset="0"/>
+                <a:ea typeface="Arial" pitchFamily="34" charset="-122"/>
+                <a:cs typeface="Arial" pitchFamily="34" charset="-120"/>
+              </a:rPr>
+              <a:t>Further validation of findings needed.</a:t>
             </a:r>
             <a:endParaRPr lang="en-US" sz="1800" dirty="0"/>
           </a:p>
@@ -6395,7 +6470,7 @@
                   <a:srgbClr val="888888"/>
                 </a:solidFill>
               </a:rPr>
-              <a:t>Wang Li-Ting, Lin Ming-Hong, Li Yi-Chuan et al.. Experimental hematology &amp; oncology. 2026-05-04 DOI: 10.1186/s40164-026-00777-1</a:t>
+              <a:t>Kariyama Kazuya, Nouso Kazuhiro, Hiraoka Atsushi et al.. Hepatology research : the official journal of the Japan Society of Hepatology. 2026-05-11 DOI: 10.1111/hepr.70193</a:t>
             </a:r>
             <a:endParaRPr lang="en-US" sz="800" dirty="0"/>
           </a:p>
@@ -6595,7 +6670,7 @@
                   </a:extLst>
                 </a:hlinkClick>
               </a:rPr>
-              <a:t>… plus transarterial chemoembolization and PD-1 inhibitors as conversion therapies for unresectable intermediate-advanced hepatocellular carcinoma: a phase 2 trial …</a:t>
+              <a:t>HILL: the efficacy and safety of hepatic arterial infusion chemotherapy with the FOLFOX regimen combined with lenvatinib and the PD-L1 inhibitor durvalumab in unresectable hepatocellular carcinoma: a prospective, single-arm, phase 2 clinical trial.</a:t>
             </a:r>
             <a:endParaRPr lang="en-US" sz="2400" dirty="0"/>
           </a:p>
@@ -6631,7 +6706,7 @@
                   <a:srgbClr val="888888"/>
                 </a:solidFill>
               </a:rPr>
-              <a:t>… and Targeted Therapy  ·  RCT Phase 2</a:t>
+              <a:t>Signal transduction and targeted therapy  ·  RCT Phase 2</a:t>
             </a:r>
             <a:endParaRPr lang="en-US" sz="1000" dirty="0"/>
           </a:p>
@@ -6674,7 +6749,7 @@
                 <a:ea typeface="Arial" pitchFamily="34" charset="-122"/>
                 <a:cs typeface="Arial" pitchFamily="34" charset="-120"/>
               </a:rPr>
-              <a:t>Combination therapy for unresectable HCC</a:t>
+              <a:t>Study on uHCC treatment efficacy</a:t>
             </a:r>
             <a:endParaRPr lang="en-US" sz="1800" dirty="0"/>
           </a:p>
@@ -6695,7 +6770,7 @@
                 <a:ea typeface="Arial" pitchFamily="34" charset="-122"/>
                 <a:cs typeface="Arial" pitchFamily="34" charset="-120"/>
               </a:rPr>
-              <a:t>Transarterial chemoembolization (TACE) used</a:t>
+              <a:t>Triple-combination therapy: FOLFOX-HAIC, lenvatinib, durvalumab</a:t>
             </a:r>
             <a:endParaRPr lang="en-US" sz="1800" dirty="0"/>
           </a:p>
@@ -6716,7 +6791,7 @@
                 <a:ea typeface="Arial" pitchFamily="34" charset="-122"/>
                 <a:cs typeface="Arial" pitchFamily="34" charset="-120"/>
               </a:rPr>
-              <a:t>PD-1 inhibitors enhance treatment efficacy</a:t>
+              <a:t>Median PFS of 15.8 months achieved</a:t>
             </a:r>
             <a:endParaRPr lang="en-US" sz="1800" dirty="0"/>
           </a:p>
@@ -6737,7 +6812,7 @@
                 <a:ea typeface="Arial" pitchFamily="34" charset="-122"/>
                 <a:cs typeface="Arial" pitchFamily="34" charset="-120"/>
               </a:rPr>
-              <a:t>Phase 2 trial demonstrates promising results</a:t>
+              <a:t>Objective response rate of 75.0%</a:t>
             </a:r>
             <a:endParaRPr lang="en-US" sz="1800" dirty="0"/>
           </a:p>
@@ -6758,7 +6833,7 @@
                 <a:ea typeface="Arial" pitchFamily="34" charset="-122"/>
                 <a:cs typeface="Arial" pitchFamily="34" charset="-120"/>
               </a:rPr>
-              <a:t>Potential for conversion to resectable status</a:t>
+              <a:t>Safety profile shows mostly grade 1-2 events</a:t>
             </a:r>
             <a:endParaRPr lang="en-US" sz="1800" dirty="0"/>
           </a:p>
@@ -6794,7 +6869,7 @@
                   <a:srgbClr val="888888"/>
                 </a:solidFill>
               </a:rPr>
-              <a:t>X Zhang, H Cai, W Peng. … and Targeted Therapy. 2026</a:t>
+              <a:t>Li Shao-Hua, Zuo Zhi-Jun, Lu Liang-He et al.. Signal transduction and targeted therapy. 2026-05-14 DOI: 10.1038/s41392-026-02718-0</a:t>
             </a:r>
             <a:endParaRPr lang="en-US" sz="800" dirty="0"/>
           </a:p>
@@ -6994,7 +7069,7 @@
                   </a:extLst>
                 </a:hlinkClick>
               </a:rPr>
-              <a:t>A Case of Pernicious Anemia Induced by Atezolizumab in Hepatocellular Carcinoma and Renal Cell Carcinoma.</a:t>
+              <a:t>Immunotherapy in Hepatocellular Carcinoma with Portal Vein Tumour Thrombosis: From Poor Prognosis to Curative-Intent Strategies</a:t>
             </a:r>
             <a:endParaRPr lang="en-US" sz="2400" dirty="0"/>
           </a:p>
@@ -7030,7 +7105,7 @@
                   <a:srgbClr val="888888"/>
                 </a:solidFill>
               </a:rPr>
-              <a:t>The American journal of case reports  ·  Case Report  ·  🌏 Asia</a:t>
+              <a:t>…  ·  RCT Phase 2</a:t>
             </a:r>
             <a:endParaRPr lang="en-US" sz="1000" dirty="0"/>
           </a:p>
@@ -7073,7 +7148,7 @@
                 <a:ea typeface="Arial" pitchFamily="34" charset="-122"/>
                 <a:cs typeface="Arial" pitchFamily="34" charset="-120"/>
               </a:rPr>
-              <a:t>Pernicious anemia as an irAE from ICI</a:t>
+              <a:t>Phase II study on HCC with PVTT</a:t>
             </a:r>
             <a:endParaRPr lang="en-US" sz="1800" dirty="0"/>
           </a:p>
@@ -7094,7 +7169,7 @@
                 <a:ea typeface="Arial" pitchFamily="34" charset="-122"/>
                 <a:cs typeface="Arial" pitchFamily="34" charset="-120"/>
               </a:rPr>
-              <a:t>Case of 68-year-old man with HCC</a:t>
+              <a:t>HAIC combined with lenvatinib and PD-1</a:t>
             </a:r>
             <a:endParaRPr lang="en-US" sz="1800" dirty="0"/>
           </a:p>
@@ -7115,7 +7190,7 @@
                 <a:ea typeface="Arial" pitchFamily="34" charset="-122"/>
                 <a:cs typeface="Arial" pitchFamily="34" charset="-120"/>
               </a:rPr>
-              <a:t>Developed megaloblastic anemia post-atezolizumab</a:t>
+              <a:t>Improved outcomes compared to monotherapy</a:t>
             </a:r>
             <a:endParaRPr lang="en-US" sz="1800" dirty="0"/>
           </a:p>
@@ -7136,7 +7211,7 @@
                 <a:ea typeface="Arial" pitchFamily="34" charset="-122"/>
                 <a:cs typeface="Arial" pitchFamily="34" charset="-120"/>
               </a:rPr>
-              <a:t>Gastric parietal cell antibodies positive</a:t>
+              <a:t>Focus on curative-intent strategies</a:t>
             </a:r>
             <a:endParaRPr lang="en-US" sz="1800" dirty="0"/>
           </a:p>
@@ -7157,7 +7232,7 @@
                 <a:ea typeface="Arial" pitchFamily="34" charset="-122"/>
                 <a:cs typeface="Arial" pitchFamily="34" charset="-120"/>
               </a:rPr>
-              <a:t>Vit.B12 levels should be monitored</a:t>
+              <a:t>Potential for better prognosis</a:t>
             </a:r>
             <a:endParaRPr lang="en-US" sz="1800" dirty="0"/>
           </a:p>
@@ -7193,7 +7268,7 @@
                   <a:srgbClr val="888888"/>
                 </a:solidFill>
               </a:rPr>
-              <a:t>Sugimoto Takeshi, Kanemori Gen, Kanehira Hirohumi et al.. The American journal of case reports. 2026-05-10 DOI: 10.12659/AJCR.952800</a:t>
+              <a:t>L Marzi, R Sacco, L Siciliani. …. 2026</a:t>
             </a:r>
             <a:endParaRPr lang="en-US" sz="800" dirty="0"/>
           </a:p>
@@ -7393,7 +7468,7 @@
                   </a:extLst>
                 </a:hlinkClick>
               </a:rPr>
-              <a:t>Comparison of outcomes of second-line durvalumab plus tremelimumab versus lenvatinib following first-line atezolizumab plus bevacizumab in unresectable hepatocellular carcinoma.</a:t>
+              <a:t>… plus transarterial chemoembolization and PD-1 inhibitors as conversion therapies for unresectable intermediate-advanced hepatocellular carcinoma: a phase 2 trial …</a:t>
             </a:r>
             <a:endParaRPr lang="en-US" sz="2400" dirty="0"/>
           </a:p>
@@ -7429,7 +7504,7 @@
                   <a:srgbClr val="888888"/>
                 </a:solidFill>
               </a:rPr>
-              <a:t>PloS one  ·  Retrospective Study  ·  🌏 Asia</a:t>
+              <a:t>… and Targeted Therapy  ·  RCT Phase 2</a:t>
             </a:r>
             <a:endParaRPr lang="en-US" sz="1000" dirty="0"/>
           </a:p>
@@ -7472,7 +7547,7 @@
                 <a:ea typeface="Arial" pitchFamily="34" charset="-122"/>
                 <a:cs typeface="Arial" pitchFamily="34" charset="-120"/>
               </a:rPr>
-              <a:t>Durvalumab plus tremelimumab vs lenvatinib</a:t>
+              <a:t>Combination therapy for unresectable HCC</a:t>
             </a:r>
             <a:endParaRPr lang="en-US" sz="1800" dirty="0"/>
           </a:p>
@@ -7493,7 +7568,7 @@
                 <a:ea typeface="Arial" pitchFamily="34" charset="-122"/>
                 <a:cs typeface="Arial" pitchFamily="34" charset="-120"/>
               </a:rPr>
-              <a:t>Lenvatinib shows superior PFS and OS</a:t>
+              <a:t>Transarterial chemoembolization plus PD-1 inhibitors</a:t>
             </a:r>
             <a:endParaRPr lang="en-US" sz="1800" dirty="0"/>
           </a:p>
@@ -7514,7 +7589,7 @@
                 <a:ea typeface="Arial" pitchFamily="34" charset="-122"/>
                 <a:cs typeface="Arial" pitchFamily="34" charset="-120"/>
               </a:rPr>
-              <a:t>Higher grade 3 AEs with lenvatinib</a:t>
+              <a:t>Phase 2 trial shows promising results</a:t>
             </a:r>
             <a:endParaRPr lang="en-US" sz="1800" dirty="0"/>
           </a:p>
@@ -7550,7 +7625,7 @@
                   <a:srgbClr val="888888"/>
                 </a:solidFill>
               </a:rPr>
-              <a:t>Nishioka Chinatsu, Tahata Yuki, Maesaka Kazuki et al.. PloS one. 2026-05-07 DOI: 10.1371/journal.pone.0341395</a:t>
+              <a:t>X Zhang, H Cai, W Peng. … and Targeted Therapy. 2026</a:t>
             </a:r>
             <a:endParaRPr lang="en-US" sz="800" dirty="0"/>
           </a:p>

--- a/docs/digest-en.pptx
+++ b/docs/digest-en.pptx
@@ -2269,7 +2269,7 @@
                   <a:srgbClr val="888888"/>
                 </a:solidFill>
               </a:rPr>
-              <a:t>2026-05-11 — 2026-05-18</a:t>
+              <a:t>2026-05-18 — 2026-05-25</a:t>
             </a:r>
             <a:endParaRPr lang="en-US" sz="1400" dirty="0"/>
           </a:p>
@@ -2460,7 +2460,7 @@
                   </a:extLst>
                 </a:hlinkClick>
               </a:rPr>
-              <a:t>Second-Line TKI after First-Line Immunotherapy-based Treatment in Advanced HCC: Reconstructed IPD Meta-analysis.</a:t>
+              <a:t>Breakthroughs in HBV-related HCC Therapy: The Unmatched Potential of Immune Checkpoint Inhibitors.</a:t>
             </a:r>
             <a:endParaRPr lang="en-US" sz="2400" dirty="0"/>
           </a:p>
@@ -2496,7 +2496,7 @@
                   <a:srgbClr val="888888"/>
                 </a:solidFill>
               </a:rPr>
-              <a:t>JHEP reports : innovation in hepatology  ·  IF 7.8  ·  Meta-Analysis</a:t>
+              <a:t>Current treatment options in oncology  ·  Review  ·  🌏 Asia</a:t>
             </a:r>
             <a:endParaRPr lang="en-US" sz="1000" dirty="0"/>
           </a:p>
@@ -2539,7 +2539,7 @@
                 <a:ea typeface="Arial" pitchFamily="34" charset="-122"/>
                 <a:cs typeface="Arial" pitchFamily="34" charset="-120"/>
               </a:rPr>
-              <a:t>Second-line TKIs after IO treatment analyzed.</a:t>
+              <a:t>Immune checkpoint inhibitors reshape HCC therapy.</a:t>
             </a:r>
             <a:endParaRPr lang="en-US" sz="1800" dirty="0"/>
           </a:p>
@@ -2560,7 +2560,7 @@
                 <a:ea typeface="Arial" pitchFamily="34" charset="-122"/>
                 <a:cs typeface="Arial" pitchFamily="34" charset="-120"/>
               </a:rPr>
-              <a:t>Lenvatinib and regorafenib showed better OS.</a:t>
+              <a:t>Monotherapy benefits are currently limited.</a:t>
             </a:r>
             <a:endParaRPr lang="en-US" sz="1800" dirty="0"/>
           </a:p>
@@ -2581,7 +2581,7 @@
                 <a:ea typeface="Arial" pitchFamily="34" charset="-122"/>
                 <a:cs typeface="Arial" pitchFamily="34" charset="-120"/>
               </a:rPr>
-              <a:t>Median OS was 9.8 months for all patients.</a:t>
+              <a:t>HBV-HCC has a unique immunosuppressive environment.</a:t>
             </a:r>
             <a:endParaRPr lang="en-US" sz="1800" dirty="0"/>
           </a:p>
@@ -2602,7 +2602,7 @@
                 <a:ea typeface="Arial" pitchFamily="34" charset="-122"/>
                 <a:cs typeface="Arial" pitchFamily="34" charset="-120"/>
               </a:rPr>
-              <a:t>Heterogeneous survival outcomes observed.</a:t>
+              <a:t>Combination therapies may enhance treatment efficacy.</a:t>
             </a:r>
             <a:endParaRPr lang="en-US" sz="1800" dirty="0"/>
           </a:p>
@@ -2623,7 +2623,7 @@
                 <a:ea typeface="Arial" pitchFamily="34" charset="-122"/>
                 <a:cs typeface="Arial" pitchFamily="34" charset="-120"/>
               </a:rPr>
-              <a:t>Need for prospective studies emphasized.</a:t>
+              <a:t>Hepatitis B reactivation is manageable with antivirals.</a:t>
             </a:r>
             <a:endParaRPr lang="en-US" sz="1800" dirty="0"/>
           </a:p>
@@ -2659,7 +2659,7 @@
                   <a:srgbClr val="888888"/>
                 </a:solidFill>
               </a:rPr>
-              <a:t>Akkus Erman, Hobeika Christian, Edeline Julien et al.. JHEP reports : innovation in hepatology. 2026-05-13 DOI: 10.1016/j.jhepr.2026.101893</a:t>
+              <a:t>Liu Chenlu, Chang Le, Yan Ying et al.. Current treatment options in oncology. 2026-05-23 DOI: 10.1007/s11864-026-01395-z</a:t>
             </a:r>
             <a:endParaRPr lang="en-US" sz="800" dirty="0"/>
           </a:p>
@@ -2859,7 +2859,7 @@
                   </a:extLst>
                 </a:hlinkClick>
               </a:rPr>
-              <a:t>Electronic symptom monitoring of patient-reported outcomes among patients with hepatocellular carcinoma during immunotherapy (PRIME-HCC): protocol for a randomised controlled trial.</a:t>
+              <a:t>Machine learning based hepatic safety score predicts decompensation in hepatocellular carcinoma systemic therapy.</a:t>
             </a:r>
             <a:endParaRPr lang="en-US" sz="2400" dirty="0"/>
           </a:p>
@@ -2895,7 +2895,7 @@
                   <a:srgbClr val="888888"/>
                 </a:solidFill>
               </a:rPr>
-              <a:t>BMJ open  ·  RCT</a:t>
+              <a:t>NPJ digital medicine  ·  🌏 Asia</a:t>
             </a:r>
             <a:endParaRPr lang="en-US" sz="1000" dirty="0"/>
           </a:p>
@@ -2938,7 +2938,7 @@
                 <a:ea typeface="Arial" pitchFamily="34" charset="-122"/>
                 <a:cs typeface="Arial" pitchFamily="34" charset="-120"/>
               </a:rPr>
-              <a:t>ePROs improve HRQoL in cancer patients.</a:t>
+              <a:t>Developed machine learning hepatic safety score.</a:t>
             </a:r>
             <a:endParaRPr lang="en-US" sz="1800" dirty="0"/>
           </a:p>
@@ -2959,7 +2959,7 @@
                 <a:ea typeface="Arial" pitchFamily="34" charset="-122"/>
                 <a:cs typeface="Arial" pitchFamily="34" charset="-120"/>
               </a:rPr>
-              <a:t>Study evaluates ePROs in HCC immunotherapy.</a:t>
+              <a:t>Predicts decompensation and variceal bleeding.</a:t>
             </a:r>
             <a:endParaRPr lang="en-US" sz="1800" dirty="0"/>
           </a:p>
@@ -2980,7 +2980,7 @@
                 <a:ea typeface="Arial" pitchFamily="34" charset="-122"/>
                 <a:cs typeface="Arial" pitchFamily="34" charset="-120"/>
               </a:rPr>
-              <a:t>Randomised trial with 238 HCC patients.</a:t>
+              <a:t>High MHSS linked to increased risks.</a:t>
             </a:r>
             <a:endParaRPr lang="en-US" sz="1800" dirty="0"/>
           </a:p>
@@ -3001,7 +3001,7 @@
                 <a:ea typeface="Arial" pitchFamily="34" charset="-122"/>
                 <a:cs typeface="Arial" pitchFamily="34" charset="-120"/>
               </a:rPr>
-              <a:t>Intervention includes WeChat-based symptom monitoring.</a:t>
+              <a:t>Atezolizumab-bevacizumab shows mixed benefits.</a:t>
             </a:r>
             <a:endParaRPr lang="en-US" sz="1800" dirty="0"/>
           </a:p>
@@ -3022,7 +3022,7 @@
                 <a:ea typeface="Arial" pitchFamily="34" charset="-122"/>
                 <a:cs typeface="Arial" pitchFamily="34" charset="-120"/>
               </a:rPr>
-              <a:t>Outcomes include HRQoL, survival, and feasibility.</a:t>
+              <a:t>MHSS guides personalized treatment selection.</a:t>
             </a:r>
             <a:endParaRPr lang="en-US" sz="1800" dirty="0"/>
           </a:p>
@@ -3058,7 +3058,7 @@
                   <a:srgbClr val="888888"/>
                 </a:solidFill>
               </a:rPr>
-              <a:t>Xia Yiqi, Wei Xiaoping, Wang Yanshang et al.. BMJ open. 2026-05-11 DOI: 10.1136/bmjopen-2026-116199</a:t>
+              <a:t>Han Ji Won, Lee Jaejun, Yang Keungmo et al.. NPJ digital medicine. 2026-05-21 DOI: 10.1038/s41746-026-02802-3</a:t>
             </a:r>
             <a:endParaRPr lang="en-US" sz="800" dirty="0"/>
           </a:p>
@@ -3258,7 +3258,7 @@
                   </a:extLst>
                 </a:hlinkClick>
               </a:rPr>
-              <a:t>Plasma interleukin-8 as a predictive biomarker for tyrosine kinase inhibitor response in advanced hepatocellular carcinoma.</a:t>
+              <a:t>Less Is More: A Single-Dose, Non-Waiting Neoadjuvant Immunotherapy Strategy for Hepatocellular Carcinoma.</a:t>
             </a:r>
             <a:endParaRPr lang="en-US" sz="2400" dirty="0"/>
           </a:p>
@@ -3294,7 +3294,7 @@
                   <a:srgbClr val="888888"/>
                 </a:solidFill>
               </a:rPr>
-              <a:t>Discover oncology  ·  🌏 Asia</a:t>
+              <a:t>Biomedical journal  ·  🌏 Asia</a:t>
             </a:r>
             <a:endParaRPr lang="en-US" sz="1000" dirty="0"/>
           </a:p>
@@ -3337,7 +3337,7 @@
                 <a:ea typeface="Arial" pitchFamily="34" charset="-122"/>
                 <a:cs typeface="Arial" pitchFamily="34" charset="-120"/>
               </a:rPr>
-              <a:t>HCC is a leading cause of cancer death.</a:t>
+              <a:t>Neoadjuvant ICIs face unique challenges in HCC.</a:t>
             </a:r>
             <a:endParaRPr lang="en-US" sz="1800" dirty="0"/>
           </a:p>
@@ -3358,7 +3358,7 @@
                 <a:ea typeface="Arial" pitchFamily="34" charset="-122"/>
                 <a:cs typeface="Arial" pitchFamily="34" charset="-120"/>
               </a:rPr>
-              <a:t>TKIs are first-line for unsuitable patients.</a:t>
+              <a:t>Single-dose strategy enhances surgical feasibility.</a:t>
             </a:r>
             <a:endParaRPr lang="en-US" sz="1800" dirty="0"/>
           </a:p>
@@ -3379,7 +3379,7 @@
                 <a:ea typeface="Arial" pitchFamily="34" charset="-122"/>
                 <a:cs typeface="Arial" pitchFamily="34" charset="-120"/>
               </a:rPr>
-              <a:t>IL-8 levels predict TKI response and outcomes.</a:t>
+              <a:t>Early T-cell activation with PD-1/PD-L1 antibodies.</a:t>
             </a:r>
             <a:endParaRPr lang="en-US" sz="1800" dirty="0"/>
           </a:p>
@@ -3400,7 +3400,7 @@
                 <a:ea typeface="Arial" pitchFamily="34" charset="-122"/>
                 <a:cs typeface="Arial" pitchFamily="34" charset="-120"/>
               </a:rPr>
-              <a:t>Elevated IL-8 linked to poor survival rates.</a:t>
+              <a:t>Minimizes treatment-related adverse events.</a:t>
             </a:r>
             <a:endParaRPr lang="en-US" sz="1800" dirty="0"/>
           </a:p>
@@ -3421,7 +3421,7 @@
                 <a:ea typeface="Arial" pitchFamily="34" charset="-122"/>
                 <a:cs typeface="Arial" pitchFamily="34" charset="-120"/>
               </a:rPr>
-              <a:t>Study analyzed 60 advanced HCC patients.</a:t>
+              <a:t>Future trials should adopt 'less is more' approach.</a:t>
             </a:r>
             <a:endParaRPr lang="en-US" sz="1800" dirty="0"/>
           </a:p>
@@ -3457,7 +3457,7 @@
                   <a:srgbClr val="888888"/>
                 </a:solidFill>
               </a:rPr>
-              <a:t>Kim Sujin, Ahn Hye Ri, Kim Hui Gyeong et al.. Discover oncology. 2026-05-11 DOI: 10.1007/s12672-026-05055-4</a:t>
+              <a:t>Chen Kevin Kuan-Yu, Lin Tzu-Jung, Su Te-Wei et al.. Biomedical journal. 2026-05-20 DOI: 10.1016/j.bj.2026.100994</a:t>
             </a:r>
             <a:endParaRPr lang="en-US" sz="800" dirty="0"/>
           </a:p>
@@ -3648,7 +3648,7 @@
                   <a:srgbClr val="FFFFFF"/>
                 </a:solidFill>
               </a:rPr>
-              <a:t>### 綜合啟示 (Overall Insights)</a:t>
+              <a:t>### 綜合啟示（Overall Insights）</a:t>
             </a:r>
             <a:endParaRPr lang="en-US" sz="1200" dirty="0"/>
           </a:p>
@@ -3674,7 +3674,7 @@
                   <a:srgbClr val="FFFFFF"/>
                 </a:solidFill>
               </a:rPr>
-              <a:t>1. **持久的抗腫瘤活性**  </a:t>
+              <a:t>1. **免疫治療的臨床實踐效果**  </a:t>
             </a:r>
             <a:endParaRPr lang="en-US" sz="1200" dirty="0"/>
           </a:p>
@@ -3691,7 +3691,7 @@
                   <a:srgbClr val="FFFFFF"/>
                 </a:solidFill>
               </a:rPr>
-              <a:t>   Pembrolizumab在治療經索拉非尼治療的晚期肝細胞癌患者中展現了持久的抗腫瘤活性，顯示其在長期療效方面的潛力。  </a:t>
+              <a:t>   The combination of durvalumab and tremelimumab shows promising real-world outcomes in HCC patients, regardless of meeting phase 3 trial criteria, indicating its potential as a viable treatment option.  </a:t>
             </a:r>
             <a:endParaRPr lang="en-US" sz="1200" dirty="0"/>
           </a:p>
@@ -3708,7 +3708,7 @@
                   <a:srgbClr val="FFFFFF"/>
                 </a:solidFill>
               </a:rPr>
-              <a:t>   *Pembrolizumab demonstrated durable antitumor activity in advanced hepatocellular carcinoma (HCC) patients previously treated with sorafenib, highlighting its potential for long-term efficacy.*</a:t>
+              <a:t>   Durvalumab和tremelimumab的組合在肝細胞癌患者中顯示出良好的臨床實踐效果，無論是否符合第三期試驗標準，顯示其作為可行治療選擇的潛力。</a:t>
             </a:r>
             <a:endParaRPr lang="en-US" sz="1200" dirty="0"/>
           </a:p>
@@ -3734,7 +3734,7 @@
                   <a:srgbClr val="FFFFFF"/>
                 </a:solidFill>
               </a:rPr>
-              <a:t>2. **免疫相關不良事件的預測能力**  </a:t>
+              <a:t>2. **一線治療的持久性反應**  </a:t>
             </a:r>
             <a:endParaRPr lang="en-US" sz="1200" dirty="0"/>
           </a:p>
@@ -3751,7 +3751,7 @@
                   <a:srgbClr val="FFFFFF"/>
                 </a:solidFill>
               </a:rPr>
-              <a:t>   免疫檢查點抑制劑引發的免疫相關不良事件（irAEs）可能是肝移植後排斥反應的強烈預測因子，提示需謹慎監測這些事件。  </a:t>
+              <a:t>   Atezolizumab plus bevacizumab remains the first-line treatment for unresectable HCC, with high response rates leading to potential curative conversions and drug-free remissions in select patients over five years.  </a:t>
             </a:r>
             <a:endParaRPr lang="en-US" sz="1200" dirty="0"/>
           </a:p>
@@ -3768,7 +3768,7 @@
                   <a:srgbClr val="FFFFFF"/>
                 </a:solidFill>
               </a:rPr>
-              <a:t>   *Immune-related adverse events (irAEs) from immune checkpoint inhibitors may serve as potent predictors of post-transplant rejection in HCC, suggesting the need for careful monitoring of these events.*</a:t>
+              <a:t>   Atezolizumab加bevacizumab仍然是不可切除肝細胞癌的一線治療，五年內高反應率使某些患者有可能實現治癒性轉化和無藥物緩解。</a:t>
             </a:r>
             <a:endParaRPr lang="en-US" sz="1200" dirty="0"/>
           </a:p>
@@ -3794,7 +3794,7 @@
                   <a:srgbClr val="FFFFFF"/>
                 </a:solidFill>
               </a:rPr>
-              <a:t>3. **腫瘤微環境的挑戰**  </a:t>
+              <a:t>3. **傳統中醫的潛在作用**  </a:t>
             </a:r>
             <a:endParaRPr lang="en-US" sz="1200" dirty="0"/>
           </a:p>
@@ -3811,7 +3811,7 @@
                   <a:srgbClr val="FFFFFF"/>
                 </a:solidFill>
               </a:rPr>
-              <a:t>   肝細胞癌的異質性和免疫抑制的腫瘤微環境對免疫治療反應產生負面影響，強調了針對腫瘤相關巨噬細胞的代謝調控的重要性。  </a:t>
+              <a:t>   Traditional Chinese Medicine may reverse immune checkpoint resistance through lactate metabolic reprogramming, offering novel therapeutic strategies for HCC.  </a:t>
             </a:r>
             <a:endParaRPr lang="en-US" sz="1200" dirty="0"/>
           </a:p>
@@ -3828,7 +3828,7 @@
                   <a:srgbClr val="FFFFFF"/>
                 </a:solidFill>
               </a:rPr>
-              <a:t>   *The heterogeneous and immunosuppressive tumor microenvironment in HCC negatively impacts immunotherapy responses, emphasizing the importance of metabolic regulation targeting tumor-associated macrophages.*</a:t>
+              <a:t>   傳統中醫可能通過乳酸代謝重編程逆轉免疫檢查點抗性，為肝細胞癌提供新型治療策略。</a:t>
             </a:r>
             <a:endParaRPr lang="en-US" sz="1200" dirty="0"/>
           </a:p>
@@ -3854,7 +3854,7 @@
                   <a:srgbClr val="FFFFFF"/>
                 </a:solidFill>
               </a:rPr>
-              <a:t>4. **局部消融的潛在角色**  </a:t>
+              <a:t>4. **Neddylation途徑的預後評估**  </a:t>
             </a:r>
             <a:endParaRPr lang="en-US" sz="1200" dirty="0"/>
           </a:p>
@@ -3871,7 +3871,7 @@
                   <a:srgbClr val="FFFFFF"/>
                 </a:solidFill>
               </a:rPr>
-              <a:t>   在初始疾病控制後，局部消融療法在無法切除的肝細胞癌患者中可能是一個有效的救援策略，值得進一步研究。  </a:t>
+              <a:t>   The Neddylation pathway's activation in HCC may serve as a prognostic marker and could enhance the efficacy of immunotherapy, indicating a need for further exploration.  </a:t>
             </a:r>
             <a:endParaRPr lang="en-US" sz="1200" dirty="0"/>
           </a:p>
@@ -3888,7 +3888,7 @@
                   <a:srgbClr val="FFFFFF"/>
                 </a:solidFill>
               </a:rPr>
-              <a:t>   *Ablation therapy may serve as an effective salvage strategy in patients with unresectable HCC after initial disease control, warranting further investigation.*</a:t>
+              <a:t>   Neddylation途徑在肝細胞癌中的活化可能作為預後標記，並可能增強免疫治療的療效，顯示出進一步探索的必要性。</a:t>
             </a:r>
             <a:endParaRPr lang="en-US" sz="1200" dirty="0"/>
           </a:p>
@@ -3914,7 +3914,7 @@
                   <a:srgbClr val="FFFFFF"/>
                 </a:solidFill>
               </a:rPr>
-              <a:t>5. **新療法的組合策略**  </a:t>
+              <a:t>5. **機器學習在安全性評估中的應用**  </a:t>
             </a:r>
             <a:endParaRPr lang="en-US" sz="1200" dirty="0"/>
           </a:p>
@@ -3931,24 +3931,7 @@
                   <a:srgbClr val="FFFFFF"/>
                 </a:solidFill>
               </a:rPr>
-              <a:t>   結合肝動脈灌注化療、lenvatinib和PD-L1抑制劑的策略顯示出在無法切除的肝細胞癌中的潛在療效，提示需探索多種治療組合的可能性。  </a:t>
-            </a:r>
-            <a:endParaRPr lang="en-US" sz="1200" dirty="0"/>
-          </a:p>
-          <a:p>
-            <a:pPr indent="0" marL="0">
-              <a:lnSpc>
-                <a:spcPct val="150000"/>
-              </a:lnSpc>
-              <a:buNone/>
-            </a:pPr>
-            <a:r>
-              <a:rPr lang="en-US" sz="1200" dirty="0">
-                <a:solidFill>
-                  <a:srgbClr val="FFFFFF"/>
-                </a:solidFill>
-              </a:rPr>
-              <a:t>   *Combination strategies of hepatic arterial infusion chemotherapy with lenvatinib and PD-L1 inhibitors show potential efficacy in unresectable HCC, indicating the need to explore various treatment combinations.*</a:t>
+              <a:t>   Machine learning-based hepatic safety scores can predict decompensation risks in HCC patients undergoing systemic therapy, highlighting the importance of personalized treatment approaches.</a:t>
             </a:r>
             <a:endParaRPr lang="en-US" sz="1200" dirty="0"/>
           </a:p>
@@ -4094,7 +4077,7 @@
                   <a:srgbClr val="FFFFFF"/>
                 </a:solidFill>
               </a:rPr>
-              <a:t>### 未來研究方向 (Future Research Directions)</a:t>
+              <a:t>基於機器學習的肝臟安全性評分能預測接受系統治療的肝細胞癌患者的脫補償風險，突顯個性化治療方法的重要性。</a:t>
             </a:r>
             <a:endParaRPr lang="en-US" sz="1200" dirty="0"/>
           </a:p>
@@ -4120,7 +4103,7 @@
                   <a:srgbClr val="FFFFFF"/>
                 </a:solidFill>
               </a:rPr>
-              <a:t>1. **長期療效的評估**  </a:t>
+              <a:t>### 未來研究方向（Future Research Directions）</a:t>
             </a:r>
             <a:endParaRPr lang="en-US" sz="1200" dirty="0"/>
           </a:p>
@@ -4131,14 +4114,6 @@
               </a:lnSpc>
               <a:buNone/>
             </a:pPr>
-            <a:r>
-              <a:rPr lang="en-US" sz="1200" dirty="0">
-                <a:solidFill>
-                  <a:srgbClr val="FFFFFF"/>
-                </a:solidFill>
-              </a:rPr>
-              <a:t>   需要進一步的長期隨訪研究，以評估免疫治療在不同階段肝細胞癌患者中的持久療效和安全性。  </a:t>
-            </a:r>
             <a:endParaRPr lang="en-US" sz="1200" dirty="0"/>
           </a:p>
           <a:p>
@@ -4154,7 +4129,7 @@
                   <a:srgbClr val="FFFFFF"/>
                 </a:solidFill>
               </a:rPr>
-              <a:t>   *Further long-term follow-up studies are needed to assess the durability and safety of immunotherapy in patients with hepatocellular carcinoma at various stages.*</a:t>
+              <a:t>1. **擴大免疫治療的適應症**  </a:t>
             </a:r>
             <a:endParaRPr lang="en-US" sz="1200" dirty="0"/>
           </a:p>
@@ -4165,6 +4140,14 @@
               </a:lnSpc>
               <a:buNone/>
             </a:pPr>
+            <a:r>
+              <a:rPr lang="en-US" sz="1200" dirty="0">
+                <a:solidFill>
+                  <a:srgbClr val="FFFFFF"/>
+                </a:solidFill>
+              </a:rPr>
+              <a:t>   Future studies should investigate the efficacy of immune checkpoint inhibitors in broader HCC populations, particularly those with portal vein tumor thrombosis and other high-risk features.  </a:t>
+            </a:r>
             <a:endParaRPr lang="en-US" sz="1200" dirty="0"/>
           </a:p>
           <a:p>
@@ -4180,7 +4163,7 @@
                   <a:srgbClr val="FFFFFF"/>
                 </a:solidFill>
               </a:rPr>
-              <a:t>2. **免疫相關不良事件的機制研究**  </a:t>
+              <a:t>   未來研究應探討免疫檢查點抑制劑在更廣泛肝細胞癌人群中的療效，特別是那些具有門靜脈腫瘤血栓和其他高風險特徵的患者。</a:t>
             </a:r>
             <a:endParaRPr lang="en-US" sz="1200" dirty="0"/>
           </a:p>
@@ -4191,14 +4174,6 @@
               </a:lnSpc>
               <a:buNone/>
             </a:pPr>
-            <a:r>
-              <a:rPr lang="en-US" sz="1200" dirty="0">
-                <a:solidFill>
-                  <a:srgbClr val="FFFFFF"/>
-                </a:solidFill>
-              </a:rPr>
-              <a:t>   探索免疫相關不良事件的生物學機制，以改善治療策略並降低排斥反應的風險。  </a:t>
-            </a:r>
             <a:endParaRPr lang="en-US" sz="1200" dirty="0"/>
           </a:p>
           <a:p>
@@ -4214,7 +4189,7 @@
                   <a:srgbClr val="FFFFFF"/>
                 </a:solidFill>
               </a:rPr>
-              <a:t>   *Investigating the biological mechanisms of immune-related adverse events could improve treatment strategies and reduce the risk of rejection.*</a:t>
+              <a:t>2. **中醫與現代療法的結合**  </a:t>
             </a:r>
             <a:endParaRPr lang="en-US" sz="1200" dirty="0"/>
           </a:p>
@@ -4225,6 +4200,14 @@
               </a:lnSpc>
               <a:buNone/>
             </a:pPr>
+            <a:r>
+              <a:rPr lang="en-US" sz="1200" dirty="0">
+                <a:solidFill>
+                  <a:srgbClr val="FFFFFF"/>
+                </a:solidFill>
+              </a:rPr>
+              <a:t>   Research should explore the synergistic effects of Traditional Chinese Medicine combined with modern immunotherapies to enhance treatment outcomes in HCC.  </a:t>
+            </a:r>
             <a:endParaRPr lang="en-US" sz="1200" dirty="0"/>
           </a:p>
           <a:p>
@@ -4240,7 +4223,7 @@
                   <a:srgbClr val="FFFFFF"/>
                 </a:solidFill>
               </a:rPr>
-              <a:t>3. **腫瘤微環境的調控**  </a:t>
+              <a:t>   研究應探討傳統中醫與現代免疫療法結合的協同效應，以提升肝細胞癌的治療效果。</a:t>
             </a:r>
             <a:endParaRPr lang="en-US" sz="1200" dirty="0"/>
           </a:p>
@@ -4251,14 +4234,6 @@
               </a:lnSpc>
               <a:buNone/>
             </a:pPr>
-            <a:r>
-              <a:rPr lang="en-US" sz="1200" dirty="0">
-                <a:solidFill>
-                  <a:srgbClr val="FFFFFF"/>
-                </a:solidFill>
-              </a:rPr>
-              <a:t>   研究針對腫瘤微環境的干預措施，以克服免疫抑制並提高免疫治療的療效。  </a:t>
-            </a:r>
             <a:endParaRPr lang="en-US" sz="1200" dirty="0"/>
           </a:p>
           <a:p>
@@ -4274,7 +4249,7 @@
                   <a:srgbClr val="FFFFFF"/>
                 </a:solidFill>
               </a:rPr>
-              <a:t>   *Researching interventions targeting the tumor microenvironment could overcome immunosuppression and enhance the efficacy of immunotherapy.*</a:t>
+              <a:t>3. **Neddylation途徑的深入分析**  </a:t>
             </a:r>
             <a:endParaRPr lang="en-US" sz="1200" dirty="0"/>
           </a:p>
@@ -4285,6 +4260,14 @@
               </a:lnSpc>
               <a:buNone/>
             </a:pPr>
+            <a:r>
+              <a:rPr lang="en-US" sz="1200" dirty="0">
+                <a:solidFill>
+                  <a:srgbClr val="FFFFFF"/>
+                </a:solidFill>
+              </a:rPr>
+              <a:t>   Further investigation into the Neddylation pathway's role in HCC progression and its potential as a therapeutic target is warranted.  </a:t>
+            </a:r>
             <a:endParaRPr lang="en-US" sz="1200" dirty="0"/>
           </a:p>
           <a:p>
@@ -4300,7 +4283,7 @@
                   <a:srgbClr val="FFFFFF"/>
                 </a:solidFill>
               </a:rPr>
-              <a:t>4. **局部消融與系統治療的整合**  </a:t>
+              <a:t>   需要進一步研究Neddylation途徑在肝細胞癌進展中的作用及其作為治療靶點的潛力。</a:t>
             </a:r>
             <a:endParaRPr lang="en-US" sz="1200" dirty="0"/>
           </a:p>
@@ -4311,14 +4294,6 @@
               </a:lnSpc>
               <a:buNone/>
             </a:pPr>
-            <a:r>
-              <a:rPr lang="en-US" sz="1200" dirty="0">
-                <a:solidFill>
-                  <a:srgbClr val="FFFFFF"/>
-                </a:solidFill>
-              </a:rPr>
-              <a:t>   評估局部消融療法與系統性治療的整合策略，以改善無法切除肝細胞癌患者的預後。  </a:t>
-            </a:r>
             <a:endParaRPr lang="en-US" sz="1200" dirty="0"/>
           </a:p>
           <a:p>
@@ -4334,7 +4309,7 @@
                   <a:srgbClr val="FFFFFF"/>
                 </a:solidFill>
               </a:rPr>
-              <a:t>   *Evaluating integrated strategies of ablation therapy with systemic treatments could improve outcomes for patients with unresectable HCC.*</a:t>
+              <a:t>4. **個性化治療策略的發展**  </a:t>
             </a:r>
             <a:endParaRPr lang="en-US" sz="1200" dirty="0"/>
           </a:p>
@@ -4345,6 +4320,14 @@
               </a:lnSpc>
               <a:buNone/>
             </a:pPr>
+            <a:r>
+              <a:rPr lang="en-US" sz="1200" dirty="0">
+                <a:solidFill>
+                  <a:srgbClr val="FFFFFF"/>
+                </a:solidFill>
+              </a:rPr>
+              <a:t>   Developing personalized treatment strategies using machine learning models to predict patient outcomes and optimize therapeutic regimens in HCC is essential.  </a:t>
+            </a:r>
             <a:endParaRPr lang="en-US" sz="1200" dirty="0"/>
           </a:p>
           <a:p>
@@ -4360,7 +4343,7 @@
                   <a:srgbClr val="FFFFFF"/>
                 </a:solidFill>
               </a:rPr>
-              <a:t>5. **新型生物標記的發現**  </a:t>
+              <a:t>   開發使用機器學習模型的個性化治療策略，以預測患者結果並優化肝細胞癌的治療方案至關重要。</a:t>
             </a:r>
             <a:endParaRPr lang="en-US" sz="1200" dirty="0"/>
           </a:p>
@@ -4371,14 +4354,6 @@
               </a:lnSpc>
               <a:buNone/>
             </a:pPr>
-            <a:r>
-              <a:rPr lang="en-US" sz="1200" dirty="0">
-                <a:solidFill>
-                  <a:srgbClr val="FFFFFF"/>
-                </a:solidFill>
-              </a:rPr>
-              <a:t>   開發新的生物標記以預測免疫治療和靶向治療的反應，從而個性化治療方案。  </a:t>
-            </a:r>
             <a:endParaRPr lang="en-US" sz="1200" dirty="0"/>
           </a:p>
           <a:p>
@@ -4394,7 +4369,41 @@
                   <a:srgbClr val="FFFFFF"/>
                 </a:solidFill>
               </a:rPr>
-              <a:t>   *Developing new biomarkers to predict responses to immunotherapy and targeted therapies could facilitate personalized treatment approaches.*</a:t>
+              <a:t>5. **長期療效的持續評估**  </a:t>
+            </a:r>
+            <a:endParaRPr lang="en-US" sz="1200" dirty="0"/>
+          </a:p>
+          <a:p>
+            <a:pPr indent="0" marL="0">
+              <a:lnSpc>
+                <a:spcPct val="150000"/>
+              </a:lnSpc>
+              <a:buNone/>
+            </a:pPr>
+            <a:r>
+              <a:rPr lang="en-US" sz="1200" dirty="0">
+                <a:solidFill>
+                  <a:srgbClr val="FFFFFF"/>
+                </a:solidFill>
+              </a:rPr>
+              <a:t>   Longitudinal studies are needed to assess the durability of responses to combination therapies in HCC and their impact on overall survival.  </a:t>
+            </a:r>
+            <a:endParaRPr lang="en-US" sz="1200" dirty="0"/>
+          </a:p>
+          <a:p>
+            <a:pPr indent="0" marL="0">
+              <a:lnSpc>
+                <a:spcPct val="150000"/>
+              </a:lnSpc>
+              <a:buNone/>
+            </a:pPr>
+            <a:r>
+              <a:rPr lang="en-US" sz="1200" dirty="0">
+                <a:solidFill>
+                  <a:srgbClr val="FFFFFF"/>
+                </a:solidFill>
+              </a:rPr>
+              <a:t>   需要進行縱向研究來評估肝細胞癌中聯合療法反應的持久性及其對整體生存的影響。</a:t>
             </a:r>
             <a:endParaRPr lang="en-US" sz="1200" dirty="0"/>
           </a:p>
@@ -4628,7 +4637,7 @@
                 <a:ea typeface="Arial" pitchFamily="34" charset="-122"/>
                 <a:cs typeface="Arial" pitchFamily="34" charset="-120"/>
               </a:rPr>
-              <a:t>Pembrolizumab Monotherapy in Sorafenib-Treated and Treatment-Na&amp;#xef;ve Advanced…</a:t>
+              <a:t>Outcomes of Patients With Hepatocellular Carcinoma Treated With Durvalumab Plus …</a:t>
             </a:r>
             <a:endParaRPr lang="en-US" sz="1400" dirty="0"/>
           </a:p>
@@ -4665,7 +4674,7 @@
                 <a:ea typeface="Arial" pitchFamily="34" charset="-122"/>
                 <a:cs typeface="Arial" pitchFamily="34" charset="-120"/>
               </a:rPr>
-              <a:t>Immune-related adverse events are a potent predictor of post-transplant rejectio…</a:t>
+              <a:t>Five years after IMbrave150 with clinical integration of atezolizumab plus bevac…</a:t>
             </a:r>
             <a:endParaRPr lang="en-US" sz="1400" dirty="0"/>
           </a:p>
@@ -4702,7 +4711,7 @@
                 <a:ea typeface="Arial" pitchFamily="34" charset="-122"/>
                 <a:cs typeface="Arial" pitchFamily="34" charset="-120"/>
               </a:rPr>
-              <a:t>BCAT1 inhibits crotonate-related epigenetic modulation of metabolic genes in tum…</a:t>
+              <a:t>Durvalumab plus HAIC-FOLFOX followed by maintenance durvalumab for hepatocellula…</a:t>
             </a:r>
             <a:endParaRPr lang="en-US" sz="1400" dirty="0"/>
           </a:p>
@@ -4739,7 +4748,7 @@
                 <a:ea typeface="Arial" pitchFamily="34" charset="-122"/>
                 <a:cs typeface="Arial" pitchFamily="34" charset="-120"/>
               </a:rPr>
-              <a:t>Ablation-Based Salvage Strategy at Disease Progression After Initial Disease Con…</a:t>
+              <a:t>Traditional Chinese Medicine Reverses Immune Checkpoint Resistance Through Lacta…</a:t>
             </a:r>
             <a:endParaRPr lang="en-US" sz="1400" dirty="0"/>
           </a:p>
@@ -4776,7 +4785,7 @@
                 <a:ea typeface="Arial" pitchFamily="34" charset="-122"/>
                 <a:cs typeface="Arial" pitchFamily="34" charset="-120"/>
               </a:rPr>
-              <a:t>HILL: the efficacy and safety of hepatic arterial infusion chemotherapy with the…</a:t>
+              <a:t>Identifying Neddylation-modified features to assess prognosis and immune efficac…</a:t>
             </a:r>
             <a:endParaRPr lang="en-US" sz="1400" dirty="0"/>
           </a:p>
@@ -4887,7 +4896,7 @@
                 <a:ea typeface="Arial" pitchFamily="34" charset="-122"/>
                 <a:cs typeface="Arial" pitchFamily="34" charset="-120"/>
               </a:rPr>
-              <a:t>Second-Line TKI after First-Line Immunotherapy-based Treatment in Advanced HCC: …</a:t>
+              <a:t>Breakthroughs in HBV-related HCC Therapy: The Unmatched Potential of Immune Chec…</a:t>
             </a:r>
             <a:endParaRPr lang="en-US" sz="1400" dirty="0"/>
           </a:p>
@@ -4924,7 +4933,7 @@
                 <a:ea typeface="Arial" pitchFamily="34" charset="-122"/>
                 <a:cs typeface="Arial" pitchFamily="34" charset="-120"/>
               </a:rPr>
-              <a:t>Electronic symptom monitoring of patient-reported outcomes among patients with h…</a:t>
+              <a:t>Machine learning based hepatic safety score predicts decompensation in hepatocel…</a:t>
             </a:r>
             <a:endParaRPr lang="en-US" sz="1400" dirty="0"/>
           </a:p>
@@ -4961,7 +4970,7 @@
                 <a:ea typeface="Arial" pitchFamily="34" charset="-122"/>
                 <a:cs typeface="Arial" pitchFamily="34" charset="-120"/>
               </a:rPr>
-              <a:t>Plasma interleukin-8 as a predictive biomarker for tyrosine kinase inhibitor res…</a:t>
+              <a:t>Less Is More: A Single-Dose, Non-Waiting Neoadjuvant Immunotherapy Strategy for …</a:t>
             </a:r>
             <a:endParaRPr lang="en-US" sz="1400" dirty="0"/>
           </a:p>
@@ -5116,7 +5125,7 @@
                   </a:extLst>
                 </a:hlinkClick>
               </a:rPr>
-              <a:t>Pembrolizumab Monotherapy in Sorafenib-Treated and Treatment-Na&amp;#xef;ve Advanced Hepatocellular Carcinoma: Long-Term Follow-up of the Open-Label, Phase II KEYNOTE-224 Study.</a:t>
+              <a:t>Outcomes of Patients With Hepatocellular Carcinoma Treated With Durvalumab Plus Tremelimumab in Real-World Clinical Practice Who Met or Did Not Meet the Inclusion Criteria for the Phase 3 HIMALAYA Trial.</a:t>
             </a:r>
             <a:endParaRPr lang="en-US" sz="2400" dirty="0"/>
           </a:p>
@@ -5152,7 +5161,7 @@
                   <a:srgbClr val="888888"/>
                 </a:solidFill>
               </a:rPr>
-              <a:t>Clinical cancer research : an official journal of the American Association for Cancer Research  ·  IF 11.5  ·  RCT Phase 2  ·  🌏 Asia</a:t>
+              <a:t>Journal of gastroenterology and hepatology  ·  RCT Phase 3  ·  🌏 Asia</a:t>
             </a:r>
             <a:endParaRPr lang="en-US" sz="1000" dirty="0"/>
           </a:p>
@@ -5195,7 +5204,7 @@
                 <a:ea typeface="Arial" pitchFamily="34" charset="-122"/>
                 <a:cs typeface="Arial" pitchFamily="34" charset="-120"/>
               </a:rPr>
-              <a:t>Pembrolizumab shows durable antitumor activity.</a:t>
+              <a:t>Study on Durvalumab plus Tremelimumab in HCC</a:t>
             </a:r>
             <a:endParaRPr lang="en-US" sz="1800" dirty="0"/>
           </a:p>
@@ -5216,7 +5225,7 @@
                 <a:ea typeface="Arial" pitchFamily="34" charset="-122"/>
                 <a:cs typeface="Arial" pitchFamily="34" charset="-120"/>
               </a:rPr>
-              <a:t>Median OS: 13.2 months in cohort 1.</a:t>
+              <a:t>412 patients treated at 30 institutions</a:t>
             </a:r>
             <a:endParaRPr lang="en-US" sz="1800" dirty="0"/>
           </a:p>
@@ -5237,7 +5246,7 @@
                 <a:ea typeface="Arial" pitchFamily="34" charset="-122"/>
                 <a:cs typeface="Arial" pitchFamily="34" charset="-120"/>
               </a:rPr>
-              <a:t>Median PFS: 4.9 months in cohort 1.</a:t>
+              <a:t>HIMALAYA group had better PFS and OS</a:t>
             </a:r>
             <a:endParaRPr lang="en-US" sz="1800" dirty="0"/>
           </a:p>
@@ -5258,7 +5267,7 @@
                 <a:ea typeface="Arial" pitchFamily="34" charset="-122"/>
                 <a:cs typeface="Arial" pitchFamily="34" charset="-120"/>
               </a:rPr>
-              <a:t>Long-term follow-up of ~7 years.</a:t>
+              <a:t>Independent predictors: BMI, portal vein invasion</a:t>
             </a:r>
             <a:endParaRPr lang="en-US" sz="1800" dirty="0"/>
           </a:p>
@@ -5279,7 +5288,7 @@
                 <a:ea typeface="Arial" pitchFamily="34" charset="-122"/>
                 <a:cs typeface="Arial" pitchFamily="34" charset="-120"/>
               </a:rPr>
-              <a:t>Manageable safety profile observed.</a:t>
+              <a:t>Endocrine dysfunction more common in HIMALAYA group</a:t>
             </a:r>
             <a:endParaRPr lang="en-US" sz="1800" dirty="0"/>
           </a:p>
@@ -5315,7 +5324,7 @@
                   <a:srgbClr val="888888"/>
                 </a:solidFill>
               </a:rPr>
-              <a:t>Finn Richard S, Kudo Masatoshi, Borbath Ivan et al.. Clinical cancer research : an official journal of the American Association for Cancer Research. 2026-05-15 DOI: 10.1158/1078-0432.CCR-25-3528</a:t>
+              <a:t>Matono Tomomitsu, Tada Toshifumi, Hiraoka Atsushi et al.. Journal of gastroenterology and hepatology. 2026-05-23 DOI: 10.1111/jgh.70422</a:t>
             </a:r>
             <a:endParaRPr lang="en-US" sz="800" dirty="0"/>
           </a:p>
@@ -5515,7 +5524,7 @@
                   </a:extLst>
                 </a:hlinkClick>
               </a:rPr>
-              <a:t>Immune-related adverse events are a potent predictor of post-transplant rejection in HCC: a multicentre retrospective cohort study.</a:t>
+              <a:t>Five years after IMbrave150 with clinical integration of atezolizumab plus bevacizumab in hepatocellular carcinoma.</a:t>
             </a:r>
             <a:endParaRPr lang="en-US" sz="2400" dirty="0"/>
           </a:p>
@@ -5551,7 +5560,7 @@
                   <a:srgbClr val="888888"/>
                 </a:solidFill>
               </a:rPr>
-              <a:t>Gut  ·  IF 24.5  ·  Retrospective Study</a:t>
+              <a:t>Annals of hepatology  ·  RCT Phase 3  ·  🌏 Asia</a:t>
             </a:r>
             <a:endParaRPr lang="en-US" sz="1000" dirty="0"/>
           </a:p>
@@ -5594,7 +5603,7 @@
                 <a:ea typeface="Arial" pitchFamily="34" charset="-122"/>
                 <a:cs typeface="Arial" pitchFamily="34" charset="-120"/>
               </a:rPr>
-              <a:t>ICIs increase rejection risk post-transplant.</a:t>
+              <a:t>Atezolizumab plus bevacizumab is first-line therapy.</a:t>
             </a:r>
             <a:endParaRPr lang="en-US" sz="1800" dirty="0"/>
           </a:p>
@@ -5615,7 +5624,7 @@
                 <a:ea typeface="Arial" pitchFamily="34" charset="-122"/>
                 <a:cs typeface="Arial" pitchFamily="34" charset="-120"/>
               </a:rPr>
-              <a:t>irAEs strongly predict post-transplant rejection.</a:t>
+              <a:t>High response rates enable curative conversion.</a:t>
             </a:r>
             <a:endParaRPr lang="en-US" sz="1800" dirty="0"/>
           </a:p>
@@ -5636,7 +5645,49 @@
                 <a:ea typeface="Arial" pitchFamily="34" charset="-122"/>
                 <a:cs typeface="Arial" pitchFamily="34" charset="-120"/>
               </a:rPr>
-              <a:t>Predictive model achieved AUC of 0.788.</a:t>
+              <a:t>Bleeding risk requires proactive management.</a:t>
+            </a:r>
+            <a:endParaRPr lang="en-US" sz="1800" dirty="0"/>
+          </a:p>
+          <a:p>
+            <a:pPr marL="342900" indent="-342900">
+              <a:spcAft>
+                <a:spcPts val="800"/>
+              </a:spcAft>
+              <a:buSzPct val="100000"/>
+              <a:buChar char="•"/>
+            </a:pPr>
+            <a:r>
+              <a:rPr lang="en-US" sz="1800" dirty="0">
+                <a:solidFill>
+                  <a:srgbClr val="333333"/>
+                </a:solidFill>
+                <a:latin typeface="Arial" pitchFamily="34" charset="0"/>
+                <a:ea typeface="Arial" pitchFamily="34" charset="-122"/>
+                <a:cs typeface="Arial" pitchFamily="34" charset="-120"/>
+              </a:rPr>
+              <a:t>Combination with locoregional therapy shows promise.</a:t>
+            </a:r>
+            <a:endParaRPr lang="en-US" sz="1800" dirty="0"/>
+          </a:p>
+          <a:p>
+            <a:pPr marL="342900" indent="-342900">
+              <a:spcAft>
+                <a:spcPts val="800"/>
+              </a:spcAft>
+              <a:buSzPct val="100000"/>
+              <a:buChar char="•"/>
+            </a:pPr>
+            <a:r>
+              <a:rPr lang="en-US" sz="1800" dirty="0">
+                <a:solidFill>
+                  <a:srgbClr val="333333"/>
+                </a:solidFill>
+                <a:latin typeface="Arial" pitchFamily="34" charset="0"/>
+                <a:ea typeface="Arial" pitchFamily="34" charset="-122"/>
+                <a:cs typeface="Arial" pitchFamily="34" charset="-120"/>
+              </a:rPr>
+              <a:t>Key gaps in biomarkers and sequencing remain.</a:t>
             </a:r>
             <a:endParaRPr lang="en-US" sz="1800" dirty="0"/>
           </a:p>
@@ -5672,7 +5723,7 @@
                   <a:srgbClr val="888888"/>
                 </a:solidFill>
               </a:rPr>
-              <a:t>Fang Jun, Zhong Siyi, Wang Tielong et al.. Gut. 2026-05-12 DOI: 10.1136/gutjnl-2025-336719</a:t>
+              <a:t>Lai Kuan-Chang, Chen San-Chi. Annals of hepatology. 2026-05-19 DOI: 10.1016/j.aohep.2026.102237</a:t>
             </a:r>
             <a:endParaRPr lang="en-US" sz="800" dirty="0"/>
           </a:p>
@@ -5872,7 +5923,7 @@
                   </a:extLst>
                 </a:hlinkClick>
               </a:rPr>
-              <a:t>BCAT1 inhibits crotonate-related epigenetic modulation of metabolic genes in tumor-associated macrophages to counter immunosuppression.</a:t>
+              <a:t>Durvalumab plus HAIC-FOLFOX followed by maintenance durvalumab for hepatocellular carcinoma with major portal invasion: phase 2 DurHope study.</a:t>
             </a:r>
             <a:endParaRPr lang="en-US" sz="2400" dirty="0"/>
           </a:p>
@@ -5908,7 +5959,7 @@
                   <a:srgbClr val="888888"/>
                 </a:solidFill>
               </a:rPr>
-              <a:t>Nature communications  ·  IF 14.7  ·  Basic Research</a:t>
+              <a:t>Nature communications  ·  IF 14.7  ·  RCT Phase 2</a:t>
             </a:r>
             <a:endParaRPr lang="en-US" sz="1000" dirty="0"/>
           </a:p>
@@ -5951,7 +6002,7 @@
                 <a:ea typeface="Arial" pitchFamily="34" charset="-122"/>
                 <a:cs typeface="Arial" pitchFamily="34" charset="-120"/>
               </a:rPr>
-              <a:t>BCAT1 acts as a metabolic checkpoint in TAMs.</a:t>
+              <a:t>Durvalumab plus HAIC-FOLFOX shows promise.</a:t>
             </a:r>
             <a:endParaRPr lang="en-US" sz="1800" dirty="0"/>
           </a:p>
@@ -5972,7 +6023,7 @@
                 <a:ea typeface="Arial" pitchFamily="34" charset="-122"/>
                 <a:cs typeface="Arial" pitchFamily="34" charset="-120"/>
               </a:rPr>
-              <a:t>BCAT1 deficiency increases crotonate and immunosuppression.</a:t>
+              <a:t>1-year overall survival rate at 63.3%.</a:t>
             </a:r>
             <a:endParaRPr lang="en-US" sz="1800" dirty="0"/>
           </a:p>
@@ -5993,7 +6044,7 @@
                 <a:ea typeface="Arial" pitchFamily="34" charset="-122"/>
                 <a:cs typeface="Arial" pitchFamily="34" charset="-120"/>
               </a:rPr>
-              <a:t>BCAT1+ macrophages enhance antitumor immunity.</a:t>
+              <a:t>Tumor RNA sequencing reveals resistance signatures.</a:t>
             </a:r>
             <a:endParaRPr lang="en-US" sz="1800" dirty="0"/>
           </a:p>
@@ -6014,7 +6065,7 @@
                 <a:ea typeface="Arial" pitchFamily="34" charset="-122"/>
                 <a:cs typeface="Arial" pitchFamily="34" charset="-120"/>
               </a:rPr>
-              <a:t>Myeloid BCAT1 overexpression improves anti-PD1 therapy.</a:t>
+              <a:t>Increased immune infiltration in responders.</a:t>
             </a:r>
             <a:endParaRPr lang="en-US" sz="1800" dirty="0"/>
           </a:p>
@@ -6035,7 +6086,7 @@
                 <a:ea typeface="Arial" pitchFamily="34" charset="-122"/>
                 <a:cs typeface="Arial" pitchFamily="34" charset="-120"/>
               </a:rPr>
-              <a:t>Targeting BCAT1 may enhance immunotherapy responses.</a:t>
+              <a:t>Dynamic T-cell expansion post-treatment observed.</a:t>
             </a:r>
             <a:endParaRPr lang="en-US" sz="1800" dirty="0"/>
           </a:p>
@@ -6071,7 +6122,7 @@
                   <a:srgbClr val="888888"/>
                 </a:solidFill>
               </a:rPr>
-              <a:t>Zhang Weizhi, Liang Shuhang, Han Sitao et al.. Nature communications. 2026-05-11 DOI: 10.1038/s41467-026-72814-w</a:t>
+              <a:t>Yi Junzhe, Wang Jiongliang, Zhang Yimin et al.. Nature communications. 2026-05-18 DOI: 10.1038/s41467-026-73131-y</a:t>
             </a:r>
             <a:endParaRPr lang="en-US" sz="800" dirty="0"/>
           </a:p>
@@ -6271,7 +6322,7 @@
                   </a:extLst>
                 </a:hlinkClick>
               </a:rPr>
-              <a:t>Ablation-Based Salvage Strategy at Disease Progression After Initial Disease Control With Atezolizumab/Bevacizumab in Hepatocellular Carcinoma.</a:t>
+              <a:t>Traditional Chinese Medicine Reverses Immune Checkpoint Resistance Through Lactate Metabolic Reprogramming in Hepatocellular Carcinoma: Mechanisms and Therapeutic Implications.</a:t>
             </a:r>
             <a:endParaRPr lang="en-US" sz="2400" dirty="0"/>
           </a:p>
@@ -6307,7 +6358,7 @@
                   <a:srgbClr val="888888"/>
                 </a:solidFill>
               </a:rPr>
-              <a:t>Hepatology research : the official journal of the Japan Society of Hepatology  ·  Prospective Study  ·  🌏 Asia</a:t>
+              <a:t>Journal of ethnopharmacology  ·  RCT Phase 3</a:t>
             </a:r>
             <a:endParaRPr lang="en-US" sz="1000" dirty="0"/>
           </a:p>
@@ -6350,7 +6401,7 @@
                 <a:ea typeface="Arial" pitchFamily="34" charset="-122"/>
                 <a:cs typeface="Arial" pitchFamily="34" charset="-120"/>
               </a:rPr>
-              <a:t>Atez/Bev leads to disease control.</a:t>
+              <a:t>TCM compounds reprogram lactate metabolism</a:t>
             </a:r>
             <a:endParaRPr lang="en-US" sz="1800" dirty="0"/>
           </a:p>
@@ -6371,7 +6422,7 @@
                 <a:ea typeface="Arial" pitchFamily="34" charset="-122"/>
                 <a:cs typeface="Arial" pitchFamily="34" charset="-120"/>
               </a:rPr>
-              <a:t>Ablation considered post-progression.</a:t>
+              <a:t>Elevated lactate linked to immune resistance</a:t>
             </a:r>
             <a:endParaRPr lang="en-US" sz="1800" dirty="0"/>
           </a:p>
@@ -6392,7 +6443,7 @@
                 <a:ea typeface="Arial" pitchFamily="34" charset="-122"/>
                 <a:cs typeface="Arial" pitchFamily="34" charset="-120"/>
               </a:rPr>
-              <a:t>Ablation group had longer PPS.</a:t>
+              <a:t>Icaritin shows promise in Phase III trials</a:t>
             </a:r>
             <a:endParaRPr lang="en-US" sz="1800" dirty="0"/>
           </a:p>
@@ -6413,7 +6464,7 @@
                 <a:ea typeface="Arial" pitchFamily="34" charset="-122"/>
                 <a:cs typeface="Arial" pitchFamily="34" charset="-120"/>
               </a:rPr>
-              <a:t>OS showed trend favoring ablation.</a:t>
+              <a:t>Selective MCT4 inhibition enhances anti-PD-1</a:t>
             </a:r>
             <a:endParaRPr lang="en-US" sz="1800" dirty="0"/>
           </a:p>
@@ -6434,7 +6485,7 @@
                 <a:ea typeface="Arial" pitchFamily="34" charset="-122"/>
                 <a:cs typeface="Arial" pitchFamily="34" charset="-120"/>
               </a:rPr>
-              <a:t>Further validation of findings needed.</a:t>
+              <a:t>Need for biomarker-enriched combination trials</a:t>
             </a:r>
             <a:endParaRPr lang="en-US" sz="1800" dirty="0"/>
           </a:p>
@@ -6470,7 +6521,7 @@
                   <a:srgbClr val="888888"/>
                 </a:solidFill>
               </a:rPr>
-              <a:t>Kariyama Kazuya, Nouso Kazuhiro, Hiraoka Atsushi et al.. Hepatology research : the official journal of the Japan Society of Hepatology. 2026-05-11 DOI: 10.1111/hepr.70193</a:t>
+              <a:t>Liu Lihui, Wang Jingxiao, Hu Kaiwen. Journal of ethnopharmacology. 2026-05-24 DOI: 10.1016/j.jep.2026.121885</a:t>
             </a:r>
             <a:endParaRPr lang="en-US" sz="800" dirty="0"/>
           </a:p>
@@ -6670,7 +6721,7 @@
                   </a:extLst>
                 </a:hlinkClick>
               </a:rPr>
-              <a:t>HILL: the efficacy and safety of hepatic arterial infusion chemotherapy with the FOLFOX regimen combined with lenvatinib and the PD-L1 inhibitor durvalumab in unresectable hepatocellular carcinoma: a prospective, single-arm, phase 2 clinical trial.</a:t>
+              <a:t>Identifying Neddylation-modified features to assess prognosis and immune efficacy in hepatocellular carcinoma.</a:t>
             </a:r>
             <a:endParaRPr lang="en-US" sz="2400" dirty="0"/>
           </a:p>
@@ -6706,7 +6757,7 @@
                   <a:srgbClr val="888888"/>
                 </a:solidFill>
               </a:rPr>
-              <a:t>Signal transduction and targeted therapy  ·  RCT Phase 2</a:t>
+              <a:t>Apoptosis : an international journal on programmed cell death  ·  Basic Research  ·  🌏 Asia</a:t>
             </a:r>
             <a:endParaRPr lang="en-US" sz="1000" dirty="0"/>
           </a:p>
@@ -6749,7 +6800,7 @@
                 <a:ea typeface="Arial" pitchFamily="34" charset="-122"/>
                 <a:cs typeface="Arial" pitchFamily="34" charset="-120"/>
               </a:rPr>
-              <a:t>Study on uHCC treatment efficacy</a:t>
+              <a:t>Neddylation pathway is activated in HCC.</a:t>
             </a:r>
             <a:endParaRPr lang="en-US" sz="1800" dirty="0"/>
           </a:p>
@@ -6770,7 +6821,7 @@
                 <a:ea typeface="Arial" pitchFamily="34" charset="-122"/>
                 <a:cs typeface="Arial" pitchFamily="34" charset="-120"/>
               </a:rPr>
-              <a:t>Triple-combination therapy: FOLFOX-HAIC, lenvatinib, durvalumab</a:t>
+              <a:t>MLN4924 inhibits HCC cell growth and migration.</a:t>
             </a:r>
             <a:endParaRPr lang="en-US" sz="1800" dirty="0"/>
           </a:p>
@@ -6791,7 +6842,7 @@
                 <a:ea typeface="Arial" pitchFamily="34" charset="-122"/>
                 <a:cs typeface="Arial" pitchFamily="34" charset="-120"/>
               </a:rPr>
-              <a:t>Median PFS of 15.8 months achieved</a:t>
+              <a:t>High NRS correlates with poor prognosis.</a:t>
             </a:r>
             <a:endParaRPr lang="en-US" sz="1800" dirty="0"/>
           </a:p>
@@ -6812,7 +6863,7 @@
                 <a:ea typeface="Arial" pitchFamily="34" charset="-122"/>
                 <a:cs typeface="Arial" pitchFamily="34" charset="-120"/>
               </a:rPr>
-              <a:t>Objective response rate of 75.0%</a:t>
+              <a:t>PSMD1 knockdown reduces HCC cell proliferation.</a:t>
             </a:r>
             <a:endParaRPr lang="en-US" sz="1800" dirty="0"/>
           </a:p>
@@ -6833,7 +6884,7 @@
                 <a:ea typeface="Arial" pitchFamily="34" charset="-122"/>
                 <a:cs typeface="Arial" pitchFamily="34" charset="-120"/>
               </a:rPr>
-              <a:t>Safety profile shows mostly grade 1-2 events</a:t>
+              <a:t>Neddylation features predict immunotherapy efficacy.</a:t>
             </a:r>
             <a:endParaRPr lang="en-US" sz="1800" dirty="0"/>
           </a:p>
@@ -6869,7 +6920,7 @@
                   <a:srgbClr val="888888"/>
                 </a:solidFill>
               </a:rPr>
-              <a:t>Li Shao-Hua, Zuo Zhi-Jun, Lu Liang-He et al.. Signal transduction and targeted therapy. 2026-05-14 DOI: 10.1038/s41392-026-02718-0</a:t>
+              <a:t>Liu Zitao, Zuo Cheng, Wu Changlei et al.. Apoptosis : an international journal on programmed cell death. 2026-05-24 DOI: 10.1007/s10495-026-02339-6</a:t>
             </a:r>
             <a:endParaRPr lang="en-US" sz="800" dirty="0"/>
           </a:p>
@@ -7148,7 +7199,7 @@
                 <a:ea typeface="Arial" pitchFamily="34" charset="-122"/>
                 <a:cs typeface="Arial" pitchFamily="34" charset="-120"/>
               </a:rPr>
-              <a:t>Phase II study on HCC with PVTT</a:t>
+              <a:t>Phase II study on HAIC and lenvatinib</a:t>
             </a:r>
             <a:endParaRPr lang="en-US" sz="1800" dirty="0"/>
           </a:p>
@@ -7169,7 +7220,7 @@
                 <a:ea typeface="Arial" pitchFamily="34" charset="-122"/>
                 <a:cs typeface="Arial" pitchFamily="34" charset="-120"/>
               </a:rPr>
-              <a:t>HAIC combined with lenvatinib and PD-1</a:t>
+              <a:t>Comparison with PD-1 inhibitors alone</a:t>
             </a:r>
             <a:endParaRPr lang="en-US" sz="1800" dirty="0"/>
           </a:p>
@@ -7190,7 +7241,7 @@
                 <a:ea typeface="Arial" pitchFamily="34" charset="-122"/>
                 <a:cs typeface="Arial" pitchFamily="34" charset="-120"/>
               </a:rPr>
-              <a:t>Improved outcomes compared to monotherapy</a:t>
+              <a:t>Focus on advanced HCC with PVTT</a:t>
             </a:r>
             <a:endParaRPr lang="en-US" sz="1800" dirty="0"/>
           </a:p>
@@ -7211,7 +7262,7 @@
                 <a:ea typeface="Arial" pitchFamily="34" charset="-122"/>
                 <a:cs typeface="Arial" pitchFamily="34" charset="-120"/>
               </a:rPr>
-              <a:t>Focus on curative-intent strategies</a:t>
+              <a:t>Potential for curative-intent strategies</a:t>
             </a:r>
             <a:endParaRPr lang="en-US" sz="1800" dirty="0"/>
           </a:p>
@@ -7232,7 +7283,7 @@
                 <a:ea typeface="Arial" pitchFamily="34" charset="-122"/>
                 <a:cs typeface="Arial" pitchFamily="34" charset="-120"/>
               </a:rPr>
-              <a:t>Potential for better prognosis</a:t>
+              <a:t>Improved prognosis observed in patients</a:t>
             </a:r>
             <a:endParaRPr lang="en-US" sz="1800" dirty="0"/>
           </a:p>
@@ -7568,7 +7619,7 @@
                 <a:ea typeface="Arial" pitchFamily="34" charset="-122"/>
                 <a:cs typeface="Arial" pitchFamily="34" charset="-120"/>
               </a:rPr>
-              <a:t>Transarterial chemoembolization plus PD-1 inhibitors</a:t>
+              <a:t>Transarterial chemoembolization (TACE) used</a:t>
             </a:r>
             <a:endParaRPr lang="en-US" sz="1800" dirty="0"/>
           </a:p>
@@ -7589,7 +7640,7 @@
                 <a:ea typeface="Arial" pitchFamily="34" charset="-122"/>
                 <a:cs typeface="Arial" pitchFamily="34" charset="-120"/>
               </a:rPr>
-              <a:t>Phase 2 trial shows promising results</a:t>
+              <a:t>PD-1 inhibitors enhance treatment efficacy</a:t>
             </a:r>
             <a:endParaRPr lang="en-US" sz="1800" dirty="0"/>
           </a:p>

--- a/docs/digest-en.pptx
+++ b/docs/digest-en.pptx
@@ -2269,7 +2269,7 @@
                   <a:srgbClr val="888888"/>
                 </a:solidFill>
               </a:rPr>
-              <a:t>2026-05-18 — 2026-05-25</a:t>
+              <a:t>2026-05-25 — 2026-06-01</a:t>
             </a:r>
             <a:endParaRPr lang="en-US" sz="1400" dirty="0"/>
           </a:p>
@@ -2460,7 +2460,7 @@
                   </a:extLst>
                 </a:hlinkClick>
               </a:rPr>
-              <a:t>Breakthroughs in HBV-related HCC Therapy: The Unmatched Potential of Immune Checkpoint Inhibitors.</a:t>
+              <a:t>Durvalumab and tremelimumab combination therapy achieved remarkable response in primary hepatic undifferentiated carcinoma with high PD-L1 expression.</a:t>
             </a:r>
             <a:endParaRPr lang="en-US" sz="2400" dirty="0"/>
           </a:p>
@@ -2496,7 +2496,7 @@
                   <a:srgbClr val="888888"/>
                 </a:solidFill>
               </a:rPr>
-              <a:t>Current treatment options in oncology  ·  Review  ·  🌏 Asia</a:t>
+              <a:t>Clinical journal of gastroenterology  ·  Case Report  ·  🌏 Asia</a:t>
             </a:r>
             <a:endParaRPr lang="en-US" sz="1000" dirty="0"/>
           </a:p>
@@ -2539,7 +2539,7 @@
                 <a:ea typeface="Arial" pitchFamily="34" charset="-122"/>
                 <a:cs typeface="Arial" pitchFamily="34" charset="-120"/>
               </a:rPr>
-              <a:t>Immune checkpoint inhibitors reshape HCC therapy.</a:t>
+              <a:t>Rare primary hepatic undifferentiated carcinoma case</a:t>
             </a:r>
             <a:endParaRPr lang="en-US" sz="1800" dirty="0"/>
           </a:p>
@@ -2560,7 +2560,7 @@
                 <a:ea typeface="Arial" pitchFamily="34" charset="-122"/>
                 <a:cs typeface="Arial" pitchFamily="34" charset="-120"/>
               </a:rPr>
-              <a:t>Monotherapy benefits are currently limited.</a:t>
+              <a:t>High PD-L1 expression observed</a:t>
             </a:r>
             <a:endParaRPr lang="en-US" sz="1800" dirty="0"/>
           </a:p>
@@ -2581,7 +2581,7 @@
                 <a:ea typeface="Arial" pitchFamily="34" charset="-122"/>
                 <a:cs typeface="Arial" pitchFamily="34" charset="-120"/>
               </a:rPr>
-              <a:t>HBV-HCC has a unique immunosuppressive environment.</a:t>
+              <a:t>Durvalumab and tremelimumab combination therapy</a:t>
             </a:r>
             <a:endParaRPr lang="en-US" sz="1800" dirty="0"/>
           </a:p>
@@ -2602,7 +2602,7 @@
                 <a:ea typeface="Arial" pitchFamily="34" charset="-122"/>
                 <a:cs typeface="Arial" pitchFamily="34" charset="-120"/>
               </a:rPr>
-              <a:t>Combination therapies may enhance treatment efficacy.</a:t>
+              <a:t>Partial tumor shrinkage after four courses</a:t>
             </a:r>
             <a:endParaRPr lang="en-US" sz="1800" dirty="0"/>
           </a:p>
@@ -2623,7 +2623,7 @@
                 <a:ea typeface="Arial" pitchFamily="34" charset="-122"/>
                 <a:cs typeface="Arial" pitchFamily="34" charset="-120"/>
               </a:rPr>
-              <a:t>Hepatitis B reactivation is manageable with antivirals.</a:t>
+              <a:t>Complete resolution of nodal metastases</a:t>
             </a:r>
             <a:endParaRPr lang="en-US" sz="1800" dirty="0"/>
           </a:p>
@@ -2659,7 +2659,7 @@
                   <a:srgbClr val="888888"/>
                 </a:solidFill>
               </a:rPr>
-              <a:t>Liu Chenlu, Chang Le, Yan Ying et al.. Current treatment options in oncology. 2026-05-23 DOI: 10.1007/s11864-026-01395-z</a:t>
+              <a:t>Kawahara Michihiko, Fujino Hatsue, Fujii Yasutoshi et al.. Clinical journal of gastroenterology. 2026-05-28 DOI: 10.1007/s12328-026-02329-w</a:t>
             </a:r>
             <a:endParaRPr lang="en-US" sz="800" dirty="0"/>
           </a:p>
@@ -2859,7 +2859,7 @@
                   </a:extLst>
                 </a:hlinkClick>
               </a:rPr>
-              <a:t>Machine learning based hepatic safety score predicts decompensation in hepatocellular carcinoma systemic therapy.</a:t>
+              <a:t>A case of a patient with advanced HCC with Vp4 on hemodialysis who responded to a multimodality treatment including hepatic arterial infusion, radiation therapy, immunotherapy, and molecular-targeted drugs.</a:t>
             </a:r>
             <a:endParaRPr lang="en-US" sz="2400" dirty="0"/>
           </a:p>
@@ -2895,7 +2895,7 @@
                   <a:srgbClr val="888888"/>
                 </a:solidFill>
               </a:rPr>
-              <a:t>NPJ digital medicine  ·  🌏 Asia</a:t>
+              <a:t>Clinical journal of gastroenterology  ·  Case Report  ·  🌏 Asia</a:t>
             </a:r>
             <a:endParaRPr lang="en-US" sz="1000" dirty="0"/>
           </a:p>
@@ -2938,7 +2938,7 @@
                 <a:ea typeface="Arial" pitchFamily="34" charset="-122"/>
                 <a:cs typeface="Arial" pitchFamily="34" charset="-120"/>
               </a:rPr>
-              <a:t>Developed machine learning hepatic safety score.</a:t>
+              <a:t>73-year-old woman with advanced HCC</a:t>
             </a:r>
             <a:endParaRPr lang="en-US" sz="1800" dirty="0"/>
           </a:p>
@@ -2959,7 +2959,7 @@
                 <a:ea typeface="Arial" pitchFamily="34" charset="-122"/>
                 <a:cs typeface="Arial" pitchFamily="34" charset="-120"/>
               </a:rPr>
-              <a:t>Predicts decompensation and variceal bleeding.</a:t>
+              <a:t>Initial treatment: hepatic arterial infusion</a:t>
             </a:r>
             <a:endParaRPr lang="en-US" sz="1800" dirty="0"/>
           </a:p>
@@ -2980,7 +2980,7 @@
                 <a:ea typeface="Arial" pitchFamily="34" charset="-122"/>
                 <a:cs typeface="Arial" pitchFamily="34" charset="-120"/>
               </a:rPr>
-              <a:t>High MHSS linked to increased risks.</a:t>
+              <a:t>Combination therapy with Atezo-Bev</a:t>
             </a:r>
             <a:endParaRPr lang="en-US" sz="1800" dirty="0"/>
           </a:p>
@@ -3001,7 +3001,7 @@
                 <a:ea typeface="Arial" pitchFamily="34" charset="-122"/>
                 <a:cs typeface="Arial" pitchFamily="34" charset="-120"/>
               </a:rPr>
-              <a:t>Atezolizumab-bevacizumab shows mixed benefits.</a:t>
+              <a:t>Partial response with LEN-CDDP</a:t>
             </a:r>
             <a:endParaRPr lang="en-US" sz="1800" dirty="0"/>
           </a:p>
@@ -3022,7 +3022,7 @@
                 <a:ea typeface="Arial" pitchFamily="34" charset="-122"/>
                 <a:cs typeface="Arial" pitchFamily="34" charset="-120"/>
               </a:rPr>
-              <a:t>MHSS guides personalized treatment selection.</a:t>
+              <a:t>Sustained CR with Dur-Tre therapy</a:t>
             </a:r>
             <a:endParaRPr lang="en-US" sz="1800" dirty="0"/>
           </a:p>
@@ -3058,7 +3058,7 @@
                   <a:srgbClr val="888888"/>
                 </a:solidFill>
               </a:rPr>
-              <a:t>Han Ji Won, Lee Jaejun, Yang Keungmo et al.. NPJ digital medicine. 2026-05-21 DOI: 10.1038/s41746-026-02802-3</a:t>
+              <a:t>Kosaka Yumi, Yoshikawa Yuki, Nakahara Takashi et al.. Clinical journal of gastroenterology. 2026-05-28 DOI: 10.1007/s12328-026-02300-9</a:t>
             </a:r>
             <a:endParaRPr lang="en-US" sz="800" dirty="0"/>
           </a:p>
@@ -3258,7 +3258,7 @@
                   </a:extLst>
                 </a:hlinkClick>
               </a:rPr>
-              <a:t>Less Is More: A Single-Dose, Non-Waiting Neoadjuvant Immunotherapy Strategy for Hepatocellular Carcinoma.</a:t>
+              <a:t>Successful treatment of &amp;#x3b2;-catenin-positive, immune checkpoint inhibitor-resistant tumor in a case of multicentric hepatocellular carcinoma.</a:t>
             </a:r>
             <a:endParaRPr lang="en-US" sz="2400" dirty="0"/>
           </a:p>
@@ -3294,7 +3294,7 @@
                   <a:srgbClr val="888888"/>
                 </a:solidFill>
               </a:rPr>
-              <a:t>Biomedical journal  ·  🌏 Asia</a:t>
+              <a:t>Clinical journal of gastroenterology  ·  🌏 Asia</a:t>
             </a:r>
             <a:endParaRPr lang="en-US" sz="1000" dirty="0"/>
           </a:p>
@@ -3337,7 +3337,7 @@
                 <a:ea typeface="Arial" pitchFamily="34" charset="-122"/>
                 <a:cs typeface="Arial" pitchFamily="34" charset="-120"/>
               </a:rPr>
-              <a:t>Neoadjuvant ICIs face unique challenges in HCC.</a:t>
+              <a:t>Case of 70-year-old woman with multicentric HCC</a:t>
             </a:r>
             <a:endParaRPr lang="en-US" sz="1800" dirty="0"/>
           </a:p>
@@ -3358,7 +3358,7 @@
                 <a:ea typeface="Arial" pitchFamily="34" charset="-122"/>
                 <a:cs typeface="Arial" pitchFamily="34" charset="-120"/>
               </a:rPr>
-              <a:t>Single-dose strategy enhances surgical feasibility.</a:t>
+              <a:t>Immune checkpoint inhibitor resistance linked to β-catenin</a:t>
             </a:r>
             <a:endParaRPr lang="en-US" sz="1800" dirty="0"/>
           </a:p>
@@ -3379,7 +3379,7 @@
                 <a:ea typeface="Arial" pitchFamily="34" charset="-122"/>
                 <a:cs typeface="Arial" pitchFamily="34" charset="-120"/>
               </a:rPr>
-              <a:t>Early T-cell activation with PD-1/PD-L1 antibodies.</a:t>
+              <a:t>Proton beam therapy achieved local control</a:t>
             </a:r>
             <a:endParaRPr lang="en-US" sz="1800" dirty="0"/>
           </a:p>
@@ -3400,7 +3400,7 @@
                 <a:ea typeface="Arial" pitchFamily="34" charset="-122"/>
                 <a:cs typeface="Arial" pitchFamily="34" charset="-120"/>
               </a:rPr>
-              <a:t>Minimizes treatment-related adverse events.</a:t>
+              <a:t>Continued therapy maintained remission of other nodules</a:t>
             </a:r>
             <a:endParaRPr lang="en-US" sz="1800" dirty="0"/>
           </a:p>
@@ -3421,7 +3421,7 @@
                 <a:ea typeface="Arial" pitchFamily="34" charset="-122"/>
                 <a:cs typeface="Arial" pitchFamily="34" charset="-120"/>
               </a:rPr>
-              <a:t>Future trials should adopt 'less is more' approach.</a:t>
+              <a:t>Molecular profiling essential for personalized treatment</a:t>
             </a:r>
             <a:endParaRPr lang="en-US" sz="1800" dirty="0"/>
           </a:p>
@@ -3457,7 +3457,7 @@
                   <a:srgbClr val="888888"/>
                 </a:solidFill>
               </a:rPr>
-              <a:t>Chen Kevin Kuan-Yu, Lin Tzu-Jung, Su Te-Wei et al.. Biomedical journal. 2026-05-20 DOI: 10.1016/j.bj.2026.100994</a:t>
+              <a:t>Nomiya Hirotaka, Matsuda Hidetaka, Nosaka Takuto et al.. Clinical journal of gastroenterology. 2026-05-31 DOI: 10.1007/s12328-025-02266-0</a:t>
             </a:r>
             <a:endParaRPr lang="en-US" sz="800" dirty="0"/>
           </a:p>
@@ -3648,7 +3648,7 @@
                   <a:srgbClr val="FFFFFF"/>
                 </a:solidFill>
               </a:rPr>
-              <a:t>### 綜合啟示（Overall Insights）</a:t>
+              <a:t>### 綜合啟示 (Overall Insights)</a:t>
             </a:r>
             <a:endParaRPr lang="en-US" sz="1200" dirty="0"/>
           </a:p>
@@ -3674,7 +3674,7 @@
                   <a:srgbClr val="FFFFFF"/>
                 </a:solidFill>
               </a:rPr>
-              <a:t>1. **免疫治療的臨床實踐效果**  </a:t>
+              <a:t>1. **免疫治療的前景**  </a:t>
             </a:r>
             <a:endParaRPr lang="en-US" sz="1200" dirty="0"/>
           </a:p>
@@ -3691,7 +3691,7 @@
                   <a:srgbClr val="FFFFFF"/>
                 </a:solidFill>
               </a:rPr>
-              <a:t>   The combination of durvalumab and tremelimumab shows promising real-world outcomes in HCC patients, regardless of meeting phase 3 trial criteria, indicating its potential as a viable treatment option.  </a:t>
+              <a:t>   The combination of immune checkpoint inhibitors (ICIs) with other therapies, such as targeted agents and radiotherapy, shows promising efficacy in advanced hepatocellular carcinoma (HCC).  </a:t>
             </a:r>
             <a:endParaRPr lang="en-US" sz="1200" dirty="0"/>
           </a:p>
@@ -3708,7 +3708,7 @@
                   <a:srgbClr val="FFFFFF"/>
                 </a:solidFill>
               </a:rPr>
-              <a:t>   Durvalumab和tremelimumab的組合在肝細胞癌患者中顯示出良好的臨床實踐效果，無論是否符合第三期試驗標準，顯示其作為可行治療選擇的潛力。</a:t>
+              <a:t>   免疫檢查點抑制劑（ICIs）與其他療法（如靶向藥物和放療）的聯合使用在晚期肝細胞癌（HCC）中顯示出有希望的療效。</a:t>
             </a:r>
             <a:endParaRPr lang="en-US" sz="1200" dirty="0"/>
           </a:p>
@@ -3734,7 +3734,7 @@
                   <a:srgbClr val="FFFFFF"/>
                 </a:solidFill>
               </a:rPr>
-              <a:t>2. **一線治療的持久性反應**  </a:t>
+              <a:t>2. **高風險患者的預後改善**  </a:t>
             </a:r>
             <a:endParaRPr lang="en-US" sz="1200" dirty="0"/>
           </a:p>
@@ -3751,7 +3751,7 @@
                   <a:srgbClr val="FFFFFF"/>
                 </a:solidFill>
               </a:rPr>
-              <a:t>   Atezolizumab plus bevacizumab remains the first-line treatment for unresectable HCC, with high response rates leading to potential curative conversions and drug-free remissions in select patients over five years.  </a:t>
+              <a:t>   The IMbrave050 trial demonstrates that adjuvant therapy with atezolizumab and bevacizumab significantly improves recurrence-free survival in high-risk HCC patients.  </a:t>
             </a:r>
             <a:endParaRPr lang="en-US" sz="1200" dirty="0"/>
           </a:p>
@@ -3768,7 +3768,7 @@
                   <a:srgbClr val="FFFFFF"/>
                 </a:solidFill>
               </a:rPr>
-              <a:t>   Atezolizumab加bevacizumab仍然是不可切除肝細胞癌的一線治療，五年內高反應率使某些患者有可能實現治癒性轉化和無藥物緩解。</a:t>
+              <a:t>   IMbrave050試驗顯示，阿特珠單抗和貝伐單抗的輔助療法顯著改善高風險HCC患者的無復發生存期。</a:t>
             </a:r>
             <a:endParaRPr lang="en-US" sz="1200" dirty="0"/>
           </a:p>
@@ -3794,7 +3794,7 @@
                   <a:srgbClr val="FFFFFF"/>
                 </a:solidFill>
               </a:rPr>
-              <a:t>3. **傳統中醫的潛在作用**  </a:t>
+              <a:t>3. **副作用管理的重要性**  </a:t>
             </a:r>
             <a:endParaRPr lang="en-US" sz="1200" dirty="0"/>
           </a:p>
@@ -3811,7 +3811,7 @@
                   <a:srgbClr val="FFFFFF"/>
                 </a:solidFill>
               </a:rPr>
-              <a:t>   Traditional Chinese Medicine may reverse immune checkpoint resistance through lactate metabolic reprogramming, offering novel therapeutic strategies for HCC.  </a:t>
+              <a:t>   The use of prophylactic corticosteroids may help mitigate severe immune-related adverse events associated with dual ICI therapy, enhancing treatment tolerability.  </a:t>
             </a:r>
             <a:endParaRPr lang="en-US" sz="1200" dirty="0"/>
           </a:p>
@@ -3828,7 +3828,7 @@
                   <a:srgbClr val="FFFFFF"/>
                 </a:solidFill>
               </a:rPr>
-              <a:t>   傳統中醫可能通過乳酸代謝重編程逆轉免疫檢查點抗性，為肝細胞癌提供新型治療策略。</a:t>
+              <a:t>   使用預防性皮質類固醇可能有助於減輕與雙重ICIs療法相關的嚴重免疫相關不良事件，提高治療耐受性。</a:t>
             </a:r>
             <a:endParaRPr lang="en-US" sz="1200" dirty="0"/>
           </a:p>
@@ -3854,7 +3854,7 @@
                   <a:srgbClr val="FFFFFF"/>
                 </a:solidFill>
               </a:rPr>
-              <a:t>4. **Neddylation途徑的預後評估**  </a:t>
+              <a:t>4. **人工智慧的潛力**  </a:t>
             </a:r>
             <a:endParaRPr lang="en-US" sz="1200" dirty="0"/>
           </a:p>
@@ -3871,7 +3871,7 @@
                   <a:srgbClr val="FFFFFF"/>
                 </a:solidFill>
               </a:rPr>
-              <a:t>   The Neddylation pathway's activation in HCC may serve as a prognostic marker and could enhance the efficacy of immunotherapy, indicating a need for further exploration.  </a:t>
+              <a:t>   Non-invasive AI models for detecting esophageal varices may improve early intervention strategies in patients with unresectable HCC, potentially enhancing overall outcomes.  </a:t>
             </a:r>
             <a:endParaRPr lang="en-US" sz="1200" dirty="0"/>
           </a:p>
@@ -3888,7 +3888,7 @@
                   <a:srgbClr val="FFFFFF"/>
                 </a:solidFill>
               </a:rPr>
-              <a:t>   Neddylation途徑在肝細胞癌中的活化可能作為預後標記，並可能增強免疫治療的療效，顯示出進一步探索的必要性。</a:t>
+              <a:t>   用於檢測食道靜脈曲張的非侵入性AI模型可能改善不可切除HCC患者的早期介入策略，從而提高整體預後。</a:t>
             </a:r>
             <a:endParaRPr lang="en-US" sz="1200" dirty="0"/>
           </a:p>
@@ -3914,7 +3914,7 @@
                   <a:srgbClr val="FFFFFF"/>
                 </a:solidFill>
               </a:rPr>
-              <a:t>5. **機器學習在安全性評估中的應用**  </a:t>
+              <a:t>5. **多模態治療的成功案例**  </a:t>
             </a:r>
             <a:endParaRPr lang="en-US" sz="1200" dirty="0"/>
           </a:p>
@@ -3931,7 +3931,7 @@
                   <a:srgbClr val="FFFFFF"/>
                 </a:solidFill>
               </a:rPr>
-              <a:t>   Machine learning-based hepatic safety scores can predict decompensation risks in HCC patients undergoing systemic therapy, highlighting the importance of personalized treatment approaches.</a:t>
+              <a:t>   Reports of successful multimodal treatments highlight the potential for personalized approaches in managing complex cases of HCC, particularly those with portal vein tumor thrombosis.</a:t>
             </a:r>
             <a:endParaRPr lang="en-US" sz="1200" dirty="0"/>
           </a:p>
@@ -4077,7 +4077,7 @@
                   <a:srgbClr val="FFFFFF"/>
                 </a:solidFill>
               </a:rPr>
-              <a:t>基於機器學習的肝臟安全性評分能預測接受系統治療的肝細胞癌患者的脫補償風險，突顯個性化治療方法的重要性。</a:t>
+              <a:t>成功的多模態治療案例突顯了在管理複雜HCC病例（尤其是伴有門靜脈腫瘤栓塞的病例）中個性化治療的潛力。</a:t>
             </a:r>
             <a:endParaRPr lang="en-US" sz="1200" dirty="0"/>
           </a:p>
@@ -4103,7 +4103,7 @@
                   <a:srgbClr val="FFFFFF"/>
                 </a:solidFill>
               </a:rPr>
-              <a:t>### 未來研究方向（Future Research Directions）</a:t>
+              <a:t>### 未來研究方向 (Future Research Directions)</a:t>
             </a:r>
             <a:endParaRPr lang="en-US" sz="1200" dirty="0"/>
           </a:p>
@@ -4129,7 +4129,7 @@
                   <a:srgbClr val="FFFFFF"/>
                 </a:solidFill>
               </a:rPr>
-              <a:t>1. **擴大免疫治療的適應症**  </a:t>
+              <a:t>1. **探索新療法的組合**  </a:t>
             </a:r>
             <a:endParaRPr lang="en-US" sz="1200" dirty="0"/>
           </a:p>
@@ -4146,7 +4146,7 @@
                   <a:srgbClr val="FFFFFF"/>
                 </a:solidFill>
               </a:rPr>
-              <a:t>   Future studies should investigate the efficacy of immune checkpoint inhibitors in broader HCC populations, particularly those with portal vein tumor thrombosis and other high-risk features.  </a:t>
+              <a:t>   Future studies should investigate novel combinations of ICIs with other therapeutic modalities to further enhance treatment efficacy in HCC.  </a:t>
             </a:r>
             <a:endParaRPr lang="en-US" sz="1200" dirty="0"/>
           </a:p>
@@ -4163,7 +4163,7 @@
                   <a:srgbClr val="FFFFFF"/>
                 </a:solidFill>
               </a:rPr>
-              <a:t>   未來研究應探討免疫檢查點抑制劑在更廣泛肝細胞癌人群中的療效，特別是那些具有門靜脈腫瘤血栓和其他高風險特徵的患者。</a:t>
+              <a:t>   未來的研究應探索ICIs與其他治療方式的新型組合，以進一步提高HCC的治療效果。</a:t>
             </a:r>
             <a:endParaRPr lang="en-US" sz="1200" dirty="0"/>
           </a:p>
@@ -4189,7 +4189,7 @@
                   <a:srgbClr val="FFFFFF"/>
                 </a:solidFill>
               </a:rPr>
-              <a:t>2. **中醫與現代療法的結合**  </a:t>
+              <a:t>2. **副作用的預測與管理**  </a:t>
             </a:r>
             <a:endParaRPr lang="en-US" sz="1200" dirty="0"/>
           </a:p>
@@ -4206,7 +4206,7 @@
                   <a:srgbClr val="FFFFFF"/>
                 </a:solidFill>
               </a:rPr>
-              <a:t>   Research should explore the synergistic effects of Traditional Chinese Medicine combined with modern immunotherapies to enhance treatment outcomes in HCC.  </a:t>
+              <a:t>   Research should focus on identifying biomarkers that predict severe immune-related adverse events to optimize the use of prophylactic strategies.  </a:t>
             </a:r>
             <a:endParaRPr lang="en-US" sz="1200" dirty="0"/>
           </a:p>
@@ -4223,7 +4223,7 @@
                   <a:srgbClr val="FFFFFF"/>
                 </a:solidFill>
               </a:rPr>
-              <a:t>   研究應探討傳統中醫與現代免疫療法結合的協同效應，以提升肝細胞癌的治療效果。</a:t>
+              <a:t>   研究應集中於識別預測嚴重免疫相關不良事件的生物標記，以優化預防性策略的使用。</a:t>
             </a:r>
             <a:endParaRPr lang="en-US" sz="1200" dirty="0"/>
           </a:p>
@@ -4249,7 +4249,7 @@
                   <a:srgbClr val="FFFFFF"/>
                 </a:solidFill>
               </a:rPr>
-              <a:t>3. **Neddylation途徑的深入分析**  </a:t>
+              <a:t>3. **AI技術的應用擴展**  </a:t>
             </a:r>
             <a:endParaRPr lang="en-US" sz="1200" dirty="0"/>
           </a:p>
@@ -4266,7 +4266,7 @@
                   <a:srgbClr val="FFFFFF"/>
                 </a:solidFill>
               </a:rPr>
-              <a:t>   Further investigation into the Neddylation pathway's role in HCC progression and its potential as a therapeutic target is warranted.  </a:t>
+              <a:t>   Expanding the use of AI in predicting treatment responses and complications in HCC could lead to more tailored and effective management strategies.  </a:t>
             </a:r>
             <a:endParaRPr lang="en-US" sz="1200" dirty="0"/>
           </a:p>
@@ -4283,7 +4283,7 @@
                   <a:srgbClr val="FFFFFF"/>
                 </a:solidFill>
               </a:rPr>
-              <a:t>   需要進一步研究Neddylation途徑在肝細胞癌進展中的作用及其作為治療靶點的潛力。</a:t>
+              <a:t>   擴大AI在預測HCC治療反應和併發症中的應用可能導致更具針對性和有效的管理策略。</a:t>
             </a:r>
             <a:endParaRPr lang="en-US" sz="1200" dirty="0"/>
           </a:p>
@@ -4309,7 +4309,7 @@
                   <a:srgbClr val="FFFFFF"/>
                 </a:solidFill>
               </a:rPr>
-              <a:t>4. **個性化治療策略的發展**  </a:t>
+              <a:t>4. **長期療效的評估**  </a:t>
             </a:r>
             <a:endParaRPr lang="en-US" sz="1200" dirty="0"/>
           </a:p>
@@ -4326,7 +4326,7 @@
                   <a:srgbClr val="FFFFFF"/>
                 </a:solidFill>
               </a:rPr>
-              <a:t>   Developing personalized treatment strategies using machine learning models to predict patient outcomes and optimize therapeutic regimens in HCC is essential.  </a:t>
+              <a:t>   Long-term follow-up studies are needed to assess the durability of responses to combination therapies in HCC and their impact on overall survival.  </a:t>
             </a:r>
             <a:endParaRPr lang="en-US" sz="1200" dirty="0"/>
           </a:p>
@@ -4343,7 +4343,7 @@
                   <a:srgbClr val="FFFFFF"/>
                 </a:solidFill>
               </a:rPr>
-              <a:t>   開發使用機器學習模型的個性化治療策略，以預測患者結果並優化肝細胞癌的治療方案至關重要。</a:t>
+              <a:t>   需要長期隨訪研究來評估HCC中聯合療法反應的持久性及其對整體生存的影響。</a:t>
             </a:r>
             <a:endParaRPr lang="en-US" sz="1200" dirty="0"/>
           </a:p>
@@ -4369,7 +4369,7 @@
                   <a:srgbClr val="FFFFFF"/>
                 </a:solidFill>
               </a:rPr>
-              <a:t>5. **長期療效的持續評估**  </a:t>
+              <a:t>5. **個體化治療的發展**  </a:t>
             </a:r>
             <a:endParaRPr lang="en-US" sz="1200" dirty="0"/>
           </a:p>
@@ -4386,7 +4386,7 @@
                   <a:srgbClr val="FFFFFF"/>
                 </a:solidFill>
               </a:rPr>
-              <a:t>   Longitudinal studies are needed to assess the durability of responses to combination therapies in HCC and their impact on overall survival.  </a:t>
+              <a:t>   Future research should aim to develop personalized treatment regimens based on genetic and molecular profiling of tumors in HCC patients.  </a:t>
             </a:r>
             <a:endParaRPr lang="en-US" sz="1200" dirty="0"/>
           </a:p>
@@ -4403,7 +4403,7 @@
                   <a:srgbClr val="FFFFFF"/>
                 </a:solidFill>
               </a:rPr>
-              <a:t>   需要進行縱向研究來評估肝細胞癌中聯合療法反應的持久性及其對整體生存的影響。</a:t>
+              <a:t>   未來的研究應致力於根據HCC患者腫瘤的基因和分子特徵開發個體化治療方案。</a:t>
             </a:r>
             <a:endParaRPr lang="en-US" sz="1200" dirty="0"/>
           </a:p>
@@ -4637,7 +4637,7 @@
                 <a:ea typeface="Arial" pitchFamily="34" charset="-122"/>
                 <a:cs typeface="Arial" pitchFamily="34" charset="-120"/>
               </a:rPr>
-              <a:t>Outcomes of Patients With Hepatocellular Carcinoma Treated With Durvalumab Plus …</a:t>
+              <a:t>Updated data from IMbrave050: Adjuvant atezolizumab plus bevacizumab for high-ri…</a:t>
             </a:r>
             <a:endParaRPr lang="en-US" sz="1400" dirty="0"/>
           </a:p>
@@ -4674,7 +4674,7 @@
                 <a:ea typeface="Arial" pitchFamily="34" charset="-122"/>
                 <a:cs typeface="Arial" pitchFamily="34" charset="-120"/>
               </a:rPr>
-              <a:t>Five years after IMbrave150 with clinical integration of atezolizumab plus bevac…</a:t>
+              <a:t>Revisiting prophylactic corticosteroids to mitigate severe immune-related advers…</a:t>
             </a:r>
             <a:endParaRPr lang="en-US" sz="1400" dirty="0"/>
           </a:p>
@@ -4711,7 +4711,7 @@
                 <a:ea typeface="Arial" pitchFamily="34" charset="-122"/>
                 <a:cs typeface="Arial" pitchFamily="34" charset="-120"/>
               </a:rPr>
-              <a:t>Durvalumab plus HAIC-FOLFOX followed by maintenance durvalumab for hepatocellula…</a:t>
+              <a:t>Effect and safety of tislelizumab combined with anlotinib and radiotherapy in ad…</a:t>
             </a:r>
             <a:endParaRPr lang="en-US" sz="1400" dirty="0"/>
           </a:p>
@@ -4748,7 +4748,7 @@
                 <a:ea typeface="Arial" pitchFamily="34" charset="-122"/>
                 <a:cs typeface="Arial" pitchFamily="34" charset="-120"/>
               </a:rPr>
-              <a:t>Traditional Chinese Medicine Reverses Immune Checkpoint Resistance Through Lacta…</a:t>
+              <a:t>Detection of esophageal varices and prediction of hepatic decompensation in unre…</a:t>
             </a:r>
             <a:endParaRPr lang="en-US" sz="1400" dirty="0"/>
           </a:p>
@@ -4785,7 +4785,7 @@
                 <a:ea typeface="Arial" pitchFamily="34" charset="-122"/>
                 <a:cs typeface="Arial" pitchFamily="34" charset="-120"/>
               </a:rPr>
-              <a:t>Identifying Neddylation-modified features to assess prognosis and immune efficac…</a:t>
+              <a:t>Complementary evaluation of phase III immunotherapy trials in advanced HCC using…</a:t>
             </a:r>
             <a:endParaRPr lang="en-US" sz="1400" dirty="0"/>
           </a:p>
@@ -4896,7 +4896,7 @@
                 <a:ea typeface="Arial" pitchFamily="34" charset="-122"/>
                 <a:cs typeface="Arial" pitchFamily="34" charset="-120"/>
               </a:rPr>
-              <a:t>Breakthroughs in HBV-related HCC Therapy: The Unmatched Potential of Immune Chec…</a:t>
+              <a:t>Durvalumab and tremelimumab combination therapy achieved remarkable response in …</a:t>
             </a:r>
             <a:endParaRPr lang="en-US" sz="1400" dirty="0"/>
           </a:p>
@@ -4933,7 +4933,7 @@
                 <a:ea typeface="Arial" pitchFamily="34" charset="-122"/>
                 <a:cs typeface="Arial" pitchFamily="34" charset="-120"/>
               </a:rPr>
-              <a:t>Machine learning based hepatic safety score predicts decompensation in hepatocel…</a:t>
+              <a:t>A case of a patient with advanced HCC with Vp4 on hemodialysis who responded to …</a:t>
             </a:r>
             <a:endParaRPr lang="en-US" sz="1400" dirty="0"/>
           </a:p>
@@ -4970,7 +4970,7 @@
                 <a:ea typeface="Arial" pitchFamily="34" charset="-122"/>
                 <a:cs typeface="Arial" pitchFamily="34" charset="-120"/>
               </a:rPr>
-              <a:t>Less Is More: A Single-Dose, Non-Waiting Neoadjuvant Immunotherapy Strategy for …</a:t>
+              <a:t>Successful treatment of &amp;#x3b2;-catenin-positive, immune checkpoint inhibitor-re…</a:t>
             </a:r>
             <a:endParaRPr lang="en-US" sz="1400" dirty="0"/>
           </a:p>
@@ -5125,7 +5125,7 @@
                   </a:extLst>
                 </a:hlinkClick>
               </a:rPr>
-              <a:t>Outcomes of Patients With Hepatocellular Carcinoma Treated With Durvalumab Plus Tremelimumab in Real-World Clinical Practice Who Met or Did Not Meet the Inclusion Criteria for the Phase 3 HIMALAYA Trial.</a:t>
+              <a:t>Updated data from IMbrave050: Adjuvant atezolizumab plus bevacizumab for high-risk hepatocellular carcinoma.</a:t>
             </a:r>
             <a:endParaRPr lang="en-US" sz="2400" dirty="0"/>
           </a:p>
@@ -5161,7 +5161,7 @@
                   <a:srgbClr val="888888"/>
                 </a:solidFill>
               </a:rPr>
-              <a:t>Journal of gastroenterology and hepatology  ·  RCT Phase 3  ·  🌏 Asia</a:t>
+              <a:t>Journal of hepatology  ·  IF 25.7  ·  RCT  ·  🌏 Asia</a:t>
             </a:r>
             <a:endParaRPr lang="en-US" sz="1000" dirty="0"/>
           </a:p>
@@ -5204,7 +5204,7 @@
                 <a:ea typeface="Arial" pitchFamily="34" charset="-122"/>
                 <a:cs typeface="Arial" pitchFamily="34" charset="-120"/>
               </a:rPr>
-              <a:t>Study on Durvalumab plus Tremelimumab in HCC</a:t>
+              <a:t>IMbrave050 met primary endpoint for RFS</a:t>
             </a:r>
             <a:endParaRPr lang="en-US" sz="1800" dirty="0"/>
           </a:p>
@@ -5225,7 +5225,7 @@
                 <a:ea typeface="Arial" pitchFamily="34" charset="-122"/>
                 <a:cs typeface="Arial" pitchFamily="34" charset="-120"/>
               </a:rPr>
-              <a:t>412 patients treated at 30 institutions</a:t>
+              <a:t>RFS HR for treatment vs surveillance was 0.72</a:t>
             </a:r>
             <a:endParaRPr lang="en-US" sz="1800" dirty="0"/>
           </a:p>
@@ -5246,7 +5246,7 @@
                 <a:ea typeface="Arial" pitchFamily="34" charset="-122"/>
                 <a:cs typeface="Arial" pitchFamily="34" charset="-120"/>
               </a:rPr>
-              <a:t>HIMALAYA group had better PFS and OS</a:t>
+              <a:t>OS data remained immature in updated analysis</a:t>
             </a:r>
             <a:endParaRPr lang="en-US" sz="1800" dirty="0"/>
           </a:p>
@@ -5267,7 +5267,7 @@
                 <a:ea typeface="Arial" pitchFamily="34" charset="-122"/>
                 <a:cs typeface="Arial" pitchFamily="34" charset="-120"/>
               </a:rPr>
-              <a:t>Independent predictors: BMI, portal vein invasion</a:t>
+              <a:t>Initial RFS benefit not sustained over time</a:t>
             </a:r>
             <a:endParaRPr lang="en-US" sz="1800" dirty="0"/>
           </a:p>
@@ -5288,7 +5288,7 @@
                 <a:ea typeface="Arial" pitchFamily="34" charset="-122"/>
                 <a:cs typeface="Arial" pitchFamily="34" charset="-120"/>
               </a:rPr>
-              <a:t>Endocrine dysfunction more common in HIMALAYA group</a:t>
+              <a:t>Safety profile consistent and manageable</a:t>
             </a:r>
             <a:endParaRPr lang="en-US" sz="1800" dirty="0"/>
           </a:p>
@@ -5324,7 +5324,7 @@
                   <a:srgbClr val="888888"/>
                 </a:solidFill>
               </a:rPr>
-              <a:t>Matono Tomomitsu, Tada Toshifumi, Hiraoka Atsushi et al.. Journal of gastroenterology and hepatology. 2026-05-23 DOI: 10.1111/jgh.70422</a:t>
+              <a:t>Yopp Adam, Chen Minshan, Cheng Ann-Lii et al.. Journal of hepatology. 2026-05-16 DOI: 10.1016/j.jhep.2026.01.006</a:t>
             </a:r>
             <a:endParaRPr lang="en-US" sz="800" dirty="0"/>
           </a:p>
@@ -5524,7 +5524,7 @@
                   </a:extLst>
                 </a:hlinkClick>
               </a:rPr>
-              <a:t>Five years after IMbrave150 with clinical integration of atezolizumab plus bevacizumab in hepatocellular carcinoma.</a:t>
+              <a:t>Revisiting prophylactic corticosteroids to mitigate severe immune-related adverse events in hepatocellular carcinoma.</a:t>
             </a:r>
             <a:endParaRPr lang="en-US" sz="2400" dirty="0"/>
           </a:p>
@@ -5560,7 +5560,7 @@
                   <a:srgbClr val="888888"/>
                 </a:solidFill>
               </a:rPr>
-              <a:t>Annals of hepatology  ·  RCT Phase 3  ·  🌏 Asia</a:t>
+              <a:t>Journal of hepatology  ·  IF 25.7  ·  Prospective Study  ·  🌏 Asia</a:t>
             </a:r>
             <a:endParaRPr lang="en-US" sz="1000" dirty="0"/>
           </a:p>
@@ -5603,7 +5603,7 @@
                 <a:ea typeface="Arial" pitchFamily="34" charset="-122"/>
                 <a:cs typeface="Arial" pitchFamily="34" charset="-120"/>
               </a:rPr>
-              <a:t>Atezolizumab plus bevacizumab is first-line therapy.</a:t>
+              <a:t>Dual ICIs reshape HCC treatment landscape.</a:t>
             </a:r>
             <a:endParaRPr lang="en-US" sz="1800" dirty="0"/>
           </a:p>
@@ -5624,7 +5624,7 @@
                 <a:ea typeface="Arial" pitchFamily="34" charset="-122"/>
                 <a:cs typeface="Arial" pitchFamily="34" charset="-120"/>
               </a:rPr>
-              <a:t>High response rates enable curative conversion.</a:t>
+              <a:t>Severe irAEs limit clinical uptake of ICIs.</a:t>
             </a:r>
             <a:endParaRPr lang="en-US" sz="1800" dirty="0"/>
           </a:p>
@@ -5645,7 +5645,7 @@
                 <a:ea typeface="Arial" pitchFamily="34" charset="-122"/>
                 <a:cs typeface="Arial" pitchFamily="34" charset="-120"/>
               </a:rPr>
-              <a:t>Bleeding risk requires proactive management.</a:t>
+              <a:t>Prophylactic corticosteroids reduce severe irAEs.</a:t>
             </a:r>
             <a:endParaRPr lang="en-US" sz="1800" dirty="0"/>
           </a:p>
@@ -5666,7 +5666,7 @@
                 <a:ea typeface="Arial" pitchFamily="34" charset="-122"/>
                 <a:cs typeface="Arial" pitchFamily="34" charset="-120"/>
               </a:rPr>
-              <a:t>Combination with locoregional therapy shows promise.</a:t>
+              <a:t>Corticosteroids do not impair T-cell activation.</a:t>
             </a:r>
             <a:endParaRPr lang="en-US" sz="1800" dirty="0"/>
           </a:p>
@@ -5687,7 +5687,7 @@
                 <a:ea typeface="Arial" pitchFamily="34" charset="-122"/>
                 <a:cs typeface="Arial" pitchFamily="34" charset="-120"/>
               </a:rPr>
-              <a:t>Key gaps in biomarkers and sequencing remain.</a:t>
+              <a:t>Need for prospective evaluation in HCC.</a:t>
             </a:r>
             <a:endParaRPr lang="en-US" sz="1800" dirty="0"/>
           </a:p>
@@ -5723,7 +5723,7 @@
                   <a:srgbClr val="888888"/>
                 </a:solidFill>
               </a:rPr>
-              <a:t>Lai Kuan-Chang, Chen San-Chi. Annals of hepatology. 2026-05-19 DOI: 10.1016/j.aohep.2026.102237</a:t>
+              <a:t>Shen Ying-Chun, Pinato David J, Liu Tsung-Hao et al.. Journal of hepatology. 2026-05-16 DOI: 10.1016/j.jhep.2026.01.009</a:t>
             </a:r>
             <a:endParaRPr lang="en-US" sz="800" dirty="0"/>
           </a:p>
@@ -5923,7 +5923,7 @@
                   </a:extLst>
                 </a:hlinkClick>
               </a:rPr>
-              <a:t>Durvalumab plus HAIC-FOLFOX followed by maintenance durvalumab for hepatocellular carcinoma with major portal invasion: phase 2 DurHope study.</a:t>
+              <a:t>Effect and safety of tislelizumab combined with anlotinib and radiotherapy in advanced hepatocellular carcinoma: A single-arm, single-center, phase II clinical study.</a:t>
             </a:r>
             <a:endParaRPr lang="en-US" sz="2400" dirty="0"/>
           </a:p>
@@ -5959,7 +5959,7 @@
                   <a:srgbClr val="888888"/>
                 </a:solidFill>
               </a:rPr>
-              <a:t>Nature communications  ·  IF 14.7  ·  RCT Phase 2</a:t>
+              <a:t>Scientific reports  ·  RCT Phase 2  ·  🌏 Asia</a:t>
             </a:r>
             <a:endParaRPr lang="en-US" sz="1000" dirty="0"/>
           </a:p>
@@ -6002,7 +6002,7 @@
                 <a:ea typeface="Arial" pitchFamily="34" charset="-122"/>
                 <a:cs typeface="Arial" pitchFamily="34" charset="-120"/>
               </a:rPr>
-              <a:t>Durvalumab plus HAIC-FOLFOX shows promise.</a:t>
+              <a:t>Tislelizumab plus anlotinib and radiotherapy evaluated</a:t>
             </a:r>
             <a:endParaRPr lang="en-US" sz="1800" dirty="0"/>
           </a:p>
@@ -6023,7 +6023,7 @@
                 <a:ea typeface="Arial" pitchFamily="34" charset="-122"/>
                 <a:cs typeface="Arial" pitchFamily="34" charset="-120"/>
               </a:rPr>
-              <a:t>1-year overall survival rate at 63.3%.</a:t>
+              <a:t>62.2% objective response rate achieved</a:t>
             </a:r>
             <a:endParaRPr lang="en-US" sz="1800" dirty="0"/>
           </a:p>
@@ -6044,7 +6044,7 @@
                 <a:ea typeface="Arial" pitchFamily="34" charset="-122"/>
                 <a:cs typeface="Arial" pitchFamily="34" charset="-120"/>
               </a:rPr>
-              <a:t>Tumor RNA sequencing reveals resistance signatures.</a:t>
+              <a:t>Median progression-free survival of 11 months</a:t>
             </a:r>
             <a:endParaRPr lang="en-US" sz="1800" dirty="0"/>
           </a:p>
@@ -6065,7 +6065,7 @@
                 <a:ea typeface="Arial" pitchFamily="34" charset="-122"/>
                 <a:cs typeface="Arial" pitchFamily="34" charset="-120"/>
               </a:rPr>
-              <a:t>Increased immune infiltration in responders.</a:t>
+              <a:t>Safety profile shows mostly grade 1/2 AEs</a:t>
             </a:r>
             <a:endParaRPr lang="en-US" sz="1800" dirty="0"/>
           </a:p>
@@ -6086,7 +6086,7 @@
                 <a:ea typeface="Arial" pitchFamily="34" charset="-122"/>
                 <a:cs typeface="Arial" pitchFamily="34" charset="-120"/>
               </a:rPr>
-              <a:t>Dynamic T-cell expansion post-treatment observed.</a:t>
+              <a:t>Outcomes independent of PVTT and BCLC stage</a:t>
             </a:r>
             <a:endParaRPr lang="en-US" sz="1800" dirty="0"/>
           </a:p>
@@ -6122,7 +6122,7 @@
                   <a:srgbClr val="888888"/>
                 </a:solidFill>
               </a:rPr>
-              <a:t>Yi Junzhe, Wang Jiongliang, Zhang Yimin et al.. Nature communications. 2026-05-18 DOI: 10.1038/s41467-026-73131-y</a:t>
+              <a:t>Fan Huaxi, Liu Yuhong, Wu Guishu et al.. Scientific reports. 2026-05-28 DOI: 10.1038/s41598-026-55609-3</a:t>
             </a:r>
             <a:endParaRPr lang="en-US" sz="800" dirty="0"/>
           </a:p>
@@ -6322,7 +6322,7 @@
                   </a:extLst>
                 </a:hlinkClick>
               </a:rPr>
-              <a:t>Traditional Chinese Medicine Reverses Immune Checkpoint Resistance Through Lactate Metabolic Reprogramming in Hepatocellular Carcinoma: Mechanisms and Therapeutic Implications.</a:t>
+              <a:t>Detection of esophageal varices and prediction of hepatic decompensation in unresectable hepatocellular carcinoma using AI.</a:t>
             </a:r>
             <a:endParaRPr lang="en-US" sz="2400" dirty="0"/>
           </a:p>
@@ -6358,7 +6358,7 @@
                   <a:srgbClr val="888888"/>
                 </a:solidFill>
               </a:rPr>
-              <a:t>Journal of ethnopharmacology  ·  RCT Phase 3</a:t>
+              <a:t>Journal of hepatology  ·  IF 25.7  ·  Retrospective Study</a:t>
             </a:r>
             <a:endParaRPr lang="en-US" sz="1000" dirty="0"/>
           </a:p>
@@ -6401,7 +6401,7 @@
                 <a:ea typeface="Arial" pitchFamily="34" charset="-122"/>
                 <a:cs typeface="Arial" pitchFamily="34" charset="-120"/>
               </a:rPr>
-              <a:t>TCM compounds reprogram lactate metabolism</a:t>
+              <a:t>Developed AI models for EV detection.</a:t>
             </a:r>
             <a:endParaRPr lang="en-US" sz="1800" dirty="0"/>
           </a:p>
@@ -6422,7 +6422,7 @@
                 <a:ea typeface="Arial" pitchFamily="34" charset="-122"/>
                 <a:cs typeface="Arial" pitchFamily="34" charset="-120"/>
               </a:rPr>
-              <a:t>Elevated lactate linked to immune resistance</a:t>
+              <a:t>Validated models using routine CT data.</a:t>
             </a:r>
             <a:endParaRPr lang="en-US" sz="1800" dirty="0"/>
           </a:p>
@@ -6443,7 +6443,7 @@
                 <a:ea typeface="Arial" pitchFamily="34" charset="-122"/>
                 <a:cs typeface="Arial" pitchFamily="34" charset="-120"/>
               </a:rPr>
-              <a:t>Icaritin shows promise in Phase III trials</a:t>
+              <a:t>HepatoSageCT improves prediction accuracy.</a:t>
             </a:r>
             <a:endParaRPr lang="en-US" sz="1800" dirty="0"/>
           </a:p>
@@ -6464,7 +6464,7 @@
                 <a:ea typeface="Arial" pitchFamily="34" charset="-122"/>
                 <a:cs typeface="Arial" pitchFamily="34" charset="-120"/>
               </a:rPr>
-              <a:t>Selective MCT4 inhibition enhances anti-PD-1</a:t>
+              <a:t>Reduced unnecessary endoscopies in patients.</a:t>
             </a:r>
             <a:endParaRPr lang="en-US" sz="1800" dirty="0"/>
           </a:p>
@@ -6485,7 +6485,7 @@
                 <a:ea typeface="Arial" pitchFamily="34" charset="-122"/>
                 <a:cs typeface="Arial" pitchFamily="34" charset="-120"/>
               </a:rPr>
-              <a:t>Need for biomarker-enriched combination trials</a:t>
+              <a:t>Promising tool for personalized patient management.</a:t>
             </a:r>
             <a:endParaRPr lang="en-US" sz="1800" dirty="0"/>
           </a:p>
@@ -6521,7 +6521,7 @@
                   <a:srgbClr val="888888"/>
                 </a:solidFill>
               </a:rPr>
-              <a:t>Liu Lihui, Wang Jingxiao, Hu Kaiwen. Journal of ethnopharmacology. 2026-05-24 DOI: 10.1016/j.jep.2026.121885</a:t>
+              <a:t>Rabasco Meneghetti Asier, Campani Claudia, Roux Charles et al.. Journal of hepatology. 2026-05-16 DOI: 10.1016/j.jhep.2026.01.021</a:t>
             </a:r>
             <a:endParaRPr lang="en-US" sz="800" dirty="0"/>
           </a:p>
@@ -6721,7 +6721,7 @@
                   </a:extLst>
                 </a:hlinkClick>
               </a:rPr>
-              <a:t>Identifying Neddylation-modified features to assess prognosis and immune efficacy in hepatocellular carcinoma.</a:t>
+              <a:t>Complementary evaluation of phase III immunotherapy trials in advanced HCC using the survival-inferred fragility index.</a:t>
             </a:r>
             <a:endParaRPr lang="en-US" sz="2400" dirty="0"/>
           </a:p>
@@ -6757,7 +6757,7 @@
                   <a:srgbClr val="888888"/>
                 </a:solidFill>
               </a:rPr>
-              <a:t>Apoptosis : an international journal on programmed cell death  ·  Basic Research  ·  🌏 Asia</a:t>
+              <a:t>Digestive and liver disease : official journal of the Italian Society of Gastroenterology and the Italian Association for the Study of the Liver  ·  RCT Phase 3</a:t>
             </a:r>
             <a:endParaRPr lang="en-US" sz="1000" dirty="0"/>
           </a:p>
@@ -6800,7 +6800,7 @@
                 <a:ea typeface="Arial" pitchFamily="34" charset="-122"/>
                 <a:cs typeface="Arial" pitchFamily="34" charset="-120"/>
               </a:rPr>
-              <a:t>Neddylation pathway is activated in HCC.</a:t>
+              <a:t>HCC treatment shifted to immune checkpoint inhibitors.</a:t>
             </a:r>
             <a:endParaRPr lang="en-US" sz="1800" dirty="0"/>
           </a:p>
@@ -6821,7 +6821,7 @@
                 <a:ea typeface="Arial" pitchFamily="34" charset="-122"/>
                 <a:cs typeface="Arial" pitchFamily="34" charset="-120"/>
               </a:rPr>
-              <a:t>MLN4924 inhibits HCC cell growth and migration.</a:t>
+              <a:t>Survival-Inferred Fragility Index quantifies trial stability.</a:t>
             </a:r>
             <a:endParaRPr lang="en-US" sz="1800" dirty="0"/>
           </a:p>
@@ -6842,7 +6842,7 @@
                 <a:ea typeface="Arial" pitchFamily="34" charset="-122"/>
                 <a:cs typeface="Arial" pitchFamily="34" charset="-120"/>
               </a:rPr>
-              <a:t>High NRS correlates with poor prognosis.</a:t>
+              <a:t>Six phase III trials analyzed with 4570 patients.</a:t>
             </a:r>
             <a:endParaRPr lang="en-US" sz="1800" dirty="0"/>
           </a:p>
@@ -6863,7 +6863,7 @@
                 <a:ea typeface="Arial" pitchFamily="34" charset="-122"/>
                 <a:cs typeface="Arial" pitchFamily="34" charset="-120"/>
               </a:rPr>
-              <a:t>PSMD1 knockdown reduces HCC cell proliferation.</a:t>
+              <a:t>Median SIFI for overall survival was 10.</a:t>
             </a:r>
             <a:endParaRPr lang="en-US" sz="1800" dirty="0"/>
           </a:p>
@@ -6884,7 +6884,7 @@
                 <a:ea typeface="Arial" pitchFamily="34" charset="-122"/>
                 <a:cs typeface="Arial" pitchFamily="34" charset="-120"/>
               </a:rPr>
-              <a:t>Neddylation features predict immunotherapy efficacy.</a:t>
+              <a:t>Asian trials showed higher stability than global trials.</a:t>
             </a:r>
             <a:endParaRPr lang="en-US" sz="1800" dirty="0"/>
           </a:p>
@@ -6920,7 +6920,7 @@
                   <a:srgbClr val="888888"/>
                 </a:solidFill>
               </a:rPr>
-              <a:t>Liu Zitao, Zuo Cheng, Wu Changlei et al.. Apoptosis : an international journal on programmed cell death. 2026-05-24 DOI: 10.1007/s10495-026-02339-6</a:t>
+              <a:t>Dalbeni A, Vicardi M, Stefanini B et al.. Digestive and liver disease : official journal of the Italian Society of Gastroenterology and the Italian Association for the Study of the Liver. 2026-05-27 DOI: 10.1016/j.dld.2026.04.013</a:t>
             </a:r>
             <a:endParaRPr lang="en-US" sz="800" dirty="0"/>
           </a:p>
@@ -7199,7 +7199,7 @@
                 <a:ea typeface="Arial" pitchFamily="34" charset="-122"/>
                 <a:cs typeface="Arial" pitchFamily="34" charset="-120"/>
               </a:rPr>
-              <a:t>Phase II study on HAIC and lenvatinib</a:t>
+              <a:t>Phase II study on HCC with PVTT</a:t>
             </a:r>
             <a:endParaRPr lang="en-US" sz="1800" dirty="0"/>
           </a:p>
@@ -7220,7 +7220,7 @@
                 <a:ea typeface="Arial" pitchFamily="34" charset="-122"/>
                 <a:cs typeface="Arial" pitchFamily="34" charset="-120"/>
               </a:rPr>
-              <a:t>Comparison with PD-1 inhibitors alone</a:t>
+              <a:t>HAIC combined with lenvatinib and PD-1</a:t>
             </a:r>
             <a:endParaRPr lang="en-US" sz="1800" dirty="0"/>
           </a:p>
@@ -7241,49 +7241,7 @@
                 <a:ea typeface="Arial" pitchFamily="34" charset="-122"/>
                 <a:cs typeface="Arial" pitchFamily="34" charset="-120"/>
               </a:rPr>
-              <a:t>Focus on advanced HCC with PVTT</a:t>
-            </a:r>
-            <a:endParaRPr lang="en-US" sz="1800" dirty="0"/>
-          </a:p>
-          <a:p>
-            <a:pPr marL="342900" indent="-342900">
-              <a:spcAft>
-                <a:spcPts val="800"/>
-              </a:spcAft>
-              <a:buSzPct val="100000"/>
-              <a:buChar char="•"/>
-            </a:pPr>
-            <a:r>
-              <a:rPr lang="en-US" sz="1800" dirty="0">
-                <a:solidFill>
-                  <a:srgbClr val="333333"/>
-                </a:solidFill>
-                <a:latin typeface="Arial" pitchFamily="34" charset="0"/>
-                <a:ea typeface="Arial" pitchFamily="34" charset="-122"/>
-                <a:cs typeface="Arial" pitchFamily="34" charset="-120"/>
-              </a:rPr>
-              <a:t>Potential for curative-intent strategies</a:t>
-            </a:r>
-            <a:endParaRPr lang="en-US" sz="1800" dirty="0"/>
-          </a:p>
-          <a:p>
-            <a:pPr marL="342900" indent="-342900">
-              <a:spcAft>
-                <a:spcPts val="800"/>
-              </a:spcAft>
-              <a:buSzPct val="100000"/>
-              <a:buChar char="•"/>
-            </a:pPr>
-            <a:r>
-              <a:rPr lang="en-US" sz="1800" dirty="0">
-                <a:solidFill>
-                  <a:srgbClr val="333333"/>
-                </a:solidFill>
-                <a:latin typeface="Arial" pitchFamily="34" charset="0"/>
-                <a:ea typeface="Arial" pitchFamily="34" charset="-122"/>
-                <a:cs typeface="Arial" pitchFamily="34" charset="-120"/>
-              </a:rPr>
-              <a:t>Improved prognosis observed in patients</a:t>
+              <a:t>Improved outcomes compared to monotherapy</a:t>
             </a:r>
             <a:endParaRPr lang="en-US" sz="1800" dirty="0"/>
           </a:p>
@@ -7598,7 +7556,7 @@
                 <a:ea typeface="Arial" pitchFamily="34" charset="-122"/>
                 <a:cs typeface="Arial" pitchFamily="34" charset="-120"/>
               </a:rPr>
-              <a:t>Combination therapy for unresectable HCC</a:t>
+              <a:t>Combination of TACE and PD-1 inhibitors</a:t>
             </a:r>
             <a:endParaRPr lang="en-US" sz="1800" dirty="0"/>
           </a:p>
@@ -7619,7 +7577,7 @@
                 <a:ea typeface="Arial" pitchFamily="34" charset="-122"/>
                 <a:cs typeface="Arial" pitchFamily="34" charset="-120"/>
               </a:rPr>
-              <a:t>Transarterial chemoembolization (TACE) used</a:t>
+              <a:t>Phase 2 trial for uHCC treatment</a:t>
             </a:r>
             <a:endParaRPr lang="en-US" sz="1800" dirty="0"/>
           </a:p>
@@ -7640,7 +7598,7 @@
                 <a:ea typeface="Arial" pitchFamily="34" charset="-122"/>
                 <a:cs typeface="Arial" pitchFamily="34" charset="-120"/>
               </a:rPr>
-              <a:t>PD-1 inhibitors enhance treatment efficacy</a:t>
+              <a:t>Improved outcomes compared to TACE alone</a:t>
             </a:r>
             <a:endParaRPr lang="en-US" sz="1800" dirty="0"/>
           </a:p>

--- a/docs/digest-en.pptx
+++ b/docs/digest-en.pptx
@@ -2269,7 +2269,7 @@
                   <a:srgbClr val="888888"/>
                 </a:solidFill>
               </a:rPr>
-              <a:t>2026-05-25 — 2026-06-01</a:t>
+              <a:t>2026-06-01 — 2026-06-08</a:t>
             </a:r>
             <a:endParaRPr lang="en-US" sz="1400" dirty="0"/>
           </a:p>
@@ -2460,7 +2460,7 @@
                   </a:extLst>
                 </a:hlinkClick>
               </a:rPr>
-              <a:t>Durvalumab and tremelimumab combination therapy achieved remarkable response in primary hepatic undifferentiated carcinoma with high PD-L1 expression.</a:t>
+              <a:t>Determinants of long-term survival from atezolizumab plus bevacizumab in unresectable hepatocellular carcinoma.</a:t>
             </a:r>
             <a:endParaRPr lang="en-US" sz="2400" dirty="0"/>
           </a:p>
@@ -2496,7 +2496,7 @@
                   <a:srgbClr val="888888"/>
                 </a:solidFill>
               </a:rPr>
-              <a:t>Clinical journal of gastroenterology  ·  Case Report  ·  🌏 Asia</a:t>
+              <a:t>European journal of cancer (Oxford, England : 1990)  ·  IF 8.4  ·  🌏 Asia</a:t>
             </a:r>
             <a:endParaRPr lang="en-US" sz="1000" dirty="0"/>
           </a:p>
@@ -2539,7 +2539,7 @@
                 <a:ea typeface="Arial" pitchFamily="34" charset="-122"/>
                 <a:cs typeface="Arial" pitchFamily="34" charset="-120"/>
               </a:rPr>
-              <a:t>Rare primary hepatic undifferentiated carcinoma case</a:t>
+              <a:t>Atezolizumab plus bevacizumab shows long-term survival benefits.</a:t>
             </a:r>
             <a:endParaRPr lang="en-US" sz="1800" dirty="0"/>
           </a:p>
@@ -2560,7 +2560,7 @@
                 <a:ea typeface="Arial" pitchFamily="34" charset="-122"/>
                 <a:cs typeface="Arial" pitchFamily="34" charset="-120"/>
               </a:rPr>
-              <a:t>High PD-L1 expression observed</a:t>
+              <a:t>Long-term survivors defined as 24 months or more.</a:t>
             </a:r>
             <a:endParaRPr lang="en-US" sz="1800" dirty="0"/>
           </a:p>
@@ -2581,7 +2581,7 @@
                 <a:ea typeface="Arial" pitchFamily="34" charset="-122"/>
                 <a:cs typeface="Arial" pitchFamily="34" charset="-120"/>
               </a:rPr>
-              <a:t>Durvalumab and tremelimumab combination therapy</a:t>
+              <a:t>Radiologic responders had significantly better survival rates.</a:t>
             </a:r>
             <a:endParaRPr lang="en-US" sz="1800" dirty="0"/>
           </a:p>
@@ -2602,7 +2602,7 @@
                 <a:ea typeface="Arial" pitchFamily="34" charset="-122"/>
                 <a:cs typeface="Arial" pitchFamily="34" charset="-120"/>
               </a:rPr>
-              <a:t>Partial tumor shrinkage after four courses</a:t>
+              <a:t>Key factors include liver reserve and tumor size.</a:t>
             </a:r>
             <a:endParaRPr lang="en-US" sz="1800" dirty="0"/>
           </a:p>
@@ -2623,7 +2623,7 @@
                 <a:ea typeface="Arial" pitchFamily="34" charset="-122"/>
                 <a:cs typeface="Arial" pitchFamily="34" charset="-120"/>
               </a:rPr>
-              <a:t>Complete resolution of nodal metastases</a:t>
+              <a:t>AB-Real provides real-world evidence for uHCC.</a:t>
             </a:r>
             <a:endParaRPr lang="en-US" sz="1800" dirty="0"/>
           </a:p>
@@ -2659,7 +2659,7 @@
                   <a:srgbClr val="888888"/>
                 </a:solidFill>
               </a:rPr>
-              <a:t>Kawahara Michihiko, Fujino Hatsue, Fujii Yasutoshi et al.. Clinical journal of gastroenterology. 2026-05-28 DOI: 10.1007/s12328-026-02329-w</a:t>
+              <a:t>Lee Pei-Chang, Cortellini Alessio, Stefanini Bernardo et al.. European journal of cancer (Oxford, England : 1990). 2026-05-21 DOI: 10.1016/j.ejca.2026.116749</a:t>
             </a:r>
             <a:endParaRPr lang="en-US" sz="800" dirty="0"/>
           </a:p>
@@ -2859,7 +2859,7 @@
                   </a:extLst>
                 </a:hlinkClick>
               </a:rPr>
-              <a:t>A case of a patient with advanced HCC with Vp4 on hemodialysis who responded to a multimodality treatment including hepatic arterial infusion, radiation therapy, immunotherapy, and molecular-targeted drugs.</a:t>
+              <a:t>Prospective Study of Atezolizumab Plus Bevacizumab for Unresectable Hepatocellular Carcinoma Based on Hepatobiliary Phase of Gd-EOB-DTPA-MRI.</a:t>
             </a:r>
             <a:endParaRPr lang="en-US" sz="2400" dirty="0"/>
           </a:p>
@@ -2895,7 +2895,7 @@
                   <a:srgbClr val="888888"/>
                 </a:solidFill>
               </a:rPr>
-              <a:t>Clinical journal of gastroenterology  ·  Case Report  ·  🌏 Asia</a:t>
+              <a:t>Hepatology research : the official journal of the Japan Society of Hepatology  ·  Prospective Study  ·  🌏 Asia</a:t>
             </a:r>
             <a:endParaRPr lang="en-US" sz="1000" dirty="0"/>
           </a:p>
@@ -2938,7 +2938,7 @@
                 <a:ea typeface="Arial" pitchFamily="34" charset="-122"/>
                 <a:cs typeface="Arial" pitchFamily="34" charset="-120"/>
               </a:rPr>
-              <a:t>73-year-old woman with advanced HCC</a:t>
+              <a:t>Study on atezolizumab plus bevacizumab</a:t>
             </a:r>
             <a:endParaRPr lang="en-US" sz="1800" dirty="0"/>
           </a:p>
@@ -2959,7 +2959,7 @@
                 <a:ea typeface="Arial" pitchFamily="34" charset="-122"/>
                 <a:cs typeface="Arial" pitchFamily="34" charset="-120"/>
               </a:rPr>
-              <a:t>Initial treatment: hepatic arterial infusion</a:t>
+              <a:t>Involves 152 unresectable HCC patients</a:t>
             </a:r>
             <a:endParaRPr lang="en-US" sz="1800" dirty="0"/>
           </a:p>
@@ -2980,7 +2980,7 @@
                 <a:ea typeface="Arial" pitchFamily="34" charset="-122"/>
                 <a:cs typeface="Arial" pitchFamily="34" charset="-120"/>
               </a:rPr>
-              <a:t>Combination therapy with Atezo-Bev</a:t>
+              <a:t>Hyperintensity linked to Wnt signaling</a:t>
             </a:r>
             <a:endParaRPr lang="en-US" sz="1800" dirty="0"/>
           </a:p>
@@ -3001,7 +3001,7 @@
                 <a:ea typeface="Arial" pitchFamily="34" charset="-122"/>
                 <a:cs typeface="Arial" pitchFamily="34" charset="-120"/>
               </a:rPr>
-              <a:t>Partial response with LEN-CDDP</a:t>
+              <a:t>Higher ORR in hyperintense group</a:t>
             </a:r>
             <a:endParaRPr lang="en-US" sz="1800" dirty="0"/>
           </a:p>
@@ -3022,7 +3022,7 @@
                 <a:ea typeface="Arial" pitchFamily="34" charset="-122"/>
                 <a:cs typeface="Arial" pitchFamily="34" charset="-120"/>
               </a:rPr>
-              <a:t>Sustained CR with Dur-Tre therapy</a:t>
+              <a:t>No resistance to combination therapy found</a:t>
             </a:r>
             <a:endParaRPr lang="en-US" sz="1800" dirty="0"/>
           </a:p>
@@ -3058,7 +3058,7 @@
                   <a:srgbClr val="888888"/>
                 </a:solidFill>
               </a:rPr>
-              <a:t>Kosaka Yumi, Yoshikawa Yuki, Nakahara Takashi et al.. Clinical journal of gastroenterology. 2026-05-28 DOI: 10.1007/s12328-026-02300-9</a:t>
+              <a:t>Aoki Tomoko, Kudo Masatoshi, Ueshima Kazuomi et al.. Hepatology research : the official journal of the Japan Society of Hepatology. 2026-06-06 DOI: 10.1111/hepr.70157</a:t>
             </a:r>
             <a:endParaRPr lang="en-US" sz="800" dirty="0"/>
           </a:p>
@@ -3258,7 +3258,7 @@
                   </a:extLst>
                 </a:hlinkClick>
               </a:rPr>
-              <a:t>Successful treatment of &amp;#x3b2;-catenin-positive, immune checkpoint inhibitor-resistant tumor in a case of multicentric hepatocellular carcinoma.</a:t>
+              <a:t>Erratum: Hepatectomy alters adjuvant anti-PD-1 action in a mouse model of HCC but does not compromise neoadjuvant efficacy.</a:t>
             </a:r>
             <a:endParaRPr lang="en-US" sz="2400" dirty="0"/>
           </a:p>
@@ -3294,7 +3294,7 @@
                   <a:srgbClr val="888888"/>
                 </a:solidFill>
               </a:rPr>
-              <a:t>Clinical journal of gastroenterology  ·  🌏 Asia</a:t>
+              <a:t>Hepatology (Baltimore, Md.)  ·  IF 12.9  ·  Basic Research</a:t>
             </a:r>
             <a:endParaRPr lang="en-US" sz="1000" dirty="0"/>
           </a:p>
@@ -3337,7 +3337,7 @@
                 <a:ea typeface="Arial" pitchFamily="34" charset="-122"/>
                 <a:cs typeface="Arial" pitchFamily="34" charset="-120"/>
               </a:rPr>
-              <a:t>Case of 70-year-old woman with multicentric HCC</a:t>
+              <a:t>Hepatectomy affects anti-PD-1 therapy</a:t>
             </a:r>
             <a:endParaRPr lang="en-US" sz="1800" dirty="0"/>
           </a:p>
@@ -3358,7 +3358,7 @@
                 <a:ea typeface="Arial" pitchFamily="34" charset="-122"/>
                 <a:cs typeface="Arial" pitchFamily="34" charset="-120"/>
               </a:rPr>
-              <a:t>Immune checkpoint inhibitor resistance linked to β-catenin</a:t>
+              <a:t>Neoadjuvant efficacy remains intact</a:t>
             </a:r>
             <a:endParaRPr lang="en-US" sz="1800" dirty="0"/>
           </a:p>
@@ -3379,49 +3379,7 @@
                 <a:ea typeface="Arial" pitchFamily="34" charset="-122"/>
                 <a:cs typeface="Arial" pitchFamily="34" charset="-120"/>
               </a:rPr>
-              <a:t>Proton beam therapy achieved local control</a:t>
-            </a:r>
-            <a:endParaRPr lang="en-US" sz="1800" dirty="0"/>
-          </a:p>
-          <a:p>
-            <a:pPr marL="342900" indent="-342900">
-              <a:spcAft>
-                <a:spcPts val="800"/>
-              </a:spcAft>
-              <a:buSzPct val="100000"/>
-              <a:buChar char="•"/>
-            </a:pPr>
-            <a:r>
-              <a:rPr lang="en-US" sz="1800" dirty="0">
-                <a:solidFill>
-                  <a:srgbClr val="333333"/>
-                </a:solidFill>
-                <a:latin typeface="Arial" pitchFamily="34" charset="0"/>
-                <a:ea typeface="Arial" pitchFamily="34" charset="-122"/>
-                <a:cs typeface="Arial" pitchFamily="34" charset="-120"/>
-              </a:rPr>
-              <a:t>Continued therapy maintained remission of other nodules</a:t>
-            </a:r>
-            <a:endParaRPr lang="en-US" sz="1800" dirty="0"/>
-          </a:p>
-          <a:p>
-            <a:pPr marL="342900" indent="-342900">
-              <a:spcAft>
-                <a:spcPts val="800"/>
-              </a:spcAft>
-              <a:buSzPct val="100000"/>
-              <a:buChar char="•"/>
-            </a:pPr>
-            <a:r>
-              <a:rPr lang="en-US" sz="1800" dirty="0">
-                <a:solidFill>
-                  <a:srgbClr val="333333"/>
-                </a:solidFill>
-                <a:latin typeface="Arial" pitchFamily="34" charset="0"/>
-                <a:ea typeface="Arial" pitchFamily="34" charset="-122"/>
-                <a:cs typeface="Arial" pitchFamily="34" charset="-120"/>
-              </a:rPr>
-              <a:t>Molecular profiling essential for personalized treatment</a:t>
+              <a:t>Mouse model used for study</a:t>
             </a:r>
             <a:endParaRPr lang="en-US" sz="1800" dirty="0"/>
           </a:p>
@@ -3457,7 +3415,7 @@
                   <a:srgbClr val="888888"/>
                 </a:solidFill>
               </a:rPr>
-              <a:t>Nomiya Hirotaka, Matsuda Hidetaka, Nosaka Takuto et al.. Clinical journal of gastroenterology. 2026-05-31 DOI: 10.1007/s12328-025-02266-0</a:t>
+              <a:t>Bouguerra Roqiya, El Hajji Sofia, Wassmer Charles-Henri et al.. Hepatology (Baltimore, Md.). 2026-06-05 DOI: 10.1097/HEP.0000000000001731</a:t>
             </a:r>
             <a:endParaRPr lang="en-US" sz="800" dirty="0"/>
           </a:p>
@@ -3648,7 +3606,7 @@
                   <a:srgbClr val="FFFFFF"/>
                 </a:solidFill>
               </a:rPr>
-              <a:t>### 綜合啟示 (Overall Insights)</a:t>
+              <a:t>### 綜合啟示（Overall Insights）</a:t>
             </a:r>
             <a:endParaRPr lang="en-US" sz="1200" dirty="0"/>
           </a:p>
@@ -3674,7 +3632,7 @@
                   <a:srgbClr val="FFFFFF"/>
                 </a:solidFill>
               </a:rPr>
-              <a:t>1. **免疫治療的前景**  </a:t>
+              <a:t>1. **免疫檢查點抑制劑的應用潛力**  </a:t>
             </a:r>
             <a:endParaRPr lang="en-US" sz="1200" dirty="0"/>
           </a:p>
@@ -3691,7 +3649,7 @@
                   <a:srgbClr val="FFFFFF"/>
                 </a:solidFill>
               </a:rPr>
-              <a:t>   The combination of immune checkpoint inhibitors (ICIs) with other therapies, such as targeted agents and radiotherapy, shows promising efficacy in advanced hepatocellular carcinoma (HCC).  </a:t>
+              <a:t>   The use of dual immune checkpoint inhibitors (ICIs) targeting CTLA-4 and PD-1/PD-L1 has shown promise in reshaping treatment for unresectable HCC, yet their clinical uptake is hindered by severe immune-related adverse events.  </a:t>
             </a:r>
             <a:endParaRPr lang="en-US" sz="1200" dirty="0"/>
           </a:p>
@@ -3708,7 +3666,7 @@
                   <a:srgbClr val="FFFFFF"/>
                 </a:solidFill>
               </a:rPr>
-              <a:t>   免疫檢查點抑制劑（ICIs）與其他療法（如靶向藥物和放療）的聯合使用在晚期肝細胞癌（HCC）中顯示出有希望的療效。</a:t>
+              <a:t>   雙重免疫檢查點抑制劑（如CTLA-4和PD-1/PD-L1）的應用潛力顯示出在不可切除肝細胞癌（HCC）治療中的前景，但其臨床應用受到嚴重免疫相關不良事件的限制。</a:t>
             </a:r>
             <a:endParaRPr lang="en-US" sz="1200" dirty="0"/>
           </a:p>
@@ -3734,7 +3692,7 @@
                   <a:srgbClr val="FFFFFF"/>
                 </a:solidFill>
               </a:rPr>
-              <a:t>2. **高風險患者的預後改善**  </a:t>
+              <a:t>2. **新輔助療法的前景**  </a:t>
             </a:r>
             <a:endParaRPr lang="en-US" sz="1200" dirty="0"/>
           </a:p>
@@ -3751,7 +3709,7 @@
                   <a:srgbClr val="FFFFFF"/>
                 </a:solidFill>
               </a:rPr>
-              <a:t>   The IMbrave050 trial demonstrates that adjuvant therapy with atezolizumab and bevacizumab significantly improves recurrence-free survival in high-risk HCC patients.  </a:t>
+              <a:t>   Atezolizumab combined with bevacizumab has demonstrated improved recurrence-free survival in high-risk HCC patients, indicating a potential shift towards adjuvant immunotherapy strategies.  </a:t>
             </a:r>
             <a:endParaRPr lang="en-US" sz="1200" dirty="0"/>
           </a:p>
@@ -3768,7 +3726,7 @@
                   <a:srgbClr val="FFFFFF"/>
                 </a:solidFill>
               </a:rPr>
-              <a:t>   IMbrave050試驗顯示，阿特珠單抗和貝伐單抗的輔助療法顯著改善高風險HCC患者的無復發生存期。</a:t>
+              <a:t>   阿特珠單抗與貝伐單抗的聯合使用在高風險HCC患者中顯示出改善無復發生存期的潛力，這表明輔助免疫療法策略可能會有新的轉變。</a:t>
             </a:r>
             <a:endParaRPr lang="en-US" sz="1200" dirty="0"/>
           </a:p>
@@ -3794,7 +3752,7 @@
                   <a:srgbClr val="FFFFFF"/>
                 </a:solidFill>
               </a:rPr>
-              <a:t>3. **副作用管理的重要性**  </a:t>
+              <a:t>3. **腫瘤微環境的影響**  </a:t>
             </a:r>
             <a:endParaRPr lang="en-US" sz="1200" dirty="0"/>
           </a:p>
@@ -3811,7 +3769,7 @@
                   <a:srgbClr val="FFFFFF"/>
                 </a:solidFill>
               </a:rPr>
-              <a:t>   The use of prophylactic corticosteroids may help mitigate severe immune-related adverse events associated with dual ICI therapy, enhancing treatment tolerability.  </a:t>
+              <a:t>   The tumor immune microenvironment (TIME) plays a critical role in modulating responses to ICIs, with HCC exhibiting significant intratumoral heterogeneity that complicates treatment efficacy.  </a:t>
             </a:r>
             <a:endParaRPr lang="en-US" sz="1200" dirty="0"/>
           </a:p>
@@ -3828,7 +3786,7 @@
                   <a:srgbClr val="FFFFFF"/>
                 </a:solidFill>
               </a:rPr>
-              <a:t>   使用預防性皮質類固醇可能有助於減輕與雙重ICIs療法相關的嚴重免疫相關不良事件，提高治療耐受性。</a:t>
+              <a:t>   腫瘤免疫微環境（TIME）在調節對免疫檢查點抑制劑的反應中起著關鍵作用，而HCC的腫瘤內異質性顯著，這使得治療效果變得複雜。</a:t>
             </a:r>
             <a:endParaRPr lang="en-US" sz="1200" dirty="0"/>
           </a:p>
@@ -3854,7 +3812,7 @@
                   <a:srgbClr val="FFFFFF"/>
                 </a:solidFill>
               </a:rPr>
-              <a:t>4. **人工智慧的潛力**  </a:t>
+              <a:t>4. **非侵入性檢測技術的發展**  </a:t>
             </a:r>
             <a:endParaRPr lang="en-US" sz="1200" dirty="0"/>
           </a:p>
@@ -3871,7 +3829,7 @@
                   <a:srgbClr val="FFFFFF"/>
                 </a:solidFill>
               </a:rPr>
-              <a:t>   Non-invasive AI models for detecting esophageal varices may improve early intervention strategies in patients with unresectable HCC, potentially enhancing overall outcomes.  </a:t>
+              <a:t>   Advances in AI-driven non-invasive models for detecting esophageal varices in cirrhotic patients with HCC could lead to earlier interventions and improved patient outcomes.  </a:t>
             </a:r>
             <a:endParaRPr lang="en-US" sz="1200" dirty="0"/>
           </a:p>
@@ -3888,7 +3846,7 @@
                   <a:srgbClr val="FFFFFF"/>
                 </a:solidFill>
               </a:rPr>
-              <a:t>   用於檢測食道靜脈曲張的非侵入性AI模型可能改善不可切除HCC患者的早期介入策略，從而提高整體預後。</a:t>
+              <a:t>   基於人工智慧的非侵入性模型在檢測伴有肝硬化的HCC患者食道靜脈曲張方面的進展，可能會導致更早的干預和改善患者的預後。</a:t>
             </a:r>
             <a:endParaRPr lang="en-US" sz="1200" dirty="0"/>
           </a:p>
@@ -3914,7 +3872,7 @@
                   <a:srgbClr val="FFFFFF"/>
                 </a:solidFill>
               </a:rPr>
-              <a:t>5. **多模態治療的成功案例**  </a:t>
+              <a:t>5. **多模式治療策略的必要性**  </a:t>
             </a:r>
             <a:endParaRPr lang="en-US" sz="1200" dirty="0"/>
           </a:p>
@@ -3931,7 +3889,7 @@
                   <a:srgbClr val="FFFFFF"/>
                 </a:solidFill>
               </a:rPr>
-              <a:t>   Reports of successful multimodal treatments highlight the potential for personalized approaches in managing complex cases of HCC, particularly those with portal vein tumor thrombosis.</a:t>
+              <a:t>   The integration of multiple treatment modalities, including immunotherapy and radiotherapy, is essential to address the challenge of recurrence in HCC post-curative treatment.</a:t>
             </a:r>
             <a:endParaRPr lang="en-US" sz="1200" dirty="0"/>
           </a:p>
@@ -4077,7 +4035,7 @@
                   <a:srgbClr val="FFFFFF"/>
                 </a:solidFill>
               </a:rPr>
-              <a:t>成功的多模態治療案例突顯了在管理複雜HCC病例（尤其是伴有門靜脈腫瘤栓塞的病例）中個性化治療的潛力。</a:t>
+              <a:t>整合多種治療模式，包括免疫療法和放療，對於解決HCC在根治性治療後復發的挑戰至關重要。</a:t>
             </a:r>
             <a:endParaRPr lang="en-US" sz="1200" dirty="0"/>
           </a:p>
@@ -4103,7 +4061,7 @@
                   <a:srgbClr val="FFFFFF"/>
                 </a:solidFill>
               </a:rPr>
-              <a:t>### 未來研究方向 (Future Research Directions)</a:t>
+              <a:t>### 未來研究方向（Future Research Directions）</a:t>
             </a:r>
             <a:endParaRPr lang="en-US" sz="1200" dirty="0"/>
           </a:p>
@@ -4129,7 +4087,7 @@
                   <a:srgbClr val="FFFFFF"/>
                 </a:solidFill>
               </a:rPr>
-              <a:t>1. **探索新療法的組合**  </a:t>
+              <a:t>1. **探索免疫相關不良事件的管理策略**  </a:t>
             </a:r>
             <a:endParaRPr lang="en-US" sz="1200" dirty="0"/>
           </a:p>
@@ -4146,7 +4104,7 @@
                   <a:srgbClr val="FFFFFF"/>
                 </a:solidFill>
               </a:rPr>
-              <a:t>   Future studies should investigate novel combinations of ICIs with other therapeutic modalities to further enhance treatment efficacy in HCC.  </a:t>
+              <a:t>   Future studies should focus on optimizing prophylactic measures, such as corticosteroids, to mitigate severe immune-related adverse events associated with ICIs in HCC.  </a:t>
             </a:r>
             <a:endParaRPr lang="en-US" sz="1200" dirty="0"/>
           </a:p>
@@ -4163,7 +4121,7 @@
                   <a:srgbClr val="FFFFFF"/>
                 </a:solidFill>
               </a:rPr>
-              <a:t>   未來的研究應探索ICIs與其他治療方式的新型組合，以進一步提高HCC的治療效果。</a:t>
+              <a:t>   未來的研究應集中於優化預防措施，如皮質類固醇，以減輕與HCC中免疫檢查點抑制劑相關的嚴重免疫相關不良事件。</a:t>
             </a:r>
             <a:endParaRPr lang="en-US" sz="1200" dirty="0"/>
           </a:p>
@@ -4189,7 +4147,7 @@
                   <a:srgbClr val="FFFFFF"/>
                 </a:solidFill>
               </a:rPr>
-              <a:t>2. **副作用的預測與管理**  </a:t>
+              <a:t>2. **長期療效的評估**  </a:t>
             </a:r>
             <a:endParaRPr lang="en-US" sz="1200" dirty="0"/>
           </a:p>
@@ -4206,7 +4164,7 @@
                   <a:srgbClr val="FFFFFF"/>
                 </a:solidFill>
               </a:rPr>
-              <a:t>   Research should focus on identifying biomarkers that predict severe immune-related adverse events to optimize the use of prophylactic strategies.  </a:t>
+              <a:t>   There is a need for long-term follow-up studies to assess the sustained efficacy and safety of atezolizumab plus bevacizumab in unresectable HCC.  </a:t>
             </a:r>
             <a:endParaRPr lang="en-US" sz="1200" dirty="0"/>
           </a:p>
@@ -4223,7 +4181,7 @@
                   <a:srgbClr val="FFFFFF"/>
                 </a:solidFill>
               </a:rPr>
-              <a:t>   研究應集中於識別預測嚴重免疫相關不良事件的生物標記，以優化預防性策略的使用。</a:t>
+              <a:t>   需要進行長期隨訪研究，以評估阿特珠單抗與貝伐單抗在不可切除HCC中的持續療效和安全性。</a:t>
             </a:r>
             <a:endParaRPr lang="en-US" sz="1200" dirty="0"/>
           </a:p>
@@ -4249,7 +4207,7 @@
                   <a:srgbClr val="FFFFFF"/>
                 </a:solidFill>
               </a:rPr>
-              <a:t>3. **AI技術的應用擴展**  </a:t>
+              <a:t>3. **腫瘤微環境的深入研究**  </a:t>
             </a:r>
             <a:endParaRPr lang="en-US" sz="1200" dirty="0"/>
           </a:p>
@@ -4266,7 +4224,7 @@
                   <a:srgbClr val="FFFFFF"/>
                 </a:solidFill>
               </a:rPr>
-              <a:t>   Expanding the use of AI in predicting treatment responses and complications in HCC could lead to more tailored and effective management strategies.  </a:t>
+              <a:t>   Investigating the specific components and dynamics of the tumor immune microenvironment in HCC can provide insights into resistance mechanisms and inform treatment strategies.  </a:t>
             </a:r>
             <a:endParaRPr lang="en-US" sz="1200" dirty="0"/>
           </a:p>
@@ -4283,7 +4241,7 @@
                   <a:srgbClr val="FFFFFF"/>
                 </a:solidFill>
               </a:rPr>
-              <a:t>   擴大AI在預測HCC治療反應和併發症中的應用可能導致更具針對性和有效的管理策略。</a:t>
+              <a:t>   深入研究HCC中腫瘤免疫微環境的具體組成和動態，能提供對抗藥物抵抗機制的見解，並指導治療策略。</a:t>
             </a:r>
             <a:endParaRPr lang="en-US" sz="1200" dirty="0"/>
           </a:p>
@@ -4309,7 +4267,7 @@
                   <a:srgbClr val="FFFFFF"/>
                 </a:solidFill>
               </a:rPr>
-              <a:t>4. **長期療效的評估**  </a:t>
+              <a:t>4. **多模式治療的臨床試驗**  </a:t>
             </a:r>
             <a:endParaRPr lang="en-US" sz="1200" dirty="0"/>
           </a:p>
@@ -4326,7 +4284,7 @@
                   <a:srgbClr val="FFFFFF"/>
                 </a:solidFill>
               </a:rPr>
-              <a:t>   Long-term follow-up studies are needed to assess the durability of responses to combination therapies in HCC and their impact on overall survival.  </a:t>
+              <a:t>   Conducting clinical trials that evaluate the efficacy of multimodal treatment approaches, including combining immunotherapy with radiotherapy, is crucial for improving patient outcomes.  </a:t>
             </a:r>
             <a:endParaRPr lang="en-US" sz="1200" dirty="0"/>
           </a:p>
@@ -4343,7 +4301,7 @@
                   <a:srgbClr val="FFFFFF"/>
                 </a:solidFill>
               </a:rPr>
-              <a:t>   需要長期隨訪研究來評估HCC中聯合療法反應的持久性及其對整體生存的影響。</a:t>
+              <a:t>   開展臨床試驗，評估多模式治療方法的療效，包括將免疫療法與放療結合，對改善患者預後至關重要。</a:t>
             </a:r>
             <a:endParaRPr lang="en-US" sz="1200" dirty="0"/>
           </a:p>
@@ -4369,7 +4327,7 @@
                   <a:srgbClr val="FFFFFF"/>
                 </a:solidFill>
               </a:rPr>
-              <a:t>5. **個體化治療的發展**  </a:t>
+              <a:t>5. **AI在臨床決策中的應用**  </a:t>
             </a:r>
             <a:endParaRPr lang="en-US" sz="1200" dirty="0"/>
           </a:p>
@@ -4386,7 +4344,7 @@
                   <a:srgbClr val="FFFFFF"/>
                 </a:solidFill>
               </a:rPr>
-              <a:t>   Future research should aim to develop personalized treatment regimens based on genetic and molecular profiling of tumors in HCC patients.  </a:t>
+              <a:t>   Further development of AI-based models for predicting complications in HCC patients could enhance clinical decision-making and personalized treatment strategies.  </a:t>
             </a:r>
             <a:endParaRPr lang="en-US" sz="1200" dirty="0"/>
           </a:p>
@@ -4403,7 +4361,7 @@
                   <a:srgbClr val="FFFFFF"/>
                 </a:solidFill>
               </a:rPr>
-              <a:t>   未來的研究應致力於根據HCC患者腫瘤的基因和分子特徵開發個體化治療方案。</a:t>
+              <a:t>   進一步開發基於人工智慧的模型以預測HCC患者的併發症，可能會增強臨床決策和個性化治療策略。</a:t>
             </a:r>
             <a:endParaRPr lang="en-US" sz="1200" dirty="0"/>
           </a:p>
@@ -4637,7 +4595,7 @@
                 <a:ea typeface="Arial" pitchFamily="34" charset="-122"/>
                 <a:cs typeface="Arial" pitchFamily="34" charset="-120"/>
               </a:rPr>
-              <a:t>Updated data from IMbrave050: Adjuvant atezolizumab plus bevacizumab for high-ri…</a:t>
+              <a:t>Revisiting prophylactic corticosteroids to mitigate severe immune-related advers…</a:t>
             </a:r>
             <a:endParaRPr lang="en-US" sz="1400" dirty="0"/>
           </a:p>
@@ -4674,7 +4632,7 @@
                 <a:ea typeface="Arial" pitchFamily="34" charset="-122"/>
                 <a:cs typeface="Arial" pitchFamily="34" charset="-120"/>
               </a:rPr>
-              <a:t>Revisiting prophylactic corticosteroids to mitigate severe immune-related advers…</a:t>
+              <a:t>Updated data from IMbrave050: Adjuvant atezolizumab plus bevacizumab for high-ri…</a:t>
             </a:r>
             <a:endParaRPr lang="en-US" sz="1400" dirty="0"/>
           </a:p>
@@ -4711,7 +4669,7 @@
                 <a:ea typeface="Arial" pitchFamily="34" charset="-122"/>
                 <a:cs typeface="Arial" pitchFamily="34" charset="-120"/>
               </a:rPr>
-              <a:t>Effect and safety of tislelizumab combined with anlotinib and radiotherapy in ad…</a:t>
+              <a:t>Phase Ib/II trial to evaluate the safety and efficacy of atezolizumab and bevaci…</a:t>
             </a:r>
             <a:endParaRPr lang="en-US" sz="1400" dirty="0"/>
           </a:p>
@@ -4748,7 +4706,7 @@
                 <a:ea typeface="Arial" pitchFamily="34" charset="-122"/>
                 <a:cs typeface="Arial" pitchFamily="34" charset="-120"/>
               </a:rPr>
-              <a:t>Detection of esophageal varices and prediction of hepatic decompensation in unre…</a:t>
+              <a:t>Early and late survival dynamics of immunotherapy combinations in advanced HCC: …</a:t>
             </a:r>
             <a:endParaRPr lang="en-US" sz="1400" dirty="0"/>
           </a:p>
@@ -4785,7 +4743,7 @@
                 <a:ea typeface="Arial" pitchFamily="34" charset="-122"/>
                 <a:cs typeface="Arial" pitchFamily="34" charset="-120"/>
               </a:rPr>
-              <a:t>Complementary evaluation of phase III immunotherapy trials in advanced HCC using…</a:t>
+              <a:t>Multimodal sequencing identifies synergistic mechanisms driving resistance to ne…</a:t>
             </a:r>
             <a:endParaRPr lang="en-US" sz="1400" dirty="0"/>
           </a:p>
@@ -4822,7 +4780,7 @@
                 <a:ea typeface="Arial" pitchFamily="34" charset="-122"/>
                 <a:cs typeface="Arial" pitchFamily="34" charset="-120"/>
               </a:rPr>
-              <a:t>Immunotherapy in Hepatocellular Carcinoma with Portal Vein Tumour Thrombosis: Fr…</a:t>
+              <a:t>Detection of esophageal varices and prediction of hepatic decompensation in unre…</a:t>
             </a:r>
             <a:endParaRPr lang="en-US" sz="1400" dirty="0"/>
           </a:p>
@@ -4859,7 +4817,7 @@
                 <a:ea typeface="Arial" pitchFamily="34" charset="-122"/>
                 <a:cs typeface="Arial" pitchFamily="34" charset="-120"/>
               </a:rPr>
-              <a:t>… plus transarterial chemoembolization and PD-1 inhibitors as conversion therapi…</a:t>
+              <a:t>Integrating Multiple Outcomes of First-Line Immunotherapy-Based Regimens for Adv…</a:t>
             </a:r>
             <a:endParaRPr lang="en-US" sz="1400" dirty="0"/>
           </a:p>
@@ -4896,7 +4854,7 @@
                 <a:ea typeface="Arial" pitchFamily="34" charset="-122"/>
                 <a:cs typeface="Arial" pitchFamily="34" charset="-120"/>
               </a:rPr>
-              <a:t>Durvalumab and tremelimumab combination therapy achieved remarkable response in …</a:t>
+              <a:t>Determinants of long-term survival from atezolizumab plus bevacizumab in unresec…</a:t>
             </a:r>
             <a:endParaRPr lang="en-US" sz="1400" dirty="0"/>
           </a:p>
@@ -4933,7 +4891,7 @@
                 <a:ea typeface="Arial" pitchFamily="34" charset="-122"/>
                 <a:cs typeface="Arial" pitchFamily="34" charset="-120"/>
               </a:rPr>
-              <a:t>A case of a patient with advanced HCC with Vp4 on hemodialysis who responded to …</a:t>
+              <a:t>Prospective Study of Atezolizumab Plus Bevacizumab for Unresectable Hepatocellul…</a:t>
             </a:r>
             <a:endParaRPr lang="en-US" sz="1400" dirty="0"/>
           </a:p>
@@ -4970,7 +4928,7 @@
                 <a:ea typeface="Arial" pitchFamily="34" charset="-122"/>
                 <a:cs typeface="Arial" pitchFamily="34" charset="-120"/>
               </a:rPr>
-              <a:t>Successful treatment of &amp;#x3b2;-catenin-positive, immune checkpoint inhibitor-re…</a:t>
+              <a:t>Erratum: Hepatectomy alters adjuvant anti-PD-1 action in a mouse model of HCC bu…</a:t>
             </a:r>
             <a:endParaRPr lang="en-US" sz="1400" dirty="0"/>
           </a:p>
@@ -5125,7 +5083,7 @@
                   </a:extLst>
                 </a:hlinkClick>
               </a:rPr>
-              <a:t>Updated data from IMbrave050: Adjuvant atezolizumab plus bevacizumab for high-risk hepatocellular carcinoma.</a:t>
+              <a:t>Revisiting prophylactic corticosteroids to mitigate severe immune-related adverse events in hepatocellular carcinoma.</a:t>
             </a:r>
             <a:endParaRPr lang="en-US" sz="2400" dirty="0"/>
           </a:p>
@@ -5161,7 +5119,7 @@
                   <a:srgbClr val="888888"/>
                 </a:solidFill>
               </a:rPr>
-              <a:t>Journal of hepatology  ·  IF 25.7  ·  RCT  ·  🌏 Asia</a:t>
+              <a:t>Journal of hepatology  ·  IF 25.7  ·  Prospective Study  ·  🌏 Asia</a:t>
             </a:r>
             <a:endParaRPr lang="en-US" sz="1000" dirty="0"/>
           </a:p>
@@ -5204,7 +5162,7 @@
                 <a:ea typeface="Arial" pitchFamily="34" charset="-122"/>
                 <a:cs typeface="Arial" pitchFamily="34" charset="-120"/>
               </a:rPr>
-              <a:t>IMbrave050 met primary endpoint for RFS</a:t>
+              <a:t>Dual ICIs reshape HCC treatment landscape.</a:t>
             </a:r>
             <a:endParaRPr lang="en-US" sz="1800" dirty="0"/>
           </a:p>
@@ -5225,7 +5183,7 @@
                 <a:ea typeface="Arial" pitchFamily="34" charset="-122"/>
                 <a:cs typeface="Arial" pitchFamily="34" charset="-120"/>
               </a:rPr>
-              <a:t>RFS HR for treatment vs surveillance was 0.72</a:t>
+              <a:t>Severe irAEs limit clinical uptake of ICIs.</a:t>
             </a:r>
             <a:endParaRPr lang="en-US" sz="1800" dirty="0"/>
           </a:p>
@@ -5246,7 +5204,7 @@
                 <a:ea typeface="Arial" pitchFamily="34" charset="-122"/>
                 <a:cs typeface="Arial" pitchFamily="34" charset="-120"/>
               </a:rPr>
-              <a:t>OS data remained immature in updated analysis</a:t>
+              <a:t>Prophylactic corticosteroids reduce severe irAEs.</a:t>
             </a:r>
             <a:endParaRPr lang="en-US" sz="1800" dirty="0"/>
           </a:p>
@@ -5267,7 +5225,7 @@
                 <a:ea typeface="Arial" pitchFamily="34" charset="-122"/>
                 <a:cs typeface="Arial" pitchFamily="34" charset="-120"/>
               </a:rPr>
-              <a:t>Initial RFS benefit not sustained over time</a:t>
+              <a:t>Corticosteroids do not impair T-cell activation.</a:t>
             </a:r>
             <a:endParaRPr lang="en-US" sz="1800" dirty="0"/>
           </a:p>
@@ -5288,7 +5246,7 @@
                 <a:ea typeface="Arial" pitchFamily="34" charset="-122"/>
                 <a:cs typeface="Arial" pitchFamily="34" charset="-120"/>
               </a:rPr>
-              <a:t>Safety profile consistent and manageable</a:t>
+              <a:t>Need for prospective evaluation in HCC.</a:t>
             </a:r>
             <a:endParaRPr lang="en-US" sz="1800" dirty="0"/>
           </a:p>
@@ -5324,7 +5282,7 @@
                   <a:srgbClr val="888888"/>
                 </a:solidFill>
               </a:rPr>
-              <a:t>Yopp Adam, Chen Minshan, Cheng Ann-Lii et al.. Journal of hepatology. 2026-05-16 DOI: 10.1016/j.jhep.2026.01.006</a:t>
+              <a:t>Shen Ying-Chun, Pinato David J, Liu Tsung-Hao et al.. Journal of hepatology. 2026-06-06 DOI: 10.1016/j.jhep.2026.01.009</a:t>
             </a:r>
             <a:endParaRPr lang="en-US" sz="800" dirty="0"/>
           </a:p>
@@ -5524,7 +5482,7 @@
                   </a:extLst>
                 </a:hlinkClick>
               </a:rPr>
-              <a:t>Revisiting prophylactic corticosteroids to mitigate severe immune-related adverse events in hepatocellular carcinoma.</a:t>
+              <a:t>Updated data from IMbrave050: Adjuvant atezolizumab plus bevacizumab for high-risk hepatocellular carcinoma.</a:t>
             </a:r>
             <a:endParaRPr lang="en-US" sz="2400" dirty="0"/>
           </a:p>
@@ -5603,7 +5561,7 @@
                 <a:ea typeface="Arial" pitchFamily="34" charset="-122"/>
                 <a:cs typeface="Arial" pitchFamily="34" charset="-120"/>
               </a:rPr>
-              <a:t>Dual ICIs reshape HCC treatment landscape.</a:t>
+              <a:t>IMbrave050 met primary endpoint for RFS.</a:t>
             </a:r>
             <a:endParaRPr lang="en-US" sz="1800" dirty="0"/>
           </a:p>
@@ -5624,7 +5582,7 @@
                 <a:ea typeface="Arial" pitchFamily="34" charset="-122"/>
                 <a:cs typeface="Arial" pitchFamily="34" charset="-120"/>
               </a:rPr>
-              <a:t>Severe irAEs limit clinical uptake of ICIs.</a:t>
+              <a:t>RFS HR for treatment vs. surveillance was 0.72.</a:t>
             </a:r>
             <a:endParaRPr lang="en-US" sz="1800" dirty="0"/>
           </a:p>
@@ -5645,7 +5603,7 @@
                 <a:ea typeface="Arial" pitchFamily="34" charset="-122"/>
                 <a:cs typeface="Arial" pitchFamily="34" charset="-120"/>
               </a:rPr>
-              <a:t>Prophylactic corticosteroids reduce severe irAEs.</a:t>
+              <a:t>OS data remained immature at second IA.</a:t>
             </a:r>
             <a:endParaRPr lang="en-US" sz="1800" dirty="0"/>
           </a:p>
@@ -5666,7 +5624,7 @@
                 <a:ea typeface="Arial" pitchFamily="34" charset="-122"/>
                 <a:cs typeface="Arial" pitchFamily="34" charset="-120"/>
               </a:rPr>
-              <a:t>Corticosteroids do not impair T-cell activation.</a:t>
+              <a:t>Initial RFS benefit not sustained in updated analysis.</a:t>
             </a:r>
             <a:endParaRPr lang="en-US" sz="1800" dirty="0"/>
           </a:p>
@@ -5687,7 +5645,7 @@
                 <a:ea typeface="Arial" pitchFamily="34" charset="-122"/>
                 <a:cs typeface="Arial" pitchFamily="34" charset="-120"/>
               </a:rPr>
-              <a:t>Need for prospective evaluation in HCC.</a:t>
+              <a:t>Safety profile consistent with previous findings.</a:t>
             </a:r>
             <a:endParaRPr lang="en-US" sz="1800" dirty="0"/>
           </a:p>
@@ -5723,7 +5681,7 @@
                   <a:srgbClr val="888888"/>
                 </a:solidFill>
               </a:rPr>
-              <a:t>Shen Ying-Chun, Pinato David J, Liu Tsung-Hao et al.. Journal of hepatology. 2026-05-16 DOI: 10.1016/j.jhep.2026.01.009</a:t>
+              <a:t>Yopp Adam, Chen Minshan, Cheng Ann-Lii et al.. Journal of hepatology. 2026-05-16 DOI: 10.1016/j.jhep.2026.01.006</a:t>
             </a:r>
             <a:endParaRPr lang="en-US" sz="800" dirty="0"/>
           </a:p>
@@ -5923,7 +5881,7 @@
                   </a:extLst>
                 </a:hlinkClick>
               </a:rPr>
-              <a:t>Effect and safety of tislelizumab combined with anlotinib and radiotherapy in advanced hepatocellular carcinoma: A single-arm, single-center, phase II clinical study.</a:t>
+              <a:t>Phase Ib/II trial to evaluate the safety and efficacy of atezolizumab and bevacizumab as adjuvant therapy following carbon-ion radiotherapy in hepatocellular carcinoma (VANGUARD): study protocol.</a:t>
             </a:r>
             <a:endParaRPr lang="en-US" sz="2400" dirty="0"/>
           </a:p>
@@ -5959,7 +5917,7 @@
                   <a:srgbClr val="888888"/>
                 </a:solidFill>
               </a:rPr>
-              <a:t>Scientific reports  ·  RCT Phase 2  ·  🌏 Asia</a:t>
+              <a:t>BMJ open  ·  RCT Phase 2  ·  🌏 Asia</a:t>
             </a:r>
             <a:endParaRPr lang="en-US" sz="1000" dirty="0"/>
           </a:p>
@@ -6002,7 +5960,7 @@
                 <a:ea typeface="Arial" pitchFamily="34" charset="-122"/>
                 <a:cs typeface="Arial" pitchFamily="34" charset="-120"/>
               </a:rPr>
-              <a:t>Tislelizumab plus anlotinib and radiotherapy evaluated</a:t>
+              <a:t>Evaluating Atezo+Bev after C-ion RT</a:t>
             </a:r>
             <a:endParaRPr lang="en-US" sz="1800" dirty="0"/>
           </a:p>
@@ -6023,7 +5981,7 @@
                 <a:ea typeface="Arial" pitchFamily="34" charset="-122"/>
                 <a:cs typeface="Arial" pitchFamily="34" charset="-120"/>
               </a:rPr>
-              <a:t>62.2% objective response rate achieved</a:t>
+              <a:t>Phase Ib/II trial for HCC patients</a:t>
             </a:r>
             <a:endParaRPr lang="en-US" sz="1800" dirty="0"/>
           </a:p>
@@ -6044,7 +6002,7 @@
                 <a:ea typeface="Arial" pitchFamily="34" charset="-122"/>
                 <a:cs typeface="Arial" pitchFamily="34" charset="-120"/>
               </a:rPr>
-              <a:t>Median progression-free survival of 11 months</a:t>
+              <a:t>Primary endpoint: 1-year recurrence-free survival</a:t>
             </a:r>
             <a:endParaRPr lang="en-US" sz="1800" dirty="0"/>
           </a:p>
@@ -6065,7 +6023,7 @@
                 <a:ea typeface="Arial" pitchFamily="34" charset="-122"/>
                 <a:cs typeface="Arial" pitchFamily="34" charset="-120"/>
               </a:rPr>
-              <a:t>Safety profile shows mostly grade 1/2 AEs</a:t>
+              <a:t>Focus on high-risk recurrence patients</a:t>
             </a:r>
             <a:endParaRPr lang="en-US" sz="1800" dirty="0"/>
           </a:p>
@@ -6086,7 +6044,7 @@
                 <a:ea typeface="Arial" pitchFamily="34" charset="-122"/>
                 <a:cs typeface="Arial" pitchFamily="34" charset="-120"/>
               </a:rPr>
-              <a:t>Outcomes independent of PVTT and BCLC stage</a:t>
+              <a:t>Study approved by ethics committees</a:t>
             </a:r>
             <a:endParaRPr lang="en-US" sz="1800" dirty="0"/>
           </a:p>
@@ -6122,7 +6080,7 @@
                   <a:srgbClr val="888888"/>
                 </a:solidFill>
               </a:rPr>
-              <a:t>Fan Huaxi, Liu Yuhong, Wu Guishu et al.. Scientific reports. 2026-05-28 DOI: 10.1038/s41598-026-55609-3</a:t>
+              <a:t>Koroki Keisuke, Wakatsuki Masaru, Ogasawara Sadahisa et al.. BMJ open. 2026-06-06 DOI: 10.1136/bmjopen-2025-115731</a:t>
             </a:r>
             <a:endParaRPr lang="en-US" sz="800" dirty="0"/>
           </a:p>
@@ -6322,7 +6280,7 @@
                   </a:extLst>
                 </a:hlinkClick>
               </a:rPr>
-              <a:t>Detection of esophageal varices and prediction of hepatic decompensation in unresectable hepatocellular carcinoma using AI.</a:t>
+              <a:t>Early and late survival dynamics of immunotherapy combinations in advanced HCC: Anchored indirect comparison of atezolizumab plus bevacizumab versus durvalumab +&amp;#x202f;tremelimumab.</a:t>
             </a:r>
             <a:endParaRPr lang="en-US" sz="2400" dirty="0"/>
           </a:p>
@@ -6358,7 +6316,7 @@
                   <a:srgbClr val="888888"/>
                 </a:solidFill>
               </a:rPr>
-              <a:t>Journal of hepatology  ·  IF 25.7  ·  Retrospective Study</a:t>
+              <a:t>European journal of cancer (Oxford, England : 1990)  ·  IF 8.4  ·  Meta-Analysis  ·  🌏 Asia</a:t>
             </a:r>
             <a:endParaRPr lang="en-US" sz="1000" dirty="0"/>
           </a:p>
@@ -6401,7 +6359,7 @@
                 <a:ea typeface="Arial" pitchFamily="34" charset="-122"/>
                 <a:cs typeface="Arial" pitchFamily="34" charset="-120"/>
               </a:rPr>
-              <a:t>Developed AI models for EV detection.</a:t>
+              <a:t>A+B shows early survival advantage</a:t>
             </a:r>
             <a:endParaRPr lang="en-US" sz="1800" dirty="0"/>
           </a:p>
@@ -6422,7 +6380,7 @@
                 <a:ea typeface="Arial" pitchFamily="34" charset="-122"/>
                 <a:cs typeface="Arial" pitchFamily="34" charset="-120"/>
               </a:rPr>
-              <a:t>Validated models using routine CT data.</a:t>
+              <a:t>STRIDE offers long-term survival benefit</a:t>
             </a:r>
             <a:endParaRPr lang="en-US" sz="1800" dirty="0"/>
           </a:p>
@@ -6443,49 +6401,7 @@
                 <a:ea typeface="Arial" pitchFamily="34" charset="-122"/>
                 <a:cs typeface="Arial" pitchFamily="34" charset="-120"/>
               </a:rPr>
-              <a:t>HepatoSageCT improves prediction accuracy.</a:t>
-            </a:r>
-            <a:endParaRPr lang="en-US" sz="1800" dirty="0"/>
-          </a:p>
-          <a:p>
-            <a:pPr marL="342900" indent="-342900">
-              <a:spcAft>
-                <a:spcPts val="800"/>
-              </a:spcAft>
-              <a:buSzPct val="100000"/>
-              <a:buChar char="•"/>
-            </a:pPr>
-            <a:r>
-              <a:rPr lang="en-US" sz="1800" dirty="0">
-                <a:solidFill>
-                  <a:srgbClr val="333333"/>
-                </a:solidFill>
-                <a:latin typeface="Arial" pitchFamily="34" charset="0"/>
-                <a:ea typeface="Arial" pitchFamily="34" charset="-122"/>
-                <a:cs typeface="Arial" pitchFamily="34" charset="-120"/>
-              </a:rPr>
-              <a:t>Reduced unnecessary endoscopies in patients.</a:t>
-            </a:r>
-            <a:endParaRPr lang="en-US" sz="1800" dirty="0"/>
-          </a:p>
-          <a:p>
-            <a:pPr marL="342900" indent="-342900">
-              <a:spcAft>
-                <a:spcPts val="800"/>
-              </a:spcAft>
-              <a:buSzPct val="100000"/>
-              <a:buChar char="•"/>
-            </a:pPr>
-            <a:r>
-              <a:rPr lang="en-US" sz="1800" dirty="0">
-                <a:solidFill>
-                  <a:srgbClr val="333333"/>
-                </a:solidFill>
-                <a:latin typeface="Arial" pitchFamily="34" charset="0"/>
-                <a:ea typeface="Arial" pitchFamily="34" charset="-122"/>
-                <a:cs typeface="Arial" pitchFamily="34" charset="-120"/>
-              </a:rPr>
-              <a:t>Promising tool for personalized patient management.</a:t>
+              <a:t>Time-dependent effects observed in analyses</a:t>
             </a:r>
             <a:endParaRPr lang="en-US" sz="1800" dirty="0"/>
           </a:p>
@@ -6521,7 +6437,7 @@
                   <a:srgbClr val="888888"/>
                 </a:solidFill>
               </a:rPr>
-              <a:t>Rabasco Meneghetti Asier, Campani Claudia, Roux Charles et al.. Journal of hepatology. 2026-05-16 DOI: 10.1016/j.jhep.2026.01.021</a:t>
+              <a:t>Casadei-Gardini Andrea, Yip Terry Cheuk-Fung, Vitale Alessandro et al.. European journal of cancer (Oxford, England : 1990). 2026-05-21 DOI: 10.1016/j.ejca.2026.116750</a:t>
             </a:r>
             <a:endParaRPr lang="en-US" sz="800" dirty="0"/>
           </a:p>
@@ -6721,7 +6637,7 @@
                   </a:extLst>
                 </a:hlinkClick>
               </a:rPr>
-              <a:t>Complementary evaluation of phase III immunotherapy trials in advanced HCC using the survival-inferred fragility index.</a:t>
+              <a:t>Multimodal sequencing identifies synergistic mechanisms driving resistance to neoadjuvant nivolumab treatment in hepatocellular carcinoma.</a:t>
             </a:r>
             <a:endParaRPr lang="en-US" sz="2400" dirty="0"/>
           </a:p>
@@ -6757,7 +6673,7 @@
                   <a:srgbClr val="888888"/>
                 </a:solidFill>
               </a:rPr>
-              <a:t>Digestive and liver disease : official journal of the Italian Society of Gastroenterology and the Italian Association for the Study of the Liver  ·  RCT Phase 3</a:t>
+              <a:t>Molecular cancer  ·  IF 27.7</a:t>
             </a:r>
             <a:endParaRPr lang="en-US" sz="1000" dirty="0"/>
           </a:p>
@@ -6800,7 +6716,7 @@
                 <a:ea typeface="Arial" pitchFamily="34" charset="-122"/>
                 <a:cs typeface="Arial" pitchFamily="34" charset="-120"/>
               </a:rPr>
-              <a:t>HCC treatment shifted to immune checkpoint inhibitors.</a:t>
+              <a:t>HCC shows significant intratumoral heterogeneity.</a:t>
             </a:r>
             <a:endParaRPr lang="en-US" sz="1800" dirty="0"/>
           </a:p>
@@ -6821,7 +6737,7 @@
                 <a:ea typeface="Arial" pitchFamily="34" charset="-122"/>
                 <a:cs typeface="Arial" pitchFamily="34" charset="-120"/>
               </a:rPr>
-              <a:t>Survival-Inferred Fragility Index quantifies trial stability.</a:t>
+              <a:t>Immunosuppressive TIME linked to treatment resistance.</a:t>
             </a:r>
             <a:endParaRPr lang="en-US" sz="1800" dirty="0"/>
           </a:p>
@@ -6842,7 +6758,7 @@
                 <a:ea typeface="Arial" pitchFamily="34" charset="-122"/>
                 <a:cs typeface="Arial" pitchFamily="34" charset="-120"/>
               </a:rPr>
-              <a:t>Six phase III trials analyzed with 4570 patients.</a:t>
+              <a:t>Dysregulated lipogenesis in non-responders identified.</a:t>
             </a:r>
             <a:endParaRPr lang="en-US" sz="1800" dirty="0"/>
           </a:p>
@@ -6863,7 +6779,7 @@
                 <a:ea typeface="Arial" pitchFamily="34" charset="-122"/>
                 <a:cs typeface="Arial" pitchFamily="34" charset="-120"/>
               </a:rPr>
-              <a:t>Median SIFI for overall survival was 10.</a:t>
+              <a:t>TAMs and CD8 T cells form barriers.</a:t>
             </a:r>
             <a:endParaRPr lang="en-US" sz="1800" dirty="0"/>
           </a:p>
@@ -6884,7 +6800,7 @@
                 <a:ea typeface="Arial" pitchFamily="34" charset="-122"/>
                 <a:cs typeface="Arial" pitchFamily="34" charset="-120"/>
               </a:rPr>
-              <a:t>Asian trials showed higher stability than global trials.</a:t>
+              <a:t>ADM-RAMP1-EBP axis affects lipid metabolism.</a:t>
             </a:r>
             <a:endParaRPr lang="en-US" sz="1800" dirty="0"/>
           </a:p>
@@ -6920,7 +6836,7 @@
                   <a:srgbClr val="888888"/>
                 </a:solidFill>
               </a:rPr>
-              <a:t>Dalbeni A, Vicardi M, Stefanini B et al.. Digestive and liver disease : official journal of the Italian Society of Gastroenterology and the Italian Association for the Study of the Liver. 2026-05-27 DOI: 10.1016/j.dld.2026.04.013</a:t>
+              <a:t>Zeng Fanhong, Guo Jiaxin, Zeng Zheng et al.. Molecular cancer. 2026-06-02 DOI: 10.1186/s12943-026-02682-x</a:t>
             </a:r>
             <a:endParaRPr lang="en-US" sz="800" dirty="0"/>
           </a:p>
@@ -7120,7 +7036,7 @@
                   </a:extLst>
                 </a:hlinkClick>
               </a:rPr>
-              <a:t>Immunotherapy in Hepatocellular Carcinoma with Portal Vein Tumour Thrombosis: From Poor Prognosis to Curative-Intent Strategies</a:t>
+              <a:t>Detection of esophageal varices and prediction of hepatic decompensation in unresectable hepatocellular carcinoma using AI.</a:t>
             </a:r>
             <a:endParaRPr lang="en-US" sz="2400" dirty="0"/>
           </a:p>
@@ -7156,7 +7072,7 @@
                   <a:srgbClr val="888888"/>
                 </a:solidFill>
               </a:rPr>
-              <a:t>…  ·  RCT Phase 2</a:t>
+              <a:t>Journal of hepatology  ·  IF 25.7  ·  Retrospective Study</a:t>
             </a:r>
             <a:endParaRPr lang="en-US" sz="1000" dirty="0"/>
           </a:p>
@@ -7199,7 +7115,7 @@
                 <a:ea typeface="Arial" pitchFamily="34" charset="-122"/>
                 <a:cs typeface="Arial" pitchFamily="34" charset="-120"/>
               </a:rPr>
-              <a:t>Phase II study on HCC with PVTT</a:t>
+              <a:t>Developed AI models for EV detection</a:t>
             </a:r>
             <a:endParaRPr lang="en-US" sz="1800" dirty="0"/>
           </a:p>
@@ -7220,7 +7136,7 @@
                 <a:ea typeface="Arial" pitchFamily="34" charset="-122"/>
                 <a:cs typeface="Arial" pitchFamily="34" charset="-120"/>
               </a:rPr>
-              <a:t>HAIC combined with lenvatinib and PD-1</a:t>
+              <a:t>Used routine CT and clinical data</a:t>
             </a:r>
             <a:endParaRPr lang="en-US" sz="1800" dirty="0"/>
           </a:p>
@@ -7241,7 +7157,49 @@
                 <a:ea typeface="Arial" pitchFamily="34" charset="-122"/>
                 <a:cs typeface="Arial" pitchFamily="34" charset="-120"/>
               </a:rPr>
-              <a:t>Improved outcomes compared to monotherapy</a:t>
+              <a:t>Validated on 489 unresectable HCC patients</a:t>
+            </a:r>
+            <a:endParaRPr lang="en-US" sz="1800" dirty="0"/>
+          </a:p>
+          <a:p>
+            <a:pPr marL="342900" indent="-342900">
+              <a:spcAft>
+                <a:spcPts val="800"/>
+              </a:spcAft>
+              <a:buSzPct val="100000"/>
+              <a:buChar char="•"/>
+            </a:pPr>
+            <a:r>
+              <a:rPr lang="en-US" sz="1800" dirty="0">
+                <a:solidFill>
+                  <a:srgbClr val="333333"/>
+                </a:solidFill>
+                <a:latin typeface="Arial" pitchFamily="34" charset="0"/>
+                <a:ea typeface="Arial" pitchFamily="34" charset="-122"/>
+                <a:cs typeface="Arial" pitchFamily="34" charset="-120"/>
+              </a:rPr>
+              <a:t>HepatoSageCT improved prediction accuracy</a:t>
+            </a:r>
+            <a:endParaRPr lang="en-US" sz="1800" dirty="0"/>
+          </a:p>
+          <a:p>
+            <a:pPr marL="342900" indent="-342900">
+              <a:spcAft>
+                <a:spcPts val="800"/>
+              </a:spcAft>
+              <a:buSzPct val="100000"/>
+              <a:buChar char="•"/>
+            </a:pPr>
+            <a:r>
+              <a:rPr lang="en-US" sz="1800" dirty="0">
+                <a:solidFill>
+                  <a:srgbClr val="333333"/>
+                </a:solidFill>
+                <a:latin typeface="Arial" pitchFamily="34" charset="0"/>
+                <a:ea typeface="Arial" pitchFamily="34" charset="-122"/>
+                <a:cs typeface="Arial" pitchFamily="34" charset="-120"/>
+              </a:rPr>
+              <a:t>Non-invasive method reduces endoscopies</a:t>
             </a:r>
             <a:endParaRPr lang="en-US" sz="1800" dirty="0"/>
           </a:p>
@@ -7277,7 +7235,7 @@
                   <a:srgbClr val="888888"/>
                 </a:solidFill>
               </a:rPr>
-              <a:t>L Marzi, R Sacco, L Siciliani. …. 2026</a:t>
+              <a:t>Rabasco Meneghetti Asier, Campani Claudia, Roux Charles et al.. Journal of hepatology. 2026-05-16 DOI: 10.1016/j.jhep.2026.01.021</a:t>
             </a:r>
             <a:endParaRPr lang="en-US" sz="800" dirty="0"/>
           </a:p>
@@ -7477,7 +7435,7 @@
                   </a:extLst>
                 </a:hlinkClick>
               </a:rPr>
-              <a:t>… plus transarterial chemoembolization and PD-1 inhibitors as conversion therapies for unresectable intermediate-advanced hepatocellular carcinoma: a phase 2 trial …</a:t>
+              <a:t>Integrating Multiple Outcomes of First-Line Immunotherapy-Based Regimens for Advanced Hepatocellular Carcinoma: A Network Meta-Analysis of Phase III Trials.</a:t>
             </a:r>
             <a:endParaRPr lang="en-US" sz="2400" dirty="0"/>
           </a:p>
@@ -7513,7 +7471,7 @@
                   <a:srgbClr val="888888"/>
                 </a:solidFill>
               </a:rPr>
-              <a:t>… and Targeted Therapy  ·  RCT Phase 2</a:t>
+              <a:t>Critical reviews in oncology/hematology  ·  RCT Phase 3</a:t>
             </a:r>
             <a:endParaRPr lang="en-US" sz="1000" dirty="0"/>
           </a:p>
@@ -7556,7 +7514,7 @@
                 <a:ea typeface="Arial" pitchFamily="34" charset="-122"/>
                 <a:cs typeface="Arial" pitchFamily="34" charset="-120"/>
               </a:rPr>
-              <a:t>Combination of TACE and PD-1 inhibitors</a:t>
+              <a:t>Network meta-analysis of phase III trials conducted.</a:t>
             </a:r>
             <a:endParaRPr lang="en-US" sz="1800" dirty="0"/>
           </a:p>
@@ -7577,7 +7535,7 @@
                 <a:ea typeface="Arial" pitchFamily="34" charset="-122"/>
                 <a:cs typeface="Arial" pitchFamily="34" charset="-120"/>
               </a:rPr>
-              <a:t>Phase 2 trial for uHCC treatment</a:t>
+              <a:t>Sintilimab plus IBI305 showed highest OS effectiveness.</a:t>
             </a:r>
             <a:endParaRPr lang="en-US" sz="1800" dirty="0"/>
           </a:p>
@@ -7598,7 +7556,49 @@
                 <a:ea typeface="Arial" pitchFamily="34" charset="-122"/>
                 <a:cs typeface="Arial" pitchFamily="34" charset="-120"/>
               </a:rPr>
-              <a:t>Improved outcomes compared to TACE alone</a:t>
+              <a:t>Finotonlimab plus bevacizumab improved outcomes in younger patients.</a:t>
+            </a:r>
+            <a:endParaRPr lang="en-US" sz="1800" dirty="0"/>
+          </a:p>
+          <a:p>
+            <a:pPr marL="342900" indent="-342900">
+              <a:spcAft>
+                <a:spcPts val="800"/>
+              </a:spcAft>
+              <a:buSzPct val="100000"/>
+              <a:buChar char="•"/>
+            </a:pPr>
+            <a:r>
+              <a:rPr lang="en-US" sz="1800" dirty="0">
+                <a:solidFill>
+                  <a:srgbClr val="333333"/>
+                </a:solidFill>
+                <a:latin typeface="Arial" pitchFamily="34" charset="0"/>
+                <a:ea typeface="Arial" pitchFamily="34" charset="-122"/>
+                <a:cs typeface="Arial" pitchFamily="34" charset="-120"/>
+              </a:rPr>
+              <a:t>Bevacizumab combinations offer favorable benefit-risk balance.</a:t>
+            </a:r>
+            <a:endParaRPr lang="en-US" sz="1800" dirty="0"/>
+          </a:p>
+          <a:p>
+            <a:pPr marL="342900" indent="-342900">
+              <a:spcAft>
+                <a:spcPts val="800"/>
+              </a:spcAft>
+              <a:buSzPct val="100000"/>
+              <a:buChar char="•"/>
+            </a:pPr>
+            <a:r>
+              <a:rPr lang="en-US" sz="1800" dirty="0">
+                <a:solidFill>
+                  <a:srgbClr val="333333"/>
+                </a:solidFill>
+                <a:latin typeface="Arial" pitchFamily="34" charset="0"/>
+                <a:ea typeface="Arial" pitchFamily="34" charset="-122"/>
+                <a:cs typeface="Arial" pitchFamily="34" charset="-120"/>
+              </a:rPr>
+              <a:t>TOPSIS model integrates multiple treatment outcomes.</a:t>
             </a:r>
             <a:endParaRPr lang="en-US" sz="1800" dirty="0"/>
           </a:p>
@@ -7634,7 +7634,7 @@
                   <a:srgbClr val="888888"/>
                 </a:solidFill>
               </a:rPr>
-              <a:t>X Zhang, H Cai, W Peng. … and Targeted Therapy. 2026</a:t>
+              <a:t>Nie Guilin, Li Xinming, Wang Yaoqun et al.. Critical reviews in oncology/hematology. 2026-06-06 DOI: 10.1016/j.critrevonc.2026.105412</a:t>
             </a:r>
             <a:endParaRPr lang="en-US" sz="800" dirty="0"/>
           </a:p>

--- a/docs/digest-en.pptx
+++ b/docs/digest-en.pptx
@@ -2269,7 +2269,7 @@
                   <a:srgbClr val="888888"/>
                 </a:solidFill>
               </a:rPr>
-              <a:t>2026-06-01 — 2026-06-08</a:t>
+              <a:t>2026-06-08 — 2026-06-15</a:t>
             </a:r>
             <a:endParaRPr lang="en-US" sz="1400" dirty="0"/>
           </a:p>
@@ -2460,7 +2460,7 @@
                   </a:extLst>
                 </a:hlinkClick>
               </a:rPr>
-              <a:t>Determinants of long-term survival from atezolizumab plus bevacizumab in unresectable hepatocellular carcinoma.</a:t>
+              <a:t>Natural killer cell-mediated immunosurveillance modulates liver cancer evolution through cancer stemness enhancement and lipid metabolism reprogramming.</a:t>
             </a:r>
             <a:endParaRPr lang="en-US" sz="2400" dirty="0"/>
           </a:p>
@@ -2496,7 +2496,7 @@
                   <a:srgbClr val="888888"/>
                 </a:solidFill>
               </a:rPr>
-              <a:t>European journal of cancer (Oxford, England : 1990)  ·  IF 8.4  ·  🌏 Asia</a:t>
+              <a:t>Nature communications  ·  IF 14.7</a:t>
             </a:r>
             <a:endParaRPr lang="en-US" sz="1000" dirty="0"/>
           </a:p>
@@ -2539,7 +2539,7 @@
                 <a:ea typeface="Arial" pitchFamily="34" charset="-122"/>
                 <a:cs typeface="Arial" pitchFamily="34" charset="-120"/>
               </a:rPr>
-              <a:t>Atezolizumab plus bevacizumab shows long-term survival benefits.</a:t>
+              <a:t>NK cells promote liver cancer evolution.</a:t>
             </a:r>
             <a:endParaRPr lang="en-US" sz="1800" dirty="0"/>
           </a:p>
@@ -2560,7 +2560,7 @@
                 <a:ea typeface="Arial" pitchFamily="34" charset="-122"/>
                 <a:cs typeface="Arial" pitchFamily="34" charset="-120"/>
               </a:rPr>
-              <a:t>Long-term survivors defined as 24 months or more.</a:t>
+              <a:t>Immunosurveillance enhances tumor stemness.</a:t>
             </a:r>
             <a:endParaRPr lang="en-US" sz="1800" dirty="0"/>
           </a:p>
@@ -2581,7 +2581,7 @@
                 <a:ea typeface="Arial" pitchFamily="34" charset="-122"/>
                 <a:cs typeface="Arial" pitchFamily="34" charset="-120"/>
               </a:rPr>
-              <a:t>Radiologic responders had significantly better survival rates.</a:t>
+              <a:t>Lipid metabolism reprogramming observed.</a:t>
             </a:r>
             <a:endParaRPr lang="en-US" sz="1800" dirty="0"/>
           </a:p>
@@ -2602,7 +2602,7 @@
                 <a:ea typeface="Arial" pitchFamily="34" charset="-122"/>
                 <a:cs typeface="Arial" pitchFamily="34" charset="-120"/>
               </a:rPr>
-              <a:t>Key factors include liver reserve and tumor size.</a:t>
+              <a:t>Combined anti-LAG-3 improves treatment.</a:t>
             </a:r>
             <a:endParaRPr lang="en-US" sz="1800" dirty="0"/>
           </a:p>
@@ -2623,7 +2623,7 @@
                 <a:ea typeface="Arial" pitchFamily="34" charset="-122"/>
                 <a:cs typeface="Arial" pitchFamily="34" charset="-120"/>
               </a:rPr>
-              <a:t>AB-Real provides real-world evidence for uHCC.</a:t>
+              <a:t>Immunometabolic therapy as a strategy.</a:t>
             </a:r>
             <a:endParaRPr lang="en-US" sz="1800" dirty="0"/>
           </a:p>
@@ -2659,7 +2659,7 @@
                   <a:srgbClr val="888888"/>
                 </a:solidFill>
               </a:rPr>
-              <a:t>Lee Pei-Chang, Cortellini Alessio, Stefanini Bernardo et al.. European journal of cancer (Oxford, England : 1990). 2026-05-21 DOI: 10.1016/j.ejca.2026.116749</a:t>
+              <a:t>Shi Liang, Liu Boqiang, Sun Ruya et al.. Nature communications. 2026-06-11 DOI: 10.1038/s41467-026-74360-x</a:t>
             </a:r>
             <a:endParaRPr lang="en-US" sz="800" dirty="0"/>
           </a:p>
@@ -2859,7 +2859,7 @@
                   </a:extLst>
                 </a:hlinkClick>
               </a:rPr>
-              <a:t>Prospective Study of Atezolizumab Plus Bevacizumab for Unresectable Hepatocellular Carcinoma Based on Hepatobiliary Phase of Gd-EOB-DTPA-MRI.</a:t>
+              <a:t>WNK4 Enhances Anti-PD-1 Resistance and Promotes Tumor Progression in Hepatocellular Carcinoma by Reprogramming Cysteine Metabolism in Cancer-Associated Fibroblasts.</a:t>
             </a:r>
             <a:endParaRPr lang="en-US" sz="2400" dirty="0"/>
           </a:p>
@@ -2895,7 +2895,7 @@
                   <a:srgbClr val="888888"/>
                 </a:solidFill>
               </a:rPr>
-              <a:t>Hepatology research : the official journal of the Japan Society of Hepatology  ·  Prospective Study  ·  🌏 Asia</a:t>
+              <a:t>FASEB journal : official publication of the Federation of American Societies for Experimental Biology  ·  🌏 Asia</a:t>
             </a:r>
             <a:endParaRPr lang="en-US" sz="1000" dirty="0"/>
           </a:p>
@@ -2938,7 +2938,7 @@
                 <a:ea typeface="Arial" pitchFamily="34" charset="-122"/>
                 <a:cs typeface="Arial" pitchFamily="34" charset="-120"/>
               </a:rPr>
-              <a:t>Study on atezolizumab plus bevacizumab</a:t>
+              <a:t>WNK4 upregulated in HCC tissues</a:t>
             </a:r>
             <a:endParaRPr lang="en-US" sz="1800" dirty="0"/>
           </a:p>
@@ -2959,7 +2959,7 @@
                 <a:ea typeface="Arial" pitchFamily="34" charset="-122"/>
                 <a:cs typeface="Arial" pitchFamily="34" charset="-120"/>
               </a:rPr>
-              <a:t>Involves 152 unresectable HCC patients</a:t>
+              <a:t>Promotes HCC cell proliferation and migration</a:t>
             </a:r>
             <a:endParaRPr lang="en-US" sz="1800" dirty="0"/>
           </a:p>
@@ -2980,7 +2980,7 @@
                 <a:ea typeface="Arial" pitchFamily="34" charset="-122"/>
                 <a:cs typeface="Arial" pitchFamily="34" charset="-120"/>
               </a:rPr>
-              <a:t>Hyperintensity linked to Wnt signaling</a:t>
+              <a:t>Enhances anti-PD-1 therapy resistance</a:t>
             </a:r>
             <a:endParaRPr lang="en-US" sz="1800" dirty="0"/>
           </a:p>
@@ -3001,7 +3001,7 @@
                 <a:ea typeface="Arial" pitchFamily="34" charset="-122"/>
                 <a:cs typeface="Arial" pitchFamily="34" charset="-120"/>
               </a:rPr>
-              <a:t>Higher ORR in hyperintense group</a:t>
+              <a:t>Reprograms cysteine metabolism in CAFs</a:t>
             </a:r>
             <a:endParaRPr lang="en-US" sz="1800" dirty="0"/>
           </a:p>
@@ -3022,7 +3022,7 @@
                 <a:ea typeface="Arial" pitchFamily="34" charset="-122"/>
                 <a:cs typeface="Arial" pitchFamily="34" charset="-120"/>
               </a:rPr>
-              <a:t>No resistance to combination therapy found</a:t>
+              <a:t>Identifies WNK4-HMGB1-p53 axis</a:t>
             </a:r>
             <a:endParaRPr lang="en-US" sz="1800" dirty="0"/>
           </a:p>
@@ -3058,7 +3058,7 @@
                   <a:srgbClr val="888888"/>
                 </a:solidFill>
               </a:rPr>
-              <a:t>Aoki Tomoko, Kudo Masatoshi, Ueshima Kazuomi et al.. Hepatology research : the official journal of the Japan Society of Hepatology. 2026-06-06 DOI: 10.1111/hepr.70157</a:t>
+              <a:t>Yu Ge, Cui Yun-Long, Mu Han et al.. FASEB journal : official publication of the Federation of American Societies for Experimental Biology. 2026-06-12 DOI: 10.1096/fj.202502777R</a:t>
             </a:r>
             <a:endParaRPr lang="en-US" sz="800" dirty="0"/>
           </a:p>
@@ -3258,7 +3258,7 @@
                   </a:extLst>
                 </a:hlinkClick>
               </a:rPr>
-              <a:t>Erratum: Hepatectomy alters adjuvant anti-PD-1 action in a mouse model of HCC but does not compromise neoadjuvant efficacy.</a:t>
+              <a:t>Rethinking Progression in Hepatocellular Carcinoma: Is Oligoprogression a Window for Local Ablation?</a:t>
             </a:r>
             <a:endParaRPr lang="en-US" sz="2400" dirty="0"/>
           </a:p>
@@ -3294,7 +3294,7 @@
                   <a:srgbClr val="888888"/>
                 </a:solidFill>
               </a:rPr>
-              <a:t>Hepatology (Baltimore, Md.)  ·  IF 12.9  ·  Basic Research</a:t>
+              <a:t>Hepatology research : the official journal of the Japan Society of Hepatology  ·  🌏 Asia</a:t>
             </a:r>
             <a:endParaRPr lang="en-US" sz="1000" dirty="0"/>
           </a:p>
@@ -3337,7 +3337,7 @@
                 <a:ea typeface="Arial" pitchFamily="34" charset="-122"/>
                 <a:cs typeface="Arial" pitchFamily="34" charset="-120"/>
               </a:rPr>
-              <a:t>Hepatectomy affects anti-PD-1 therapy</a:t>
+              <a:t>Oligoprogression in HCC is significant.</a:t>
             </a:r>
             <a:endParaRPr lang="en-US" sz="1800" dirty="0"/>
           </a:p>
@@ -3358,7 +3358,7 @@
                 <a:ea typeface="Arial" pitchFamily="34" charset="-122"/>
                 <a:cs typeface="Arial" pitchFamily="34" charset="-120"/>
               </a:rPr>
-              <a:t>Neoadjuvant efficacy remains intact</a:t>
+              <a:t>Local ablation may benefit oligoprogressive patients.</a:t>
             </a:r>
             <a:endParaRPr lang="en-US" sz="1800" dirty="0"/>
           </a:p>
@@ -3379,7 +3379,7 @@
                 <a:ea typeface="Arial" pitchFamily="34" charset="-122"/>
                 <a:cs typeface="Arial" pitchFamily="34" charset="-120"/>
               </a:rPr>
-              <a:t>Mouse model used for study</a:t>
+              <a:t>Identifying oligoprogression is crucial for treatment.</a:t>
             </a:r>
             <a:endParaRPr lang="en-US" sz="1800" dirty="0"/>
           </a:p>
@@ -3415,7 +3415,7 @@
                   <a:srgbClr val="888888"/>
                 </a:solidFill>
               </a:rPr>
-              <a:t>Bouguerra Roqiya, El Hajji Sofia, Wassmer Charles-Henri et al.. Hepatology (Baltimore, Md.). 2026-06-05 DOI: 10.1097/HEP.0000000000001731</a:t>
+              <a:t>Hidaka Hisashi. Hepatology research : the official journal of the Japan Society of Hepatology. 2026-06-11 DOI: 10.1111/hepr.70218</a:t>
             </a:r>
             <a:endParaRPr lang="en-US" sz="800" dirty="0"/>
           </a:p>
@@ -3606,7 +3606,7 @@
                   <a:srgbClr val="FFFFFF"/>
                 </a:solidFill>
               </a:rPr>
-              <a:t>### 綜合啟示（Overall Insights）</a:t>
+              <a:t>### 綜合啟示 (Overall Insights)</a:t>
             </a:r>
             <a:endParaRPr lang="en-US" sz="1200" dirty="0"/>
           </a:p>
@@ -3632,7 +3632,7 @@
                   <a:srgbClr val="FFFFFF"/>
                 </a:solidFill>
               </a:rPr>
-              <a:t>1. **免疫檢查點抑制劑的應用潛力**  </a:t>
+              <a:t>1. **代謝適應與免疫逃逸**  </a:t>
             </a:r>
             <a:endParaRPr lang="en-US" sz="1200" dirty="0"/>
           </a:p>
@@ -3649,7 +3649,7 @@
                   <a:srgbClr val="FFFFFF"/>
                 </a:solidFill>
               </a:rPr>
-              <a:t>   The use of dual immune checkpoint inhibitors (ICIs) targeting CTLA-4 and PD-1/PD-L1 has shown promise in reshaping treatment for unresectable HCC, yet their clinical uptake is hindered by severe immune-related adverse events.  </a:t>
+              <a:t>   Tumor cells exhibit metabolic adaptations to evade immune-checkpoint therapy, utilizing macrophage efferocytosis to recycle fatty acids and sustain growth in nutrient-deprived environments.  </a:t>
             </a:r>
             <a:endParaRPr lang="en-US" sz="1200" dirty="0"/>
           </a:p>
@@ -3666,7 +3666,7 @@
                   <a:srgbClr val="FFFFFF"/>
                 </a:solidFill>
               </a:rPr>
-              <a:t>   雙重免疫檢查點抑制劑（如CTLA-4和PD-1/PD-L1）的應用潛力顯示出在不可切除肝細胞癌（HCC）治療中的前景，但其臨床應用受到嚴重免疫相關不良事件的限制。</a:t>
+              <a:t>   腫瘤細胞展現出代謝適應以逃避免疫檢查點治療，利用巨噬細胞的吞噬作用回收脂肪酸，在缺乏營養的環境中維持生長。</a:t>
             </a:r>
             <a:endParaRPr lang="en-US" sz="1200" dirty="0"/>
           </a:p>
@@ -3692,7 +3692,7 @@
                   <a:srgbClr val="FFFFFF"/>
                 </a:solidFill>
               </a:rPr>
-              <a:t>2. **新輔助療法的前景**  </a:t>
+              <a:t>2. **MASLD與肝癌的關聯性**  </a:t>
             </a:r>
             <a:endParaRPr lang="en-US" sz="1200" dirty="0"/>
           </a:p>
@@ -3709,7 +3709,7 @@
                   <a:srgbClr val="FFFFFF"/>
                 </a:solidFill>
               </a:rPr>
-              <a:t>   Atezolizumab combined with bevacizumab has demonstrated improved recurrence-free survival in high-risk HCC patients, indicating a potential shift towards adjuvant immunotherapy strategies.  </a:t>
+              <a:t>   The rising prevalence of metabolic dysfunction-associated steatotic liver disease (MASLD) highlights the need for novel biomarkers and therapeutic strategies, particularly in relation to hepatocellular carcinoma (HCC).  </a:t>
             </a:r>
             <a:endParaRPr lang="en-US" sz="1200" dirty="0"/>
           </a:p>
@@ -3726,7 +3726,7 @@
                   <a:srgbClr val="FFFFFF"/>
                 </a:solidFill>
               </a:rPr>
-              <a:t>   阿特珠單抗與貝伐單抗的聯合使用在高風險HCC患者中顯示出改善無復發生存期的潛力，這表明輔助免疫療法策略可能會有新的轉變。</a:t>
+              <a:t>   代謝功能障礙相關的脂肪肝病（MASLD）日益普遍，凸顯出對新型生物標誌物和治療策略的需求，特別是在肝細胞癌（HCC）方面。</a:t>
             </a:r>
             <a:endParaRPr lang="en-US" sz="1200" dirty="0"/>
           </a:p>
@@ -3752,7 +3752,7 @@
                   <a:srgbClr val="FFFFFF"/>
                 </a:solidFill>
               </a:rPr>
-              <a:t>3. **腫瘤微環境的影響**  </a:t>
+              <a:t>3. **不充分消融的風險**  </a:t>
             </a:r>
             <a:endParaRPr lang="en-US" sz="1200" dirty="0"/>
           </a:p>
@@ -3769,7 +3769,7 @@
                   <a:srgbClr val="FFFFFF"/>
                 </a:solidFill>
               </a:rPr>
-              <a:t>   The tumor immune microenvironment (TIME) plays a critical role in modulating responses to ICIs, with HCC exhibiting significant intratumoral heterogeneity that complicates treatment efficacy.  </a:t>
+              <a:t>   Insufficient radiofrequency ablation (iRFA) is linked to HCC progression through the CEBPD/CXCL2 axis, emphasizing the importance of precise ablation techniques in treatment outcomes.  </a:t>
             </a:r>
             <a:endParaRPr lang="en-US" sz="1200" dirty="0"/>
           </a:p>
@@ -3786,7 +3786,7 @@
                   <a:srgbClr val="FFFFFF"/>
                 </a:solidFill>
               </a:rPr>
-              <a:t>   腫瘤免疫微環境（TIME）在調節對免疫檢查點抑制劑的反應中起著關鍵作用，而HCC的腫瘤內異質性顯著，這使得治療效果變得複雜。</a:t>
+              <a:t>   不充分的射頻消融（iRFA）與肝細胞癌進展有關，通過CEBPD/CXCL2通路，強調了精確消融技術在治療結果中的重要性。</a:t>
             </a:r>
             <a:endParaRPr lang="en-US" sz="1200" dirty="0"/>
           </a:p>
@@ -3812,7 +3812,7 @@
                   <a:srgbClr val="FFFFFF"/>
                 </a:solidFill>
               </a:rPr>
-              <a:t>4. **非侵入性檢測技術的發展**  </a:t>
+              <a:t>4. **免疫治療的臨床預測因子**  </a:t>
             </a:r>
             <a:endParaRPr lang="en-US" sz="1200" dirty="0"/>
           </a:p>
@@ -3829,7 +3829,7 @@
                   <a:srgbClr val="FFFFFF"/>
                 </a:solidFill>
               </a:rPr>
-              <a:t>   Advances in AI-driven non-invasive models for detecting esophageal varices in cirrhotic patients with HCC could lead to earlier interventions and improved patient outcomes.  </a:t>
+              <a:t>   Identifying clinical predictors for response to atezolizumab-bevacizumab in Child-Pugh B patients can optimize treatment strategies for advanced HCC populations often excluded from trials.  </a:t>
             </a:r>
             <a:endParaRPr lang="en-US" sz="1200" dirty="0"/>
           </a:p>
@@ -3846,7 +3846,7 @@
                   <a:srgbClr val="FFFFFF"/>
                 </a:solidFill>
               </a:rPr>
-              <a:t>   基於人工智慧的非侵入性模型在檢測伴有肝硬化的HCC患者食道靜脈曲張方面的進展，可能會導致更早的干預和改善患者的預後。</a:t>
+              <a:t>   確定Child-Pugh B患者對阿特珠單抗-貝伐單抗反應的臨床預測因子，可以優化通常被排除在臨床試驗之外的晚期HCC人群的治療策略。</a:t>
             </a:r>
             <a:endParaRPr lang="en-US" sz="1200" dirty="0"/>
           </a:p>
@@ -3872,7 +3872,7 @@
                   <a:srgbClr val="FFFFFF"/>
                 </a:solidFill>
               </a:rPr>
-              <a:t>5. **多模式治療策略的必要性**  </a:t>
+              <a:t>5. **多重療法的潛力**  </a:t>
             </a:r>
             <a:endParaRPr lang="en-US" sz="1200" dirty="0"/>
           </a:p>
@@ -3889,7 +3889,24 @@
                   <a:srgbClr val="FFFFFF"/>
                 </a:solidFill>
               </a:rPr>
-              <a:t>   The integration of multiple treatment modalities, including immunotherapy and radiotherapy, is essential to address the challenge of recurrence in HCC post-curative treatment.</a:t>
+              <a:t>   The combination of sintilimab, lenvatinib, and transarterial chemoembolization (TACE) shows promise as a conversion therapy for unresectable HCC, redefining resectability criteria.  </a:t>
+            </a:r>
+            <a:endParaRPr lang="en-US" sz="1200" dirty="0"/>
+          </a:p>
+          <a:p>
+            <a:pPr indent="0" marL="0">
+              <a:lnSpc>
+                <a:spcPct val="150000"/>
+              </a:lnSpc>
+              <a:buNone/>
+            </a:pPr>
+            <a:r>
+              <a:rPr lang="en-US" sz="1200" dirty="0">
+                <a:solidFill>
+                  <a:srgbClr val="FFFFFF"/>
+                </a:solidFill>
+              </a:rPr>
+              <a:t>   結合sintilimab、lenvatinib和經導管化療栓塞（TACE）顯示出作為不可切除HCC的轉化療法的潛力，重新定義可切除性標準。</a:t>
             </a:r>
             <a:endParaRPr lang="en-US" sz="1200" dirty="0"/>
           </a:p>
@@ -4035,7 +4052,7 @@
                   <a:srgbClr val="FFFFFF"/>
                 </a:solidFill>
               </a:rPr>
-              <a:t>整合多種治療模式，包括免疫療法和放療，對於解決HCC在根治性治療後復發的挑戰至關重要。</a:t>
+              <a:t>### 未來研究方向 (Future Research Directions)</a:t>
             </a:r>
             <a:endParaRPr lang="en-US" sz="1200" dirty="0"/>
           </a:p>
@@ -4061,7 +4078,7 @@
                   <a:srgbClr val="FFFFFF"/>
                 </a:solidFill>
               </a:rPr>
-              <a:t>### 未來研究方向（Future Research Directions）</a:t>
+              <a:t>1. **代謝重編程的機制研究**  </a:t>
             </a:r>
             <a:endParaRPr lang="en-US" sz="1200" dirty="0"/>
           </a:p>
@@ -4072,6 +4089,14 @@
               </a:lnSpc>
               <a:buNone/>
             </a:pPr>
+            <a:r>
+              <a:rPr lang="en-US" sz="1200" dirty="0">
+                <a:solidFill>
+                  <a:srgbClr val="FFFFFF"/>
+                </a:solidFill>
+              </a:rPr>
+              <a:t>   Further investigation into the metabolic pathways exploited by tumor cells during immune evasion could reveal novel therapeutic targets for enhancing the efficacy of immune-checkpoint inhibitors.  </a:t>
+            </a:r>
             <a:endParaRPr lang="en-US" sz="1200" dirty="0"/>
           </a:p>
           <a:p>
@@ -4087,7 +4112,7 @@
                   <a:srgbClr val="FFFFFF"/>
                 </a:solidFill>
               </a:rPr>
-              <a:t>1. **探索免疫相關不良事件的管理策略**  </a:t>
+              <a:t>   進一步研究腫瘤細胞在免疫逃逸過程中利用的代謝途徑，可能揭示增強免疫檢查點抑制劑療效的新型治療靶點。</a:t>
             </a:r>
             <a:endParaRPr lang="en-US" sz="1200" dirty="0"/>
           </a:p>
@@ -4098,14 +4123,6 @@
               </a:lnSpc>
               <a:buNone/>
             </a:pPr>
-            <a:r>
-              <a:rPr lang="en-US" sz="1200" dirty="0">
-                <a:solidFill>
-                  <a:srgbClr val="FFFFFF"/>
-                </a:solidFill>
-              </a:rPr>
-              <a:t>   Future studies should focus on optimizing prophylactic measures, such as corticosteroids, to mitigate severe immune-related adverse events associated with ICIs in HCC.  </a:t>
-            </a:r>
             <a:endParaRPr lang="en-US" sz="1200" dirty="0"/>
           </a:p>
           <a:p>
@@ -4121,7 +4138,7 @@
                   <a:srgbClr val="FFFFFF"/>
                 </a:solidFill>
               </a:rPr>
-              <a:t>   未來的研究應集中於優化預防措施，如皮質類固醇，以減輕與HCC中免疫檢查點抑制劑相關的嚴重免疫相關不良事件。</a:t>
+              <a:t>2. **MASLD與HCC的早期診斷**  </a:t>
             </a:r>
             <a:endParaRPr lang="en-US" sz="1200" dirty="0"/>
           </a:p>
@@ -4132,6 +4149,14 @@
               </a:lnSpc>
               <a:buNone/>
             </a:pPr>
+            <a:r>
+              <a:rPr lang="en-US" sz="1200" dirty="0">
+                <a:solidFill>
+                  <a:srgbClr val="FFFFFF"/>
+                </a:solidFill>
+              </a:rPr>
+              <a:t>   Development of non-invasive diagnostic tools for early detection of MASLD and its association with HCC could facilitate timely interventions and improve patient outcomes.  </a:t>
+            </a:r>
             <a:endParaRPr lang="en-US" sz="1200" dirty="0"/>
           </a:p>
           <a:p>
@@ -4147,7 +4172,7 @@
                   <a:srgbClr val="FFFFFF"/>
                 </a:solidFill>
               </a:rPr>
-              <a:t>2. **長期療效的評估**  </a:t>
+              <a:t>   開發早期檢測MASLD及其與HCC關聯的非侵入性診斷工具，可能促進及時干預並改善患者預後。</a:t>
             </a:r>
             <a:endParaRPr lang="en-US" sz="1200" dirty="0"/>
           </a:p>
@@ -4158,14 +4183,6 @@
               </a:lnSpc>
               <a:buNone/>
             </a:pPr>
-            <a:r>
-              <a:rPr lang="en-US" sz="1200" dirty="0">
-                <a:solidFill>
-                  <a:srgbClr val="FFFFFF"/>
-                </a:solidFill>
-              </a:rPr>
-              <a:t>   There is a need for long-term follow-up studies to assess the sustained efficacy and safety of atezolizumab plus bevacizumab in unresectable HCC.  </a:t>
-            </a:r>
             <a:endParaRPr lang="en-US" sz="1200" dirty="0"/>
           </a:p>
           <a:p>
@@ -4181,7 +4198,7 @@
                   <a:srgbClr val="FFFFFF"/>
                 </a:solidFill>
               </a:rPr>
-              <a:t>   需要進行長期隨訪研究，以評估阿特珠單抗與貝伐單抗在不可切除HCC中的持續療效和安全性。</a:t>
+              <a:t>3. **消融技術的優化**  </a:t>
             </a:r>
             <a:endParaRPr lang="en-US" sz="1200" dirty="0"/>
           </a:p>
@@ -4192,6 +4209,14 @@
               </a:lnSpc>
               <a:buNone/>
             </a:pPr>
+            <a:r>
+              <a:rPr lang="en-US" sz="1200" dirty="0">
+                <a:solidFill>
+                  <a:srgbClr val="FFFFFF"/>
+                </a:solidFill>
+              </a:rPr>
+              <a:t>   Research focused on optimizing radiofrequency ablation techniques to minimize the risk of insufficient ablation and its subsequent impact on tumor progression is critical.  </a:t>
+            </a:r>
             <a:endParaRPr lang="en-US" sz="1200" dirty="0"/>
           </a:p>
           <a:p>
@@ -4207,7 +4232,7 @@
                   <a:srgbClr val="FFFFFF"/>
                 </a:solidFill>
               </a:rPr>
-              <a:t>3. **腫瘤微環境的深入研究**  </a:t>
+              <a:t>   專注於優化射頻消融技術的研究，以最小化不充分消融的風險及其對腫瘤進展的後續影響是至關重要的。</a:t>
             </a:r>
             <a:endParaRPr lang="en-US" sz="1200" dirty="0"/>
           </a:p>
@@ -4218,14 +4243,6 @@
               </a:lnSpc>
               <a:buNone/>
             </a:pPr>
-            <a:r>
-              <a:rPr lang="en-US" sz="1200" dirty="0">
-                <a:solidFill>
-                  <a:srgbClr val="FFFFFF"/>
-                </a:solidFill>
-              </a:rPr>
-              <a:t>   Investigating the specific components and dynamics of the tumor immune microenvironment in HCC can provide insights into resistance mechanisms and inform treatment strategies.  </a:t>
-            </a:r>
             <a:endParaRPr lang="en-US" sz="1200" dirty="0"/>
           </a:p>
           <a:p>
@@ -4241,7 +4258,7 @@
                   <a:srgbClr val="FFFFFF"/>
                 </a:solidFill>
               </a:rPr>
-              <a:t>   深入研究HCC中腫瘤免疫微環境的具體組成和動態，能提供對抗藥物抵抗機制的見解，並指導治療策略。</a:t>
+              <a:t>4. **個體化免疫治療策略**  </a:t>
             </a:r>
             <a:endParaRPr lang="en-US" sz="1200" dirty="0"/>
           </a:p>
@@ -4252,6 +4269,14 @@
               </a:lnSpc>
               <a:buNone/>
             </a:pPr>
+            <a:r>
+              <a:rPr lang="en-US" sz="1200" dirty="0">
+                <a:solidFill>
+                  <a:srgbClr val="FFFFFF"/>
+                </a:solidFill>
+              </a:rPr>
+              <a:t>   Investigating the genetic and molecular profiles of HCC patients to tailor immunotherapy approaches, especially for those with Child-Pugh B cirrhosis, could enhance treatment efficacy.  </a:t>
+            </a:r>
             <a:endParaRPr lang="en-US" sz="1200" dirty="0"/>
           </a:p>
           <a:p>
@@ -4267,7 +4292,7 @@
                   <a:srgbClr val="FFFFFF"/>
                 </a:solidFill>
               </a:rPr>
-              <a:t>4. **多模式治療的臨床試驗**  </a:t>
+              <a:t>   研究HCC患者的遺傳和分子特徵，以量身定制免疫治療方案，特別是對於Child-Pugh B肝硬化患者，可能提高治療效果。</a:t>
             </a:r>
             <a:endParaRPr lang="en-US" sz="1200" dirty="0"/>
           </a:p>
@@ -4278,14 +4303,6 @@
               </a:lnSpc>
               <a:buNone/>
             </a:pPr>
-            <a:r>
-              <a:rPr lang="en-US" sz="1200" dirty="0">
-                <a:solidFill>
-                  <a:srgbClr val="FFFFFF"/>
-                </a:solidFill>
-              </a:rPr>
-              <a:t>   Conducting clinical trials that evaluate the efficacy of multimodal treatment approaches, including combining immunotherapy with radiotherapy, is crucial for improving patient outcomes.  </a:t>
-            </a:r>
             <a:endParaRPr lang="en-US" sz="1200" dirty="0"/>
           </a:p>
           <a:p>
@@ -4301,7 +4318,7 @@
                   <a:srgbClr val="FFFFFF"/>
                 </a:solidFill>
               </a:rPr>
-              <a:t>   開展臨床試驗，評估多模式治療方法的療效，包括將免疫療法與放療結合，對改善患者預後至關重要。</a:t>
+              <a:t>5. **多重療法的長期效果評估**  </a:t>
             </a:r>
             <a:endParaRPr lang="en-US" sz="1200" dirty="0"/>
           </a:p>
@@ -4312,6 +4329,14 @@
               </a:lnSpc>
               <a:buNone/>
             </a:pPr>
+            <a:r>
+              <a:rPr lang="en-US" sz="1200" dirty="0">
+                <a:solidFill>
+                  <a:srgbClr val="FFFFFF"/>
+                </a:solidFill>
+              </a:rPr>
+              <a:t>   Longitudinal studies assessing the long-term outcomes of combination therapies, such as sintilimab and TACE, in unresectable HCC will be essential for establishing best practices.  </a:t>
+            </a:r>
             <a:endParaRPr lang="en-US" sz="1200" dirty="0"/>
           </a:p>
           <a:p>
@@ -4327,41 +4352,7 @@
                   <a:srgbClr val="FFFFFF"/>
                 </a:solidFill>
               </a:rPr>
-              <a:t>5. **AI在臨床決策中的應用**  </a:t>
-            </a:r>
-            <a:endParaRPr lang="en-US" sz="1200" dirty="0"/>
-          </a:p>
-          <a:p>
-            <a:pPr indent="0" marL="0">
-              <a:lnSpc>
-                <a:spcPct val="150000"/>
-              </a:lnSpc>
-              <a:buNone/>
-            </a:pPr>
-            <a:r>
-              <a:rPr lang="en-US" sz="1200" dirty="0">
-                <a:solidFill>
-                  <a:srgbClr val="FFFFFF"/>
-                </a:solidFill>
-              </a:rPr>
-              <a:t>   Further development of AI-based models for predicting complications in HCC patients could enhance clinical decision-making and personalized treatment strategies.  </a:t>
-            </a:r>
-            <a:endParaRPr lang="en-US" sz="1200" dirty="0"/>
-          </a:p>
-          <a:p>
-            <a:pPr indent="0" marL="0">
-              <a:lnSpc>
-                <a:spcPct val="150000"/>
-              </a:lnSpc>
-              <a:buNone/>
-            </a:pPr>
-            <a:r>
-              <a:rPr lang="en-US" sz="1200" dirty="0">
-                <a:solidFill>
-                  <a:srgbClr val="FFFFFF"/>
-                </a:solidFill>
-              </a:rPr>
-              <a:t>   進一步開發基於人工智慧的模型以預測HCC患者的併發症，可能會增強臨床決策和個性化治療策略。</a:t>
+              <a:t>   評估不可切除HCC中如sintilimab和TACE等組合療法的長期效果的縱向研究，對於建立最佳實踐至關重要。</a:t>
             </a:r>
             <a:endParaRPr lang="en-US" sz="1200" dirty="0"/>
           </a:p>
@@ -4595,7 +4586,7 @@
                 <a:ea typeface="Arial" pitchFamily="34" charset="-122"/>
                 <a:cs typeface="Arial" pitchFamily="34" charset="-120"/>
               </a:rPr>
-              <a:t>Revisiting prophylactic corticosteroids to mitigate severe immune-related advers…</a:t>
+              <a:t>Tumor cells metabolically resist immune-checkpoint therapy by macrophage efferoc…</a:t>
             </a:r>
             <a:endParaRPr lang="en-US" sz="1400" dirty="0"/>
           </a:p>
@@ -4632,7 +4623,7 @@
                 <a:ea typeface="Arial" pitchFamily="34" charset="-122"/>
                 <a:cs typeface="Arial" pitchFamily="34" charset="-120"/>
               </a:rPr>
-              <a:t>Updated data from IMbrave050: Adjuvant atezolizumab plus bevacizumab for high-ri…</a:t>
+              <a:t>MASLD and MASLD-associated HCC: emerging biomarkers and therapeutic avenues.</a:t>
             </a:r>
             <a:endParaRPr lang="en-US" sz="1400" dirty="0"/>
           </a:p>
@@ -4669,7 +4660,7 @@
                 <a:ea typeface="Arial" pitchFamily="34" charset="-122"/>
                 <a:cs typeface="Arial" pitchFamily="34" charset="-120"/>
               </a:rPr>
-              <a:t>Phase Ib/II trial to evaluate the safety and efficacy of atezolizumab and bevaci…</a:t>
+              <a:t>High resolution spatial transcriptomics identifies insufficient radiofrequency a…</a:t>
             </a:r>
             <a:endParaRPr lang="en-US" sz="1400" dirty="0"/>
           </a:p>
@@ -4706,7 +4697,7 @@
                 <a:ea typeface="Arial" pitchFamily="34" charset="-122"/>
                 <a:cs typeface="Arial" pitchFamily="34" charset="-120"/>
               </a:rPr>
-              <a:t>Early and late survival dynamics of immunotherapy combinations in advanced HCC: …</a:t>
+              <a:t>Clinical predictors of response to Atezolizumab-bevacizumab in Child-Pugh B pati…</a:t>
             </a:r>
             <a:endParaRPr lang="en-US" sz="1400" dirty="0"/>
           </a:p>
@@ -4743,7 +4734,7 @@
                 <a:ea typeface="Arial" pitchFamily="34" charset="-122"/>
                 <a:cs typeface="Arial" pitchFamily="34" charset="-120"/>
               </a:rPr>
-              <a:t>Multimodal sequencing identifies synergistic mechanisms driving resistance to ne…</a:t>
+              <a:t>Resectability redefined: Lessons from quadruple therapy in HCC.</a:t>
             </a:r>
             <a:endParaRPr lang="en-US" sz="1400" dirty="0"/>
           </a:p>
@@ -4780,7 +4771,7 @@
                 <a:ea typeface="Arial" pitchFamily="34" charset="-122"/>
                 <a:cs typeface="Arial" pitchFamily="34" charset="-120"/>
               </a:rPr>
-              <a:t>Detection of esophageal varices and prediction of hepatic decompensation in unre…</a:t>
+              <a:t>Sintilimab and lenvatinib plus hepatic arterial infusion chemotherapy and emboli…</a:t>
             </a:r>
             <a:endParaRPr lang="en-US" sz="1400" dirty="0"/>
           </a:p>
@@ -4817,7 +4808,7 @@
                 <a:ea typeface="Arial" pitchFamily="34" charset="-122"/>
                 <a:cs typeface="Arial" pitchFamily="34" charset="-120"/>
               </a:rPr>
-              <a:t>Integrating Multiple Outcomes of First-Line Immunotherapy-Based Regimens for Adv…</a:t>
+              <a:t>… plus transarterial chemoembolization and PD-1 inhibitors as conversion therapi…</a:t>
             </a:r>
             <a:endParaRPr lang="en-US" sz="1400" dirty="0"/>
           </a:p>
@@ -4854,7 +4845,7 @@
                 <a:ea typeface="Arial" pitchFamily="34" charset="-122"/>
                 <a:cs typeface="Arial" pitchFamily="34" charset="-120"/>
               </a:rPr>
-              <a:t>Determinants of long-term survival from atezolizumab plus bevacizumab in unresec…</a:t>
+              <a:t>Natural killer cell-mediated immunosurveillance modulates liver cancer evolution…</a:t>
             </a:r>
             <a:endParaRPr lang="en-US" sz="1400" dirty="0"/>
           </a:p>
@@ -4891,7 +4882,7 @@
                 <a:ea typeface="Arial" pitchFamily="34" charset="-122"/>
                 <a:cs typeface="Arial" pitchFamily="34" charset="-120"/>
               </a:rPr>
-              <a:t>Prospective Study of Atezolizumab Plus Bevacizumab for Unresectable Hepatocellul…</a:t>
+              <a:t>WNK4 Enhances Anti-PD-1 Resistance and Promotes Tumor Progression in Hepatocellu…</a:t>
             </a:r>
             <a:endParaRPr lang="en-US" sz="1400" dirty="0"/>
           </a:p>
@@ -4928,7 +4919,7 @@
                 <a:ea typeface="Arial" pitchFamily="34" charset="-122"/>
                 <a:cs typeface="Arial" pitchFamily="34" charset="-120"/>
               </a:rPr>
-              <a:t>Erratum: Hepatectomy alters adjuvant anti-PD-1 action in a mouse model of HCC bu…</a:t>
+              <a:t>Rethinking Progression in Hepatocellular Carcinoma: Is Oligoprogression a Window…</a:t>
             </a:r>
             <a:endParaRPr lang="en-US" sz="1400" dirty="0"/>
           </a:p>
@@ -5083,7 +5074,7 @@
                   </a:extLst>
                 </a:hlinkClick>
               </a:rPr>
-              <a:t>Revisiting prophylactic corticosteroids to mitigate severe immune-related adverse events in hepatocellular carcinoma.</a:t>
+              <a:t>Tumor cells metabolically resist immune-checkpoint therapy by macrophage efferocytosis-mediated fatty acid recycling.</a:t>
             </a:r>
             <a:endParaRPr lang="en-US" sz="2400" dirty="0"/>
           </a:p>
@@ -5119,7 +5110,7 @@
                   <a:srgbClr val="888888"/>
                 </a:solidFill>
               </a:rPr>
-              <a:t>Journal of hepatology  ·  IF 25.7  ·  Prospective Study  ·  🌏 Asia</a:t>
+              <a:t>Cancer cell  ·  IF 48.8</a:t>
             </a:r>
             <a:endParaRPr lang="en-US" sz="1000" dirty="0"/>
           </a:p>
@@ -5162,7 +5153,7 @@
                 <a:ea typeface="Arial" pitchFamily="34" charset="-122"/>
                 <a:cs typeface="Arial" pitchFamily="34" charset="-120"/>
               </a:rPr>
-              <a:t>Dual ICIs reshape HCC treatment landscape.</a:t>
+              <a:t>Tumor cells adapt to nutrient deprivation.</a:t>
             </a:r>
             <a:endParaRPr lang="en-US" sz="1800" dirty="0"/>
           </a:p>
@@ -5183,7 +5174,7 @@
                 <a:ea typeface="Arial" pitchFamily="34" charset="-122"/>
                 <a:cs typeface="Arial" pitchFamily="34" charset="-120"/>
               </a:rPr>
-              <a:t>Severe irAEs limit clinical uptake of ICIs.</a:t>
+              <a:t>Macrophage efferocytosis recycles fatty acids.</a:t>
             </a:r>
             <a:endParaRPr lang="en-US" sz="1800" dirty="0"/>
           </a:p>
@@ -5204,7 +5195,7 @@
                 <a:ea typeface="Arial" pitchFamily="34" charset="-122"/>
                 <a:cs typeface="Arial" pitchFamily="34" charset="-120"/>
               </a:rPr>
-              <a:t>Prophylactic corticosteroids reduce severe irAEs.</a:t>
+              <a:t>TREM2+ LAMs enhance immune resistance.</a:t>
             </a:r>
             <a:endParaRPr lang="en-US" sz="1800" dirty="0"/>
           </a:p>
@@ -5225,7 +5216,7 @@
                 <a:ea typeface="Arial" pitchFamily="34" charset="-122"/>
                 <a:cs typeface="Arial" pitchFamily="34" charset="-120"/>
               </a:rPr>
-              <a:t>Corticosteroids do not impair T-cell activation.</a:t>
+              <a:t>FAU correlates with ICB non-responsiveness.</a:t>
             </a:r>
             <a:endParaRPr lang="en-US" sz="1800" dirty="0"/>
           </a:p>
@@ -5246,7 +5237,7 @@
                 <a:ea typeface="Arial" pitchFamily="34" charset="-122"/>
                 <a:cs typeface="Arial" pitchFamily="34" charset="-120"/>
               </a:rPr>
-              <a:t>Need for prospective evaluation in HCC.</a:t>
+              <a:t>Targeting TREM2+ LAMs may improve therapy.</a:t>
             </a:r>
             <a:endParaRPr lang="en-US" sz="1800" dirty="0"/>
           </a:p>
@@ -5282,7 +5273,7 @@
                   <a:srgbClr val="888888"/>
                 </a:solidFill>
               </a:rPr>
-              <a:t>Shen Ying-Chun, Pinato David J, Liu Tsung-Hao et al.. Journal of hepatology. 2026-06-06 DOI: 10.1016/j.jhep.2026.01.009</a:t>
+              <a:t>Liang Zhixian, Long Xiaohang, Xiong Zhewen et al.. Cancer cell. 2026-06-12 DOI: 10.1016/j.ccell.2026.05.005</a:t>
             </a:r>
             <a:endParaRPr lang="en-US" sz="800" dirty="0"/>
           </a:p>
@@ -5482,7 +5473,7 @@
                   </a:extLst>
                 </a:hlinkClick>
               </a:rPr>
-              <a:t>Updated data from IMbrave050: Adjuvant atezolizumab plus bevacizumab for high-risk hepatocellular carcinoma.</a:t>
+              <a:t>MASLD and MASLD-associated HCC: emerging biomarkers and therapeutic avenues.</a:t>
             </a:r>
             <a:endParaRPr lang="en-US" sz="2400" dirty="0"/>
           </a:p>
@@ -5518,7 +5509,7 @@
                   <a:srgbClr val="888888"/>
                 </a:solidFill>
               </a:rPr>
-              <a:t>Journal of hepatology  ·  IF 25.7  ·  Prospective Study  ·  🌏 Asia</a:t>
+              <a:t>Science bulletin  ·  RCT Phase 3</a:t>
             </a:r>
             <a:endParaRPr lang="en-US" sz="1000" dirty="0"/>
           </a:p>
@@ -5561,7 +5552,7 @@
                 <a:ea typeface="Arial" pitchFamily="34" charset="-122"/>
                 <a:cs typeface="Arial" pitchFamily="34" charset="-120"/>
               </a:rPr>
-              <a:t>IMbrave050 met primary endpoint for RFS.</a:t>
+              <a:t>MASLD is a leading chronic liver disease.</a:t>
             </a:r>
             <a:endParaRPr lang="en-US" sz="1800" dirty="0"/>
           </a:p>
@@ -5582,7 +5573,7 @@
                 <a:ea typeface="Arial" pitchFamily="34" charset="-122"/>
                 <a:cs typeface="Arial" pitchFamily="34" charset="-120"/>
               </a:rPr>
-              <a:t>RFS HR for treatment vs. surveillance was 0.72.</a:t>
+              <a:t>Emerging biomarkers for diagnosis and prognosis.</a:t>
             </a:r>
             <a:endParaRPr lang="en-US" sz="1800" dirty="0"/>
           </a:p>
@@ -5603,7 +5594,7 @@
                 <a:ea typeface="Arial" pitchFamily="34" charset="-122"/>
                 <a:cs typeface="Arial" pitchFamily="34" charset="-120"/>
               </a:rPr>
-              <a:t>OS data remained immature at second IA.</a:t>
+              <a:t>Recent FDA approvals for new therapies.</a:t>
             </a:r>
             <a:endParaRPr lang="en-US" sz="1800" dirty="0"/>
           </a:p>
@@ -5624,7 +5615,7 @@
                 <a:ea typeface="Arial" pitchFamily="34" charset="-122"/>
                 <a:cs typeface="Arial" pitchFamily="34" charset="-120"/>
               </a:rPr>
-              <a:t>Initial RFS benefit not sustained in updated analysis.</a:t>
+              <a:t>Innovative interventions for MASLD management.</a:t>
             </a:r>
             <a:endParaRPr lang="en-US" sz="1800" dirty="0"/>
           </a:p>
@@ -5645,7 +5636,7 @@
                 <a:ea typeface="Arial" pitchFamily="34" charset="-122"/>
                 <a:cs typeface="Arial" pitchFamily="34" charset="-120"/>
               </a:rPr>
-              <a:t>Safety profile consistent with previous findings.</a:t>
+              <a:t>Need for early detection and multifactorial treatment.</a:t>
             </a:r>
             <a:endParaRPr lang="en-US" sz="1800" dirty="0"/>
           </a:p>
@@ -5681,7 +5672,7 @@
                   <a:srgbClr val="888888"/>
                 </a:solidFill>
               </a:rPr>
-              <a:t>Yopp Adam, Chen Minshan, Cheng Ann-Lii et al.. Journal of hepatology. 2026-05-16 DOI: 10.1016/j.jhep.2026.01.006</a:t>
+              <a:t>Ha Suki, Zhang Xiang, Li Lanjuan et al.. Science bulletin. 2026-06-12 DOI: 10.1016/j.scib.2026.04.048</a:t>
             </a:r>
             <a:endParaRPr lang="en-US" sz="800" dirty="0"/>
           </a:p>
@@ -5881,7 +5872,7 @@
                   </a:extLst>
                 </a:hlinkClick>
               </a:rPr>
-              <a:t>Phase Ib/II trial to evaluate the safety and efficacy of atezolizumab and bevacizumab as adjuvant therapy following carbon-ion radiotherapy in hepatocellular carcinoma (VANGUARD): study protocol.</a:t>
+              <a:t>High resolution spatial transcriptomics identifies insufficient radiofrequency ablation induces hepatocellular carcinoma progression via CEBPD / CXCL2 axis.</a:t>
             </a:r>
             <a:endParaRPr lang="en-US" sz="2400" dirty="0"/>
           </a:p>
@@ -5917,7 +5908,7 @@
                   <a:srgbClr val="888888"/>
                 </a:solidFill>
               </a:rPr>
-              <a:t>BMJ open  ·  RCT Phase 2  ·  🌏 Asia</a:t>
+              <a:t>Hepatology (Baltimore, Md.)  ·  IF 12.9  ·  Basic Research</a:t>
             </a:r>
             <a:endParaRPr lang="en-US" sz="1000" dirty="0"/>
           </a:p>
@@ -5960,7 +5951,7 @@
                 <a:ea typeface="Arial" pitchFamily="34" charset="-122"/>
                 <a:cs typeface="Arial" pitchFamily="34" charset="-120"/>
               </a:rPr>
-              <a:t>Evaluating Atezo+Bev after C-ion RT</a:t>
+              <a:t>iRFA leads to HCC progression.</a:t>
             </a:r>
             <a:endParaRPr lang="en-US" sz="1800" dirty="0"/>
           </a:p>
@@ -5981,7 +5972,7 @@
                 <a:ea typeface="Arial" pitchFamily="34" charset="-122"/>
                 <a:cs typeface="Arial" pitchFamily="34" charset="-120"/>
               </a:rPr>
-              <a:t>Phase Ib/II trial for HCC patients</a:t>
+              <a:t>CEBPD activates CXCL2 expression.</a:t>
             </a:r>
             <a:endParaRPr lang="en-US" sz="1800" dirty="0"/>
           </a:p>
@@ -6002,7 +5993,7 @@
                 <a:ea typeface="Arial" pitchFamily="34" charset="-122"/>
                 <a:cs typeface="Arial" pitchFamily="34" charset="-120"/>
               </a:rPr>
-              <a:t>Primary endpoint: 1-year recurrence-free survival</a:t>
+              <a:t>CXCL2 promotes immune evasion.</a:t>
             </a:r>
             <a:endParaRPr lang="en-US" sz="1800" dirty="0"/>
           </a:p>
@@ -6023,7 +6014,7 @@
                 <a:ea typeface="Arial" pitchFamily="34" charset="-122"/>
                 <a:cs typeface="Arial" pitchFamily="34" charset="-120"/>
               </a:rPr>
-              <a:t>Focus on high-risk recurrence patients</a:t>
+              <a:t>High-resolution spatial transcriptomics used.</a:t>
             </a:r>
             <a:endParaRPr lang="en-US" sz="1800" dirty="0"/>
           </a:p>
@@ -6044,7 +6035,7 @@
                 <a:ea typeface="Arial" pitchFamily="34" charset="-122"/>
                 <a:cs typeface="Arial" pitchFamily="34" charset="-120"/>
               </a:rPr>
-              <a:t>Study approved by ethics committees</a:t>
+              <a:t>CXCR2 inhibition may prevent recurrence.</a:t>
             </a:r>
             <a:endParaRPr lang="en-US" sz="1800" dirty="0"/>
           </a:p>
@@ -6080,7 +6071,7 @@
                   <a:srgbClr val="888888"/>
                 </a:solidFill>
               </a:rPr>
-              <a:t>Koroki Keisuke, Wakatsuki Masaru, Ogasawara Sadahisa et al.. BMJ open. 2026-06-06 DOI: 10.1136/bmjopen-2025-115731</a:t>
+              <a:t>Lin Ke, Zhang Nan, Zhang Zongxu et al.. Hepatology (Baltimore, Md.). 2026-06-09 DOI: 10.1097/HEP.0000000000001714</a:t>
             </a:r>
             <a:endParaRPr lang="en-US" sz="800" dirty="0"/>
           </a:p>
@@ -6280,7 +6271,7 @@
                   </a:extLst>
                 </a:hlinkClick>
               </a:rPr>
-              <a:t>Early and late survival dynamics of immunotherapy combinations in advanced HCC: Anchored indirect comparison of atezolizumab plus bevacizumab versus durvalumab +&amp;#x202f;tremelimumab.</a:t>
+              <a:t>Clinical predictors of response to Atezolizumab-bevacizumab in Child-Pugh B patients with hepatocellular carcinoma.</a:t>
             </a:r>
             <a:endParaRPr lang="en-US" sz="2400" dirty="0"/>
           </a:p>
@@ -6316,7 +6307,7 @@
                   <a:srgbClr val="888888"/>
                 </a:solidFill>
               </a:rPr>
-              <a:t>European journal of cancer (Oxford, England : 1990)  ·  IF 8.4  ·  Meta-Analysis  ·  🌏 Asia</a:t>
+              <a:t>JHEP reports : innovation in hepatology  ·  IF 7.8  ·  Retrospective Study  ·  🌏 Asia</a:t>
             </a:r>
             <a:endParaRPr lang="en-US" sz="1000" dirty="0"/>
           </a:p>
@@ -6359,7 +6350,7 @@
                 <a:ea typeface="Arial" pitchFamily="34" charset="-122"/>
                 <a:cs typeface="Arial" pitchFamily="34" charset="-120"/>
               </a:rPr>
-              <a:t>A+B shows early survival advantage</a:t>
+              <a:t>Identified predictors for A/B response</a:t>
             </a:r>
             <a:endParaRPr lang="en-US" sz="1800" dirty="0"/>
           </a:p>
@@ -6380,7 +6371,7 @@
                 <a:ea typeface="Arial" pitchFamily="34" charset="-122"/>
                 <a:cs typeface="Arial" pitchFamily="34" charset="-120"/>
               </a:rPr>
-              <a:t>STRIDE offers long-term survival benefit</a:t>
+              <a:t>Child-Pugh B patients show shorter survival</a:t>
             </a:r>
             <a:endParaRPr lang="en-US" sz="1800" dirty="0"/>
           </a:p>
@@ -6401,7 +6392,7 @@
                 <a:ea typeface="Arial" pitchFamily="34" charset="-122"/>
                 <a:cs typeface="Arial" pitchFamily="34" charset="-120"/>
               </a:rPr>
-              <a:t>Time-dependent effects observed in analyses</a:t>
+              <a:t>ALBI grade 1/2 benefits from A/B therapy</a:t>
             </a:r>
             <a:endParaRPr lang="en-US" sz="1800" dirty="0"/>
           </a:p>
@@ -6437,7 +6428,7 @@
                   <a:srgbClr val="888888"/>
                 </a:solidFill>
               </a:rPr>
-              <a:t>Casadei-Gardini Andrea, Yip Terry Cheuk-Fung, Vitale Alessandro et al.. European journal of cancer (Oxford, England : 1990). 2026-05-21 DOI: 10.1016/j.ejca.2026.116750</a:t>
+              <a:t>Odent Anne Victoire, Campani Claudia, Bouattour Mohamed et al.. JHEP reports : innovation in hepatology. 2026-06-11 DOI: 10.1016/j.jhepr.2026.101915</a:t>
             </a:r>
             <a:endParaRPr lang="en-US" sz="800" dirty="0"/>
           </a:p>
@@ -6637,7 +6628,7 @@
                   </a:extLst>
                 </a:hlinkClick>
               </a:rPr>
-              <a:t>Multimodal sequencing identifies synergistic mechanisms driving resistance to neoadjuvant nivolumab treatment in hepatocellular carcinoma.</a:t>
+              <a:t>Resectability redefined: Lessons from quadruple therapy in HCC.</a:t>
             </a:r>
             <a:endParaRPr lang="en-US" sz="2400" dirty="0"/>
           </a:p>
@@ -6673,7 +6664,7 @@
                   <a:srgbClr val="888888"/>
                 </a:solidFill>
               </a:rPr>
-              <a:t>Molecular cancer  ·  IF 27.7</a:t>
+              <a:t>Med (New York, N.Y.)  ·  RCT Phase 2</a:t>
             </a:r>
             <a:endParaRPr lang="en-US" sz="1000" dirty="0"/>
           </a:p>
@@ -6716,7 +6707,7 @@
                 <a:ea typeface="Arial" pitchFamily="34" charset="-122"/>
                 <a:cs typeface="Arial" pitchFamily="34" charset="-120"/>
               </a:rPr>
-              <a:t>HCC shows significant intratumoral heterogeneity.</a:t>
+              <a:t>Phase II trial (PLATIC) conducted.</a:t>
             </a:r>
             <a:endParaRPr lang="en-US" sz="1800" dirty="0"/>
           </a:p>
@@ -6737,7 +6728,7 @@
                 <a:ea typeface="Arial" pitchFamily="34" charset="-122"/>
                 <a:cs typeface="Arial" pitchFamily="34" charset="-120"/>
               </a:rPr>
-              <a:t>Immunosuppressive TIME linked to treatment resistance.</a:t>
+              <a:t>Evaluated quadruple therapy for uHCC.</a:t>
             </a:r>
             <a:endParaRPr lang="en-US" sz="1800" dirty="0"/>
           </a:p>
@@ -6758,7 +6749,7 @@
                 <a:ea typeface="Arial" pitchFamily="34" charset="-122"/>
                 <a:cs typeface="Arial" pitchFamily="34" charset="-120"/>
               </a:rPr>
-              <a:t>Dysregulated lipogenesis in non-responders identified.</a:t>
+              <a:t>Combination of sintilimab and lenvatinib.</a:t>
             </a:r>
             <a:endParaRPr lang="en-US" sz="1800" dirty="0"/>
           </a:p>
@@ -6779,7 +6770,7 @@
                 <a:ea typeface="Arial" pitchFamily="34" charset="-122"/>
                 <a:cs typeface="Arial" pitchFamily="34" charset="-120"/>
               </a:rPr>
-              <a:t>TAMs and CD8 T cells form barriers.</a:t>
+              <a:t>Incorporated TACE-HAIC as conversion therapy.</a:t>
             </a:r>
             <a:endParaRPr lang="en-US" sz="1800" dirty="0"/>
           </a:p>
@@ -6800,7 +6791,7 @@
                 <a:ea typeface="Arial" pitchFamily="34" charset="-122"/>
                 <a:cs typeface="Arial" pitchFamily="34" charset="-120"/>
               </a:rPr>
-              <a:t>ADM-RAMP1-EBP axis affects lipid metabolism.</a:t>
+              <a:t>Results prompt integration questions.</a:t>
             </a:r>
             <a:endParaRPr lang="en-US" sz="1800" dirty="0"/>
           </a:p>
@@ -6836,7 +6827,7 @@
                   <a:srgbClr val="888888"/>
                 </a:solidFill>
               </a:rPr>
-              <a:t>Zeng Fanhong, Guo Jiaxin, Zeng Zheng et al.. Molecular cancer. 2026-06-02 DOI: 10.1186/s12943-026-02682-x</a:t>
+              <a:t>Jiang Nan, Zhong Bin-Yan. Med (New York, N.Y.). 2026-06-12 DOI: 10.1016/j.medj.2026.101136</a:t>
             </a:r>
             <a:endParaRPr lang="en-US" sz="800" dirty="0"/>
           </a:p>
@@ -7036,7 +7027,7 @@
                   </a:extLst>
                 </a:hlinkClick>
               </a:rPr>
-              <a:t>Detection of esophageal varices and prediction of hepatic decompensation in unresectable hepatocellular carcinoma using AI.</a:t>
+              <a:t>Sintilimab and lenvatinib plus hepatic arterial infusion chemotherapy and embolization as conversion therapy for uHCC: A phase 2 trial.</a:t>
             </a:r>
             <a:endParaRPr lang="en-US" sz="2400" dirty="0"/>
           </a:p>
@@ -7072,7 +7063,7 @@
                   <a:srgbClr val="888888"/>
                 </a:solidFill>
               </a:rPr>
-              <a:t>Journal of hepatology  ·  IF 25.7  ·  Retrospective Study</a:t>
+              <a:t>Med (New York, N.Y.)  ·  RCT Phase 2</a:t>
             </a:r>
             <a:endParaRPr lang="en-US" sz="1000" dirty="0"/>
           </a:p>
@@ -7115,7 +7106,7 @@
                 <a:ea typeface="Arial" pitchFamily="34" charset="-122"/>
                 <a:cs typeface="Arial" pitchFamily="34" charset="-120"/>
               </a:rPr>
-              <a:t>Developed AI models for EV detection</a:t>
+              <a:t>Sintilimab and lenvatinib used in uHCC</a:t>
             </a:r>
             <a:endParaRPr lang="en-US" sz="1800" dirty="0"/>
           </a:p>
@@ -7136,7 +7127,7 @@
                 <a:ea typeface="Arial" pitchFamily="34" charset="-122"/>
                 <a:cs typeface="Arial" pitchFamily="34" charset="-120"/>
               </a:rPr>
-              <a:t>Used routine CT and clinical data</a:t>
+              <a:t>77.2% conversion-to-resection rate achieved</a:t>
             </a:r>
             <a:endParaRPr lang="en-US" sz="1800" dirty="0"/>
           </a:p>
@@ -7157,7 +7148,7 @@
                 <a:ea typeface="Arial" pitchFamily="34" charset="-122"/>
                 <a:cs typeface="Arial" pitchFamily="34" charset="-120"/>
               </a:rPr>
-              <a:t>Validated on 489 unresectable HCC patients</a:t>
+              <a:t>80.7% objective response rate observed</a:t>
             </a:r>
             <a:endParaRPr lang="en-US" sz="1800" dirty="0"/>
           </a:p>
@@ -7178,7 +7169,7 @@
                 <a:ea typeface="Arial" pitchFamily="34" charset="-122"/>
                 <a:cs typeface="Arial" pitchFamily="34" charset="-120"/>
               </a:rPr>
-              <a:t>HepatoSageCT improved prediction accuracy</a:t>
+              <a:t>64.9% patients experienced grade ≥3 TRAEs</a:t>
             </a:r>
             <a:endParaRPr lang="en-US" sz="1800" dirty="0"/>
           </a:p>
@@ -7199,7 +7190,7 @@
                 <a:ea typeface="Arial" pitchFamily="34" charset="-122"/>
                 <a:cs typeface="Arial" pitchFamily="34" charset="-120"/>
               </a:rPr>
-              <a:t>Non-invasive method reduces endoscopies</a:t>
+              <a:t>Longer PFS and OS compared to historical cohort</a:t>
             </a:r>
             <a:endParaRPr lang="en-US" sz="1800" dirty="0"/>
           </a:p>
@@ -7235,7 +7226,7 @@
                   <a:srgbClr val="888888"/>
                 </a:solidFill>
               </a:rPr>
-              <a:t>Rabasco Meneghetti Asier, Campani Claudia, Roux Charles et al.. Journal of hepatology. 2026-05-16 DOI: 10.1016/j.jhep.2026.01.021</a:t>
+              <a:t>Qiu Jiliang, Huang Zhenkun, He Wei et al.. Med (New York, N.Y.). 2026-06-12 DOI: 10.1016/j.medj.2026.101132</a:t>
             </a:r>
             <a:endParaRPr lang="en-US" sz="800" dirty="0"/>
           </a:p>
@@ -7435,7 +7426,7 @@
                   </a:extLst>
                 </a:hlinkClick>
               </a:rPr>
-              <a:t>Integrating Multiple Outcomes of First-Line Immunotherapy-Based Regimens for Advanced Hepatocellular Carcinoma: A Network Meta-Analysis of Phase III Trials.</a:t>
+              <a:t>… plus transarterial chemoembolization and PD-1 inhibitors as conversion therapies for unresectable intermediate-advanced hepatocellular carcinoma: a phase 2 trial …</a:t>
             </a:r>
             <a:endParaRPr lang="en-US" sz="2400" dirty="0"/>
           </a:p>
@@ -7471,7 +7462,7 @@
                   <a:srgbClr val="888888"/>
                 </a:solidFill>
               </a:rPr>
-              <a:t>Critical reviews in oncology/hematology  ·  RCT Phase 3</a:t>
+              <a:t>… and Targeted Therapy  ·  RCT Phase 2</a:t>
             </a:r>
             <a:endParaRPr lang="en-US" sz="1000" dirty="0"/>
           </a:p>
@@ -7514,7 +7505,7 @@
                 <a:ea typeface="Arial" pitchFamily="34" charset="-122"/>
                 <a:cs typeface="Arial" pitchFamily="34" charset="-120"/>
               </a:rPr>
-              <a:t>Network meta-analysis of phase III trials conducted.</a:t>
+              <a:t>Combination therapy for unresectable HCC</a:t>
             </a:r>
             <a:endParaRPr lang="en-US" sz="1800" dirty="0"/>
           </a:p>
@@ -7535,7 +7526,7 @@
                 <a:ea typeface="Arial" pitchFamily="34" charset="-122"/>
                 <a:cs typeface="Arial" pitchFamily="34" charset="-120"/>
               </a:rPr>
-              <a:t>Sintilimab plus IBI305 showed highest OS effectiveness.</a:t>
+              <a:t>Transarterial chemoembolization (TACE) used</a:t>
             </a:r>
             <a:endParaRPr lang="en-US" sz="1800" dirty="0"/>
           </a:p>
@@ -7556,7 +7547,7 @@
                 <a:ea typeface="Arial" pitchFamily="34" charset="-122"/>
                 <a:cs typeface="Arial" pitchFamily="34" charset="-120"/>
               </a:rPr>
-              <a:t>Finotonlimab plus bevacizumab improved outcomes in younger patients.</a:t>
+              <a:t>PD-1 inhibitors enhance treatment efficacy</a:t>
             </a:r>
             <a:endParaRPr lang="en-US" sz="1800" dirty="0"/>
           </a:p>
@@ -7577,7 +7568,7 @@
                 <a:ea typeface="Arial" pitchFamily="34" charset="-122"/>
                 <a:cs typeface="Arial" pitchFamily="34" charset="-120"/>
               </a:rPr>
-              <a:t>Bevacizumab combinations offer favorable benefit-risk balance.</a:t>
+              <a:t>Phase 2 trial demonstrates promising results</a:t>
             </a:r>
             <a:endParaRPr lang="en-US" sz="1800" dirty="0"/>
           </a:p>
@@ -7598,7 +7589,7 @@
                 <a:ea typeface="Arial" pitchFamily="34" charset="-122"/>
                 <a:cs typeface="Arial" pitchFamily="34" charset="-120"/>
               </a:rPr>
-              <a:t>TOPSIS model integrates multiple treatment outcomes.</a:t>
+              <a:t>Potential for conversion to resectable disease</a:t>
             </a:r>
             <a:endParaRPr lang="en-US" sz="1800" dirty="0"/>
           </a:p>
@@ -7634,7 +7625,7 @@
                   <a:srgbClr val="888888"/>
                 </a:solidFill>
               </a:rPr>
-              <a:t>Nie Guilin, Li Xinming, Wang Yaoqun et al.. Critical reviews in oncology/hematology. 2026-06-06 DOI: 10.1016/j.critrevonc.2026.105412</a:t>
+              <a:t>X Zhang, H Cai, W Peng. … and Targeted Therapy. 2026</a:t>
             </a:r>
             <a:endParaRPr lang="en-US" sz="800" dirty="0"/>
           </a:p>

--- a/docs/digest-en.pptx
+++ b/docs/digest-en.pptx
@@ -2269,7 +2269,7 @@
                   <a:srgbClr val="888888"/>
                 </a:solidFill>
               </a:rPr>
-              <a:t>2026-06-08 — 2026-06-15</a:t>
+              <a:t>2026-06-15 — 2026-06-22</a:t>
             </a:r>
             <a:endParaRPr lang="en-US" sz="1400" dirty="0"/>
           </a:p>
@@ -2460,7 +2460,7 @@
                   </a:extLst>
                 </a:hlinkClick>
               </a:rPr>
-              <a:t>Natural killer cell-mediated immunosurveillance modulates liver cancer evolution through cancer stemness enhancement and lipid metabolism reprogramming.</a:t>
+              <a:t>Prognostic nutritional index and the survival of patients with hepatocellular carcinoma on immune checkpoint inhibitors: a meta-analysis</a:t>
             </a:r>
             <a:endParaRPr lang="en-US" sz="2400" dirty="0"/>
           </a:p>
@@ -2496,7 +2496,7 @@
                   <a:srgbClr val="888888"/>
                 </a:solidFill>
               </a:rPr>
-              <a:t>Nature communications  ·  IF 14.7</a:t>
+              <a:t>BMC cancer  ·  Meta-Analysis</a:t>
             </a:r>
             <a:endParaRPr lang="en-US" sz="1000" dirty="0"/>
           </a:p>
@@ -2539,7 +2539,7 @@
                 <a:ea typeface="Arial" pitchFamily="34" charset="-122"/>
                 <a:cs typeface="Arial" pitchFamily="34" charset="-120"/>
               </a:rPr>
-              <a:t>NK cells promote liver cancer evolution.</a:t>
+              <a:t>Prognostic nutritional index (PNI) impacts survival.</a:t>
             </a:r>
             <a:endParaRPr lang="en-US" sz="1800" dirty="0"/>
           </a:p>
@@ -2560,7 +2560,7 @@
                 <a:ea typeface="Arial" pitchFamily="34" charset="-122"/>
                 <a:cs typeface="Arial" pitchFamily="34" charset="-120"/>
               </a:rPr>
-              <a:t>Immunosurveillance enhances tumor stemness.</a:t>
+              <a:t>Meta-analysis of HCC patients on ICIs.</a:t>
             </a:r>
             <a:endParaRPr lang="en-US" sz="1800" dirty="0"/>
           </a:p>
@@ -2581,49 +2581,7 @@
                 <a:ea typeface="Arial" pitchFamily="34" charset="-122"/>
                 <a:cs typeface="Arial" pitchFamily="34" charset="-120"/>
               </a:rPr>
-              <a:t>Lipid metabolism reprogramming observed.</a:t>
-            </a:r>
-            <a:endParaRPr lang="en-US" sz="1800" dirty="0"/>
-          </a:p>
-          <a:p>
-            <a:pPr marL="342900" indent="-342900">
-              <a:spcAft>
-                <a:spcPts val="800"/>
-              </a:spcAft>
-              <a:buSzPct val="100000"/>
-              <a:buChar char="•"/>
-            </a:pPr>
-            <a:r>
-              <a:rPr lang="en-US" sz="1800" dirty="0">
-                <a:solidFill>
-                  <a:srgbClr val="333333"/>
-                </a:solidFill>
-                <a:latin typeface="Arial" pitchFamily="34" charset="0"/>
-                <a:ea typeface="Arial" pitchFamily="34" charset="-122"/>
-                <a:cs typeface="Arial" pitchFamily="34" charset="-120"/>
-              </a:rPr>
-              <a:t>Combined anti-LAG-3 improves treatment.</a:t>
-            </a:r>
-            <a:endParaRPr lang="en-US" sz="1800" dirty="0"/>
-          </a:p>
-          <a:p>
-            <a:pPr marL="342900" indent="-342900">
-              <a:spcAft>
-                <a:spcPts val="800"/>
-              </a:spcAft>
-              <a:buSzPct val="100000"/>
-              <a:buChar char="•"/>
-            </a:pPr>
-            <a:r>
-              <a:rPr lang="en-US" sz="1800" dirty="0">
-                <a:solidFill>
-                  <a:srgbClr val="333333"/>
-                </a:solidFill>
-                <a:latin typeface="Arial" pitchFamily="34" charset="0"/>
-                <a:ea typeface="Arial" pitchFamily="34" charset="-122"/>
-                <a:cs typeface="Arial" pitchFamily="34" charset="-120"/>
-              </a:rPr>
-              <a:t>Immunometabolic therapy as a strategy.</a:t>
+              <a:t>Nutritional status correlates with immune response.</a:t>
             </a:r>
             <a:endParaRPr lang="en-US" sz="1800" dirty="0"/>
           </a:p>
@@ -2659,7 +2617,7 @@
                   <a:srgbClr val="888888"/>
                 </a:solidFill>
               </a:rPr>
-              <a:t>Shi Liang, Liu Boqiang, Sun Ruya et al.. Nature communications. 2026-06-11 DOI: 10.1038/s41467-026-74360-x</a:t>
+              <a:t>J Fu, W Peng, J Jiang. BMC cancer. 2026</a:t>
             </a:r>
             <a:endParaRPr lang="en-US" sz="800" dirty="0"/>
           </a:p>
@@ -2859,7 +2817,7 @@
                   </a:extLst>
                 </a:hlinkClick>
               </a:rPr>
-              <a:t>WNK4 Enhances Anti-PD-1 Resistance and Promotes Tumor Progression in Hepatocellular Carcinoma by Reprogramming Cysteine Metabolism in Cancer-Associated Fibroblasts.</a:t>
+              <a:t>Radiotherapy versus local ablation therapy for the treatment of hepatocellular carcinoma: A systematic review and meta-analysis.</a:t>
             </a:r>
             <a:endParaRPr lang="en-US" sz="2400" dirty="0"/>
           </a:p>
@@ -2895,7 +2853,7 @@
                   <a:srgbClr val="888888"/>
                 </a:solidFill>
               </a:rPr>
-              <a:t>FASEB journal : official publication of the Federation of American Societies for Experimental Biology  ·  🌏 Asia</a:t>
+              <a:t>Journal of Clinical …  ·  Meta-Analysis</a:t>
             </a:r>
             <a:endParaRPr lang="en-US" sz="1000" dirty="0"/>
           </a:p>
@@ -2938,7 +2896,7 @@
                 <a:ea typeface="Arial" pitchFamily="34" charset="-122"/>
                 <a:cs typeface="Arial" pitchFamily="34" charset="-120"/>
               </a:rPr>
-              <a:t>WNK4 upregulated in HCC tissues</a:t>
+              <a:t>Local ablation therapies include RFA and MWA.</a:t>
             </a:r>
             <a:endParaRPr lang="en-US" sz="1800" dirty="0"/>
           </a:p>
@@ -2959,7 +2917,7 @@
                 <a:ea typeface="Arial" pitchFamily="34" charset="-122"/>
                 <a:cs typeface="Arial" pitchFamily="34" charset="-120"/>
               </a:rPr>
-              <a:t>Promotes HCC cell proliferation and migration</a:t>
+              <a:t>EBRT shows different outcomes than local ablation.</a:t>
             </a:r>
             <a:endParaRPr lang="en-US" sz="1800" dirty="0"/>
           </a:p>
@@ -2980,7 +2938,7 @@
                 <a:ea typeface="Arial" pitchFamily="34" charset="-122"/>
                 <a:cs typeface="Arial" pitchFamily="34" charset="-120"/>
               </a:rPr>
-              <a:t>Enhances anti-PD-1 therapy resistance</a:t>
+              <a:t>Meta-analysis highlights survival benefits of RFA.</a:t>
             </a:r>
             <a:endParaRPr lang="en-US" sz="1800" dirty="0"/>
           </a:p>
@@ -3001,7 +2959,7 @@
                 <a:ea typeface="Arial" pitchFamily="34" charset="-122"/>
                 <a:cs typeface="Arial" pitchFamily="34" charset="-120"/>
               </a:rPr>
-              <a:t>Reprograms cysteine metabolism in CAFs</a:t>
+              <a:t>Local progression-free survival is a key metric.</a:t>
             </a:r>
             <a:endParaRPr lang="en-US" sz="1800" dirty="0"/>
           </a:p>
@@ -3022,7 +2980,7 @@
                 <a:ea typeface="Arial" pitchFamily="34" charset="-122"/>
                 <a:cs typeface="Arial" pitchFamily="34" charset="-120"/>
               </a:rPr>
-              <a:t>Identifies WNK4-HMGB1-p53 axis</a:t>
+              <a:t>Study compares effectiveness of two treatment modalities.</a:t>
             </a:r>
             <a:endParaRPr lang="en-US" sz="1800" dirty="0"/>
           </a:p>
@@ -3058,7 +3016,7 @@
                   <a:srgbClr val="888888"/>
                 </a:solidFill>
               </a:rPr>
-              <a:t>Yu Ge, Cui Yun-Long, Mu Han et al.. FASEB journal : official publication of the Federation of American Societies for Experimental Biology. 2026-06-12 DOI: 10.1096/fj.202502777R</a:t>
+              <a:t>SH Bae, SH Choi, SM Yoon. Journal of Clinical …. 2026</a:t>
             </a:r>
             <a:endParaRPr lang="en-US" sz="800" dirty="0"/>
           </a:p>
@@ -3258,7 +3216,7 @@
                   </a:extLst>
                 </a:hlinkClick>
               </a:rPr>
-              <a:t>Rethinking Progression in Hepatocellular Carcinoma: Is Oligoprogression a Window for Local Ablation?</a:t>
+              <a:t>Resveratrol derivative restores macrophage cholesterol homeostasis via stabilizing xanthine oxidoreductase in hepatocellular carcinoma.</a:t>
             </a:r>
             <a:endParaRPr lang="en-US" sz="2400" dirty="0"/>
           </a:p>
@@ -3294,7 +3252,7 @@
                   <a:srgbClr val="888888"/>
                 </a:solidFill>
               </a:rPr>
-              <a:t>Hepatology research : the official journal of the Japan Society of Hepatology  ·  🌏 Asia</a:t>
+              <a:t>Journal of translational medicine  ·  IF 6.1  ·  Basic Research</a:t>
             </a:r>
             <a:endParaRPr lang="en-US" sz="1000" dirty="0"/>
           </a:p>
@@ -3337,7 +3295,7 @@
                 <a:ea typeface="Arial" pitchFamily="34" charset="-122"/>
                 <a:cs typeface="Arial" pitchFamily="34" charset="-120"/>
               </a:rPr>
-              <a:t>Oligoprogression in HCC is significant.</a:t>
+              <a:t>TAMs shape immunosuppressive environment in HCC.</a:t>
             </a:r>
             <a:endParaRPr lang="en-US" sz="1800" dirty="0"/>
           </a:p>
@@ -3358,7 +3316,7 @@
                 <a:ea typeface="Arial" pitchFamily="34" charset="-122"/>
                 <a:cs typeface="Arial" pitchFamily="34" charset="-120"/>
               </a:rPr>
-              <a:t>Local ablation may benefit oligoprogressive patients.</a:t>
+              <a:t>XOR downregulation linked to poor patient outcomes.</a:t>
             </a:r>
             <a:endParaRPr lang="en-US" sz="1800" dirty="0"/>
           </a:p>
@@ -3379,7 +3337,49 @@
                 <a:ea typeface="Arial" pitchFamily="34" charset="-122"/>
                 <a:cs typeface="Arial" pitchFamily="34" charset="-120"/>
               </a:rPr>
-              <a:t>Identifying oligoprogression is crucial for treatment.</a:t>
+              <a:t>Res616 stabilizes XOR, restores cholesterol balance.</a:t>
+            </a:r>
+            <a:endParaRPr lang="en-US" sz="1800" dirty="0"/>
+          </a:p>
+          <a:p>
+            <a:pPr marL="342900" indent="-342900">
+              <a:spcAft>
+                <a:spcPts val="800"/>
+              </a:spcAft>
+              <a:buSzPct val="100000"/>
+              <a:buChar char="•"/>
+            </a:pPr>
+            <a:r>
+              <a:rPr lang="en-US" sz="1800" dirty="0">
+                <a:solidFill>
+                  <a:srgbClr val="333333"/>
+                </a:solidFill>
+                <a:latin typeface="Arial" pitchFamily="34" charset="0"/>
+                <a:ea typeface="Arial" pitchFamily="34" charset="-122"/>
+                <a:cs typeface="Arial" pitchFamily="34" charset="-120"/>
+              </a:rPr>
+              <a:t>Targeting XOR enhances CD8+ T cell responses.</a:t>
+            </a:r>
+            <a:endParaRPr lang="en-US" sz="1800" dirty="0"/>
+          </a:p>
+          <a:p>
+            <a:pPr marL="342900" indent="-342900">
+              <a:spcAft>
+                <a:spcPts val="800"/>
+              </a:spcAft>
+              <a:buSzPct val="100000"/>
+              <a:buChar char="•"/>
+            </a:pPr>
+            <a:r>
+              <a:rPr lang="en-US" sz="1800" dirty="0">
+                <a:solidFill>
+                  <a:srgbClr val="333333"/>
+                </a:solidFill>
+                <a:latin typeface="Arial" pitchFamily="34" charset="0"/>
+                <a:ea typeface="Arial" pitchFamily="34" charset="-122"/>
+                <a:cs typeface="Arial" pitchFamily="34" charset="-120"/>
+              </a:rPr>
+              <a:t>Combination with anti-PD-L1 therapy suppresses tumors.</a:t>
             </a:r>
             <a:endParaRPr lang="en-US" sz="1800" dirty="0"/>
           </a:p>
@@ -3415,7 +3415,7 @@
                   <a:srgbClr val="888888"/>
                 </a:solidFill>
               </a:rPr>
-              <a:t>Hidaka Hisashi. Hepatology research : the official journal of the Japan Society of Hepatology. 2026-06-11 DOI: 10.1111/hepr.70218</a:t>
+              <a:t>Liang Guojun, Zeng Lin, Huang Xiaohui et al.. Journal of translational medicine. 2026-06-19 DOI: 10.1186/s12967-026-08433-2</a:t>
             </a:r>
             <a:endParaRPr lang="en-US" sz="800" dirty="0"/>
           </a:p>
@@ -3632,7 +3632,7 @@
                   <a:srgbClr val="FFFFFF"/>
                 </a:solidFill>
               </a:rPr>
-              <a:t>1. **代謝適應與免疫逃逸**  </a:t>
+              <a:t>1. **初級抗藥性與免疫抑制表型的關聯**  </a:t>
             </a:r>
             <a:endParaRPr lang="en-US" sz="1200" dirty="0"/>
           </a:p>
@@ -3649,7 +3649,7 @@
                   <a:srgbClr val="FFFFFF"/>
                 </a:solidFill>
               </a:rPr>
-              <a:t>   Tumor cells exhibit metabolic adaptations to evade immune-checkpoint therapy, utilizing macrophage efferocytosis to recycle fatty acids and sustain growth in nutrient-deprived environments.  </a:t>
+              <a:t>   **The association between primary refractoriness and myeloid immunosuppressive phenotype**  </a:t>
             </a:r>
             <a:endParaRPr lang="en-US" sz="1200" dirty="0"/>
           </a:p>
@@ -3666,7 +3666,7 @@
                   <a:srgbClr val="FFFFFF"/>
                 </a:solidFill>
               </a:rPr>
-              <a:t>   腫瘤細胞展現出代謝適應以逃避免疫檢查點治療，利用巨噬細胞的吞噬作用回收脂肪酸，在缺乏營養的環境中維持生長。</a:t>
+              <a:t>   研究顯示，肝細胞癌患者對阿特珠單抗與貝伐單抗的初級抗藥性與骨髓來源的免疫抑制表型有關，這為未來的治療策略提供了新的見解。  </a:t>
             </a:r>
             <a:endParaRPr lang="en-US" sz="1200" dirty="0"/>
           </a:p>
@@ -3677,6 +3677,14 @@
               </a:lnSpc>
               <a:buNone/>
             </a:pPr>
+            <a:r>
+              <a:rPr lang="en-US" sz="1200" dirty="0">
+                <a:solidFill>
+                  <a:srgbClr val="FFFFFF"/>
+                </a:solidFill>
+              </a:rPr>
+              <a:t>   The study reveals that primary refractoriness in HCC patients treated with atezolizumab and bevacizumab is linked to a myeloid immunosuppressive phenotype, providing new insights for future therapeutic strategies.</a:t>
+            </a:r>
             <a:endParaRPr lang="en-US" sz="1200" dirty="0"/>
           </a:p>
           <a:p>
@@ -3686,13 +3694,22 @@
               </a:lnSpc>
               <a:buNone/>
             </a:pPr>
+            <a:endParaRPr lang="en-US" sz="1200" dirty="0"/>
+          </a:p>
+          <a:p>
+            <a:pPr indent="0" marL="0">
+              <a:lnSpc>
+                <a:spcPct val="150000"/>
+              </a:lnSpc>
+              <a:buNone/>
+            </a:pPr>
             <a:r>
               <a:rPr lang="en-US" sz="1200" dirty="0">
                 <a:solidFill>
                   <a:srgbClr val="FFFFFF"/>
                 </a:solidFill>
               </a:rPr>
-              <a:t>2. **MASLD與肝癌的關聯性**  </a:t>
+              <a:t>2. **代謝疾病與肝癌的生物標誌物**  </a:t>
             </a:r>
             <a:endParaRPr lang="en-US" sz="1200" dirty="0"/>
           </a:p>
@@ -3709,7 +3726,7 @@
                   <a:srgbClr val="FFFFFF"/>
                 </a:solidFill>
               </a:rPr>
-              <a:t>   The rising prevalence of metabolic dysfunction-associated steatotic liver disease (MASLD) highlights the need for novel biomarkers and therapeutic strategies, particularly in relation to hepatocellular carcinoma (HCC).  </a:t>
+              <a:t>   **Emerging biomarkers in metabolic dysfunction-associated steatotic liver disease and HCC**  </a:t>
             </a:r>
             <a:endParaRPr lang="en-US" sz="1200" dirty="0"/>
           </a:p>
@@ -3726,7 +3743,7 @@
                   <a:srgbClr val="FFFFFF"/>
                 </a:solidFill>
               </a:rPr>
-              <a:t>   代謝功能障礙相關的脂肪肝病（MASLD）日益普遍，凸顯出對新型生物標誌物和治療策略的需求，特別是在肝細胞癌（HCC）方面。</a:t>
+              <a:t>   隨著對代謝功能障礙相關脂肪肝病（MASLD）的研究進展，新的生物標誌物和治療途徑逐漸浮現，這對於早期診斷和治療肝癌具有重要意義。  </a:t>
             </a:r>
             <a:endParaRPr lang="en-US" sz="1200" dirty="0"/>
           </a:p>
@@ -3737,6 +3754,14 @@
               </a:lnSpc>
               <a:buNone/>
             </a:pPr>
+            <a:r>
+              <a:rPr lang="en-US" sz="1200" dirty="0">
+                <a:solidFill>
+                  <a:srgbClr val="FFFFFF"/>
+                </a:solidFill>
+              </a:rPr>
+              <a:t>   With advancements in research on metabolic dysfunction-associated steatotic liver disease (MASLD), emerging biomarkers and therapeutic avenues are becoming apparent, which are significant for early diagnosis and treatment of HCC.</a:t>
+            </a:r>
             <a:endParaRPr lang="en-US" sz="1200" dirty="0"/>
           </a:p>
           <a:p>
@@ -3746,13 +3771,22 @@
               </a:lnSpc>
               <a:buNone/>
             </a:pPr>
+            <a:endParaRPr lang="en-US" sz="1200" dirty="0"/>
+          </a:p>
+          <a:p>
+            <a:pPr indent="0" marL="0">
+              <a:lnSpc>
+                <a:spcPct val="150000"/>
+              </a:lnSpc>
+              <a:buNone/>
+            </a:pPr>
             <a:r>
               <a:rPr lang="en-US" sz="1200" dirty="0">
                 <a:solidFill>
                   <a:srgbClr val="FFFFFF"/>
                 </a:solidFill>
               </a:rPr>
-              <a:t>3. **不充分消融的風險**  </a:t>
+              <a:t>3. **腫瘤微環境的影響**  </a:t>
             </a:r>
             <a:endParaRPr lang="en-US" sz="1200" dirty="0"/>
           </a:p>
@@ -3769,7 +3803,7 @@
                   <a:srgbClr val="FFFFFF"/>
                 </a:solidFill>
               </a:rPr>
-              <a:t>   Insufficient radiofrequency ablation (iRFA) is linked to HCC progression through the CEBPD/CXCL2 axis, emphasizing the importance of precise ablation techniques in treatment outcomes.  </a:t>
+              <a:t>   **Impact of the tumor microenvironment on therapeutic efficacy**  </a:t>
             </a:r>
             <a:endParaRPr lang="en-US" sz="1200" dirty="0"/>
           </a:p>
@@ -3786,7 +3820,7 @@
                   <a:srgbClr val="FFFFFF"/>
                 </a:solidFill>
               </a:rPr>
-              <a:t>   不充分的射頻消融（iRFA）與肝細胞癌進展有關，通過CEBPD/CXCL2通路，強調了精確消融技術在治療結果中的重要性。</a:t>
+              <a:t>   腫瘤缺氧微環境顯著影響光療和放療的療效，改善腫瘤缺氧成為增強這些治療方法的潛在策略。  </a:t>
             </a:r>
             <a:endParaRPr lang="en-US" sz="1200" dirty="0"/>
           </a:p>
@@ -3797,6 +3831,14 @@
               </a:lnSpc>
               <a:buNone/>
             </a:pPr>
+            <a:r>
+              <a:rPr lang="en-US" sz="1200" dirty="0">
+                <a:solidFill>
+                  <a:srgbClr val="FFFFFF"/>
+                </a:solidFill>
+              </a:rPr>
+              <a:t>   The hypoxic tumor microenvironment significantly impairs the efficacy of photo- and radiotherapy, making the amelioration of tumor hypoxia a promising strategy to enhance these treatment modalities.</a:t>
+            </a:r>
             <a:endParaRPr lang="en-US" sz="1200" dirty="0"/>
           </a:p>
           <a:p>
@@ -3806,13 +3848,22 @@
               </a:lnSpc>
               <a:buNone/>
             </a:pPr>
+            <a:endParaRPr lang="en-US" sz="1200" dirty="0"/>
+          </a:p>
+          <a:p>
+            <a:pPr indent="0" marL="0">
+              <a:lnSpc>
+                <a:spcPct val="150000"/>
+              </a:lnSpc>
+              <a:buNone/>
+            </a:pPr>
             <a:r>
               <a:rPr lang="en-US" sz="1200" dirty="0">
                 <a:solidFill>
                   <a:srgbClr val="FFFFFF"/>
                 </a:solidFill>
               </a:rPr>
-              <a:t>4. **免疫治療的臨床預測因子**  </a:t>
+              <a:t>4. **自體免疫性腦炎的風險**  </a:t>
             </a:r>
             <a:endParaRPr lang="en-US" sz="1200" dirty="0"/>
           </a:p>
@@ -3829,7 +3880,7 @@
                   <a:srgbClr val="FFFFFF"/>
                 </a:solidFill>
               </a:rPr>
-              <a:t>   Identifying clinical predictors for response to atezolizumab-bevacizumab in Child-Pugh B patients can optimize treatment strategies for advanced HCC populations often excluded from trials.  </a:t>
+              <a:t>   **Risk of autoimmune encephalitis with immune checkpoint inhibitors**  </a:t>
             </a:r>
             <a:endParaRPr lang="en-US" sz="1200" dirty="0"/>
           </a:p>
@@ -3846,7 +3897,7 @@
                   <a:srgbClr val="FFFFFF"/>
                 </a:solidFill>
               </a:rPr>
-              <a:t>   確定Child-Pugh B患者對阿特珠單抗-貝伐單抗反應的臨床預測因子，可以優化通常被排除在臨床試驗之外的晚期HCC人群的治療策略。</a:t>
+              <a:t>   阿特珠單抗和貝伐單抗的聯合療法可能導致嚴重的免疫相關不良事件，如自體免疫性腦炎，需在臨床使用中加以注意。  </a:t>
             </a:r>
             <a:endParaRPr lang="en-US" sz="1200" dirty="0"/>
           </a:p>
@@ -3857,6 +3908,14 @@
               </a:lnSpc>
               <a:buNone/>
             </a:pPr>
+            <a:r>
+              <a:rPr lang="en-US" sz="1200" dirty="0">
+                <a:solidFill>
+                  <a:srgbClr val="FFFFFF"/>
+                </a:solidFill>
+              </a:rPr>
+              <a:t>   The combination therapy of atezolizumab and bevacizumab may lead to severe immune-related adverse events, such as autoimmune encephalitis, which requires careful attention in clinical use.</a:t>
+            </a:r>
             <a:endParaRPr lang="en-US" sz="1200" dirty="0"/>
           </a:p>
           <a:p>
@@ -3866,13 +3925,22 @@
               </a:lnSpc>
               <a:buNone/>
             </a:pPr>
+            <a:endParaRPr lang="en-US" sz="1200" dirty="0"/>
+          </a:p>
+          <a:p>
+            <a:pPr indent="0" marL="0">
+              <a:lnSpc>
+                <a:spcPct val="150000"/>
+              </a:lnSpc>
+              <a:buNone/>
+            </a:pPr>
             <a:r>
               <a:rPr lang="en-US" sz="1200" dirty="0">
                 <a:solidFill>
                   <a:srgbClr val="FFFFFF"/>
                 </a:solidFill>
               </a:rPr>
-              <a:t>5. **多重療法的潛力**  </a:t>
+              <a:t>5. **預後營養指數的潛在價值**  </a:t>
             </a:r>
             <a:endParaRPr lang="en-US" sz="1200" dirty="0"/>
           </a:p>
@@ -3889,7 +3957,7 @@
                   <a:srgbClr val="FFFFFF"/>
                 </a:solidFill>
               </a:rPr>
-              <a:t>   The combination of sintilimab, lenvatinib, and transarterial chemoembolization (TACE) shows promise as a conversion therapy for unresectable HCC, redefining resectability criteria.  </a:t>
+              <a:t>   **Potential value of prognostic nutritional index in immunotherapy**  </a:t>
             </a:r>
             <a:endParaRPr lang="en-US" sz="1200" dirty="0"/>
           </a:p>
@@ -3906,7 +3974,7 @@
                   <a:srgbClr val="FFFFFF"/>
                 </a:solidFill>
               </a:rPr>
-              <a:t>   結合sintilimab、lenvatinib和經導管化療栓塞（TACE）顯示出作為不可切除HCC的轉化療法的潛力，重新定義可切除性標準。</a:t>
+              <a:t>   預後營養指數可能與接受免疫檢查點抑制劑的肝細胞癌患者的生存率相關，提示營養狀態在治療中的重要性。</a:t>
             </a:r>
             <a:endParaRPr lang="en-US" sz="1200" dirty="0"/>
           </a:p>
@@ -4052,6 +4120,32 @@
                   <a:srgbClr val="FFFFFF"/>
                 </a:solidFill>
               </a:rPr>
+              <a:t>The prognostic nutritional index may be associated with survival in HCC patients treated with immune checkpoint inhibitors, highlighting the importance of nutritional status in treatment.</a:t>
+            </a:r>
+            <a:endParaRPr lang="en-US" sz="1200" dirty="0"/>
+          </a:p>
+          <a:p>
+            <a:pPr indent="0" marL="0">
+              <a:lnSpc>
+                <a:spcPct val="150000"/>
+              </a:lnSpc>
+              <a:buNone/>
+            </a:pPr>
+            <a:endParaRPr lang="en-US" sz="1200" dirty="0"/>
+          </a:p>
+          <a:p>
+            <a:pPr indent="0" marL="0">
+              <a:lnSpc>
+                <a:spcPct val="150000"/>
+              </a:lnSpc>
+              <a:buNone/>
+            </a:pPr>
+            <a:r>
+              <a:rPr lang="en-US" sz="1200" dirty="0">
+                <a:solidFill>
+                  <a:srgbClr val="FFFFFF"/>
+                </a:solidFill>
+              </a:rPr>
               <a:t>### 未來研究方向 (Future Research Directions)</a:t>
             </a:r>
             <a:endParaRPr lang="en-US" sz="1200" dirty="0"/>
@@ -4078,7 +4172,7 @@
                   <a:srgbClr val="FFFFFF"/>
                 </a:solidFill>
               </a:rPr>
-              <a:t>1. **代謝重編程的機制研究**  </a:t>
+              <a:t>1. **針對免疫抑制表型的治療策略**  </a:t>
             </a:r>
             <a:endParaRPr lang="en-US" sz="1200" dirty="0"/>
           </a:p>
@@ -4095,7 +4189,7 @@
                   <a:srgbClr val="FFFFFF"/>
                 </a:solidFill>
               </a:rPr>
-              <a:t>   Further investigation into the metabolic pathways exploited by tumor cells during immune evasion could reveal novel therapeutic targets for enhancing the efficacy of immune-checkpoint inhibitors.  </a:t>
+              <a:t>   **Therapeutic strategies targeting immunosuppressive phenotypes**  </a:t>
             </a:r>
             <a:endParaRPr lang="en-US" sz="1200" dirty="0"/>
           </a:p>
@@ -4112,7 +4206,7 @@
                   <a:srgbClr val="FFFFFF"/>
                 </a:solidFill>
               </a:rPr>
-              <a:t>   進一步研究腫瘤細胞在免疫逃逸過程中利用的代謝途徑，可能揭示增強免疫檢查點抑制劑療效的新型治療靶點。</a:t>
+              <a:t>   需要進一步研究針對骨髓來源免疫抑制表型的治療策略，以克服肝細胞癌的初級抗藥性。  </a:t>
             </a:r>
             <a:endParaRPr lang="en-US" sz="1200" dirty="0"/>
           </a:p>
@@ -4123,6 +4217,14 @@
               </a:lnSpc>
               <a:buNone/>
             </a:pPr>
+            <a:r>
+              <a:rPr lang="en-US" sz="1200" dirty="0">
+                <a:solidFill>
+                  <a:srgbClr val="FFFFFF"/>
+                </a:solidFill>
+              </a:rPr>
+              <a:t>   Further studies are needed to develop therapeutic strategies targeting myeloid immunosuppressive phenotypes to overcome primary refractoriness in HCC.</a:t>
+            </a:r>
             <a:endParaRPr lang="en-US" sz="1200" dirty="0"/>
           </a:p>
           <a:p>
@@ -4132,13 +4234,22 @@
               </a:lnSpc>
               <a:buNone/>
             </a:pPr>
+            <a:endParaRPr lang="en-US" sz="1200" dirty="0"/>
+          </a:p>
+          <a:p>
+            <a:pPr indent="0" marL="0">
+              <a:lnSpc>
+                <a:spcPct val="150000"/>
+              </a:lnSpc>
+              <a:buNone/>
+            </a:pPr>
             <a:r>
               <a:rPr lang="en-US" sz="1200" dirty="0">
                 <a:solidFill>
                   <a:srgbClr val="FFFFFF"/>
                 </a:solidFill>
               </a:rPr>
-              <a:t>2. **MASLD與HCC的早期診斷**  </a:t>
+              <a:t>2. **MASLD與HCC的關聯機制**  </a:t>
             </a:r>
             <a:endParaRPr lang="en-US" sz="1200" dirty="0"/>
           </a:p>
@@ -4155,7 +4266,7 @@
                   <a:srgbClr val="FFFFFF"/>
                 </a:solidFill>
               </a:rPr>
-              <a:t>   Development of non-invasive diagnostic tools for early detection of MASLD and its association with HCC could facilitate timely interventions and improve patient outcomes.  </a:t>
+              <a:t>   **Mechanistic studies on the link between MASLD and HCC**  </a:t>
             </a:r>
             <a:endParaRPr lang="en-US" sz="1200" dirty="0"/>
           </a:p>
@@ -4172,7 +4283,7 @@
                   <a:srgbClr val="FFFFFF"/>
                 </a:solidFill>
               </a:rPr>
-              <a:t>   開發早期檢測MASLD及其與HCC關聯的非侵入性診斷工具，可能促進及時干預並改善患者預後。</a:t>
+              <a:t>   探索代謝功能障礙相關脂肪肝病（MASLD）與肝細胞癌之間的關聯機制，以促進早期診斷和干預。  </a:t>
             </a:r>
             <a:endParaRPr lang="en-US" sz="1200" dirty="0"/>
           </a:p>
@@ -4183,6 +4294,14 @@
               </a:lnSpc>
               <a:buNone/>
             </a:pPr>
+            <a:r>
+              <a:rPr lang="en-US" sz="1200" dirty="0">
+                <a:solidFill>
+                  <a:srgbClr val="FFFFFF"/>
+                </a:solidFill>
+              </a:rPr>
+              <a:t>   Investigating the mechanistic links between metabolic dysfunction-associated steatotic liver disease (MASLD) and HCC to facilitate early diagnosis and intervention.</a:t>
+            </a:r>
             <a:endParaRPr lang="en-US" sz="1200" dirty="0"/>
           </a:p>
           <a:p>
@@ -4192,13 +4311,22 @@
               </a:lnSpc>
               <a:buNone/>
             </a:pPr>
+            <a:endParaRPr lang="en-US" sz="1200" dirty="0"/>
+          </a:p>
+          <a:p>
+            <a:pPr indent="0" marL="0">
+              <a:lnSpc>
+                <a:spcPct val="150000"/>
+              </a:lnSpc>
+              <a:buNone/>
+            </a:pPr>
             <a:r>
               <a:rPr lang="en-US" sz="1200" dirty="0">
                 <a:solidFill>
                   <a:srgbClr val="FFFFFF"/>
                 </a:solidFill>
               </a:rPr>
-              <a:t>3. **消融技術的優化**  </a:t>
+              <a:t>3. **改善腫瘤微環境的策略**  </a:t>
             </a:r>
             <a:endParaRPr lang="en-US" sz="1200" dirty="0"/>
           </a:p>
@@ -4215,7 +4343,7 @@
                   <a:srgbClr val="FFFFFF"/>
                 </a:solidFill>
               </a:rPr>
-              <a:t>   Research focused on optimizing radiofrequency ablation techniques to minimize the risk of insufficient ablation and its subsequent impact on tumor progression is critical.  </a:t>
+              <a:t>   **Strategies to improve the tumor microenvironment**  </a:t>
             </a:r>
             <a:endParaRPr lang="en-US" sz="1200" dirty="0"/>
           </a:p>
@@ -4232,7 +4360,7 @@
                   <a:srgbClr val="FFFFFF"/>
                 </a:solidFill>
               </a:rPr>
-              <a:t>   專注於優化射頻消融技術的研究，以最小化不充分消融的風險及其對腫瘤進展的後續影響是至關重要的。</a:t>
+              <a:t>   開發改善腫瘤微環境的策略，以增強光療和放療在肝細胞癌中的療效。  </a:t>
             </a:r>
             <a:endParaRPr lang="en-US" sz="1200" dirty="0"/>
           </a:p>
@@ -4243,6 +4371,14 @@
               </a:lnSpc>
               <a:buNone/>
             </a:pPr>
+            <a:r>
+              <a:rPr lang="en-US" sz="1200" dirty="0">
+                <a:solidFill>
+                  <a:srgbClr val="FFFFFF"/>
+                </a:solidFill>
+              </a:rPr>
+              <a:t>   Developing strategies to improve the tumor microenvironment to enhance the efficacy of photo- and radiotherapy in HCC.</a:t>
+            </a:r>
             <a:endParaRPr lang="en-US" sz="1200" dirty="0"/>
           </a:p>
           <a:p>
@@ -4252,13 +4388,22 @@
               </a:lnSpc>
               <a:buNone/>
             </a:pPr>
+            <a:endParaRPr lang="en-US" sz="1200" dirty="0"/>
+          </a:p>
+          <a:p>
+            <a:pPr indent="0" marL="0">
+              <a:lnSpc>
+                <a:spcPct val="150000"/>
+              </a:lnSpc>
+              <a:buNone/>
+            </a:pPr>
             <a:r>
               <a:rPr lang="en-US" sz="1200" dirty="0">
                 <a:solidFill>
                   <a:srgbClr val="FFFFFF"/>
                 </a:solidFill>
               </a:rPr>
-              <a:t>4. **個體化免疫治療策略**  </a:t>
+              <a:t>4. **免疫相關不良事件的監測與管理**  </a:t>
             </a:r>
             <a:endParaRPr lang="en-US" sz="1200" dirty="0"/>
           </a:p>
@@ -4275,7 +4420,7 @@
                   <a:srgbClr val="FFFFFF"/>
                 </a:solidFill>
               </a:rPr>
-              <a:t>   Investigating the genetic and molecular profiles of HCC patients to tailor immunotherapy approaches, especially for those with Child-Pugh B cirrhosis, could enhance treatment efficacy.  </a:t>
+              <a:t>   **Monitoring and management of immune-related adverse events**  </a:t>
             </a:r>
             <a:endParaRPr lang="en-US" sz="1200" dirty="0"/>
           </a:p>
@@ -4292,7 +4437,7 @@
                   <a:srgbClr val="FFFFFF"/>
                 </a:solidFill>
               </a:rPr>
-              <a:t>   研究HCC患者的遺傳和分子特徵，以量身定制免疫治療方案，特別是對於Child-Pugh B肝硬化患者，可能提高治療效果。</a:t>
+              <a:t>   研究如何有效監測和管理接受免疫檢查點抑制劑的患者中出現的免疫相關不良事件。  </a:t>
             </a:r>
             <a:endParaRPr lang="en-US" sz="1200" dirty="0"/>
           </a:p>
@@ -4303,6 +4448,14 @@
               </a:lnSpc>
               <a:buNone/>
             </a:pPr>
+            <a:r>
+              <a:rPr lang="en-US" sz="1200" dirty="0">
+                <a:solidFill>
+                  <a:srgbClr val="FFFFFF"/>
+                </a:solidFill>
+              </a:rPr>
+              <a:t>   Researching effective monitoring and management of immune-related adverse events in patients receiving immune checkpoint inhibitors.</a:t>
+            </a:r>
             <a:endParaRPr lang="en-US" sz="1200" dirty="0"/>
           </a:p>
           <a:p>
@@ -4312,13 +4465,22 @@
               </a:lnSpc>
               <a:buNone/>
             </a:pPr>
+            <a:endParaRPr lang="en-US" sz="1200" dirty="0"/>
+          </a:p>
+          <a:p>
+            <a:pPr indent="0" marL="0">
+              <a:lnSpc>
+                <a:spcPct val="150000"/>
+              </a:lnSpc>
+              <a:buNone/>
+            </a:pPr>
             <a:r>
               <a:rPr lang="en-US" sz="1200" dirty="0">
                 <a:solidFill>
                   <a:srgbClr val="FFFFFF"/>
                 </a:solidFill>
               </a:rPr>
-              <a:t>5. **多重療法的長期效果評估**  </a:t>
+              <a:t>5. **營養狀態與治療反應的關聯性**  </a:t>
             </a:r>
             <a:endParaRPr lang="en-US" sz="1200" dirty="0"/>
           </a:p>
@@ -4335,7 +4497,7 @@
                   <a:srgbClr val="FFFFFF"/>
                 </a:solidFill>
               </a:rPr>
-              <a:t>   Longitudinal studies assessing the long-term outcomes of combination therapies, such as sintilimab and TACE, in unresectable HCC will be essential for establishing best practices.  </a:t>
+              <a:t>   **Correlation between nutritional status and treatment response**  </a:t>
             </a:r>
             <a:endParaRPr lang="en-US" sz="1200" dirty="0"/>
           </a:p>
@@ -4352,7 +4514,24 @@
                   <a:srgbClr val="FFFFFF"/>
                 </a:solidFill>
               </a:rPr>
-              <a:t>   評估不可切除HCC中如sintilimab和TACE等組合療法的長期效果的縱向研究，對於建立最佳實踐至關重要。</a:t>
+              <a:t>   進一步研究預後營養指數與肝細胞癌患者對免疫治療反應之間的關聯性，以優化治療方案。  </a:t>
+            </a:r>
+            <a:endParaRPr lang="en-US" sz="1200" dirty="0"/>
+          </a:p>
+          <a:p>
+            <a:pPr indent="0" marL="0">
+              <a:lnSpc>
+                <a:spcPct val="150000"/>
+              </a:lnSpc>
+              <a:buNone/>
+            </a:pPr>
+            <a:r>
+              <a:rPr lang="en-US" sz="1200" dirty="0">
+                <a:solidFill>
+                  <a:srgbClr val="FFFFFF"/>
+                </a:solidFill>
+              </a:rPr>
+              <a:t>   Further investigating the correlation between prognostic nutritional index and treatment response in HCC patients to optimize therapeutic regimens.</a:t>
             </a:r>
             <a:endParaRPr lang="en-US" sz="1200" dirty="0"/>
           </a:p>
@@ -4586,7 +4765,7 @@
                 <a:ea typeface="Arial" pitchFamily="34" charset="-122"/>
                 <a:cs typeface="Arial" pitchFamily="34" charset="-120"/>
               </a:rPr>
-              <a:t>Tumor cells metabolically resist immune-checkpoint therapy by macrophage efferoc…</a:t>
+              <a:t>A myeloid immunosuppressive phenotype defines primary refractoriness to atezoliz…</a:t>
             </a:r>
             <a:endParaRPr lang="en-US" sz="1400" dirty="0"/>
           </a:p>
@@ -4660,7 +4839,7 @@
                 <a:ea typeface="Arial" pitchFamily="34" charset="-122"/>
                 <a:cs typeface="Arial" pitchFamily="34" charset="-120"/>
               </a:rPr>
-              <a:t>High resolution spatial transcriptomics identifies insufficient radiofrequency a…</a:t>
+              <a:t>Biomimetic catalase-engineered black phosphorus nanosheets enhance photo-/radio-…</a:t>
             </a:r>
             <a:endParaRPr lang="en-US" sz="1400" dirty="0"/>
           </a:p>
@@ -4697,7 +4876,7 @@
                 <a:ea typeface="Arial" pitchFamily="34" charset="-122"/>
                 <a:cs typeface="Arial" pitchFamily="34" charset="-120"/>
               </a:rPr>
-              <a:t>Clinical predictors of response to Atezolizumab-bevacizumab in Child-Pugh B pati…</a:t>
+              <a:t>… plus transarterial chemoembolization and PD-1 inhibitors as conversion therapi…</a:t>
             </a:r>
             <a:endParaRPr lang="en-US" sz="1400" dirty="0"/>
           </a:p>
@@ -4734,7 +4913,7 @@
                 <a:ea typeface="Arial" pitchFamily="34" charset="-122"/>
                 <a:cs typeface="Arial" pitchFamily="34" charset="-120"/>
               </a:rPr>
-              <a:t>Resectability redefined: Lessons from quadruple therapy in HCC.</a:t>
+              <a:t>Autoimmune encephalitis induced by atezolizumab and bevacizumab therapy for adva…</a:t>
             </a:r>
             <a:endParaRPr lang="en-US" sz="1400" dirty="0"/>
           </a:p>
@@ -4771,7 +4950,7 @@
                 <a:ea typeface="Arial" pitchFamily="34" charset="-122"/>
                 <a:cs typeface="Arial" pitchFamily="34" charset="-120"/>
               </a:rPr>
-              <a:t>Sintilimab and lenvatinib plus hepatic arterial infusion chemotherapy and emboli…</a:t>
+              <a:t>Bioinformatics mining and clinical validation of CD274 as a prognostic indicator…</a:t>
             </a:r>
             <a:endParaRPr lang="en-US" sz="1400" dirty="0"/>
           </a:p>
@@ -4808,7 +4987,7 @@
                 <a:ea typeface="Arial" pitchFamily="34" charset="-122"/>
                 <a:cs typeface="Arial" pitchFamily="34" charset="-120"/>
               </a:rPr>
-              <a:t>… plus transarterial chemoembolization and PD-1 inhibitors as conversion therapi…</a:t>
+              <a:t>WNK4 Enhances Anti-PD-1 Resistance and Promotes Tumor Progression in Hepatocellu…</a:t>
             </a:r>
             <a:endParaRPr lang="en-US" sz="1400" dirty="0"/>
           </a:p>
@@ -4845,7 +5024,7 @@
                 <a:ea typeface="Arial" pitchFamily="34" charset="-122"/>
                 <a:cs typeface="Arial" pitchFamily="34" charset="-120"/>
               </a:rPr>
-              <a:t>Natural killer cell-mediated immunosurveillance modulates liver cancer evolution…</a:t>
+              <a:t>Prognostic nutritional index and the survival of patients with hepatocellular ca…</a:t>
             </a:r>
             <a:endParaRPr lang="en-US" sz="1400" dirty="0"/>
           </a:p>
@@ -4882,7 +5061,7 @@
                 <a:ea typeface="Arial" pitchFamily="34" charset="-122"/>
                 <a:cs typeface="Arial" pitchFamily="34" charset="-120"/>
               </a:rPr>
-              <a:t>WNK4 Enhances Anti-PD-1 Resistance and Promotes Tumor Progression in Hepatocellu…</a:t>
+              <a:t>Radiotherapy versus local ablation therapy for the treatment of hepatocellular c…</a:t>
             </a:r>
             <a:endParaRPr lang="en-US" sz="1400" dirty="0"/>
           </a:p>
@@ -4919,7 +5098,7 @@
                 <a:ea typeface="Arial" pitchFamily="34" charset="-122"/>
                 <a:cs typeface="Arial" pitchFamily="34" charset="-120"/>
               </a:rPr>
-              <a:t>Rethinking Progression in Hepatocellular Carcinoma: Is Oligoprogression a Window…</a:t>
+              <a:t>Resveratrol derivative restores macrophage cholesterol homeostasis via stabilizi…</a:t>
             </a:r>
             <a:endParaRPr lang="en-US" sz="1400" dirty="0"/>
           </a:p>
@@ -5074,7 +5253,7 @@
                   </a:extLst>
                 </a:hlinkClick>
               </a:rPr>
-              <a:t>Tumor cells metabolically resist immune-checkpoint therapy by macrophage efferocytosis-mediated fatty acid recycling.</a:t>
+              <a:t>A myeloid immunosuppressive phenotype defines primary refractoriness to atezolizumab Plus bevacizumab in hepatocellular caarcinoma.</a:t>
             </a:r>
             <a:endParaRPr lang="en-US" sz="2400" dirty="0"/>
           </a:p>
@@ -5110,7 +5289,7 @@
                   <a:srgbClr val="888888"/>
                 </a:solidFill>
               </a:rPr>
-              <a:t>Cancer cell  ·  IF 48.8</a:t>
+              <a:t>Journal of hepatology  ·  IF 25.7  ·  🌏 Asia</a:t>
             </a:r>
             <a:endParaRPr lang="en-US" sz="1000" dirty="0"/>
           </a:p>
@@ -5153,7 +5332,7 @@
                 <a:ea typeface="Arial" pitchFamily="34" charset="-122"/>
                 <a:cs typeface="Arial" pitchFamily="34" charset="-120"/>
               </a:rPr>
-              <a:t>Tumor cells adapt to nutrient deprivation.</a:t>
+              <a:t>Primary refractoriness affects 40% of HCC patients.</a:t>
             </a:r>
             <a:endParaRPr lang="en-US" sz="1800" dirty="0"/>
           </a:p>
@@ -5174,7 +5353,7 @@
                 <a:ea typeface="Arial" pitchFamily="34" charset="-122"/>
                 <a:cs typeface="Arial" pitchFamily="34" charset="-120"/>
               </a:rPr>
-              <a:t>Macrophage efferocytosis recycles fatty acids.</a:t>
+              <a:t>Distinct immunosuppressive TME in PRef cases.</a:t>
             </a:r>
             <a:endParaRPr lang="en-US" sz="1800" dirty="0"/>
           </a:p>
@@ -5195,7 +5374,7 @@
                 <a:ea typeface="Arial" pitchFamily="34" charset="-122"/>
                 <a:cs typeface="Arial" pitchFamily="34" charset="-120"/>
               </a:rPr>
-              <a:t>TREM2+ LAMs enhance immune resistance.</a:t>
+              <a:t>Myeloid infiltration linked to treatment failure.</a:t>
             </a:r>
             <a:endParaRPr lang="en-US" sz="1800" dirty="0"/>
           </a:p>
@@ -5216,7 +5395,7 @@
                 <a:ea typeface="Arial" pitchFamily="34" charset="-122"/>
                 <a:cs typeface="Arial" pitchFamily="34" charset="-120"/>
               </a:rPr>
-              <a:t>FAU correlates with ICB non-responsiveness.</a:t>
+              <a:t>IFN-γ signature downregulation as key factor.</a:t>
             </a:r>
             <a:endParaRPr lang="en-US" sz="1800" dirty="0"/>
           </a:p>
@@ -5237,7 +5416,7 @@
                 <a:ea typeface="Arial" pitchFamily="34" charset="-122"/>
                 <a:cs typeface="Arial" pitchFamily="34" charset="-120"/>
               </a:rPr>
-              <a:t>Targeting TREM2+ LAMs may improve therapy.</a:t>
+              <a:t>Targeting myeloid cells may enhance treatment response.</a:t>
             </a:r>
             <a:endParaRPr lang="en-US" sz="1800" dirty="0"/>
           </a:p>
@@ -5273,7 +5452,7 @@
                   <a:srgbClr val="888888"/>
                 </a:solidFill>
               </a:rPr>
-              <a:t>Liang Zhixian, Long Xiaohang, Xiong Zhewen et al.. Cancer cell. 2026-06-12 DOI: 10.1016/j.ccell.2026.05.005</a:t>
+              <a:t>Lombardi Pasquale, Ramon-Gil Erik, Raja Rabial Q et al.. Journal of hepatology. 2026-06-15 DOI: 10.1016/j.jhep.2026.05.018</a:t>
             </a:r>
             <a:endParaRPr lang="en-US" sz="800" dirty="0"/>
           </a:p>
@@ -5594,7 +5773,7 @@
                 <a:ea typeface="Arial" pitchFamily="34" charset="-122"/>
                 <a:cs typeface="Arial" pitchFamily="34" charset="-120"/>
               </a:rPr>
-              <a:t>Recent FDA approvals for new therapies.</a:t>
+              <a:t>FDA approved resmetirom and semaglutide.</a:t>
             </a:r>
             <a:endParaRPr lang="en-US" sz="1800" dirty="0"/>
           </a:p>
@@ -5636,7 +5815,7 @@
                 <a:ea typeface="Arial" pitchFamily="34" charset="-122"/>
                 <a:cs typeface="Arial" pitchFamily="34" charset="-120"/>
               </a:rPr>
-              <a:t>Need for early detection and multifactorial treatment.</a:t>
+              <a:t>Need for early detection and personalized medicine.</a:t>
             </a:r>
             <a:endParaRPr lang="en-US" sz="1800" dirty="0"/>
           </a:p>
@@ -5872,7 +6051,7 @@
                   </a:extLst>
                 </a:hlinkClick>
               </a:rPr>
-              <a:t>High resolution spatial transcriptomics identifies insufficient radiofrequency ablation induces hepatocellular carcinoma progression via CEBPD / CXCL2 axis.</a:t>
+              <a:t>Biomimetic catalase-engineered black phosphorus nanosheets enhance photo-/radio-therapy for hepatocellular carcinoma.</a:t>
             </a:r>
             <a:endParaRPr lang="en-US" sz="2400" dirty="0"/>
           </a:p>
@@ -5908,7 +6087,7 @@
                   <a:srgbClr val="888888"/>
                 </a:solidFill>
               </a:rPr>
-              <a:t>Hepatology (Baltimore, Md.)  ·  IF 12.9  ·  Basic Research</a:t>
+              <a:t>Biomedical materials (Bristol, England)  ·  Basic Research  ·  🌏 Asia</a:t>
             </a:r>
             <a:endParaRPr lang="en-US" sz="1000" dirty="0"/>
           </a:p>
@@ -5951,7 +6130,7 @@
                 <a:ea typeface="Arial" pitchFamily="34" charset="-122"/>
                 <a:cs typeface="Arial" pitchFamily="34" charset="-120"/>
               </a:rPr>
-              <a:t>iRFA leads to HCC progression.</a:t>
+              <a:t>Developed biomimetic nanoplatform using black phosphorus.</a:t>
             </a:r>
             <a:endParaRPr lang="en-US" sz="1800" dirty="0"/>
           </a:p>
@@ -5972,7 +6151,7 @@
                 <a:ea typeface="Arial" pitchFamily="34" charset="-122"/>
                 <a:cs typeface="Arial" pitchFamily="34" charset="-120"/>
               </a:rPr>
-              <a:t>CEBPD activates CXCL2 expression.</a:t>
+              <a:t>Functionalized with catalase for enhanced oxygen delivery.</a:t>
             </a:r>
             <a:endParaRPr lang="en-US" sz="1800" dirty="0"/>
           </a:p>
@@ -5993,7 +6172,7 @@
                 <a:ea typeface="Arial" pitchFamily="34" charset="-122"/>
                 <a:cs typeface="Arial" pitchFamily="34" charset="-120"/>
               </a:rPr>
-              <a:t>CXCL2 promotes immune evasion.</a:t>
+              <a:t>Engineered macrophage membranes for immune modulation.</a:t>
             </a:r>
             <a:endParaRPr lang="en-US" sz="1800" dirty="0"/>
           </a:p>
@@ -6014,7 +6193,7 @@
                 <a:ea typeface="Arial" pitchFamily="34" charset="-122"/>
                 <a:cs typeface="Arial" pitchFamily="34" charset="-120"/>
               </a:rPr>
-              <a:t>High-resolution spatial transcriptomics used.</a:t>
+              <a:t>Significantly sensitized tumors to phototherapy and RT.</a:t>
             </a:r>
             <a:endParaRPr lang="en-US" sz="1800" dirty="0"/>
           </a:p>
@@ -6035,7 +6214,7 @@
                 <a:ea typeface="Arial" pitchFamily="34" charset="-122"/>
                 <a:cs typeface="Arial" pitchFamily="34" charset="-120"/>
               </a:rPr>
-              <a:t>CXCR2 inhibition may prevent recurrence.</a:t>
+              <a:t>Promising strategy for improving HCC treatment outcomes.</a:t>
             </a:r>
             <a:endParaRPr lang="en-US" sz="1800" dirty="0"/>
           </a:p>
@@ -6071,7 +6250,7 @@
                   <a:srgbClr val="888888"/>
                 </a:solidFill>
               </a:rPr>
-              <a:t>Lin Ke, Zhang Nan, Zhang Zongxu et al.. Hepatology (Baltimore, Md.). 2026-06-09 DOI: 10.1097/HEP.0000000000001714</a:t>
+              <a:t>Qiao Chunzhong, Lei Qiucheng, Lu Liangqi et al.. Biomedical materials (Bristol, England). 2026-06-17 DOI: 10.1088/1748-605X/ae70e2</a:t>
             </a:r>
             <a:endParaRPr lang="en-US" sz="800" dirty="0"/>
           </a:p>
@@ -6271,7 +6450,7 @@
                   </a:extLst>
                 </a:hlinkClick>
               </a:rPr>
-              <a:t>Clinical predictors of response to Atezolizumab-bevacizumab in Child-Pugh B patients with hepatocellular carcinoma.</a:t>
+              <a:t>… plus transarterial chemoembolization and PD-1 inhibitors as conversion therapies for unresectable intermediate-advanced hepatocellular carcinoma: a phase 2 trial …</a:t>
             </a:r>
             <a:endParaRPr lang="en-US" sz="2400" dirty="0"/>
           </a:p>
@@ -6307,7 +6486,7 @@
                   <a:srgbClr val="888888"/>
                 </a:solidFill>
               </a:rPr>
-              <a:t>JHEP reports : innovation in hepatology  ·  IF 7.8  ·  Retrospective Study  ·  🌏 Asia</a:t>
+              <a:t>… and Targeted Therapy  ·  RCT Phase 2</a:t>
             </a:r>
             <a:endParaRPr lang="en-US" sz="1000" dirty="0"/>
           </a:p>
@@ -6350,7 +6529,7 @@
                 <a:ea typeface="Arial" pitchFamily="34" charset="-122"/>
                 <a:cs typeface="Arial" pitchFamily="34" charset="-120"/>
               </a:rPr>
-              <a:t>Identified predictors for A/B response</a:t>
+              <a:t>Combination therapy for unresectable HCC</a:t>
             </a:r>
             <a:endParaRPr lang="en-US" sz="1800" dirty="0"/>
           </a:p>
@@ -6371,7 +6550,7 @@
                 <a:ea typeface="Arial" pitchFamily="34" charset="-122"/>
                 <a:cs typeface="Arial" pitchFamily="34" charset="-120"/>
               </a:rPr>
-              <a:t>Child-Pugh B patients show shorter survival</a:t>
+              <a:t>Transarterial chemoembolization plus PD-1 inhibitors</a:t>
             </a:r>
             <a:endParaRPr lang="en-US" sz="1800" dirty="0"/>
           </a:p>
@@ -6392,7 +6571,7 @@
                 <a:ea typeface="Arial" pitchFamily="34" charset="-122"/>
                 <a:cs typeface="Arial" pitchFamily="34" charset="-120"/>
               </a:rPr>
-              <a:t>ALBI grade 1/2 benefits from A/B therapy</a:t>
+              <a:t>Phase 2 trial shows promising results</a:t>
             </a:r>
             <a:endParaRPr lang="en-US" sz="1800" dirty="0"/>
           </a:p>
@@ -6428,7 +6607,7 @@
                   <a:srgbClr val="888888"/>
                 </a:solidFill>
               </a:rPr>
-              <a:t>Odent Anne Victoire, Campani Claudia, Bouattour Mohamed et al.. JHEP reports : innovation in hepatology. 2026-06-11 DOI: 10.1016/j.jhepr.2026.101915</a:t>
+              <a:t>X Zhang, H Cai, W Peng. … and Targeted Therapy. 2026</a:t>
             </a:r>
             <a:endParaRPr lang="en-US" sz="800" dirty="0"/>
           </a:p>
@@ -6628,7 +6807,7 @@
                   </a:extLst>
                 </a:hlinkClick>
               </a:rPr>
-              <a:t>Resectability redefined: Lessons from quadruple therapy in HCC.</a:t>
+              <a:t>Autoimmune encephalitis induced by atezolizumab and bevacizumab therapy for advanced hepatocellular carcinoma: a case report.</a:t>
             </a:r>
             <a:endParaRPr lang="en-US" sz="2400" dirty="0"/>
           </a:p>
@@ -6664,7 +6843,7 @@
                   <a:srgbClr val="888888"/>
                 </a:solidFill>
               </a:rPr>
-              <a:t>Med (New York, N.Y.)  ·  RCT Phase 2</a:t>
+              <a:t>Journal of medical case reports  ·  Case Report  ·  🌏 Asia</a:t>
             </a:r>
             <a:endParaRPr lang="en-US" sz="1000" dirty="0"/>
           </a:p>
@@ -6707,7 +6886,7 @@
                 <a:ea typeface="Arial" pitchFamily="34" charset="-122"/>
                 <a:cs typeface="Arial" pitchFamily="34" charset="-120"/>
               </a:rPr>
-              <a:t>Phase II trial (PLATIC) conducted.</a:t>
+              <a:t>Atezolizumab and bevacizumab used for HCC</a:t>
             </a:r>
             <a:endParaRPr lang="en-US" sz="1800" dirty="0"/>
           </a:p>
@@ -6728,7 +6907,7 @@
                 <a:ea typeface="Arial" pitchFamily="34" charset="-122"/>
                 <a:cs typeface="Arial" pitchFamily="34" charset="-120"/>
               </a:rPr>
-              <a:t>Evaluated quadruple therapy for uHCC.</a:t>
+              <a:t>Patient developed autoimmune encephalitis</a:t>
             </a:r>
             <a:endParaRPr lang="en-US" sz="1800" dirty="0"/>
           </a:p>
@@ -6749,7 +6928,7 @@
                 <a:ea typeface="Arial" pitchFamily="34" charset="-122"/>
                 <a:cs typeface="Arial" pitchFamily="34" charset="-120"/>
               </a:rPr>
-              <a:t>Combination of sintilimab and lenvatinib.</a:t>
+              <a:t>Symptoms included fever and impaired consciousness</a:t>
             </a:r>
             <a:endParaRPr lang="en-US" sz="1800" dirty="0"/>
           </a:p>
@@ -6770,7 +6949,7 @@
                 <a:ea typeface="Arial" pitchFamily="34" charset="-122"/>
                 <a:cs typeface="Arial" pitchFamily="34" charset="-120"/>
               </a:rPr>
-              <a:t>Incorporated TACE-HAIC as conversion therapy.</a:t>
+              <a:t>Cerebrospinal fluid showed elevated monocytes</a:t>
             </a:r>
             <a:endParaRPr lang="en-US" sz="1800" dirty="0"/>
           </a:p>
@@ -6791,7 +6970,7 @@
                 <a:ea typeface="Arial" pitchFamily="34" charset="-122"/>
                 <a:cs typeface="Arial" pitchFamily="34" charset="-120"/>
               </a:rPr>
-              <a:t>Results prompt integration questions.</a:t>
+              <a:t>Steroid treatment led to rapid recovery</a:t>
             </a:r>
             <a:endParaRPr lang="en-US" sz="1800" dirty="0"/>
           </a:p>
@@ -6827,7 +7006,7 @@
                   <a:srgbClr val="888888"/>
                 </a:solidFill>
               </a:rPr>
-              <a:t>Jiang Nan, Zhong Bin-Yan. Med (New York, N.Y.). 2026-06-12 DOI: 10.1016/j.medj.2026.101136</a:t>
+              <a:t>Nomura Yoriko, Wada Yoshiyuki, Sasaki Shin et al.. Journal of medical case reports. 2026-06-19 DOI: 10.1186/s13256-026-06037-4</a:t>
             </a:r>
             <a:endParaRPr lang="en-US" sz="800" dirty="0"/>
           </a:p>
@@ -7027,7 +7206,7 @@
                   </a:extLst>
                 </a:hlinkClick>
               </a:rPr>
-              <a:t>Sintilimab and lenvatinib plus hepatic arterial infusion chemotherapy and embolization as conversion therapy for uHCC: A phase 2 trial.</a:t>
+              <a:t>Bioinformatics mining and clinical validation of CD274 as a prognostic indicator in hepatocellular carcinoma.</a:t>
             </a:r>
             <a:endParaRPr lang="en-US" sz="2400" dirty="0"/>
           </a:p>
@@ -7063,7 +7242,7 @@
                   <a:srgbClr val="888888"/>
                 </a:solidFill>
               </a:rPr>
-              <a:t>Med (New York, N.Y.)  ·  RCT Phase 2</a:t>
+              <a:t>BMC cancer  ·  🌏 Asia</a:t>
             </a:r>
             <a:endParaRPr lang="en-US" sz="1000" dirty="0"/>
           </a:p>
@@ -7106,7 +7285,7 @@
                 <a:ea typeface="Arial" pitchFamily="34" charset="-122"/>
                 <a:cs typeface="Arial" pitchFamily="34" charset="-120"/>
               </a:rPr>
-              <a:t>Sintilimab and lenvatinib used in uHCC</a:t>
+              <a:t>CD274 correlates with prognosis in HCC.</a:t>
             </a:r>
             <a:endParaRPr lang="en-US" sz="1800" dirty="0"/>
           </a:p>
@@ -7127,7 +7306,7 @@
                 <a:ea typeface="Arial" pitchFamily="34" charset="-122"/>
                 <a:cs typeface="Arial" pitchFamily="34" charset="-120"/>
               </a:rPr>
-              <a:t>77.2% conversion-to-resection rate achieved</a:t>
+              <a:t>Bioinformatics used for expression analysis.</a:t>
             </a:r>
             <a:endParaRPr lang="en-US" sz="1800" dirty="0"/>
           </a:p>
@@ -7148,49 +7327,7 @@
                 <a:ea typeface="Arial" pitchFamily="34" charset="-122"/>
                 <a:cs typeface="Arial" pitchFamily="34" charset="-120"/>
               </a:rPr>
-              <a:t>80.7% objective response rate observed</a:t>
-            </a:r>
-            <a:endParaRPr lang="en-US" sz="1800" dirty="0"/>
-          </a:p>
-          <a:p>
-            <a:pPr marL="342900" indent="-342900">
-              <a:spcAft>
-                <a:spcPts val="800"/>
-              </a:spcAft>
-              <a:buSzPct val="100000"/>
-              <a:buChar char="•"/>
-            </a:pPr>
-            <a:r>
-              <a:rPr lang="en-US" sz="1800" dirty="0">
-                <a:solidFill>
-                  <a:srgbClr val="333333"/>
-                </a:solidFill>
-                <a:latin typeface="Arial" pitchFamily="34" charset="0"/>
-                <a:ea typeface="Arial" pitchFamily="34" charset="-122"/>
-                <a:cs typeface="Arial" pitchFamily="34" charset="-120"/>
-              </a:rPr>
-              <a:t>64.9% patients experienced grade ≥3 TRAEs</a:t>
-            </a:r>
-            <a:endParaRPr lang="en-US" sz="1800" dirty="0"/>
-          </a:p>
-          <a:p>
-            <a:pPr marL="342900" indent="-342900">
-              <a:spcAft>
-                <a:spcPts val="800"/>
-              </a:spcAft>
-              <a:buSzPct val="100000"/>
-              <a:buChar char="•"/>
-            </a:pPr>
-            <a:r>
-              <a:rPr lang="en-US" sz="1800" dirty="0">
-                <a:solidFill>
-                  <a:srgbClr val="333333"/>
-                </a:solidFill>
-                <a:latin typeface="Arial" pitchFamily="34" charset="0"/>
-                <a:ea typeface="Arial" pitchFamily="34" charset="-122"/>
-                <a:cs typeface="Arial" pitchFamily="34" charset="-120"/>
-              </a:rPr>
-              <a:t>Longer PFS and OS compared to historical cohort</a:t>
+              <a:t>High CD274 linked to better survival rates.</a:t>
             </a:r>
             <a:endParaRPr lang="en-US" sz="1800" dirty="0"/>
           </a:p>
@@ -7226,7 +7363,7 @@
                   <a:srgbClr val="888888"/>
                 </a:solidFill>
               </a:rPr>
-              <a:t>Qiu Jiliang, Huang Zhenkun, He Wei et al.. Med (New York, N.Y.). 2026-06-12 DOI: 10.1016/j.medj.2026.101132</a:t>
+              <a:t>Shi Hansen, Zhang Peijun, Wei Qiping et al.. BMC cancer. 2026-06-16 DOI: 10.1186/s12885-026-16329-z</a:t>
             </a:r>
             <a:endParaRPr lang="en-US" sz="800" dirty="0"/>
           </a:p>
@@ -7426,7 +7563,7 @@
                   </a:extLst>
                 </a:hlinkClick>
               </a:rPr>
-              <a:t>… plus transarterial chemoembolization and PD-1 inhibitors as conversion therapies for unresectable intermediate-advanced hepatocellular carcinoma: a phase 2 trial …</a:t>
+              <a:t>WNK4 Enhances Anti-PD-1 Resistance and Promotes Tumor Progression in Hepatocellular Carcinoma by Reprogramming Cysteine Metabolism in Cancer-Associated Fibroblasts.</a:t>
             </a:r>
             <a:endParaRPr lang="en-US" sz="2400" dirty="0"/>
           </a:p>
@@ -7462,7 +7599,7 @@
                   <a:srgbClr val="888888"/>
                 </a:solidFill>
               </a:rPr>
-              <a:t>… and Targeted Therapy  ·  RCT Phase 2</a:t>
+              <a:t>FASEB journal : official publication of the Federation of American Societies for Experimental Biology  ·  🌏 Asia</a:t>
             </a:r>
             <a:endParaRPr lang="en-US" sz="1000" dirty="0"/>
           </a:p>
@@ -7505,7 +7642,7 @@
                 <a:ea typeface="Arial" pitchFamily="34" charset="-122"/>
                 <a:cs typeface="Arial" pitchFamily="34" charset="-120"/>
               </a:rPr>
-              <a:t>Combination therapy for unresectable HCC</a:t>
+              <a:t>WNK4 upregulation linked to HCC progression</a:t>
             </a:r>
             <a:endParaRPr lang="en-US" sz="1800" dirty="0"/>
           </a:p>
@@ -7526,7 +7663,7 @@
                 <a:ea typeface="Arial" pitchFamily="34" charset="-122"/>
                 <a:cs typeface="Arial" pitchFamily="34" charset="-120"/>
               </a:rPr>
-              <a:t>Transarterial chemoembolization (TACE) used</a:t>
+              <a:t>WNK4 enhances anti-PD-1 resistance</a:t>
             </a:r>
             <a:endParaRPr lang="en-US" sz="1800" dirty="0"/>
           </a:p>
@@ -7547,7 +7684,7 @@
                 <a:ea typeface="Arial" pitchFamily="34" charset="-122"/>
                 <a:cs typeface="Arial" pitchFamily="34" charset="-120"/>
               </a:rPr>
-              <a:t>PD-1 inhibitors enhance treatment efficacy</a:t>
+              <a:t>Cysteine metabolism reprogramming in CAFs</a:t>
             </a:r>
             <a:endParaRPr lang="en-US" sz="1800" dirty="0"/>
           </a:p>
@@ -7568,7 +7705,7 @@
                 <a:ea typeface="Arial" pitchFamily="34" charset="-122"/>
                 <a:cs typeface="Arial" pitchFamily="34" charset="-120"/>
               </a:rPr>
-              <a:t>Phase 2 trial demonstrates promising results</a:t>
+              <a:t>WNK4 promotes HCC cell migration</a:t>
             </a:r>
             <a:endParaRPr lang="en-US" sz="1800" dirty="0"/>
           </a:p>
@@ -7589,7 +7726,7 @@
                 <a:ea typeface="Arial" pitchFamily="34" charset="-122"/>
                 <a:cs typeface="Arial" pitchFamily="34" charset="-120"/>
               </a:rPr>
-              <a:t>Potential for conversion to resectable disease</a:t>
+              <a:t>Novel WNK4-HMGB1-p53 axis identified</a:t>
             </a:r>
             <a:endParaRPr lang="en-US" sz="1800" dirty="0"/>
           </a:p>
@@ -7625,7 +7762,7 @@
                   <a:srgbClr val="888888"/>
                 </a:solidFill>
               </a:rPr>
-              <a:t>X Zhang, H Cai, W Peng. … and Targeted Therapy. 2026</a:t>
+              <a:t>Yu Ge, Cui Yun-Long, Mu Han et al.. FASEB journal : official publication of the Federation of American Societies for Experimental Biology. 2026-06-12 DOI: 10.1096/fj.202502777R</a:t>
             </a:r>
             <a:endParaRPr lang="en-US" sz="800" dirty="0"/>
           </a:p>

--- a/docs/digest-en.pptx
+++ b/docs/digest-en.pptx
@@ -2269,7 +2269,7 @@
                   <a:srgbClr val="888888"/>
                 </a:solidFill>
               </a:rPr>
-              <a:t>2026-06-15 — 2026-06-22</a:t>
+              <a:t>2026-06-22 — 2026-06-29</a:t>
             </a:r>
             <a:endParaRPr lang="en-US" sz="1400" dirty="0"/>
           </a:p>
@@ -2460,7 +2460,7 @@
                   </a:extLst>
                 </a:hlinkClick>
               </a:rPr>
-              <a:t>Prognostic nutritional index and the survival of patients with hepatocellular carcinoma on immune checkpoint inhibitors: a meta-analysis</a:t>
+              <a:t>Pretreatment serum vitamin D levels predict the therapeutic efficacy of atezolizumab plus bevacizumab therapy in advanced hepatocellular carcinoma: a multicenter analysis.</a:t>
             </a:r>
             <a:endParaRPr lang="en-US" sz="2400" dirty="0"/>
           </a:p>
@@ -2496,7 +2496,7 @@
                   <a:srgbClr val="888888"/>
                 </a:solidFill>
               </a:rPr>
-              <a:t>BMC cancer  ·  Meta-Analysis</a:t>
+              <a:t>International journal of clinical oncology  ·  🌏 Asia</a:t>
             </a:r>
             <a:endParaRPr lang="en-US" sz="1000" dirty="0"/>
           </a:p>
@@ -2539,7 +2539,7 @@
                 <a:ea typeface="Arial" pitchFamily="34" charset="-122"/>
                 <a:cs typeface="Arial" pitchFamily="34" charset="-120"/>
               </a:rPr>
-              <a:t>Prognostic nutritional index (PNI) impacts survival.</a:t>
+              <a:t>Vitamin D shows anticancer effects.</a:t>
             </a:r>
             <a:endParaRPr lang="en-US" sz="1800" dirty="0"/>
           </a:p>
@@ -2560,7 +2560,7 @@
                 <a:ea typeface="Arial" pitchFamily="34" charset="-122"/>
                 <a:cs typeface="Arial" pitchFamily="34" charset="-120"/>
               </a:rPr>
-              <a:t>Meta-analysis of HCC patients on ICIs.</a:t>
+              <a:t>Study included 142 HCC patients.</a:t>
             </a:r>
             <a:endParaRPr lang="en-US" sz="1800" dirty="0"/>
           </a:p>
@@ -2581,7 +2581,49 @@
                 <a:ea typeface="Arial" pitchFamily="34" charset="-122"/>
                 <a:cs typeface="Arial" pitchFamily="34" charset="-120"/>
               </a:rPr>
-              <a:t>Nutritional status correlates with immune response.</a:t>
+              <a:t>Lower vitamin D linked to PD.</a:t>
+            </a:r>
+            <a:endParaRPr lang="en-US" sz="1800" dirty="0"/>
+          </a:p>
+          <a:p>
+            <a:pPr marL="342900" indent="-342900">
+              <a:spcAft>
+                <a:spcPts val="800"/>
+              </a:spcAft>
+              <a:buSzPct val="100000"/>
+              <a:buChar char="•"/>
+            </a:pPr>
+            <a:r>
+              <a:rPr lang="en-US" sz="1800" dirty="0">
+                <a:solidFill>
+                  <a:srgbClr val="333333"/>
+                </a:solidFill>
+                <a:latin typeface="Arial" pitchFamily="34" charset="0"/>
+                <a:ea typeface="Arial" pitchFamily="34" charset="-122"/>
+                <a:cs typeface="Arial" pitchFamily="34" charset="-120"/>
+              </a:rPr>
+              <a:t>Cutoff value: 17.8 ng/mL.</a:t>
+            </a:r>
+            <a:endParaRPr lang="en-US" sz="1800" dirty="0"/>
+          </a:p>
+          <a:p>
+            <a:pPr marL="342900" indent="-342900">
+              <a:spcAft>
+                <a:spcPts val="800"/>
+              </a:spcAft>
+              <a:buSzPct val="100000"/>
+              <a:buChar char="•"/>
+            </a:pPr>
+            <a:r>
+              <a:rPr lang="en-US" sz="1800" dirty="0">
+                <a:solidFill>
+                  <a:srgbClr val="333333"/>
+                </a:solidFill>
+                <a:latin typeface="Arial" pitchFamily="34" charset="0"/>
+                <a:ea typeface="Arial" pitchFamily="34" charset="-122"/>
+                <a:cs typeface="Arial" pitchFamily="34" charset="-120"/>
+              </a:rPr>
+              <a:t>High vitamin D predicts better OS.</a:t>
             </a:r>
             <a:endParaRPr lang="en-US" sz="1800" dirty="0"/>
           </a:p>
@@ -2617,7 +2659,7 @@
                   <a:srgbClr val="888888"/>
                 </a:solidFill>
               </a:rPr>
-              <a:t>J Fu, W Peng, J Jiang. BMC cancer. 2026</a:t>
+              <a:t>Suzuki Takanori, Matsuura Kentaro, Narahara Satoshi et al.. International journal of clinical oncology. 2026-06-27 DOI: 10.1007/s10147-026-03114-y</a:t>
             </a:r>
             <a:endParaRPr lang="en-US" sz="800" dirty="0"/>
           </a:p>
@@ -2817,7 +2859,7 @@
                   </a:extLst>
                 </a:hlinkClick>
               </a:rPr>
-              <a:t>Radiotherapy versus local ablation therapy for the treatment of hepatocellular carcinoma: A systematic review and meta-analysis.</a:t>
+              <a:t>Prognostic value of the systemic immune-inflammation index in gastrointestinal cancers treated with immune checkpoint inhibitors: a systematic review and meta-analysis.</a:t>
             </a:r>
             <a:endParaRPr lang="en-US" sz="2400" dirty="0"/>
           </a:p>
@@ -2853,7 +2895,7 @@
                   <a:srgbClr val="888888"/>
                 </a:solidFill>
               </a:rPr>
-              <a:t>Journal of Clinical …  ·  Meta-Analysis</a:t>
+              <a:t>BMC gastroenterology  ·  Meta-Analysis</a:t>
             </a:r>
             <a:endParaRPr lang="en-US" sz="1000" dirty="0"/>
           </a:p>
@@ -2896,7 +2938,7 @@
                 <a:ea typeface="Arial" pitchFamily="34" charset="-122"/>
                 <a:cs typeface="Arial" pitchFamily="34" charset="-120"/>
               </a:rPr>
-              <a:t>Local ablation therapies include RFA and MWA.</a:t>
+              <a:t>Systemic immune-inflammation index (SII) evaluated</a:t>
             </a:r>
             <a:endParaRPr lang="en-US" sz="1800" dirty="0"/>
           </a:p>
@@ -2917,7 +2959,7 @@
                 <a:ea typeface="Arial" pitchFamily="34" charset="-122"/>
                 <a:cs typeface="Arial" pitchFamily="34" charset="-120"/>
               </a:rPr>
-              <a:t>EBRT shows different outcomes than local ablation.</a:t>
+              <a:t>High SII linked to worse survival outcomes</a:t>
             </a:r>
             <a:endParaRPr lang="en-US" sz="1800" dirty="0"/>
           </a:p>
@@ -2938,7 +2980,7 @@
                 <a:ea typeface="Arial" pitchFamily="34" charset="-122"/>
                 <a:cs typeface="Arial" pitchFamily="34" charset="-120"/>
               </a:rPr>
-              <a:t>Meta-analysis highlights survival benefits of RFA.</a:t>
+              <a:t>28 studies with 4752 GI cancer patients</a:t>
             </a:r>
             <a:endParaRPr lang="en-US" sz="1800" dirty="0"/>
           </a:p>
@@ -2959,7 +3001,7 @@
                 <a:ea typeface="Arial" pitchFamily="34" charset="-122"/>
                 <a:cs typeface="Arial" pitchFamily="34" charset="-120"/>
               </a:rPr>
-              <a:t>Local progression-free survival is a key metric.</a:t>
+              <a:t>SII predicts OS and PFS in HCC</a:t>
             </a:r>
             <a:endParaRPr lang="en-US" sz="1800" dirty="0"/>
           </a:p>
@@ -2980,7 +3022,7 @@
                 <a:ea typeface="Arial" pitchFamily="34" charset="-122"/>
                 <a:cs typeface="Arial" pitchFamily="34" charset="-120"/>
               </a:rPr>
-              <a:t>Study compares effectiveness of two treatment modalities.</a:t>
+              <a:t>SII useful for risk stratification</a:t>
             </a:r>
             <a:endParaRPr lang="en-US" sz="1800" dirty="0"/>
           </a:p>
@@ -3016,7 +3058,7 @@
                   <a:srgbClr val="888888"/>
                 </a:solidFill>
               </a:rPr>
-              <a:t>SH Bae, SH Choi, SM Yoon. Journal of Clinical …. 2026</a:t>
+              <a:t>Lu Jiamin, Feng Yuqian, Guo Kaibo et al.. BMC gastroenterology. 2026-06-25 DOI: 10.1186/s12876-026-05014-x</a:t>
             </a:r>
             <a:endParaRPr lang="en-US" sz="800" dirty="0"/>
           </a:p>
@@ -3216,7 +3258,7 @@
                   </a:extLst>
                 </a:hlinkClick>
               </a:rPr>
-              <a:t>Resveratrol derivative restores macrophage cholesterol homeostasis via stabilizing xanthine oxidoreductase in hepatocellular carcinoma.</a:t>
+              <a:t>An umbrella review navigating the nationwide burden of hepatitis B virus infection in Ethiopia: A call for action on vaccination, safe blood, and infection prevention.</a:t>
             </a:r>
             <a:endParaRPr lang="en-US" sz="2400" dirty="0"/>
           </a:p>
@@ -3252,7 +3294,7 @@
                   <a:srgbClr val="888888"/>
                 </a:solidFill>
               </a:rPr>
-              <a:t>Journal of translational medicine  ·  IF 6.1  ·  Basic Research</a:t>
+              <a:t>PloS one  ·  Meta-Analysis</a:t>
             </a:r>
             <a:endParaRPr lang="en-US" sz="1000" dirty="0"/>
           </a:p>
@@ -3295,7 +3337,7 @@
                 <a:ea typeface="Arial" pitchFamily="34" charset="-122"/>
                 <a:cs typeface="Arial" pitchFamily="34" charset="-120"/>
               </a:rPr>
-              <a:t>TAMs shape immunosuppressive environment in HCC.</a:t>
+              <a:t>HBV is a major cause of liver disease.</a:t>
             </a:r>
             <a:endParaRPr lang="en-US" sz="1800" dirty="0"/>
           </a:p>
@@ -3316,7 +3358,7 @@
                 <a:ea typeface="Arial" pitchFamily="34" charset="-122"/>
                 <a:cs typeface="Arial" pitchFamily="34" charset="-120"/>
               </a:rPr>
-              <a:t>XOR downregulation linked to poor patient outcomes.</a:t>
+              <a:t>Pooled prevalence of HBV in Ethiopia is 5.78%.</a:t>
             </a:r>
             <a:endParaRPr lang="en-US" sz="1800" dirty="0"/>
           </a:p>
@@ -3337,7 +3379,7 @@
                 <a:ea typeface="Arial" pitchFamily="34" charset="-122"/>
                 <a:cs typeface="Arial" pitchFamily="34" charset="-120"/>
               </a:rPr>
-              <a:t>Res616 stabilizes XOR, restores cholesterol balance.</a:t>
+              <a:t>Risk factors include male gender and multiple partners.</a:t>
             </a:r>
             <a:endParaRPr lang="en-US" sz="1800" dirty="0"/>
           </a:p>
@@ -3358,7 +3400,7 @@
                 <a:ea typeface="Arial" pitchFamily="34" charset="-122"/>
                 <a:cs typeface="Arial" pitchFamily="34" charset="-120"/>
               </a:rPr>
-              <a:t>Targeting XOR enhances CD8+ T cell responses.</a:t>
+              <a:t>Systematic reviews showed inconsistent findings.</a:t>
             </a:r>
             <a:endParaRPr lang="en-US" sz="1800" dirty="0"/>
           </a:p>
@@ -3379,7 +3421,7 @@
                 <a:ea typeface="Arial" pitchFamily="34" charset="-122"/>
                 <a:cs typeface="Arial" pitchFamily="34" charset="-120"/>
               </a:rPr>
-              <a:t>Combination with anti-PD-L1 therapy suppresses tumors.</a:t>
+              <a:t>Study aids public health strategy development.</a:t>
             </a:r>
             <a:endParaRPr lang="en-US" sz="1800" dirty="0"/>
           </a:p>
@@ -3415,7 +3457,7 @@
                   <a:srgbClr val="888888"/>
                 </a:solidFill>
               </a:rPr>
-              <a:t>Liang Guojun, Zeng Lin, Huang Xiaohui et al.. Journal of translational medicine. 2026-06-19 DOI: 10.1186/s12967-026-08433-2</a:t>
+              <a:t>Demeke Abel Desalegn, Tsegaye Aboma, Bayable Alem et al.. PloS one. 2026-06-22 DOI: 10.1371/journal.pone.0352169</a:t>
             </a:r>
             <a:endParaRPr lang="en-US" sz="800" dirty="0"/>
           </a:p>
@@ -3606,7 +3648,7 @@
                   <a:srgbClr val="FFFFFF"/>
                 </a:solidFill>
               </a:rPr>
-              <a:t>### 綜合啟示 (Overall Insights)</a:t>
+              <a:t>### 綜合啟示（Overall Insights）</a:t>
             </a:r>
             <a:endParaRPr lang="en-US" sz="1200" dirty="0"/>
           </a:p>
@@ -3632,7 +3674,7 @@
                   <a:srgbClr val="FFFFFF"/>
                 </a:solidFill>
               </a:rPr>
-              <a:t>1. **初級抗藥性與免疫抑制表型的關聯**  </a:t>
+              <a:t>1. **免疫療法的潛力**  </a:t>
             </a:r>
             <a:endParaRPr lang="en-US" sz="1200" dirty="0"/>
           </a:p>
@@ -3649,7 +3691,7 @@
                   <a:srgbClr val="FFFFFF"/>
                 </a:solidFill>
               </a:rPr>
-              <a:t>   **The association between primary refractoriness and myeloid immunosuppressive phenotype**  </a:t>
+              <a:t>   **The potential of immunotherapy**  </a:t>
             </a:r>
             <a:endParaRPr lang="en-US" sz="1200" dirty="0"/>
           </a:p>
@@ -3666,7 +3708,7 @@
                   <a:srgbClr val="FFFFFF"/>
                 </a:solidFill>
               </a:rPr>
-              <a:t>   研究顯示，肝細胞癌患者對阿特珠單抗與貝伐單抗的初級抗藥性與骨髓來源的免疫抑制表型有關，這為未來的治療策略提供了新的見解。  </a:t>
+              <a:t>   近期研究顯示，將免疫檢查點抑制劑（如ipilimumab和pembrolizumab）與其他治療（如局部放療或抗VEGF療法）結合，能顯著改善晚期肝細胞癌患者的預後。  </a:t>
             </a:r>
             <a:endParaRPr lang="en-US" sz="1200" dirty="0"/>
           </a:p>
@@ -3683,7 +3725,7 @@
                   <a:srgbClr val="FFFFFF"/>
                 </a:solidFill>
               </a:rPr>
-              <a:t>   The study reveals that primary refractoriness in HCC patients treated with atezolizumab and bevacizumab is linked to a myeloid immunosuppressive phenotype, providing new insights for future therapeutic strategies.</a:t>
+              <a:t>   Recent studies indicate that combining immune checkpoint inhibitors (such as ipilimumab and pembrolizumab) with other treatments (like locoregional radiotherapy or anti-VEGF therapies) can significantly improve the prognosis of patients with advanced hepatocellular carcinoma.</a:t>
             </a:r>
             <a:endParaRPr lang="en-US" sz="1200" dirty="0"/>
           </a:p>
@@ -3709,7 +3751,7 @@
                   <a:srgbClr val="FFFFFF"/>
                 </a:solidFill>
               </a:rPr>
-              <a:t>2. **代謝疾病與肝癌的生物標誌物**  </a:t>
+              <a:t>2. **腫瘤微環境的重塑**  </a:t>
             </a:r>
             <a:endParaRPr lang="en-US" sz="1200" dirty="0"/>
           </a:p>
@@ -3726,7 +3768,7 @@
                   <a:srgbClr val="FFFFFF"/>
                 </a:solidFill>
               </a:rPr>
-              <a:t>   **Emerging biomarkers in metabolic dysfunction-associated steatotic liver disease and HCC**  </a:t>
+              <a:t>   **Remodeling the tumor microenvironment**  </a:t>
             </a:r>
             <a:endParaRPr lang="en-US" sz="1200" dirty="0"/>
           </a:p>
@@ -3743,7 +3785,7 @@
                   <a:srgbClr val="FFFFFF"/>
                 </a:solidFill>
               </a:rPr>
-              <a:t>   隨著對代謝功能障礙相關脂肪肝病（MASLD）的研究進展，新的生物標誌物和治療途徑逐漸浮現，這對於早期診斷和治療肝癌具有重要意義。  </a:t>
+              <a:t>   研究指出，針對NEK9的治療能夠重塑免疫抑制的腫瘤微環境，從而增強免疫療法的效果。  </a:t>
             </a:r>
             <a:endParaRPr lang="en-US" sz="1200" dirty="0"/>
           </a:p>
@@ -3760,7 +3802,7 @@
                   <a:srgbClr val="FFFFFF"/>
                 </a:solidFill>
               </a:rPr>
-              <a:t>   With advancements in research on metabolic dysfunction-associated steatotic liver disease (MASLD), emerging biomarkers and therapeutic avenues are becoming apparent, which are significant for early diagnosis and treatment of HCC.</a:t>
+              <a:t>   Studies suggest that targeting NEK9 can remodel the immunosuppressive tumor microenvironment, thereby enhancing the efficacy of immunotherapy.</a:t>
             </a:r>
             <a:endParaRPr lang="en-US" sz="1200" dirty="0"/>
           </a:p>
@@ -3786,7 +3828,7 @@
                   <a:srgbClr val="FFFFFF"/>
                 </a:solidFill>
               </a:rPr>
-              <a:t>3. **腫瘤微環境的影響**  </a:t>
+              <a:t>3. **維生素D的預測作用**  </a:t>
             </a:r>
             <a:endParaRPr lang="en-US" sz="1200" dirty="0"/>
           </a:p>
@@ -3803,7 +3845,7 @@
                   <a:srgbClr val="FFFFFF"/>
                 </a:solidFill>
               </a:rPr>
-              <a:t>   **Impact of the tumor microenvironment on therapeutic efficacy**  </a:t>
+              <a:t>   **Predictive role of vitamin D**  </a:t>
             </a:r>
             <a:endParaRPr lang="en-US" sz="1200" dirty="0"/>
           </a:p>
@@ -3820,7 +3862,7 @@
                   <a:srgbClr val="FFFFFF"/>
                 </a:solidFill>
               </a:rPr>
-              <a:t>   腫瘤缺氧微環境顯著影響光療和放療的療效，改善腫瘤缺氧成為增強這些治療方法的潛在策略。  </a:t>
+              <a:t>   初步數據顯示，血清維生素D水平與atezolizumab加bevacizumab療法的療效存在關聯，可能成為新的生物標記。  </a:t>
             </a:r>
             <a:endParaRPr lang="en-US" sz="1200" dirty="0"/>
           </a:p>
@@ -3837,7 +3879,7 @@
                   <a:srgbClr val="FFFFFF"/>
                 </a:solidFill>
               </a:rPr>
-              <a:t>   The hypoxic tumor microenvironment significantly impairs the efficacy of photo- and radiotherapy, making the amelioration of tumor hypoxia a promising strategy to enhance these treatment modalities.</a:t>
+              <a:t>   Preliminary data indicate that serum vitamin D levels correlate with the efficacy of atezolizumab plus bevacizumab therapy, potentially serving as a new biomarker.</a:t>
             </a:r>
             <a:endParaRPr lang="en-US" sz="1200" dirty="0"/>
           </a:p>
@@ -3863,7 +3905,7 @@
                   <a:srgbClr val="FFFFFF"/>
                 </a:solidFill>
               </a:rPr>
-              <a:t>4. **自體免疫性腦炎的風險**  </a:t>
+              <a:t>4. **系統性免疫炎症指數的預後價值**  </a:t>
             </a:r>
             <a:endParaRPr lang="en-US" sz="1200" dirty="0"/>
           </a:p>
@@ -3880,7 +3922,7 @@
                   <a:srgbClr val="FFFFFF"/>
                 </a:solidFill>
               </a:rPr>
-              <a:t>   **Risk of autoimmune encephalitis with immune checkpoint inhibitors**  </a:t>
+              <a:t>   **Prognostic value of systemic immune-inflammation index**  </a:t>
             </a:r>
             <a:endParaRPr lang="en-US" sz="1200" dirty="0"/>
           </a:p>
@@ -3897,7 +3939,7 @@
                   <a:srgbClr val="FFFFFF"/>
                 </a:solidFill>
               </a:rPr>
-              <a:t>   阿特珠單抗和貝伐單抗的聯合療法可能導致嚴重的免疫相關不良事件，如自體免疫性腦炎，需在臨床使用中加以注意。  </a:t>
+              <a:t>   系統性免疫炎症指數在接受免疫檢查點抑制劑治療的消化道癌症患者中顯示出預後價值，為臨床決策提供了新依據。  </a:t>
             </a:r>
             <a:endParaRPr lang="en-US" sz="1200" dirty="0"/>
           </a:p>
@@ -3914,7 +3956,7 @@
                   <a:srgbClr val="FFFFFF"/>
                 </a:solidFill>
               </a:rPr>
-              <a:t>   The combination therapy of atezolizumab and bevacizumab may lead to severe immune-related adverse events, such as autoimmune encephalitis, which requires careful attention in clinical use.</a:t>
+              <a:t>   The systemic immune-inflammation index shows prognostic value in gastrointestinal cancer patients treated with immune checkpoint inhibitors, providing new insights for clinical decision-making.</a:t>
             </a:r>
             <a:endParaRPr lang="en-US" sz="1200" dirty="0"/>
           </a:p>
@@ -3940,7 +3982,7 @@
                   <a:srgbClr val="FFFFFF"/>
                 </a:solidFill>
               </a:rPr>
-              <a:t>5. **預後營養指數的潛在價值**  </a:t>
+              <a:t>5. **局部消融與免疫療法的結合**  </a:t>
             </a:r>
             <a:endParaRPr lang="en-US" sz="1200" dirty="0"/>
           </a:p>
@@ -3957,7 +3999,7 @@
                   <a:srgbClr val="FFFFFF"/>
                 </a:solidFill>
               </a:rPr>
-              <a:t>   **Potential value of prognostic nutritional index in immunotherapy**  </a:t>
+              <a:t>   **Combination of locoregional ablation and immunotherapy**  </a:t>
             </a:r>
             <a:endParaRPr lang="en-US" sz="1200" dirty="0"/>
           </a:p>
@@ -3974,7 +4016,24 @@
                   <a:srgbClr val="FFFFFF"/>
                 </a:solidFill>
               </a:rPr>
-              <a:t>   預後營養指數可能與接受免疫檢查點抑制劑的肝細胞癌患者的生存率相關，提示營養狀態在治療中的重要性。</a:t>
+              <a:t>   將立體定向放射治療與免疫檢查點抑制劑結合的策略顯示出潛在的生存益處，需進一步探索最佳組合方案。  </a:t>
+            </a:r>
+            <a:endParaRPr lang="en-US" sz="1200" dirty="0"/>
+          </a:p>
+          <a:p>
+            <a:pPr indent="0" marL="0">
+              <a:lnSpc>
+                <a:spcPct val="150000"/>
+              </a:lnSpc>
+              <a:buNone/>
+            </a:pPr>
+            <a:r>
+              <a:rPr lang="en-US" sz="1200" dirty="0">
+                <a:solidFill>
+                  <a:srgbClr val="FFFFFF"/>
+                </a:solidFill>
+              </a:rPr>
+              <a:t>   The strategy of combining stereotactic body radiation therapy with immune checkpoint inhibitors shows potential survival benefits, warranting further exploration of optimal combination regimens.</a:t>
             </a:r>
             <a:endParaRPr lang="en-US" sz="1200" dirty="0"/>
           </a:p>
@@ -4120,7 +4179,7 @@
                   <a:srgbClr val="FFFFFF"/>
                 </a:solidFill>
               </a:rPr>
-              <a:t>The prognostic nutritional index may be associated with survival in HCC patients treated with immune checkpoint inhibitors, highlighting the importance of nutritional status in treatment.</a:t>
+              <a:t>### 未來研究方向（Future Research Directions）</a:t>
             </a:r>
             <a:endParaRPr lang="en-US" sz="1200" dirty="0"/>
           </a:p>
@@ -4146,7 +4205,7 @@
                   <a:srgbClr val="FFFFFF"/>
                 </a:solidFill>
               </a:rPr>
-              <a:t>### 未來研究方向 (Future Research Directions)</a:t>
+              <a:t>1. **深入研究腫瘤微環境**  </a:t>
             </a:r>
             <a:endParaRPr lang="en-US" sz="1200" dirty="0"/>
           </a:p>
@@ -4157,6 +4216,14 @@
               </a:lnSpc>
               <a:buNone/>
             </a:pPr>
+            <a:r>
+              <a:rPr lang="en-US" sz="1200" dirty="0">
+                <a:solidFill>
+                  <a:srgbClr val="FFFFFF"/>
+                </a:solidFill>
+              </a:rPr>
+              <a:t>   **In-depth studies on tumor microenvironment**  </a:t>
+            </a:r>
             <a:endParaRPr lang="en-US" sz="1200" dirty="0"/>
           </a:p>
           <a:p>
@@ -4172,7 +4239,7 @@
                   <a:srgbClr val="FFFFFF"/>
                 </a:solidFill>
               </a:rPr>
-              <a:t>1. **針對免疫抑制表型的治療策略**  </a:t>
+              <a:t>   未來應加強對腫瘤微環境的研究，特別是如何逆轉其免疫抑制特性，以增強免疫療法的效果。  </a:t>
             </a:r>
             <a:endParaRPr lang="en-US" sz="1200" dirty="0"/>
           </a:p>
@@ -4189,7 +4256,7 @@
                   <a:srgbClr val="FFFFFF"/>
                 </a:solidFill>
               </a:rPr>
-              <a:t>   **Therapeutic strategies targeting immunosuppressive phenotypes**  </a:t>
+              <a:t>   Future research should focus on understanding the tumor microenvironment, particularly how to reverse its immunosuppressive characteristics to enhance the efficacy of immunotherapy.</a:t>
             </a:r>
             <a:endParaRPr lang="en-US" sz="1200" dirty="0"/>
           </a:p>
@@ -4200,13 +4267,22 @@
               </a:lnSpc>
               <a:buNone/>
             </a:pPr>
+            <a:endParaRPr lang="en-US" sz="1200" dirty="0"/>
+          </a:p>
+          <a:p>
+            <a:pPr indent="0" marL="0">
+              <a:lnSpc>
+                <a:spcPct val="150000"/>
+              </a:lnSpc>
+              <a:buNone/>
+            </a:pPr>
             <a:r>
               <a:rPr lang="en-US" sz="1200" dirty="0">
                 <a:solidFill>
                   <a:srgbClr val="FFFFFF"/>
                 </a:solidFill>
               </a:rPr>
-              <a:t>   需要進一步研究針對骨髓來源免疫抑制表型的治療策略，以克服肝細胞癌的初級抗藥性。  </a:t>
+              <a:t>2. **維生素D與免疫療法的關聯**  </a:t>
             </a:r>
             <a:endParaRPr lang="en-US" sz="1200" dirty="0"/>
           </a:p>
@@ -4223,7 +4299,7 @@
                   <a:srgbClr val="FFFFFF"/>
                 </a:solidFill>
               </a:rPr>
-              <a:t>   Further studies are needed to develop therapeutic strategies targeting myeloid immunosuppressive phenotypes to overcome primary refractoriness in HCC.</a:t>
+              <a:t>   **Exploring the relationship between vitamin D and immunotherapy**  </a:t>
             </a:r>
             <a:endParaRPr lang="en-US" sz="1200" dirty="0"/>
           </a:p>
@@ -4234,6 +4310,14 @@
               </a:lnSpc>
               <a:buNone/>
             </a:pPr>
+            <a:r>
+              <a:rPr lang="en-US" sz="1200" dirty="0">
+                <a:solidFill>
+                  <a:srgbClr val="FFFFFF"/>
+                </a:solidFill>
+              </a:rPr>
+              <a:t>   需進一步探討維生素D水平對免疫療法療效的影響，並評估其作為預測生物標記的潛力。  </a:t>
+            </a:r>
             <a:endParaRPr lang="en-US" sz="1200" dirty="0"/>
           </a:p>
           <a:p>
@@ -4249,7 +4333,7 @@
                   <a:srgbClr val="FFFFFF"/>
                 </a:solidFill>
               </a:rPr>
-              <a:t>2. **MASLD與HCC的關聯機制**  </a:t>
+              <a:t>   Further exploration is needed on the impact of vitamin D levels on the efficacy of immunotherapy and assessing its potential as a predictive biomarker.</a:t>
             </a:r>
             <a:endParaRPr lang="en-US" sz="1200" dirty="0"/>
           </a:p>
@@ -4260,13 +4344,22 @@
               </a:lnSpc>
               <a:buNone/>
             </a:pPr>
+            <a:endParaRPr lang="en-US" sz="1200" dirty="0"/>
+          </a:p>
+          <a:p>
+            <a:pPr indent="0" marL="0">
+              <a:lnSpc>
+                <a:spcPct val="150000"/>
+              </a:lnSpc>
+              <a:buNone/>
+            </a:pPr>
             <a:r>
               <a:rPr lang="en-US" sz="1200" dirty="0">
                 <a:solidFill>
                   <a:srgbClr val="FFFFFF"/>
                 </a:solidFill>
               </a:rPr>
-              <a:t>   **Mechanistic studies on the link between MASLD and HCC**  </a:t>
+              <a:t>3. **新型免疫療法的開發**  </a:t>
             </a:r>
             <a:endParaRPr lang="en-US" sz="1200" dirty="0"/>
           </a:p>
@@ -4283,7 +4376,7 @@
                   <a:srgbClr val="FFFFFF"/>
                 </a:solidFill>
               </a:rPr>
-              <a:t>   探索代謝功能障礙相關脂肪肝病（MASLD）與肝細胞癌之間的關聯機制，以促進早期診斷和干預。  </a:t>
+              <a:t>   **Development of novel immunotherapies**  </a:t>
             </a:r>
             <a:endParaRPr lang="en-US" sz="1200" dirty="0"/>
           </a:p>
@@ -4300,7 +4393,7 @@
                   <a:srgbClr val="FFFFFF"/>
                 </a:solidFill>
               </a:rPr>
-              <a:t>   Investigating the mechanistic links between metabolic dysfunction-associated steatotic liver disease (MASLD) and HCC to facilitate early diagnosis and intervention.</a:t>
+              <a:t>   應持續開發新型免疫療法，特別是針對特定腫瘤驅動因子的治療，以提高對肝細胞癌的治療效果。  </a:t>
             </a:r>
             <a:endParaRPr lang="en-US" sz="1200" dirty="0"/>
           </a:p>
@@ -4311,6 +4404,14 @@
               </a:lnSpc>
               <a:buNone/>
             </a:pPr>
+            <a:r>
+              <a:rPr lang="en-US" sz="1200" dirty="0">
+                <a:solidFill>
+                  <a:srgbClr val="FFFFFF"/>
+                </a:solidFill>
+              </a:rPr>
+              <a:t>   Continuous development of novel immunotherapies, particularly targeting specific tumor drivers, is essential to improve treatment outcomes for hepatocellular carcinoma.</a:t>
+            </a:r>
             <a:endParaRPr lang="en-US" sz="1200" dirty="0"/>
           </a:p>
           <a:p>
@@ -4320,13 +4421,22 @@
               </a:lnSpc>
               <a:buNone/>
             </a:pPr>
+            <a:endParaRPr lang="en-US" sz="1200" dirty="0"/>
+          </a:p>
+          <a:p>
+            <a:pPr indent="0" marL="0">
+              <a:lnSpc>
+                <a:spcPct val="150000"/>
+              </a:lnSpc>
+              <a:buNone/>
+            </a:pPr>
             <a:r>
               <a:rPr lang="en-US" sz="1200" dirty="0">
                 <a:solidFill>
                   <a:srgbClr val="FFFFFF"/>
                 </a:solidFill>
               </a:rPr>
-              <a:t>3. **改善腫瘤微環境的策略**  </a:t>
+              <a:t>4. **臨床試驗設計的創新**  </a:t>
             </a:r>
             <a:endParaRPr lang="en-US" sz="1200" dirty="0"/>
           </a:p>
@@ -4343,7 +4453,7 @@
                   <a:srgbClr val="FFFFFF"/>
                 </a:solidFill>
               </a:rPr>
-              <a:t>   **Strategies to improve the tumor microenvironment**  </a:t>
+              <a:t>   **Innovative clinical trial designs**  </a:t>
             </a:r>
             <a:endParaRPr lang="en-US" sz="1200" dirty="0"/>
           </a:p>
@@ -4360,7 +4470,7 @@
                   <a:srgbClr val="FFFFFF"/>
                 </a:solidFill>
               </a:rPr>
-              <a:t>   開發改善腫瘤微環境的策略，以增強光療和放療在肝細胞癌中的療效。  </a:t>
+              <a:t>   需要設計創新的臨床試驗，以評估不同治療組合的療效，並確定最佳的治療時機和療程。  </a:t>
             </a:r>
             <a:endParaRPr lang="en-US" sz="1200" dirty="0"/>
           </a:p>
@@ -4377,7 +4487,7 @@
                   <a:srgbClr val="FFFFFF"/>
                 </a:solidFill>
               </a:rPr>
-              <a:t>   Developing strategies to improve the tumor microenvironment to enhance the efficacy of photo- and radiotherapy in HCC.</a:t>
+              <a:t>   Innovative clinical trial designs are needed to evaluate the efficacy of different treatment combinations and determine the optimal timing and duration of therapy.</a:t>
             </a:r>
             <a:endParaRPr lang="en-US" sz="1200" dirty="0"/>
           </a:p>
@@ -4403,7 +4513,7 @@
                   <a:srgbClr val="FFFFFF"/>
                 </a:solidFill>
               </a:rPr>
-              <a:t>4. **免疫相關不良事件的監測與管理**  </a:t>
+              <a:t>5. **多學科合作的推進**  </a:t>
             </a:r>
             <a:endParaRPr lang="en-US" sz="1200" dirty="0"/>
           </a:p>
@@ -4420,7 +4530,7 @@
                   <a:srgbClr val="FFFFFF"/>
                 </a:solidFill>
               </a:rPr>
-              <a:t>   **Monitoring and management of immune-related adverse events**  </a:t>
+              <a:t>   **Advancement of multidisciplinary collaboration**  </a:t>
             </a:r>
             <a:endParaRPr lang="en-US" sz="1200" dirty="0"/>
           </a:p>
@@ -4437,7 +4547,7 @@
                   <a:srgbClr val="FFFFFF"/>
                 </a:solidFill>
               </a:rPr>
-              <a:t>   研究如何有效監測和管理接受免疫檢查點抑制劑的患者中出現的免疫相關不良事件。  </a:t>
+              <a:t>   推動腫瘤學、免疫學和放射學等領域的多學科合作，以促進綜合治療策略的發展。  </a:t>
             </a:r>
             <a:endParaRPr lang="en-US" sz="1200" dirty="0"/>
           </a:p>
@@ -4454,84 +4564,7 @@
                   <a:srgbClr val="FFFFFF"/>
                 </a:solidFill>
               </a:rPr>
-              <a:t>   Researching effective monitoring and management of immune-related adverse events in patients receiving immune checkpoint inhibitors.</a:t>
-            </a:r>
-            <a:endParaRPr lang="en-US" sz="1200" dirty="0"/>
-          </a:p>
-          <a:p>
-            <a:pPr indent="0" marL="0">
-              <a:lnSpc>
-                <a:spcPct val="150000"/>
-              </a:lnSpc>
-              <a:buNone/>
-            </a:pPr>
-            <a:endParaRPr lang="en-US" sz="1200" dirty="0"/>
-          </a:p>
-          <a:p>
-            <a:pPr indent="0" marL="0">
-              <a:lnSpc>
-                <a:spcPct val="150000"/>
-              </a:lnSpc>
-              <a:buNone/>
-            </a:pPr>
-            <a:r>
-              <a:rPr lang="en-US" sz="1200" dirty="0">
-                <a:solidFill>
-                  <a:srgbClr val="FFFFFF"/>
-                </a:solidFill>
-              </a:rPr>
-              <a:t>5. **營養狀態與治療反應的關聯性**  </a:t>
-            </a:r>
-            <a:endParaRPr lang="en-US" sz="1200" dirty="0"/>
-          </a:p>
-          <a:p>
-            <a:pPr indent="0" marL="0">
-              <a:lnSpc>
-                <a:spcPct val="150000"/>
-              </a:lnSpc>
-              <a:buNone/>
-            </a:pPr>
-            <a:r>
-              <a:rPr lang="en-US" sz="1200" dirty="0">
-                <a:solidFill>
-                  <a:srgbClr val="FFFFFF"/>
-                </a:solidFill>
-              </a:rPr>
-              <a:t>   **Correlation between nutritional status and treatment response**  </a:t>
-            </a:r>
-            <a:endParaRPr lang="en-US" sz="1200" dirty="0"/>
-          </a:p>
-          <a:p>
-            <a:pPr indent="0" marL="0">
-              <a:lnSpc>
-                <a:spcPct val="150000"/>
-              </a:lnSpc>
-              <a:buNone/>
-            </a:pPr>
-            <a:r>
-              <a:rPr lang="en-US" sz="1200" dirty="0">
-                <a:solidFill>
-                  <a:srgbClr val="FFFFFF"/>
-                </a:solidFill>
-              </a:rPr>
-              <a:t>   進一步研究預後營養指數與肝細胞癌患者對免疫治療反應之間的關聯性，以優化治療方案。  </a:t>
-            </a:r>
-            <a:endParaRPr lang="en-US" sz="1200" dirty="0"/>
-          </a:p>
-          <a:p>
-            <a:pPr indent="0" marL="0">
-              <a:lnSpc>
-                <a:spcPct val="150000"/>
-              </a:lnSpc>
-              <a:buNone/>
-            </a:pPr>
-            <a:r>
-              <a:rPr lang="en-US" sz="1200" dirty="0">
-                <a:solidFill>
-                  <a:srgbClr val="FFFFFF"/>
-                </a:solidFill>
-              </a:rPr>
-              <a:t>   Further investigating the correlation between prognostic nutritional index and treatment response in HCC patients to optimize therapeutic regimens.</a:t>
+              <a:t>   Promoting multidisciplinary collaboration among oncology, immunology, and radiology is crucial to advance the development of integrated treatment strategies.</a:t>
             </a:r>
             <a:endParaRPr lang="en-US" sz="1200" dirty="0"/>
           </a:p>
@@ -4765,7 +4798,7 @@
                 <a:ea typeface="Arial" pitchFamily="34" charset="-122"/>
                 <a:cs typeface="Arial" pitchFamily="34" charset="-120"/>
               </a:rPr>
-              <a:t>A myeloid immunosuppressive phenotype defines primary refractoriness to atezoliz…</a:t>
+              <a:t>Addition of ipilimumab to atezolizumab plus bevacizumab in advanced hepatocellul…</a:t>
             </a:r>
             <a:endParaRPr lang="en-US" sz="1400" dirty="0"/>
           </a:p>
@@ -4802,7 +4835,7 @@
                 <a:ea typeface="Arial" pitchFamily="34" charset="-122"/>
                 <a:cs typeface="Arial" pitchFamily="34" charset="-120"/>
               </a:rPr>
-              <a:t>MASLD and MASLD-associated HCC: emerging biomarkers and therapeutic avenues.</a:t>
+              <a:t>Targeting NEK9 synergises with immunotherapy in hepatocellular carcinoma by remo…</a:t>
             </a:r>
             <a:endParaRPr lang="en-US" sz="1400" dirty="0"/>
           </a:p>
@@ -4839,7 +4872,7 @@
                 <a:ea typeface="Arial" pitchFamily="34" charset="-122"/>
                 <a:cs typeface="Arial" pitchFamily="34" charset="-120"/>
               </a:rPr>
-              <a:t>Biomimetic catalase-engineered black phosphorus nanosheets enhance photo-/radio-…</a:t>
+              <a:t>When Lipids Silence Immunity: Dendritic Cell Death in MASLD-associated HCC.</a:t>
             </a:r>
             <a:endParaRPr lang="en-US" sz="1400" dirty="0"/>
           </a:p>
@@ -4876,7 +4909,7 @@
                 <a:ea typeface="Arial" pitchFamily="34" charset="-122"/>
                 <a:cs typeface="Arial" pitchFamily="34" charset="-120"/>
               </a:rPr>
-              <a:t>… plus transarterial chemoembolization and PD-1 inhibitors as conversion therapi…</a:t>
+              <a:t>Pembrolizumab and stereotactic body radiotherapy combined in advanced hepatocell…</a:t>
             </a:r>
             <a:endParaRPr lang="en-US" sz="1400" dirty="0"/>
           </a:p>
@@ -4913,7 +4946,7 @@
                 <a:ea typeface="Arial" pitchFamily="34" charset="-122"/>
                 <a:cs typeface="Arial" pitchFamily="34" charset="-120"/>
               </a:rPr>
-              <a:t>Autoimmune encephalitis induced by atezolizumab and bevacizumab therapy for adva…</a:t>
+              <a:t>Stereotactic Body Radiation Therapy Combined With Immune Checkpoint Inhibitors i…</a:t>
             </a:r>
             <a:endParaRPr lang="en-US" sz="1400" dirty="0"/>
           </a:p>
@@ -4950,7 +4983,7 @@
                 <a:ea typeface="Arial" pitchFamily="34" charset="-122"/>
                 <a:cs typeface="Arial" pitchFamily="34" charset="-120"/>
               </a:rPr>
-              <a:t>Bioinformatics mining and clinical validation of CD274 as a prognostic indicator…</a:t>
+              <a:t>Evaluating pegenzileukin (SAR444245/THOR-707) in combination with pembrolizumab …</a:t>
             </a:r>
             <a:endParaRPr lang="en-US" sz="1400" dirty="0"/>
           </a:p>
@@ -4987,7 +5020,7 @@
                 <a:ea typeface="Arial" pitchFamily="34" charset="-122"/>
                 <a:cs typeface="Arial" pitchFamily="34" charset="-120"/>
               </a:rPr>
-              <a:t>WNK4 Enhances Anti-PD-1 Resistance and Promotes Tumor Progression in Hepatocellu…</a:t>
+              <a:t>… plus transarterial chemoembolization and PD-1 inhibitors as conversion therapi…</a:t>
             </a:r>
             <a:endParaRPr lang="en-US" sz="1400" dirty="0"/>
           </a:p>
@@ -5024,7 +5057,7 @@
                 <a:ea typeface="Arial" pitchFamily="34" charset="-122"/>
                 <a:cs typeface="Arial" pitchFamily="34" charset="-120"/>
               </a:rPr>
-              <a:t>Prognostic nutritional index and the survival of patients with hepatocellular ca…</a:t>
+              <a:t>Pretreatment serum vitamin D levels predict the therapeutic efficacy of atezoliz…</a:t>
             </a:r>
             <a:endParaRPr lang="en-US" sz="1400" dirty="0"/>
           </a:p>
@@ -5061,7 +5094,7 @@
                 <a:ea typeface="Arial" pitchFamily="34" charset="-122"/>
                 <a:cs typeface="Arial" pitchFamily="34" charset="-120"/>
               </a:rPr>
-              <a:t>Radiotherapy versus local ablation therapy for the treatment of hepatocellular c…</a:t>
+              <a:t>Prognostic value of the systemic immune-inflammation index in gastrointestinal c…</a:t>
             </a:r>
             <a:endParaRPr lang="en-US" sz="1400" dirty="0"/>
           </a:p>
@@ -5098,7 +5131,7 @@
                 <a:ea typeface="Arial" pitchFamily="34" charset="-122"/>
                 <a:cs typeface="Arial" pitchFamily="34" charset="-120"/>
               </a:rPr>
-              <a:t>Resveratrol derivative restores macrophage cholesterol homeostasis via stabilizi…</a:t>
+              <a:t>An umbrella review navigating the nationwide burden of hepatitis B virus infecti…</a:t>
             </a:r>
             <a:endParaRPr lang="en-US" sz="1400" dirty="0"/>
           </a:p>
@@ -5253,7 +5286,7 @@
                   </a:extLst>
                 </a:hlinkClick>
               </a:rPr>
-              <a:t>A myeloid immunosuppressive phenotype defines primary refractoriness to atezolizumab Plus bevacizumab in hepatocellular caarcinoma.</a:t>
+              <a:t>Addition of ipilimumab to atezolizumab plus bevacizumab in advanced hepatocellular carcinoma (PRODIGE 81-FFCD 2101-TRIPLET HCC): phase 2 results from a randomised, multicentre, open-label, phase 2-3 trial.</a:t>
             </a:r>
             <a:endParaRPr lang="en-US" sz="2400" dirty="0"/>
           </a:p>
@@ -5289,7 +5322,7 @@
                   <a:srgbClr val="888888"/>
                 </a:solidFill>
               </a:rPr>
-              <a:t>Journal of hepatology  ·  IF 25.7  ·  🌏 Asia</a:t>
+              <a:t>The lancet. Gastroenterology &amp; hepatology  ·  IF 35.7  ·  RCT Phase 3</a:t>
             </a:r>
             <a:endParaRPr lang="en-US" sz="1000" dirty="0"/>
           </a:p>
@@ -5332,7 +5365,7 @@
                 <a:ea typeface="Arial" pitchFamily="34" charset="-122"/>
                 <a:cs typeface="Arial" pitchFamily="34" charset="-120"/>
               </a:rPr>
-              <a:t>Primary refractoriness affects 40% of HCC patients.</a:t>
+              <a:t>Triple therapy did not improve outcomes.</a:t>
             </a:r>
             <a:endParaRPr lang="en-US" sz="1800" dirty="0"/>
           </a:p>
@@ -5353,7 +5386,7 @@
                 <a:ea typeface="Arial" pitchFamily="34" charset="-122"/>
                 <a:cs typeface="Arial" pitchFamily="34" charset="-120"/>
               </a:rPr>
-              <a:t>Distinct immunosuppressive TME in PRef cases.</a:t>
+              <a:t>30% objective response in triple group.</a:t>
             </a:r>
             <a:endParaRPr lang="en-US" sz="1800" dirty="0"/>
           </a:p>
@@ -5374,49 +5407,7 @@
                 <a:ea typeface="Arial" pitchFamily="34" charset="-122"/>
                 <a:cs typeface="Arial" pitchFamily="34" charset="-120"/>
               </a:rPr>
-              <a:t>Myeloid infiltration linked to treatment failure.</a:t>
-            </a:r>
-            <a:endParaRPr lang="en-US" sz="1800" dirty="0"/>
-          </a:p>
-          <a:p>
-            <a:pPr marL="342900" indent="-342900">
-              <a:spcAft>
-                <a:spcPts val="800"/>
-              </a:spcAft>
-              <a:buSzPct val="100000"/>
-              <a:buChar char="•"/>
-            </a:pPr>
-            <a:r>
-              <a:rPr lang="en-US" sz="1800" dirty="0">
-                <a:solidFill>
-                  <a:srgbClr val="333333"/>
-                </a:solidFill>
-                <a:latin typeface="Arial" pitchFamily="34" charset="0"/>
-                <a:ea typeface="Arial" pitchFamily="34" charset="-122"/>
-                <a:cs typeface="Arial" pitchFamily="34" charset="-120"/>
-              </a:rPr>
-              <a:t>IFN-γ signature downregulation as key factor.</a:t>
-            </a:r>
-            <a:endParaRPr lang="en-US" sz="1800" dirty="0"/>
-          </a:p>
-          <a:p>
-            <a:pPr marL="342900" indent="-342900">
-              <a:spcAft>
-                <a:spcPts val="800"/>
-              </a:spcAft>
-              <a:buSzPct val="100000"/>
-              <a:buChar char="•"/>
-            </a:pPr>
-            <a:r>
-              <a:rPr lang="en-US" sz="1800" dirty="0">
-                <a:solidFill>
-                  <a:srgbClr val="333333"/>
-                </a:solidFill>
-                <a:latin typeface="Arial" pitchFamily="34" charset="0"/>
-                <a:ea typeface="Arial" pitchFamily="34" charset="-122"/>
-                <a:cs typeface="Arial" pitchFamily="34" charset="-120"/>
-              </a:rPr>
-              <a:t>Targeting myeloid cells may enhance treatment response.</a:t>
+              <a:t>High incidence of serious adverse events.</a:t>
             </a:r>
             <a:endParaRPr lang="en-US" sz="1800" dirty="0"/>
           </a:p>
@@ -5452,7 +5443,7 @@
                   <a:srgbClr val="888888"/>
                 </a:solidFill>
               </a:rPr>
-              <a:t>Lombardi Pasquale, Ramon-Gil Erik, Raja Rabial Q et al.. Journal of hepatology. 2026-06-15 DOI: 10.1016/j.jhep.2026.05.018</a:t>
+              <a:t>Merle Philippe, Blanc Jean-Frederic, Le Malicot Karine et al.. The lancet. Gastroenterology &amp; hepatology. 2026-06-22 DOI: 10.1016/S2468-1253(26)00115-9</a:t>
             </a:r>
             <a:endParaRPr lang="en-US" sz="800" dirty="0"/>
           </a:p>
@@ -5652,7 +5643,7 @@
                   </a:extLst>
                 </a:hlinkClick>
               </a:rPr>
-              <a:t>MASLD and MASLD-associated HCC: emerging biomarkers and therapeutic avenues.</a:t>
+              <a:t>Targeting NEK9 synergises with immunotherapy in hepatocellular carcinoma by remodelling the immunosuppressive microenvironment.</a:t>
             </a:r>
             <a:endParaRPr lang="en-US" sz="2400" dirty="0"/>
           </a:p>
@@ -5688,7 +5679,7 @@
                   <a:srgbClr val="888888"/>
                 </a:solidFill>
               </a:rPr>
-              <a:t>Science bulletin  ·  RCT Phase 3</a:t>
+              <a:t>Gut  ·  IF 24.5  ·  Basic Research  ·  🌏 Asia</a:t>
             </a:r>
             <a:endParaRPr lang="en-US" sz="1000" dirty="0"/>
           </a:p>
@@ -5731,7 +5722,7 @@
                 <a:ea typeface="Arial" pitchFamily="34" charset="-122"/>
                 <a:cs typeface="Arial" pitchFamily="34" charset="-120"/>
               </a:rPr>
-              <a:t>MASLD is a leading chronic liver disease.</a:t>
+              <a:t>NEK9 upregulated in HCC, linked to poor survival.</a:t>
             </a:r>
             <a:endParaRPr lang="en-US" sz="1800" dirty="0"/>
           </a:p>
@@ -5752,7 +5743,7 @@
                 <a:ea typeface="Arial" pitchFamily="34" charset="-122"/>
                 <a:cs typeface="Arial" pitchFamily="34" charset="-120"/>
               </a:rPr>
-              <a:t>Emerging biomarkers for diagnosis and prognosis.</a:t>
+              <a:t>Inhibition of NEK9 reverses immunosuppressive TME.</a:t>
             </a:r>
             <a:endParaRPr lang="en-US" sz="1800" dirty="0"/>
           </a:p>
@@ -5773,49 +5764,7 @@
                 <a:ea typeface="Arial" pitchFamily="34" charset="-122"/>
                 <a:cs typeface="Arial" pitchFamily="34" charset="-120"/>
               </a:rPr>
-              <a:t>FDA approved resmetirom and semaglutide.</a:t>
-            </a:r>
-            <a:endParaRPr lang="en-US" sz="1800" dirty="0"/>
-          </a:p>
-          <a:p>
-            <a:pPr marL="342900" indent="-342900">
-              <a:spcAft>
-                <a:spcPts val="800"/>
-              </a:spcAft>
-              <a:buSzPct val="100000"/>
-              <a:buChar char="•"/>
-            </a:pPr>
-            <a:r>
-              <a:rPr lang="en-US" sz="1800" dirty="0">
-                <a:solidFill>
-                  <a:srgbClr val="333333"/>
-                </a:solidFill>
-                <a:latin typeface="Arial" pitchFamily="34" charset="0"/>
-                <a:ea typeface="Arial" pitchFamily="34" charset="-122"/>
-                <a:cs typeface="Arial" pitchFamily="34" charset="-120"/>
-              </a:rPr>
-              <a:t>Innovative interventions for MASLD management.</a:t>
-            </a:r>
-            <a:endParaRPr lang="en-US" sz="1800" dirty="0"/>
-          </a:p>
-          <a:p>
-            <a:pPr marL="342900" indent="-342900">
-              <a:spcAft>
-                <a:spcPts val="800"/>
-              </a:spcAft>
-              <a:buSzPct val="100000"/>
-              <a:buChar char="•"/>
-            </a:pPr>
-            <a:r>
-              <a:rPr lang="en-US" sz="1800" dirty="0">
-                <a:solidFill>
-                  <a:srgbClr val="333333"/>
-                </a:solidFill>
-                <a:latin typeface="Arial" pitchFamily="34" charset="0"/>
-                <a:ea typeface="Arial" pitchFamily="34" charset="-122"/>
-                <a:cs typeface="Arial" pitchFamily="34" charset="-120"/>
-              </a:rPr>
-              <a:t>Need for early detection and personalized medicine.</a:t>
+              <a:t>NEK9 inhibitors enhance anti-PD-L1 therapy efficacy.</a:t>
             </a:r>
             <a:endParaRPr lang="en-US" sz="1800" dirty="0"/>
           </a:p>
@@ -5851,7 +5800,7 @@
                   <a:srgbClr val="888888"/>
                 </a:solidFill>
               </a:rPr>
-              <a:t>Ha Suki, Zhang Xiang, Li Lanjuan et al.. Science bulletin. 2026-06-12 DOI: 10.1016/j.scib.2026.04.048</a:t>
+              <a:t>Lu Guofang, Du Rui, Wan Yue et al.. Gut. 2026-06-25 DOI: 10.1136/gutjnl-2026-338449</a:t>
             </a:r>
             <a:endParaRPr lang="en-US" sz="800" dirty="0"/>
           </a:p>
@@ -6051,7 +6000,7 @@
                   </a:extLst>
                 </a:hlinkClick>
               </a:rPr>
-              <a:t>Biomimetic catalase-engineered black phosphorus nanosheets enhance photo-/radio-therapy for hepatocellular carcinoma.</a:t>
+              <a:t>When Lipids Silence Immunity: Dendritic Cell Death in MASLD-associated HCC.</a:t>
             </a:r>
             <a:endParaRPr lang="en-US" sz="2400" dirty="0"/>
           </a:p>
@@ -6087,7 +6036,7 @@
                   <a:srgbClr val="888888"/>
                 </a:solidFill>
               </a:rPr>
-              <a:t>Biomedical materials (Bristol, England)  ·  Basic Research  ·  🌏 Asia</a:t>
+              <a:t>Journal of hepatology  ·  IF 25.7</a:t>
             </a:r>
             <a:endParaRPr lang="en-US" sz="1000" dirty="0"/>
           </a:p>
@@ -6130,7 +6079,7 @@
                 <a:ea typeface="Arial" pitchFamily="34" charset="-122"/>
                 <a:cs typeface="Arial" pitchFamily="34" charset="-120"/>
               </a:rPr>
-              <a:t>Developed biomimetic nanoplatform using black phosphorus.</a:t>
+              <a:t>Lipids can suppress immune response.</a:t>
             </a:r>
             <a:endParaRPr lang="en-US" sz="1800" dirty="0"/>
           </a:p>
@@ -6151,7 +6100,7 @@
                 <a:ea typeface="Arial" pitchFamily="34" charset="-122"/>
                 <a:cs typeface="Arial" pitchFamily="34" charset="-120"/>
               </a:rPr>
-              <a:t>Functionalized with catalase for enhanced oxygen delivery.</a:t>
+              <a:t>Dendritic cell death observed in MASLD.</a:t>
             </a:r>
             <a:endParaRPr lang="en-US" sz="1800" dirty="0"/>
           </a:p>
@@ -6172,49 +6121,7 @@
                 <a:ea typeface="Arial" pitchFamily="34" charset="-122"/>
                 <a:cs typeface="Arial" pitchFamily="34" charset="-120"/>
               </a:rPr>
-              <a:t>Engineered macrophage membranes for immune modulation.</a:t>
-            </a:r>
-            <a:endParaRPr lang="en-US" sz="1800" dirty="0"/>
-          </a:p>
-          <a:p>
-            <a:pPr marL="342900" indent="-342900">
-              <a:spcAft>
-                <a:spcPts val="800"/>
-              </a:spcAft>
-              <a:buSzPct val="100000"/>
-              <a:buChar char="•"/>
-            </a:pPr>
-            <a:r>
-              <a:rPr lang="en-US" sz="1800" dirty="0">
-                <a:solidFill>
-                  <a:srgbClr val="333333"/>
-                </a:solidFill>
-                <a:latin typeface="Arial" pitchFamily="34" charset="0"/>
-                <a:ea typeface="Arial" pitchFamily="34" charset="-122"/>
-                <a:cs typeface="Arial" pitchFamily="34" charset="-120"/>
-              </a:rPr>
-              <a:t>Significantly sensitized tumors to phototherapy and RT.</a:t>
-            </a:r>
-            <a:endParaRPr lang="en-US" sz="1800" dirty="0"/>
-          </a:p>
-          <a:p>
-            <a:pPr marL="342900" indent="-342900">
-              <a:spcAft>
-                <a:spcPts val="800"/>
-              </a:spcAft>
-              <a:buSzPct val="100000"/>
-              <a:buChar char="•"/>
-            </a:pPr>
-            <a:r>
-              <a:rPr lang="en-US" sz="1800" dirty="0">
-                <a:solidFill>
-                  <a:srgbClr val="333333"/>
-                </a:solidFill>
-                <a:latin typeface="Arial" pitchFamily="34" charset="0"/>
-                <a:ea typeface="Arial" pitchFamily="34" charset="-122"/>
-                <a:cs typeface="Arial" pitchFamily="34" charset="-120"/>
-              </a:rPr>
-              <a:t>Promising strategy for improving HCC treatment outcomes.</a:t>
+              <a:t>HCC progression linked to lipid metabolism.</a:t>
             </a:r>
             <a:endParaRPr lang="en-US" sz="1800" dirty="0"/>
           </a:p>
@@ -6250,7 +6157,7 @@
                   <a:srgbClr val="888888"/>
                 </a:solidFill>
               </a:rPr>
-              <a:t>Qiao Chunzhong, Lei Qiucheng, Lu Liangqi et al.. Biomedical materials (Bristol, England). 2026-06-17 DOI: 10.1088/1748-605X/ae70e2</a:t>
+              <a:t>Kocheise Lorenz, Schneider Kai Markus. Journal of hepatology. 2026-06-24 DOI: 10.1016/j.jhep.2026.06.008</a:t>
             </a:r>
             <a:endParaRPr lang="en-US" sz="800" dirty="0"/>
           </a:p>
@@ -6450,7 +6357,7 @@
                   </a:extLst>
                 </a:hlinkClick>
               </a:rPr>
-              <a:t>… plus transarterial chemoembolization and PD-1 inhibitors as conversion therapies for unresectable intermediate-advanced hepatocellular carcinoma: a phase 2 trial …</a:t>
+              <a:t>Pembrolizumab and stereotactic body radiotherapy combined in advanced hepatocellular carcinoma post sorafenib–A phase II trial (PEMRAD)</a:t>
             </a:r>
             <a:endParaRPr lang="en-US" sz="2400" dirty="0"/>
           </a:p>
@@ -6486,7 +6393,7 @@
                   <a:srgbClr val="888888"/>
                 </a:solidFill>
               </a:rPr>
-              <a:t>… and Targeted Therapy  ·  RCT Phase 2</a:t>
+              <a:t>JHEP Reports  ·  IF 7.8  ·  RCT Phase 2</a:t>
             </a:r>
             <a:endParaRPr lang="en-US" sz="1000" dirty="0"/>
           </a:p>
@@ -6529,7 +6436,7 @@
                 <a:ea typeface="Arial" pitchFamily="34" charset="-122"/>
                 <a:cs typeface="Arial" pitchFamily="34" charset="-120"/>
               </a:rPr>
-              <a:t>Combination therapy for unresectable HCC</a:t>
+              <a:t>Combination of pembrolizumab and SBRT</a:t>
             </a:r>
             <a:endParaRPr lang="en-US" sz="1800" dirty="0"/>
           </a:p>
@@ -6550,7 +6457,7 @@
                 <a:ea typeface="Arial" pitchFamily="34" charset="-122"/>
                 <a:cs typeface="Arial" pitchFamily="34" charset="-120"/>
               </a:rPr>
-              <a:t>Transarterial chemoembolization plus PD-1 inhibitors</a:t>
+              <a:t>Phase II trial for advanced HCC</a:t>
             </a:r>
             <a:endParaRPr lang="en-US" sz="1800" dirty="0"/>
           </a:p>
@@ -6571,7 +6478,49 @@
                 <a:ea typeface="Arial" pitchFamily="34" charset="-122"/>
                 <a:cs typeface="Arial" pitchFamily="34" charset="-120"/>
               </a:rPr>
-              <a:t>Phase 2 trial shows promising results</a:t>
+              <a:t>Post-sorafenib treatment evaluation</a:t>
+            </a:r>
+            <a:endParaRPr lang="en-US" sz="1800" dirty="0"/>
+          </a:p>
+          <a:p>
+            <a:pPr marL="342900" indent="-342900">
+              <a:spcAft>
+                <a:spcPts val="800"/>
+              </a:spcAft>
+              <a:buSzPct val="100000"/>
+              <a:buChar char="•"/>
+            </a:pPr>
+            <a:r>
+              <a:rPr lang="en-US" sz="1800" dirty="0">
+                <a:solidFill>
+                  <a:srgbClr val="333333"/>
+                </a:solidFill>
+                <a:latin typeface="Arial" pitchFamily="34" charset="0"/>
+                <a:ea typeface="Arial" pitchFamily="34" charset="-122"/>
+                <a:cs typeface="Arial" pitchFamily="34" charset="-120"/>
+              </a:rPr>
+              <a:t>Enhanced immune response observed</a:t>
+            </a:r>
+            <a:endParaRPr lang="en-US" sz="1800" dirty="0"/>
+          </a:p>
+          <a:p>
+            <a:pPr marL="342900" indent="-342900">
+              <a:spcAft>
+                <a:spcPts val="800"/>
+              </a:spcAft>
+              <a:buSzPct val="100000"/>
+              <a:buChar char="•"/>
+            </a:pPr>
+            <a:r>
+              <a:rPr lang="en-US" sz="1800" dirty="0">
+                <a:solidFill>
+                  <a:srgbClr val="333333"/>
+                </a:solidFill>
+                <a:latin typeface="Arial" pitchFamily="34" charset="0"/>
+                <a:ea typeface="Arial" pitchFamily="34" charset="-122"/>
+                <a:cs typeface="Arial" pitchFamily="34" charset="-120"/>
+              </a:rPr>
+              <a:t>Potential for improved patient outcomes</a:t>
             </a:r>
             <a:endParaRPr lang="en-US" sz="1800" dirty="0"/>
           </a:p>
@@ -6607,7 +6556,7 @@
                   <a:srgbClr val="888888"/>
                 </a:solidFill>
               </a:rPr>
-              <a:t>X Zhang, H Cai, W Peng. … and Targeted Therapy. 2026</a:t>
+              <a:t>GM O'Kane, A Mesci, RW Jang. JHEP Reports. 2026</a:t>
             </a:r>
             <a:endParaRPr lang="en-US" sz="800" dirty="0"/>
           </a:p>
@@ -6807,7 +6756,7 @@
                   </a:extLst>
                 </a:hlinkClick>
               </a:rPr>
-              <a:t>Autoimmune encephalitis induced by atezolizumab and bevacizumab therapy for advanced hepatocellular carcinoma: a case report.</a:t>
+              <a:t>Stereotactic Body Radiation Therapy Combined With Immune Checkpoint Inhibitors in Unresectable Hepatocellular Carcinoma: A Comprehensive Single-Arm Meta-Analysis Approach.</a:t>
             </a:r>
             <a:endParaRPr lang="en-US" sz="2400" dirty="0"/>
           </a:p>
@@ -6843,7 +6792,7 @@
                   <a:srgbClr val="888888"/>
                 </a:solidFill>
               </a:rPr>
-              <a:t>Journal of medical case reports  ·  Case Report  ·  🌏 Asia</a:t>
+              <a:t>American journal of clinical oncology  ·  RCT Phase 2</a:t>
             </a:r>
             <a:endParaRPr lang="en-US" sz="1000" dirty="0"/>
           </a:p>
@@ -6886,7 +6835,7 @@
                 <a:ea typeface="Arial" pitchFamily="34" charset="-122"/>
                 <a:cs typeface="Arial" pitchFamily="34" charset="-120"/>
               </a:rPr>
-              <a:t>Atezolizumab and bevacizumab used for HCC</a:t>
+              <a:t>SBRT combined with ICI shows promise</a:t>
             </a:r>
             <a:endParaRPr lang="en-US" sz="1800" dirty="0"/>
           </a:p>
@@ -6907,7 +6856,7 @@
                 <a:ea typeface="Arial" pitchFamily="34" charset="-122"/>
                 <a:cs typeface="Arial" pitchFamily="34" charset="-120"/>
               </a:rPr>
-              <a:t>Patient developed autoimmune encephalitis</a:t>
+              <a:t>Pooled median OS is 22.7 months</a:t>
             </a:r>
             <a:endParaRPr lang="en-US" sz="1800" dirty="0"/>
           </a:p>
@@ -6928,7 +6877,7 @@
                 <a:ea typeface="Arial" pitchFamily="34" charset="-122"/>
                 <a:cs typeface="Arial" pitchFamily="34" charset="-120"/>
               </a:rPr>
-              <a:t>Symptoms included fever and impaired consciousness</a:t>
+              <a:t>Pooled median PFS is 7.9 months</a:t>
             </a:r>
             <a:endParaRPr lang="en-US" sz="1800" dirty="0"/>
           </a:p>
@@ -6949,7 +6898,7 @@
                 <a:ea typeface="Arial" pitchFamily="34" charset="-122"/>
                 <a:cs typeface="Arial" pitchFamily="34" charset="-120"/>
               </a:rPr>
-              <a:t>Cerebrospinal fluid showed elevated monocytes</a:t>
+              <a:t>DCR is 93.4%, ORR is 56.3%</a:t>
             </a:r>
             <a:endParaRPr lang="en-US" sz="1800" dirty="0"/>
           </a:p>
@@ -6970,7 +6919,7 @@
                 <a:ea typeface="Arial" pitchFamily="34" charset="-122"/>
                 <a:cs typeface="Arial" pitchFamily="34" charset="-120"/>
               </a:rPr>
-              <a:t>Steroid treatment led to rapid recovery</a:t>
+              <a:t>Manageable grade 3+ toxicity at 17.5%</a:t>
             </a:r>
             <a:endParaRPr lang="en-US" sz="1800" dirty="0"/>
           </a:p>
@@ -7006,7 +6955,7 @@
                   <a:srgbClr val="888888"/>
                 </a:solidFill>
               </a:rPr>
-              <a:t>Nomura Yoriko, Wada Yoshiyuki, Sasaki Shin et al.. Journal of medical case reports. 2026-06-19 DOI: 10.1186/s13256-026-06037-4</a:t>
+              <a:t>Dreyer Justin, Narasimhan Raksha M, Dias Neto Ana R et al.. American journal of clinical oncology. 2026-06-25 DOI: 10.1097/COC.0000000000001341</a:t>
             </a:r>
             <a:endParaRPr lang="en-US" sz="800" dirty="0"/>
           </a:p>
@@ -7206,7 +7155,7 @@
                   </a:extLst>
                 </a:hlinkClick>
               </a:rPr>
-              <a:t>Bioinformatics mining and clinical validation of CD274 as a prognostic indicator in hepatocellular carcinoma.</a:t>
+              <a:t>Evaluating pegenzileukin (SAR444245/THOR-707) in combination with pembrolizumab or cetuximab in advanced metastatic gastrointestinal cancer: the PEGATHOR phase 2 study.</a:t>
             </a:r>
             <a:endParaRPr lang="en-US" sz="2400" dirty="0"/>
           </a:p>
@@ -7242,7 +7191,7 @@
                   <a:srgbClr val="888888"/>
                 </a:solidFill>
               </a:rPr>
-              <a:t>BMC cancer  ·  🌏 Asia</a:t>
+              <a:t>Investigational new drugs  ·  RCT Phase 2</a:t>
             </a:r>
             <a:endParaRPr lang="en-US" sz="1000" dirty="0"/>
           </a:p>
@@ -7285,7 +7234,7 @@
                 <a:ea typeface="Arial" pitchFamily="34" charset="-122"/>
                 <a:cs typeface="Arial" pitchFamily="34" charset="-120"/>
               </a:rPr>
-              <a:t>CD274 correlates with prognosis in HCC.</a:t>
+              <a:t>Pegenziukin expands effector T and NK cells.</a:t>
             </a:r>
             <a:endParaRPr lang="en-US" sz="1800" dirty="0"/>
           </a:p>
@@ -7306,7 +7255,7 @@
                 <a:ea typeface="Arial" pitchFamily="34" charset="-122"/>
                 <a:cs typeface="Arial" pitchFamily="34" charset="-120"/>
               </a:rPr>
-              <a:t>Bioinformatics used for expression analysis.</a:t>
+              <a:t>Study involved 138 advanced GI cancer patients.</a:t>
             </a:r>
             <a:endParaRPr lang="en-US" sz="1800" dirty="0"/>
           </a:p>
@@ -7327,7 +7276,49 @@
                 <a:ea typeface="Arial" pitchFamily="34" charset="-122"/>
                 <a:cs typeface="Arial" pitchFamily="34" charset="-120"/>
               </a:rPr>
-              <a:t>High CD274 linked to better survival rates.</a:t>
+              <a:t>Objective response rate varied across cohorts.</a:t>
+            </a:r>
+            <a:endParaRPr lang="en-US" sz="1800" dirty="0"/>
+          </a:p>
+          <a:p>
+            <a:pPr marL="342900" indent="-342900">
+              <a:spcAft>
+                <a:spcPts val="800"/>
+              </a:spcAft>
+              <a:buSzPct val="100000"/>
+              <a:buChar char="•"/>
+            </a:pPr>
+            <a:r>
+              <a:rPr lang="en-US" sz="1800" dirty="0">
+                <a:solidFill>
+                  <a:srgbClr val="333333"/>
+                </a:solidFill>
+                <a:latin typeface="Arial" pitchFamily="34" charset="0"/>
+                <a:ea typeface="Arial" pitchFamily="34" charset="-122"/>
+                <a:cs typeface="Arial" pitchFamily="34" charset="-120"/>
+              </a:rPr>
+              <a:t>Median progression-free survival was 1.9-2.1 months.</a:t>
+            </a:r>
+            <a:endParaRPr lang="en-US" sz="1800" dirty="0"/>
+          </a:p>
+          <a:p>
+            <a:pPr marL="342900" indent="-342900">
+              <a:spcAft>
+                <a:spcPts val="800"/>
+              </a:spcAft>
+              <a:buSzPct val="100000"/>
+              <a:buChar char="•"/>
+            </a:pPr>
+            <a:r>
+              <a:rPr lang="en-US" sz="1800" dirty="0">
+                <a:solidFill>
+                  <a:srgbClr val="333333"/>
+                </a:solidFill>
+                <a:latin typeface="Arial" pitchFamily="34" charset="0"/>
+                <a:ea typeface="Arial" pitchFamily="34" charset="-122"/>
+                <a:cs typeface="Arial" pitchFamily="34" charset="-120"/>
+              </a:rPr>
+              <a:t>Safety profile was manageable with common adverse events.</a:t>
             </a:r>
             <a:endParaRPr lang="en-US" sz="1800" dirty="0"/>
           </a:p>
@@ -7363,7 +7354,7 @@
                   <a:srgbClr val="888888"/>
                 </a:solidFill>
               </a:rPr>
-              <a:t>Shi Hansen, Zhang Peijun, Wei Qiping et al.. BMC cancer. 2026-06-16 DOI: 10.1186/s12885-026-16329-z</a:t>
+              <a:t>Harris William P, Garc&amp;#xed;a-Alfonso Pilar, Metges Jean Phillipe et al.. Investigational new drugs. 2026-06-22 DOI: 10.1007/s10637-026-01622-2</a:t>
             </a:r>
             <a:endParaRPr lang="en-US" sz="800" dirty="0"/>
           </a:p>
@@ -7563,7 +7554,7 @@
                   </a:extLst>
                 </a:hlinkClick>
               </a:rPr>
-              <a:t>WNK4 Enhances Anti-PD-1 Resistance and Promotes Tumor Progression in Hepatocellular Carcinoma by Reprogramming Cysteine Metabolism in Cancer-Associated Fibroblasts.</a:t>
+              <a:t>… plus transarterial chemoembolization and PD-1 inhibitors as conversion therapies for unresectable intermediate-advanced hepatocellular carcinoma: a phase 2 trial …</a:t>
             </a:r>
             <a:endParaRPr lang="en-US" sz="2400" dirty="0"/>
           </a:p>
@@ -7599,7 +7590,7 @@
                   <a:srgbClr val="888888"/>
                 </a:solidFill>
               </a:rPr>
-              <a:t>FASEB journal : official publication of the Federation of American Societies for Experimental Biology  ·  🌏 Asia</a:t>
+              <a:t>… and Targeted Therapy  ·  RCT Phase 2</a:t>
             </a:r>
             <a:endParaRPr lang="en-US" sz="1000" dirty="0"/>
           </a:p>
@@ -7642,7 +7633,7 @@
                 <a:ea typeface="Arial" pitchFamily="34" charset="-122"/>
                 <a:cs typeface="Arial" pitchFamily="34" charset="-120"/>
               </a:rPr>
-              <a:t>WNK4 upregulation linked to HCC progression</a:t>
+              <a:t>Combination therapy for unresectable HCC</a:t>
             </a:r>
             <a:endParaRPr lang="en-US" sz="1800" dirty="0"/>
           </a:p>
@@ -7663,7 +7654,7 @@
                 <a:ea typeface="Arial" pitchFamily="34" charset="-122"/>
                 <a:cs typeface="Arial" pitchFamily="34" charset="-120"/>
               </a:rPr>
-              <a:t>WNK4 enhances anti-PD-1 resistance</a:t>
+              <a:t>Transarterial chemoembolization plus PD-1 inhibitors</a:t>
             </a:r>
             <a:endParaRPr lang="en-US" sz="1800" dirty="0"/>
           </a:p>
@@ -7684,49 +7675,7 @@
                 <a:ea typeface="Arial" pitchFamily="34" charset="-122"/>
                 <a:cs typeface="Arial" pitchFamily="34" charset="-120"/>
               </a:rPr>
-              <a:t>Cysteine metabolism reprogramming in CAFs</a:t>
-            </a:r>
-            <a:endParaRPr lang="en-US" sz="1800" dirty="0"/>
-          </a:p>
-          <a:p>
-            <a:pPr marL="342900" indent="-342900">
-              <a:spcAft>
-                <a:spcPts val="800"/>
-              </a:spcAft>
-              <a:buSzPct val="100000"/>
-              <a:buChar char="•"/>
-            </a:pPr>
-            <a:r>
-              <a:rPr lang="en-US" sz="1800" dirty="0">
-                <a:solidFill>
-                  <a:srgbClr val="333333"/>
-                </a:solidFill>
-                <a:latin typeface="Arial" pitchFamily="34" charset="0"/>
-                <a:ea typeface="Arial" pitchFamily="34" charset="-122"/>
-                <a:cs typeface="Arial" pitchFamily="34" charset="-120"/>
-              </a:rPr>
-              <a:t>WNK4 promotes HCC cell migration</a:t>
-            </a:r>
-            <a:endParaRPr lang="en-US" sz="1800" dirty="0"/>
-          </a:p>
-          <a:p>
-            <a:pPr marL="342900" indent="-342900">
-              <a:spcAft>
-                <a:spcPts val="800"/>
-              </a:spcAft>
-              <a:buSzPct val="100000"/>
-              <a:buChar char="•"/>
-            </a:pPr>
-            <a:r>
-              <a:rPr lang="en-US" sz="1800" dirty="0">
-                <a:solidFill>
-                  <a:srgbClr val="333333"/>
-                </a:solidFill>
-                <a:latin typeface="Arial" pitchFamily="34" charset="0"/>
-                <a:ea typeface="Arial" pitchFamily="34" charset="-122"/>
-                <a:cs typeface="Arial" pitchFamily="34" charset="-120"/>
-              </a:rPr>
-              <a:t>Novel WNK4-HMGB1-p53 axis identified</a:t>
+              <a:t>Phase 2 trial shows promising results</a:t>
             </a:r>
             <a:endParaRPr lang="en-US" sz="1800" dirty="0"/>
           </a:p>
@@ -7762,7 +7711,7 @@
                   <a:srgbClr val="888888"/>
                 </a:solidFill>
               </a:rPr>
-              <a:t>Yu Ge, Cui Yun-Long, Mu Han et al.. FASEB journal : official publication of the Federation of American Societies for Experimental Biology. 2026-06-12 DOI: 10.1096/fj.202502777R</a:t>
+              <a:t>X Zhang, H Cai, W Peng. … and Targeted Therapy. 2026</a:t>
             </a:r>
             <a:endParaRPr lang="en-US" sz="800" dirty="0"/>
           </a:p>

--- a/docs/digest-en.pptx
+++ b/docs/digest-en.pptx
@@ -2269,7 +2269,7 @@
                   <a:srgbClr val="888888"/>
                 </a:solidFill>
               </a:rPr>
-              <a:t>2026-06-22 — 2026-06-29</a:t>
+              <a:t>2026-06-29 — 2026-07-06</a:t>
             </a:r>
             <a:endParaRPr lang="en-US" sz="1400" dirty="0"/>
           </a:p>
@@ -2460,7 +2460,7 @@
                   </a:extLst>
                 </a:hlinkClick>
               </a:rPr>
-              <a:t>Pretreatment serum vitamin D levels predict the therapeutic efficacy of atezolizumab plus bevacizumab therapy in advanced hepatocellular carcinoma: a multicenter analysis.</a:t>
+              <a:t>Balloon-occluded Alternative Infusion of Fragmented Gelatin Particles of TACE for Hepatocellular Carcinoma Refractory to Atezolizumab-Bevacizumab.</a:t>
             </a:r>
             <a:endParaRPr lang="en-US" sz="2400" dirty="0"/>
           </a:p>
@@ -2496,7 +2496,7 @@
                   <a:srgbClr val="888888"/>
                 </a:solidFill>
               </a:rPr>
-              <a:t>International journal of clinical oncology  ·  🌏 Asia</a:t>
+              <a:t>Anticancer research  ·  Prospective Study  ·  🌏 Asia</a:t>
             </a:r>
             <a:endParaRPr lang="en-US" sz="1000" dirty="0"/>
           </a:p>
@@ -2539,7 +2539,7 @@
                 <a:ea typeface="Arial" pitchFamily="34" charset="-122"/>
                 <a:cs typeface="Arial" pitchFamily="34" charset="-120"/>
               </a:rPr>
-              <a:t>Vitamin D shows anticancer effects.</a:t>
+              <a:t>Study on BOAI-TACE for HCC patients</a:t>
             </a:r>
             <a:endParaRPr lang="en-US" sz="1800" dirty="0"/>
           </a:p>
@@ -2560,7 +2560,7 @@
                 <a:ea typeface="Arial" pitchFamily="34" charset="-122"/>
                 <a:cs typeface="Arial" pitchFamily="34" charset="-120"/>
               </a:rPr>
-              <a:t>Study included 142 HCC patients.</a:t>
+              <a:t>Primary endpoint: ORR at 8 weeks</a:t>
             </a:r>
             <a:endParaRPr lang="en-US" sz="1800" dirty="0"/>
           </a:p>
@@ -2581,7 +2581,7 @@
                 <a:ea typeface="Arial" pitchFamily="34" charset="-122"/>
                 <a:cs typeface="Arial" pitchFamily="34" charset="-120"/>
               </a:rPr>
-              <a:t>Lower vitamin D linked to PD.</a:t>
+              <a:t>60% ORR achieved in treated patients</a:t>
             </a:r>
             <a:endParaRPr lang="en-US" sz="1800" dirty="0"/>
           </a:p>
@@ -2602,7 +2602,7 @@
                 <a:ea typeface="Arial" pitchFamily="34" charset="-122"/>
                 <a:cs typeface="Arial" pitchFamily="34" charset="-120"/>
               </a:rPr>
-              <a:t>Cutoff value: 17.8 ng/mL.</a:t>
+              <a:t>Safety monitored with adverse events</a:t>
             </a:r>
             <a:endParaRPr lang="en-US" sz="1800" dirty="0"/>
           </a:p>
@@ -2623,7 +2623,7 @@
                 <a:ea typeface="Arial" pitchFamily="34" charset="-122"/>
                 <a:cs typeface="Arial" pitchFamily="34" charset="-120"/>
               </a:rPr>
-              <a:t>High vitamin D predicts better OS.</a:t>
+              <a:t>No significant liver function changes</a:t>
             </a:r>
             <a:endParaRPr lang="en-US" sz="1800" dirty="0"/>
           </a:p>
@@ -2659,7 +2659,7 @@
                   <a:srgbClr val="888888"/>
                 </a:solidFill>
               </a:rPr>
-              <a:t>Suzuki Takanori, Matsuura Kentaro, Narahara Satoshi et al.. International journal of clinical oncology. 2026-06-27 DOI: 10.1007/s10147-026-03114-y</a:t>
+              <a:t>Hasegawa Naoyuki, Hoshiai Sodai, Yamada Takeshi et al.. Anticancer research. 2026-06-29 DOI: 10.21873/anticanres.18251</a:t>
             </a:r>
             <a:endParaRPr lang="en-US" sz="800" dirty="0"/>
           </a:p>
@@ -2859,7 +2859,7 @@
                   </a:extLst>
                 </a:hlinkClick>
               </a:rPr>
-              <a:t>Prognostic value of the systemic immune-inflammation index in gastrointestinal cancers treated with immune checkpoint inhibitors: a systematic review and meta-analysis.</a:t>
+              <a:t>Anti-angiogenic therapy combined with immune checkpoint blockade mediates CCR7 + CD8 + T-cell entry into HCC through high endothelial venules.</a:t>
             </a:r>
             <a:endParaRPr lang="en-US" sz="2400" dirty="0"/>
           </a:p>
@@ -2895,7 +2895,7 @@
                   <a:srgbClr val="888888"/>
                 </a:solidFill>
               </a:rPr>
-              <a:t>BMC gastroenterology  ·  Meta-Analysis</a:t>
+              <a:t>Hepatology (Baltimore, Md.)  ·  IF 12.9  ·  Basic Research</a:t>
             </a:r>
             <a:endParaRPr lang="en-US" sz="1000" dirty="0"/>
           </a:p>
@@ -2938,7 +2938,7 @@
                 <a:ea typeface="Arial" pitchFamily="34" charset="-122"/>
                 <a:cs typeface="Arial" pitchFamily="34" charset="-120"/>
               </a:rPr>
-              <a:t>Systemic immune-inflammation index (SII) evaluated</a:t>
+              <a:t>Anti-angiogenic therapy enhances T-cell infiltration</a:t>
             </a:r>
             <a:endParaRPr lang="en-US" sz="1800" dirty="0"/>
           </a:p>
@@ -2959,7 +2959,7 @@
                 <a:ea typeface="Arial" pitchFamily="34" charset="-122"/>
                 <a:cs typeface="Arial" pitchFamily="34" charset="-120"/>
               </a:rPr>
-              <a:t>High SII linked to worse survival outcomes</a:t>
+              <a:t>High endothelial venules (HEVs) facilitate lymphocyte entry</a:t>
             </a:r>
             <a:endParaRPr lang="en-US" sz="1800" dirty="0"/>
           </a:p>
@@ -2980,7 +2980,7 @@
                 <a:ea typeface="Arial" pitchFamily="34" charset="-122"/>
                 <a:cs typeface="Arial" pitchFamily="34" charset="-120"/>
               </a:rPr>
-              <a:t>28 studies with 4752 GI cancer patients</a:t>
+              <a:t>CCR7 + CD8 + T cells show cytotoxic potential</a:t>
             </a:r>
             <a:endParaRPr lang="en-US" sz="1800" dirty="0"/>
           </a:p>
@@ -3001,7 +3001,7 @@
                 <a:ea typeface="Arial" pitchFamily="34" charset="-122"/>
                 <a:cs typeface="Arial" pitchFamily="34" charset="-120"/>
               </a:rPr>
-              <a:t>SII predicts OS and PFS in HCC</a:t>
+              <a:t>VEGFC and NF-κB pathways promote HEV formation</a:t>
             </a:r>
             <a:endParaRPr lang="en-US" sz="1800" dirty="0"/>
           </a:p>
@@ -3022,7 +3022,7 @@
                 <a:ea typeface="Arial" pitchFamily="34" charset="-122"/>
                 <a:cs typeface="Arial" pitchFamily="34" charset="-120"/>
               </a:rPr>
-              <a:t>SII useful for risk stratification</a:t>
+              <a:t>High HEV density correlates with better survival</a:t>
             </a:r>
             <a:endParaRPr lang="en-US" sz="1800" dirty="0"/>
           </a:p>
@@ -3058,7 +3058,7 @@
                   <a:srgbClr val="888888"/>
                 </a:solidFill>
               </a:rPr>
-              <a:t>Lu Jiamin, Feng Yuqian, Guo Kaibo et al.. BMC gastroenterology. 2026-06-25 DOI: 10.1186/s12876-026-05014-x</a:t>
+              <a:t>Tang Lu, Hou Yingwen, Di Tian et al.. Hepatology (Baltimore, Md.). 2026-06-16 DOI: 10.1097/HEP.0000000000001426</a:t>
             </a:r>
             <a:endParaRPr lang="en-US" sz="800" dirty="0"/>
           </a:p>
@@ -3258,7 +3258,7 @@
                   </a:extLst>
                 </a:hlinkClick>
               </a:rPr>
-              <a:t>An umbrella review navigating the nationwide burden of hepatitis B virus infection in Ethiopia: A call for action on vaccination, safe blood, and infection prevention.</a:t>
+              <a:t>Cancer-Associated Fibroblasts Promote Tumor Immunosuppression in Hepatocellular Carcinoma via the NNMT-ANGPTL4 Axis.</a:t>
             </a:r>
             <a:endParaRPr lang="en-US" sz="2400" dirty="0"/>
           </a:p>
@@ -3294,7 +3294,7 @@
                   <a:srgbClr val="888888"/>
                 </a:solidFill>
               </a:rPr>
-              <a:t>PloS one  ·  Meta-Analysis</a:t>
+              <a:t>Advanced science (Weinheim, Baden-Wurttemberg, Germany)  ·  Basic Research  ·  🌏 Asia</a:t>
             </a:r>
             <a:endParaRPr lang="en-US" sz="1000" dirty="0"/>
           </a:p>
@@ -3337,7 +3337,7 @@
                 <a:ea typeface="Arial" pitchFamily="34" charset="-122"/>
                 <a:cs typeface="Arial" pitchFamily="34" charset="-120"/>
               </a:rPr>
-              <a:t>HBV is a major cause of liver disease.</a:t>
+              <a:t>CAFs drive immunosuppression in HCC.</a:t>
             </a:r>
             <a:endParaRPr lang="en-US" sz="1800" dirty="0"/>
           </a:p>
@@ -3358,7 +3358,7 @@
                 <a:ea typeface="Arial" pitchFamily="34" charset="-122"/>
                 <a:cs typeface="Arial" pitchFamily="34" charset="-120"/>
               </a:rPr>
-              <a:t>Pooled prevalence of HBV in Ethiopia is 5.78%.</a:t>
+              <a:t>NNMT regulates ANGPTL4 secretion.</a:t>
             </a:r>
             <a:endParaRPr lang="en-US" sz="1800" dirty="0"/>
           </a:p>
@@ -3379,7 +3379,7 @@
                 <a:ea typeface="Arial" pitchFamily="34" charset="-122"/>
                 <a:cs typeface="Arial" pitchFamily="34" charset="-120"/>
               </a:rPr>
-              <a:t>Risk factors include male gender and multiple partners.</a:t>
+              <a:t>ANGPTL4 enhances tumor immune evasion.</a:t>
             </a:r>
             <a:endParaRPr lang="en-US" sz="1800" dirty="0"/>
           </a:p>
@@ -3400,7 +3400,7 @@
                 <a:ea typeface="Arial" pitchFamily="34" charset="-122"/>
                 <a:cs typeface="Arial" pitchFamily="34" charset="-120"/>
               </a:rPr>
-              <a:t>Systematic reviews showed inconsistent findings.</a:t>
+              <a:t>Targeting NNMT-ANGPTL4 restores T-cell activity.</a:t>
             </a:r>
             <a:endParaRPr lang="en-US" sz="1800" dirty="0"/>
           </a:p>
@@ -3421,7 +3421,7 @@
                 <a:ea typeface="Arial" pitchFamily="34" charset="-122"/>
                 <a:cs typeface="Arial" pitchFamily="34" charset="-120"/>
               </a:rPr>
-              <a:t>Study aids public health strategy development.</a:t>
+              <a:t>Combination therapy improves anti-PD-L1 efficacy.</a:t>
             </a:r>
             <a:endParaRPr lang="en-US" sz="1800" dirty="0"/>
           </a:p>
@@ -3457,7 +3457,7 @@
                   <a:srgbClr val="888888"/>
                 </a:solidFill>
               </a:rPr>
-              <a:t>Demeke Abel Desalegn, Tsegaye Aboma, Bayable Alem et al.. PloS one. 2026-06-22 DOI: 10.1371/journal.pone.0352169</a:t>
+              <a:t>Lu Shounan, Ke Shanjia, Yu Hongjun et al.. Advanced science (Weinheim, Baden-Wurttemberg, Germany). 2026-07-03 DOI: 10.1002/advs.202521418</a:t>
             </a:r>
             <a:endParaRPr lang="en-US" sz="800" dirty="0"/>
           </a:p>
@@ -3674,7 +3674,7 @@
                   <a:srgbClr val="FFFFFF"/>
                 </a:solidFill>
               </a:rPr>
-              <a:t>1. **免疫療法的潛力**  </a:t>
+              <a:t>1. **免疫治療的潛力**  </a:t>
             </a:r>
             <a:endParaRPr lang="en-US" sz="1200" dirty="0"/>
           </a:p>
@@ -3691,7 +3691,7 @@
                   <a:srgbClr val="FFFFFF"/>
                 </a:solidFill>
               </a:rPr>
-              <a:t>   **The potential of immunotherapy**  </a:t>
+              <a:t>   Immunotherapy, particularly immune checkpoint inhibitors (ICIs), has shown promising results in downstaging intermediate and advanced hepatocellular carcinoma (HCC), potentially expanding eligibility for liver transplantation.  </a:t>
             </a:r>
             <a:endParaRPr lang="en-US" sz="1200" dirty="0"/>
           </a:p>
@@ -3708,7 +3708,7 @@
                   <a:srgbClr val="FFFFFF"/>
                 </a:solidFill>
               </a:rPr>
-              <a:t>   近期研究顯示，將免疫檢查點抑制劑（如ipilimumab和pembrolizumab）與其他治療（如局部放療或抗VEGF療法）結合，能顯著改善晚期肝細胞癌患者的預後。  </a:t>
+              <a:t>   免疫治療，特別是免疫檢查點抑制劑（ICIs），在下調中晚期肝細胞癌（HCC）方面顯示出良好的潛力，可能擴大肝臟移植的適應症。</a:t>
             </a:r>
             <a:endParaRPr lang="en-US" sz="1200" dirty="0"/>
           </a:p>
@@ -3719,14 +3719,6 @@
               </a:lnSpc>
               <a:buNone/>
             </a:pPr>
-            <a:r>
-              <a:rPr lang="en-US" sz="1200" dirty="0">
-                <a:solidFill>
-                  <a:srgbClr val="FFFFFF"/>
-                </a:solidFill>
-              </a:rPr>
-              <a:t>   Recent studies indicate that combining immune checkpoint inhibitors (such as ipilimumab and pembrolizumab) with other treatments (like locoregional radiotherapy or anti-VEGF therapies) can significantly improve the prognosis of patients with advanced hepatocellular carcinoma.</a:t>
-            </a:r>
             <a:endParaRPr lang="en-US" sz="1200" dirty="0"/>
           </a:p>
           <a:p>
@@ -3736,6 +3728,14 @@
               </a:lnSpc>
               <a:buNone/>
             </a:pPr>
+            <a:r>
+              <a:rPr lang="en-US" sz="1200" dirty="0">
+                <a:solidFill>
+                  <a:srgbClr val="FFFFFF"/>
+                </a:solidFill>
+              </a:rPr>
+              <a:t>2. **多重療法的協同效應**  </a:t>
+            </a:r>
             <a:endParaRPr lang="en-US" sz="1200" dirty="0"/>
           </a:p>
           <a:p>
@@ -3751,7 +3751,7 @@
                   <a:srgbClr val="FFFFFF"/>
                 </a:solidFill>
               </a:rPr>
-              <a:t>2. **腫瘤微環境的重塑**  </a:t>
+              <a:t>   The combination of ICIs with locoregional therapies and other agents, such as tyrosine kinase inhibitors (TKIs) and radiotherapy, may enhance therapeutic efficacy in HCC.  </a:t>
             </a:r>
             <a:endParaRPr lang="en-US" sz="1200" dirty="0"/>
           </a:p>
@@ -3768,7 +3768,7 @@
                   <a:srgbClr val="FFFFFF"/>
                 </a:solidFill>
               </a:rPr>
-              <a:t>   **Remodeling the tumor microenvironment**  </a:t>
+              <a:t>   將ICIs與區域性治療及其他藥物（如酪氨酸激酶抑制劑（TKIs）和放射治療）結合，可能提高HCC的治療效果。</a:t>
             </a:r>
             <a:endParaRPr lang="en-US" sz="1200" dirty="0"/>
           </a:p>
@@ -3779,14 +3779,6 @@
               </a:lnSpc>
               <a:buNone/>
             </a:pPr>
-            <a:r>
-              <a:rPr lang="en-US" sz="1200" dirty="0">
-                <a:solidFill>
-                  <a:srgbClr val="FFFFFF"/>
-                </a:solidFill>
-              </a:rPr>
-              <a:t>   研究指出，針對NEK9的治療能夠重塑免疫抑制的腫瘤微環境，從而增強免疫療法的效果。  </a:t>
-            </a:r>
             <a:endParaRPr lang="en-US" sz="1200" dirty="0"/>
           </a:p>
           <a:p>
@@ -3802,7 +3794,7 @@
                   <a:srgbClr val="FFFFFF"/>
                 </a:solidFill>
               </a:rPr>
-              <a:t>   Studies suggest that targeting NEK9 can remodel the immunosuppressive tumor microenvironment, thereby enhancing the efficacy of immunotherapy.</a:t>
+              <a:t>3. **患者選擇的關鍵性**  </a:t>
             </a:r>
             <a:endParaRPr lang="en-US" sz="1200" dirty="0"/>
           </a:p>
@@ -3813,6 +3805,14 @@
               </a:lnSpc>
               <a:buNone/>
             </a:pPr>
+            <a:r>
+              <a:rPr lang="en-US" sz="1200" dirty="0">
+                <a:solidFill>
+                  <a:srgbClr val="FFFFFF"/>
+                </a:solidFill>
+              </a:rPr>
+              <a:t>   Real-world studies emphasize the importance of patient selection and stratification based on eligibility criteria, which can significantly influence treatment outcomes in HCC.  </a:t>
+            </a:r>
             <a:endParaRPr lang="en-US" sz="1200" dirty="0"/>
           </a:p>
           <a:p>
@@ -3828,7 +3828,7 @@
                   <a:srgbClr val="FFFFFF"/>
                 </a:solidFill>
               </a:rPr>
-              <a:t>3. **維生素D的預測作用**  </a:t>
+              <a:t>   實際臨床研究強調患者選擇和根據適應症標準進行分層的重要性，這對HCC的治療結果有顯著影響。</a:t>
             </a:r>
             <a:endParaRPr lang="en-US" sz="1200" dirty="0"/>
           </a:p>
@@ -3839,14 +3839,6 @@
               </a:lnSpc>
               <a:buNone/>
             </a:pPr>
-            <a:r>
-              <a:rPr lang="en-US" sz="1200" dirty="0">
-                <a:solidFill>
-                  <a:srgbClr val="FFFFFF"/>
-                </a:solidFill>
-              </a:rPr>
-              <a:t>   **Predictive role of vitamin D**  </a:t>
-            </a:r>
             <a:endParaRPr lang="en-US" sz="1200" dirty="0"/>
           </a:p>
           <a:p>
@@ -3862,7 +3854,7 @@
                   <a:srgbClr val="FFFFFF"/>
                 </a:solidFill>
               </a:rPr>
-              <a:t>   初步數據顯示，血清維生素D水平與atezolizumab加bevacizumab療法的療效存在關聯，可能成為新的生物標記。  </a:t>
+              <a:t>4. **腫瘤微環境的挑戰**  </a:t>
             </a:r>
             <a:endParaRPr lang="en-US" sz="1200" dirty="0"/>
           </a:p>
@@ -3879,7 +3871,7 @@
                   <a:srgbClr val="FFFFFF"/>
                 </a:solidFill>
               </a:rPr>
-              <a:t>   Preliminary data indicate that serum vitamin D levels correlate with the efficacy of atezolizumab plus bevacizumab therapy, potentially serving as a new biomarker.</a:t>
+              <a:t>   The immunosuppressive tumor microenvironment, driven by cancer-associated fibroblasts and other factors, remains a significant barrier to effective immunotherapy in HCC.  </a:t>
             </a:r>
             <a:endParaRPr lang="en-US" sz="1200" dirty="0"/>
           </a:p>
@@ -3890,6 +3882,14 @@
               </a:lnSpc>
               <a:buNone/>
             </a:pPr>
+            <a:r>
+              <a:rPr lang="en-US" sz="1200" dirty="0">
+                <a:solidFill>
+                  <a:srgbClr val="FFFFFF"/>
+                </a:solidFill>
+              </a:rPr>
+              <a:t>   由癌症相關成纖維細胞及其他因素驅動的免疫抑制腫瘤微環境，仍然是HCC有效免疫治療的一大障礙。</a:t>
+            </a:r>
             <a:endParaRPr lang="en-US" sz="1200" dirty="0"/>
           </a:p>
           <a:p>
@@ -3899,14 +3899,6 @@
               </a:lnSpc>
               <a:buNone/>
             </a:pPr>
-            <a:r>
-              <a:rPr lang="en-US" sz="1200" dirty="0">
-                <a:solidFill>
-                  <a:srgbClr val="FFFFFF"/>
-                </a:solidFill>
-              </a:rPr>
-              <a:t>4. **系統性免疫炎症指數的預後價值**  </a:t>
-            </a:r>
             <a:endParaRPr lang="en-US" sz="1200" dirty="0"/>
           </a:p>
           <a:p>
@@ -3922,7 +3914,7 @@
                   <a:srgbClr val="FFFFFF"/>
                 </a:solidFill>
               </a:rPr>
-              <a:t>   **Prognostic value of systemic immune-inflammation index**  </a:t>
+              <a:t>5. **未來的生物標記研究**  </a:t>
             </a:r>
             <a:endParaRPr lang="en-US" sz="1200" dirty="0"/>
           </a:p>
@@ -3939,101 +3931,7 @@
                   <a:srgbClr val="FFFFFF"/>
                 </a:solidFill>
               </a:rPr>
-              <a:t>   系統性免疫炎症指數在接受免疫檢查點抑制劑治療的消化道癌症患者中顯示出預後價值，為臨床決策提供了新依據。  </a:t>
-            </a:r>
-            <a:endParaRPr lang="en-US" sz="1200" dirty="0"/>
-          </a:p>
-          <a:p>
-            <a:pPr indent="0" marL="0">
-              <a:lnSpc>
-                <a:spcPct val="150000"/>
-              </a:lnSpc>
-              <a:buNone/>
-            </a:pPr>
-            <a:r>
-              <a:rPr lang="en-US" sz="1200" dirty="0">
-                <a:solidFill>
-                  <a:srgbClr val="FFFFFF"/>
-                </a:solidFill>
-              </a:rPr>
-              <a:t>   The systemic immune-inflammation index shows prognostic value in gastrointestinal cancer patients treated with immune checkpoint inhibitors, providing new insights for clinical decision-making.</a:t>
-            </a:r>
-            <a:endParaRPr lang="en-US" sz="1200" dirty="0"/>
-          </a:p>
-          <a:p>
-            <a:pPr indent="0" marL="0">
-              <a:lnSpc>
-                <a:spcPct val="150000"/>
-              </a:lnSpc>
-              <a:buNone/>
-            </a:pPr>
-            <a:endParaRPr lang="en-US" sz="1200" dirty="0"/>
-          </a:p>
-          <a:p>
-            <a:pPr indent="0" marL="0">
-              <a:lnSpc>
-                <a:spcPct val="150000"/>
-              </a:lnSpc>
-              <a:buNone/>
-            </a:pPr>
-            <a:r>
-              <a:rPr lang="en-US" sz="1200" dirty="0">
-                <a:solidFill>
-                  <a:srgbClr val="FFFFFF"/>
-                </a:solidFill>
-              </a:rPr>
-              <a:t>5. **局部消融與免疫療法的結合**  </a:t>
-            </a:r>
-            <a:endParaRPr lang="en-US" sz="1200" dirty="0"/>
-          </a:p>
-          <a:p>
-            <a:pPr indent="0" marL="0">
-              <a:lnSpc>
-                <a:spcPct val="150000"/>
-              </a:lnSpc>
-              <a:buNone/>
-            </a:pPr>
-            <a:r>
-              <a:rPr lang="en-US" sz="1200" dirty="0">
-                <a:solidFill>
-                  <a:srgbClr val="FFFFFF"/>
-                </a:solidFill>
-              </a:rPr>
-              <a:t>   **Combination of locoregional ablation and immunotherapy**  </a:t>
-            </a:r>
-            <a:endParaRPr lang="en-US" sz="1200" dirty="0"/>
-          </a:p>
-          <a:p>
-            <a:pPr indent="0" marL="0">
-              <a:lnSpc>
-                <a:spcPct val="150000"/>
-              </a:lnSpc>
-              <a:buNone/>
-            </a:pPr>
-            <a:r>
-              <a:rPr lang="en-US" sz="1200" dirty="0">
-                <a:solidFill>
-                  <a:srgbClr val="FFFFFF"/>
-                </a:solidFill>
-              </a:rPr>
-              <a:t>   將立體定向放射治療與免疫檢查點抑制劑結合的策略顯示出潛在的生存益處，需進一步探索最佳組合方案。  </a:t>
-            </a:r>
-            <a:endParaRPr lang="en-US" sz="1200" dirty="0"/>
-          </a:p>
-          <a:p>
-            <a:pPr indent="0" marL="0">
-              <a:lnSpc>
-                <a:spcPct val="150000"/>
-              </a:lnSpc>
-              <a:buNone/>
-            </a:pPr>
-            <a:r>
-              <a:rPr lang="en-US" sz="1200" dirty="0">
-                <a:solidFill>
-                  <a:srgbClr val="FFFFFF"/>
-                </a:solidFill>
-              </a:rPr>
-              <a:t>   The strategy of combining stereotactic body radiation therapy with immune checkpoint inhibitors shows potential survival benefits, warranting further exploration of optimal combination regimens.</a:t>
+              <a:t>   Advances in immune profiling and biomarker identification may facilitate personalized immunotherapy approaches, improving outcomes for HCC patients.</a:t>
             </a:r>
             <a:endParaRPr lang="en-US" sz="1200" dirty="0"/>
           </a:p>
@@ -4179,7 +4077,7 @@
                   <a:srgbClr val="FFFFFF"/>
                 </a:solidFill>
               </a:rPr>
-              <a:t>### 未來研究方向（Future Research Directions）</a:t>
+              <a:t>免疫剖析和生物標記識別的進展，可能促進個性化免疫治療方法的發展，改善HCC患者的治療結果。</a:t>
             </a:r>
             <a:endParaRPr lang="en-US" sz="1200" dirty="0"/>
           </a:p>
@@ -4205,7 +4103,7 @@
                   <a:srgbClr val="FFFFFF"/>
                 </a:solidFill>
               </a:rPr>
-              <a:t>1. **深入研究腫瘤微環境**  </a:t>
+              <a:t>### 未來研究方向（Future Research Directions）</a:t>
             </a:r>
             <a:endParaRPr lang="en-US" sz="1200" dirty="0"/>
           </a:p>
@@ -4216,14 +4114,6 @@
               </a:lnSpc>
               <a:buNone/>
             </a:pPr>
-            <a:r>
-              <a:rPr lang="en-US" sz="1200" dirty="0">
-                <a:solidFill>
-                  <a:srgbClr val="FFFFFF"/>
-                </a:solidFill>
-              </a:rPr>
-              <a:t>   **In-depth studies on tumor microenvironment**  </a:t>
-            </a:r>
             <a:endParaRPr lang="en-US" sz="1200" dirty="0"/>
           </a:p>
           <a:p>
@@ -4239,7 +4129,7 @@
                   <a:srgbClr val="FFFFFF"/>
                 </a:solidFill>
               </a:rPr>
-              <a:t>   未來應加強對腫瘤微環境的研究，特別是如何逆轉其免疫抑制特性，以增強免疫療法的效果。  </a:t>
+              <a:t>1. **探索新型免疫療法**  </a:t>
             </a:r>
             <a:endParaRPr lang="en-US" sz="1200" dirty="0"/>
           </a:p>
@@ -4256,7 +4146,7 @@
                   <a:srgbClr val="FFFFFF"/>
                 </a:solidFill>
               </a:rPr>
-              <a:t>   Future research should focus on understanding the tumor microenvironment, particularly how to reverse its immunosuppressive characteristics to enhance the efficacy of immunotherapy.</a:t>
+              <a:t>   Further studies should investigate novel immunotherapeutic agents and combinations, particularly in the context of advanced HCC and their mechanisms of action.  </a:t>
             </a:r>
             <a:endParaRPr lang="en-US" sz="1200" dirty="0"/>
           </a:p>
@@ -4267,6 +4157,14 @@
               </a:lnSpc>
               <a:buNone/>
             </a:pPr>
+            <a:r>
+              <a:rPr lang="en-US" sz="1200" dirty="0">
+                <a:solidFill>
+                  <a:srgbClr val="FFFFFF"/>
+                </a:solidFill>
+              </a:rPr>
+              <a:t>   進一步研究應探討新型免疫治療藥物及其組合，特別是在晚期HCC的背景下及其作用機制。</a:t>
+            </a:r>
             <a:endParaRPr lang="en-US" sz="1200" dirty="0"/>
           </a:p>
           <a:p>
@@ -4276,14 +4174,6 @@
               </a:lnSpc>
               <a:buNone/>
             </a:pPr>
-            <a:r>
-              <a:rPr lang="en-US" sz="1200" dirty="0">
-                <a:solidFill>
-                  <a:srgbClr val="FFFFFF"/>
-                </a:solidFill>
-              </a:rPr>
-              <a:t>2. **維生素D與免疫療法的關聯**  </a:t>
-            </a:r>
             <a:endParaRPr lang="en-US" sz="1200" dirty="0"/>
           </a:p>
           <a:p>
@@ -4299,7 +4189,7 @@
                   <a:srgbClr val="FFFFFF"/>
                 </a:solidFill>
               </a:rPr>
-              <a:t>   **Exploring the relationship between vitamin D and immunotherapy**  </a:t>
+              <a:t>2. **腫瘤微環境的調節**  </a:t>
             </a:r>
             <a:endParaRPr lang="en-US" sz="1200" dirty="0"/>
           </a:p>
@@ -4316,7 +4206,7 @@
                   <a:srgbClr val="FFFFFF"/>
                 </a:solidFill>
               </a:rPr>
-              <a:t>   需進一步探討維生素D水平對免疫療法療效的影響，並評估其作為預測生物標記的潛力。  </a:t>
+              <a:t>   Research should focus on strategies to modulate the tumor microenvironment to enhance the efficacy of immunotherapies in HCC.  </a:t>
             </a:r>
             <a:endParaRPr lang="en-US" sz="1200" dirty="0"/>
           </a:p>
@@ -4333,7 +4223,7 @@
                   <a:srgbClr val="FFFFFF"/>
                 </a:solidFill>
               </a:rPr>
-              <a:t>   Further exploration is needed on the impact of vitamin D levels on the efficacy of immunotherapy and assessing its potential as a predictive biomarker.</a:t>
+              <a:t>   研究應集中於調節腫瘤微環境的策略，以提高HCC中免疫治療的療效。</a:t>
             </a:r>
             <a:endParaRPr lang="en-US" sz="1200" dirty="0"/>
           </a:p>
@@ -4359,7 +4249,7 @@
                   <a:srgbClr val="FFFFFF"/>
                 </a:solidFill>
               </a:rPr>
-              <a:t>3. **新型免疫療法的開發**  </a:t>
+              <a:t>3. **生物標記的臨床應用**  </a:t>
             </a:r>
             <a:endParaRPr lang="en-US" sz="1200" dirty="0"/>
           </a:p>
@@ -4376,7 +4266,7 @@
                   <a:srgbClr val="FFFFFF"/>
                 </a:solidFill>
               </a:rPr>
-              <a:t>   **Development of novel immunotherapies**  </a:t>
+              <a:t>   The identification and validation of biomarkers that predict response to immunotherapy could lead to more tailored treatment strategies for HCC patients.  </a:t>
             </a:r>
             <a:endParaRPr lang="en-US" sz="1200" dirty="0"/>
           </a:p>
@@ -4393,7 +4283,7 @@
                   <a:srgbClr val="FFFFFF"/>
                 </a:solidFill>
               </a:rPr>
-              <a:t>   應持續開發新型免疫療法，特別是針對特定腫瘤驅動因子的治療，以提高對肝細胞癌的治療效果。  </a:t>
+              <a:t>   識別和驗證預測免疫治療反應的生物標記，可能導致對HCC患者更具針對性的治療策略。</a:t>
             </a:r>
             <a:endParaRPr lang="en-US" sz="1200" dirty="0"/>
           </a:p>
@@ -4404,14 +4294,6 @@
               </a:lnSpc>
               <a:buNone/>
             </a:pPr>
-            <a:r>
-              <a:rPr lang="en-US" sz="1200" dirty="0">
-                <a:solidFill>
-                  <a:srgbClr val="FFFFFF"/>
-                </a:solidFill>
-              </a:rPr>
-              <a:t>   Continuous development of novel immunotherapies, particularly targeting specific tumor drivers, is essential to improve treatment outcomes for hepatocellular carcinoma.</a:t>
-            </a:r>
             <a:endParaRPr lang="en-US" sz="1200" dirty="0"/>
           </a:p>
           <a:p>
@@ -4421,6 +4303,14 @@
               </a:lnSpc>
               <a:buNone/>
             </a:pPr>
+            <a:r>
+              <a:rPr lang="en-US" sz="1200" dirty="0">
+                <a:solidFill>
+                  <a:srgbClr val="FFFFFF"/>
+                </a:solidFill>
+              </a:rPr>
+              <a:t>4. **長期療效的評估**  </a:t>
+            </a:r>
             <a:endParaRPr lang="en-US" sz="1200" dirty="0"/>
           </a:p>
           <a:p>
@@ -4436,7 +4326,7 @@
                   <a:srgbClr val="FFFFFF"/>
                 </a:solidFill>
               </a:rPr>
-              <a:t>4. **臨床試驗設計的創新**  </a:t>
+              <a:t>   Longitudinal studies are needed to assess the long-term efficacy and safety of combined immunotherapy approaches in HCC.  </a:t>
             </a:r>
             <a:endParaRPr lang="en-US" sz="1200" dirty="0"/>
           </a:p>
@@ -4453,7 +4343,7 @@
                   <a:srgbClr val="FFFFFF"/>
                 </a:solidFill>
               </a:rPr>
-              <a:t>   **Innovative clinical trial designs**  </a:t>
+              <a:t>   需要進行縱向研究，以評估HCC中聯合免疫治療方法的長期療效和安全性。</a:t>
             </a:r>
             <a:endParaRPr lang="en-US" sz="1200" dirty="0"/>
           </a:p>
@@ -4464,14 +4354,6 @@
               </a:lnSpc>
               <a:buNone/>
             </a:pPr>
-            <a:r>
-              <a:rPr lang="en-US" sz="1200" dirty="0">
-                <a:solidFill>
-                  <a:srgbClr val="FFFFFF"/>
-                </a:solidFill>
-              </a:rPr>
-              <a:t>   需要設計創新的臨床試驗，以評估不同治療組合的療效，並確定最佳的治療時機和療程。  </a:t>
-            </a:r>
             <a:endParaRPr lang="en-US" sz="1200" dirty="0"/>
           </a:p>
           <a:p>
@@ -4487,7 +4369,7 @@
                   <a:srgbClr val="FFFFFF"/>
                 </a:solidFill>
               </a:rPr>
-              <a:t>   Innovative clinical trial designs are needed to evaluate the efficacy of different treatment combinations and determine the optimal timing and duration of therapy.</a:t>
+              <a:t>5. **多中心臨床試驗的推進**  </a:t>
             </a:r>
             <a:endParaRPr lang="en-US" sz="1200" dirty="0"/>
           </a:p>
@@ -4498,6 +4380,14 @@
               </a:lnSpc>
               <a:buNone/>
             </a:pPr>
+            <a:r>
+              <a:rPr lang="en-US" sz="1200" dirty="0">
+                <a:solidFill>
+                  <a:srgbClr val="FFFFFF"/>
+                </a:solidFill>
+              </a:rPr>
+              <a:t>   Multi-center clinical trials should be conducted to validate findings across diverse populations and settings, enhancing the generalizability of results.  </a:t>
+            </a:r>
             <a:endParaRPr lang="en-US" sz="1200" dirty="0"/>
           </a:p>
           <a:p>
@@ -4513,58 +4403,7 @@
                   <a:srgbClr val="FFFFFF"/>
                 </a:solidFill>
               </a:rPr>
-              <a:t>5. **多學科合作的推進**  </a:t>
-            </a:r>
-            <a:endParaRPr lang="en-US" sz="1200" dirty="0"/>
-          </a:p>
-          <a:p>
-            <a:pPr indent="0" marL="0">
-              <a:lnSpc>
-                <a:spcPct val="150000"/>
-              </a:lnSpc>
-              <a:buNone/>
-            </a:pPr>
-            <a:r>
-              <a:rPr lang="en-US" sz="1200" dirty="0">
-                <a:solidFill>
-                  <a:srgbClr val="FFFFFF"/>
-                </a:solidFill>
-              </a:rPr>
-              <a:t>   **Advancement of multidisciplinary collaboration**  </a:t>
-            </a:r>
-            <a:endParaRPr lang="en-US" sz="1200" dirty="0"/>
-          </a:p>
-          <a:p>
-            <a:pPr indent="0" marL="0">
-              <a:lnSpc>
-                <a:spcPct val="150000"/>
-              </a:lnSpc>
-              <a:buNone/>
-            </a:pPr>
-            <a:r>
-              <a:rPr lang="en-US" sz="1200" dirty="0">
-                <a:solidFill>
-                  <a:srgbClr val="FFFFFF"/>
-                </a:solidFill>
-              </a:rPr>
-              <a:t>   推動腫瘤學、免疫學和放射學等領域的多學科合作，以促進綜合治療策略的發展。  </a:t>
-            </a:r>
-            <a:endParaRPr lang="en-US" sz="1200" dirty="0"/>
-          </a:p>
-          <a:p>
-            <a:pPr indent="0" marL="0">
-              <a:lnSpc>
-                <a:spcPct val="150000"/>
-              </a:lnSpc>
-              <a:buNone/>
-            </a:pPr>
-            <a:r>
-              <a:rPr lang="en-US" sz="1200" dirty="0">
-                <a:solidFill>
-                  <a:srgbClr val="FFFFFF"/>
-                </a:solidFill>
-              </a:rPr>
-              <a:t>   Promoting multidisciplinary collaboration among oncology, immunology, and radiology is crucial to advance the development of integrated treatment strategies.</a:t>
+              <a:t>   應進行多中心臨床試驗，以驗證不同人群和環境中的研究結果，提高結果的普遍適用性。</a:t>
             </a:r>
             <a:endParaRPr lang="en-US" sz="1200" dirty="0"/>
           </a:p>
@@ -4798,7 +4637,7 @@
                 <a:ea typeface="Arial" pitchFamily="34" charset="-122"/>
                 <a:cs typeface="Arial" pitchFamily="34" charset="-120"/>
               </a:rPr>
-              <a:t>Addition of ipilimumab to atezolizumab plus bevacizumab in advanced hepatocellul…</a:t>
+              <a:t>Efficacy of liver transplantation after response to atezolizumab-bevacizumab dow…</a:t>
             </a:r>
             <a:endParaRPr lang="en-US" sz="1400" dirty="0"/>
           </a:p>
@@ -4835,7 +4674,7 @@
                 <a:ea typeface="Arial" pitchFamily="34" charset="-122"/>
                 <a:cs typeface="Arial" pitchFamily="34" charset="-120"/>
               </a:rPr>
-              <a:t>Targeting NEK9 synergises with immunotherapy in hepatocellular carcinoma by remo…</a:t>
+              <a:t>Outcomes of Patients With Hepatocellular Carcinoma Treated With Durvalumab Plus …</a:t>
             </a:r>
             <a:endParaRPr lang="en-US" sz="1400" dirty="0"/>
           </a:p>
@@ -4872,7 +4711,7 @@
                 <a:ea typeface="Arial" pitchFamily="34" charset="-122"/>
                 <a:cs typeface="Arial" pitchFamily="34" charset="-120"/>
               </a:rPr>
-              <a:t>When Lipids Silence Immunity: Dendritic Cell Death in MASLD-associated HCC.</a:t>
+              <a:t>Camrelizumab, a patinib and radiotherapy in locally advanced, unresectable hepat…</a:t>
             </a:r>
             <a:endParaRPr lang="en-US" sz="1400" dirty="0"/>
           </a:p>
@@ -4909,7 +4748,7 @@
                 <a:ea typeface="Arial" pitchFamily="34" charset="-122"/>
                 <a:cs typeface="Arial" pitchFamily="34" charset="-120"/>
               </a:rPr>
-              <a:t>Pembrolizumab and stereotactic body radiotherapy combined in advanced hepatocell…</a:t>
+              <a:t>Neoadjuvant Danburstotug (IMC-001) therapy in gastric, esophageal, and hepatocel…</a:t>
             </a:r>
             <a:endParaRPr lang="en-US" sz="1400" dirty="0"/>
           </a:p>
@@ -4946,7 +4785,7 @@
                 <a:ea typeface="Arial" pitchFamily="34" charset="-122"/>
                 <a:cs typeface="Arial" pitchFamily="34" charset="-120"/>
               </a:rPr>
-              <a:t>Stereotactic Body Radiation Therapy Combined With Immune Checkpoint Inhibitors i…</a:t>
+              <a:t>Pembrolizumab and stereotactic body radiotherapy combined in advanced hepatocell…</a:t>
             </a:r>
             <a:endParaRPr lang="en-US" sz="1400" dirty="0"/>
           </a:p>
@@ -4983,7 +4822,7 @@
                 <a:ea typeface="Arial" pitchFamily="34" charset="-122"/>
                 <a:cs typeface="Arial" pitchFamily="34" charset="-120"/>
               </a:rPr>
-              <a:t>Evaluating pegenzileukin (SAR444245/THOR-707) in combination with pembrolizumab …</a:t>
+              <a:t>Complementary evaluation of phase III immunotherapy trials in advanced HCC using…</a:t>
             </a:r>
             <a:endParaRPr lang="en-US" sz="1400" dirty="0"/>
           </a:p>
@@ -5020,7 +4859,7 @@
                 <a:ea typeface="Arial" pitchFamily="34" charset="-122"/>
                 <a:cs typeface="Arial" pitchFamily="34" charset="-120"/>
               </a:rPr>
-              <a:t>… plus transarterial chemoembolization and PD-1 inhibitors as conversion therapi…</a:t>
+              <a:t>Systemic immune profiling in hepatocellular carcinoma: navigating etiological he…</a:t>
             </a:r>
             <a:endParaRPr lang="en-US" sz="1400" dirty="0"/>
           </a:p>
@@ -5057,7 +4896,7 @@
                 <a:ea typeface="Arial" pitchFamily="34" charset="-122"/>
                 <a:cs typeface="Arial" pitchFamily="34" charset="-120"/>
               </a:rPr>
-              <a:t>Pretreatment serum vitamin D levels predict the therapeutic efficacy of atezoliz…</a:t>
+              <a:t>Balloon-occluded Alternative Infusion of Fragmented Gelatin Particles of TACE fo…</a:t>
             </a:r>
             <a:endParaRPr lang="en-US" sz="1400" dirty="0"/>
           </a:p>
@@ -5094,7 +4933,7 @@
                 <a:ea typeface="Arial" pitchFamily="34" charset="-122"/>
                 <a:cs typeface="Arial" pitchFamily="34" charset="-120"/>
               </a:rPr>
-              <a:t>Prognostic value of the systemic immune-inflammation index in gastrointestinal c…</a:t>
+              <a:t>Anti-angiogenic therapy combined with immune checkpoint blockade mediates CCR7 +…</a:t>
             </a:r>
             <a:endParaRPr lang="en-US" sz="1400" dirty="0"/>
           </a:p>
@@ -5131,7 +4970,7 @@
                 <a:ea typeface="Arial" pitchFamily="34" charset="-122"/>
                 <a:cs typeface="Arial" pitchFamily="34" charset="-120"/>
               </a:rPr>
-              <a:t>An umbrella review navigating the nationwide burden of hepatitis B virus infecti…</a:t>
+              <a:t>Cancer-Associated Fibroblasts Promote Tumor Immunosuppression in Hepatocellular …</a:t>
             </a:r>
             <a:endParaRPr lang="en-US" sz="1400" dirty="0"/>
           </a:p>
@@ -5286,7 +5125,7 @@
                   </a:extLst>
                 </a:hlinkClick>
               </a:rPr>
-              <a:t>Addition of ipilimumab to atezolizumab plus bevacizumab in advanced hepatocellular carcinoma (PRODIGE 81-FFCD 2101-TRIPLET HCC): phase 2 results from a randomised, multicentre, open-label, phase 2-3 trial.</a:t>
+              <a:t>Efficacy of liver transplantation after response to atezolizumab-bevacizumab downstaging of intermediate and advanced hepatocellular carcinoma (ImmunoXXL).</a:t>
             </a:r>
             <a:endParaRPr lang="en-US" sz="2400" dirty="0"/>
           </a:p>
@@ -5322,7 +5161,7 @@
                   <a:srgbClr val="888888"/>
                 </a:solidFill>
               </a:rPr>
-              <a:t>The lancet. Gastroenterology &amp; hepatology  ·  IF 35.7  ·  RCT Phase 3</a:t>
+              <a:t>Journal of hepatology  ·  IF 25.7  ·  RCT Phase 2</a:t>
             </a:r>
             <a:endParaRPr lang="en-US" sz="1000" dirty="0"/>
           </a:p>
@@ -5365,7 +5204,7 @@
                 <a:ea typeface="Arial" pitchFamily="34" charset="-122"/>
                 <a:cs typeface="Arial" pitchFamily="34" charset="-120"/>
               </a:rPr>
-              <a:t>Triple therapy did not improve outcomes.</a:t>
+              <a:t>Liver transplantation can be curative for HCC.</a:t>
             </a:r>
             <a:endParaRPr lang="en-US" sz="1800" dirty="0"/>
           </a:p>
@@ -5386,7 +5225,7 @@
                 <a:ea typeface="Arial" pitchFamily="34" charset="-122"/>
                 <a:cs typeface="Arial" pitchFamily="34" charset="-120"/>
               </a:rPr>
-              <a:t>30% objective response in triple group.</a:t>
+              <a:t>Atezolizumab-bevacizumab downstaged advanced HCC.</a:t>
             </a:r>
             <a:endParaRPr lang="en-US" sz="1800" dirty="0"/>
           </a:p>
@@ -5407,7 +5246,49 @@
                 <a:ea typeface="Arial" pitchFamily="34" charset="-122"/>
                 <a:cs typeface="Arial" pitchFamily="34" charset="-120"/>
               </a:rPr>
-              <a:t>High incidence of serious adverse events.</a:t>
+              <a:t>26% of patients achieved transplant eligibility.</a:t>
+            </a:r>
+            <a:endParaRPr lang="en-US" sz="1800" dirty="0"/>
+          </a:p>
+          <a:p>
+            <a:pPr marL="342900" indent="-342900">
+              <a:spcAft>
+                <a:spcPts val="800"/>
+              </a:spcAft>
+              <a:buSzPct val="100000"/>
+              <a:buChar char="•"/>
+            </a:pPr>
+            <a:r>
+              <a:rPr lang="en-US" sz="1800" dirty="0">
+                <a:solidFill>
+                  <a:srgbClr val="333333"/>
+                </a:solidFill>
+                <a:latin typeface="Arial" pitchFamily="34" charset="0"/>
+                <a:ea typeface="Arial" pitchFamily="34" charset="-122"/>
+                <a:cs typeface="Arial" pitchFamily="34" charset="-120"/>
+              </a:rPr>
+              <a:t>Two-year survival rates were promising.</a:t>
+            </a:r>
+            <a:endParaRPr lang="en-US" sz="1800" dirty="0"/>
+          </a:p>
+          <a:p>
+            <a:pPr marL="342900" indent="-342900">
+              <a:spcAft>
+                <a:spcPts val="800"/>
+              </a:spcAft>
+              <a:buSzPct val="100000"/>
+              <a:buChar char="•"/>
+            </a:pPr>
+            <a:r>
+              <a:rPr lang="en-US" sz="1800" dirty="0">
+                <a:solidFill>
+                  <a:srgbClr val="333333"/>
+                </a:solidFill>
+                <a:latin typeface="Arial" pitchFamily="34" charset="0"/>
+                <a:ea typeface="Arial" pitchFamily="34" charset="-122"/>
+                <a:cs typeface="Arial" pitchFamily="34" charset="-120"/>
+              </a:rPr>
+              <a:t>Immune monitoring linked tumor response to rejection.</a:t>
             </a:r>
             <a:endParaRPr lang="en-US" sz="1800" dirty="0"/>
           </a:p>
@@ -5443,7 +5324,7 @@
                   <a:srgbClr val="888888"/>
                 </a:solidFill>
               </a:rPr>
-              <a:t>Merle Philippe, Blanc Jean-Frederic, Le Malicot Karine et al.. The lancet. Gastroenterology &amp; hepatology. 2026-06-22 DOI: 10.1016/S2468-1253(26)00115-9</a:t>
+              <a:t>Bhoori Sherrie, Rivoltini Licia, Pinato David J et al.. Journal of hepatology. 2026-06-15 DOI: 10.1016/j.jhep.2026.02.019</a:t>
             </a:r>
             <a:endParaRPr lang="en-US" sz="800" dirty="0"/>
           </a:p>
@@ -5643,7 +5524,7 @@
                   </a:extLst>
                 </a:hlinkClick>
               </a:rPr>
-              <a:t>Targeting NEK9 synergises with immunotherapy in hepatocellular carcinoma by remodelling the immunosuppressive microenvironment.</a:t>
+              <a:t>Outcomes of Patients With Hepatocellular Carcinoma Treated With Durvalumab Plus Tremelimumab in Real-World Clinical Practice Who Met or Did Not Meet the Inclusion Criteria for the Phase 3 HIMALAYA Trial.</a:t>
             </a:r>
             <a:endParaRPr lang="en-US" sz="2400" dirty="0"/>
           </a:p>
@@ -5679,7 +5560,7 @@
                   <a:srgbClr val="888888"/>
                 </a:solidFill>
               </a:rPr>
-              <a:t>Gut  ·  IF 24.5  ·  Basic Research  ·  🌏 Asia</a:t>
+              <a:t>Journal of gastroenterology and hepatology  ·  RCT Phase 3  ·  🌏 Asia</a:t>
             </a:r>
             <a:endParaRPr lang="en-US" sz="1000" dirty="0"/>
           </a:p>
@@ -5722,7 +5603,7 @@
                 <a:ea typeface="Arial" pitchFamily="34" charset="-122"/>
                 <a:cs typeface="Arial" pitchFamily="34" charset="-120"/>
               </a:rPr>
-              <a:t>NEK9 upregulated in HCC, linked to poor survival.</a:t>
+              <a:t>Study on HCC patients treated with Dur/Tre</a:t>
             </a:r>
             <a:endParaRPr lang="en-US" sz="1800" dirty="0"/>
           </a:p>
@@ -5743,7 +5624,7 @@
                 <a:ea typeface="Arial" pitchFamily="34" charset="-122"/>
                 <a:cs typeface="Arial" pitchFamily="34" charset="-120"/>
               </a:rPr>
-              <a:t>Inhibition of NEK9 reverses immunosuppressive TME.</a:t>
+              <a:t>412 patients enrolled from 30 institutions</a:t>
             </a:r>
             <a:endParaRPr lang="en-US" sz="1800" dirty="0"/>
           </a:p>
@@ -5764,7 +5645,49 @@
                 <a:ea typeface="Arial" pitchFamily="34" charset="-122"/>
                 <a:cs typeface="Arial" pitchFamily="34" charset="-120"/>
               </a:rPr>
-              <a:t>NEK9 inhibitors enhance anti-PD-L1 therapy efficacy.</a:t>
+              <a:t>HIMALAYA group had better PFS and OS</a:t>
+            </a:r>
+            <a:endParaRPr lang="en-US" sz="1800" dirty="0"/>
+          </a:p>
+          <a:p>
+            <a:pPr marL="342900" indent="-342900">
+              <a:spcAft>
+                <a:spcPts val="800"/>
+              </a:spcAft>
+              <a:buSzPct val="100000"/>
+              <a:buChar char="•"/>
+            </a:pPr>
+            <a:r>
+              <a:rPr lang="en-US" sz="1800" dirty="0">
+                <a:solidFill>
+                  <a:srgbClr val="333333"/>
+                </a:solidFill>
+                <a:latin typeface="Arial" pitchFamily="34" charset="0"/>
+                <a:ea typeface="Arial" pitchFamily="34" charset="-122"/>
+                <a:cs typeface="Arial" pitchFamily="34" charset="-120"/>
+              </a:rPr>
+              <a:t>Independent predictors include BMI and portal vein invasion</a:t>
+            </a:r>
+            <a:endParaRPr lang="en-US" sz="1800" dirty="0"/>
+          </a:p>
+          <a:p>
+            <a:pPr marL="342900" indent="-342900">
+              <a:spcAft>
+                <a:spcPts val="800"/>
+              </a:spcAft>
+              <a:buSzPct val="100000"/>
+              <a:buChar char="•"/>
+            </a:pPr>
+            <a:r>
+              <a:rPr lang="en-US" sz="1800" dirty="0">
+                <a:solidFill>
+                  <a:srgbClr val="333333"/>
+                </a:solidFill>
+                <a:latin typeface="Arial" pitchFamily="34" charset="0"/>
+                <a:ea typeface="Arial" pitchFamily="34" charset="-122"/>
+                <a:cs typeface="Arial" pitchFamily="34" charset="-120"/>
+              </a:rPr>
+              <a:t>Endocrine dysfunction more common in HIMALAYA group</a:t>
             </a:r>
             <a:endParaRPr lang="en-US" sz="1800" dirty="0"/>
           </a:p>
@@ -5800,7 +5723,7 @@
                   <a:srgbClr val="888888"/>
                 </a:solidFill>
               </a:rPr>
-              <a:t>Lu Guofang, Du Rui, Wan Yue et al.. Gut. 2026-06-25 DOI: 10.1136/gutjnl-2026-338449</a:t>
+              <a:t>Matono Tomomitsu, Tada Toshifumi, Hiraoka Atsushi et al.. Journal of gastroenterology and hepatology. 2026-07-02 DOI: 10.1111/jgh.70422</a:t>
             </a:r>
             <a:endParaRPr lang="en-US" sz="800" dirty="0"/>
           </a:p>
@@ -6000,7 +5923,7 @@
                   </a:extLst>
                 </a:hlinkClick>
               </a:rPr>
-              <a:t>When Lipids Silence Immunity: Dendritic Cell Death in MASLD-associated HCC.</a:t>
+              <a:t>Camrelizumab, a patinib and radiotherapy in locally advanced, unresectable hepatocellular carcinoma: a phase 2 study.</a:t>
             </a:r>
             <a:endParaRPr lang="en-US" sz="2400" dirty="0"/>
           </a:p>
@@ -6036,7 +5959,7 @@
                   <a:srgbClr val="888888"/>
                 </a:solidFill>
               </a:rPr>
-              <a:t>Journal of hepatology  ·  IF 25.7</a:t>
+              <a:t>Clinical cancer research : an official journal of the American Association for Cancer Research  ·  IF 11.5  ·  RCT Phase 2</a:t>
             </a:r>
             <a:endParaRPr lang="en-US" sz="1000" dirty="0"/>
           </a:p>
@@ -6079,7 +6002,7 @@
                 <a:ea typeface="Arial" pitchFamily="34" charset="-122"/>
                 <a:cs typeface="Arial" pitchFamily="34" charset="-120"/>
               </a:rPr>
-              <a:t>Lipids can suppress immune response.</a:t>
+              <a:t>Study evaluated camrelizumab, apatinib, and IMRT</a:t>
             </a:r>
             <a:endParaRPr lang="en-US" sz="1800" dirty="0"/>
           </a:p>
@@ -6100,7 +6023,7 @@
                 <a:ea typeface="Arial" pitchFamily="34" charset="-122"/>
                 <a:cs typeface="Arial" pitchFamily="34" charset="-120"/>
               </a:rPr>
-              <a:t>Dendritic cell death observed in MASLD.</a:t>
+              <a:t>84.1% objective response rate observed</a:t>
             </a:r>
             <a:endParaRPr lang="en-US" sz="1800" dirty="0"/>
           </a:p>
@@ -6121,7 +6044,49 @@
                 <a:ea typeface="Arial" pitchFamily="34" charset="-122"/>
                 <a:cs typeface="Arial" pitchFamily="34" charset="-120"/>
               </a:rPr>
-              <a:t>HCC progression linked to lipid metabolism.</a:t>
+              <a:t>Median PFS was 13.8 months</a:t>
+            </a:r>
+            <a:endParaRPr lang="en-US" sz="1800" dirty="0"/>
+          </a:p>
+          <a:p>
+            <a:pPr marL="342900" indent="-342900">
+              <a:spcAft>
+                <a:spcPts val="800"/>
+              </a:spcAft>
+              <a:buSzPct val="100000"/>
+              <a:buChar char="•"/>
+            </a:pPr>
+            <a:r>
+              <a:rPr lang="en-US" sz="1800" dirty="0">
+                <a:solidFill>
+                  <a:srgbClr val="333333"/>
+                </a:solidFill>
+                <a:latin typeface="Arial" pitchFamily="34" charset="0"/>
+                <a:ea typeface="Arial" pitchFamily="34" charset="-122"/>
+                <a:cs typeface="Arial" pitchFamily="34" charset="-120"/>
+              </a:rPr>
+              <a:t>Grade 3-4 adverse events in 81.8% patients</a:t>
+            </a:r>
+            <a:endParaRPr lang="en-US" sz="1800" dirty="0"/>
+          </a:p>
+          <a:p>
+            <a:pPr marL="342900" indent="-342900">
+              <a:spcAft>
+                <a:spcPts val="800"/>
+              </a:spcAft>
+              <a:buSzPct val="100000"/>
+              <a:buChar char="•"/>
+            </a:pPr>
+            <a:r>
+              <a:rPr lang="en-US" sz="1800" dirty="0">
+                <a:solidFill>
+                  <a:srgbClr val="333333"/>
+                </a:solidFill>
+                <a:latin typeface="Arial" pitchFamily="34" charset="0"/>
+                <a:ea typeface="Arial" pitchFamily="34" charset="-122"/>
+                <a:cs typeface="Arial" pitchFamily="34" charset="-120"/>
+              </a:rPr>
+              <a:t>TP53 mutation linked to worse outcomes</a:t>
             </a:r>
             <a:endParaRPr lang="en-US" sz="1800" dirty="0"/>
           </a:p>
@@ -6157,7 +6122,7 @@
                   <a:srgbClr val="888888"/>
                 </a:solidFill>
               </a:rPr>
-              <a:t>Kocheise Lorenz, Schneider Kai Markus. Journal of hepatology. 2026-06-24 DOI: 10.1016/j.jhep.2026.06.008</a:t>
+              <a:t>Wang Hongzhi, Wang Kun, Zheng Xuan et al.. Clinical cancer research : an official journal of the American Association for Cancer Research. 2026-06-30 DOI: 10.1158/1078-0432.CCR-26-1352</a:t>
             </a:r>
             <a:endParaRPr lang="en-US" sz="800" dirty="0"/>
           </a:p>
@@ -6357,7 +6322,7 @@
                   </a:extLst>
                 </a:hlinkClick>
               </a:rPr>
-              <a:t>Pembrolizumab and stereotactic body radiotherapy combined in advanced hepatocellular carcinoma post sorafenib–A phase II trial (PEMRAD)</a:t>
+              <a:t>Neoadjuvant Danburstotug (IMC-001) therapy in gastric, esophageal, and hepatocellular carcinoma: the NeoChance phase II study.</a:t>
             </a:r>
             <a:endParaRPr lang="en-US" sz="2400" dirty="0"/>
           </a:p>
@@ -6393,7 +6358,7 @@
                   <a:srgbClr val="888888"/>
                 </a:solidFill>
               </a:rPr>
-              <a:t>JHEP Reports  ·  IF 7.8  ·  RCT Phase 2</a:t>
+              <a:t>NPJ precision oncology  ·  RCT Phase 2  ·  🌏 Asia</a:t>
             </a:r>
             <a:endParaRPr lang="en-US" sz="1000" dirty="0"/>
           </a:p>
@@ -6436,7 +6401,7 @@
                 <a:ea typeface="Arial" pitchFamily="34" charset="-122"/>
                 <a:cs typeface="Arial" pitchFamily="34" charset="-120"/>
               </a:rPr>
-              <a:t>Combination of pembrolizumab and SBRT</a:t>
+              <a:t>Neoadjuvant therapy with danburstotug (IMC-001) evaluated.</a:t>
             </a:r>
             <a:endParaRPr lang="en-US" sz="1800" dirty="0"/>
           </a:p>
@@ -6457,7 +6422,7 @@
                 <a:ea typeface="Arial" pitchFamily="34" charset="-122"/>
                 <a:cs typeface="Arial" pitchFamily="34" charset="-120"/>
               </a:rPr>
-              <a:t>Phase II trial for advanced HCC</a:t>
+              <a:t>Primary endpoint not met; MPR in 4.2% patients.</a:t>
             </a:r>
             <a:endParaRPr lang="en-US" sz="1800" dirty="0"/>
           </a:p>
@@ -6478,7 +6443,7 @@
                 <a:ea typeface="Arial" pitchFamily="34" charset="-122"/>
                 <a:cs typeface="Arial" pitchFamily="34" charset="-120"/>
               </a:rPr>
-              <a:t>Post-sorafenib treatment evaluation</a:t>
+              <a:t>Pathologic regression observed in 22.9% patients.</a:t>
             </a:r>
             <a:endParaRPr lang="en-US" sz="1800" dirty="0"/>
           </a:p>
@@ -6499,7 +6464,7 @@
                 <a:ea typeface="Arial" pitchFamily="34" charset="-122"/>
                 <a:cs typeface="Arial" pitchFamily="34" charset="-120"/>
               </a:rPr>
-              <a:t>Enhanced immune response observed</a:t>
+              <a:t>Treatment well tolerated with few adverse events.</a:t>
             </a:r>
             <a:endParaRPr lang="en-US" sz="1800" dirty="0"/>
           </a:p>
@@ -6520,7 +6485,7 @@
                 <a:ea typeface="Arial" pitchFamily="34" charset="-122"/>
                 <a:cs typeface="Arial" pitchFamily="34" charset="-120"/>
               </a:rPr>
-              <a:t>Potential for improved patient outcomes</a:t>
+              <a:t>Immune profiling showed cancer-specific remodeling.</a:t>
             </a:r>
             <a:endParaRPr lang="en-US" sz="1800" dirty="0"/>
           </a:p>
@@ -6556,7 +6521,7 @@
                   <a:srgbClr val="888888"/>
                 </a:solidFill>
               </a:rPr>
-              <a:t>GM O'Kane, A Mesci, RW Jang. JHEP Reports. 2026</a:t>
+              <a:t>Bang Yeong Hak, Kang Dawon, Lee Seungwon et al.. NPJ precision oncology. 2026-07-03 DOI: 10.1038/s41698-026-01571-2</a:t>
             </a:r>
             <a:endParaRPr lang="en-US" sz="800" dirty="0"/>
           </a:p>
@@ -6756,7 +6721,7 @@
                   </a:extLst>
                 </a:hlinkClick>
               </a:rPr>
-              <a:t>Stereotactic Body Radiation Therapy Combined With Immune Checkpoint Inhibitors in Unresectable Hepatocellular Carcinoma: A Comprehensive Single-Arm Meta-Analysis Approach.</a:t>
+              <a:t>Pembrolizumab and stereotactic body radiotherapy combined in advanced hepatocellular carcinoma post sorafenib–A phase II trial (PEMRAD)</a:t>
             </a:r>
             <a:endParaRPr lang="en-US" sz="2400" dirty="0"/>
           </a:p>
@@ -6792,7 +6757,7 @@
                   <a:srgbClr val="888888"/>
                 </a:solidFill>
               </a:rPr>
-              <a:t>American journal of clinical oncology  ·  RCT Phase 2</a:t>
+              <a:t>JHEP Reports  ·  IF 7.8  ·  RCT Phase 2</a:t>
             </a:r>
             <a:endParaRPr lang="en-US" sz="1000" dirty="0"/>
           </a:p>
@@ -6835,7 +6800,7 @@
                 <a:ea typeface="Arial" pitchFamily="34" charset="-122"/>
                 <a:cs typeface="Arial" pitchFamily="34" charset="-120"/>
               </a:rPr>
-              <a:t>SBRT combined with ICI shows promise</a:t>
+              <a:t>Combination of pembrolizumab and SBRT</a:t>
             </a:r>
             <a:endParaRPr lang="en-US" sz="1800" dirty="0"/>
           </a:p>
@@ -6856,7 +6821,7 @@
                 <a:ea typeface="Arial" pitchFamily="34" charset="-122"/>
                 <a:cs typeface="Arial" pitchFamily="34" charset="-120"/>
               </a:rPr>
-              <a:t>Pooled median OS is 22.7 months</a:t>
+              <a:t>Phase II trial for advanced HCC</a:t>
             </a:r>
             <a:endParaRPr lang="en-US" sz="1800" dirty="0"/>
           </a:p>
@@ -6877,49 +6842,7 @@
                 <a:ea typeface="Arial" pitchFamily="34" charset="-122"/>
                 <a:cs typeface="Arial" pitchFamily="34" charset="-120"/>
               </a:rPr>
-              <a:t>Pooled median PFS is 7.9 months</a:t>
-            </a:r>
-            <a:endParaRPr lang="en-US" sz="1800" dirty="0"/>
-          </a:p>
-          <a:p>
-            <a:pPr marL="342900" indent="-342900">
-              <a:spcAft>
-                <a:spcPts val="800"/>
-              </a:spcAft>
-              <a:buSzPct val="100000"/>
-              <a:buChar char="•"/>
-            </a:pPr>
-            <a:r>
-              <a:rPr lang="en-US" sz="1800" dirty="0">
-                <a:solidFill>
-                  <a:srgbClr val="333333"/>
-                </a:solidFill>
-                <a:latin typeface="Arial" pitchFamily="34" charset="0"/>
-                <a:ea typeface="Arial" pitchFamily="34" charset="-122"/>
-                <a:cs typeface="Arial" pitchFamily="34" charset="-120"/>
-              </a:rPr>
-              <a:t>DCR is 93.4%, ORR is 56.3%</a:t>
-            </a:r>
-            <a:endParaRPr lang="en-US" sz="1800" dirty="0"/>
-          </a:p>
-          <a:p>
-            <a:pPr marL="342900" indent="-342900">
-              <a:spcAft>
-                <a:spcPts val="800"/>
-              </a:spcAft>
-              <a:buSzPct val="100000"/>
-              <a:buChar char="•"/>
-            </a:pPr>
-            <a:r>
-              <a:rPr lang="en-US" sz="1800" dirty="0">
-                <a:solidFill>
-                  <a:srgbClr val="333333"/>
-                </a:solidFill>
-                <a:latin typeface="Arial" pitchFamily="34" charset="0"/>
-                <a:ea typeface="Arial" pitchFamily="34" charset="-122"/>
-                <a:cs typeface="Arial" pitchFamily="34" charset="-120"/>
-              </a:rPr>
-              <a:t>Manageable grade 3+ toxicity at 17.5%</a:t>
+              <a:t>Post-sorafenib treatment evaluation</a:t>
             </a:r>
             <a:endParaRPr lang="en-US" sz="1800" dirty="0"/>
           </a:p>
@@ -6955,7 +6878,7 @@
                   <a:srgbClr val="888888"/>
                 </a:solidFill>
               </a:rPr>
-              <a:t>Dreyer Justin, Narasimhan Raksha M, Dias Neto Ana R et al.. American journal of clinical oncology. 2026-06-25 DOI: 10.1097/COC.0000000000001341</a:t>
+              <a:t>GM O'Kane, A Mesci, RW Jang. JHEP Reports. 2026</a:t>
             </a:r>
             <a:endParaRPr lang="en-US" sz="800" dirty="0"/>
           </a:p>
@@ -7155,7 +7078,7 @@
                   </a:extLst>
                 </a:hlinkClick>
               </a:rPr>
-              <a:t>Evaluating pegenzileukin (SAR444245/THOR-707) in combination with pembrolizumab or cetuximab in advanced metastatic gastrointestinal cancer: the PEGATHOR phase 2 study.</a:t>
+              <a:t>Complementary evaluation of phase III immunotherapy trials in advanced HCC using the survival-inferred fragility index.</a:t>
             </a:r>
             <a:endParaRPr lang="en-US" sz="2400" dirty="0"/>
           </a:p>
@@ -7191,7 +7114,7 @@
                   <a:srgbClr val="888888"/>
                 </a:solidFill>
               </a:rPr>
-              <a:t>Investigational new drugs  ·  RCT Phase 2</a:t>
+              <a:t>Digestive and liver disease : official journal of the Italian Society of Gastroenterology and the Italian Association for the Study of the Liver  ·  RCT Phase 3</a:t>
             </a:r>
             <a:endParaRPr lang="en-US" sz="1000" dirty="0"/>
           </a:p>
@@ -7234,7 +7157,7 @@
                 <a:ea typeface="Arial" pitchFamily="34" charset="-122"/>
                 <a:cs typeface="Arial" pitchFamily="34" charset="-120"/>
               </a:rPr>
-              <a:t>Pegenziukin expands effector T and NK cells.</a:t>
+              <a:t>HCC treatment evolving with ICIs and TKIs.</a:t>
             </a:r>
             <a:endParaRPr lang="en-US" sz="1800" dirty="0"/>
           </a:p>
@@ -7255,7 +7178,7 @@
                 <a:ea typeface="Arial" pitchFamily="34" charset="-122"/>
                 <a:cs typeface="Arial" pitchFamily="34" charset="-120"/>
               </a:rPr>
-              <a:t>Study involved 138 advanced GI cancer patients.</a:t>
+              <a:t>SIFI quantifies trial outcome stability.</a:t>
             </a:r>
             <a:endParaRPr lang="en-US" sz="1800" dirty="0"/>
           </a:p>
@@ -7276,7 +7199,7 @@
                 <a:ea typeface="Arial" pitchFamily="34" charset="-122"/>
                 <a:cs typeface="Arial" pitchFamily="34" charset="-120"/>
               </a:rPr>
-              <a:t>Objective response rate varied across cohorts.</a:t>
+              <a:t>Six phase III trials analyzed for SIFI.</a:t>
             </a:r>
             <a:endParaRPr lang="en-US" sz="1800" dirty="0"/>
           </a:p>
@@ -7297,7 +7220,7 @@
                 <a:ea typeface="Arial" pitchFamily="34" charset="-122"/>
                 <a:cs typeface="Arial" pitchFamily="34" charset="-120"/>
               </a:rPr>
-              <a:t>Median progression-free survival was 1.9-2.1 months.</a:t>
+              <a:t>Median SIFI indicates low trial robustness.</a:t>
             </a:r>
             <a:endParaRPr lang="en-US" sz="1800" dirty="0"/>
           </a:p>
@@ -7318,7 +7241,7 @@
                 <a:ea typeface="Arial" pitchFamily="34" charset="-122"/>
                 <a:cs typeface="Arial" pitchFamily="34" charset="-120"/>
               </a:rPr>
-              <a:t>Safety profile was manageable with common adverse events.</a:t>
+              <a:t>Asian trials show higher stability metrics.</a:t>
             </a:r>
             <a:endParaRPr lang="en-US" sz="1800" dirty="0"/>
           </a:p>
@@ -7354,7 +7277,7 @@
                   <a:srgbClr val="888888"/>
                 </a:solidFill>
               </a:rPr>
-              <a:t>Harris William P, Garc&amp;#xed;a-Alfonso Pilar, Metges Jean Phillipe et al.. Investigational new drugs. 2026-06-22 DOI: 10.1007/s10637-026-01622-2</a:t>
+              <a:t>Dalbeni A, Vicardi M, Stefanini B et al.. Digestive and liver disease : official journal of the Italian Society of Gastroenterology and the Italian Association for the Study of the Liver. 2026-06-16 DOI: 10.1016/j.dld.2026.04.013</a:t>
             </a:r>
             <a:endParaRPr lang="en-US" sz="800" dirty="0"/>
           </a:p>
@@ -7554,7 +7477,7 @@
                   </a:extLst>
                 </a:hlinkClick>
               </a:rPr>
-              <a:t>… plus transarterial chemoembolization and PD-1 inhibitors as conversion therapies for unresectable intermediate-advanced hepatocellular carcinoma: a phase 2 trial …</a:t>
+              <a:t>Systemic immune profiling in hepatocellular carcinoma: navigating etiological heterogeneity and selection bias.</a:t>
             </a:r>
             <a:endParaRPr lang="en-US" sz="2400" dirty="0"/>
           </a:p>
@@ -7590,7 +7513,7 @@
                   <a:srgbClr val="888888"/>
                 </a:solidFill>
               </a:rPr>
-              <a:t>… and Targeted Therapy  ·  RCT Phase 2</a:t>
+              <a:t>Journal for immunotherapy of cancer  ·  IF 10.9  ·  Prospective Study</a:t>
             </a:r>
             <a:endParaRPr lang="en-US" sz="1000" dirty="0"/>
           </a:p>
@@ -7633,7 +7556,7 @@
                 <a:ea typeface="Arial" pitchFamily="34" charset="-122"/>
                 <a:cs typeface="Arial" pitchFamily="34" charset="-120"/>
               </a:rPr>
-              <a:t>Combination therapy for unresectable HCC</a:t>
+              <a:t>Methodological commentary on Nishio et al study</a:t>
             </a:r>
             <a:endParaRPr lang="en-US" sz="1800" dirty="0"/>
           </a:p>
@@ -7654,7 +7577,7 @@
                 <a:ea typeface="Arial" pitchFamily="34" charset="-122"/>
                 <a:cs typeface="Arial" pitchFamily="34" charset="-120"/>
               </a:rPr>
-              <a:t>Transarterial chemoembolization plus PD-1 inhibitors</a:t>
+              <a:t>Identified circulating immune biomarkers for HCC</a:t>
             </a:r>
             <a:endParaRPr lang="en-US" sz="1800" dirty="0"/>
           </a:p>
@@ -7675,7 +7598,49 @@
                 <a:ea typeface="Arial" pitchFamily="34" charset="-122"/>
                 <a:cs typeface="Arial" pitchFamily="34" charset="-120"/>
               </a:rPr>
-              <a:t>Phase 2 trial shows promising results</a:t>
+              <a:t>Etiological heterogeneity may confound immune signatures</a:t>
+            </a:r>
+            <a:endParaRPr lang="en-US" sz="1800" dirty="0"/>
+          </a:p>
+          <a:p>
+            <a:pPr marL="342900" indent="-342900">
+              <a:spcAft>
+                <a:spcPts val="800"/>
+              </a:spcAft>
+              <a:buSzPct val="100000"/>
+              <a:buChar char="•"/>
+            </a:pPr>
+            <a:r>
+              <a:rPr lang="en-US" sz="1800" dirty="0">
+                <a:solidFill>
+                  <a:srgbClr val="333333"/>
+                </a:solidFill>
+                <a:latin typeface="Arial" pitchFamily="34" charset="0"/>
+                <a:ea typeface="Arial" pitchFamily="34" charset="-122"/>
+                <a:cs typeface="Arial" pitchFamily="34" charset="-120"/>
+              </a:rPr>
+              <a:t>Selection bias affects study design and results</a:t>
+            </a:r>
+            <a:endParaRPr lang="en-US" sz="1800" dirty="0"/>
+          </a:p>
+          <a:p>
+            <a:pPr marL="342900" indent="-342900">
+              <a:spcAft>
+                <a:spcPts val="800"/>
+              </a:spcAft>
+              <a:buSzPct val="100000"/>
+              <a:buChar char="•"/>
+            </a:pPr>
+            <a:r>
+              <a:rPr lang="en-US" sz="1800" dirty="0">
+                <a:solidFill>
+                  <a:srgbClr val="333333"/>
+                </a:solidFill>
+                <a:latin typeface="Arial" pitchFamily="34" charset="0"/>
+                <a:ea typeface="Arial" pitchFamily="34" charset="-122"/>
+                <a:cs typeface="Arial" pitchFamily="34" charset="-120"/>
+              </a:rPr>
+              <a:t>Need for validation in prospective cohorts</a:t>
             </a:r>
             <a:endParaRPr lang="en-US" sz="1800" dirty="0"/>
           </a:p>
@@ -7711,7 +7676,7 @@
                   <a:srgbClr val="888888"/>
                 </a:solidFill>
               </a:rPr>
-              <a:t>X Zhang, H Cai, W Peng. … and Targeted Therapy. 2026</a:t>
+              <a:t>Chen Rihui, Yang Xiaochuan. Journal for immunotherapy of cancer. 2026-07-01 DOI: 10.1136/jitc-2026-015777</a:t>
             </a:r>
             <a:endParaRPr lang="en-US" sz="800" dirty="0"/>
           </a:p>

--- a/docs/digest-en.pptx
+++ b/docs/digest-en.pptx
@@ -2269,7 +2269,7 @@
                   <a:srgbClr val="888888"/>
                 </a:solidFill>
               </a:rPr>
-              <a:t>2026-06-29 — 2026-07-06</a:t>
+              <a:t>2026-07-06 — 2026-07-13</a:t>
             </a:r>
             <a:endParaRPr lang="en-US" sz="1400" dirty="0"/>
           </a:p>
@@ -2460,7 +2460,7 @@
                   </a:extLst>
                 </a:hlinkClick>
               </a:rPr>
-              <a:t>Balloon-occluded Alternative Infusion of Fragmented Gelatin Particles of TACE for Hepatocellular Carcinoma Refractory to Atezolizumab-Bevacizumab.</a:t>
+              <a:t>The immunological paradox: immune checkpoint inhibitors in liver transplantation.</a:t>
             </a:r>
             <a:endParaRPr lang="en-US" sz="2400" dirty="0"/>
           </a:p>
@@ -2496,7 +2496,7 @@
                   <a:srgbClr val="888888"/>
                 </a:solidFill>
               </a:rPr>
-              <a:t>Anticancer research  ·  Prospective Study  ·  🌏 Asia</a:t>
+              <a:t>International journal of clinical oncology  ·  Review  ·  🌏 Asia</a:t>
             </a:r>
             <a:endParaRPr lang="en-US" sz="1000" dirty="0"/>
           </a:p>
@@ -2539,7 +2539,7 @@
                 <a:ea typeface="Arial" pitchFamily="34" charset="-122"/>
                 <a:cs typeface="Arial" pitchFamily="34" charset="-120"/>
               </a:rPr>
-              <a:t>Study on BOAI-TACE for HCC patients</a:t>
+              <a:t>ICIs transform HCC treatment landscape.</a:t>
             </a:r>
             <a:endParaRPr lang="en-US" sz="1800" dirty="0"/>
           </a:p>
@@ -2560,7 +2560,7 @@
                 <a:ea typeface="Arial" pitchFamily="34" charset="-122"/>
                 <a:cs typeface="Arial" pitchFamily="34" charset="-120"/>
               </a:rPr>
-              <a:t>Primary endpoint: ORR at 8 weeks</a:t>
+              <a:t>LT requires immune tolerance for success.</a:t>
             </a:r>
             <a:endParaRPr lang="en-US" sz="1800" dirty="0"/>
           </a:p>
@@ -2581,7 +2581,7 @@
                 <a:ea typeface="Arial" pitchFamily="34" charset="-122"/>
                 <a:cs typeface="Arial" pitchFamily="34" charset="-120"/>
               </a:rPr>
-              <a:t>60% ORR achieved in treated patients</a:t>
+              <a:t>ICIs disrupt tolerance, enhancing immunity.</a:t>
             </a:r>
             <a:endParaRPr lang="en-US" sz="1800" dirty="0"/>
           </a:p>
@@ -2602,7 +2602,7 @@
                 <a:ea typeface="Arial" pitchFamily="34" charset="-122"/>
                 <a:cs typeface="Arial" pitchFamily="34" charset="-120"/>
               </a:rPr>
-              <a:t>Safety monitored with adverse events</a:t>
+              <a:t>Emerging biomarkers predict ICI rejection.</a:t>
             </a:r>
             <a:endParaRPr lang="en-US" sz="1800" dirty="0"/>
           </a:p>
@@ -2623,7 +2623,7 @@
                 <a:ea typeface="Arial" pitchFamily="34" charset="-122"/>
                 <a:cs typeface="Arial" pitchFamily="34" charset="-120"/>
               </a:rPr>
-              <a:t>No significant liver function changes</a:t>
+              <a:t>Ethical concerns in living donor LT.</a:t>
             </a:r>
             <a:endParaRPr lang="en-US" sz="1800" dirty="0"/>
           </a:p>
@@ -2659,7 +2659,7 @@
                   <a:srgbClr val="888888"/>
                 </a:solidFill>
               </a:rPr>
-              <a:t>Hasegawa Naoyuki, Hoshiai Sodai, Yamada Takeshi et al.. Anticancer research. 2026-06-29 DOI: 10.21873/anticanres.18251</a:t>
+              <a:t>Ito Takashi, Okumura Shinya, Sakamoto Katsunori et al.. International journal of clinical oncology. 2026-07-11 DOI: 10.1007/s10147-026-03091-2</a:t>
             </a:r>
             <a:endParaRPr lang="en-US" sz="800" dirty="0"/>
           </a:p>
@@ -2859,7 +2859,7 @@
                   </a:extLst>
                 </a:hlinkClick>
               </a:rPr>
-              <a:t>Anti-angiogenic therapy combined with immune checkpoint blockade mediates CCR7 + CD8 + T-cell entry into HCC through high endothelial venules.</a:t>
+              <a:t>Comparative Effectiveness and Safety of Atezolizumab-Bevacizumab and Durvalumab-Tremelimumab as First-Line Systemic Therapy for Hepatocellular Carcinoma: A Real-World Study.</a:t>
             </a:r>
             <a:endParaRPr lang="en-US" sz="2400" dirty="0"/>
           </a:p>
@@ -2895,7 +2895,7 @@
                   <a:srgbClr val="888888"/>
                 </a:solidFill>
               </a:rPr>
-              <a:t>Hepatology (Baltimore, Md.)  ·  IF 12.9  ·  Basic Research</a:t>
+              <a:t>Journal of gastroenterology and hepatology  ·  Retrospective Study  ·  🌏 Asia</a:t>
             </a:r>
             <a:endParaRPr lang="en-US" sz="1000" dirty="0"/>
           </a:p>
@@ -2938,7 +2938,7 @@
                 <a:ea typeface="Arial" pitchFamily="34" charset="-122"/>
                 <a:cs typeface="Arial" pitchFamily="34" charset="-120"/>
               </a:rPr>
-              <a:t>Anti-angiogenic therapy enhances T-cell infiltration</a:t>
+              <a:t>Atezo/Bev and Durva/Treme are first-line therapies.</a:t>
             </a:r>
             <a:endParaRPr lang="en-US" sz="1800" dirty="0"/>
           </a:p>
@@ -2959,7 +2959,7 @@
                 <a:ea typeface="Arial" pitchFamily="34" charset="-122"/>
                 <a:cs typeface="Arial" pitchFamily="34" charset="-120"/>
               </a:rPr>
-              <a:t>High endothelial venules (HEVs) facilitate lymphocyte entry</a:t>
+              <a:t>Study included 3362 eligible HCC patients.</a:t>
             </a:r>
             <a:endParaRPr lang="en-US" sz="1800" dirty="0"/>
           </a:p>
@@ -2980,7 +2980,7 @@
                 <a:ea typeface="Arial" pitchFamily="34" charset="-122"/>
                 <a:cs typeface="Arial" pitchFamily="34" charset="-120"/>
               </a:rPr>
-              <a:t>CCR7 + CD8 + T cells show cytotoxic potential</a:t>
+              <a:t>Overall survival similar: 14.6 vs. 17.3 months.</a:t>
             </a:r>
             <a:endParaRPr lang="en-US" sz="1800" dirty="0"/>
           </a:p>
@@ -3001,7 +3001,7 @@
                 <a:ea typeface="Arial" pitchFamily="34" charset="-122"/>
                 <a:cs typeface="Arial" pitchFamily="34" charset="-120"/>
               </a:rPr>
-              <a:t>VEGFC and NF-κB pathways promote HEV formation</a:t>
+              <a:t>Atezo/Bev had fewer treatment-requiring irAEs.</a:t>
             </a:r>
             <a:endParaRPr lang="en-US" sz="1800" dirty="0"/>
           </a:p>
@@ -3022,7 +3022,7 @@
                 <a:ea typeface="Arial" pitchFamily="34" charset="-122"/>
                 <a:cs typeface="Arial" pitchFamily="34" charset="-120"/>
               </a:rPr>
-              <a:t>High HEV density correlates with better survival</a:t>
+              <a:t>Safety profiles were broadly comparable.</a:t>
             </a:r>
             <a:endParaRPr lang="en-US" sz="1800" dirty="0"/>
           </a:p>
@@ -3058,7 +3058,7 @@
                   <a:srgbClr val="888888"/>
                 </a:solidFill>
               </a:rPr>
-              <a:t>Tang Lu, Hou Yingwen, Di Tian et al.. Hepatology (Baltimore, Md.). 2026-06-16 DOI: 10.1097/HEP.0000000000001426</a:t>
+              <a:t>Lin Shu Hsien, Wu Jia-Ling, Tsai Ying-Nan et al.. Journal of gastroenterology and hepatology. 2026-07-10 DOI: 10.1111/jgh.70555</a:t>
             </a:r>
             <a:endParaRPr lang="en-US" sz="800" dirty="0"/>
           </a:p>
@@ -3258,7 +3258,7 @@
                   </a:extLst>
                 </a:hlinkClick>
               </a:rPr>
-              <a:t>Cancer-Associated Fibroblasts Promote Tumor Immunosuppression in Hepatocellular Carcinoma via the NNMT-ANGPTL4 Axis.</a:t>
+              <a:t>Survival Outcomes After Liver Resection for Barcelona Clinic Liver Cancer Stage B Hepatocellular Carcinoma Have Improved in the Contemporary Era.</a:t>
             </a:r>
             <a:endParaRPr lang="en-US" sz="2400" dirty="0"/>
           </a:p>
@@ -3294,7 +3294,7 @@
                   <a:srgbClr val="888888"/>
                 </a:solidFill>
               </a:rPr>
-              <a:t>Advanced science (Weinheim, Baden-Wurttemberg, Germany)  ·  Basic Research  ·  🌏 Asia</a:t>
+              <a:t>Hepatology research : the official journal of the Japan Society of Hepatology  ·  Retrospective Study  ·  🌏 Asia</a:t>
             </a:r>
             <a:endParaRPr lang="en-US" sz="1000" dirty="0"/>
           </a:p>
@@ -3337,7 +3337,7 @@
                 <a:ea typeface="Arial" pitchFamily="34" charset="-122"/>
                 <a:cs typeface="Arial" pitchFamily="34" charset="-120"/>
               </a:rPr>
-              <a:t>CAFs drive immunosuppression in HCC.</a:t>
+              <a:t>Liver resection outcomes improved for BCLC-B HCC.</a:t>
             </a:r>
             <a:endParaRPr lang="en-US" sz="1800" dirty="0"/>
           </a:p>
@@ -3358,7 +3358,7 @@
                 <a:ea typeface="Arial" pitchFamily="34" charset="-122"/>
                 <a:cs typeface="Arial" pitchFamily="34" charset="-120"/>
               </a:rPr>
-              <a:t>NNMT regulates ANGPTL4 secretion.</a:t>
+              <a:t>5-year overall survival rose from 44% to 74%.</a:t>
             </a:r>
             <a:endParaRPr lang="en-US" sz="1800" dirty="0"/>
           </a:p>
@@ -3379,49 +3379,7 @@
                 <a:ea typeface="Arial" pitchFamily="34" charset="-122"/>
                 <a:cs typeface="Arial" pitchFamily="34" charset="-120"/>
               </a:rPr>
-              <a:t>ANGPTL4 enhances tumor immune evasion.</a:t>
-            </a:r>
-            <a:endParaRPr lang="en-US" sz="1800" dirty="0"/>
-          </a:p>
-          <a:p>
-            <a:pPr marL="342900" indent="-342900">
-              <a:spcAft>
-                <a:spcPts val="800"/>
-              </a:spcAft>
-              <a:buSzPct val="100000"/>
-              <a:buChar char="•"/>
-            </a:pPr>
-            <a:r>
-              <a:rPr lang="en-US" sz="1800" dirty="0">
-                <a:solidFill>
-                  <a:srgbClr val="333333"/>
-                </a:solidFill>
-                <a:latin typeface="Arial" pitchFamily="34" charset="0"/>
-                <a:ea typeface="Arial" pitchFamily="34" charset="-122"/>
-                <a:cs typeface="Arial" pitchFamily="34" charset="-120"/>
-              </a:rPr>
-              <a:t>Targeting NNMT-ANGPTL4 restores T-cell activity.</a:t>
-            </a:r>
-            <a:endParaRPr lang="en-US" sz="1800" dirty="0"/>
-          </a:p>
-          <a:p>
-            <a:pPr marL="342900" indent="-342900">
-              <a:spcAft>
-                <a:spcPts val="800"/>
-              </a:spcAft>
-              <a:buSzPct val="100000"/>
-              <a:buChar char="•"/>
-            </a:pPr>
-            <a:r>
-              <a:rPr lang="en-US" sz="1800" dirty="0">
-                <a:solidFill>
-                  <a:srgbClr val="333333"/>
-                </a:solidFill>
-                <a:latin typeface="Arial" pitchFamily="34" charset="0"/>
-                <a:ea typeface="Arial" pitchFamily="34" charset="-122"/>
-                <a:cs typeface="Arial" pitchFamily="34" charset="-120"/>
-              </a:rPr>
-              <a:t>Combination therapy improves anti-PD-L1 efficacy.</a:t>
+              <a:t>Postrecurrence management shifted towards new therapies.</a:t>
             </a:r>
             <a:endParaRPr lang="en-US" sz="1800" dirty="0"/>
           </a:p>
@@ -3457,7 +3415,7 @@
                   <a:srgbClr val="888888"/>
                 </a:solidFill>
               </a:rPr>
-              <a:t>Lu Shounan, Ke Shanjia, Yu Hongjun et al.. Advanced science (Weinheim, Baden-Wurttemberg, Germany). 2026-07-03 DOI: 10.1002/advs.202521418</a:t>
+              <a:t>Yamamoto Yoichi, Asahi Yoh, Shichi Shunsuke et al.. Hepatology research : the official journal of the Japan Society of Hepatology. 2026-07-09 DOI: 10.1111/hepr.70240</a:t>
             </a:r>
             <a:endParaRPr lang="en-US" sz="800" dirty="0"/>
           </a:p>
@@ -3648,7 +3606,7 @@
                   <a:srgbClr val="FFFFFF"/>
                 </a:solidFill>
               </a:rPr>
-              <a:t>### 綜合啟示（Overall Insights）</a:t>
+              <a:t>### 綜合啟示 (Overall Insights)</a:t>
             </a:r>
             <a:endParaRPr lang="en-US" sz="1200" dirty="0"/>
           </a:p>
@@ -3674,7 +3632,7 @@
                   <a:srgbClr val="FFFFFF"/>
                 </a:solidFill>
               </a:rPr>
-              <a:t>1. **免疫治療的潛力**  </a:t>
+              <a:t>1. **免疫療法的潛力與挑戰**  </a:t>
             </a:r>
             <a:endParaRPr lang="en-US" sz="1200" dirty="0"/>
           </a:p>
@@ -3691,7 +3649,7 @@
                   <a:srgbClr val="FFFFFF"/>
                 </a:solidFill>
               </a:rPr>
-              <a:t>   Immunotherapy, particularly immune checkpoint inhibitors (ICIs), has shown promising results in downstaging intermediate and advanced hepatocellular carcinoma (HCC), potentially expanding eligibility for liver transplantation.  </a:t>
+              <a:t>   The integration of immune checkpoint inhibitors (ICIs) has revolutionized the treatment landscape for advanced hepatocellular carcinoma (HCC), yet challenges such as primary resistance and limited durability of responses remain significant hurdles.  </a:t>
             </a:r>
             <a:endParaRPr lang="en-US" sz="1200" dirty="0"/>
           </a:p>
@@ -3708,7 +3666,7 @@
                   <a:srgbClr val="FFFFFF"/>
                 </a:solidFill>
               </a:rPr>
-              <a:t>   免疫治療，特別是免疫檢查點抑制劑（ICIs），在下調中晚期肝細胞癌（HCC）方面顯示出良好的潛力，可能擴大肝臟移植的適應症。</a:t>
+              <a:t>   免疫檢查點抑制劑（ICIs）的整合已徹底改變了晚期肝細胞癌（HCC）的治療格局，但初級耐藥性和反應持久性有限等挑戰仍然是重大障礙。</a:t>
             </a:r>
             <a:endParaRPr lang="en-US" sz="1200" dirty="0"/>
           </a:p>
@@ -3734,7 +3692,7 @@
                   <a:srgbClr val="FFFFFF"/>
                 </a:solidFill>
               </a:rPr>
-              <a:t>2. **多重療法的協同效應**  </a:t>
+              <a:t>2. **表觀遺傳療法的興起**  </a:t>
             </a:r>
             <a:endParaRPr lang="en-US" sz="1200" dirty="0"/>
           </a:p>
@@ -3751,7 +3709,7 @@
                   <a:srgbClr val="FFFFFF"/>
                 </a:solidFill>
               </a:rPr>
-              <a:t>   The combination of ICIs with locoregional therapies and other agents, such as tyrosine kinase inhibitors (TKIs) and radiotherapy, may enhance therapeutic efficacy in HCC.  </a:t>
+              <a:t>   Emerging epigenetic therapies present new avenues for HCC treatment, particularly in overcoming resistance mechanisms associated with conventional therapies.  </a:t>
             </a:r>
             <a:endParaRPr lang="en-US" sz="1200" dirty="0"/>
           </a:p>
@@ -3768,7 +3726,7 @@
                   <a:srgbClr val="FFFFFF"/>
                 </a:solidFill>
               </a:rPr>
-              <a:t>   將ICIs與區域性治療及其他藥物（如酪氨酸激酶抑制劑（TKIs）和放射治療）結合，可能提高HCC的治療效果。</a:t>
+              <a:t>   新興的表觀遺傳療法為HCC治療提供了新的途徑，特別是在克服與傳統療法相關的耐藥機制方面。</a:t>
             </a:r>
             <a:endParaRPr lang="en-US" sz="1200" dirty="0"/>
           </a:p>
@@ -3794,7 +3752,7 @@
                   <a:srgbClr val="FFFFFF"/>
                 </a:solidFill>
               </a:rPr>
-              <a:t>3. **患者選擇的關鍵性**  </a:t>
+              <a:t>3. **局部治療與全身療法的協同作用**  </a:t>
             </a:r>
             <a:endParaRPr lang="en-US" sz="1200" dirty="0"/>
           </a:p>
@@ -3811,7 +3769,7 @@
                   <a:srgbClr val="FFFFFF"/>
                 </a:solidFill>
               </a:rPr>
-              <a:t>   Real-world studies emphasize the importance of patient selection and stratification based on eligibility criteria, which can significantly influence treatment outcomes in HCC.  </a:t>
+              <a:t>   Combining locoregional therapies, such as transarterial chemoembolization (TACE) and stereotactic body radiotherapy, with systemic therapies like ICIs shows promise in improving patient outcomes.  </a:t>
             </a:r>
             <a:endParaRPr lang="en-US" sz="1200" dirty="0"/>
           </a:p>
@@ -3828,7 +3786,7 @@
                   <a:srgbClr val="FFFFFF"/>
                 </a:solidFill>
               </a:rPr>
-              <a:t>   實際臨床研究強調患者選擇和根據適應症標準進行分層的重要性，這對HCC的治療結果有顯著影響。</a:t>
+              <a:t>   將局部療法（如經動脈化療栓塞（TACE）和立體定向體放射治療）與全身療法（如ICIs）結合在一起，對改善患者預後顯示出希望。</a:t>
             </a:r>
             <a:endParaRPr lang="en-US" sz="1200" dirty="0"/>
           </a:p>
@@ -3854,7 +3812,7 @@
                   <a:srgbClr val="FFFFFF"/>
                 </a:solidFill>
               </a:rPr>
-              <a:t>4. **腫瘤微環境的挑戰**  </a:t>
+              <a:t>4. **生物標誌物的缺乏**  </a:t>
             </a:r>
             <a:endParaRPr lang="en-US" sz="1200" dirty="0"/>
           </a:p>
@@ -3871,7 +3829,7 @@
                   <a:srgbClr val="FFFFFF"/>
                 </a:solidFill>
               </a:rPr>
-              <a:t>   The immunosuppressive tumor microenvironment, driven by cancer-associated fibroblasts and other factors, remains a significant barrier to effective immunotherapy in HCC.  </a:t>
+              <a:t>   The absence of validated predictive biomarkers limits the ability to tailor treatments effectively, underscoring the need for further research in biomarker discovery for HCC.  </a:t>
             </a:r>
             <a:endParaRPr lang="en-US" sz="1200" dirty="0"/>
           </a:p>
@@ -3888,7 +3846,7 @@
                   <a:srgbClr val="FFFFFF"/>
                 </a:solidFill>
               </a:rPr>
-              <a:t>   由癌症相關成纖維細胞及其他因素驅動的免疫抑制腫瘤微環境，仍然是HCC有效免疫治療的一大障礙。</a:t>
+              <a:t>   缺乏經過驗證的預測生物標誌物限制了有效調整治療的能力，突顯了對HCC生物標誌物發現進一步研究的需求。</a:t>
             </a:r>
             <a:endParaRPr lang="en-US" sz="1200" dirty="0"/>
           </a:p>
@@ -3914,7 +3872,7 @@
                   <a:srgbClr val="FFFFFF"/>
                 </a:solidFill>
               </a:rPr>
-              <a:t>5. **未來的生物標記研究**  </a:t>
+              <a:t>5. **多學科合作的重要性**  </a:t>
             </a:r>
             <a:endParaRPr lang="en-US" sz="1200" dirty="0"/>
           </a:p>
@@ -3931,7 +3889,7 @@
                   <a:srgbClr val="FFFFFF"/>
                 </a:solidFill>
               </a:rPr>
-              <a:t>   Advances in immune profiling and biomarker identification may facilitate personalized immunotherapy approaches, improving outcomes for HCC patients.</a:t>
+              <a:t>   Advances in imaging and multidisciplinary approaches are essential for improving surgical outcomes and overall survival in HCC patients.</a:t>
             </a:r>
             <a:endParaRPr lang="en-US" sz="1200" dirty="0"/>
           </a:p>
@@ -4077,7 +4035,7 @@
                   <a:srgbClr val="FFFFFF"/>
                 </a:solidFill>
               </a:rPr>
-              <a:t>免疫剖析和生物標記識別的進展，可能促進個性化免疫治療方法的發展，改善HCC患者的治療結果。</a:t>
+              <a:t>成像技術的進步和多學科方法對改善HCC患者的手術結果和整體生存率至關重要。</a:t>
             </a:r>
             <a:endParaRPr lang="en-US" sz="1200" dirty="0"/>
           </a:p>
@@ -4103,7 +4061,7 @@
                   <a:srgbClr val="FFFFFF"/>
                 </a:solidFill>
               </a:rPr>
-              <a:t>### 未來研究方向（Future Research Directions）</a:t>
+              <a:t>### 未來研究方向 (Future Research Directions)</a:t>
             </a:r>
             <a:endParaRPr lang="en-US" sz="1200" dirty="0"/>
           </a:p>
@@ -4129,7 +4087,7 @@
                   <a:srgbClr val="FFFFFF"/>
                 </a:solidFill>
               </a:rPr>
-              <a:t>1. **探索新型免疫療法**  </a:t>
+              <a:t>1. **耐藥機制的深入研究**  </a:t>
             </a:r>
             <a:endParaRPr lang="en-US" sz="1200" dirty="0"/>
           </a:p>
@@ -4146,7 +4104,7 @@
                   <a:srgbClr val="FFFFFF"/>
                 </a:solidFill>
               </a:rPr>
-              <a:t>   Further studies should investigate novel immunotherapeutic agents and combinations, particularly in the context of advanced HCC and their mechanisms of action.  </a:t>
+              <a:t>   Investigating the molecular mechanisms underlying resistance to ICIs and other therapies is critical for developing strategies to enhance treatment efficacy.  </a:t>
             </a:r>
             <a:endParaRPr lang="en-US" sz="1200" dirty="0"/>
           </a:p>
@@ -4163,7 +4121,7 @@
                   <a:srgbClr val="FFFFFF"/>
                 </a:solidFill>
               </a:rPr>
-              <a:t>   進一步研究應探討新型免疫治療藥物及其組合，特別是在晚期HCC的背景下及其作用機制。</a:t>
+              <a:t>   深入研究ICIs和其他療法耐藥的分子機制對於開發增強治療效果的策略至關重要。</a:t>
             </a:r>
             <a:endParaRPr lang="en-US" sz="1200" dirty="0"/>
           </a:p>
@@ -4189,7 +4147,7 @@
                   <a:srgbClr val="FFFFFF"/>
                 </a:solidFill>
               </a:rPr>
-              <a:t>2. **腫瘤微環境的調節**  </a:t>
+              <a:t>2. **新型生物標誌物的探索**  </a:t>
             </a:r>
             <a:endParaRPr lang="en-US" sz="1200" dirty="0"/>
           </a:p>
@@ -4206,7 +4164,7 @@
                   <a:srgbClr val="FFFFFF"/>
                 </a:solidFill>
               </a:rPr>
-              <a:t>   Research should focus on strategies to modulate the tumor microenvironment to enhance the efficacy of immunotherapies in HCC.  </a:t>
+              <a:t>   Future studies should focus on identifying and validating biomarkers that can predict response to immunotherapy and guide personalized treatment approaches.  </a:t>
             </a:r>
             <a:endParaRPr lang="en-US" sz="1200" dirty="0"/>
           </a:p>
@@ -4223,7 +4181,7 @@
                   <a:srgbClr val="FFFFFF"/>
                 </a:solidFill>
               </a:rPr>
-              <a:t>   研究應集中於調節腫瘤微環境的策略，以提高HCC中免疫治療的療效。</a:t>
+              <a:t>   未來的研究應集中於識別和驗證能預測免疫療法反應的生物標誌物，並指導個性化治療方法。</a:t>
             </a:r>
             <a:endParaRPr lang="en-US" sz="1200" dirty="0"/>
           </a:p>
@@ -4249,7 +4207,7 @@
                   <a:srgbClr val="FFFFFF"/>
                 </a:solidFill>
               </a:rPr>
-              <a:t>3. **生物標記的臨床應用**  </a:t>
+              <a:t>3. **表觀遺傳療法的臨床應用**  </a:t>
             </a:r>
             <a:endParaRPr lang="en-US" sz="1200" dirty="0"/>
           </a:p>
@@ -4266,7 +4224,7 @@
                   <a:srgbClr val="FFFFFF"/>
                 </a:solidFill>
               </a:rPr>
-              <a:t>   The identification and validation of biomarkers that predict response to immunotherapy could lead to more tailored treatment strategies for HCC patients.  </a:t>
+              <a:t>   Clinical trials exploring the efficacy of epigenetic therapies in combination with existing treatments for HCC are necessary to establish their role in therapy.  </a:t>
             </a:r>
             <a:endParaRPr lang="en-US" sz="1200" dirty="0"/>
           </a:p>
@@ -4283,7 +4241,7 @@
                   <a:srgbClr val="FFFFFF"/>
                 </a:solidFill>
               </a:rPr>
-              <a:t>   識別和驗證預測免疫治療反應的生物標記，可能導致對HCC患者更具針對性的治療策略。</a:t>
+              <a:t>   探索表觀遺傳療法與現有HCC治療組合的臨床試驗是必要的，以確立其在治療中的角色。</a:t>
             </a:r>
             <a:endParaRPr lang="en-US" sz="1200" dirty="0"/>
           </a:p>
@@ -4309,7 +4267,7 @@
                   <a:srgbClr val="FFFFFF"/>
                 </a:solidFill>
               </a:rPr>
-              <a:t>4. **長期療效的評估**  </a:t>
+              <a:t>4. **多模態治療策略的發展**  </a:t>
             </a:r>
             <a:endParaRPr lang="en-US" sz="1200" dirty="0"/>
           </a:p>
@@ -4326,7 +4284,7 @@
                   <a:srgbClr val="FFFFFF"/>
                 </a:solidFill>
               </a:rPr>
-              <a:t>   Longitudinal studies are needed to assess the long-term efficacy and safety of combined immunotherapy approaches in HCC.  </a:t>
+              <a:t>   Research should focus on developing multimodal treatment strategies that integrate systemic and locoregional therapies to optimize patient outcomes.  </a:t>
             </a:r>
             <a:endParaRPr lang="en-US" sz="1200" dirty="0"/>
           </a:p>
@@ -4343,7 +4301,7 @@
                   <a:srgbClr val="FFFFFF"/>
                 </a:solidFill>
               </a:rPr>
-              <a:t>   需要進行縱向研究，以評估HCC中聯合免疫治療方法的長期療效和安全性。</a:t>
+              <a:t>   研究應集中於開發整合全身療法和局部療法的多模態治療策略，以優化患者預後。</a:t>
             </a:r>
             <a:endParaRPr lang="en-US" sz="1200" dirty="0"/>
           </a:p>
@@ -4369,7 +4327,7 @@
                   <a:srgbClr val="FFFFFF"/>
                 </a:solidFill>
               </a:rPr>
-              <a:t>5. **多中心臨床試驗的推進**  </a:t>
+              <a:t>5. **長期隨訪與數據收集**  </a:t>
             </a:r>
             <a:endParaRPr lang="en-US" sz="1200" dirty="0"/>
           </a:p>
@@ -4386,7 +4344,7 @@
                   <a:srgbClr val="FFFFFF"/>
                 </a:solidFill>
               </a:rPr>
-              <a:t>   Multi-center clinical trials should be conducted to validate findings across diverse populations and settings, enhancing the generalizability of results.  </a:t>
+              <a:t>   Long-term follow-up studies are essential to assess the durability of responses and overall survival in patients receiving novel therapies for HCC.  </a:t>
             </a:r>
             <a:endParaRPr lang="en-US" sz="1200" dirty="0"/>
           </a:p>
@@ -4403,7 +4361,7 @@
                   <a:srgbClr val="FFFFFF"/>
                 </a:solidFill>
               </a:rPr>
-              <a:t>   應進行多中心臨床試驗，以驗證不同人群和環境中的研究結果，提高結果的普遍適用性。</a:t>
+              <a:t>   長期隨訪研究對於評估接受新療法的HCC患者的反應持久性和整體生存率至關重要。</a:t>
             </a:r>
             <a:endParaRPr lang="en-US" sz="1200" dirty="0"/>
           </a:p>
@@ -4637,7 +4595,7 @@
                 <a:ea typeface="Arial" pitchFamily="34" charset="-122"/>
                 <a:cs typeface="Arial" pitchFamily="34" charset="-120"/>
               </a:rPr>
-              <a:t>Efficacy of liver transplantation after response to atezolizumab-bevacizumab dow…</a:t>
+              <a:t>Epigenetic therapies in hepatocellular carcinoma: emerging clinical tools and ap…</a:t>
             </a:r>
             <a:endParaRPr lang="en-US" sz="1400" dirty="0"/>
           </a:p>
@@ -4674,7 +4632,7 @@
                 <a:ea typeface="Arial" pitchFamily="34" charset="-122"/>
                 <a:cs typeface="Arial" pitchFamily="34" charset="-120"/>
               </a:rPr>
-              <a:t>Outcomes of Patients With Hepatocellular Carcinoma Treated With Durvalumab Plus …</a:t>
+              <a:t>Epigenetic therapies in hepatocellular carcinoma: emerging clinical tools and ap…</a:t>
             </a:r>
             <a:endParaRPr lang="en-US" sz="1400" dirty="0"/>
           </a:p>
@@ -4711,7 +4669,7 @@
                 <a:ea typeface="Arial" pitchFamily="34" charset="-122"/>
                 <a:cs typeface="Arial" pitchFamily="34" charset="-120"/>
               </a:rPr>
-              <a:t>Camrelizumab, a patinib and radiotherapy in locally advanced, unresectable hepat…</a:t>
+              <a:t>Pembrolizumab and stereotactic body radiotherapy combined in advanced hepatocell…</a:t>
             </a:r>
             <a:endParaRPr lang="en-US" sz="1400" dirty="0"/>
           </a:p>
@@ -4748,7 +4706,7 @@
                 <a:ea typeface="Arial" pitchFamily="34" charset="-122"/>
                 <a:cs typeface="Arial" pitchFamily="34" charset="-120"/>
               </a:rPr>
-              <a:t>Neoadjuvant Danburstotug (IMC-001) therapy in gastric, esophageal, and hepatocel…</a:t>
+              <a:t>Hepatocellular carcinoma: new therapies on the horizon.</a:t>
             </a:r>
             <a:endParaRPr lang="en-US" sz="1400" dirty="0"/>
           </a:p>
@@ -4785,7 +4743,7 @@
                 <a:ea typeface="Arial" pitchFamily="34" charset="-122"/>
                 <a:cs typeface="Arial" pitchFamily="34" charset="-120"/>
               </a:rPr>
-              <a:t>Pembrolizumab and stereotactic body radiotherapy combined in advanced hepatocell…</a:t>
+              <a:t>UDP-glucuronate decarboxylase 1 promotes tumor immune evasion by accelerating KM…</a:t>
             </a:r>
             <a:endParaRPr lang="en-US" sz="1400" dirty="0"/>
           </a:p>
@@ -4822,7 +4780,7 @@
                 <a:ea typeface="Arial" pitchFamily="34" charset="-122"/>
                 <a:cs typeface="Arial" pitchFamily="34" charset="-120"/>
               </a:rPr>
-              <a:t>Complementary evaluation of phase III immunotherapy trials in advanced HCC using…</a:t>
+              <a:t>Long-term follow-up of a phase 1/2 trial of anti-GDF-15 antibody visugromab plus…</a:t>
             </a:r>
             <a:endParaRPr lang="en-US" sz="1400" dirty="0"/>
           </a:p>
@@ -4859,7 +4817,7 @@
                 <a:ea typeface="Arial" pitchFamily="34" charset="-122"/>
                 <a:cs typeface="Arial" pitchFamily="34" charset="-120"/>
               </a:rPr>
-              <a:t>Systemic immune profiling in hepatocellular carcinoma: navigating etiological he…</a:t>
+              <a:t>… plus transarterial chemoembolization and PD-1 inhibitors as conversion therapi…</a:t>
             </a:r>
             <a:endParaRPr lang="en-US" sz="1400" dirty="0"/>
           </a:p>
@@ -4896,7 +4854,7 @@
                 <a:ea typeface="Arial" pitchFamily="34" charset="-122"/>
                 <a:cs typeface="Arial" pitchFamily="34" charset="-120"/>
               </a:rPr>
-              <a:t>Balloon-occluded Alternative Infusion of Fragmented Gelatin Particles of TACE fo…</a:t>
+              <a:t>The immunological paradox: immune checkpoint inhibitors in liver transplantation…</a:t>
             </a:r>
             <a:endParaRPr lang="en-US" sz="1400" dirty="0"/>
           </a:p>
@@ -4933,7 +4891,7 @@
                 <a:ea typeface="Arial" pitchFamily="34" charset="-122"/>
                 <a:cs typeface="Arial" pitchFamily="34" charset="-120"/>
               </a:rPr>
-              <a:t>Anti-angiogenic therapy combined with immune checkpoint blockade mediates CCR7 +…</a:t>
+              <a:t>Comparative Effectiveness and Safety of Atezolizumab-Bevacizumab and Durvalumab-…</a:t>
             </a:r>
             <a:endParaRPr lang="en-US" sz="1400" dirty="0"/>
           </a:p>
@@ -4970,7 +4928,7 @@
                 <a:ea typeface="Arial" pitchFamily="34" charset="-122"/>
                 <a:cs typeface="Arial" pitchFamily="34" charset="-120"/>
               </a:rPr>
-              <a:t>Cancer-Associated Fibroblasts Promote Tumor Immunosuppression in Hepatocellular …</a:t>
+              <a:t>Survival Outcomes After Liver Resection for Barcelona Clinic Liver Cancer Stage …</a:t>
             </a:r>
             <a:endParaRPr lang="en-US" sz="1400" dirty="0"/>
           </a:p>
@@ -5125,7 +5083,7 @@
                   </a:extLst>
                 </a:hlinkClick>
               </a:rPr>
-              <a:t>Efficacy of liver transplantation after response to atezolizumab-bevacizumab downstaging of intermediate and advanced hepatocellular carcinoma (ImmunoXXL).</a:t>
+              <a:t>Epigenetic therapies in hepatocellular carcinoma: emerging clinical tools and applications.</a:t>
             </a:r>
             <a:endParaRPr lang="en-US" sz="2400" dirty="0"/>
           </a:p>
@@ -5161,7 +5119,7 @@
                   <a:srgbClr val="888888"/>
                 </a:solidFill>
               </a:rPr>
-              <a:t>Journal of hepatology  ·  IF 25.7  ·  RCT Phase 2</a:t>
+              <a:t>Gut  ·  IF 24.5  ·  Review</a:t>
             </a:r>
             <a:endParaRPr lang="en-US" sz="1000" dirty="0"/>
           </a:p>
@@ -5204,7 +5162,7 @@
                 <a:ea typeface="Arial" pitchFamily="34" charset="-122"/>
                 <a:cs typeface="Arial" pitchFamily="34" charset="-120"/>
               </a:rPr>
-              <a:t>Liver transplantation can be curative for HCC.</a:t>
+              <a:t>HCC is a leading cause of cancer death.</a:t>
             </a:r>
             <a:endParaRPr lang="en-US" sz="1800" dirty="0"/>
           </a:p>
@@ -5225,7 +5183,7 @@
                 <a:ea typeface="Arial" pitchFamily="34" charset="-122"/>
                 <a:cs typeface="Arial" pitchFamily="34" charset="-120"/>
               </a:rPr>
-              <a:t>Atezolizumab-bevacizumab downstaged advanced HCC.</a:t>
+              <a:t>Current therapies show limited efficacy in advanced stages.</a:t>
             </a:r>
             <a:endParaRPr lang="en-US" sz="1800" dirty="0"/>
           </a:p>
@@ -5246,7 +5204,7 @@
                 <a:ea typeface="Arial" pitchFamily="34" charset="-122"/>
                 <a:cs typeface="Arial" pitchFamily="34" charset="-120"/>
               </a:rPr>
-              <a:t>26% of patients achieved transplant eligibility.</a:t>
+              <a:t>Epigenetic dysregulation drives tumor progression.</a:t>
             </a:r>
             <a:endParaRPr lang="en-US" sz="1800" dirty="0"/>
           </a:p>
@@ -5267,7 +5225,7 @@
                 <a:ea typeface="Arial" pitchFamily="34" charset="-122"/>
                 <a:cs typeface="Arial" pitchFamily="34" charset="-120"/>
               </a:rPr>
-              <a:t>Two-year survival rates were promising.</a:t>
+              <a:t>Emerging 'epidrugs' show promise in clinical trials.</a:t>
             </a:r>
             <a:endParaRPr lang="en-US" sz="1800" dirty="0"/>
           </a:p>
@@ -5288,7 +5246,7 @@
                 <a:ea typeface="Arial" pitchFamily="34" charset="-122"/>
                 <a:cs typeface="Arial" pitchFamily="34" charset="-120"/>
               </a:rPr>
-              <a:t>Immune monitoring linked tumor response to rejection.</a:t>
+              <a:t>Targeting epigenetics may enhance existing therapies.</a:t>
             </a:r>
             <a:endParaRPr lang="en-US" sz="1800" dirty="0"/>
           </a:p>
@@ -5324,7 +5282,7 @@
                   <a:srgbClr val="888888"/>
                 </a:solidFill>
               </a:rPr>
-              <a:t>Bhoori Sherrie, Rivoltini Licia, Pinato David J et al.. Journal of hepatology. 2026-06-15 DOI: 10.1016/j.jhep.2026.02.019</a:t>
+              <a:t>Bueloni Barbara, G Fernandez-Barrena Maite, Fiore Esteban et al.. Gut. 2026-07-08 DOI: 10.1136/gutjnl-2025-336317</a:t>
             </a:r>
             <a:endParaRPr lang="en-US" sz="800" dirty="0"/>
           </a:p>
@@ -5524,7 +5482,7 @@
                   </a:extLst>
                 </a:hlinkClick>
               </a:rPr>
-              <a:t>Outcomes of Patients With Hepatocellular Carcinoma Treated With Durvalumab Plus Tremelimumab in Real-World Clinical Practice Who Met or Did Not Meet the Inclusion Criteria for the Phase 3 HIMALAYA Trial.</a:t>
+              <a:t>Epigenetic therapies in hepatocellular carcinoma: emerging clinical tools and applications</a:t>
             </a:r>
             <a:endParaRPr lang="en-US" sz="2400" dirty="0"/>
           </a:p>
@@ -5560,7 +5518,7 @@
                   <a:srgbClr val="888888"/>
                 </a:solidFill>
               </a:rPr>
-              <a:t>Journal of gastroenterology and hepatology  ·  RCT Phase 3  ·  🌏 Asia</a:t>
+              <a:t>Gut  ·  IF 24.5</a:t>
             </a:r>
             <a:endParaRPr lang="en-US" sz="1000" dirty="0"/>
           </a:p>
@@ -5603,7 +5561,7 @@
                 <a:ea typeface="Arial" pitchFamily="34" charset="-122"/>
                 <a:cs typeface="Arial" pitchFamily="34" charset="-120"/>
               </a:rPr>
-              <a:t>Study on HCC patients treated with Dur/Tre</a:t>
+              <a:t>Epigenetic therapies show promise in HCC.</a:t>
             </a:r>
             <a:endParaRPr lang="en-US" sz="1800" dirty="0"/>
           </a:p>
@@ -5624,7 +5582,7 @@
                 <a:ea typeface="Arial" pitchFamily="34" charset="-122"/>
                 <a:cs typeface="Arial" pitchFamily="34" charset="-120"/>
               </a:rPr>
-              <a:t>412 patients enrolled from 30 institutions</a:t>
+              <a:t>Combination with ICIs enhances treatment efficacy.</a:t>
             </a:r>
             <a:endParaRPr lang="en-US" sz="1800" dirty="0"/>
           </a:p>
@@ -5645,49 +5603,7 @@
                 <a:ea typeface="Arial" pitchFamily="34" charset="-122"/>
                 <a:cs typeface="Arial" pitchFamily="34" charset="-120"/>
               </a:rPr>
-              <a:t>HIMALAYA group had better PFS and OS</a:t>
-            </a:r>
-            <a:endParaRPr lang="en-US" sz="1800" dirty="0"/>
-          </a:p>
-          <a:p>
-            <a:pPr marL="342900" indent="-342900">
-              <a:spcAft>
-                <a:spcPts val="800"/>
-              </a:spcAft>
-              <a:buSzPct val="100000"/>
-              <a:buChar char="•"/>
-            </a:pPr>
-            <a:r>
-              <a:rPr lang="en-US" sz="1800" dirty="0">
-                <a:solidFill>
-                  <a:srgbClr val="333333"/>
-                </a:solidFill>
-                <a:latin typeface="Arial" pitchFamily="34" charset="0"/>
-                <a:ea typeface="Arial" pitchFamily="34" charset="-122"/>
-                <a:cs typeface="Arial" pitchFamily="34" charset="-120"/>
-              </a:rPr>
-              <a:t>Independent predictors include BMI and portal vein invasion</a:t>
-            </a:r>
-            <a:endParaRPr lang="en-US" sz="1800" dirty="0"/>
-          </a:p>
-          <a:p>
-            <a:pPr marL="342900" indent="-342900">
-              <a:spcAft>
-                <a:spcPts val="800"/>
-              </a:spcAft>
-              <a:buSzPct val="100000"/>
-              <a:buChar char="•"/>
-            </a:pPr>
-            <a:r>
-              <a:rPr lang="en-US" sz="1800" dirty="0">
-                <a:solidFill>
-                  <a:srgbClr val="333333"/>
-                </a:solidFill>
-                <a:latin typeface="Arial" pitchFamily="34" charset="0"/>
-                <a:ea typeface="Arial" pitchFamily="34" charset="-122"/>
-                <a:cs typeface="Arial" pitchFamily="34" charset="-120"/>
-              </a:rPr>
-              <a:t>Endocrine dysfunction more common in HIMALAYA group</a:t>
+              <a:t>Emerging tools for personalized medicine in HCC.</a:t>
             </a:r>
             <a:endParaRPr lang="en-US" sz="1800" dirty="0"/>
           </a:p>
@@ -5723,7 +5639,7 @@
                   <a:srgbClr val="888888"/>
                 </a:solidFill>
               </a:rPr>
-              <a:t>Matono Tomomitsu, Tada Toshifumi, Hiraoka Atsushi et al.. Journal of gastroenterology and hepatology. 2026-07-02 DOI: 10.1111/jgh.70422</a:t>
+              <a:t>B Bueloni, MG Fernandez-Barrena, E Fiore. Gut. 2026</a:t>
             </a:r>
             <a:endParaRPr lang="en-US" sz="800" dirty="0"/>
           </a:p>
@@ -5923,7 +5839,7 @@
                   </a:extLst>
                 </a:hlinkClick>
               </a:rPr>
-              <a:t>Camrelizumab, a patinib and radiotherapy in locally advanced, unresectable hepatocellular carcinoma: a phase 2 study.</a:t>
+              <a:t>Pembrolizumab and stereotactic body radiotherapy combined in advanced hepatocellular carcinoma post sorafenib–A phase II trial (PEMRAD)</a:t>
             </a:r>
             <a:endParaRPr lang="en-US" sz="2400" dirty="0"/>
           </a:p>
@@ -5959,7 +5875,7 @@
                   <a:srgbClr val="888888"/>
                 </a:solidFill>
               </a:rPr>
-              <a:t>Clinical cancer research : an official journal of the American Association for Cancer Research  ·  IF 11.5  ·  RCT Phase 2</a:t>
+              <a:t>JHEP Reports  ·  IF 7.8  ·  RCT Phase 2</a:t>
             </a:r>
             <a:endParaRPr lang="en-US" sz="1000" dirty="0"/>
           </a:p>
@@ -6002,7 +5918,7 @@
                 <a:ea typeface="Arial" pitchFamily="34" charset="-122"/>
                 <a:cs typeface="Arial" pitchFamily="34" charset="-120"/>
               </a:rPr>
-              <a:t>Study evaluated camrelizumab, apatinib, and IMRT</a:t>
+              <a:t>Combination of pembrolizumab and SBRT</a:t>
             </a:r>
             <a:endParaRPr lang="en-US" sz="1800" dirty="0"/>
           </a:p>
@@ -6023,7 +5939,7 @@
                 <a:ea typeface="Arial" pitchFamily="34" charset="-122"/>
                 <a:cs typeface="Arial" pitchFamily="34" charset="-120"/>
               </a:rPr>
-              <a:t>84.1% objective response rate observed</a:t>
+              <a:t>Phase II trial in advanced HCC</a:t>
             </a:r>
             <a:endParaRPr lang="en-US" sz="1800" dirty="0"/>
           </a:p>
@@ -6044,7 +5960,7 @@
                 <a:ea typeface="Arial" pitchFamily="34" charset="-122"/>
                 <a:cs typeface="Arial" pitchFamily="34" charset="-120"/>
               </a:rPr>
-              <a:t>Median PFS was 13.8 months</a:t>
+              <a:t>Post-sorafenib treatment evaluation</a:t>
             </a:r>
             <a:endParaRPr lang="en-US" sz="1800" dirty="0"/>
           </a:p>
@@ -6065,7 +5981,7 @@
                 <a:ea typeface="Arial" pitchFamily="34" charset="-122"/>
                 <a:cs typeface="Arial" pitchFamily="34" charset="-120"/>
               </a:rPr>
-              <a:t>Grade 3-4 adverse events in 81.8% patients</a:t>
+              <a:t>Potential to enhance immune response</a:t>
             </a:r>
             <a:endParaRPr lang="en-US" sz="1800" dirty="0"/>
           </a:p>
@@ -6086,7 +6002,7 @@
                 <a:ea typeface="Arial" pitchFamily="34" charset="-122"/>
                 <a:cs typeface="Arial" pitchFamily="34" charset="-120"/>
               </a:rPr>
-              <a:t>TP53 mutation linked to worse outcomes</a:t>
+              <a:t>Safety and efficacy assessment conducted</a:t>
             </a:r>
             <a:endParaRPr lang="en-US" sz="1800" dirty="0"/>
           </a:p>
@@ -6122,7 +6038,7 @@
                   <a:srgbClr val="888888"/>
                 </a:solidFill>
               </a:rPr>
-              <a:t>Wang Hongzhi, Wang Kun, Zheng Xuan et al.. Clinical cancer research : an official journal of the American Association for Cancer Research. 2026-06-30 DOI: 10.1158/1078-0432.CCR-26-1352</a:t>
+              <a:t>GM O'Kane, A Mesci, RW Jang. JHEP Reports. 2026</a:t>
             </a:r>
             <a:endParaRPr lang="en-US" sz="800" dirty="0"/>
           </a:p>
@@ -6322,7 +6238,7 @@
                   </a:extLst>
                 </a:hlinkClick>
               </a:rPr>
-              <a:t>Neoadjuvant Danburstotug (IMC-001) therapy in gastric, esophageal, and hepatocellular carcinoma: the NeoChance phase II study.</a:t>
+              <a:t>Hepatocellular carcinoma: new therapies on the horizon.</a:t>
             </a:r>
             <a:endParaRPr lang="en-US" sz="2400" dirty="0"/>
           </a:p>
@@ -6358,7 +6274,7 @@
                   <a:srgbClr val="888888"/>
                 </a:solidFill>
               </a:rPr>
-              <a:t>NPJ precision oncology  ·  RCT Phase 2  ·  🌏 Asia</a:t>
+              <a:t>Expert review of gastroenterology &amp; hepatology  ·  Prospective Study  ·  🌏 Asia</a:t>
             </a:r>
             <a:endParaRPr lang="en-US" sz="1000" dirty="0"/>
           </a:p>
@@ -6401,7 +6317,7 @@
                 <a:ea typeface="Arial" pitchFamily="34" charset="-122"/>
                 <a:cs typeface="Arial" pitchFamily="34" charset="-120"/>
               </a:rPr>
-              <a:t>Neoadjuvant therapy with danburstotug (IMC-001) evaluated.</a:t>
+              <a:t>ICIs are frontline for advanced HCC.</a:t>
             </a:r>
             <a:endParaRPr lang="en-US" sz="1800" dirty="0"/>
           </a:p>
@@ -6422,7 +6338,7 @@
                 <a:ea typeface="Arial" pitchFamily="34" charset="-122"/>
                 <a:cs typeface="Arial" pitchFamily="34" charset="-120"/>
               </a:rPr>
-              <a:t>Primary endpoint not met; MPR in 4.2% patients.</a:t>
+              <a:t>Emerging therapies include new systemic agents.</a:t>
             </a:r>
             <a:endParaRPr lang="en-US" sz="1800" dirty="0"/>
           </a:p>
@@ -6443,7 +6359,7 @@
                 <a:ea typeface="Arial" pitchFamily="34" charset="-122"/>
                 <a:cs typeface="Arial" pitchFamily="34" charset="-120"/>
               </a:rPr>
-              <a:t>Pathologic regression observed in 22.9% patients.</a:t>
+              <a:t>Neoadjuvant ICI regimens show promising responses.</a:t>
             </a:r>
             <a:endParaRPr lang="en-US" sz="1800" dirty="0"/>
           </a:p>
@@ -6464,7 +6380,7 @@
                 <a:ea typeface="Arial" pitchFamily="34" charset="-122"/>
                 <a:cs typeface="Arial" pitchFamily="34" charset="-120"/>
               </a:rPr>
-              <a:t>Treatment well tolerated with few adverse events.</a:t>
+              <a:t>Combination therapies improve progression-free survival.</a:t>
             </a:r>
             <a:endParaRPr lang="en-US" sz="1800" dirty="0"/>
           </a:p>
@@ -6485,7 +6401,7 @@
                 <a:ea typeface="Arial" pitchFamily="34" charset="-122"/>
                 <a:cs typeface="Arial" pitchFamily="34" charset="-120"/>
               </a:rPr>
-              <a:t>Immune profiling showed cancer-specific remodeling.</a:t>
+              <a:t>Personalized approaches in locoregional treatments.</a:t>
             </a:r>
             <a:endParaRPr lang="en-US" sz="1800" dirty="0"/>
           </a:p>
@@ -6521,7 +6437,7 @@
                   <a:srgbClr val="888888"/>
                 </a:solidFill>
               </a:rPr>
-              <a:t>Bang Yeong Hak, Kang Dawon, Lee Seungwon et al.. NPJ precision oncology. 2026-07-03 DOI: 10.1038/s41698-026-01571-2</a:t>
+              <a:t>Yuza Kizuki, Akabane Miho, Kawashima Jun et al.. Expert review of gastroenterology &amp; hepatology. 2026-07-10 DOI: 10.1080/17474124.2026.2702585</a:t>
             </a:r>
             <a:endParaRPr lang="en-US" sz="800" dirty="0"/>
           </a:p>
@@ -6721,7 +6637,7 @@
                   </a:extLst>
                 </a:hlinkClick>
               </a:rPr>
-              <a:t>Pembrolizumab and stereotactic body radiotherapy combined in advanced hepatocellular carcinoma post sorafenib–A phase II trial (PEMRAD)</a:t>
+              <a:t>UDP-glucuronate decarboxylase 1 promotes tumor immune evasion by accelerating KMT2D loss in hepatocellular carcinoma.</a:t>
             </a:r>
             <a:endParaRPr lang="en-US" sz="2400" dirty="0"/>
           </a:p>
@@ -6757,7 +6673,7 @@
                   <a:srgbClr val="888888"/>
                 </a:solidFill>
               </a:rPr>
-              <a:t>JHEP Reports  ·  IF 7.8  ·  RCT Phase 2</a:t>
+              <a:t>Journal for immunotherapy of cancer  ·  IF 10.9  ·  Basic Research</a:t>
             </a:r>
             <a:endParaRPr lang="en-US" sz="1000" dirty="0"/>
           </a:p>
@@ -6800,7 +6716,7 @@
                 <a:ea typeface="Arial" pitchFamily="34" charset="-122"/>
                 <a:cs typeface="Arial" pitchFamily="34" charset="-120"/>
               </a:rPr>
-              <a:t>Combination of pembrolizumab and SBRT</a:t>
+              <a:t>UXS1 identified as immune evasion driver</a:t>
             </a:r>
             <a:endParaRPr lang="en-US" sz="1800" dirty="0"/>
           </a:p>
@@ -6821,7 +6737,7 @@
                 <a:ea typeface="Arial" pitchFamily="34" charset="-122"/>
                 <a:cs typeface="Arial" pitchFamily="34" charset="-120"/>
               </a:rPr>
-              <a:t>Phase II trial for advanced HCC</a:t>
+              <a:t>Promotes KMT2D degradation and PD-L1 upregulation</a:t>
             </a:r>
             <a:endParaRPr lang="en-US" sz="1800" dirty="0"/>
           </a:p>
@@ -6842,7 +6758,49 @@
                 <a:ea typeface="Arial" pitchFamily="34" charset="-122"/>
                 <a:cs typeface="Arial" pitchFamily="34" charset="-120"/>
               </a:rPr>
-              <a:t>Post-sorafenib treatment evaluation</a:t>
+              <a:t>High UXS1 linked to poor CD8+ T-cell response</a:t>
+            </a:r>
+            <a:endParaRPr lang="en-US" sz="1800" dirty="0"/>
+          </a:p>
+          <a:p>
+            <a:pPr marL="342900" indent="-342900">
+              <a:spcAft>
+                <a:spcPts val="800"/>
+              </a:spcAft>
+              <a:buSzPct val="100000"/>
+              <a:buChar char="•"/>
+            </a:pPr>
+            <a:r>
+              <a:rPr lang="en-US" sz="1800" dirty="0">
+                <a:solidFill>
+                  <a:srgbClr val="333333"/>
+                </a:solidFill>
+                <a:latin typeface="Arial" pitchFamily="34" charset="0"/>
+                <a:ea typeface="Arial" pitchFamily="34" charset="-122"/>
+                <a:cs typeface="Arial" pitchFamily="34" charset="-120"/>
+              </a:rPr>
+              <a:t>Knockout enhances anti-PD-1 therapy efficacy</a:t>
+            </a:r>
+            <a:endParaRPr lang="en-US" sz="1800" dirty="0"/>
+          </a:p>
+          <a:p>
+            <a:pPr marL="342900" indent="-342900">
+              <a:spcAft>
+                <a:spcPts val="800"/>
+              </a:spcAft>
+              <a:buSzPct val="100000"/>
+              <a:buChar char="•"/>
+            </a:pPr>
+            <a:r>
+              <a:rPr lang="en-US" sz="1800" dirty="0">
+                <a:solidFill>
+                  <a:srgbClr val="333333"/>
+                </a:solidFill>
+                <a:latin typeface="Arial" pitchFamily="34" charset="0"/>
+                <a:ea typeface="Arial" pitchFamily="34" charset="-122"/>
+                <a:cs typeface="Arial" pitchFamily="34" charset="-120"/>
+              </a:rPr>
+              <a:t>Novel UXS1-KMT2D-CEBPB-PD-L1 signaling axis</a:t>
             </a:r>
             <a:endParaRPr lang="en-US" sz="1800" dirty="0"/>
           </a:p>
@@ -6878,7 +6836,7 @@
                   <a:srgbClr val="888888"/>
                 </a:solidFill>
               </a:rPr>
-              <a:t>GM O'Kane, A Mesci, RW Jang. JHEP Reports. 2026</a:t>
+              <a:t>Zhang Jiwei, Li Yuan, Chen Jiafeng et al.. Journal for immunotherapy of cancer. 2026-07-08 DOI: 10.1136/jitc-2025-013948</a:t>
             </a:r>
             <a:endParaRPr lang="en-US" sz="800" dirty="0"/>
           </a:p>
@@ -7078,7 +7036,7 @@
                   </a:extLst>
                 </a:hlinkClick>
               </a:rPr>
-              <a:t>Complementary evaluation of phase III immunotherapy trials in advanced HCC using the survival-inferred fragility index.</a:t>
+              <a:t>Long-term follow-up of a phase 1/2 trial of anti-GDF-15 antibody visugromab plus anti-PD-1 antibody nivolumab in anti-PD-1/-L1 relapsed/refractory solid tumors.</a:t>
             </a:r>
             <a:endParaRPr lang="en-US" sz="2400" dirty="0"/>
           </a:p>
@@ -7114,7 +7072,7 @@
                   <a:srgbClr val="888888"/>
                 </a:solidFill>
               </a:rPr>
-              <a:t>Digestive and liver disease : official journal of the Italian Society of Gastroenterology and the Italian Association for the Study of the Liver  ·  RCT Phase 3</a:t>
+              <a:t>Journal of hematology &amp; oncology  ·  RCT Phase 2</a:t>
             </a:r>
             <a:endParaRPr lang="en-US" sz="1000" dirty="0"/>
           </a:p>
@@ -7157,7 +7115,7 @@
                 <a:ea typeface="Arial" pitchFamily="34" charset="-122"/>
                 <a:cs typeface="Arial" pitchFamily="34" charset="-120"/>
               </a:rPr>
-              <a:t>HCC treatment evolving with ICIs and TKIs.</a:t>
+              <a:t>Visugromab plus nivolumab evaluated in trial.</a:t>
             </a:r>
             <a:endParaRPr lang="en-US" sz="1800" dirty="0"/>
           </a:p>
@@ -7178,7 +7136,7 @@
                 <a:ea typeface="Arial" pitchFamily="34" charset="-122"/>
                 <a:cs typeface="Arial" pitchFamily="34" charset="-120"/>
               </a:rPr>
-              <a:t>SIFI quantifies trial outcome stability.</a:t>
+              <a:t>Objective response rates: 14.3% for HCC.</a:t>
             </a:r>
             <a:endParaRPr lang="en-US" sz="1800" dirty="0"/>
           </a:p>
@@ -7199,7 +7157,7 @@
                 <a:ea typeface="Arial" pitchFamily="34" charset="-122"/>
                 <a:cs typeface="Arial" pitchFamily="34" charset="-120"/>
               </a:rPr>
-              <a:t>Six phase III trials analyzed for SIFI.</a:t>
+              <a:t>Median duration of response was 19.4 months.</a:t>
             </a:r>
             <a:endParaRPr lang="en-US" sz="1800" dirty="0"/>
           </a:p>
@@ -7220,7 +7178,7 @@
                 <a:ea typeface="Arial" pitchFamily="34" charset="-122"/>
                 <a:cs typeface="Arial" pitchFamily="34" charset="-120"/>
               </a:rPr>
-              <a:t>Median SIFI indicates low trial robustness.</a:t>
+              <a:t>GDF-15 blockade may overcome resistance.</a:t>
             </a:r>
             <a:endParaRPr lang="en-US" sz="1800" dirty="0"/>
           </a:p>
@@ -7241,7 +7199,7 @@
                 <a:ea typeface="Arial" pitchFamily="34" charset="-122"/>
                 <a:cs typeface="Arial" pitchFamily="34" charset="-120"/>
               </a:rPr>
-              <a:t>Asian trials show higher stability metrics.</a:t>
+              <a:t>Further randomized trials are warranted.</a:t>
             </a:r>
             <a:endParaRPr lang="en-US" sz="1800" dirty="0"/>
           </a:p>
@@ -7277,7 +7235,7 @@
                   <a:srgbClr val="888888"/>
                 </a:solidFill>
               </a:rPr>
-              <a:t>Dalbeni A, Vicardi M, Stefanini B et al.. Digestive and liver disease : official journal of the Italian Society of Gastroenterology and the Italian Association for the Study of the Liver. 2026-06-16 DOI: 10.1016/j.dld.2026.04.013</a:t>
+              <a:t>Melero Ignacio, de Miguel Mar&amp;#xed;a, Cabanas Elena Garralda et al.. Journal of hematology &amp; oncology. 2026-07-10 DOI: 10.1186/s13045-026-01818-2</a:t>
             </a:r>
             <a:endParaRPr lang="en-US" sz="800" dirty="0"/>
           </a:p>
@@ -7477,7 +7435,7 @@
                   </a:extLst>
                 </a:hlinkClick>
               </a:rPr>
-              <a:t>Systemic immune profiling in hepatocellular carcinoma: navigating etiological heterogeneity and selection bias.</a:t>
+              <a:t>… plus transarterial chemoembolization and PD-1 inhibitors as conversion therapies for unresectable intermediate-advanced hepatocellular carcinoma: a phase 2 trial …</a:t>
             </a:r>
             <a:endParaRPr lang="en-US" sz="2400" dirty="0"/>
           </a:p>
@@ -7513,7 +7471,7 @@
                   <a:srgbClr val="888888"/>
                 </a:solidFill>
               </a:rPr>
-              <a:t>Journal for immunotherapy of cancer  ·  IF 10.9  ·  Prospective Study</a:t>
+              <a:t>… and Targeted Therapy  ·  RCT Phase 2</a:t>
             </a:r>
             <a:endParaRPr lang="en-US" sz="1000" dirty="0"/>
           </a:p>
@@ -7556,7 +7514,7 @@
                 <a:ea typeface="Arial" pitchFamily="34" charset="-122"/>
                 <a:cs typeface="Arial" pitchFamily="34" charset="-120"/>
               </a:rPr>
-              <a:t>Methodological commentary on Nishio et al study</a:t>
+              <a:t>Combination therapy for unresectable HCC</a:t>
             </a:r>
             <a:endParaRPr lang="en-US" sz="1800" dirty="0"/>
           </a:p>
@@ -7577,7 +7535,7 @@
                 <a:ea typeface="Arial" pitchFamily="34" charset="-122"/>
                 <a:cs typeface="Arial" pitchFamily="34" charset="-120"/>
               </a:rPr>
-              <a:t>Identified circulating immune biomarkers for HCC</a:t>
+              <a:t>Transarterial chemoembolization (TACE) used</a:t>
             </a:r>
             <a:endParaRPr lang="en-US" sz="1800" dirty="0"/>
           </a:p>
@@ -7598,49 +7556,7 @@
                 <a:ea typeface="Arial" pitchFamily="34" charset="-122"/>
                 <a:cs typeface="Arial" pitchFamily="34" charset="-120"/>
               </a:rPr>
-              <a:t>Etiological heterogeneity may confound immune signatures</a:t>
-            </a:r>
-            <a:endParaRPr lang="en-US" sz="1800" dirty="0"/>
-          </a:p>
-          <a:p>
-            <a:pPr marL="342900" indent="-342900">
-              <a:spcAft>
-                <a:spcPts val="800"/>
-              </a:spcAft>
-              <a:buSzPct val="100000"/>
-              <a:buChar char="•"/>
-            </a:pPr>
-            <a:r>
-              <a:rPr lang="en-US" sz="1800" dirty="0">
-                <a:solidFill>
-                  <a:srgbClr val="333333"/>
-                </a:solidFill>
-                <a:latin typeface="Arial" pitchFamily="34" charset="0"/>
-                <a:ea typeface="Arial" pitchFamily="34" charset="-122"/>
-                <a:cs typeface="Arial" pitchFamily="34" charset="-120"/>
-              </a:rPr>
-              <a:t>Selection bias affects study design and results</a:t>
-            </a:r>
-            <a:endParaRPr lang="en-US" sz="1800" dirty="0"/>
-          </a:p>
-          <a:p>
-            <a:pPr marL="342900" indent="-342900">
-              <a:spcAft>
-                <a:spcPts val="800"/>
-              </a:spcAft>
-              <a:buSzPct val="100000"/>
-              <a:buChar char="•"/>
-            </a:pPr>
-            <a:r>
-              <a:rPr lang="en-US" sz="1800" dirty="0">
-                <a:solidFill>
-                  <a:srgbClr val="333333"/>
-                </a:solidFill>
-                <a:latin typeface="Arial" pitchFamily="34" charset="0"/>
-                <a:ea typeface="Arial" pitchFamily="34" charset="-122"/>
-                <a:cs typeface="Arial" pitchFamily="34" charset="-120"/>
-              </a:rPr>
-              <a:t>Need for validation in prospective cohorts</a:t>
+              <a:t>PD-1 inhibitors enhance treatment efficacy</a:t>
             </a:r>
             <a:endParaRPr lang="en-US" sz="1800" dirty="0"/>
           </a:p>
@@ -7676,7 +7592,7 @@
                   <a:srgbClr val="888888"/>
                 </a:solidFill>
               </a:rPr>
-              <a:t>Chen Rihui, Yang Xiaochuan. Journal for immunotherapy of cancer. 2026-07-01 DOI: 10.1136/jitc-2026-015777</a:t>
+              <a:t>X Zhang, H Cai, W Peng. … and Targeted Therapy. 2026</a:t>
             </a:r>
             <a:endParaRPr lang="en-US" sz="800" dirty="0"/>
           </a:p>

--- a/docs/digest-en.pptx
+++ b/docs/digest-en.pptx
@@ -2269,7 +2269,7 @@
                   <a:srgbClr val="888888"/>
                 </a:solidFill>
               </a:rPr>
-              <a:t>2026-07-06 — 2026-07-13</a:t>
+              <a:t>2026-07-13 — 2026-07-20</a:t>
             </a:r>
             <a:endParaRPr lang="en-US" sz="1400" dirty="0"/>
           </a:p>
@@ -2460,7 +2460,7 @@
                   </a:extLst>
                 </a:hlinkClick>
               </a:rPr>
-              <a:t>The immunological paradox: immune checkpoint inhibitors in liver transplantation.</a:t>
+              <a:t>… plus transarterial chemoembolization and PD-1 inhibitors as conversion therapies for unresectable intermediate-advanced hepatocellular carcinoma: a phase 2 trial …</a:t>
             </a:r>
             <a:endParaRPr lang="en-US" sz="2400" dirty="0"/>
           </a:p>
@@ -2496,7 +2496,7 @@
                   <a:srgbClr val="888888"/>
                 </a:solidFill>
               </a:rPr>
-              <a:t>International journal of clinical oncology  ·  Review  ·  🌏 Asia</a:t>
+              <a:t>… and Targeted Therapy  ·  RCT Phase 2</a:t>
             </a:r>
             <a:endParaRPr lang="en-US" sz="1000" dirty="0"/>
           </a:p>
@@ -2539,7 +2539,7 @@
                 <a:ea typeface="Arial" pitchFamily="34" charset="-122"/>
                 <a:cs typeface="Arial" pitchFamily="34" charset="-120"/>
               </a:rPr>
-              <a:t>ICIs transform HCC treatment landscape.</a:t>
+              <a:t>Combination therapy for unresectable HCC</a:t>
             </a:r>
             <a:endParaRPr lang="en-US" sz="1800" dirty="0"/>
           </a:p>
@@ -2560,7 +2560,7 @@
                 <a:ea typeface="Arial" pitchFamily="34" charset="-122"/>
                 <a:cs typeface="Arial" pitchFamily="34" charset="-120"/>
               </a:rPr>
-              <a:t>LT requires immune tolerance for success.</a:t>
+              <a:t>Transarterial chemoembolization (TACE) used</a:t>
             </a:r>
             <a:endParaRPr lang="en-US" sz="1800" dirty="0"/>
           </a:p>
@@ -2581,7 +2581,7 @@
                 <a:ea typeface="Arial" pitchFamily="34" charset="-122"/>
                 <a:cs typeface="Arial" pitchFamily="34" charset="-120"/>
               </a:rPr>
-              <a:t>ICIs disrupt tolerance, enhancing immunity.</a:t>
+              <a:t>PD-1 inhibitors enhance treatment efficacy</a:t>
             </a:r>
             <a:endParaRPr lang="en-US" sz="1800" dirty="0"/>
           </a:p>
@@ -2602,7 +2602,7 @@
                 <a:ea typeface="Arial" pitchFamily="34" charset="-122"/>
                 <a:cs typeface="Arial" pitchFamily="34" charset="-120"/>
               </a:rPr>
-              <a:t>Emerging biomarkers predict ICI rejection.</a:t>
+              <a:t>Phase 2 trial demonstrates promising results</a:t>
             </a:r>
             <a:endParaRPr lang="en-US" sz="1800" dirty="0"/>
           </a:p>
@@ -2623,7 +2623,7 @@
                 <a:ea typeface="Arial" pitchFamily="34" charset="-122"/>
                 <a:cs typeface="Arial" pitchFamily="34" charset="-120"/>
               </a:rPr>
-              <a:t>Ethical concerns in living donor LT.</a:t>
+              <a:t>Potential for conversion to resectable disease</a:t>
             </a:r>
             <a:endParaRPr lang="en-US" sz="1800" dirty="0"/>
           </a:p>
@@ -2659,7 +2659,7 @@
                   <a:srgbClr val="888888"/>
                 </a:solidFill>
               </a:rPr>
-              <a:t>Ito Takashi, Okumura Shinya, Sakamoto Katsunori et al.. International journal of clinical oncology. 2026-07-11 DOI: 10.1007/s10147-026-03091-2</a:t>
+              <a:t>X Zhang, H Cai, W Peng. … and Targeted Therapy. 2026</a:t>
             </a:r>
             <a:endParaRPr lang="en-US" sz="800" dirty="0"/>
           </a:p>
@@ -2859,7 +2859,7 @@
                   </a:extLst>
                 </a:hlinkClick>
               </a:rPr>
-              <a:t>Comparative Effectiveness and Safety of Atezolizumab-Bevacizumab and Durvalumab-Tremelimumab as First-Line Systemic Therapy for Hepatocellular Carcinoma: A Real-World Study.</a:t>
+              <a:t>Disrupting fumarylacetoacetate hydrolase by stratified nanoplatforms orchestrates metabolic-immune reprogramming and prevents post-ablation HCC relapse.</a:t>
             </a:r>
             <a:endParaRPr lang="en-US" sz="2400" dirty="0"/>
           </a:p>
@@ -2895,7 +2895,7 @@
                   <a:srgbClr val="888888"/>
                 </a:solidFill>
               </a:rPr>
-              <a:t>Journal of gastroenterology and hepatology  ·  Retrospective Study  ·  🌏 Asia</a:t>
+              <a:t>Nature communications  ·  IF 14.7</a:t>
             </a:r>
             <a:endParaRPr lang="en-US" sz="1000" dirty="0"/>
           </a:p>
@@ -2938,7 +2938,7 @@
                 <a:ea typeface="Arial" pitchFamily="34" charset="-122"/>
                 <a:cs typeface="Arial" pitchFamily="34" charset="-120"/>
               </a:rPr>
-              <a:t>Atezo/Bev and Durva/Treme are first-line therapies.</a:t>
+              <a:t>FAH upregulation promotes HCC relapse post-ablation.</a:t>
             </a:r>
             <a:endParaRPr lang="en-US" sz="1800" dirty="0"/>
           </a:p>
@@ -2959,7 +2959,7 @@
                 <a:ea typeface="Arial" pitchFamily="34" charset="-122"/>
                 <a:cs typeface="Arial" pitchFamily="34" charset="-120"/>
               </a:rPr>
-              <a:t>Study included 3362 eligible HCC patients.</a:t>
+              <a:t>Fumarate enhances energy metabolism and CD8+ T cell impairment.</a:t>
             </a:r>
             <a:endParaRPr lang="en-US" sz="1800" dirty="0"/>
           </a:p>
@@ -2980,7 +2980,7 @@
                 <a:ea typeface="Arial" pitchFamily="34" charset="-122"/>
                 <a:cs typeface="Arial" pitchFamily="34" charset="-120"/>
               </a:rPr>
-              <a:t>Overall survival similar: 14.6 vs. 17.3 months.</a:t>
+              <a:t>Engineered nanoplatform disrupts FAH-fumarate-HSP70 axis.</a:t>
             </a:r>
             <a:endParaRPr lang="en-US" sz="1800" dirty="0"/>
           </a:p>
@@ -3001,7 +3001,7 @@
                 <a:ea typeface="Arial" pitchFamily="34" charset="-122"/>
                 <a:cs typeface="Arial" pitchFamily="34" charset="-120"/>
               </a:rPr>
-              <a:t>Atezo/Bev had fewer treatment-requiring irAEs.</a:t>
+              <a:t>Site-specific release of therapeutic agents improves outcomes.</a:t>
             </a:r>
             <a:endParaRPr lang="en-US" sz="1800" dirty="0"/>
           </a:p>
@@ -3022,7 +3022,7 @@
                 <a:ea typeface="Arial" pitchFamily="34" charset="-122"/>
                 <a:cs typeface="Arial" pitchFamily="34" charset="-120"/>
               </a:rPr>
-              <a:t>Safety profiles were broadly comparable.</a:t>
+              <a:t>Combines metabolic blockade with immunomodulation for HCC.</a:t>
             </a:r>
             <a:endParaRPr lang="en-US" sz="1800" dirty="0"/>
           </a:p>
@@ -3058,7 +3058,7 @@
                   <a:srgbClr val="888888"/>
                 </a:solidFill>
               </a:rPr>
-              <a:t>Lin Shu Hsien, Wu Jia-Ling, Tsai Ying-Nan et al.. Journal of gastroenterology and hepatology. 2026-07-10 DOI: 10.1111/jgh.70555</a:t>
+              <a:t>Hong Zhiwen, Liu Xiaolong, A Rouhan et al.. Nature communications. 2026-07-14 DOI: 10.1038/s41467-026-75422-w</a:t>
             </a:r>
             <a:endParaRPr lang="en-US" sz="800" dirty="0"/>
           </a:p>
@@ -3258,7 +3258,7 @@
                   </a:extLst>
                 </a:hlinkClick>
               </a:rPr>
-              <a:t>Survival Outcomes After Liver Resection for Barcelona Clinic Liver Cancer Stage B Hepatocellular Carcinoma Have Improved in the Contemporary Era.</a:t>
+              <a:t>Nrf2-mediated metabolic reprogramming drives regulatory T cell accumulation in hepatocellular carcinoma.</a:t>
             </a:r>
             <a:endParaRPr lang="en-US" sz="2400" dirty="0"/>
           </a:p>
@@ -3294,7 +3294,7 @@
                   <a:srgbClr val="888888"/>
                 </a:solidFill>
               </a:rPr>
-              <a:t>Hepatology research : the official journal of the Japan Society of Hepatology  ·  Retrospective Study  ·  🌏 Asia</a:t>
+              <a:t>Nature communications  ·  IF 14.7</a:t>
             </a:r>
             <a:endParaRPr lang="en-US" sz="1000" dirty="0"/>
           </a:p>
@@ -3337,7 +3337,7 @@
                 <a:ea typeface="Arial" pitchFamily="34" charset="-122"/>
                 <a:cs typeface="Arial" pitchFamily="34" charset="-120"/>
               </a:rPr>
-              <a:t>Liver resection outcomes improved for BCLC-B HCC.</a:t>
+              <a:t>Tregs in HCC activate Nrf2 pathway.</a:t>
             </a:r>
             <a:endParaRPr lang="en-US" sz="1800" dirty="0"/>
           </a:p>
@@ -3358,7 +3358,7 @@
                 <a:ea typeface="Arial" pitchFamily="34" charset="-122"/>
                 <a:cs typeface="Arial" pitchFamily="34" charset="-120"/>
               </a:rPr>
-              <a:t>5-year overall survival rose from 44% to 74%.</a:t>
+              <a:t>Nrf2 enhances Treg survival and function.</a:t>
             </a:r>
             <a:endParaRPr lang="en-US" sz="1800" dirty="0"/>
           </a:p>
@@ -3379,7 +3379,49 @@
                 <a:ea typeface="Arial" pitchFamily="34" charset="-122"/>
                 <a:cs typeface="Arial" pitchFamily="34" charset="-120"/>
               </a:rPr>
-              <a:t>Postrecurrence management shifted towards new therapies.</a:t>
+              <a:t>Targeting Nrf2 reduces Treg accumulation.</a:t>
+            </a:r>
+            <a:endParaRPr lang="en-US" sz="1800" dirty="0"/>
+          </a:p>
+          <a:p>
+            <a:pPr marL="342900" indent="-342900">
+              <a:spcAft>
+                <a:spcPts val="800"/>
+              </a:spcAft>
+              <a:buSzPct val="100000"/>
+              <a:buChar char="•"/>
+            </a:pPr>
+            <a:r>
+              <a:rPr lang="en-US" sz="1800" dirty="0">
+                <a:solidFill>
+                  <a:srgbClr val="333333"/>
+                </a:solidFill>
+                <a:latin typeface="Arial" pitchFamily="34" charset="0"/>
+                <a:ea typeface="Arial" pitchFamily="34" charset="-122"/>
+                <a:cs typeface="Arial" pitchFamily="34" charset="-120"/>
+              </a:rPr>
+              <a:t>High Nrf2 in Tregs linked to poor survival.</a:t>
+            </a:r>
+            <a:endParaRPr lang="en-US" sz="1800" dirty="0"/>
+          </a:p>
+          <a:p>
+            <a:pPr marL="342900" indent="-342900">
+              <a:spcAft>
+                <a:spcPts val="800"/>
+              </a:spcAft>
+              <a:buSzPct val="100000"/>
+              <a:buChar char="•"/>
+            </a:pPr>
+            <a:r>
+              <a:rPr lang="en-US" sz="1800" dirty="0">
+                <a:solidFill>
+                  <a:srgbClr val="333333"/>
+                </a:solidFill>
+                <a:latin typeface="Arial" pitchFamily="34" charset="0"/>
+                <a:ea typeface="Arial" pitchFamily="34" charset="-122"/>
+                <a:cs typeface="Arial" pitchFamily="34" charset="-120"/>
+              </a:rPr>
+              <a:t>Nrf2 modulation may improve immunotherapy outcomes.</a:t>
             </a:r>
             <a:endParaRPr lang="en-US" sz="1800" dirty="0"/>
           </a:p>
@@ -3415,7 +3457,7 @@
                   <a:srgbClr val="888888"/>
                 </a:solidFill>
               </a:rPr>
-              <a:t>Yamamoto Yoichi, Asahi Yoh, Shichi Shunsuke et al.. Hepatology research : the official journal of the Japan Society of Hepatology. 2026-07-09 DOI: 10.1111/hepr.70240</a:t>
+              <a:t>Perpi&amp;#xf1;&amp;#xe1;n E, Sompairac N, Marin Correa D et al.. Nature communications. 2026-07-13 DOI: 10.1038/s41467-026-73485-3</a:t>
             </a:r>
             <a:endParaRPr lang="en-US" sz="800" dirty="0"/>
           </a:p>
@@ -3632,7 +3674,7 @@
                   <a:srgbClr val="FFFFFF"/>
                 </a:solidFill>
               </a:rPr>
-              <a:t>1. **免疫療法的潛力與挑戰**  </a:t>
+              <a:t>1. **免疫療法的潛力**  </a:t>
             </a:r>
             <a:endParaRPr lang="en-US" sz="1200" dirty="0"/>
           </a:p>
@@ -3649,7 +3691,7 @@
                   <a:srgbClr val="FFFFFF"/>
                 </a:solidFill>
               </a:rPr>
-              <a:t>   The integration of immune checkpoint inhibitors (ICIs) has revolutionized the treatment landscape for advanced hepatocellular carcinoma (HCC), yet challenges such as primary resistance and limited durability of responses remain significant hurdles.  </a:t>
+              <a:t>   Immunotherapy, particularly PD-1 blockade, shows significant promise in enhancing local immune responses against hepatocellular carcinoma (HCC), especially in patients with underlying hepatitis B virus infection.  </a:t>
             </a:r>
             <a:endParaRPr lang="en-US" sz="1200" dirty="0"/>
           </a:p>
@@ -3666,7 +3708,7 @@
                   <a:srgbClr val="FFFFFF"/>
                 </a:solidFill>
               </a:rPr>
-              <a:t>   免疫檢查點抑制劑（ICIs）的整合已徹底改變了晚期肝細胞癌（HCC）的治療格局，但初級耐藥性和反應持久性有限等挑戰仍然是重大障礙。</a:t>
+              <a:t>   免疫療法，特別是PD-1抑制劑，顯示出在增強對肝細胞癌（HCC）的局部免疫反應方面的顯著潛力，尤其是在有乙型肝炎病毒感染的患者中。</a:t>
             </a:r>
             <a:endParaRPr lang="en-US" sz="1200" dirty="0"/>
           </a:p>
@@ -3692,7 +3734,7 @@
                   <a:srgbClr val="FFFFFF"/>
                 </a:solidFill>
               </a:rPr>
-              <a:t>2. **表觀遺傳療法的興起**  </a:t>
+              <a:t>2. **長期生存率的提升**  </a:t>
             </a:r>
             <a:endParaRPr lang="en-US" sz="1200" dirty="0"/>
           </a:p>
@@ -3709,7 +3751,7 @@
                   <a:srgbClr val="FFFFFF"/>
                 </a:solidFill>
               </a:rPr>
-              <a:t>   Emerging epigenetic therapies present new avenues for HCC treatment, particularly in overcoming resistance mechanisms associated with conventional therapies.  </a:t>
+              <a:t>   Immune checkpoint inhibitors (ICIs) can lead to long-term survival and potential cures in HCC, indicating the need for further exploration of their efficacy in various stages of the disease.  </a:t>
             </a:r>
             <a:endParaRPr lang="en-US" sz="1200" dirty="0"/>
           </a:p>
@@ -3726,7 +3768,7 @@
                   <a:srgbClr val="FFFFFF"/>
                 </a:solidFill>
               </a:rPr>
-              <a:t>   新興的表觀遺傳療法為HCC治療提供了新的途徑，特別是在克服與傳統療法相關的耐藥機制方面。</a:t>
+              <a:t>   免疫檢查點抑制劑（ICIs）能夠提高HCC的長期生存率並有潛在治癒的可能，這表明需要進一步探索其在不同疾病階段的療效。</a:t>
             </a:r>
             <a:endParaRPr lang="en-US" sz="1200" dirty="0"/>
           </a:p>
@@ -3752,7 +3794,7 @@
                   <a:srgbClr val="FFFFFF"/>
                 </a:solidFill>
               </a:rPr>
-              <a:t>3. **局部治療與全身療法的協同作用**  </a:t>
+              <a:t>3. **腫瘤微環境的重塑**  </a:t>
             </a:r>
             <a:endParaRPr lang="en-US" sz="1200" dirty="0"/>
           </a:p>
@@ -3769,7 +3811,7 @@
                   <a:srgbClr val="FFFFFF"/>
                 </a:solidFill>
               </a:rPr>
-              <a:t>   Combining locoregional therapies, such as transarterial chemoembolization (TACE) and stereotactic body radiotherapy, with systemic therapies like ICIs shows promise in improving patient outcomes.  </a:t>
+              <a:t>   Combining immunotherapy with locoregional therapies, such as stereotactic body radiotherapy, can favorably remodel the tumor microenvironment, enhancing treatment outcomes.  </a:t>
             </a:r>
             <a:endParaRPr lang="en-US" sz="1200" dirty="0"/>
           </a:p>
@@ -3786,7 +3828,7 @@
                   <a:srgbClr val="FFFFFF"/>
                 </a:solidFill>
               </a:rPr>
-              <a:t>   將局部療法（如經動脈化療栓塞（TACE）和立體定向體放射治療）與全身療法（如ICIs）結合在一起，對改善患者預後顯示出希望。</a:t>
+              <a:t>   將免疫療法與局部治療（如立體定向體放療）結合，可以有利於重塑腫瘤微環境，從而改善治療結果。</a:t>
             </a:r>
             <a:endParaRPr lang="en-US" sz="1200" dirty="0"/>
           </a:p>
@@ -3812,7 +3854,7 @@
                   <a:srgbClr val="FFFFFF"/>
                 </a:solidFill>
               </a:rPr>
-              <a:t>4. **生物標誌物的缺乏**  </a:t>
+              <a:t>4. **抵抗機制的探索**  </a:t>
             </a:r>
             <a:endParaRPr lang="en-US" sz="1200" dirty="0"/>
           </a:p>
@@ -3829,7 +3871,7 @@
                   <a:srgbClr val="FFFFFF"/>
                 </a:solidFill>
               </a:rPr>
-              <a:t>   The absence of validated predictive biomarkers limits the ability to tailor treatments effectively, underscoring the need for further research in biomarker discovery for HCC.  </a:t>
+              <a:t>   Identifying novel regulators of immune responses, such as STK40, is crucial for understanding resistance mechanisms in HCC and developing more effective therapies.  </a:t>
             </a:r>
             <a:endParaRPr lang="en-US" sz="1200" dirty="0"/>
           </a:p>
@@ -3846,7 +3888,7 @@
                   <a:srgbClr val="FFFFFF"/>
                 </a:solidFill>
               </a:rPr>
-              <a:t>   缺乏經過驗證的預測生物標誌物限制了有效調整治療的能力，突顯了對HCC生物標誌物發現進一步研究的需求。</a:t>
+              <a:t>   確定免疫反應的新調節因子（如STK40）對於理解HCC中的抵抗機制和開發更有效的療法至關重要。</a:t>
             </a:r>
             <a:endParaRPr lang="en-US" sz="1200" dirty="0"/>
           </a:p>
@@ -3872,7 +3914,7 @@
                   <a:srgbClr val="FFFFFF"/>
                 </a:solidFill>
               </a:rPr>
-              <a:t>5. **多學科合作的重要性**  </a:t>
+              <a:t>5. **代謝和免疫重編程**  </a:t>
             </a:r>
             <a:endParaRPr lang="en-US" sz="1200" dirty="0"/>
           </a:p>
@@ -3889,7 +3931,7 @@
                   <a:srgbClr val="FFFFFF"/>
                 </a:solidFill>
               </a:rPr>
-              <a:t>   Advances in imaging and multidisciplinary approaches are essential for improving surgical outcomes and overall survival in HCC patients.</a:t>
+              <a:t>   Targeting metabolic pathways in HCC can disrupt immunosuppressive environments and prevent recurrence post-ablation, highlighting the interplay between metabolism and immunity.</a:t>
             </a:r>
             <a:endParaRPr lang="en-US" sz="1200" dirty="0"/>
           </a:p>
@@ -4035,7 +4077,7 @@
                   <a:srgbClr val="FFFFFF"/>
                 </a:solidFill>
               </a:rPr>
-              <a:t>成像技術的進步和多學科方法對改善HCC患者的手術結果和整體生存率至關重要。</a:t>
+              <a:t>針對HCC中的代謝途徑可以破壞免疫抑制環境並防止消融後的復發，突顯了代謝與免疫之間的相互作用。</a:t>
             </a:r>
             <a:endParaRPr lang="en-US" sz="1200" dirty="0"/>
           </a:p>
@@ -4087,7 +4129,7 @@
                   <a:srgbClr val="FFFFFF"/>
                 </a:solidFill>
               </a:rPr>
-              <a:t>1. **耐藥機制的深入研究**  </a:t>
+              <a:t>1. **個性化療法的發展**  </a:t>
             </a:r>
             <a:endParaRPr lang="en-US" sz="1200" dirty="0"/>
           </a:p>
@@ -4104,7 +4146,7 @@
                   <a:srgbClr val="FFFFFF"/>
                 </a:solidFill>
               </a:rPr>
-              <a:t>   Investigating the molecular mechanisms underlying resistance to ICIs and other therapies is critical for developing strategies to enhance treatment efficacy.  </a:t>
+              <a:t>   Further studies should focus on personalized immunotherapy approaches that consider the unique tumor microenvironment and patient-specific factors in HCC.  </a:t>
             </a:r>
             <a:endParaRPr lang="en-US" sz="1200" dirty="0"/>
           </a:p>
@@ -4121,7 +4163,7 @@
                   <a:srgbClr val="FFFFFF"/>
                 </a:solidFill>
               </a:rPr>
-              <a:t>   深入研究ICIs和其他療法耐藥的分子機制對於開發增強治療效果的策略至關重要。</a:t>
+              <a:t>   未來的研究應集中於個性化免疫療法的發展，考慮HCC中獨特的腫瘤微環境和患者特定因素。</a:t>
             </a:r>
             <a:endParaRPr lang="en-US" sz="1200" dirty="0"/>
           </a:p>
@@ -4147,7 +4189,7 @@
                   <a:srgbClr val="FFFFFF"/>
                 </a:solidFill>
               </a:rPr>
-              <a:t>2. **新型生物標誌物的探索**  </a:t>
+              <a:t>2. **多重療法的組合**  </a:t>
             </a:r>
             <a:endParaRPr lang="en-US" sz="1200" dirty="0"/>
           </a:p>
@@ -4164,7 +4206,7 @@
                   <a:srgbClr val="FFFFFF"/>
                 </a:solidFill>
               </a:rPr>
-              <a:t>   Future studies should focus on identifying and validating biomarkers that can predict response to immunotherapy and guide personalized treatment approaches.  </a:t>
+              <a:t>   Investigating the synergistic effects of combining immune checkpoint inhibitors with other treatments, such as targeted therapies and locoregional approaches, to improve patient outcomes.  </a:t>
             </a:r>
             <a:endParaRPr lang="en-US" sz="1200" dirty="0"/>
           </a:p>
@@ -4181,7 +4223,7 @@
                   <a:srgbClr val="FFFFFF"/>
                 </a:solidFill>
               </a:rPr>
-              <a:t>   未來的研究應集中於識別和驗證能預測免疫療法反應的生物標誌物，並指導個性化治療方法。</a:t>
+              <a:t>   探索將免疫檢查點抑制劑與其他治療（如靶向療法和局部療法）組合的協同效應，以改善患者預後。</a:t>
             </a:r>
             <a:endParaRPr lang="en-US" sz="1200" dirty="0"/>
           </a:p>
@@ -4207,7 +4249,7 @@
                   <a:srgbClr val="FFFFFF"/>
                 </a:solidFill>
               </a:rPr>
-              <a:t>3. **表觀遺傳療法的臨床應用**  </a:t>
+              <a:t>3. **抵抗機制的深入研究**  </a:t>
             </a:r>
             <a:endParaRPr lang="en-US" sz="1200" dirty="0"/>
           </a:p>
@@ -4224,7 +4266,7 @@
                   <a:srgbClr val="FFFFFF"/>
                 </a:solidFill>
               </a:rPr>
-              <a:t>   Clinical trials exploring the efficacy of epigenetic therapies in combination with existing treatments for HCC are necessary to establish their role in therapy.  </a:t>
+              <a:t>   More research is needed to elucidate the mechanisms of resistance to immunotherapy in HCC, particularly focusing on metabolic adaptations and immune evasion strategies.  </a:t>
             </a:r>
             <a:endParaRPr lang="en-US" sz="1200" dirty="0"/>
           </a:p>
@@ -4241,7 +4283,7 @@
                   <a:srgbClr val="FFFFFF"/>
                 </a:solidFill>
               </a:rPr>
-              <a:t>   探索表觀遺傳療法與現有HCC治療組合的臨床試驗是必要的，以確立其在治療中的角色。</a:t>
+              <a:t>   需要更多研究來闡明HCC中對免疫療法的抵抗機制，特別是集中於代謝適應和免疫逃逸策略。</a:t>
             </a:r>
             <a:endParaRPr lang="en-US" sz="1200" dirty="0"/>
           </a:p>
@@ -4267,7 +4309,7 @@
                   <a:srgbClr val="FFFFFF"/>
                 </a:solidFill>
               </a:rPr>
-              <a:t>4. **多模態治療策略的發展**  </a:t>
+              <a:t>4. **早期介入的臨床試驗**  </a:t>
             </a:r>
             <a:endParaRPr lang="en-US" sz="1200" dirty="0"/>
           </a:p>
@@ -4284,7 +4326,7 @@
                   <a:srgbClr val="FFFFFF"/>
                 </a:solidFill>
               </a:rPr>
-              <a:t>   Research should focus on developing multimodal treatment strategies that integrate systemic and locoregional therapies to optimize patient outcomes.  </a:t>
+              <a:t>   Conducting clinical trials on the efficacy of immunotherapy in earlier stages of HCC, to establish optimal treatment protocols and timing.  </a:t>
             </a:r>
             <a:endParaRPr lang="en-US" sz="1200" dirty="0"/>
           </a:p>
@@ -4301,7 +4343,7 @@
                   <a:srgbClr val="FFFFFF"/>
                 </a:solidFill>
               </a:rPr>
-              <a:t>   研究應集中於開發整合全身療法和局部療法的多模態治療策略，以優化患者預後。</a:t>
+              <a:t>   開展關於免疫療法在HCC早期階段療效的臨床試驗，以確立最佳治療方案和時機。</a:t>
             </a:r>
             <a:endParaRPr lang="en-US" sz="1200" dirty="0"/>
           </a:p>
@@ -4327,7 +4369,7 @@
                   <a:srgbClr val="FFFFFF"/>
                 </a:solidFill>
               </a:rPr>
-              <a:t>5. **長期隨訪與數據收集**  </a:t>
+              <a:t>5. **代謝與免疫的交互作用**  </a:t>
             </a:r>
             <a:endParaRPr lang="en-US" sz="1200" dirty="0"/>
           </a:p>
@@ -4344,7 +4386,7 @@
                   <a:srgbClr val="FFFFFF"/>
                 </a:solidFill>
               </a:rPr>
-              <a:t>   Long-term follow-up studies are essential to assess the durability of responses and overall survival in patients receiving novel therapies for HCC.  </a:t>
+              <a:t>   Investigating the metabolic reprogramming in HCC and its impact on immune cell function, aiming to develop strategies that can enhance anti-tumor immunity.  </a:t>
             </a:r>
             <a:endParaRPr lang="en-US" sz="1200" dirty="0"/>
           </a:p>
@@ -4361,7 +4403,7 @@
                   <a:srgbClr val="FFFFFF"/>
                 </a:solidFill>
               </a:rPr>
-              <a:t>   長期隨訪研究對於評估接受新療法的HCC患者的反應持久性和整體生存率至關重要。</a:t>
+              <a:t>   研究HCC中的代謝重編程及其對免疫細胞功能的影響，旨在開發可以增強抗腫瘤免疫的策略。</a:t>
             </a:r>
             <a:endParaRPr lang="en-US" sz="1200" dirty="0"/>
           </a:p>
@@ -4595,7 +4637,7 @@
                 <a:ea typeface="Arial" pitchFamily="34" charset="-122"/>
                 <a:cs typeface="Arial" pitchFamily="34" charset="-120"/>
               </a:rPr>
-              <a:t>Epigenetic therapies in hepatocellular carcinoma: emerging clinical tools and ap…</a:t>
+              <a:t>PD-1 blockade unleashes local hepatitis B virus-related B cell response inhibiti…</a:t>
             </a:r>
             <a:endParaRPr lang="en-US" sz="1400" dirty="0"/>
           </a:p>
@@ -4632,7 +4674,7 @@
                 <a:ea typeface="Arial" pitchFamily="34" charset="-122"/>
                 <a:cs typeface="Arial" pitchFamily="34" charset="-120"/>
               </a:rPr>
-              <a:t>Epigenetic therapies in hepatocellular carcinoma: emerging clinical tools and ap…</a:t>
+              <a:t>Long-term Survival and Cure Fraction in Patients with Advanced Hepatocellular Ca…</a:t>
             </a:r>
             <a:endParaRPr lang="en-US" sz="1400" dirty="0"/>
           </a:p>
@@ -4669,7 +4711,7 @@
                 <a:ea typeface="Arial" pitchFamily="34" charset="-122"/>
                 <a:cs typeface="Arial" pitchFamily="34" charset="-120"/>
               </a:rPr>
-              <a:t>Pembrolizumab and stereotactic body radiotherapy combined in advanced hepatocell…</a:t>
+              <a:t>Targeting tumor-intrinsic STK40 induces immune vulnerability and drives T cell r…</a:t>
             </a:r>
             <a:endParaRPr lang="en-US" sz="1400" dirty="0"/>
           </a:p>
@@ -4706,7 +4748,7 @@
                 <a:ea typeface="Arial" pitchFamily="34" charset="-122"/>
                 <a:cs typeface="Arial" pitchFamily="34" charset="-120"/>
               </a:rPr>
-              <a:t>Hepatocellular carcinoma: new therapies on the horizon.</a:t>
+              <a:t>Pembrolizumab and stereotactic body radiotherapy combined in advanced hepatocell…</a:t>
             </a:r>
             <a:endParaRPr lang="en-US" sz="1400" dirty="0"/>
           </a:p>
@@ -4743,7 +4785,7 @@
                 <a:ea typeface="Arial" pitchFamily="34" charset="-122"/>
                 <a:cs typeface="Arial" pitchFamily="34" charset="-120"/>
               </a:rPr>
-              <a:t>UDP-glucuronate decarboxylase 1 promotes tumor immune evasion by accelerating KM…</a:t>
+              <a:t>Neoadjuvant Stereotactic Body Radiotherapy plus Immune Therapy Favorably Remodel…</a:t>
             </a:r>
             <a:endParaRPr lang="en-US" sz="1400" dirty="0"/>
           </a:p>
@@ -4780,7 +4822,7 @@
                 <a:ea typeface="Arial" pitchFamily="34" charset="-122"/>
                 <a:cs typeface="Arial" pitchFamily="34" charset="-120"/>
               </a:rPr>
-              <a:t>Long-term follow-up of a phase 1/2 trial of anti-GDF-15 antibody visugromab plus…</a:t>
+              <a:t>Second-Line and Subsequent Therapies after Atezolizumab Plus Bevacizumab Treatme…</a:t>
             </a:r>
             <a:endParaRPr lang="en-US" sz="1400" dirty="0"/>
           </a:p>
@@ -4817,7 +4859,7 @@
                 <a:ea typeface="Arial" pitchFamily="34" charset="-122"/>
                 <a:cs typeface="Arial" pitchFamily="34" charset="-120"/>
               </a:rPr>
-              <a:t>… plus transarterial chemoembolization and PD-1 inhibitors as conversion therapi…</a:t>
+              <a:t>Mechanistic synergies and optimal sequencing of anti&amp;#x2011;VEGF plus immune che…</a:t>
             </a:r>
             <a:endParaRPr lang="en-US" sz="1400" dirty="0"/>
           </a:p>
@@ -4854,7 +4896,7 @@
                 <a:ea typeface="Arial" pitchFamily="34" charset="-122"/>
                 <a:cs typeface="Arial" pitchFamily="34" charset="-120"/>
               </a:rPr>
-              <a:t>The immunological paradox: immune checkpoint inhibitors in liver transplantation…</a:t>
+              <a:t>… plus transarterial chemoembolization and PD-1 inhibitors as conversion therapi…</a:t>
             </a:r>
             <a:endParaRPr lang="en-US" sz="1400" dirty="0"/>
           </a:p>
@@ -4891,7 +4933,7 @@
                 <a:ea typeface="Arial" pitchFamily="34" charset="-122"/>
                 <a:cs typeface="Arial" pitchFamily="34" charset="-120"/>
               </a:rPr>
-              <a:t>Comparative Effectiveness and Safety of Atezolizumab-Bevacizumab and Durvalumab-…</a:t>
+              <a:t>Disrupting fumarylacetoacetate hydrolase by stratified nanoplatforms orchestrate…</a:t>
             </a:r>
             <a:endParaRPr lang="en-US" sz="1400" dirty="0"/>
           </a:p>
@@ -4928,7 +4970,7 @@
                 <a:ea typeface="Arial" pitchFamily="34" charset="-122"/>
                 <a:cs typeface="Arial" pitchFamily="34" charset="-120"/>
               </a:rPr>
-              <a:t>Survival Outcomes After Liver Resection for Barcelona Clinic Liver Cancer Stage …</a:t>
+              <a:t>Nrf2-mediated metabolic reprogramming drives regulatory T cell accumulation in h…</a:t>
             </a:r>
             <a:endParaRPr lang="en-US" sz="1400" dirty="0"/>
           </a:p>
@@ -5083,7 +5125,7 @@
                   </a:extLst>
                 </a:hlinkClick>
               </a:rPr>
-              <a:t>Epigenetic therapies in hepatocellular carcinoma: emerging clinical tools and applications.</a:t>
+              <a:t>PD-1 blockade unleashes local hepatitis B virus-related B cell response inhibiting hepatocellular carcinoma.</a:t>
             </a:r>
             <a:endParaRPr lang="en-US" sz="2400" dirty="0"/>
           </a:p>
@@ -5119,7 +5161,7 @@
                   <a:srgbClr val="888888"/>
                 </a:solidFill>
               </a:rPr>
-              <a:t>Gut  ·  IF 24.5  ·  Review</a:t>
+              <a:t>Cancer cell  ·  IF 48.8  ·  RCT Phase 2</a:t>
             </a:r>
             <a:endParaRPr lang="en-US" sz="1000" dirty="0"/>
           </a:p>
@@ -5162,7 +5204,7 @@
                 <a:ea typeface="Arial" pitchFamily="34" charset="-122"/>
                 <a:cs typeface="Arial" pitchFamily="34" charset="-120"/>
               </a:rPr>
-              <a:t>HCC is a leading cause of cancer death.</a:t>
+              <a:t>PD-1 blockade enhances B cell response.</a:t>
             </a:r>
             <a:endParaRPr lang="en-US" sz="1800" dirty="0"/>
           </a:p>
@@ -5183,7 +5225,7 @@
                 <a:ea typeface="Arial" pitchFamily="34" charset="-122"/>
                 <a:cs typeface="Arial" pitchFamily="34" charset="-120"/>
               </a:rPr>
-              <a:t>Current therapies show limited efficacy in advanced stages.</a:t>
+              <a:t>Distinct T cell and B cell subtypes identified.</a:t>
             </a:r>
             <a:endParaRPr lang="en-US" sz="1800" dirty="0"/>
           </a:p>
@@ -5204,7 +5246,7 @@
                 <a:ea typeface="Arial" pitchFamily="34" charset="-122"/>
                 <a:cs typeface="Arial" pitchFamily="34" charset="-120"/>
               </a:rPr>
-              <a:t>Epigenetic dysregulation drives tumor progression.</a:t>
+              <a:t>HBcAg triggers local B cell activation.</a:t>
             </a:r>
             <a:endParaRPr lang="en-US" sz="1800" dirty="0"/>
           </a:p>
@@ -5225,7 +5267,7 @@
                 <a:ea typeface="Arial" pitchFamily="34" charset="-122"/>
                 <a:cs typeface="Arial" pitchFamily="34" charset="-120"/>
               </a:rPr>
-              <a:t>Emerging 'epidrugs' show promise in clinical trials.</a:t>
+              <a:t>Complement activation mediates antitumor effects.</a:t>
             </a:r>
             <a:endParaRPr lang="en-US" sz="1800" dirty="0"/>
           </a:p>
@@ -5246,7 +5288,7 @@
                 <a:ea typeface="Arial" pitchFamily="34" charset="-122"/>
                 <a:cs typeface="Arial" pitchFamily="34" charset="-120"/>
               </a:rPr>
-              <a:t>Targeting epigenetics may enhance existing therapies.</a:t>
+              <a:t>Study supports anti-PD-1 therapy efficacy.</a:t>
             </a:r>
             <a:endParaRPr lang="en-US" sz="1800" dirty="0"/>
           </a:p>
@@ -5282,7 +5324,7 @@
                   <a:srgbClr val="888888"/>
                 </a:solidFill>
               </a:rPr>
-              <a:t>Bueloni Barbara, G Fernandez-Barrena Maite, Fiore Esteban et al.. Gut. 2026-07-08 DOI: 10.1136/gutjnl-2025-336317</a:t>
+              <a:t>Chen Shuling, Wang Yuanqi, Chen Jingying et al.. Cancer cell. 2026-07-16 DOI: 10.1016/j.ccell.2026.06.010</a:t>
             </a:r>
             <a:endParaRPr lang="en-US" sz="800" dirty="0"/>
           </a:p>
@@ -5482,7 +5524,7 @@
                   </a:extLst>
                 </a:hlinkClick>
               </a:rPr>
-              <a:t>Epigenetic therapies in hepatocellular carcinoma: emerging clinical tools and applications</a:t>
+              <a:t>Long-term Survival and Cure Fraction in Patients with Advanced Hepatocellular Carcinoma under Immunotherapy in Randomized Controlled Trials and Real-world Data.</a:t>
             </a:r>
             <a:endParaRPr lang="en-US" sz="2400" dirty="0"/>
           </a:p>
@@ -5518,7 +5560,7 @@
                   <a:srgbClr val="888888"/>
                 </a:solidFill>
               </a:rPr>
-              <a:t>Gut  ·  IF 24.5</a:t>
+              <a:t>Clinical cancer research : an official journal of the American Association for Cancer Research  ·  IF 11.5  ·  RCT Phase 3  ·  🌏 Asia</a:t>
             </a:r>
             <a:endParaRPr lang="en-US" sz="1000" dirty="0"/>
           </a:p>
@@ -5561,7 +5603,7 @@
                 <a:ea typeface="Arial" pitchFamily="34" charset="-122"/>
                 <a:cs typeface="Arial" pitchFamily="34" charset="-120"/>
               </a:rPr>
-              <a:t>Epigenetic therapies show promise in HCC.</a:t>
+              <a:t>Immune checkpoint inhibitors improve survival rates.</a:t>
             </a:r>
             <a:endParaRPr lang="en-US" sz="1800" dirty="0"/>
           </a:p>
@@ -5582,7 +5624,7 @@
                 <a:ea typeface="Arial" pitchFamily="34" charset="-122"/>
                 <a:cs typeface="Arial" pitchFamily="34" charset="-120"/>
               </a:rPr>
-              <a:t>Combination with ICIs enhances treatment efficacy.</a:t>
+              <a:t>Long-term survival ranges from 10% to 15%.</a:t>
             </a:r>
             <a:endParaRPr lang="en-US" sz="1800" dirty="0"/>
           </a:p>
@@ -5603,7 +5645,49 @@
                 <a:ea typeface="Arial" pitchFamily="34" charset="-122"/>
                 <a:cs typeface="Arial" pitchFamily="34" charset="-120"/>
               </a:rPr>
-              <a:t>Emerging tools for personalized medicine in HCC.</a:t>
+              <a:t>Cure fractions estimated at 7% to 9%.</a:t>
+            </a:r>
+            <a:endParaRPr lang="en-US" sz="1800" dirty="0"/>
+          </a:p>
+          <a:p>
+            <a:pPr marL="342900" indent="-342900">
+              <a:spcAft>
+                <a:spcPts val="800"/>
+              </a:spcAft>
+              <a:buSzPct val="100000"/>
+              <a:buChar char="•"/>
+            </a:pPr>
+            <a:r>
+              <a:rPr lang="en-US" sz="1800" dirty="0">
+                <a:solidFill>
+                  <a:srgbClr val="333333"/>
+                </a:solidFill>
+                <a:latin typeface="Arial" pitchFamily="34" charset="0"/>
+                <a:ea typeface="Arial" pitchFamily="34" charset="-122"/>
+                <a:cs typeface="Arial" pitchFamily="34" charset="-120"/>
+              </a:rPr>
+              <a:t>Durvalumab-tremelimumab shows promising results.</a:t>
+            </a:r>
+            <a:endParaRPr lang="en-US" sz="1800" dirty="0"/>
+          </a:p>
+          <a:p>
+            <a:pPr marL="342900" indent="-342900">
+              <a:spcAft>
+                <a:spcPts val="800"/>
+              </a:spcAft>
+              <a:buSzPct val="100000"/>
+              <a:buChar char="•"/>
+            </a:pPr>
+            <a:r>
+              <a:rPr lang="en-US" sz="1800" dirty="0">
+                <a:solidFill>
+                  <a:srgbClr val="333333"/>
+                </a:solidFill>
+                <a:latin typeface="Arial" pitchFamily="34" charset="0"/>
+                <a:ea typeface="Arial" pitchFamily="34" charset="-122"/>
+                <a:cs typeface="Arial" pitchFamily="34" charset="-120"/>
+              </a:rPr>
+              <a:t>Albumin-bilirubin score predicts survival outcomes.</a:t>
             </a:r>
             <a:endParaRPr lang="en-US" sz="1800" dirty="0"/>
           </a:p>
@@ -5639,7 +5723,7 @@
                   <a:srgbClr val="888888"/>
                 </a:solidFill>
               </a:rPr>
-              <a:t>B Bueloni, MG Fernandez-Barrena, E Fiore. Gut. 2026</a:t>
+              <a:t>Campani Claudia, Shim Ju Hyun, Bouattour Mohamed et al.. Clinical cancer research : an official journal of the American Association for Cancer Research. 2026-07-17 DOI: 10.1158/1078-0432.CCR-25-4943</a:t>
             </a:r>
             <a:endParaRPr lang="en-US" sz="800" dirty="0"/>
           </a:p>
@@ -5839,7 +5923,7 @@
                   </a:extLst>
                 </a:hlinkClick>
               </a:rPr>
-              <a:t>Pembrolizumab and stereotactic body radiotherapy combined in advanced hepatocellular carcinoma post sorafenib–A phase II trial (PEMRAD)</a:t>
+              <a:t>Targeting tumor-intrinsic STK40 induces immune vulnerability and drives T cell reinvigoration.</a:t>
             </a:r>
             <a:endParaRPr lang="en-US" sz="2400" dirty="0"/>
           </a:p>
@@ -5875,7 +5959,7 @@
                   <a:srgbClr val="888888"/>
                 </a:solidFill>
               </a:rPr>
-              <a:t>JHEP Reports  ·  IF 7.8  ·  RCT Phase 2</a:t>
+              <a:t>Cancer cell  ·  IF 48.8  ·  Basic Research</a:t>
             </a:r>
             <a:endParaRPr lang="en-US" sz="1000" dirty="0"/>
           </a:p>
@@ -5918,7 +6002,7 @@
                 <a:ea typeface="Arial" pitchFamily="34" charset="-122"/>
                 <a:cs typeface="Arial" pitchFamily="34" charset="-120"/>
               </a:rPr>
-              <a:t>Combination of pembrolizumab and SBRT</a:t>
+              <a:t>STK40 identified as immune evasion regulator</a:t>
             </a:r>
             <a:endParaRPr lang="en-US" sz="1800" dirty="0"/>
           </a:p>
@@ -5939,7 +6023,7 @@
                 <a:ea typeface="Arial" pitchFamily="34" charset="-122"/>
                 <a:cs typeface="Arial" pitchFamily="34" charset="-120"/>
               </a:rPr>
-              <a:t>Phase II trial in advanced HCC</a:t>
+              <a:t>Ablation enhances PD-1 blockade efficacy</a:t>
             </a:r>
             <a:endParaRPr lang="en-US" sz="1800" dirty="0"/>
           </a:p>
@@ -5960,7 +6044,7 @@
                 <a:ea typeface="Arial" pitchFamily="34" charset="-122"/>
                 <a:cs typeface="Arial" pitchFamily="34" charset="-120"/>
               </a:rPr>
-              <a:t>Post-sorafenib treatment evaluation</a:t>
+              <a:t>STK40 deletion prevents tumorigenesis in HCC</a:t>
             </a:r>
             <a:endParaRPr lang="en-US" sz="1800" dirty="0"/>
           </a:p>
@@ -5981,7 +6065,7 @@
                 <a:ea typeface="Arial" pitchFamily="34" charset="-122"/>
                 <a:cs typeface="Arial" pitchFamily="34" charset="-120"/>
               </a:rPr>
-              <a:t>Potential to enhance immune response</a:t>
+              <a:t>Loss of STK40 stabilizes IFNGR1</a:t>
             </a:r>
             <a:endParaRPr lang="en-US" sz="1800" dirty="0"/>
           </a:p>
@@ -6002,7 +6086,7 @@
                 <a:ea typeface="Arial" pitchFamily="34" charset="-122"/>
                 <a:cs typeface="Arial" pitchFamily="34" charset="-120"/>
               </a:rPr>
-              <a:t>Safety and efficacy assessment conducted</a:t>
+              <a:t>Pharmacological inhibition shows potent anti-tumor effects</a:t>
             </a:r>
             <a:endParaRPr lang="en-US" sz="1800" dirty="0"/>
           </a:p>
@@ -6038,7 +6122,7 @@
                   <a:srgbClr val="888888"/>
                 </a:solidFill>
               </a:rPr>
-              <a:t>GM O'Kane, A Mesci, RW Jang. JHEP Reports. 2026</a:t>
+              <a:t>Zhu Lili, Zhang Sisi, Li Botai et al.. Cancer cell. 2026-07-14 DOI: 10.1016/j.ccell.2026.05.001</a:t>
             </a:r>
             <a:endParaRPr lang="en-US" sz="800" dirty="0"/>
           </a:p>
@@ -6238,7 +6322,7 @@
                   </a:extLst>
                 </a:hlinkClick>
               </a:rPr>
-              <a:t>Hepatocellular carcinoma: new therapies on the horizon.</a:t>
+              <a:t>Pembrolizumab and stereotactic body radiotherapy combined in advanced hepatocellular carcinoma post sorafenib–A phase II trial (PEMRAD)</a:t>
             </a:r>
             <a:endParaRPr lang="en-US" sz="2400" dirty="0"/>
           </a:p>
@@ -6274,7 +6358,7 @@
                   <a:srgbClr val="888888"/>
                 </a:solidFill>
               </a:rPr>
-              <a:t>Expert review of gastroenterology &amp; hepatology  ·  Prospective Study  ·  🌏 Asia</a:t>
+              <a:t>JHEP Reports  ·  IF 7.8  ·  RCT Phase 2</a:t>
             </a:r>
             <a:endParaRPr lang="en-US" sz="1000" dirty="0"/>
           </a:p>
@@ -6317,7 +6401,7 @@
                 <a:ea typeface="Arial" pitchFamily="34" charset="-122"/>
                 <a:cs typeface="Arial" pitchFamily="34" charset="-120"/>
               </a:rPr>
-              <a:t>ICIs are frontline for advanced HCC.</a:t>
+              <a:t>Combination of pembrolizumab and SBRT</a:t>
             </a:r>
             <a:endParaRPr lang="en-US" sz="1800" dirty="0"/>
           </a:p>
@@ -6338,7 +6422,7 @@
                 <a:ea typeface="Arial" pitchFamily="34" charset="-122"/>
                 <a:cs typeface="Arial" pitchFamily="34" charset="-120"/>
               </a:rPr>
-              <a:t>Emerging therapies include new systemic agents.</a:t>
+              <a:t>Phase II trial for advanced HCC</a:t>
             </a:r>
             <a:endParaRPr lang="en-US" sz="1800" dirty="0"/>
           </a:p>
@@ -6359,7 +6443,7 @@
                 <a:ea typeface="Arial" pitchFamily="34" charset="-122"/>
                 <a:cs typeface="Arial" pitchFamily="34" charset="-120"/>
               </a:rPr>
-              <a:t>Neoadjuvant ICI regimens show promising responses.</a:t>
+              <a:t>Post-sorafenib treatment evaluation</a:t>
             </a:r>
             <a:endParaRPr lang="en-US" sz="1800" dirty="0"/>
           </a:p>
@@ -6380,7 +6464,7 @@
                 <a:ea typeface="Arial" pitchFamily="34" charset="-122"/>
                 <a:cs typeface="Arial" pitchFamily="34" charset="-120"/>
               </a:rPr>
-              <a:t>Combination therapies improve progression-free survival.</a:t>
+              <a:t>Improved patient outcomes observed</a:t>
             </a:r>
             <a:endParaRPr lang="en-US" sz="1800" dirty="0"/>
           </a:p>
@@ -6401,7 +6485,7 @@
                 <a:ea typeface="Arial" pitchFamily="34" charset="-122"/>
                 <a:cs typeface="Arial" pitchFamily="34" charset="-120"/>
               </a:rPr>
-              <a:t>Personalized approaches in locoregional treatments.</a:t>
+              <a:t>Potential for enhanced immune response</a:t>
             </a:r>
             <a:endParaRPr lang="en-US" sz="1800" dirty="0"/>
           </a:p>
@@ -6437,7 +6521,7 @@
                   <a:srgbClr val="888888"/>
                 </a:solidFill>
               </a:rPr>
-              <a:t>Yuza Kizuki, Akabane Miho, Kawashima Jun et al.. Expert review of gastroenterology &amp; hepatology. 2026-07-10 DOI: 10.1080/17474124.2026.2702585</a:t>
+              <a:t>GM O'Kane, A Mesci, RW Jang. JHEP Reports. 2026</a:t>
             </a:r>
             <a:endParaRPr lang="en-US" sz="800" dirty="0"/>
           </a:p>
@@ -6637,7 +6721,7 @@
                   </a:extLst>
                 </a:hlinkClick>
               </a:rPr>
-              <a:t>UDP-glucuronate decarboxylase 1 promotes tumor immune evasion by accelerating KMT2D loss in hepatocellular carcinoma.</a:t>
+              <a:t>Neoadjuvant Stereotactic Body Radiotherapy plus Immune Therapy Favorably Remodels the Hepatocellular Carcinoma Tumor Microenvironment.</a:t>
             </a:r>
             <a:endParaRPr lang="en-US" sz="2400" dirty="0"/>
           </a:p>
@@ -6673,7 +6757,7 @@
                   <a:srgbClr val="888888"/>
                 </a:solidFill>
               </a:rPr>
-              <a:t>Journal for immunotherapy of cancer  ·  IF 10.9  ·  Basic Research</a:t>
+              <a:t>Clinical cancer research : an official journal of the American Association for Cancer Research  ·  IF 11.5  ·  Prospective Study</a:t>
             </a:r>
             <a:endParaRPr lang="en-US" sz="1000" dirty="0"/>
           </a:p>
@@ -6716,7 +6800,7 @@
                 <a:ea typeface="Arial" pitchFamily="34" charset="-122"/>
                 <a:cs typeface="Arial" pitchFamily="34" charset="-120"/>
               </a:rPr>
-              <a:t>UXS1 identified as immune evasion driver</a:t>
+              <a:t>Neoadjuvant SBRT plus immune therapy used.</a:t>
             </a:r>
             <a:endParaRPr lang="en-US" sz="1800" dirty="0"/>
           </a:p>
@@ -6737,7 +6821,7 @@
                 <a:ea typeface="Arial" pitchFamily="34" charset="-122"/>
                 <a:cs typeface="Arial" pitchFamily="34" charset="-120"/>
               </a:rPr>
-              <a:t>Promotes KMT2D degradation and PD-L1 upregulation</a:t>
+              <a:t>Pilot study with 8 patients conducted.</a:t>
             </a:r>
             <a:endParaRPr lang="en-US" sz="1800" dirty="0"/>
           </a:p>
@@ -6758,7 +6842,7 @@
                 <a:ea typeface="Arial" pitchFamily="34" charset="-122"/>
                 <a:cs typeface="Arial" pitchFamily="34" charset="-120"/>
               </a:rPr>
-              <a:t>High UXS1 linked to poor CD8+ T-cell response</a:t>
+              <a:t>Only 1 patient had grade 3 adverse event.</a:t>
             </a:r>
             <a:endParaRPr lang="en-US" sz="1800" dirty="0"/>
           </a:p>
@@ -6779,7 +6863,7 @@
                 <a:ea typeface="Arial" pitchFamily="34" charset="-122"/>
                 <a:cs typeface="Arial" pitchFamily="34" charset="-120"/>
               </a:rPr>
-              <a:t>Knockout enhances anti-PD-1 therapy efficacy</a:t>
+              <a:t>All patients achieved margin-negative resection.</a:t>
             </a:r>
             <a:endParaRPr lang="en-US" sz="1800" dirty="0"/>
           </a:p>
@@ -6800,7 +6884,7 @@
                 <a:ea typeface="Arial" pitchFamily="34" charset="-122"/>
                 <a:cs typeface="Arial" pitchFamily="34" charset="-120"/>
               </a:rPr>
-              <a:t>Novel UXS1-KMT2D-CEBPB-PD-L1 signaling axis</a:t>
+              <a:t>Increased immune infiltration observed post-treatment.</a:t>
             </a:r>
             <a:endParaRPr lang="en-US" sz="1800" dirty="0"/>
           </a:p>
@@ -6836,7 +6920,7 @@
                   <a:srgbClr val="888888"/>
                 </a:solidFill>
               </a:rPr>
-              <a:t>Zhang Jiwei, Li Yuan, Chen Jiafeng et al.. Journal for immunotherapy of cancer. 2026-07-08 DOI: 10.1136/jitc-2025-013948</a:t>
+              <a:t>Cosner Zoe, Guo Zhoubo, Nawrocki Cole et al.. Clinical cancer research : an official journal of the American Association for Cancer Research. 2026-07-17 DOI: 10.1158/1078-0432.CCR-25-4779</a:t>
             </a:r>
             <a:endParaRPr lang="en-US" sz="800" dirty="0"/>
           </a:p>
@@ -7036,7 +7120,7 @@
                   </a:extLst>
                 </a:hlinkClick>
               </a:rPr>
-              <a:t>Long-term follow-up of a phase 1/2 trial of anti-GDF-15 antibody visugromab plus anti-PD-1 antibody nivolumab in anti-PD-1/-L1 relapsed/refractory solid tumors.</a:t>
+              <a:t>Second-Line and Subsequent Therapies after Atezolizumab Plus Bevacizumab Treatment in Hepatocellular Carcinoma: A Multicenter Prospective Cohort Study.</a:t>
             </a:r>
             <a:endParaRPr lang="en-US" sz="2400" dirty="0"/>
           </a:p>
@@ -7072,7 +7156,7 @@
                   <a:srgbClr val="888888"/>
                 </a:solidFill>
               </a:rPr>
-              <a:t>Journal of hematology &amp; oncology  ·  RCT Phase 2</a:t>
+              <a:t>Gut and liver  ·  Prospective Study  ·  🌏 Asia</a:t>
             </a:r>
             <a:endParaRPr lang="en-US" sz="1000" dirty="0"/>
           </a:p>
@@ -7115,7 +7199,7 @@
                 <a:ea typeface="Arial" pitchFamily="34" charset="-122"/>
                 <a:cs typeface="Arial" pitchFamily="34" charset="-120"/>
               </a:rPr>
-              <a:t>Visugromab plus nivolumab evaluated in trial.</a:t>
+              <a:t>Evaluated second-line and third-line therapies</a:t>
             </a:r>
             <a:endParaRPr lang="en-US" sz="1800" dirty="0"/>
           </a:p>
@@ -7136,7 +7220,7 @@
                 <a:ea typeface="Arial" pitchFamily="34" charset="-122"/>
                 <a:cs typeface="Arial" pitchFamily="34" charset="-120"/>
               </a:rPr>
-              <a:t>Objective response rates: 14.3% for HCC.</a:t>
+              <a:t>Lenvatinib improved PFS over sorafenib</a:t>
             </a:r>
             <a:endParaRPr lang="en-US" sz="1800" dirty="0"/>
           </a:p>
@@ -7157,7 +7241,7 @@
                 <a:ea typeface="Arial" pitchFamily="34" charset="-122"/>
                 <a:cs typeface="Arial" pitchFamily="34" charset="-120"/>
               </a:rPr>
-              <a:t>Median duration of response was 19.4 months.</a:t>
+              <a:t>Regorafenib showed trend for better OS</a:t>
             </a:r>
             <a:endParaRPr lang="en-US" sz="1800" dirty="0"/>
           </a:p>
@@ -7178,7 +7262,7 @@
                 <a:ea typeface="Arial" pitchFamily="34" charset="-122"/>
                 <a:cs typeface="Arial" pitchFamily="34" charset="-120"/>
               </a:rPr>
-              <a:t>GDF-15 blockade may overcome resistance.</a:t>
+              <a:t>Sequential therapy yielded better outcomes</a:t>
             </a:r>
             <a:endParaRPr lang="en-US" sz="1800" dirty="0"/>
           </a:p>
@@ -7199,7 +7283,7 @@
                 <a:ea typeface="Arial" pitchFamily="34" charset="-122"/>
                 <a:cs typeface="Arial" pitchFamily="34" charset="-120"/>
               </a:rPr>
-              <a:t>Further randomized trials are warranted.</a:t>
+              <a:t>Longer AtezoBev exposure linked to OS</a:t>
             </a:r>
             <a:endParaRPr lang="en-US" sz="1800" dirty="0"/>
           </a:p>
@@ -7235,7 +7319,7 @@
                   <a:srgbClr val="888888"/>
                 </a:solidFill>
               </a:rPr>
-              <a:t>Melero Ignacio, de Miguel Mar&amp;#xed;a, Cabanas Elena Garralda et al.. Journal of hematology &amp; oncology. 2026-07-10 DOI: 10.1186/s13045-026-01818-2</a:t>
+              <a:t>Cho Yuri, Lee Jeong-Hoon, Ryoo Baek-Yeol et al.. Gut and liver. 2026-07-14 DOI: 10.5009/gnl250532</a:t>
             </a:r>
             <a:endParaRPr lang="en-US" sz="800" dirty="0"/>
           </a:p>
@@ -7435,7 +7519,7 @@
                   </a:extLst>
                 </a:hlinkClick>
               </a:rPr>
-              <a:t>… plus transarterial chemoembolization and PD-1 inhibitors as conversion therapies for unresectable intermediate-advanced hepatocellular carcinoma: a phase 2 trial …</a:t>
+              <a:t>Mechanistic synergies and optimal sequencing of anti&amp;#x2011;VEGF plus immune checkpoint inhibition in gastrointestinal cancers.</a:t>
             </a:r>
             <a:endParaRPr lang="en-US" sz="2400" dirty="0"/>
           </a:p>
@@ -7471,7 +7555,7 @@
                   <a:srgbClr val="888888"/>
                 </a:solidFill>
               </a:rPr>
-              <a:t>… and Targeted Therapy  ·  RCT Phase 2</a:t>
+              <a:t>Discover oncology  ·  RCT Phase 2</a:t>
             </a:r>
             <a:endParaRPr lang="en-US" sz="1000" dirty="0"/>
           </a:p>
@@ -7514,7 +7598,7 @@
                 <a:ea typeface="Arial" pitchFamily="34" charset="-122"/>
                 <a:cs typeface="Arial" pitchFamily="34" charset="-120"/>
               </a:rPr>
-              <a:t>Combination therapy for unresectable HCC</a:t>
+              <a:t>Combination of anti-VEGF and ICIs enhances treatment efficacy.</a:t>
             </a:r>
             <a:endParaRPr lang="en-US" sz="1800" dirty="0"/>
           </a:p>
@@ -7535,7 +7619,7 @@
                 <a:ea typeface="Arial" pitchFamily="34" charset="-122"/>
                 <a:cs typeface="Arial" pitchFamily="34" charset="-120"/>
               </a:rPr>
-              <a:t>Transarterial chemoembolization (TACE) used</a:t>
+              <a:t>Atezolizumab plus bevacizumab is effective in advanced HCC.</a:t>
             </a:r>
             <a:endParaRPr lang="en-US" sz="1800" dirty="0"/>
           </a:p>
@@ -7556,7 +7640,7 @@
                 <a:ea typeface="Arial" pitchFamily="34" charset="-122"/>
                 <a:cs typeface="Arial" pitchFamily="34" charset="-120"/>
               </a:rPr>
-              <a:t>PD-1 inhibitors enhance treatment efficacy</a:t>
+              <a:t>Optimal sequencing strategies are crucial for maximizing benefits.</a:t>
             </a:r>
             <a:endParaRPr lang="en-US" sz="1800" dirty="0"/>
           </a:p>
@@ -7592,7 +7676,7 @@
                   <a:srgbClr val="888888"/>
                 </a:solidFill>
               </a:rPr>
-              <a:t>X Zhang, H Cai, W Peng. … and Targeted Therapy. 2026</a:t>
+              <a:t>Lorestani Parsa, Robat-Jazi Behrouz, Nejati Negar et al.. Discover oncology. 2026-07-17 DOI: 10.1007/s12672-026-05539-3</a:t>
             </a:r>
             <a:endParaRPr lang="en-US" sz="800" dirty="0"/>
           </a:p>

--- a/docs/digest-en.pptx
+++ b/docs/digest-en.pptx
@@ -2269,7 +2269,7 @@
                   <a:srgbClr val="888888"/>
                 </a:solidFill>
               </a:rPr>
-              <a:t>2026-07-13 — 2026-07-20</a:t>
+              <a:t>2026-07-20 — 2026-07-27</a:t>
             </a:r>
             <a:endParaRPr lang="en-US" sz="1400" dirty="0"/>
           </a:p>
@@ -2460,7 +2460,7 @@
                   </a:extLst>
                 </a:hlinkClick>
               </a:rPr>
-              <a:t>… plus transarterial chemoembolization and PD-1 inhibitors as conversion therapies for unresectable intermediate-advanced hepatocellular carcinoma: a phase 2 trial …</a:t>
+              <a:t>Radiotherapy versus local ablation therapy for the treatment of hepatocellular carcinoma: A systematic review and meta-analysis.</a:t>
             </a:r>
             <a:endParaRPr lang="en-US" sz="2400" dirty="0"/>
           </a:p>
@@ -2496,7 +2496,7 @@
                   <a:srgbClr val="888888"/>
                 </a:solidFill>
               </a:rPr>
-              <a:t>… and Targeted Therapy  ·  RCT Phase 2</a:t>
+              <a:t>Journal of Clinical …  ·  Meta-Analysis</a:t>
             </a:r>
             <a:endParaRPr lang="en-US" sz="1000" dirty="0"/>
           </a:p>
@@ -2539,7 +2539,7 @@
                 <a:ea typeface="Arial" pitchFamily="34" charset="-122"/>
                 <a:cs typeface="Arial" pitchFamily="34" charset="-120"/>
               </a:rPr>
-              <a:t>Combination therapy for unresectable HCC</a:t>
+              <a:t>Comparison of radiotherapy and local ablation</a:t>
             </a:r>
             <a:endParaRPr lang="en-US" sz="1800" dirty="0"/>
           </a:p>
@@ -2560,7 +2560,7 @@
                 <a:ea typeface="Arial" pitchFamily="34" charset="-122"/>
                 <a:cs typeface="Arial" pitchFamily="34" charset="-120"/>
               </a:rPr>
-              <a:t>Transarterial chemoembolization (TACE) used</a:t>
+              <a:t>Focus on hepatocellular carcinoma treatment</a:t>
             </a:r>
             <a:endParaRPr lang="en-US" sz="1800" dirty="0"/>
           </a:p>
@@ -2581,7 +2581,7 @@
                 <a:ea typeface="Arial" pitchFamily="34" charset="-122"/>
                 <a:cs typeface="Arial" pitchFamily="34" charset="-120"/>
               </a:rPr>
-              <a:t>PD-1 inhibitors enhance treatment efficacy</a:t>
+              <a:t>Analysis of local progression-free survival</a:t>
             </a:r>
             <a:endParaRPr lang="en-US" sz="1800" dirty="0"/>
           </a:p>
@@ -2602,7 +2602,7 @@
                 <a:ea typeface="Arial" pitchFamily="34" charset="-122"/>
                 <a:cs typeface="Arial" pitchFamily="34" charset="-120"/>
               </a:rPr>
-              <a:t>Phase 2 trial demonstrates promising results</a:t>
+              <a:t>Evaluation of radiofrequency and microwave ablation</a:t>
             </a:r>
             <a:endParaRPr lang="en-US" sz="1800" dirty="0"/>
           </a:p>
@@ -2623,7 +2623,7 @@
                 <a:ea typeface="Arial" pitchFamily="34" charset="-122"/>
                 <a:cs typeface="Arial" pitchFamily="34" charset="-120"/>
               </a:rPr>
-              <a:t>Potential for conversion to resectable disease</a:t>
+              <a:t>Systematic review and meta-analysis conducted</a:t>
             </a:r>
             <a:endParaRPr lang="en-US" sz="1800" dirty="0"/>
           </a:p>
@@ -2659,7 +2659,7 @@
                   <a:srgbClr val="888888"/>
                 </a:solidFill>
               </a:rPr>
-              <a:t>X Zhang, H Cai, W Peng. … and Targeted Therapy. 2026</a:t>
+              <a:t>SH Bae, SH Choi, SM Yoon. Journal of Clinical …. 2026</a:t>
             </a:r>
             <a:endParaRPr lang="en-US" sz="800" dirty="0"/>
           </a:p>
@@ -2859,7 +2859,7 @@
                   </a:extLst>
                 </a:hlinkClick>
               </a:rPr>
-              <a:t>Disrupting fumarylacetoacetate hydrolase by stratified nanoplatforms orchestrates metabolic-immune reprogramming and prevents post-ablation HCC relapse.</a:t>
+              <a:t>Immune Checkpoint Inhibitor–Based Adjuvant Treatment Versus Surveillance in Curatively Treated Hepatocellular Carcinoma: a Systematic Review and Meta …</a:t>
             </a:r>
             <a:endParaRPr lang="en-US" sz="2400" dirty="0"/>
           </a:p>
@@ -2895,7 +2895,7 @@
                   <a:srgbClr val="888888"/>
                 </a:solidFill>
               </a:rPr>
-              <a:t>Nature communications  ·  IF 14.7</a:t>
+              <a:t>Journal of gastroenterology and …  ·  Systematic Review</a:t>
             </a:r>
             <a:endParaRPr lang="en-US" sz="1000" dirty="0"/>
           </a:p>
@@ -2938,7 +2938,7 @@
                 <a:ea typeface="Arial" pitchFamily="34" charset="-122"/>
                 <a:cs typeface="Arial" pitchFamily="34" charset="-120"/>
               </a:rPr>
-              <a:t>FAH upregulation promotes HCC relapse post-ablation.</a:t>
+              <a:t>Immune checkpoint inhibitors show promise in HCC.</a:t>
             </a:r>
             <a:endParaRPr lang="en-US" sz="1800" dirty="0"/>
           </a:p>
@@ -2959,7 +2959,7 @@
                 <a:ea typeface="Arial" pitchFamily="34" charset="-122"/>
                 <a:cs typeface="Arial" pitchFamily="34" charset="-120"/>
               </a:rPr>
-              <a:t>Fumarate enhances energy metabolism and CD8+ T cell impairment.</a:t>
+              <a:t>Adjuvant treatment improves outcomes post-surgery.</a:t>
             </a:r>
             <a:endParaRPr lang="en-US" sz="1800" dirty="0"/>
           </a:p>
@@ -2980,49 +2980,7 @@
                 <a:ea typeface="Arial" pitchFamily="34" charset="-122"/>
                 <a:cs typeface="Arial" pitchFamily="34" charset="-120"/>
               </a:rPr>
-              <a:t>Engineered nanoplatform disrupts FAH-fumarate-HSP70 axis.</a:t>
-            </a:r>
-            <a:endParaRPr lang="en-US" sz="1800" dirty="0"/>
-          </a:p>
-          <a:p>
-            <a:pPr marL="342900" indent="-342900">
-              <a:spcAft>
-                <a:spcPts val="800"/>
-              </a:spcAft>
-              <a:buSzPct val="100000"/>
-              <a:buChar char="•"/>
-            </a:pPr>
-            <a:r>
-              <a:rPr lang="en-US" sz="1800" dirty="0">
-                <a:solidFill>
-                  <a:srgbClr val="333333"/>
-                </a:solidFill>
-                <a:latin typeface="Arial" pitchFamily="34" charset="0"/>
-                <a:ea typeface="Arial" pitchFamily="34" charset="-122"/>
-                <a:cs typeface="Arial" pitchFamily="34" charset="-120"/>
-              </a:rPr>
-              <a:t>Site-specific release of therapeutic agents improves outcomes.</a:t>
-            </a:r>
-            <a:endParaRPr lang="en-US" sz="1800" dirty="0"/>
-          </a:p>
-          <a:p>
-            <a:pPr marL="342900" indent="-342900">
-              <a:spcAft>
-                <a:spcPts val="800"/>
-              </a:spcAft>
-              <a:buSzPct val="100000"/>
-              <a:buChar char="•"/>
-            </a:pPr>
-            <a:r>
-              <a:rPr lang="en-US" sz="1800" dirty="0">
-                <a:solidFill>
-                  <a:srgbClr val="333333"/>
-                </a:solidFill>
-                <a:latin typeface="Arial" pitchFamily="34" charset="0"/>
-                <a:ea typeface="Arial" pitchFamily="34" charset="-122"/>
-                <a:cs typeface="Arial" pitchFamily="34" charset="-120"/>
-              </a:rPr>
-              <a:t>Combines metabolic blockade with immunomodulation for HCC.</a:t>
+              <a:t>Surveillance alone may not be sufficient.</a:t>
             </a:r>
             <a:endParaRPr lang="en-US" sz="1800" dirty="0"/>
           </a:p>
@@ -3058,7 +3016,7 @@
                   <a:srgbClr val="888888"/>
                 </a:solidFill>
               </a:rPr>
-              <a:t>Hong Zhiwen, Liu Xiaolong, A Rouhan et al.. Nature communications. 2026-07-14 DOI: 10.1038/s41467-026-75422-w</a:t>
+              <a:t>E Akkus, HA Yaşar. Journal of gastroenterology and …. 2026</a:t>
             </a:r>
             <a:endParaRPr lang="en-US" sz="800" dirty="0"/>
           </a:p>
@@ -3258,7 +3216,7 @@
                   </a:extLst>
                 </a:hlinkClick>
               </a:rPr>
-              <a:t>Nrf2-mediated metabolic reprogramming drives regulatory T cell accumulation in hepatocellular carcinoma.</a:t>
+              <a:t>… on interventional therapy and immune checkpoint inhibitors (ICIs) in patients with intermediate-and advanced-stage hepatocellular carcinoma: a systematic review …</a:t>
             </a:r>
             <a:endParaRPr lang="en-US" sz="2400" dirty="0"/>
           </a:p>
@@ -3294,7 +3252,7 @@
                   <a:srgbClr val="888888"/>
                 </a:solidFill>
               </a:rPr>
-              <a:t>Nature communications  ·  IF 14.7</a:t>
+              <a:t>… , Immunotherapy  ·  Systematic Review</a:t>
             </a:r>
             <a:endParaRPr lang="en-US" sz="1000" dirty="0"/>
           </a:p>
@@ -3337,7 +3295,7 @@
                 <a:ea typeface="Arial" pitchFamily="34" charset="-122"/>
                 <a:cs typeface="Arial" pitchFamily="34" charset="-120"/>
               </a:rPr>
-              <a:t>Tregs in HCC activate Nrf2 pathway.</a:t>
+              <a:t>Combination therapy shows promise in HCC.</a:t>
             </a:r>
             <a:endParaRPr lang="en-US" sz="1800" dirty="0"/>
           </a:p>
@@ -3358,7 +3316,7 @@
                 <a:ea typeface="Arial" pitchFamily="34" charset="-122"/>
                 <a:cs typeface="Arial" pitchFamily="34" charset="-120"/>
               </a:rPr>
-              <a:t>Nrf2 enhances Treg survival and function.</a:t>
+              <a:t>ICIs enhance efficacy of interventional therapies.</a:t>
             </a:r>
             <a:endParaRPr lang="en-US" sz="1800" dirty="0"/>
           </a:p>
@@ -3379,49 +3337,7 @@
                 <a:ea typeface="Arial" pitchFamily="34" charset="-122"/>
                 <a:cs typeface="Arial" pitchFamily="34" charset="-120"/>
               </a:rPr>
-              <a:t>Targeting Nrf2 reduces Treg accumulation.</a:t>
-            </a:r>
-            <a:endParaRPr lang="en-US" sz="1800" dirty="0"/>
-          </a:p>
-          <a:p>
-            <a:pPr marL="342900" indent="-342900">
-              <a:spcAft>
-                <a:spcPts val="800"/>
-              </a:spcAft>
-              <a:buSzPct val="100000"/>
-              <a:buChar char="•"/>
-            </a:pPr>
-            <a:r>
-              <a:rPr lang="en-US" sz="1800" dirty="0">
-                <a:solidFill>
-                  <a:srgbClr val="333333"/>
-                </a:solidFill>
-                <a:latin typeface="Arial" pitchFamily="34" charset="0"/>
-                <a:ea typeface="Arial" pitchFamily="34" charset="-122"/>
-                <a:cs typeface="Arial" pitchFamily="34" charset="-120"/>
-              </a:rPr>
-              <a:t>High Nrf2 in Tregs linked to poor survival.</a:t>
-            </a:r>
-            <a:endParaRPr lang="en-US" sz="1800" dirty="0"/>
-          </a:p>
-          <a:p>
-            <a:pPr marL="342900" indent="-342900">
-              <a:spcAft>
-                <a:spcPts val="800"/>
-              </a:spcAft>
-              <a:buSzPct val="100000"/>
-              <a:buChar char="•"/>
-            </a:pPr>
-            <a:r>
-              <a:rPr lang="en-US" sz="1800" dirty="0">
-                <a:solidFill>
-                  <a:srgbClr val="333333"/>
-                </a:solidFill>
-                <a:latin typeface="Arial" pitchFamily="34" charset="0"/>
-                <a:ea typeface="Arial" pitchFamily="34" charset="-122"/>
-                <a:cs typeface="Arial" pitchFamily="34" charset="-120"/>
-              </a:rPr>
-              <a:t>Nrf2 modulation may improve immunotherapy outcomes.</a:t>
+              <a:t>Systematic review highlights clinical outcomes.</a:t>
             </a:r>
             <a:endParaRPr lang="en-US" sz="1800" dirty="0"/>
           </a:p>
@@ -3457,7 +3373,7 @@
                   <a:srgbClr val="888888"/>
                 </a:solidFill>
               </a:rPr>
-              <a:t>Perpi&amp;#xf1;&amp;#xe1;n E, Sompairac N, Marin Correa D et al.. Nature communications. 2026-07-13 DOI: 10.1038/s41467-026-73485-3</a:t>
+              <a:t>J Su, Y Su, R Mai. … , Immunotherapy. 2026</a:t>
             </a:r>
             <a:endParaRPr lang="en-US" sz="800" dirty="0"/>
           </a:p>
@@ -3674,7 +3590,7 @@
                   <a:srgbClr val="FFFFFF"/>
                 </a:solidFill>
               </a:rPr>
-              <a:t>1. **免疫療法的潛力**  </a:t>
+              <a:t>1. **克隆多样性与复发机制**  </a:t>
             </a:r>
             <a:endParaRPr lang="en-US" sz="1200" dirty="0"/>
           </a:p>
@@ -3691,7 +3607,7 @@
                   <a:srgbClr val="FFFFFF"/>
                 </a:solidFill>
               </a:rPr>
-              <a:t>   Immunotherapy, particularly PD-1 blockade, shows significant promise in enhancing local immune responses against hepatocellular carcinoma (HCC), especially in patients with underlying hepatitis B virus infection.  </a:t>
+              <a:t>   Clonal diversity plays a critical role in the distinct recurrence patterns observed in hepatocellular carcinoma (HCC), highlighting the need for personalized treatment strategies.  </a:t>
             </a:r>
             <a:endParaRPr lang="en-US" sz="1200" dirty="0"/>
           </a:p>
@@ -3708,7 +3624,7 @@
                   <a:srgbClr val="FFFFFF"/>
                 </a:solidFill>
               </a:rPr>
-              <a:t>   免疫療法，特別是PD-1抑制劑，顯示出在增強對肝細胞癌（HCC）的局部免疫反應方面的顯著潛力，尤其是在有乙型肝炎病毒感染的患者中。</a:t>
+              <a:t>   克隆多樣性在肝細胞癌（HCC）的不同復發模式中扮演關鍵角色，強調了個性化治療策略的必要性。</a:t>
             </a:r>
             <a:endParaRPr lang="en-US" sz="1200" dirty="0"/>
           </a:p>
@@ -3734,7 +3650,7 @@
                   <a:srgbClr val="FFFFFF"/>
                 </a:solidFill>
               </a:rPr>
-              <a:t>2. **長期生存率的提升**  </a:t>
+              <a:t>2. **免疫治疗与手术结合的潜力**  </a:t>
             </a:r>
             <a:endParaRPr lang="en-US" sz="1200" dirty="0"/>
           </a:p>
@@ -3751,7 +3667,7 @@
                   <a:srgbClr val="FFFFFF"/>
                 </a:solidFill>
               </a:rPr>
-              <a:t>   Immune checkpoint inhibitors (ICIs) can lead to long-term survival and potential cures in HCC, indicating the need for further exploration of their efficacy in various stages of the disease.  </a:t>
+              <a:t>   The integration of immune checkpoint inhibitors with surgical approaches may enhance therapeutic outcomes, particularly in patients with resectable HCC.  </a:t>
             </a:r>
             <a:endParaRPr lang="en-US" sz="1200" dirty="0"/>
           </a:p>
@@ -3768,7 +3684,7 @@
                   <a:srgbClr val="FFFFFF"/>
                 </a:solidFill>
               </a:rPr>
-              <a:t>   免疫檢查點抑制劑（ICIs）能夠提高HCC的長期生存率並有潛在治癒的可能，這表明需要進一步探索其在不同疾病階段的療效。</a:t>
+              <a:t>   將免疫檢查點抑制劑與手術方法結合可能會改善治療結果，特別是在可切除的HCC患者中。</a:t>
             </a:r>
             <a:endParaRPr lang="en-US" sz="1200" dirty="0"/>
           </a:p>
@@ -3794,7 +3710,7 @@
                   <a:srgbClr val="FFFFFF"/>
                 </a:solidFill>
               </a:rPr>
-              <a:t>3. **腫瘤微環境的重塑**  </a:t>
+              <a:t>3. **新抗原疫苗的挑战与前景**  </a:t>
             </a:r>
             <a:endParaRPr lang="en-US" sz="1200" dirty="0"/>
           </a:p>
@@ -3811,7 +3727,7 @@
                   <a:srgbClr val="FFFFFF"/>
                 </a:solidFill>
               </a:rPr>
-              <a:t>   Combining immunotherapy with locoregional therapies, such as stereotactic body radiotherapy, can favorably remodel the tumor microenvironment, enhancing treatment outcomes.  </a:t>
+              <a:t>   Despite the promise of mutation-derived neoantigen vaccines, their clinical application is limited by the availability of suitable antigens, necessitating innovative approaches to neoantigen discovery.  </a:t>
             </a:r>
             <a:endParaRPr lang="en-US" sz="1200" dirty="0"/>
           </a:p>
@@ -3828,7 +3744,7 @@
                   <a:srgbClr val="FFFFFF"/>
                 </a:solidFill>
               </a:rPr>
-              <a:t>   將免疫療法與局部治療（如立體定向體放療）結合，可以有利於重塑腫瘤微環境，從而改善治療結果。</a:t>
+              <a:t>   儘管突變衍生的新抗原疫苗具有潛力，但其臨床應用受到合適抗原可用性的限制，需創新方法來發現新抗原。</a:t>
             </a:r>
             <a:endParaRPr lang="en-US" sz="1200" dirty="0"/>
           </a:p>
@@ -3854,7 +3770,7 @@
                   <a:srgbClr val="FFFFFF"/>
                 </a:solidFill>
               </a:rPr>
-              <a:t>4. **抵抗機制的探索**  </a:t>
+              <a:t>4. **局部消融与放疗的比较**  </a:t>
             </a:r>
             <a:endParaRPr lang="en-US" sz="1200" dirty="0"/>
           </a:p>
@@ -3871,7 +3787,7 @@
                   <a:srgbClr val="FFFFFF"/>
                 </a:solidFill>
               </a:rPr>
-              <a:t>   Identifying novel regulators of immune responses, such as STK40, is crucial for understanding resistance mechanisms in HCC and developing more effective therapies.  </a:t>
+              <a:t>   Local ablative therapies, such as radiofrequency and microwave ablation, show comparable efficacy to radiotherapy, emphasizing their importance in the management of small to medium HCC.  </a:t>
             </a:r>
             <a:endParaRPr lang="en-US" sz="1200" dirty="0"/>
           </a:p>
@@ -3888,7 +3804,7 @@
                   <a:srgbClr val="FFFFFF"/>
                 </a:solidFill>
               </a:rPr>
-              <a:t>   確定免疫反應的新調節因子（如STK40）對於理解HCC中的抵抗機制和開發更有效的療法至關重要。</a:t>
+              <a:t>   局部消融療法，如射頻和微波消融，顯示出與放療相當的療效，強調了它們在小至中型HCC管理中的重要性。</a:t>
             </a:r>
             <a:endParaRPr lang="en-US" sz="1200" dirty="0"/>
           </a:p>
@@ -3914,7 +3830,7 @@
                   <a:srgbClr val="FFFFFF"/>
                 </a:solidFill>
               </a:rPr>
-              <a:t>5. **代謝和免疫重編程**  </a:t>
+              <a:t>5. **术后免疫治疗的必要性**  </a:t>
             </a:r>
             <a:endParaRPr lang="en-US" sz="1200" dirty="0"/>
           </a:p>
@@ -3931,7 +3847,7 @@
                   <a:srgbClr val="FFFFFF"/>
                 </a:solidFill>
               </a:rPr>
-              <a:t>   Targeting metabolic pathways in HCC can disrupt immunosuppressive environments and prevent recurrence post-ablation, highlighting the interplay between metabolism and immunity.</a:t>
+              <a:t>   There is a growing recognition of the potential benefits of adjuvant immunotherapy following curative treatments for HCC, which may improve long-term outcomes.</a:t>
             </a:r>
             <a:endParaRPr lang="en-US" sz="1200" dirty="0"/>
           </a:p>
@@ -4077,7 +3993,7 @@
                   <a:srgbClr val="FFFFFF"/>
                 </a:solidFill>
               </a:rPr>
-              <a:t>針對HCC中的代謝途徑可以破壞免疫抑制環境並防止消融後的復發，突顯了代謝與免疫之間的相互作用。</a:t>
+              <a:t>越來越多的認識到術後免疫治療對於HCC的潛在益處，可能改善長期結果。</a:t>
             </a:r>
             <a:endParaRPr lang="en-US" sz="1200" dirty="0"/>
           </a:p>
@@ -4129,7 +4045,7 @@
                   <a:srgbClr val="FFFFFF"/>
                 </a:solidFill>
               </a:rPr>
-              <a:t>1. **個性化療法的發展**  </a:t>
+              <a:t>1. **深入研究克隆多样性**  </a:t>
             </a:r>
             <a:endParaRPr lang="en-US" sz="1200" dirty="0"/>
           </a:p>
@@ -4146,7 +4062,7 @@
                   <a:srgbClr val="FFFFFF"/>
                 </a:solidFill>
               </a:rPr>
-              <a:t>   Further studies should focus on personalized immunotherapy approaches that consider the unique tumor microenvironment and patient-specific factors in HCC.  </a:t>
+              <a:t>   Further investigations into the clonal evolution of HCC could provide insights into recurrence mechanisms and inform targeted therapies.  </a:t>
             </a:r>
             <a:endParaRPr lang="en-US" sz="1200" dirty="0"/>
           </a:p>
@@ -4163,7 +4079,7 @@
                   <a:srgbClr val="FFFFFF"/>
                 </a:solidFill>
               </a:rPr>
-              <a:t>   未來的研究應集中於個性化免疫療法的發展，考慮HCC中獨特的腫瘤微環境和患者特定因素。</a:t>
+              <a:t>   進一步研究HCC的克隆演化可能提供有關復發機制的見解，並為靶向治療提供依據。</a:t>
             </a:r>
             <a:endParaRPr lang="en-US" sz="1200" dirty="0"/>
           </a:p>
@@ -4189,7 +4105,7 @@
                   <a:srgbClr val="FFFFFF"/>
                 </a:solidFill>
               </a:rPr>
-              <a:t>2. **多重療法的組合**  </a:t>
+              <a:t>2. **免疫治疗与局部治疗的联合策略**  </a:t>
             </a:r>
             <a:endParaRPr lang="en-US" sz="1200" dirty="0"/>
           </a:p>
@@ -4206,7 +4122,7 @@
                   <a:srgbClr val="FFFFFF"/>
                 </a:solidFill>
               </a:rPr>
-              <a:t>   Investigating the synergistic effects of combining immune checkpoint inhibitors with other treatments, such as targeted therapies and locoregional approaches, to improve patient outcomes.  </a:t>
+              <a:t>   Future trials should explore the synergistic effects of combining immune checkpoint inhibitors with local ablation therapies to optimize treatment regimens.  </a:t>
             </a:r>
             <a:endParaRPr lang="en-US" sz="1200" dirty="0"/>
           </a:p>
@@ -4223,7 +4139,7 @@
                   <a:srgbClr val="FFFFFF"/>
                 </a:solidFill>
               </a:rPr>
-              <a:t>   探索將免疫檢查點抑制劑與其他治療（如靶向療法和局部療法）組合的協同效應，以改善患者預後。</a:t>
+              <a:t>   未來的試驗應探索將免疫檢查點抑制劑與局部消融療法結合的協同效應，以優化治療方案。</a:t>
             </a:r>
             <a:endParaRPr lang="en-US" sz="1200" dirty="0"/>
           </a:p>
@@ -4249,7 +4165,7 @@
                   <a:srgbClr val="FFFFFF"/>
                 </a:solidFill>
               </a:rPr>
-              <a:t>3. **抵抗機制的深入研究**  </a:t>
+              <a:t>3. **新抗原的发现与应用**  </a:t>
             </a:r>
             <a:endParaRPr lang="en-US" sz="1200" dirty="0"/>
           </a:p>
@@ -4266,7 +4182,7 @@
                   <a:srgbClr val="FFFFFF"/>
                 </a:solidFill>
               </a:rPr>
-              <a:t>   More research is needed to elucidate the mechanisms of resistance to immunotherapy in HCC, particularly focusing on metabolic adaptations and immune evasion strategies.  </a:t>
+              <a:t>   Research should focus on identifying and validating novel neoantigens that can be effectively targeted by immunotherapies to enhance patient responses.  </a:t>
             </a:r>
             <a:endParaRPr lang="en-US" sz="1200" dirty="0"/>
           </a:p>
@@ -4283,7 +4199,7 @@
                   <a:srgbClr val="FFFFFF"/>
                 </a:solidFill>
               </a:rPr>
-              <a:t>   需要更多研究來闡明HCC中對免疫療法的抵抗機制，特別是集中於代謝適應和免疫逃逸策略。</a:t>
+              <a:t>   研究應專注於識別和驗證可以有效被免疫療法靶向的新型新抗原，以增強患者反應。</a:t>
             </a:r>
             <a:endParaRPr lang="en-US" sz="1200" dirty="0"/>
           </a:p>
@@ -4309,7 +4225,7 @@
                   <a:srgbClr val="FFFFFF"/>
                 </a:solidFill>
               </a:rPr>
-              <a:t>4. **早期介入的臨床試驗**  </a:t>
+              <a:t>4. **术后免疫治疗的临床试验**  </a:t>
             </a:r>
             <a:endParaRPr lang="en-US" sz="1200" dirty="0"/>
           </a:p>
@@ -4326,7 +4242,7 @@
                   <a:srgbClr val="FFFFFF"/>
                 </a:solidFill>
               </a:rPr>
-              <a:t>   Conducting clinical trials on the efficacy of immunotherapy in earlier stages of HCC, to establish optimal treatment protocols and timing.  </a:t>
+              <a:t>   Conducting randomized clinical trials to assess the efficacy of adjuvant immunotherapy in resected HCC patients will be crucial for establishing standard care protocols.  </a:t>
             </a:r>
             <a:endParaRPr lang="en-US" sz="1200" dirty="0"/>
           </a:p>
@@ -4343,7 +4259,7 @@
                   <a:srgbClr val="FFFFFF"/>
                 </a:solidFill>
               </a:rPr>
-              <a:t>   開展關於免疫療法在HCC早期階段療效的臨床試驗，以確立最佳治療方案和時機。</a:t>
+              <a:t>   開展隨機臨床試驗以評估術後免疫治療在切除HCC患者中的療效，對於建立標準護理方案至關重要。</a:t>
             </a:r>
             <a:endParaRPr lang="en-US" sz="1200" dirty="0"/>
           </a:p>
@@ -4369,7 +4285,7 @@
                   <a:srgbClr val="FFFFFF"/>
                 </a:solidFill>
               </a:rPr>
-              <a:t>5. **代謝與免疫的交互作用**  </a:t>
+              <a:t>5. **个体化治疗方案的开发**  </a:t>
             </a:r>
             <a:endParaRPr lang="en-US" sz="1200" dirty="0"/>
           </a:p>
@@ -4386,7 +4302,7 @@
                   <a:srgbClr val="FFFFFF"/>
                 </a:solidFill>
               </a:rPr>
-              <a:t>   Investigating the metabolic reprogramming in HCC and its impact on immune cell function, aiming to develop strategies that can enhance anti-tumor immunity.  </a:t>
+              <a:t>   Developing personalized treatment approaches based on molecular profiling and immune landscape of HCC could improve therapeutic outcomes.  </a:t>
             </a:r>
             <a:endParaRPr lang="en-US" sz="1200" dirty="0"/>
           </a:p>
@@ -4403,7 +4319,7 @@
                   <a:srgbClr val="FFFFFF"/>
                 </a:solidFill>
               </a:rPr>
-              <a:t>   研究HCC中的代謝重編程及其對免疫細胞功能的影響，旨在開發可以增強抗腫瘤免疫的策略。</a:t>
+              <a:t>   基於HCC的分子特徵和免疫環境開發個性化治療方案可能改善治療結果。</a:t>
             </a:r>
             <a:endParaRPr lang="en-US" sz="1200" dirty="0"/>
           </a:p>
@@ -4637,7 +4553,7 @@
                 <a:ea typeface="Arial" pitchFamily="34" charset="-122"/>
                 <a:cs typeface="Arial" pitchFamily="34" charset="-120"/>
               </a:rPr>
-              <a:t>PD-1 blockade unleashes local hepatitis B virus-related B cell response inhibiti…</a:t>
+              <a:t>Clonal diversity underpins distinct modes of recurrence in hepatocellular carcin…</a:t>
             </a:r>
             <a:endParaRPr lang="en-US" sz="1400" dirty="0"/>
           </a:p>
@@ -4674,7 +4590,7 @@
                 <a:ea typeface="Arial" pitchFamily="34" charset="-122"/>
                 <a:cs typeface="Arial" pitchFamily="34" charset="-120"/>
               </a:rPr>
-              <a:t>Long-term Survival and Cure Fraction in Patients with Advanced Hepatocellular Ca…</a:t>
+              <a:t>Conversion surgery as a missing outcome in first-line immunotherapy trials for h…</a:t>
             </a:r>
             <a:endParaRPr lang="en-US" sz="1400" dirty="0"/>
           </a:p>
@@ -4711,7 +4627,7 @@
                 <a:ea typeface="Arial" pitchFamily="34" charset="-122"/>
                 <a:cs typeface="Arial" pitchFamily="34" charset="-120"/>
               </a:rPr>
-              <a:t>Targeting tumor-intrinsic STK40 induces immune vulnerability and drives T cell r…</a:t>
+              <a:t>Nivolumab in combination with lenvatinib in unresectable hepatocellular carcinom…</a:t>
             </a:r>
             <a:endParaRPr lang="en-US" sz="1400" dirty="0"/>
           </a:p>
@@ -4748,7 +4664,7 @@
                 <a:ea typeface="Arial" pitchFamily="34" charset="-122"/>
                 <a:cs typeface="Arial" pitchFamily="34" charset="-120"/>
               </a:rPr>
-              <a:t>Pembrolizumab and stereotactic body radiotherapy combined in advanced hepatocell…</a:t>
+              <a:t>Decoding neoantigen-encoding tumor-specific transcripts unveils a shared target …</a:t>
             </a:r>
             <a:endParaRPr lang="en-US" sz="1400" dirty="0"/>
           </a:p>
@@ -4785,7 +4701,7 @@
                 <a:ea typeface="Arial" pitchFamily="34" charset="-122"/>
                 <a:cs typeface="Arial" pitchFamily="34" charset="-120"/>
               </a:rPr>
-              <a:t>Neoadjuvant Stereotactic Body Radiotherapy plus Immune Therapy Favorably Remodel…</a:t>
+              <a:t>Bevacizumab plus iparomlimab/tuvonralimab with hepatic artery infusion chemother…</a:t>
             </a:r>
             <a:endParaRPr lang="en-US" sz="1400" dirty="0"/>
           </a:p>
@@ -4822,7 +4738,7 @@
                 <a:ea typeface="Arial" pitchFamily="34" charset="-122"/>
                 <a:cs typeface="Arial" pitchFamily="34" charset="-120"/>
               </a:rPr>
-              <a:t>Second-Line and Subsequent Therapies after Atezolizumab Plus Bevacizumab Treatme…</a:t>
+              <a:t>Pembrolizumab and stereotactic body radiotherapy combined in advanced hepatocell…</a:t>
             </a:r>
             <a:endParaRPr lang="en-US" sz="1400" dirty="0"/>
           </a:p>
@@ -4859,7 +4775,7 @@
                 <a:ea typeface="Arial" pitchFamily="34" charset="-122"/>
                 <a:cs typeface="Arial" pitchFamily="34" charset="-120"/>
               </a:rPr>
-              <a:t>Mechanistic synergies and optimal sequencing of anti&amp;#x2011;VEGF plus immune che…</a:t>
+              <a:t>Image-guided radiofrequency versus microwave ablation for small to medium hepato…</a:t>
             </a:r>
             <a:endParaRPr lang="en-US" sz="1400" dirty="0"/>
           </a:p>
@@ -4896,7 +4812,7 @@
                 <a:ea typeface="Arial" pitchFamily="34" charset="-122"/>
                 <a:cs typeface="Arial" pitchFamily="34" charset="-120"/>
               </a:rPr>
-              <a:t>… plus transarterial chemoembolization and PD-1 inhibitors as conversion therapi…</a:t>
+              <a:t>Radiotherapy versus local ablation therapy for the treatment of hepatocellular c…</a:t>
             </a:r>
             <a:endParaRPr lang="en-US" sz="1400" dirty="0"/>
           </a:p>
@@ -4933,7 +4849,7 @@
                 <a:ea typeface="Arial" pitchFamily="34" charset="-122"/>
                 <a:cs typeface="Arial" pitchFamily="34" charset="-120"/>
               </a:rPr>
-              <a:t>Disrupting fumarylacetoacetate hydrolase by stratified nanoplatforms orchestrate…</a:t>
+              <a:t>Immune Checkpoint Inhibitor–Based Adjuvant Treatment Versus Surveillance in Cura…</a:t>
             </a:r>
             <a:endParaRPr lang="en-US" sz="1400" dirty="0"/>
           </a:p>
@@ -4970,7 +4886,7 @@
                 <a:ea typeface="Arial" pitchFamily="34" charset="-122"/>
                 <a:cs typeface="Arial" pitchFamily="34" charset="-120"/>
               </a:rPr>
-              <a:t>Nrf2-mediated metabolic reprogramming drives regulatory T cell accumulation in h…</a:t>
+              <a:t>… on interventional therapy and immune checkpoint inhibitors (ICIs) in patients …</a:t>
             </a:r>
             <a:endParaRPr lang="en-US" sz="1400" dirty="0"/>
           </a:p>
@@ -5125,7 +5041,7 @@
                   </a:extLst>
                 </a:hlinkClick>
               </a:rPr>
-              <a:t>PD-1 blockade unleashes local hepatitis B virus-related B cell response inhibiting hepatocellular carcinoma.</a:t>
+              <a:t>Clonal diversity underpins distinct modes of recurrence in hepatocellular carcinoma: the PLANet cohort study.</a:t>
             </a:r>
             <a:endParaRPr lang="en-US" sz="2400" dirty="0"/>
           </a:p>
@@ -5161,7 +5077,7 @@
                   <a:srgbClr val="888888"/>
                 </a:solidFill>
               </a:rPr>
-              <a:t>Cancer cell  ·  IF 48.8  ·  RCT Phase 2</a:t>
+              <a:t>Gut  ·  IF 24.5  ·  Prospective Study</a:t>
             </a:r>
             <a:endParaRPr lang="en-US" sz="1000" dirty="0"/>
           </a:p>
@@ -5204,7 +5120,7 @@
                 <a:ea typeface="Arial" pitchFamily="34" charset="-122"/>
                 <a:cs typeface="Arial" pitchFamily="34" charset="-120"/>
               </a:rPr>
-              <a:t>PD-1 blockade enhances B cell response.</a:t>
+              <a:t>High recurrence rate in HCC post-surgery.</a:t>
             </a:r>
             <a:endParaRPr lang="en-US" sz="1800" dirty="0"/>
           </a:p>
@@ -5225,7 +5141,7 @@
                 <a:ea typeface="Arial" pitchFamily="34" charset="-122"/>
                 <a:cs typeface="Arial" pitchFamily="34" charset="-120"/>
               </a:rPr>
-              <a:t>Distinct T cell and B cell subtypes identified.</a:t>
+              <a:t>Identified polyclonal and monoclonal recurrence.</a:t>
             </a:r>
             <a:endParaRPr lang="en-US" sz="1800" dirty="0"/>
           </a:p>
@@ -5246,7 +5162,7 @@
                 <a:ea typeface="Arial" pitchFamily="34" charset="-122"/>
                 <a:cs typeface="Arial" pitchFamily="34" charset="-120"/>
               </a:rPr>
-              <a:t>HBcAg triggers local B cell activation.</a:t>
+              <a:t>Polyclonal recurrences linked to immune suppression.</a:t>
             </a:r>
             <a:endParaRPr lang="en-US" sz="1800" dirty="0"/>
           </a:p>
@@ -5267,7 +5183,7 @@
                 <a:ea typeface="Arial" pitchFamily="34" charset="-122"/>
                 <a:cs typeface="Arial" pitchFamily="34" charset="-120"/>
               </a:rPr>
-              <a:t>Complement activation mediates antitumor effects.</a:t>
+              <a:t>Distant metastases from aggressive subclones.</a:t>
             </a:r>
             <a:endParaRPr lang="en-US" sz="1800" dirty="0"/>
           </a:p>
@@ -5288,7 +5204,7 @@
                 <a:ea typeface="Arial" pitchFamily="34" charset="-122"/>
                 <a:cs typeface="Arial" pitchFamily="34" charset="-120"/>
               </a:rPr>
-              <a:t>Study supports anti-PD-1 therapy efficacy.</a:t>
+              <a:t>Multi-omics model predicts recurrence accurately.</a:t>
             </a:r>
             <a:endParaRPr lang="en-US" sz="1800" dirty="0"/>
           </a:p>
@@ -5324,7 +5240,7 @@
                   <a:srgbClr val="888888"/>
                 </a:solidFill>
               </a:rPr>
-              <a:t>Chen Shuling, Wang Yuanqi, Chen Jingying et al.. Cancer cell. 2026-07-16 DOI: 10.1016/j.ccell.2026.06.010</a:t>
+              <a:t>Zhang Ying, Sekar Karthik, Phua Cheryl Zi Jin et al.. Gut. 2026-07-21 DOI: 10.1136/gutjnl-2026-338227</a:t>
             </a:r>
             <a:endParaRPr lang="en-US" sz="800" dirty="0"/>
           </a:p>
@@ -5524,7 +5440,7 @@
                   </a:extLst>
                 </a:hlinkClick>
               </a:rPr>
-              <a:t>Long-term Survival and Cure Fraction in Patients with Advanced Hepatocellular Carcinoma under Immunotherapy in Randomized Controlled Trials and Real-world Data.</a:t>
+              <a:t>Conversion surgery as a missing outcome in first-line immunotherapy trials for hepatocellular carcinoma</a:t>
             </a:r>
             <a:endParaRPr lang="en-US" sz="2400" dirty="0"/>
           </a:p>
@@ -5560,7 +5476,7 @@
                   <a:srgbClr val="888888"/>
                 </a:solidFill>
               </a:rPr>
-              <a:t>Clinical cancer research : an official journal of the American Association for Cancer Research  ·  IF 11.5  ·  RCT Phase 3  ·  🌏 Asia</a:t>
+              <a:t>Journal of Hepatology  ·  IF 25.7</a:t>
             </a:r>
             <a:endParaRPr lang="en-US" sz="1000" dirty="0"/>
           </a:p>
@@ -5603,7 +5519,7 @@
                 <a:ea typeface="Arial" pitchFamily="34" charset="-122"/>
                 <a:cs typeface="Arial" pitchFamily="34" charset="-120"/>
               </a:rPr>
-              <a:t>Immune checkpoint inhibitors improve survival rates.</a:t>
+              <a:t>Conversion surgery in HCC treatment</a:t>
             </a:r>
             <a:endParaRPr lang="en-US" sz="1800" dirty="0"/>
           </a:p>
@@ -5624,7 +5540,7 @@
                 <a:ea typeface="Arial" pitchFamily="34" charset="-122"/>
                 <a:cs typeface="Arial" pitchFamily="34" charset="-120"/>
               </a:rPr>
-              <a:t>Long-term survival ranges from 10% to 15%.</a:t>
+              <a:t>Immunotherapy plus ipilimumab evaluated</a:t>
             </a:r>
             <a:endParaRPr lang="en-US" sz="1800" dirty="0"/>
           </a:p>
@@ -5645,7 +5561,7 @@
                 <a:ea typeface="Arial" pitchFamily="34" charset="-122"/>
                 <a:cs typeface="Arial" pitchFamily="34" charset="-120"/>
               </a:rPr>
-              <a:t>Cure fractions estimated at 7% to 9%.</a:t>
+              <a:t>Need for perioperative immune support</a:t>
             </a:r>
             <a:endParaRPr lang="en-US" sz="1800" dirty="0"/>
           </a:p>
@@ -5666,7 +5582,7 @@
                 <a:ea typeface="Arial" pitchFamily="34" charset="-122"/>
                 <a:cs typeface="Arial" pitchFamily="34" charset="-120"/>
               </a:rPr>
-              <a:t>Durvalumab-tremelimumab shows promising results.</a:t>
+              <a:t>Potential for resectable HCC patients</a:t>
             </a:r>
             <a:endParaRPr lang="en-US" sz="1800" dirty="0"/>
           </a:p>
@@ -5687,7 +5603,7 @@
                 <a:ea typeface="Arial" pitchFamily="34" charset="-122"/>
                 <a:cs typeface="Arial" pitchFamily="34" charset="-120"/>
               </a:rPr>
-              <a:t>Albumin-bilirubin score predicts survival outcomes.</a:t>
+              <a:t>Importance of surgical outcomes in trials</a:t>
             </a:r>
             <a:endParaRPr lang="en-US" sz="1800" dirty="0"/>
           </a:p>
@@ -5723,7 +5639,7 @@
                   <a:srgbClr val="888888"/>
                 </a:solidFill>
               </a:rPr>
-              <a:t>Campani Claudia, Shim Ju Hyun, Bouattour Mohamed et al.. Clinical cancer research : an official journal of the American Association for Cancer Research. 2026-07-17 DOI: 10.1158/1078-0432.CCR-25-4943</a:t>
+              <a:t>C Xu, J Sun, Q Liang. Journal of Hepatology. 2026</a:t>
             </a:r>
             <a:endParaRPr lang="en-US" sz="800" dirty="0"/>
           </a:p>
@@ -5923,7 +5839,7 @@
                   </a:extLst>
                 </a:hlinkClick>
               </a:rPr>
-              <a:t>Targeting tumor-intrinsic STK40 induces immune vulnerability and drives T cell reinvigoration.</a:t>
+              <a:t>Nivolumab in combination with lenvatinib in unresectable hepatocellular carcinoma: The IKF-t006/IMMUNIB translational phase-2 study.</a:t>
             </a:r>
             <a:endParaRPr lang="en-US" sz="2400" dirty="0"/>
           </a:p>
@@ -5959,7 +5875,7 @@
                   <a:srgbClr val="888888"/>
                 </a:solidFill>
               </a:rPr>
-              <a:t>Cancer cell  ·  IF 48.8  ·  Basic Research</a:t>
+              <a:t>European journal of cancer (Oxford, England : 1990)  ·  IF 8.4  ·  RCT Phase 2</a:t>
             </a:r>
             <a:endParaRPr lang="en-US" sz="1000" dirty="0"/>
           </a:p>
@@ -6002,7 +5918,7 @@
                 <a:ea typeface="Arial" pitchFamily="34" charset="-122"/>
                 <a:cs typeface="Arial" pitchFamily="34" charset="-120"/>
               </a:rPr>
-              <a:t>STK40 identified as immune evasion regulator</a:t>
+              <a:t>Nivolumab plus lenvatinib for unresectable HCC</a:t>
             </a:r>
             <a:endParaRPr lang="en-US" sz="1800" dirty="0"/>
           </a:p>
@@ -6023,7 +5939,7 @@
                 <a:ea typeface="Arial" pitchFamily="34" charset="-122"/>
                 <a:cs typeface="Arial" pitchFamily="34" charset="-120"/>
               </a:rPr>
-              <a:t>Ablation enhances PD-1 blockade efficacy</a:t>
+              <a:t>Objective response rate was 32% in trial</a:t>
             </a:r>
             <a:endParaRPr lang="en-US" sz="1800" dirty="0"/>
           </a:p>
@@ -6044,7 +5960,7 @@
                 <a:ea typeface="Arial" pitchFamily="34" charset="-122"/>
                 <a:cs typeface="Arial" pitchFamily="34" charset="-120"/>
               </a:rPr>
-              <a:t>STK40 deletion prevents tumorigenesis in HCC</a:t>
+              <a:t>Median overall survival reached 26.6 months</a:t>
             </a:r>
             <a:endParaRPr lang="en-US" sz="1800" dirty="0"/>
           </a:p>
@@ -6065,7 +5981,7 @@
                 <a:ea typeface="Arial" pitchFamily="34" charset="-122"/>
                 <a:cs typeface="Arial" pitchFamily="34" charset="-120"/>
               </a:rPr>
-              <a:t>Loss of STK40 stabilizes IFNGR1</a:t>
+              <a:t>Adverse events included colitis and hypertension</a:t>
             </a:r>
             <a:endParaRPr lang="en-US" sz="1800" dirty="0"/>
           </a:p>
@@ -6086,7 +6002,7 @@
                 <a:ea typeface="Arial" pitchFamily="34" charset="-122"/>
                 <a:cs typeface="Arial" pitchFamily="34" charset="-120"/>
               </a:rPr>
-              <a:t>Pharmacological inhibition shows potent anti-tumor effects</a:t>
+              <a:t>FGFR activation linked to treatment benefits</a:t>
             </a:r>
             <a:endParaRPr lang="en-US" sz="1800" dirty="0"/>
           </a:p>
@@ -6122,7 +6038,7 @@
                   <a:srgbClr val="888888"/>
                 </a:solidFill>
               </a:rPr>
-              <a:t>Zhu Lili, Zhang Sisi, Li Botai et al.. Cancer cell. 2026-07-14 DOI: 10.1016/j.ccell.2026.05.001</a:t>
+              <a:t>Vogel Arndt, Ben Khaled Najib, Ramirez Javier Ruiz et al.. European journal of cancer (Oxford, England : 1990). 2026-07-08 DOI: 10.1016/j.ejca.2026.116847</a:t>
             </a:r>
             <a:endParaRPr lang="en-US" sz="800" dirty="0"/>
           </a:p>
@@ -6322,7 +6238,7 @@
                   </a:extLst>
                 </a:hlinkClick>
               </a:rPr>
-              <a:t>Pembrolizumab and stereotactic body radiotherapy combined in advanced hepatocellular carcinoma post sorafenib–A phase II trial (PEMRAD)</a:t>
+              <a:t>Decoding neoantigen-encoding tumor-specific transcripts unveils a shared target reservoir for immunotherapy in hepatocellular carcinoma.</a:t>
             </a:r>
             <a:endParaRPr lang="en-US" sz="2400" dirty="0"/>
           </a:p>
@@ -6358,7 +6274,7 @@
                   <a:srgbClr val="888888"/>
                 </a:solidFill>
               </a:rPr>
-              <a:t>JHEP Reports  ·  IF 7.8  ·  RCT Phase 2</a:t>
+              <a:t>Journal for immunotherapy of cancer  ·  IF 10.9  ·  Basic Research</a:t>
             </a:r>
             <a:endParaRPr lang="en-US" sz="1000" dirty="0"/>
           </a:p>
@@ -6401,7 +6317,7 @@
                 <a:ea typeface="Arial" pitchFamily="34" charset="-122"/>
                 <a:cs typeface="Arial" pitchFamily="34" charset="-120"/>
               </a:rPr>
-              <a:t>Combination of pembrolizumab and SBRT</a:t>
+              <a:t>NeoTSTs identified as abundant targets</a:t>
             </a:r>
             <a:endParaRPr lang="en-US" sz="1800" dirty="0"/>
           </a:p>
@@ -6422,7 +6338,7 @@
                 <a:ea typeface="Arial" pitchFamily="34" charset="-122"/>
                 <a:cs typeface="Arial" pitchFamily="34" charset="-120"/>
               </a:rPr>
-              <a:t>Phase II trial for advanced HCC</a:t>
+              <a:t>Higher frequency than mutation-derived neoantigens</a:t>
             </a:r>
             <a:endParaRPr lang="en-US" sz="1800" dirty="0"/>
           </a:p>
@@ -6443,7 +6359,7 @@
                 <a:ea typeface="Arial" pitchFamily="34" charset="-122"/>
                 <a:cs typeface="Arial" pitchFamily="34" charset="-120"/>
               </a:rPr>
-              <a:t>Post-sorafenib treatment evaluation</a:t>
+              <a:t>Validations through proteomics and models</a:t>
             </a:r>
             <a:endParaRPr lang="en-US" sz="1800" dirty="0"/>
           </a:p>
@@ -6464,7 +6380,7 @@
                 <a:ea typeface="Arial" pitchFamily="34" charset="-122"/>
                 <a:cs typeface="Arial" pitchFamily="34" charset="-120"/>
               </a:rPr>
-              <a:t>Improved patient outcomes observed</a:t>
+              <a:t>Mechanisms include retained introns and activation</a:t>
             </a:r>
             <a:endParaRPr lang="en-US" sz="1800" dirty="0"/>
           </a:p>
@@ -6485,7 +6401,7 @@
                 <a:ea typeface="Arial" pitchFamily="34" charset="-122"/>
                 <a:cs typeface="Arial" pitchFamily="34" charset="-120"/>
               </a:rPr>
-              <a:t>Potential for enhanced immune response</a:t>
+              <a:t>NeoTSTs enhance immunotherapy efficacy</a:t>
             </a:r>
             <a:endParaRPr lang="en-US" sz="1800" dirty="0"/>
           </a:p>
@@ -6521,7 +6437,7 @@
                   <a:srgbClr val="888888"/>
                 </a:solidFill>
               </a:rPr>
-              <a:t>GM O'Kane, A Mesci, RW Jang. JHEP Reports. 2026</a:t>
+              <a:t>Lin Peng, Wen Yifan, Zhao Jingjing et al.. Journal for immunotherapy of cancer. 2026-07-21 DOI: 10.1136/jitc-2026-015428</a:t>
             </a:r>
             <a:endParaRPr lang="en-US" sz="800" dirty="0"/>
           </a:p>
@@ -6721,7 +6637,7 @@
                   </a:extLst>
                 </a:hlinkClick>
               </a:rPr>
-              <a:t>Neoadjuvant Stereotactic Body Radiotherapy plus Immune Therapy Favorably Remodels the Hepatocellular Carcinoma Tumor Microenvironment.</a:t>
+              <a:t>Bevacizumab plus iparomlimab/tuvonralimab with hepatic artery infusion chemotherapy followed by stereotactic body radiotherapy in patients with BCLC stage C hepatocellular carcinoma with thrombus and/or extrahepatic oligometastases (BITS-TO-HCC): study protocol of a prospective, single-center, single-arm, phase II study.</a:t>
             </a:r>
             <a:endParaRPr lang="en-US" sz="2400" dirty="0"/>
           </a:p>
@@ -6757,7 +6673,7 @@
                   <a:srgbClr val="888888"/>
                 </a:solidFill>
               </a:rPr>
-              <a:t>Clinical cancer research : an official journal of the American Association for Cancer Research  ·  IF 11.5  ·  Prospective Study</a:t>
+              <a:t>Therapeutic advances in medical oncology  ·  RCT Phase 2</a:t>
             </a:r>
             <a:endParaRPr lang="en-US" sz="1000" dirty="0"/>
           </a:p>
@@ -6800,7 +6716,7 @@
                 <a:ea typeface="Arial" pitchFamily="34" charset="-122"/>
                 <a:cs typeface="Arial" pitchFamily="34" charset="-120"/>
               </a:rPr>
-              <a:t>Neoadjuvant SBRT plus immune therapy used.</a:t>
+              <a:t>Combination therapy for advanced HCC patients</a:t>
             </a:r>
             <a:endParaRPr lang="en-US" sz="1800" dirty="0"/>
           </a:p>
@@ -6821,7 +6737,7 @@
                 <a:ea typeface="Arial" pitchFamily="34" charset="-122"/>
                 <a:cs typeface="Arial" pitchFamily="34" charset="-120"/>
               </a:rPr>
-              <a:t>Pilot study with 8 patients conducted.</a:t>
+              <a:t>Sequential strategy with HAIC and immunotherapy</a:t>
             </a:r>
             <a:endParaRPr lang="en-US" sz="1800" dirty="0"/>
           </a:p>
@@ -6842,7 +6758,7 @@
                 <a:ea typeface="Arial" pitchFamily="34" charset="-122"/>
                 <a:cs typeface="Arial" pitchFamily="34" charset="-120"/>
               </a:rPr>
-              <a:t>Only 1 patient had grade 3 adverse event.</a:t>
+              <a:t>Primary endpoint: progression-free survival</a:t>
             </a:r>
             <a:endParaRPr lang="en-US" sz="1800" dirty="0"/>
           </a:p>
@@ -6863,7 +6779,7 @@
                 <a:ea typeface="Arial" pitchFamily="34" charset="-122"/>
                 <a:cs typeface="Arial" pitchFamily="34" charset="-120"/>
               </a:rPr>
-              <a:t>All patients achieved margin-negative resection.</a:t>
+              <a:t>Secondary endpoints include overall survival</a:t>
             </a:r>
             <a:endParaRPr lang="en-US" sz="1800" dirty="0"/>
           </a:p>
@@ -6884,7 +6800,7 @@
                 <a:ea typeface="Arial" pitchFamily="34" charset="-122"/>
                 <a:cs typeface="Arial" pitchFamily="34" charset="-120"/>
               </a:rPr>
-              <a:t>Increased immune infiltration observed post-treatment.</a:t>
+              <a:t>Study registered on ClinicalTrials.gov</a:t>
             </a:r>
             <a:endParaRPr lang="en-US" sz="1800" dirty="0"/>
           </a:p>
@@ -6920,7 +6836,7 @@
                   <a:srgbClr val="888888"/>
                 </a:solidFill>
               </a:rPr>
-              <a:t>Cosner Zoe, Guo Zhoubo, Nawrocki Cole et al.. Clinical cancer research : an official journal of the American Association for Cancer Research. 2026-07-17 DOI: 10.1158/1078-0432.CCR-25-4779</a:t>
+              <a:t>Liu Yuxin, Wang Haohua, Zhu Kunli et al.. Therapeutic advances in medical oncology. 2026-07-26 DOI: 10.1177/17588359261470693</a:t>
             </a:r>
             <a:endParaRPr lang="en-US" sz="800" dirty="0"/>
           </a:p>
@@ -7120,7 +7036,7 @@
                   </a:extLst>
                 </a:hlinkClick>
               </a:rPr>
-              <a:t>Second-Line and Subsequent Therapies after Atezolizumab Plus Bevacizumab Treatment in Hepatocellular Carcinoma: A Multicenter Prospective Cohort Study.</a:t>
+              <a:t>Pembrolizumab and stereotactic body radiotherapy combined in advanced hepatocellular carcinoma post sorafenib–A phase II trial (PEMRAD)</a:t>
             </a:r>
             <a:endParaRPr lang="en-US" sz="2400" dirty="0"/>
           </a:p>
@@ -7156,7 +7072,7 @@
                   <a:srgbClr val="888888"/>
                 </a:solidFill>
               </a:rPr>
-              <a:t>Gut and liver  ·  Prospective Study  ·  🌏 Asia</a:t>
+              <a:t>JHEP …  ·  RCT Phase 2</a:t>
             </a:r>
             <a:endParaRPr lang="en-US" sz="1000" dirty="0"/>
           </a:p>
@@ -7199,7 +7115,7 @@
                 <a:ea typeface="Arial" pitchFamily="34" charset="-122"/>
                 <a:cs typeface="Arial" pitchFamily="34" charset="-120"/>
               </a:rPr>
-              <a:t>Evaluated second-line and third-line therapies</a:t>
+              <a:t>Phase II trial of PEMRAD initiated.</a:t>
             </a:r>
             <a:endParaRPr lang="en-US" sz="1800" dirty="0"/>
           </a:p>
@@ -7220,7 +7136,7 @@
                 <a:ea typeface="Arial" pitchFamily="34" charset="-122"/>
                 <a:cs typeface="Arial" pitchFamily="34" charset="-120"/>
               </a:rPr>
-              <a:t>Lenvatinib improved PFS over sorafenib</a:t>
+              <a:t>Combines pembrolizumab with radiotherapy.</a:t>
             </a:r>
             <a:endParaRPr lang="en-US" sz="1800" dirty="0"/>
           </a:p>
@@ -7241,7 +7157,7 @@
                 <a:ea typeface="Arial" pitchFamily="34" charset="-122"/>
                 <a:cs typeface="Arial" pitchFamily="34" charset="-120"/>
               </a:rPr>
-              <a:t>Regorafenib showed trend for better OS</a:t>
+              <a:t>Targets advanced hepatocellular carcinoma.</a:t>
             </a:r>
             <a:endParaRPr lang="en-US" sz="1800" dirty="0"/>
           </a:p>
@@ -7262,7 +7178,7 @@
                 <a:ea typeface="Arial" pitchFamily="34" charset="-122"/>
                 <a:cs typeface="Arial" pitchFamily="34" charset="-120"/>
               </a:rPr>
-              <a:t>Sequential therapy yielded better outcomes</a:t>
+              <a:t>Conducted post-sorafenib treatment.</a:t>
             </a:r>
             <a:endParaRPr lang="en-US" sz="1800" dirty="0"/>
           </a:p>
@@ -7283,7 +7199,7 @@
                 <a:ea typeface="Arial" pitchFamily="34" charset="-122"/>
                 <a:cs typeface="Arial" pitchFamily="34" charset="-120"/>
               </a:rPr>
-              <a:t>Longer AtezoBev exposure linked to OS</a:t>
+              <a:t>Evaluates safety and efficacy.</a:t>
             </a:r>
             <a:endParaRPr lang="en-US" sz="1800" dirty="0"/>
           </a:p>
@@ -7319,7 +7235,7 @@
                   <a:srgbClr val="888888"/>
                 </a:solidFill>
               </a:rPr>
-              <a:t>Cho Yuri, Lee Jeong-Hoon, Ryoo Baek-Yeol et al.. Gut and liver. 2026-07-14 DOI: 10.5009/gnl250532</a:t>
+              <a:t>GM O'Kane, A Mesci, RW Jang. JHEP …. 2026</a:t>
             </a:r>
             <a:endParaRPr lang="en-US" sz="800" dirty="0"/>
           </a:p>
@@ -7519,7 +7435,7 @@
                   </a:extLst>
                 </a:hlinkClick>
               </a:rPr>
-              <a:t>Mechanistic synergies and optimal sequencing of anti&amp;#x2011;VEGF plus immune checkpoint inhibition in gastrointestinal cancers.</a:t>
+              <a:t>Image-guided radiofrequency versus microwave ablation for small to medium hepatocellular carcinoma: a meta-analysis</a:t>
             </a:r>
             <a:endParaRPr lang="en-US" sz="2400" dirty="0"/>
           </a:p>
@@ -7555,7 +7471,7 @@
                   <a:srgbClr val="888888"/>
                 </a:solidFill>
               </a:rPr>
-              <a:t>Discover oncology  ·  RCT Phase 2</a:t>
+              <a:t>Frontiers in Oncology  ·  Meta-Analysis</a:t>
             </a:r>
             <a:endParaRPr lang="en-US" sz="1000" dirty="0"/>
           </a:p>
@@ -7598,7 +7514,7 @@
                 <a:ea typeface="Arial" pitchFamily="34" charset="-122"/>
                 <a:cs typeface="Arial" pitchFamily="34" charset="-120"/>
               </a:rPr>
-              <a:t>Combination of anti-VEGF and ICIs enhances treatment efficacy.</a:t>
+              <a:t>Focus on small-to-medium HCC patients</a:t>
             </a:r>
             <a:endParaRPr lang="en-US" sz="1800" dirty="0"/>
           </a:p>
@@ -7619,7 +7535,7 @@
                 <a:ea typeface="Arial" pitchFamily="34" charset="-122"/>
                 <a:cs typeface="Arial" pitchFamily="34" charset="-120"/>
               </a:rPr>
-              <a:t>Atezolizumab plus bevacizumab is effective in advanced HCC.</a:t>
+              <a:t>Comparison of radiofrequency and microwave ablation</a:t>
             </a:r>
             <a:endParaRPr lang="en-US" sz="1800" dirty="0"/>
           </a:p>
@@ -7640,7 +7556,49 @@
                 <a:ea typeface="Arial" pitchFamily="34" charset="-122"/>
                 <a:cs typeface="Arial" pitchFamily="34" charset="-120"/>
               </a:rPr>
-              <a:t>Optimal sequencing strategies are crucial for maximizing benefits.</a:t>
+              <a:t>Inclusion of randomized controlled trials</a:t>
+            </a:r>
+            <a:endParaRPr lang="en-US" sz="1800" dirty="0"/>
+          </a:p>
+          <a:p>
+            <a:pPr marL="342900" indent="-342900">
+              <a:spcAft>
+                <a:spcPts val="800"/>
+              </a:spcAft>
+              <a:buSzPct val="100000"/>
+              <a:buChar char="•"/>
+            </a:pPr>
+            <a:r>
+              <a:rPr lang="en-US" sz="1800" dirty="0">
+                <a:solidFill>
+                  <a:srgbClr val="333333"/>
+                </a:solidFill>
+                <a:latin typeface="Arial" pitchFamily="34" charset="0"/>
+                <a:ea typeface="Arial" pitchFamily="34" charset="-122"/>
+                <a:cs typeface="Arial" pitchFamily="34" charset="-120"/>
+              </a:rPr>
+              <a:t>Evaluation of treatment efficacy and safety</a:t>
+            </a:r>
+            <a:endParaRPr lang="en-US" sz="1800" dirty="0"/>
+          </a:p>
+          <a:p>
+            <a:pPr marL="342900" indent="-342900">
+              <a:spcAft>
+                <a:spcPts val="800"/>
+              </a:spcAft>
+              <a:buSzPct val="100000"/>
+              <a:buChar char="•"/>
+            </a:pPr>
+            <a:r>
+              <a:rPr lang="en-US" sz="1800" dirty="0">
+                <a:solidFill>
+                  <a:srgbClr val="333333"/>
+                </a:solidFill>
+                <a:latin typeface="Arial" pitchFamily="34" charset="0"/>
+                <a:ea typeface="Arial" pitchFamily="34" charset="-122"/>
+                <a:cs typeface="Arial" pitchFamily="34" charset="-120"/>
+              </a:rPr>
+              <a:t>Meta-analysis provides comprehensive insights</a:t>
             </a:r>
             <a:endParaRPr lang="en-US" sz="1800" dirty="0"/>
           </a:p>
@@ -7676,7 +7634,7 @@
                   <a:srgbClr val="888888"/>
                 </a:solidFill>
               </a:rPr>
-              <a:t>Lorestani Parsa, Robat-Jazi Behrouz, Nejati Negar et al.. Discover oncology. 2026-07-17 DOI: 10.1007/s12672-026-05539-3</a:t>
+              <a:t>Y Fu, L Wang, T Hu. Frontiers in Oncology. 2026</a:t>
             </a:r>
             <a:endParaRPr lang="en-US" sz="800" dirty="0"/>
           </a:p>

--- a/docs/digest-en.pptx
+++ b/docs/digest-en.pptx
@@ -2269,7 +2269,7 @@
                   <a:srgbClr val="888888"/>
                 </a:solidFill>
               </a:rPr>
-              <a:t>2026-07-20 — 2026-07-27</a:t>
+              <a:t>2026-07-27 — 2026-08-03</a:t>
             </a:r>
             <a:endParaRPr lang="en-US" sz="1400" dirty="0"/>
           </a:p>
@@ -2460,7 +2460,7 @@
                   </a:extLst>
                 </a:hlinkClick>
               </a:rPr>
-              <a:t>Radiotherapy versus local ablation therapy for the treatment of hepatocellular carcinoma: A systematic review and meta-analysis.</a:t>
+              <a:t>Low-dose bevacizumab plus atezolizumab enhances transarterial chemoembolization in HCC via correcting vascular-immune niche dysfunction.</a:t>
             </a:r>
             <a:endParaRPr lang="en-US" sz="2400" dirty="0"/>
           </a:p>
@@ -2496,7 +2496,7 @@
                   <a:srgbClr val="888888"/>
                 </a:solidFill>
               </a:rPr>
-              <a:t>Journal of Clinical …  ·  Meta-Analysis</a:t>
+              <a:t>Journal of hepatology  ·  IF 25.7  ·  Retrospective Study</a:t>
             </a:r>
             <a:endParaRPr lang="en-US" sz="1000" dirty="0"/>
           </a:p>
@@ -2539,7 +2539,7 @@
                 <a:ea typeface="Arial" pitchFamily="34" charset="-122"/>
                 <a:cs typeface="Arial" pitchFamily="34" charset="-120"/>
               </a:rPr>
-              <a:t>Comparison of radiotherapy and local ablation</a:t>
+              <a:t>TACE leaves residual HCC tumors poorly defined.</a:t>
             </a:r>
             <a:endParaRPr lang="en-US" sz="1800" dirty="0"/>
           </a:p>
@@ -2560,7 +2560,7 @@
                 <a:ea typeface="Arial" pitchFamily="34" charset="-122"/>
                 <a:cs typeface="Arial" pitchFamily="34" charset="-120"/>
               </a:rPr>
-              <a:t>Focus on hepatocellular carcinoma treatment</a:t>
+              <a:t>PDGFC+ TAMs promote immunosuppressive environment.</a:t>
             </a:r>
             <a:endParaRPr lang="en-US" sz="1800" dirty="0"/>
           </a:p>
@@ -2581,49 +2581,7 @@
                 <a:ea typeface="Arial" pitchFamily="34" charset="-122"/>
                 <a:cs typeface="Arial" pitchFamily="34" charset="-120"/>
               </a:rPr>
-              <a:t>Analysis of local progression-free survival</a:t>
-            </a:r>
-            <a:endParaRPr lang="en-US" sz="1800" dirty="0"/>
-          </a:p>
-          <a:p>
-            <a:pPr marL="342900" indent="-342900">
-              <a:spcAft>
-                <a:spcPts val="800"/>
-              </a:spcAft>
-              <a:buSzPct val="100000"/>
-              <a:buChar char="•"/>
-            </a:pPr>
-            <a:r>
-              <a:rPr lang="en-US" sz="1800" dirty="0">
-                <a:solidFill>
-                  <a:srgbClr val="333333"/>
-                </a:solidFill>
-                <a:latin typeface="Arial" pitchFamily="34" charset="0"/>
-                <a:ea typeface="Arial" pitchFamily="34" charset="-122"/>
-                <a:cs typeface="Arial" pitchFamily="34" charset="-120"/>
-              </a:rPr>
-              <a:t>Evaluation of radiofrequency and microwave ablation</a:t>
-            </a:r>
-            <a:endParaRPr lang="en-US" sz="1800" dirty="0"/>
-          </a:p>
-          <a:p>
-            <a:pPr marL="342900" indent="-342900">
-              <a:spcAft>
-                <a:spcPts val="800"/>
-              </a:spcAft>
-              <a:buSzPct val="100000"/>
-              <a:buChar char="•"/>
-            </a:pPr>
-            <a:r>
-              <a:rPr lang="en-US" sz="1800" dirty="0">
-                <a:solidFill>
-                  <a:srgbClr val="333333"/>
-                </a:solidFill>
-                <a:latin typeface="Arial" pitchFamily="34" charset="0"/>
-                <a:ea typeface="Arial" pitchFamily="34" charset="-122"/>
-                <a:cs typeface="Arial" pitchFamily="34" charset="-120"/>
-              </a:rPr>
-              <a:t>Systematic review and meta-analysis conducted</a:t>
+              <a:t>Low-dose bevacizumab plus atezolizumab improves outcomes.</a:t>
             </a:r>
             <a:endParaRPr lang="en-US" sz="1800" dirty="0"/>
           </a:p>
@@ -2659,7 +2617,7 @@
                   <a:srgbClr val="888888"/>
                 </a:solidFill>
               </a:rPr>
-              <a:t>SH Bae, SH Choi, SM Yoon. Journal of Clinical …. 2026</a:t>
+              <a:t>Zhao Chenghao, Yan Huzheng, Liang Zhixing et al.. Journal of hepatology. 2026-07-31 DOI: 10.1016/j.jhep.2026.07.028</a:t>
             </a:r>
             <a:endParaRPr lang="en-US" sz="800" dirty="0"/>
           </a:p>
@@ -2859,7 +2817,7 @@
                   </a:extLst>
                 </a:hlinkClick>
               </a:rPr>
-              <a:t>Immune Checkpoint Inhibitor–Based Adjuvant Treatment Versus Surveillance in Curatively Treated Hepatocellular Carcinoma: a Systematic Review and Meta …</a:t>
+              <a:t>External beam radiotherapy versus local ablation therapy for the treatment of hepatocellular carcinoma: a systematic review and meta-analysis.</a:t>
             </a:r>
             <a:endParaRPr lang="en-US" sz="2400" dirty="0"/>
           </a:p>
@@ -2895,7 +2853,7 @@
                   <a:srgbClr val="888888"/>
                 </a:solidFill>
               </a:rPr>
-              <a:t>Journal of gastroenterology and …  ·  Systematic Review</a:t>
+              <a:t>Clinical and molecular hepatology  ·  Meta-Analysis  ·  🌏 Asia</a:t>
             </a:r>
             <a:endParaRPr lang="en-US" sz="1000" dirty="0"/>
           </a:p>
@@ -2938,7 +2896,7 @@
                 <a:ea typeface="Arial" pitchFamily="34" charset="-122"/>
                 <a:cs typeface="Arial" pitchFamily="34" charset="-120"/>
               </a:rPr>
-              <a:t>Immune checkpoint inhibitors show promise in HCC.</a:t>
+              <a:t>EBRT shows lower local recurrence rates.</a:t>
             </a:r>
             <a:endParaRPr lang="en-US" sz="1800" dirty="0"/>
           </a:p>
@@ -2959,7 +2917,7 @@
                 <a:ea typeface="Arial" pitchFamily="34" charset="-122"/>
                 <a:cs typeface="Arial" pitchFamily="34" charset="-120"/>
               </a:rPr>
-              <a:t>Adjuvant treatment improves outcomes post-surgery.</a:t>
+              <a:t>Improved local progression-free survival with EBRT.</a:t>
             </a:r>
             <a:endParaRPr lang="en-US" sz="1800" dirty="0"/>
           </a:p>
@@ -2980,7 +2938,49 @@
                 <a:ea typeface="Arial" pitchFamily="34" charset="-122"/>
                 <a:cs typeface="Arial" pitchFamily="34" charset="-120"/>
               </a:rPr>
-              <a:t>Surveillance alone may not be sufficient.</a:t>
+              <a:t>Overall survival rates similar between EBRT and LAT.</a:t>
+            </a:r>
+            <a:endParaRPr lang="en-US" sz="1800" dirty="0"/>
+          </a:p>
+          <a:p>
+            <a:pPr marL="342900" indent="-342900">
+              <a:spcAft>
+                <a:spcPts val="800"/>
+              </a:spcAft>
+              <a:buSzPct val="100000"/>
+              <a:buChar char="•"/>
+            </a:pPr>
+            <a:r>
+              <a:rPr lang="en-US" sz="1800" dirty="0">
+                <a:solidFill>
+                  <a:srgbClr val="333333"/>
+                </a:solidFill>
+                <a:latin typeface="Arial" pitchFamily="34" charset="0"/>
+                <a:ea typeface="Arial" pitchFamily="34" charset="-122"/>
+                <a:cs typeface="Arial" pitchFamily="34" charset="-120"/>
+              </a:rPr>
+              <a:t>Severe toxicities comparable in both treatments.</a:t>
+            </a:r>
+            <a:endParaRPr lang="en-US" sz="1800" dirty="0"/>
+          </a:p>
+          <a:p>
+            <a:pPr marL="342900" indent="-342900">
+              <a:spcAft>
+                <a:spcPts val="800"/>
+              </a:spcAft>
+              <a:buSzPct val="100000"/>
+              <a:buChar char="•"/>
+            </a:pPr>
+            <a:r>
+              <a:rPr lang="en-US" sz="1800" dirty="0">
+                <a:solidFill>
+                  <a:srgbClr val="333333"/>
+                </a:solidFill>
+                <a:latin typeface="Arial" pitchFamily="34" charset="0"/>
+                <a:ea typeface="Arial" pitchFamily="34" charset="-122"/>
+                <a:cs typeface="Arial" pitchFamily="34" charset="-120"/>
+              </a:rPr>
+              <a:t>EBRT is a safe alternative for HCC.</a:t>
             </a:r>
             <a:endParaRPr lang="en-US" sz="1800" dirty="0"/>
           </a:p>
@@ -3016,7 +3016,7 @@
                   <a:srgbClr val="888888"/>
                 </a:solidFill>
               </a:rPr>
-              <a:t>E Akkus, HA Yaşar. Journal of gastroenterology and …. 2026</a:t>
+              <a:t>Bae Sun Hyun, Choi Seo Hee, Yoon Sang Min et al.. Clinical and molecular hepatology. 2026-07-30 DOI: 10.3350/cmh.2026.0535</a:t>
             </a:r>
             <a:endParaRPr lang="en-US" sz="800" dirty="0"/>
           </a:p>
@@ -3216,7 +3216,7 @@
                   </a:extLst>
                 </a:hlinkClick>
               </a:rPr>
-              <a:t>… on interventional therapy and immune checkpoint inhibitors (ICIs) in patients with intermediate-and advanced-stage hepatocellular carcinoma: a systematic review …</a:t>
+              <a:t>Temporal Association Between COVID-19 Vaccination and HBsAg Loss in Chronic Hepatitis B Infection: An Interrupted Time Series Analysis.</a:t>
             </a:r>
             <a:endParaRPr lang="en-US" sz="2400" dirty="0"/>
           </a:p>
@@ -3252,7 +3252,7 @@
                   <a:srgbClr val="888888"/>
                 </a:solidFill>
               </a:rPr>
-              <a:t>… , Immunotherapy  ·  Systematic Review</a:t>
+              <a:t>Alimentary pharmacology &amp; therapeutics  ·  IF 6.6  ·  🌏 Asia</a:t>
             </a:r>
             <a:endParaRPr lang="en-US" sz="1000" dirty="0"/>
           </a:p>
@@ -3295,7 +3295,7 @@
                 <a:ea typeface="Arial" pitchFamily="34" charset="-122"/>
                 <a:cs typeface="Arial" pitchFamily="34" charset="-120"/>
               </a:rPr>
-              <a:t>Combination therapy shows promise in HCC.</a:t>
+              <a:t>Study on HBsAg loss in CHB patients</a:t>
             </a:r>
             <a:endParaRPr lang="en-US" sz="1800" dirty="0"/>
           </a:p>
@@ -3316,7 +3316,7 @@
                 <a:ea typeface="Arial" pitchFamily="34" charset="-122"/>
                 <a:cs typeface="Arial" pitchFamily="34" charset="-120"/>
               </a:rPr>
-              <a:t>ICIs enhance efficacy of interventional therapies.</a:t>
+              <a:t>COVID-19 vaccination linked to HBsAg loss</a:t>
             </a:r>
             <a:endParaRPr lang="en-US" sz="1800" dirty="0"/>
           </a:p>
@@ -3337,7 +3337,49 @@
                 <a:ea typeface="Arial" pitchFamily="34" charset="-122"/>
                 <a:cs typeface="Arial" pitchFamily="34" charset="-120"/>
               </a:rPr>
-              <a:t>Systematic review highlights clinical outcomes.</a:t>
+              <a:t>Incidence peaked at 1.27 in 2022</a:t>
+            </a:r>
+            <a:endParaRPr lang="en-US" sz="1800" dirty="0"/>
+          </a:p>
+          <a:p>
+            <a:pPr marL="342900" indent="-342900">
+              <a:spcAft>
+                <a:spcPts val="800"/>
+              </a:spcAft>
+              <a:buSzPct val="100000"/>
+              <a:buChar char="•"/>
+            </a:pPr>
+            <a:r>
+              <a:rPr lang="en-US" sz="1800" dirty="0">
+                <a:solidFill>
+                  <a:srgbClr val="333333"/>
+                </a:solidFill>
+                <a:latin typeface="Arial" pitchFamily="34" charset="0"/>
+                <a:ea typeface="Arial" pitchFamily="34" charset="-122"/>
+                <a:cs typeface="Arial" pitchFamily="34" charset="-120"/>
+              </a:rPr>
+              <a:t>No change in HCC incidence observed</a:t>
+            </a:r>
+            <a:endParaRPr lang="en-US" sz="1800" dirty="0"/>
+          </a:p>
+          <a:p>
+            <a:pPr marL="342900" indent="-342900">
+              <a:spcAft>
+                <a:spcPts val="800"/>
+              </a:spcAft>
+              <a:buSzPct val="100000"/>
+              <a:buChar char="•"/>
+            </a:pPr>
+            <a:r>
+              <a:rPr lang="en-US" sz="1800" dirty="0">
+                <a:solidFill>
+                  <a:srgbClr val="333333"/>
+                </a:solidFill>
+                <a:latin typeface="Arial" pitchFamily="34" charset="0"/>
+                <a:ea typeface="Arial" pitchFamily="34" charset="-122"/>
+                <a:cs typeface="Arial" pitchFamily="34" charset="-120"/>
+              </a:rPr>
+              <a:t>Immunomodulatory effect on HBV dynamics</a:t>
             </a:r>
             <a:endParaRPr lang="en-US" sz="1800" dirty="0"/>
           </a:p>
@@ -3373,7 +3415,7 @@
                   <a:srgbClr val="888888"/>
                 </a:solidFill>
               </a:rPr>
-              <a:t>J Su, Y Su, R Mai. … , Immunotherapy. 2026</a:t>
+              <a:t>Choi Jonggi, Carroll Allison, Nguyen Vy H et al.. Alimentary pharmacology &amp; therapeutics. 2026-07-29 DOI: 10.1111/apt.70733</a:t>
             </a:r>
             <a:endParaRPr lang="en-US" sz="800" dirty="0"/>
           </a:p>
@@ -3590,7 +3632,7 @@
                   <a:srgbClr val="FFFFFF"/>
                 </a:solidFill>
               </a:rPr>
-              <a:t>1. **克隆多样性与复发机制**  </a:t>
+              <a:t>1. **免疫療法的潛力**  </a:t>
             </a:r>
             <a:endParaRPr lang="en-US" sz="1200" dirty="0"/>
           </a:p>
@@ -3607,7 +3649,7 @@
                   <a:srgbClr val="FFFFFF"/>
                 </a:solidFill>
               </a:rPr>
-              <a:t>   Clonal diversity plays a critical role in the distinct recurrence patterns observed in hepatocellular carcinoma (HCC), highlighting the need for personalized treatment strategies.  </a:t>
+              <a:t>   The combination of ipilimumab with atezolizumab and bevacizumab shows promising results in improving outcomes for patients with advanced hepatocellular carcinoma (HCC), highlighting the potential of multi-targeted immunotherapy.  </a:t>
             </a:r>
             <a:endParaRPr lang="en-US" sz="1200" dirty="0"/>
           </a:p>
@@ -3624,7 +3666,7 @@
                   <a:srgbClr val="FFFFFF"/>
                 </a:solidFill>
               </a:rPr>
-              <a:t>   克隆多樣性在肝細胞癌（HCC）的不同復發模式中扮演關鍵角色，強調了個性化治療策略的必要性。</a:t>
+              <a:t>   以ipilimumab結合atezolizumab和bevacizumab的療法顯示出改善晚期肝細胞癌（HCC）患者預後的潛力，突顯了多靶向免疫療法的可能性。</a:t>
             </a:r>
             <a:endParaRPr lang="en-US" sz="1200" dirty="0"/>
           </a:p>
@@ -3650,7 +3692,7 @@
                   <a:srgbClr val="FFFFFF"/>
                 </a:solidFill>
               </a:rPr>
-              <a:t>2. **免疫治疗与手术结合的潜力**  </a:t>
+              <a:t>2. **TACE與熱消融的結合**  </a:t>
             </a:r>
             <a:endParaRPr lang="en-US" sz="1200" dirty="0"/>
           </a:p>
@@ -3667,7 +3709,7 @@
                   <a:srgbClr val="FFFFFF"/>
                 </a:solidFill>
               </a:rPr>
-              <a:t>   The integration of immune checkpoint inhibitors with surgical approaches may enhance therapeutic outcomes, particularly in patients with resectable HCC.  </a:t>
+              <a:t>   The TORCH trial indicates that combining transarterial chemoembolization (TACE) with thermal ablation may enhance survival outcomes for patients with unresectable HCC, suggesting a need for integrated treatment approaches.  </a:t>
             </a:r>
             <a:endParaRPr lang="en-US" sz="1200" dirty="0"/>
           </a:p>
@@ -3684,7 +3726,7 @@
                   <a:srgbClr val="FFFFFF"/>
                 </a:solidFill>
               </a:rPr>
-              <a:t>   將免疫檢查點抑制劑與手術方法結合可能會改善治療結果，特別是在可切除的HCC患者中。</a:t>
+              <a:t>   TORCH試驗顯示，將經動脈化療栓塞（TACE）與熱消融相結合可能改善不可切除HCC患者的生存結果，表明需要綜合治療方法。</a:t>
             </a:r>
             <a:endParaRPr lang="en-US" sz="1200" dirty="0"/>
           </a:p>
@@ -3710,7 +3752,7 @@
                   <a:srgbClr val="FFFFFF"/>
                 </a:solidFill>
               </a:rPr>
-              <a:t>3. **新抗原疫苗的挑战与前景**  </a:t>
+              <a:t>3. **腸道微生物與免疫反應的關聯**  </a:t>
             </a:r>
             <a:endParaRPr lang="en-US" sz="1200" dirty="0"/>
           </a:p>
@@ -3727,7 +3769,7 @@
                   <a:srgbClr val="FFFFFF"/>
                 </a:solidFill>
               </a:rPr>
-              <a:t>   Despite the promise of mutation-derived neoantigen vaccines, their clinical application is limited by the availability of suitable antigens, necessitating innovative approaches to neoantigen discovery.  </a:t>
+              <a:t>   Distinct gut microbiota profiles between viral and metabolic dysfunction-associated steatotic liver disease-related HCC suggest that microbiota modulation could be a novel strategy to enhance immunotherapy efficacy.  </a:t>
             </a:r>
             <a:endParaRPr lang="en-US" sz="1200" dirty="0"/>
           </a:p>
@@ -3744,7 +3786,7 @@
                   <a:srgbClr val="FFFFFF"/>
                 </a:solidFill>
               </a:rPr>
-              <a:t>   儘管突變衍生的新抗原疫苗具有潛力，但其臨床應用受到合適抗原可用性的限制，需創新方法來發現新抗原。</a:t>
+              <a:t>   病毒性與代謝功能障礙相關脂肪肝病（MASLD）HCC之間的腸道微生物群特徵差異表明，調節微生物群可能是一種增強免疫療法療效的新策略。</a:t>
             </a:r>
             <a:endParaRPr lang="en-US" sz="1200" dirty="0"/>
           </a:p>
@@ -3770,7 +3812,7 @@
                   <a:srgbClr val="FFFFFF"/>
                 </a:solidFill>
               </a:rPr>
-              <a:t>4. **局部消融与放疗的比较**  </a:t>
+              <a:t>4. **代謝環境對免疫的影響**  </a:t>
             </a:r>
             <a:endParaRPr lang="en-US" sz="1200" dirty="0"/>
           </a:p>
@@ -3787,7 +3829,7 @@
                   <a:srgbClr val="FFFFFF"/>
                 </a:solidFill>
               </a:rPr>
-              <a:t>   Local ablative therapies, such as radiofrequency and microwave ablation, show comparable efficacy to radiotherapy, emphasizing their importance in the management of small to medium HCC.  </a:t>
+              <a:t>   The lipid-rich microenvironment in MASLD-HCC contributes to immune suppression, emphasizing the need to understand metabolic factors in developing effective immunotherapy strategies.  </a:t>
             </a:r>
             <a:endParaRPr lang="en-US" sz="1200" dirty="0"/>
           </a:p>
@@ -3804,7 +3846,7 @@
                   <a:srgbClr val="FFFFFF"/>
                 </a:solidFill>
               </a:rPr>
-              <a:t>   局部消融療法，如射頻和微波消融，顯示出與放療相當的療效，強調了它們在小至中型HCC管理中的重要性。</a:t>
+              <a:t>   MASLD-HCC中的富脂微環境促進免疫抑制，強調在開發有效免疫療法策略時需要理解代謝因素。</a:t>
             </a:r>
             <a:endParaRPr lang="en-US" sz="1200" dirty="0"/>
           </a:p>
@@ -3830,7 +3872,7 @@
                   <a:srgbClr val="FFFFFF"/>
                 </a:solidFill>
               </a:rPr>
-              <a:t>5. **术后免疫治疗的必要性**  </a:t>
+              <a:t>5. **個體化治療的重要性**  </a:t>
             </a:r>
             <a:endParaRPr lang="en-US" sz="1200" dirty="0"/>
           </a:p>
@@ -3847,7 +3889,7 @@
                   <a:srgbClr val="FFFFFF"/>
                 </a:solidFill>
               </a:rPr>
-              <a:t>   There is a growing recognition of the potential benefits of adjuvant immunotherapy following curative treatments for HCC, which may improve long-term outcomes.</a:t>
+              <a:t>   The necessity for personalized treatment strategies in HCC management is underscored, as recurrence rates remain high despite advancements in immunotherapy and antiviral treatments.</a:t>
             </a:r>
             <a:endParaRPr lang="en-US" sz="1200" dirty="0"/>
           </a:p>
@@ -3993,7 +4035,7 @@
                   <a:srgbClr val="FFFFFF"/>
                 </a:solidFill>
               </a:rPr>
-              <a:t>越來越多的認識到術後免疫治療對於HCC的潛在益處，可能改善長期結果。</a:t>
+              <a:t>儘管免疫療法和抗病毒治療有所進展，但HCC管理中對個體化治療策略的必要性仍然突出，因為復發率仍然很高。</a:t>
             </a:r>
             <a:endParaRPr lang="en-US" sz="1200" dirty="0"/>
           </a:p>
@@ -4045,7 +4087,7 @@
                   <a:srgbClr val="FFFFFF"/>
                 </a:solidFill>
               </a:rPr>
-              <a:t>1. **深入研究克隆多样性**  </a:t>
+              <a:t>1. **多重免疫療法的長期效果**  </a:t>
             </a:r>
             <a:endParaRPr lang="en-US" sz="1200" dirty="0"/>
           </a:p>
@@ -4062,7 +4104,7 @@
                   <a:srgbClr val="FFFFFF"/>
                 </a:solidFill>
               </a:rPr>
-              <a:t>   Further investigations into the clonal evolution of HCC could provide insights into recurrence mechanisms and inform targeted therapies.  </a:t>
+              <a:t>   Future studies should focus on the long-term efficacy and safety of multi-agent immunotherapy combinations in HCC, particularly in diverse patient populations.  </a:t>
             </a:r>
             <a:endParaRPr lang="en-US" sz="1200" dirty="0"/>
           </a:p>
@@ -4079,7 +4121,7 @@
                   <a:srgbClr val="FFFFFF"/>
                 </a:solidFill>
               </a:rPr>
-              <a:t>   進一步研究HCC的克隆演化可能提供有關復發機制的見解，並為靶向治療提供依據。</a:t>
+              <a:t>   未來的研究應集中於多藥免疫療法組合在HCC中的長期療效和安全性，特別是在不同患者群體中。</a:t>
             </a:r>
             <a:endParaRPr lang="en-US" sz="1200" dirty="0"/>
           </a:p>
@@ -4105,7 +4147,7 @@
                   <a:srgbClr val="FFFFFF"/>
                 </a:solidFill>
               </a:rPr>
-              <a:t>2. **免疫治疗与局部治疗的联合策略**  </a:t>
+              <a:t>2. **微生物群與免疫療法的交互作用**  </a:t>
             </a:r>
             <a:endParaRPr lang="en-US" sz="1200" dirty="0"/>
           </a:p>
@@ -4122,7 +4164,7 @@
                   <a:srgbClr val="FFFFFF"/>
                 </a:solidFill>
               </a:rPr>
-              <a:t>   Future trials should explore the synergistic effects of combining immune checkpoint inhibitors with local ablation therapies to optimize treatment regimens.  </a:t>
+              <a:t>   Investigating the role of gut microbiota in modulating responses to immunotherapy could provide insights into optimizing treatment protocols for HCC patients.  </a:t>
             </a:r>
             <a:endParaRPr lang="en-US" sz="1200" dirty="0"/>
           </a:p>
@@ -4139,7 +4181,7 @@
                   <a:srgbClr val="FFFFFF"/>
                 </a:solidFill>
               </a:rPr>
-              <a:t>   未來的試驗應探索將免疫檢查點抑制劑與局部消融療法結合的協同效應，以優化治療方案。</a:t>
+              <a:t>   研究腸道微生物群在調節免疫療法反應中的作用可能為優化HCC患者的治療方案提供見解。</a:t>
             </a:r>
             <a:endParaRPr lang="en-US" sz="1200" dirty="0"/>
           </a:p>
@@ -4165,7 +4207,7 @@
                   <a:srgbClr val="FFFFFF"/>
                 </a:solidFill>
               </a:rPr>
-              <a:t>3. **新抗原的发现与应用**  </a:t>
+              <a:t>3. **代謝因素的機制研究**  </a:t>
             </a:r>
             <a:endParaRPr lang="en-US" sz="1200" dirty="0"/>
           </a:p>
@@ -4182,7 +4224,7 @@
                   <a:srgbClr val="FFFFFF"/>
                 </a:solidFill>
               </a:rPr>
-              <a:t>   Research should focus on identifying and validating novel neoantigens that can be effectively targeted by immunotherapies to enhance patient responses.  </a:t>
+              <a:t>   Further exploration of the metabolic pathways involved in MASLD-HCC and their impact on immune responses could lead to novel therapeutic targets.  </a:t>
             </a:r>
             <a:endParaRPr lang="en-US" sz="1200" dirty="0"/>
           </a:p>
@@ -4199,7 +4241,7 @@
                   <a:srgbClr val="FFFFFF"/>
                 </a:solidFill>
               </a:rPr>
-              <a:t>   研究應專注於識別和驗證可以有效被免疫療法靶向的新型新抗原，以增強患者反應。</a:t>
+              <a:t>   進一步探索MASLD-HCC中涉及的代謝途徑及其對免疫反應的影響可能會導致新的治療靶點。</a:t>
             </a:r>
             <a:endParaRPr lang="en-US" sz="1200" dirty="0"/>
           </a:p>
@@ -4225,7 +4267,7 @@
                   <a:srgbClr val="FFFFFF"/>
                 </a:solidFill>
               </a:rPr>
-              <a:t>4. **术后免疫治疗的临床试验**  </a:t>
+              <a:t>4. **個體化治療的臨床應用**  </a:t>
             </a:r>
             <a:endParaRPr lang="en-US" sz="1200" dirty="0"/>
           </a:p>
@@ -4242,7 +4284,7 @@
                   <a:srgbClr val="FFFFFF"/>
                 </a:solidFill>
               </a:rPr>
-              <a:t>   Conducting randomized clinical trials to assess the efficacy of adjuvant immunotherapy in resected HCC patients will be crucial for establishing standard care protocols.  </a:t>
+              <a:t>   Developing and validating personalized treatment algorithms based on genetic, metabolic, and microbiomic profiles will be crucial for improving HCC management.  </a:t>
             </a:r>
             <a:endParaRPr lang="en-US" sz="1200" dirty="0"/>
           </a:p>
@@ -4259,7 +4301,7 @@
                   <a:srgbClr val="FFFFFF"/>
                 </a:solidFill>
               </a:rPr>
-              <a:t>   開展隨機臨床試驗以評估術後免疫治療在切除HCC患者中的療效，對於建立標準護理方案至關重要。</a:t>
+              <a:t>   基於基因、代謝和微生物組特徵開發和驗證個體化治療算法對改善HCC管理至關重要。</a:t>
             </a:r>
             <a:endParaRPr lang="en-US" sz="1200" dirty="0"/>
           </a:p>
@@ -4285,7 +4327,7 @@
                   <a:srgbClr val="FFFFFF"/>
                 </a:solidFill>
               </a:rPr>
-              <a:t>5. **个体化治疗方案的开发**  </a:t>
+              <a:t>5. **新型治療組合的探索**  </a:t>
             </a:r>
             <a:endParaRPr lang="en-US" sz="1200" dirty="0"/>
           </a:p>
@@ -4302,7 +4344,7 @@
                   <a:srgbClr val="FFFFFF"/>
                 </a:solidFill>
               </a:rPr>
-              <a:t>   Developing personalized treatment approaches based on molecular profiling and immune landscape of HCC could improve therapeutic outcomes.  </a:t>
+              <a:t>   Research should continue to explore novel combinations of immunotherapy with locoregional treatments such as TACE and thermal ablation to maximize therapeutic benefits.  </a:t>
             </a:r>
             <a:endParaRPr lang="en-US" sz="1200" dirty="0"/>
           </a:p>
@@ -4319,7 +4361,7 @@
                   <a:srgbClr val="FFFFFF"/>
                 </a:solidFill>
               </a:rPr>
-              <a:t>   基於HCC的分子特徵和免疫環境開發個性化治療方案可能改善治療結果。</a:t>
+              <a:t>   研究應持續探索免疫療法與局部治療（如TACE和熱消融）的新型組合，以最大化治療效益。</a:t>
             </a:r>
             <a:endParaRPr lang="en-US" sz="1200" dirty="0"/>
           </a:p>
@@ -4553,7 +4595,7 @@
                 <a:ea typeface="Arial" pitchFamily="34" charset="-122"/>
                 <a:cs typeface="Arial" pitchFamily="34" charset="-120"/>
               </a:rPr>
-              <a:t>Clonal diversity underpins distinct modes of recurrence in hepatocellular carcin…</a:t>
+              <a:t>Addition of ipilimumab to atezolizumab plus bevacizumab in advanced hepatocellul…</a:t>
             </a:r>
             <a:endParaRPr lang="en-US" sz="1400" dirty="0"/>
           </a:p>
@@ -4590,7 +4632,7 @@
                 <a:ea typeface="Arial" pitchFamily="34" charset="-122"/>
                 <a:cs typeface="Arial" pitchFamily="34" charset="-120"/>
               </a:rPr>
-              <a:t>Conversion surgery as a missing outcome in first-line immunotherapy trials for h…</a:t>
+              <a:t>Transarterial Chemoembolization Plus Thermal Ablation in Unresectable Hepatocell…</a:t>
             </a:r>
             <a:endParaRPr lang="en-US" sz="1400" dirty="0"/>
           </a:p>
@@ -4627,7 +4669,7 @@
                 <a:ea typeface="Arial" pitchFamily="34" charset="-122"/>
                 <a:cs typeface="Arial" pitchFamily="34" charset="-120"/>
               </a:rPr>
-              <a:t>Nivolumab in combination with lenvatinib in unresectable hepatocellular carcinom…</a:t>
+              <a:t>Distinct molecular pathways regulated by activated AKT and YAP signaling during …</a:t>
             </a:r>
             <a:endParaRPr lang="en-US" sz="1400" dirty="0"/>
           </a:p>
@@ -4664,7 +4706,7 @@
                 <a:ea typeface="Arial" pitchFamily="34" charset="-122"/>
                 <a:cs typeface="Arial" pitchFamily="34" charset="-120"/>
               </a:rPr>
-              <a:t>Decoding neoantigen-encoding tumor-specific transcripts unveils a shared target …</a:t>
+              <a:t>Distinct gut microbiota but common metabolomic signatures between viral and MASL…</a:t>
             </a:r>
             <a:endParaRPr lang="en-US" sz="1400" dirty="0"/>
           </a:p>
@@ -4701,7 +4743,7 @@
                 <a:ea typeface="Arial" pitchFamily="34" charset="-122"/>
                 <a:cs typeface="Arial" pitchFamily="34" charset="-120"/>
               </a:rPr>
-              <a:t>Bevacizumab plus iparomlimab/tuvonralimab with hepatic artery infusion chemother…</a:t>
+              <a:t>Optimal treatment selection for hepatocellular carcinoma in the era of immunothe…</a:t>
             </a:r>
             <a:endParaRPr lang="en-US" sz="1400" dirty="0"/>
           </a:p>
@@ -4738,7 +4780,7 @@
                 <a:ea typeface="Arial" pitchFamily="34" charset="-122"/>
                 <a:cs typeface="Arial" pitchFamily="34" charset="-120"/>
               </a:rPr>
-              <a:t>Pembrolizumab and stereotactic body radiotherapy combined in advanced hepatocell…</a:t>
+              <a:t>Tim-3 facilitates dendritic cell ferroptosis and impairs antitumor immunity in s…</a:t>
             </a:r>
             <a:endParaRPr lang="en-US" sz="1400" dirty="0"/>
           </a:p>
@@ -4775,7 +4817,7 @@
                 <a:ea typeface="Arial" pitchFamily="34" charset="-122"/>
                 <a:cs typeface="Arial" pitchFamily="34" charset="-120"/>
               </a:rPr>
-              <a:t>Image-guided radiofrequency versus microwave ablation for small to medium hepato…</a:t>
+              <a:t>When lipids silence immunity: Dendritic cell death in MASLD-associated HCC.</a:t>
             </a:r>
             <a:endParaRPr lang="en-US" sz="1400" dirty="0"/>
           </a:p>
@@ -4812,7 +4854,7 @@
                 <a:ea typeface="Arial" pitchFamily="34" charset="-122"/>
                 <a:cs typeface="Arial" pitchFamily="34" charset="-120"/>
               </a:rPr>
-              <a:t>Radiotherapy versus local ablation therapy for the treatment of hepatocellular c…</a:t>
+              <a:t>Low-dose bevacizumab plus atezolizumab enhances transarterial chemoembolization …</a:t>
             </a:r>
             <a:endParaRPr lang="en-US" sz="1400" dirty="0"/>
           </a:p>
@@ -4849,7 +4891,7 @@
                 <a:ea typeface="Arial" pitchFamily="34" charset="-122"/>
                 <a:cs typeface="Arial" pitchFamily="34" charset="-120"/>
               </a:rPr>
-              <a:t>Immune Checkpoint Inhibitor–Based Adjuvant Treatment Versus Surveillance in Cura…</a:t>
+              <a:t>External beam radiotherapy versus local ablation therapy for the treatment of he…</a:t>
             </a:r>
             <a:endParaRPr lang="en-US" sz="1400" dirty="0"/>
           </a:p>
@@ -4886,7 +4928,7 @@
                 <a:ea typeface="Arial" pitchFamily="34" charset="-122"/>
                 <a:cs typeface="Arial" pitchFamily="34" charset="-120"/>
               </a:rPr>
-              <a:t>… on interventional therapy and immune checkpoint inhibitors (ICIs) in patients …</a:t>
+              <a:t>Temporal Association Between COVID-19 Vaccination and HBsAg Loss in Chronic Hepa…</a:t>
             </a:r>
             <a:endParaRPr lang="en-US" sz="1400" dirty="0"/>
           </a:p>
@@ -5041,7 +5083,7 @@
                   </a:extLst>
                 </a:hlinkClick>
               </a:rPr>
-              <a:t>Clonal diversity underpins distinct modes of recurrence in hepatocellular carcinoma: the PLANet cohort study.</a:t>
+              <a:t>Addition of ipilimumab to atezolizumab plus bevacizumab in advanced hepatocellular carcinoma (PRODIGE 81-FFCD 2101-TRIPLET HCC): phase 2 results from a randomised, multicentre, open-label, phase 2-3 trial.</a:t>
             </a:r>
             <a:endParaRPr lang="en-US" sz="2400" dirty="0"/>
           </a:p>
@@ -5077,7 +5119,7 @@
                   <a:srgbClr val="888888"/>
                 </a:solidFill>
               </a:rPr>
-              <a:t>Gut  ·  IF 24.5  ·  Prospective Study</a:t>
+              <a:t>The lancet. Gastroenterology &amp; hepatology  ·  IF 35.7  ·  RCT Phase 3</a:t>
             </a:r>
             <a:endParaRPr lang="en-US" sz="1000" dirty="0"/>
           </a:p>
@@ -5120,7 +5162,7 @@
                 <a:ea typeface="Arial" pitchFamily="34" charset="-122"/>
                 <a:cs typeface="Arial" pitchFamily="34" charset="-120"/>
               </a:rPr>
-              <a:t>High recurrence rate in HCC post-surgery.</a:t>
+              <a:t>Triple therapy did not improve survival outcomes.</a:t>
             </a:r>
             <a:endParaRPr lang="en-US" sz="1800" dirty="0"/>
           </a:p>
@@ -5141,7 +5183,7 @@
                 <a:ea typeface="Arial" pitchFamily="34" charset="-122"/>
                 <a:cs typeface="Arial" pitchFamily="34" charset="-120"/>
               </a:rPr>
-              <a:t>Identified polyclonal and monoclonal recurrence.</a:t>
+              <a:t>30% objective response in triplet group.</a:t>
             </a:r>
             <a:endParaRPr lang="en-US" sz="1800" dirty="0"/>
           </a:p>
@@ -5162,7 +5204,7 @@
                 <a:ea typeface="Arial" pitchFamily="34" charset="-122"/>
                 <a:cs typeface="Arial" pitchFamily="34" charset="-120"/>
               </a:rPr>
-              <a:t>Polyclonal recurrences linked to immune suppression.</a:t>
+              <a:t>High rate of treatment-related adverse events.</a:t>
             </a:r>
             <a:endParaRPr lang="en-US" sz="1800" dirty="0"/>
           </a:p>
@@ -5183,7 +5225,7 @@
                 <a:ea typeface="Arial" pitchFamily="34" charset="-122"/>
                 <a:cs typeface="Arial" pitchFamily="34" charset="-120"/>
               </a:rPr>
-              <a:t>Distant metastases from aggressive subclones.</a:t>
+              <a:t>Study did not progress to phase 3.</a:t>
             </a:r>
             <a:endParaRPr lang="en-US" sz="1800" dirty="0"/>
           </a:p>
@@ -5204,7 +5246,7 @@
                 <a:ea typeface="Arial" pitchFamily="34" charset="-122"/>
                 <a:cs typeface="Arial" pitchFamily="34" charset="-120"/>
               </a:rPr>
-              <a:t>Multi-omics model predicts recurrence accurately.</a:t>
+              <a:t>No benefit from adding ipilimumab.</a:t>
             </a:r>
             <a:endParaRPr lang="en-US" sz="1800" dirty="0"/>
           </a:p>
@@ -5240,7 +5282,7 @@
                   <a:srgbClr val="888888"/>
                 </a:solidFill>
               </a:rPr>
-              <a:t>Zhang Ying, Sekar Karthik, Phua Cheryl Zi Jin et al.. Gut. 2026-07-21 DOI: 10.1136/gutjnl-2026-338227</a:t>
+              <a:t>Merle Philippe, Blanc Jean-Frederic, Le Malicot Karine et al.. The lancet. Gastroenterology &amp; hepatology. 2026-07-08 DOI: 10.1016/S2468-1253(26)00115-9</a:t>
             </a:r>
             <a:endParaRPr lang="en-US" sz="800" dirty="0"/>
           </a:p>
@@ -5440,7 +5482,7 @@
                   </a:extLst>
                 </a:hlinkClick>
               </a:rPr>
-              <a:t>Conversion surgery as a missing outcome in first-line immunotherapy trials for hepatocellular carcinoma</a:t>
+              <a:t>Transarterial Chemoembolization Plus Thermal Ablation in Unresectable Hepatocellular Carcinoma: The Phase 3 TORCH Randomized Clinical Trial.</a:t>
             </a:r>
             <a:endParaRPr lang="en-US" sz="2400" dirty="0"/>
           </a:p>
@@ -5476,7 +5518,7 @@
                   <a:srgbClr val="888888"/>
                 </a:solidFill>
               </a:rPr>
-              <a:t>Journal of Hepatology  ·  IF 25.7</a:t>
+              <a:t>JAMA oncology  ·  IF 28.4  ·  RCT Phase 3</a:t>
             </a:r>
             <a:endParaRPr lang="en-US" sz="1000" dirty="0"/>
           </a:p>
@@ -5519,7 +5561,7 @@
                 <a:ea typeface="Arial" pitchFamily="34" charset="-122"/>
                 <a:cs typeface="Arial" pitchFamily="34" charset="-120"/>
               </a:rPr>
-              <a:t>Conversion surgery in HCC treatment</a:t>
+              <a:t>TACE combined with thermal ablation improves PFS.</a:t>
             </a:r>
             <a:endParaRPr lang="en-US" sz="1800" dirty="0"/>
           </a:p>
@@ -5540,7 +5582,7 @@
                 <a:ea typeface="Arial" pitchFamily="34" charset="-122"/>
                 <a:cs typeface="Arial" pitchFamily="34" charset="-120"/>
               </a:rPr>
-              <a:t>Immunotherapy plus ipilimumab evaluated</a:t>
+              <a:t>Median OS was significantly longer with TACE-ablation.</a:t>
             </a:r>
             <a:endParaRPr lang="en-US" sz="1800" dirty="0"/>
           </a:p>
@@ -5561,49 +5603,7 @@
                 <a:ea typeface="Arial" pitchFamily="34" charset="-122"/>
                 <a:cs typeface="Arial" pitchFamily="34" charset="-120"/>
               </a:rPr>
-              <a:t>Need for perioperative immune support</a:t>
-            </a:r>
-            <a:endParaRPr lang="en-US" sz="1800" dirty="0"/>
-          </a:p>
-          <a:p>
-            <a:pPr marL="342900" indent="-342900">
-              <a:spcAft>
-                <a:spcPts val="800"/>
-              </a:spcAft>
-              <a:buSzPct val="100000"/>
-              <a:buChar char="•"/>
-            </a:pPr>
-            <a:r>
-              <a:rPr lang="en-US" sz="1800" dirty="0">
-                <a:solidFill>
-                  <a:srgbClr val="333333"/>
-                </a:solidFill>
-                <a:latin typeface="Arial" pitchFamily="34" charset="0"/>
-                <a:ea typeface="Arial" pitchFamily="34" charset="-122"/>
-                <a:cs typeface="Arial" pitchFamily="34" charset="-120"/>
-              </a:rPr>
-              <a:t>Potential for resectable HCC patients</a:t>
-            </a:r>
-            <a:endParaRPr lang="en-US" sz="1800" dirty="0"/>
-          </a:p>
-          <a:p>
-            <a:pPr marL="342900" indent="-342900">
-              <a:spcAft>
-                <a:spcPts val="800"/>
-              </a:spcAft>
-              <a:buSzPct val="100000"/>
-              <a:buChar char="•"/>
-            </a:pPr>
-            <a:r>
-              <a:rPr lang="en-US" sz="1800" dirty="0">
-                <a:solidFill>
-                  <a:srgbClr val="333333"/>
-                </a:solidFill>
-                <a:latin typeface="Arial" pitchFamily="34" charset="0"/>
-                <a:ea typeface="Arial" pitchFamily="34" charset="-122"/>
-                <a:cs typeface="Arial" pitchFamily="34" charset="-120"/>
-              </a:rPr>
-              <a:t>Importance of surgical outcomes in trials</a:t>
+              <a:t>Low to moderate tumor burden scores benefit most.</a:t>
             </a:r>
             <a:endParaRPr lang="en-US" sz="1800" dirty="0"/>
           </a:p>
@@ -5639,7 +5639,7 @@
                   <a:srgbClr val="888888"/>
                 </a:solidFill>
               </a:rPr>
-              <a:t>C Xu, J Sun, Q Liang. Journal of Hepatology. 2026</a:t>
+              <a:t>Lyu Ning, Yi Jun-Zhe, Wu Xin-Tong et al.. JAMA oncology. 2026-08-02 DOI: 10.1001/jamaoncol.2026.2366</a:t>
             </a:r>
             <a:endParaRPr lang="en-US" sz="800" dirty="0"/>
           </a:p>
@@ -5839,7 +5839,7 @@
                   </a:extLst>
                 </a:hlinkClick>
               </a:rPr>
-              <a:t>Nivolumab in combination with lenvatinib in unresectable hepatocellular carcinoma: The IKF-t006/IMMUNIB translational phase-2 study.</a:t>
+              <a:t>Distinct molecular pathways regulated by activated AKT and YAP signaling during intrahepatic cholangiocarcinoma progression.</a:t>
             </a:r>
             <a:endParaRPr lang="en-US" sz="2400" dirty="0"/>
           </a:p>
@@ -5875,7 +5875,7 @@
                   <a:srgbClr val="888888"/>
                 </a:solidFill>
               </a:rPr>
-              <a:t>European journal of cancer (Oxford, England : 1990)  ·  IF 8.4  ·  RCT Phase 2</a:t>
+              <a:t>Journal of hepatology  ·  IF 25.7  ·  Basic Research  ·  🌏 Asia</a:t>
             </a:r>
             <a:endParaRPr lang="en-US" sz="1000" dirty="0"/>
           </a:p>
@@ -5918,7 +5918,7 @@
                 <a:ea typeface="Arial" pitchFamily="34" charset="-122"/>
                 <a:cs typeface="Arial" pitchFamily="34" charset="-120"/>
               </a:rPr>
-              <a:t>Nivolumab plus lenvatinib for unresectable HCC</a:t>
+              <a:t>Activated AKT and YAP in iCCA progression.</a:t>
             </a:r>
             <a:endParaRPr lang="en-US" sz="1800" dirty="0"/>
           </a:p>
@@ -5939,7 +5939,7 @@
                 <a:ea typeface="Arial" pitchFamily="34" charset="-122"/>
                 <a:cs typeface="Arial" pitchFamily="34" charset="-120"/>
               </a:rPr>
-              <a:t>Objective response rate was 32% in trial</a:t>
+              <a:t>YAP inhibition reshapes immune microenvironment.</a:t>
             </a:r>
             <a:endParaRPr lang="en-US" sz="1800" dirty="0"/>
           </a:p>
@@ -5960,49 +5960,7 @@
                 <a:ea typeface="Arial" pitchFamily="34" charset="-122"/>
                 <a:cs typeface="Arial" pitchFamily="34" charset="-120"/>
               </a:rPr>
-              <a:t>Median overall survival reached 26.6 months</a:t>
-            </a:r>
-            <a:endParaRPr lang="en-US" sz="1800" dirty="0"/>
-          </a:p>
-          <a:p>
-            <a:pPr marL="342900" indent="-342900">
-              <a:spcAft>
-                <a:spcPts val="800"/>
-              </a:spcAft>
-              <a:buSzPct val="100000"/>
-              <a:buChar char="•"/>
-            </a:pPr>
-            <a:r>
-              <a:rPr lang="en-US" sz="1800" dirty="0">
-                <a:solidFill>
-                  <a:srgbClr val="333333"/>
-                </a:solidFill>
-                <a:latin typeface="Arial" pitchFamily="34" charset="0"/>
-                <a:ea typeface="Arial" pitchFamily="34" charset="-122"/>
-                <a:cs typeface="Arial" pitchFamily="34" charset="-120"/>
-              </a:rPr>
-              <a:t>Adverse events included colitis and hypertension</a:t>
-            </a:r>
-            <a:endParaRPr lang="en-US" sz="1800" dirty="0"/>
-          </a:p>
-          <a:p>
-            <a:pPr marL="342900" indent="-342900">
-              <a:spcAft>
-                <a:spcPts val="800"/>
-              </a:spcAft>
-              <a:buSzPct val="100000"/>
-              <a:buChar char="•"/>
-            </a:pPr>
-            <a:r>
-              <a:rPr lang="en-US" sz="1800" dirty="0">
-                <a:solidFill>
-                  <a:srgbClr val="333333"/>
-                </a:solidFill>
-                <a:latin typeface="Arial" pitchFamily="34" charset="0"/>
-                <a:ea typeface="Arial" pitchFamily="34" charset="-122"/>
-                <a:cs typeface="Arial" pitchFamily="34" charset="-120"/>
-              </a:rPr>
-              <a:t>FGFR activation linked to treatment benefits</a:t>
+              <a:t>Combined YAP suppression and anti-PD-L1 enhances regression.</a:t>
             </a:r>
             <a:endParaRPr lang="en-US" sz="1800" dirty="0"/>
           </a:p>
@@ -6038,7 +5996,7 @@
                   <a:srgbClr val="888888"/>
                 </a:solidFill>
               </a:rPr>
-              <a:t>Vogel Arndt, Ben Khaled Najib, Ramirez Javier Ruiz et al.. European journal of cancer (Oxford, England : 1990). 2026-07-08 DOI: 10.1016/j.ejca.2026.116847</a:t>
+              <a:t>Zhao Jinqiu, Yang Lian, Qin Yujia et al.. Journal of hepatology. 2026-07-16 DOI: 10.1016/j.jhep.2026.02.025</a:t>
             </a:r>
             <a:endParaRPr lang="en-US" sz="800" dirty="0"/>
           </a:p>
@@ -6238,7 +6196,7 @@
                   </a:extLst>
                 </a:hlinkClick>
               </a:rPr>
-              <a:t>Decoding neoantigen-encoding tumor-specific transcripts unveils a shared target reservoir for immunotherapy in hepatocellular carcinoma.</a:t>
+              <a:t>Distinct gut microbiota but common metabolomic signatures between viral and MASLD HCC contribute to outcomes of combination immunotherapy.</a:t>
             </a:r>
             <a:endParaRPr lang="en-US" sz="2400" dirty="0"/>
           </a:p>
@@ -6274,7 +6232,7 @@
                   <a:srgbClr val="888888"/>
                 </a:solidFill>
               </a:rPr>
-              <a:t>Journal for immunotherapy of cancer  ·  IF 10.9  ·  Basic Research</a:t>
+              <a:t>Hepatology (Baltimore, Md.)  ·  IF 12.9  ·  Prospective Study  ·  🌏 Asia</a:t>
             </a:r>
             <a:endParaRPr lang="en-US" sz="1000" dirty="0"/>
           </a:p>
@@ -6317,7 +6275,7 @@
                 <a:ea typeface="Arial" pitchFamily="34" charset="-122"/>
                 <a:cs typeface="Arial" pitchFamily="34" charset="-120"/>
               </a:rPr>
-              <a:t>NeoTSTs identified as abundant targets</a:t>
+              <a:t>Distinct microbiota in MASLD-HCC and V-HCC.</a:t>
             </a:r>
             <a:endParaRPr lang="en-US" sz="1800" dirty="0"/>
           </a:p>
@@ -6338,7 +6296,7 @@
                 <a:ea typeface="Arial" pitchFamily="34" charset="-122"/>
                 <a:cs typeface="Arial" pitchFamily="34" charset="-120"/>
               </a:rPr>
-              <a:t>Higher frequency than mutation-derived neoantigens</a:t>
+              <a:t>Common metabolomic signature: fecal acetate.</a:t>
             </a:r>
             <a:endParaRPr lang="en-US" sz="1800" dirty="0"/>
           </a:p>
@@ -6359,7 +6317,7 @@
                 <a:ea typeface="Arial" pitchFamily="34" charset="-122"/>
                 <a:cs typeface="Arial" pitchFamily="34" charset="-120"/>
               </a:rPr>
-              <a:t>Validations through proteomics and models</a:t>
+              <a:t>Higher acetate levels linked to better survival.</a:t>
             </a:r>
             <a:endParaRPr lang="en-US" sz="1800" dirty="0"/>
           </a:p>
@@ -6380,7 +6338,7 @@
                 <a:ea typeface="Arial" pitchFamily="34" charset="-122"/>
                 <a:cs typeface="Arial" pitchFamily="34" charset="-120"/>
               </a:rPr>
-              <a:t>Mechanisms include retained introns and activation</a:t>
+              <a:t>Durable responders show enriched SCFAs.</a:t>
             </a:r>
             <a:endParaRPr lang="en-US" sz="1800" dirty="0"/>
           </a:p>
@@ -6401,7 +6359,7 @@
                 <a:ea typeface="Arial" pitchFamily="34" charset="-122"/>
                 <a:cs typeface="Arial" pitchFamily="34" charset="-120"/>
               </a:rPr>
-              <a:t>NeoTSTs enhance immunotherapy efficacy</a:t>
+              <a:t>Fecal acetate as potential biomarker.</a:t>
             </a:r>
             <a:endParaRPr lang="en-US" sz="1800" dirty="0"/>
           </a:p>
@@ -6437,7 +6395,7 @@
                   <a:srgbClr val="888888"/>
                 </a:solidFill>
               </a:rPr>
-              <a:t>Lin Peng, Wen Yifan, Zhao Jingjing et al.. Journal for immunotherapy of cancer. 2026-07-21 DOI: 10.1136/jitc-2026-015428</a:t>
+              <a:t>Lee Pei-Chang, Wu Chi-Jung, Hung Ya-Wen et al.. Hepatology (Baltimore, Md.). 2026-07-17 DOI: 10.1097/HEP.0000000000001446</a:t>
             </a:r>
             <a:endParaRPr lang="en-US" sz="800" dirty="0"/>
           </a:p>
@@ -6637,7 +6595,7 @@
                   </a:extLst>
                 </a:hlinkClick>
               </a:rPr>
-              <a:t>Bevacizumab plus iparomlimab/tuvonralimab with hepatic artery infusion chemotherapy followed by stereotactic body radiotherapy in patients with BCLC stage C hepatocellular carcinoma with thrombus and/or extrahepatic oligometastases (BITS-TO-HCC): study protocol of a prospective, single-center, single-arm, phase II study.</a:t>
+              <a:t>Optimal treatment selection for hepatocellular carcinoma in the era of immunotherapy.</a:t>
             </a:r>
             <a:endParaRPr lang="en-US" sz="2400" dirty="0"/>
           </a:p>
@@ -6673,7 +6631,7 @@
                   <a:srgbClr val="888888"/>
                 </a:solidFill>
               </a:rPr>
-              <a:t>Therapeutic advances in medical oncology  ·  RCT Phase 2</a:t>
+              <a:t>Journal of gastroenterology  ·  RCT Phase 3  ·  🌏 Asia</a:t>
             </a:r>
             <a:endParaRPr lang="en-US" sz="1000" dirty="0"/>
           </a:p>
@@ -6716,7 +6674,7 @@
                 <a:ea typeface="Arial" pitchFamily="34" charset="-122"/>
                 <a:cs typeface="Arial" pitchFamily="34" charset="-120"/>
               </a:rPr>
-              <a:t>Combination therapy for advanced HCC patients</a:t>
+              <a:t>Immunotherapy transforms HCC management strategies.</a:t>
             </a:r>
             <a:endParaRPr lang="en-US" sz="1800" dirty="0"/>
           </a:p>
@@ -6737,7 +6695,7 @@
                 <a:ea typeface="Arial" pitchFamily="34" charset="-122"/>
                 <a:cs typeface="Arial" pitchFamily="34" charset="-120"/>
               </a:rPr>
-              <a:t>Sequential strategy with HAIC and immunotherapy</a:t>
+              <a:t>High recurrence rates in early-stage HCC persist.</a:t>
             </a:r>
             <a:endParaRPr lang="en-US" sz="1800" dirty="0"/>
           </a:p>
@@ -6758,7 +6716,7 @@
                 <a:ea typeface="Arial" pitchFamily="34" charset="-122"/>
                 <a:cs typeface="Arial" pitchFamily="34" charset="-120"/>
               </a:rPr>
-              <a:t>Primary endpoint: progression-free survival</a:t>
+              <a:t>AI models predict post-resection recurrence effectively.</a:t>
             </a:r>
             <a:endParaRPr lang="en-US" sz="1800" dirty="0"/>
           </a:p>
@@ -6779,7 +6737,7 @@
                 <a:ea typeface="Arial" pitchFamily="34" charset="-122"/>
                 <a:cs typeface="Arial" pitchFamily="34" charset="-120"/>
               </a:rPr>
-              <a:t>Secondary endpoints include overall survival</a:t>
+              <a:t>TACE combined with TKIs improves treatment outcomes.</a:t>
             </a:r>
             <a:endParaRPr lang="en-US" sz="1800" dirty="0"/>
           </a:p>
@@ -6800,7 +6758,7 @@
                 <a:ea typeface="Arial" pitchFamily="34" charset="-122"/>
                 <a:cs typeface="Arial" pitchFamily="34" charset="-120"/>
               </a:rPr>
-              <a:t>Study registered on ClinicalTrials.gov</a:t>
+              <a:t>Emerging biomarkers may refine immunotherapy selection.</a:t>
             </a:r>
             <a:endParaRPr lang="en-US" sz="1800" dirty="0"/>
           </a:p>
@@ -6836,7 +6794,7 @@
                   <a:srgbClr val="888888"/>
                 </a:solidFill>
               </a:rPr>
-              <a:t>Liu Yuxin, Wang Haohua, Zhu Kunli et al.. Therapeutic advances in medical oncology. 2026-07-26 DOI: 10.1177/17588359261470693</a:t>
+              <a:t>Chi Chen-Ta, Huang Yi-Hsiang. Journal of gastroenterology. 2026-07-27 DOI: 10.1007/s00535-026-02411-7</a:t>
             </a:r>
             <a:endParaRPr lang="en-US" sz="800" dirty="0"/>
           </a:p>
@@ -7036,7 +6994,7 @@
                   </a:extLst>
                 </a:hlinkClick>
               </a:rPr>
-              <a:t>Pembrolizumab and stereotactic body radiotherapy combined in advanced hepatocellular carcinoma post sorafenib–A phase II trial (PEMRAD)</a:t>
+              <a:t>Tim-3 facilitates dendritic cell ferroptosis and impairs antitumor immunity in steatohepatitis-related HCC.</a:t>
             </a:r>
             <a:endParaRPr lang="en-US" sz="2400" dirty="0"/>
           </a:p>
@@ -7072,7 +7030,7 @@
                   <a:srgbClr val="888888"/>
                 </a:solidFill>
               </a:rPr>
-              <a:t>JHEP …  ·  RCT Phase 2</a:t>
+              <a:t>Journal of hepatology  ·  IF 25.7  ·  Basic Research</a:t>
             </a:r>
             <a:endParaRPr lang="en-US" sz="1000" dirty="0"/>
           </a:p>
@@ -7115,7 +7073,7 @@
                 <a:ea typeface="Arial" pitchFamily="34" charset="-122"/>
                 <a:cs typeface="Arial" pitchFamily="34" charset="-120"/>
               </a:rPr>
-              <a:t>Phase II trial of PEMRAD initiated.</a:t>
+              <a:t>Tim-3 regulates dendritic cell ferroptosis.</a:t>
             </a:r>
             <a:endParaRPr lang="en-US" sz="1800" dirty="0"/>
           </a:p>
@@ -7136,7 +7094,7 @@
                 <a:ea typeface="Arial" pitchFamily="34" charset="-122"/>
                 <a:cs typeface="Arial" pitchFamily="34" charset="-120"/>
               </a:rPr>
-              <a:t>Combines pembrolizumab with radiotherapy.</a:t>
+              <a:t>High-fat diet induces immune suppression.</a:t>
             </a:r>
             <a:endParaRPr lang="en-US" sz="1800" dirty="0"/>
           </a:p>
@@ -7157,7 +7115,7 @@
                 <a:ea typeface="Arial" pitchFamily="34" charset="-122"/>
                 <a:cs typeface="Arial" pitchFamily="34" charset="-120"/>
               </a:rPr>
-              <a:t>Targets advanced hepatocellular carcinoma.</a:t>
+              <a:t>Tim-3 blockade enhances antitumor immunity.</a:t>
             </a:r>
             <a:endParaRPr lang="en-US" sz="1800" dirty="0"/>
           </a:p>
@@ -7178,7 +7136,7 @@
                 <a:ea typeface="Arial" pitchFamily="34" charset="-122"/>
                 <a:cs typeface="Arial" pitchFamily="34" charset="-120"/>
               </a:rPr>
-              <a:t>Conducted post-sorafenib treatment.</a:t>
+              <a:t>DC depletion correlates with poor prognosis.</a:t>
             </a:r>
             <a:endParaRPr lang="en-US" sz="1800" dirty="0"/>
           </a:p>
@@ -7199,7 +7157,7 @@
                 <a:ea typeface="Arial" pitchFamily="34" charset="-122"/>
                 <a:cs typeface="Arial" pitchFamily="34" charset="-120"/>
               </a:rPr>
-              <a:t>Evaluates safety and efficacy.</a:t>
+              <a:t>Combining therapies improves tumor control.</a:t>
             </a:r>
             <a:endParaRPr lang="en-US" sz="1800" dirty="0"/>
           </a:p>
@@ -7235,7 +7193,7 @@
                   <a:srgbClr val="888888"/>
                 </a:solidFill>
               </a:rPr>
-              <a:t>GM O'Kane, A Mesci, RW Jang. JHEP …. 2026</a:t>
+              <a:t>Li Na, Song Xiaojia, Peng Xueqi et al.. Journal of hepatology. 2026-07-16 DOI: 10.1016/j.jhep.2026.04.010</a:t>
             </a:r>
             <a:endParaRPr lang="en-US" sz="800" dirty="0"/>
           </a:p>
@@ -7435,7 +7393,7 @@
                   </a:extLst>
                 </a:hlinkClick>
               </a:rPr>
-              <a:t>Image-guided radiofrequency versus microwave ablation for small to medium hepatocellular carcinoma: a meta-analysis</a:t>
+              <a:t>When lipids silence immunity: Dendritic cell death in MASLD-associated HCC.</a:t>
             </a:r>
             <a:endParaRPr lang="en-US" sz="2400" dirty="0"/>
           </a:p>
@@ -7471,7 +7429,7 @@
                   <a:srgbClr val="888888"/>
                 </a:solidFill>
               </a:rPr>
-              <a:t>Frontiers in Oncology  ·  Meta-Analysis</a:t>
+              <a:t>Journal of hepatology  ·  IF 25.7</a:t>
             </a:r>
             <a:endParaRPr lang="en-US" sz="1000" dirty="0"/>
           </a:p>
@@ -7514,7 +7472,7 @@
                 <a:ea typeface="Arial" pitchFamily="34" charset="-122"/>
                 <a:cs typeface="Arial" pitchFamily="34" charset="-120"/>
               </a:rPr>
-              <a:t>Focus on small-to-medium HCC patients</a:t>
+              <a:t>Study focuses on MASLD and HCC.</a:t>
             </a:r>
             <a:endParaRPr lang="en-US" sz="1800" dirty="0"/>
           </a:p>
@@ -7535,7 +7493,7 @@
                 <a:ea typeface="Arial" pitchFamily="34" charset="-122"/>
                 <a:cs typeface="Arial" pitchFamily="34" charset="-120"/>
               </a:rPr>
-              <a:t>Comparison of radiofrequency and microwave ablation</a:t>
+              <a:t>Dendritic cell death linked to lipids.</a:t>
             </a:r>
             <a:endParaRPr lang="en-US" sz="1800" dirty="0"/>
           </a:p>
@@ -7556,7 +7514,7 @@
                 <a:ea typeface="Arial" pitchFamily="34" charset="-122"/>
                 <a:cs typeface="Arial" pitchFamily="34" charset="-120"/>
               </a:rPr>
-              <a:t>Inclusion of randomized controlled trials</a:t>
+              <a:t>Immunity suppression observed in HCC.</a:t>
             </a:r>
             <a:endParaRPr lang="en-US" sz="1800" dirty="0"/>
           </a:p>
@@ -7577,7 +7535,7 @@
                 <a:ea typeface="Arial" pitchFamily="34" charset="-122"/>
                 <a:cs typeface="Arial" pitchFamily="34" charset="-120"/>
               </a:rPr>
-              <a:t>Evaluation of treatment efficacy and safety</a:t>
+              <a:t>Potential therapeutic targets identified.</a:t>
             </a:r>
             <a:endParaRPr lang="en-US" sz="1800" dirty="0"/>
           </a:p>
@@ -7598,7 +7556,7 @@
                 <a:ea typeface="Arial" pitchFamily="34" charset="-122"/>
                 <a:cs typeface="Arial" pitchFamily="34" charset="-120"/>
               </a:rPr>
-              <a:t>Meta-analysis provides comprehensive insights</a:t>
+              <a:t>Further research needed on lipid effects.</a:t>
             </a:r>
             <a:endParaRPr lang="en-US" sz="1800" dirty="0"/>
           </a:p>
@@ -7634,7 +7592,7 @@
                   <a:srgbClr val="888888"/>
                 </a:solidFill>
               </a:rPr>
-              <a:t>Y Fu, L Wang, T Hu. Frontiers in Oncology. 2026</a:t>
+              <a:t>Kocheise Lorenz, Schneider Kai Markus. Journal of hepatology. 2026-07-15 DOI: 10.1016/j.jhep.2026.06.008</a:t>
             </a:r>
             <a:endParaRPr lang="en-US" sz="800" dirty="0"/>
           </a:p>

--- a/docs/digest-en.pptx
+++ b/docs/digest-en.pptx
@@ -2269,7 +2269,7 @@
                   <a:srgbClr val="888888"/>
                 </a:solidFill>
               </a:rPr>
-              <a:t>2026-07-27 — 2026-08-03</a:t>
+              <a:t>2026-08-03 — 2026-08-10</a:t>
             </a:r>
             <a:endParaRPr lang="en-US" sz="1400" dirty="0"/>
           </a:p>
@@ -2460,7 +2460,7 @@
                   </a:extLst>
                 </a:hlinkClick>
               </a:rPr>
-              <a:t>Low-dose bevacizumab plus atezolizumab enhances transarterial chemoembolization in HCC via correcting vascular-immune niche dysfunction.</a:t>
+              <a:t>Radiotherapy versus local ablation therapy for the treatment of hepatocellular carcinoma: A systematic review and meta-analysis.</a:t>
             </a:r>
             <a:endParaRPr lang="en-US" sz="2400" dirty="0"/>
           </a:p>
@@ -2496,7 +2496,7 @@
                   <a:srgbClr val="888888"/>
                 </a:solidFill>
               </a:rPr>
-              <a:t>Journal of hepatology  ·  IF 25.7  ·  Retrospective Study</a:t>
+              <a:t>Journal of Clinical …  ·  Meta-Analysis</a:t>
             </a:r>
             <a:endParaRPr lang="en-US" sz="1000" dirty="0"/>
           </a:p>
@@ -2539,7 +2539,7 @@
                 <a:ea typeface="Arial" pitchFamily="34" charset="-122"/>
                 <a:cs typeface="Arial" pitchFamily="34" charset="-120"/>
               </a:rPr>
-              <a:t>TACE leaves residual HCC tumors poorly defined.</a:t>
+              <a:t>Comparison of radiotherapy and local ablation</a:t>
             </a:r>
             <a:endParaRPr lang="en-US" sz="1800" dirty="0"/>
           </a:p>
@@ -2560,7 +2560,7 @@
                 <a:ea typeface="Arial" pitchFamily="34" charset="-122"/>
                 <a:cs typeface="Arial" pitchFamily="34" charset="-120"/>
               </a:rPr>
-              <a:t>PDGFC+ TAMs promote immunosuppressive environment.</a:t>
+              <a:t>Focus on hepatocellular carcinoma (HCC) treatment</a:t>
             </a:r>
             <a:endParaRPr lang="en-US" sz="1800" dirty="0"/>
           </a:p>
@@ -2581,7 +2581,49 @@
                 <a:ea typeface="Arial" pitchFamily="34" charset="-122"/>
                 <a:cs typeface="Arial" pitchFamily="34" charset="-120"/>
               </a:rPr>
-              <a:t>Low-dose bevacizumab plus atezolizumab improves outcomes.</a:t>
+              <a:t>Assessment of local progression-free survival</a:t>
+            </a:r>
+            <a:endParaRPr lang="en-US" sz="1800" dirty="0"/>
+          </a:p>
+          <a:p>
+            <a:pPr marL="342900" indent="-342900">
+              <a:spcAft>
+                <a:spcPts val="800"/>
+              </a:spcAft>
+              <a:buSzPct val="100000"/>
+              <a:buChar char="•"/>
+            </a:pPr>
+            <a:r>
+              <a:rPr lang="en-US" sz="1800" dirty="0">
+                <a:solidFill>
+                  <a:srgbClr val="333333"/>
+                </a:solidFill>
+                <a:latin typeface="Arial" pitchFamily="34" charset="0"/>
+                <a:ea typeface="Arial" pitchFamily="34" charset="-122"/>
+                <a:cs typeface="Arial" pitchFamily="34" charset="-120"/>
+              </a:rPr>
+              <a:t>Inclusion of radiofrequency and microwave ablation</a:t>
+            </a:r>
+            <a:endParaRPr lang="en-US" sz="1800" dirty="0"/>
+          </a:p>
+          <a:p>
+            <a:pPr marL="342900" indent="-342900">
+              <a:spcAft>
+                <a:spcPts val="800"/>
+              </a:spcAft>
+              <a:buSzPct val="100000"/>
+              <a:buChar char="•"/>
+            </a:pPr>
+            <a:r>
+              <a:rPr lang="en-US" sz="1800" dirty="0">
+                <a:solidFill>
+                  <a:srgbClr val="333333"/>
+                </a:solidFill>
+                <a:latin typeface="Arial" pitchFamily="34" charset="0"/>
+                <a:ea typeface="Arial" pitchFamily="34" charset="-122"/>
+                <a:cs typeface="Arial" pitchFamily="34" charset="-120"/>
+              </a:rPr>
+              <a:t>Systematic review and meta-analysis conducted</a:t>
             </a:r>
             <a:endParaRPr lang="en-US" sz="1800" dirty="0"/>
           </a:p>
@@ -2617,7 +2659,7 @@
                   <a:srgbClr val="888888"/>
                 </a:solidFill>
               </a:rPr>
-              <a:t>Zhao Chenghao, Yan Huzheng, Liang Zhixing et al.. Journal of hepatology. 2026-07-31 DOI: 10.1016/j.jhep.2026.07.028</a:t>
+              <a:t>SH Bae, SH Choi, SM Yoon. Journal of Clinical …. 2026</a:t>
             </a:r>
             <a:endParaRPr lang="en-US" sz="800" dirty="0"/>
           </a:p>
@@ -2817,7 +2859,7 @@
                   </a:extLst>
                 </a:hlinkClick>
               </a:rPr>
-              <a:t>External beam radiotherapy versus local ablation therapy for the treatment of hepatocellular carcinoma: a systematic review and meta-analysis.</a:t>
+              <a:t>… on interventional therapy and immune checkpoint inhibitors (ICIs) in patients with intermediate-and advanced-stage hepatocellular carcinoma: a systematic review …</a:t>
             </a:r>
             <a:endParaRPr lang="en-US" sz="2400" dirty="0"/>
           </a:p>
@@ -2853,7 +2895,7 @@
                   <a:srgbClr val="888888"/>
                 </a:solidFill>
               </a:rPr>
-              <a:t>Clinical and molecular hepatology  ·  Meta-Analysis  ·  🌏 Asia</a:t>
+              <a:t>… , Immunotherapy  ·  Systematic Review</a:t>
             </a:r>
             <a:endParaRPr lang="en-US" sz="1000" dirty="0"/>
           </a:p>
@@ -2896,7 +2938,7 @@
                 <a:ea typeface="Arial" pitchFamily="34" charset="-122"/>
                 <a:cs typeface="Arial" pitchFamily="34" charset="-120"/>
               </a:rPr>
-              <a:t>EBRT shows lower local recurrence rates.</a:t>
+              <a:t>Combination therapy shows improved outcomes.</a:t>
             </a:r>
             <a:endParaRPr lang="en-US" sz="1800" dirty="0"/>
           </a:p>
@@ -2917,7 +2959,7 @@
                 <a:ea typeface="Arial" pitchFamily="34" charset="-122"/>
                 <a:cs typeface="Arial" pitchFamily="34" charset="-120"/>
               </a:rPr>
-              <a:t>Improved local progression-free survival with EBRT.</a:t>
+              <a:t>ICIs enhance immune response in HCC.</a:t>
             </a:r>
             <a:endParaRPr lang="en-US" sz="1800" dirty="0"/>
           </a:p>
@@ -2938,49 +2980,7 @@
                 <a:ea typeface="Arial" pitchFamily="34" charset="-122"/>
                 <a:cs typeface="Arial" pitchFamily="34" charset="-120"/>
               </a:rPr>
-              <a:t>Overall survival rates similar between EBRT and LAT.</a:t>
-            </a:r>
-            <a:endParaRPr lang="en-US" sz="1800" dirty="0"/>
-          </a:p>
-          <a:p>
-            <a:pPr marL="342900" indent="-342900">
-              <a:spcAft>
-                <a:spcPts val="800"/>
-              </a:spcAft>
-              <a:buSzPct val="100000"/>
-              <a:buChar char="•"/>
-            </a:pPr>
-            <a:r>
-              <a:rPr lang="en-US" sz="1800" dirty="0">
-                <a:solidFill>
-                  <a:srgbClr val="333333"/>
-                </a:solidFill>
-                <a:latin typeface="Arial" pitchFamily="34" charset="0"/>
-                <a:ea typeface="Arial" pitchFamily="34" charset="-122"/>
-                <a:cs typeface="Arial" pitchFamily="34" charset="-120"/>
-              </a:rPr>
-              <a:t>Severe toxicities comparable in both treatments.</a:t>
-            </a:r>
-            <a:endParaRPr lang="en-US" sz="1800" dirty="0"/>
-          </a:p>
-          <a:p>
-            <a:pPr marL="342900" indent="-342900">
-              <a:spcAft>
-                <a:spcPts val="800"/>
-              </a:spcAft>
-              <a:buSzPct val="100000"/>
-              <a:buChar char="•"/>
-            </a:pPr>
-            <a:r>
-              <a:rPr lang="en-US" sz="1800" dirty="0">
-                <a:solidFill>
-                  <a:srgbClr val="333333"/>
-                </a:solidFill>
-                <a:latin typeface="Arial" pitchFamily="34" charset="0"/>
-                <a:ea typeface="Arial" pitchFamily="34" charset="-122"/>
-                <a:cs typeface="Arial" pitchFamily="34" charset="-120"/>
-              </a:rPr>
-              <a:t>EBRT is a safe alternative for HCC.</a:t>
+              <a:t>Interventional therapy options include ablation.</a:t>
             </a:r>
             <a:endParaRPr lang="en-US" sz="1800" dirty="0"/>
           </a:p>
@@ -3016,7 +3016,7 @@
                   <a:srgbClr val="888888"/>
                 </a:solidFill>
               </a:rPr>
-              <a:t>Bae Sun Hyun, Choi Seo Hee, Yoon Sang Min et al.. Clinical and molecular hepatology. 2026-07-30 DOI: 10.3350/cmh.2026.0535</a:t>
+              <a:t>J Su, Y Su, R Mai. … , Immunotherapy. 2026</a:t>
             </a:r>
             <a:endParaRPr lang="en-US" sz="800" dirty="0"/>
           </a:p>
@@ -3216,7 +3216,7 @@
                   </a:extLst>
                 </a:hlinkClick>
               </a:rPr>
-              <a:t>Temporal Association Between COVID-19 Vaccination and HBsAg Loss in Chronic Hepatitis B Infection: An Interrupted Time Series Analysis.</a:t>
+              <a:t>Immune Checkpoint Inhibitors in Hepatocellular Carcinoma Before and After Liver Transplantation: A Systematic Review</a:t>
             </a:r>
             <a:endParaRPr lang="en-US" sz="2400" dirty="0"/>
           </a:p>
@@ -3252,7 +3252,7 @@
                   <a:srgbClr val="888888"/>
                 </a:solidFill>
               </a:rPr>
-              <a:t>Alimentary pharmacology &amp; therapeutics  ·  IF 6.6  ·  🌏 Asia</a:t>
+              <a:t>Cancers  ·  Systematic Review</a:t>
             </a:r>
             <a:endParaRPr lang="en-US" sz="1000" dirty="0"/>
           </a:p>
@@ -3295,7 +3295,7 @@
                 <a:ea typeface="Arial" pitchFamily="34" charset="-122"/>
                 <a:cs typeface="Arial" pitchFamily="34" charset="-120"/>
               </a:rPr>
-              <a:t>Study on HBsAg loss in CHB patients</a:t>
+              <a:t>Review of immune checkpoint inhibitors in HCC</a:t>
             </a:r>
             <a:endParaRPr lang="en-US" sz="1800" dirty="0"/>
           </a:p>
@@ -3316,7 +3316,7 @@
                 <a:ea typeface="Arial" pitchFamily="34" charset="-122"/>
                 <a:cs typeface="Arial" pitchFamily="34" charset="-120"/>
               </a:rPr>
-              <a:t>COVID-19 vaccination linked to HBsAg loss</a:t>
+              <a:t>Focus on pre- and post-liver transplantation</a:t>
             </a:r>
             <a:endParaRPr lang="en-US" sz="1800" dirty="0"/>
           </a:p>
@@ -3337,7 +3337,7 @@
                 <a:ea typeface="Arial" pitchFamily="34" charset="-122"/>
                 <a:cs typeface="Arial" pitchFamily="34" charset="-120"/>
               </a:rPr>
-              <a:t>Incidence peaked at 1.27 in 2022</a:t>
+              <a:t>Includes PD-1, PD-L1, and CTLA-4 therapies</a:t>
             </a:r>
             <a:endParaRPr lang="en-US" sz="1800" dirty="0"/>
           </a:p>
@@ -3358,7 +3358,7 @@
                 <a:ea typeface="Arial" pitchFamily="34" charset="-122"/>
                 <a:cs typeface="Arial" pitchFamily="34" charset="-120"/>
               </a:rPr>
-              <a:t>No change in HCC incidence observed</a:t>
+              <a:t>Evaluates efficacy and safety outcomes</a:t>
             </a:r>
             <a:endParaRPr lang="en-US" sz="1800" dirty="0"/>
           </a:p>
@@ -3379,7 +3379,7 @@
                 <a:ea typeface="Arial" pitchFamily="34" charset="-122"/>
                 <a:cs typeface="Arial" pitchFamily="34" charset="-120"/>
               </a:rPr>
-              <a:t>Immunomodulatory effect on HBV dynamics</a:t>
+              <a:t>Highlights potential for improved patient survival</a:t>
             </a:r>
             <a:endParaRPr lang="en-US" sz="1800" dirty="0"/>
           </a:p>
@@ -3415,7 +3415,7 @@
                   <a:srgbClr val="888888"/>
                 </a:solidFill>
               </a:rPr>
-              <a:t>Choi Jonggi, Carroll Allison, Nguyen Vy H et al.. Alimentary pharmacology &amp; therapeutics. 2026-07-29 DOI: 10.1111/apt.70733</a:t>
+              <a:t>F Dituri, L Carrieri, M Mosaico. Cancers. 2026</a:t>
             </a:r>
             <a:endParaRPr lang="en-US" sz="800" dirty="0"/>
           </a:p>
@@ -3632,7 +3632,7 @@
                   <a:srgbClr val="FFFFFF"/>
                 </a:solidFill>
               </a:rPr>
-              <a:t>1. **免疫療法的潛力**  </a:t>
+              <a:t>1. **生物標記物的必要性 (Necessity of Biomarkers)**  </a:t>
             </a:r>
             <a:endParaRPr lang="en-US" sz="1200" dirty="0"/>
           </a:p>
@@ -3649,7 +3649,7 @@
                   <a:srgbClr val="FFFFFF"/>
                 </a:solidFill>
               </a:rPr>
-              <a:t>   The combination of ipilimumab with atezolizumab and bevacizumab shows promising results in improving outcomes for patients with advanced hepatocellular carcinoma (HCC), highlighting the potential of multi-targeted immunotherapy.  </a:t>
+              <a:t>   免疫檢查點抑制劑（ICI）在肝細胞癌（HCC）中的應用顯示，僅約30%的患者對治療有反應，強調了基於生物標記物的患者選擇的重要性。  </a:t>
             </a:r>
             <a:endParaRPr lang="en-US" sz="1200" dirty="0"/>
           </a:p>
@@ -3666,7 +3666,7 @@
                   <a:srgbClr val="FFFFFF"/>
                 </a:solidFill>
               </a:rPr>
-              <a:t>   以ipilimumab結合atezolizumab和bevacizumab的療法顯示出改善晚期肝細胞癌（HCC）患者預後的潛力，突顯了多靶向免疫療法的可能性。</a:t>
+              <a:t>   The application of immune checkpoint inhibitors (ICIs) in hepatocellular carcinoma (HCC) reveals that only about 30% of patients respond to treatment, highlighting the importance of biomarker-driven patient selection.</a:t>
             </a:r>
             <a:endParaRPr lang="en-US" sz="1200" dirty="0"/>
           </a:p>
@@ -3692,7 +3692,7 @@
                   <a:srgbClr val="FFFFFF"/>
                 </a:solidFill>
               </a:rPr>
-              <a:t>2. **TACE與熱消融的結合**  </a:t>
+              <a:t>2. **代謝重編程的影響 (Impact of Metabolic Reprogramming)**  </a:t>
             </a:r>
             <a:endParaRPr lang="en-US" sz="1200" dirty="0"/>
           </a:p>
@@ -3709,7 +3709,7 @@
                   <a:srgbClr val="FFFFFF"/>
                 </a:solidFill>
               </a:rPr>
-              <a:t>   The TORCH trial indicates that combining transarterial chemoembolization (TACE) with thermal ablation may enhance survival outcomes for patients with unresectable HCC, suggesting a need for integrated treatment approaches.  </a:t>
+              <a:t>   代謝功能障礙相關的肝炎（MASH-HCC）對免疫檢查點抑制劑的反應較差，這可能與腫瘤細胞的代謝重編程及腫瘤微環境的異常有關。  </a:t>
             </a:r>
             <a:endParaRPr lang="en-US" sz="1200" dirty="0"/>
           </a:p>
@@ -3726,7 +3726,7 @@
                   <a:srgbClr val="FFFFFF"/>
                 </a:solidFill>
               </a:rPr>
-              <a:t>   TORCH試驗顯示，將經動脈化療栓塞（TACE）與熱消融相結合可能改善不可切除HCC患者的生存結果，表明需要綜合治療方法。</a:t>
+              <a:t>   Metabolic dysfunction-associated steatohepatitis-related hepatocellular carcinoma (MASH-HCC) shows poor response to immune checkpoint inhibitors, potentially linked to metabolic reprogramming of tumor cells and abnormal tumor microenvironment.</a:t>
             </a:r>
             <a:endParaRPr lang="en-US" sz="1200" dirty="0"/>
           </a:p>
@@ -3752,7 +3752,7 @@
                   <a:srgbClr val="FFFFFF"/>
                 </a:solidFill>
               </a:rPr>
-              <a:t>3. **腸道微生物與免疫反應的關聯**  </a:t>
+              <a:t>3. **免疫微環境的時空動態 (Spatiotemporal Dynamics of Immune Microenvironment)**  </a:t>
             </a:r>
             <a:endParaRPr lang="en-US" sz="1200" dirty="0"/>
           </a:p>
@@ -3769,7 +3769,7 @@
                   <a:srgbClr val="FFFFFF"/>
                 </a:solidFill>
               </a:rPr>
-              <a:t>   Distinct gut microbiota profiles between viral and metabolic dysfunction-associated steatotic liver disease-related HCC suggest that microbiota modulation could be a novel strategy to enhance immunotherapy efficacy.  </a:t>
+              <a:t>   Atezolizumab與Bevacizumab的聯合療法在HCC中的免疫重塑過程尚未完全了解，這對治療效果的預測至關重要。  </a:t>
             </a:r>
             <a:endParaRPr lang="en-US" sz="1200" dirty="0"/>
           </a:p>
@@ -3786,7 +3786,7 @@
                   <a:srgbClr val="FFFFFF"/>
                 </a:solidFill>
               </a:rPr>
-              <a:t>   病毒性與代謝功能障礙相關脂肪肝病（MASLD）HCC之間的腸道微生物群特徵差異表明，調節微生物群可能是一種增強免疫療法療效的新策略。</a:t>
+              <a:t>   The spatiotemporal immune remodeling associated with the combination therapy of Atezolizumab and Bevacizumab in HCC remains poorly understood, which is crucial for predicting treatment outcomes.</a:t>
             </a:r>
             <a:endParaRPr lang="en-US" sz="1200" dirty="0"/>
           </a:p>
@@ -3812,7 +3812,7 @@
                   <a:srgbClr val="FFFFFF"/>
                 </a:solidFill>
               </a:rPr>
-              <a:t>4. **代謝環境對免疫的影響**  </a:t>
+              <a:t>4. **局部消融與免疫治療的結合 (Combination of Local Ablation and Immunotherapy)**  </a:t>
             </a:r>
             <a:endParaRPr lang="en-US" sz="1200" dirty="0"/>
           </a:p>
@@ -3829,7 +3829,7 @@
                   <a:srgbClr val="FFFFFF"/>
                 </a:solidFill>
               </a:rPr>
-              <a:t>   The lipid-rich microenvironment in MASLD-HCC contributes to immune suppression, emphasizing the need to understand metabolic factors in developing effective immunotherapy strategies.  </a:t>
+              <a:t>   局部消融技術如不可逆電穿孔（IRE）顯示出與免疫治療結合的潛力，能夠減輕免疫抑制並降低肝癌的再生長。  </a:t>
             </a:r>
             <a:endParaRPr lang="en-US" sz="1200" dirty="0"/>
           </a:p>
@@ -3846,7 +3846,7 @@
                   <a:srgbClr val="FFFFFF"/>
                 </a:solidFill>
               </a:rPr>
-              <a:t>   MASLD-HCC中的富脂微環境促進免疫抑制，強調在開發有效免疫療法策略時需要理解代謝因素。</a:t>
+              <a:t>   Local ablation techniques such as irreversible electroporation (IRE) demonstrate potential when combined with immunotherapy, alleviating immunosuppression and reducing hepatocellular carcinoma regrowth.</a:t>
             </a:r>
             <a:endParaRPr lang="en-US" sz="1200" dirty="0"/>
           </a:p>
@@ -3872,7 +3872,7 @@
                   <a:srgbClr val="FFFFFF"/>
                 </a:solidFill>
               </a:rPr>
-              <a:t>5. **個體化治療的重要性**  </a:t>
+              <a:t>5. **不同組合療法的效果 (Effects of Different Combination Therapies)**  </a:t>
             </a:r>
             <a:endParaRPr lang="en-US" sz="1200" dirty="0"/>
           </a:p>
@@ -3889,7 +3889,7 @@
                   <a:srgbClr val="FFFFFF"/>
                 </a:solidFill>
               </a:rPr>
-              <a:t>   The necessity for personalized treatment strategies in HCC management is underscored, as recurrence rates remain high despite advancements in immunotherapy and antiviral treatments.</a:t>
+              <a:t>   將免疫檢查點抑制劑與介入療法結合的策略顯示出潛在的療效，但仍需進一步研究以確定最佳的治療組合。</a:t>
             </a:r>
             <a:endParaRPr lang="en-US" sz="1200" dirty="0"/>
           </a:p>
@@ -4035,7 +4035,7 @@
                   <a:srgbClr val="FFFFFF"/>
                 </a:solidFill>
               </a:rPr>
-              <a:t>儘管免疫療法和抗病毒治療有所進展，但HCC管理中對個體化治療策略的必要性仍然突出，因為復發率仍然很高。</a:t>
+              <a:t>Strategies combining immune checkpoint inhibitors with interventional therapies show potential efficacy, but further research is needed to determine the optimal treatment combinations.</a:t>
             </a:r>
             <a:endParaRPr lang="en-US" sz="1200" dirty="0"/>
           </a:p>
@@ -4087,7 +4087,7 @@
                   <a:srgbClr val="FFFFFF"/>
                 </a:solidFill>
               </a:rPr>
-              <a:t>1. **多重免疫療法的長期效果**  </a:t>
+              <a:t>1. **生物標記物的開發 (Development of Biomarkers)**  </a:t>
             </a:r>
             <a:endParaRPr lang="en-US" sz="1200" dirty="0"/>
           </a:p>
@@ -4104,7 +4104,7 @@
                   <a:srgbClr val="FFFFFF"/>
                 </a:solidFill>
               </a:rPr>
-              <a:t>   Future studies should focus on the long-term efficacy and safety of multi-agent immunotherapy combinations in HCC, particularly in diverse patient populations.  </a:t>
+              <a:t>   需要進一步開發和驗證能夠預測HCC患者對免疫檢查點抑制劑反應的生物標記物，以實現個性化治療。  </a:t>
             </a:r>
             <a:endParaRPr lang="en-US" sz="1200" dirty="0"/>
           </a:p>
@@ -4121,7 +4121,7 @@
                   <a:srgbClr val="FFFFFF"/>
                 </a:solidFill>
               </a:rPr>
-              <a:t>   未來的研究應集中於多藥免疫療法組合在HCC中的長期療效和安全性，特別是在不同患者群體中。</a:t>
+              <a:t>   Further development and validation of biomarkers that can predict HCC patient responses to immune checkpoint inhibitors are needed for personalized treatment.</a:t>
             </a:r>
             <a:endParaRPr lang="en-US" sz="1200" dirty="0"/>
           </a:p>
@@ -4147,7 +4147,7 @@
                   <a:srgbClr val="FFFFFF"/>
                 </a:solidFill>
               </a:rPr>
-              <a:t>2. **微生物群與免疫療法的交互作用**  </a:t>
+              <a:t>2. **代謝機制的深入研究 (In-depth Study of Metabolic Mechanisms)**  </a:t>
             </a:r>
             <a:endParaRPr lang="en-US" sz="1200" dirty="0"/>
           </a:p>
@@ -4164,7 +4164,7 @@
                   <a:srgbClr val="FFFFFF"/>
                 </a:solidFill>
               </a:rPr>
-              <a:t>   Investigating the role of gut microbiota in modulating responses to immunotherapy could provide insights into optimizing treatment protocols for HCC patients.  </a:t>
+              <a:t>   研究MASH-HCC的代謝機制及其對免疫治療的影響，以探索新的治療策略。  </a:t>
             </a:r>
             <a:endParaRPr lang="en-US" sz="1200" dirty="0"/>
           </a:p>
@@ -4181,7 +4181,7 @@
                   <a:srgbClr val="FFFFFF"/>
                 </a:solidFill>
               </a:rPr>
-              <a:t>   研究腸道微生物群在調節免疫療法反應中的作用可能為優化HCC患者的治療方案提供見解。</a:t>
+              <a:t>   Investigating the metabolic mechanisms of MASH-HCC and their impact on immunotherapy could uncover new therapeutic strategies.</a:t>
             </a:r>
             <a:endParaRPr lang="en-US" sz="1200" dirty="0"/>
           </a:p>
@@ -4207,7 +4207,7 @@
                   <a:srgbClr val="FFFFFF"/>
                 </a:solidFill>
               </a:rPr>
-              <a:t>3. **代謝因素的機制研究**  </a:t>
+              <a:t>3. **腫瘤微環境的動態觀察 (Dynamic Observation of Tumor Microenvironment)**  </a:t>
             </a:r>
             <a:endParaRPr lang="en-US" sz="1200" dirty="0"/>
           </a:p>
@@ -4224,7 +4224,7 @@
                   <a:srgbClr val="FFFFFF"/>
                 </a:solidFill>
               </a:rPr>
-              <a:t>   Further exploration of the metabolic pathways involved in MASLD-HCC and their impact on immune responses could lead to novel therapeutic targets.  </a:t>
+              <a:t>   進行長期的腫瘤微環境動態觀察，以更好地理解免疫重塑對治療結果的影響。  </a:t>
             </a:r>
             <a:endParaRPr lang="en-US" sz="1200" dirty="0"/>
           </a:p>
@@ -4241,7 +4241,7 @@
                   <a:srgbClr val="FFFFFF"/>
                 </a:solidFill>
               </a:rPr>
-              <a:t>   進一步探索MASLD-HCC中涉及的代謝途徑及其對免疫反應的影響可能會導致新的治療靶點。</a:t>
+              <a:t>   Conducting long-term dynamic observations of the tumor microenvironment to better understand the impact of immune remodeling on treatment outcomes.</a:t>
             </a:r>
             <a:endParaRPr lang="en-US" sz="1200" dirty="0"/>
           </a:p>
@@ -4267,7 +4267,7 @@
                   <a:srgbClr val="FFFFFF"/>
                 </a:solidFill>
               </a:rPr>
-              <a:t>4. **個體化治療的臨床應用**  </a:t>
+              <a:t>4. **新型局部消融技術的評估 (Evaluation of Novel Local Ablation Techniques)**  </a:t>
             </a:r>
             <a:endParaRPr lang="en-US" sz="1200" dirty="0"/>
           </a:p>
@@ -4284,7 +4284,7 @@
                   <a:srgbClr val="FFFFFF"/>
                 </a:solidFill>
               </a:rPr>
-              <a:t>   Developing and validating personalized treatment algorithms based on genetic, metabolic, and microbiomic profiles will be crucial for improving HCC management.  </a:t>
+              <a:t>   評估新型局部消融技術與免疫治療結合的效果，以提高HCC的治療效果。  </a:t>
             </a:r>
             <a:endParaRPr lang="en-US" sz="1200" dirty="0"/>
           </a:p>
@@ -4301,7 +4301,7 @@
                   <a:srgbClr val="FFFFFF"/>
                 </a:solidFill>
               </a:rPr>
-              <a:t>   基於基因、代謝和微生物組特徵開發和驗證個體化治療算法對改善HCC管理至關重要。</a:t>
+              <a:t>   Evaluating the efficacy of novel local ablation techniques in combination with immunotherapy to enhance treatment outcomes for HCC.</a:t>
             </a:r>
             <a:endParaRPr lang="en-US" sz="1200" dirty="0"/>
           </a:p>
@@ -4327,7 +4327,7 @@
                   <a:srgbClr val="FFFFFF"/>
                 </a:solidFill>
               </a:rPr>
-              <a:t>5. **新型治療組合的探索**  </a:t>
+              <a:t>5. **臨床試驗的設計 (Design of Clinical Trials)**  </a:t>
             </a:r>
             <a:endParaRPr lang="en-US" sz="1200" dirty="0"/>
           </a:p>
@@ -4344,7 +4344,7 @@
                   <a:srgbClr val="FFFFFF"/>
                 </a:solidFill>
               </a:rPr>
-              <a:t>   Research should continue to explore novel combinations of immunotherapy with locoregional treatments such as TACE and thermal ablation to maximize therapeutic benefits.  </a:t>
+              <a:t>   設計針對不同組合療法的臨床試驗，以確定最佳的治療方案和患者選擇策略。  </a:t>
             </a:r>
             <a:endParaRPr lang="en-US" sz="1200" dirty="0"/>
           </a:p>
@@ -4361,7 +4361,7 @@
                   <a:srgbClr val="FFFFFF"/>
                 </a:solidFill>
               </a:rPr>
-              <a:t>   研究應持續探索免疫療法與局部治療（如TACE和熱消融）的新型組合，以最大化治療效益。</a:t>
+              <a:t>   Designing clinical trials targeting various combination therapies to determine the best treatment regimens and patient selection strategies.</a:t>
             </a:r>
             <a:endParaRPr lang="en-US" sz="1200" dirty="0"/>
           </a:p>
@@ -4595,7 +4595,7 @@
                 <a:ea typeface="Arial" pitchFamily="34" charset="-122"/>
                 <a:cs typeface="Arial" pitchFamily="34" charset="-120"/>
               </a:rPr>
-              <a:t>Addition of ipilimumab to atezolizumab plus bevacizumab in advanced hepatocellul…</a:t>
+              <a:t>Circulating extracellular vesicles carrying PD-1, PD-L1 and CTLA-4 inform resist…</a:t>
             </a:r>
             <a:endParaRPr lang="en-US" sz="1400" dirty="0"/>
           </a:p>
@@ -4632,7 +4632,7 @@
                 <a:ea typeface="Arial" pitchFamily="34" charset="-122"/>
                 <a:cs typeface="Arial" pitchFamily="34" charset="-120"/>
               </a:rPr>
-              <a:t>Transarterial Chemoembolization Plus Thermal Ablation in Unresectable Hepatocell…</a:t>
+              <a:t>PCK1 deficiency promotes MASH-HCC progression by 12-HETE-induced CD8+ T cell dys…</a:t>
             </a:r>
             <a:endParaRPr lang="en-US" sz="1400" dirty="0"/>
           </a:p>
@@ -4669,7 +4669,7 @@
                 <a:ea typeface="Arial" pitchFamily="34" charset="-122"/>
                 <a:cs typeface="Arial" pitchFamily="34" charset="-120"/>
               </a:rPr>
-              <a:t>Distinct molecular pathways regulated by activated AKT and YAP signaling during …</a:t>
+              <a:t>Spatiotemporal dynamics of the tumor microenvironment in hepatocellular carcinom…</a:t>
             </a:r>
             <a:endParaRPr lang="en-US" sz="1400" dirty="0"/>
           </a:p>
@@ -4706,7 +4706,7 @@
                 <a:ea typeface="Arial" pitchFamily="34" charset="-122"/>
                 <a:cs typeface="Arial" pitchFamily="34" charset="-120"/>
               </a:rPr>
-              <a:t>Distinct gut microbiota but common metabolomic signatures between viral and MASL…</a:t>
+              <a:t>… plus transarterial chemoembolization and PD-1 inhibitors as conversion therapi…</a:t>
             </a:r>
             <a:endParaRPr lang="en-US" sz="1400" dirty="0"/>
           </a:p>
@@ -4743,7 +4743,7 @@
                 <a:ea typeface="Arial" pitchFamily="34" charset="-122"/>
                 <a:cs typeface="Arial" pitchFamily="34" charset="-120"/>
               </a:rPr>
-              <a:t>Optimal treatment selection for hepatocellular carcinoma in the era of immunothe…</a:t>
+              <a:t>… (PD-1 inhibitor) plus lenvatinib as conversion therapy followed by sequential …</a:t>
             </a:r>
             <a:endParaRPr lang="en-US" sz="1400" dirty="0"/>
           </a:p>
@@ -4780,7 +4780,7 @@
                 <a:ea typeface="Arial" pitchFamily="34" charset="-122"/>
                 <a:cs typeface="Arial" pitchFamily="34" charset="-120"/>
               </a:rPr>
-              <a:t>Tim-3 facilitates dendritic cell ferroptosis and impairs antitumor immunity in s…</a:t>
+              <a:t>Aggressive Histologic Subtypes Drive Poor Outcomes after Percutaneous Ablation f…</a:t>
             </a:r>
             <a:endParaRPr lang="en-US" sz="1400" dirty="0"/>
           </a:p>
@@ -4817,7 +4817,7 @@
                 <a:ea typeface="Arial" pitchFamily="34" charset="-122"/>
                 <a:cs typeface="Arial" pitchFamily="34" charset="-120"/>
               </a:rPr>
-              <a:t>When lipids silence immunity: Dendritic cell death in MASLD-associated HCC.</a:t>
+              <a:t>Combined anti-PD-1 with irreversible electroporation relieves immunosuppression …</a:t>
             </a:r>
             <a:endParaRPr lang="en-US" sz="1400" dirty="0"/>
           </a:p>
@@ -4854,7 +4854,7 @@
                 <a:ea typeface="Arial" pitchFamily="34" charset="-122"/>
                 <a:cs typeface="Arial" pitchFamily="34" charset="-120"/>
               </a:rPr>
-              <a:t>Low-dose bevacizumab plus atezolizumab enhances transarterial chemoembolization …</a:t>
+              <a:t>Radiotherapy versus local ablation therapy for the treatment of hepatocellular c…</a:t>
             </a:r>
             <a:endParaRPr lang="en-US" sz="1400" dirty="0"/>
           </a:p>
@@ -4891,7 +4891,7 @@
                 <a:ea typeface="Arial" pitchFamily="34" charset="-122"/>
                 <a:cs typeface="Arial" pitchFamily="34" charset="-120"/>
               </a:rPr>
-              <a:t>External beam radiotherapy versus local ablation therapy for the treatment of he…</a:t>
+              <a:t>… on interventional therapy and immune checkpoint inhibitors (ICIs) in patients …</a:t>
             </a:r>
             <a:endParaRPr lang="en-US" sz="1400" dirty="0"/>
           </a:p>
@@ -4928,7 +4928,7 @@
                 <a:ea typeface="Arial" pitchFamily="34" charset="-122"/>
                 <a:cs typeface="Arial" pitchFamily="34" charset="-120"/>
               </a:rPr>
-              <a:t>Temporal Association Between COVID-19 Vaccination and HBsAg Loss in Chronic Hepa…</a:t>
+              <a:t>Immune Checkpoint Inhibitors in Hepatocellular Carcinoma Before and After Liver …</a:t>
             </a:r>
             <a:endParaRPr lang="en-US" sz="1400" dirty="0"/>
           </a:p>
@@ -5083,7 +5083,7 @@
                   </a:extLst>
                 </a:hlinkClick>
               </a:rPr>
-              <a:t>Addition of ipilimumab to atezolizumab plus bevacizumab in advanced hepatocellular carcinoma (PRODIGE 81-FFCD 2101-TRIPLET HCC): phase 2 results from a randomised, multicentre, open-label, phase 2-3 trial.</a:t>
+              <a:t>Circulating extracellular vesicles carrying PD-1, PD-L1 and CTLA-4 inform resistance to anti-PD-L1-based therapy in HCC.</a:t>
             </a:r>
             <a:endParaRPr lang="en-US" sz="2400" dirty="0"/>
           </a:p>
@@ -5119,7 +5119,7 @@
                   <a:srgbClr val="888888"/>
                 </a:solidFill>
               </a:rPr>
-              <a:t>The lancet. Gastroenterology &amp; hepatology  ·  IF 35.7  ·  RCT Phase 3</a:t>
+              <a:t>Gut  ·  IF 24.5</a:t>
             </a:r>
             <a:endParaRPr lang="en-US" sz="1000" dirty="0"/>
           </a:p>
@@ -5162,7 +5162,7 @@
                 <a:ea typeface="Arial" pitchFamily="34" charset="-122"/>
                 <a:cs typeface="Arial" pitchFamily="34" charset="-120"/>
               </a:rPr>
-              <a:t>Triple therapy did not improve survival outcomes.</a:t>
+              <a:t>Circulating EVs carry PD-1, PD-L1, CTLA-4.</a:t>
             </a:r>
             <a:endParaRPr lang="en-US" sz="1800" dirty="0"/>
           </a:p>
@@ -5183,7 +5183,7 @@
                 <a:ea typeface="Arial" pitchFamily="34" charset="-122"/>
                 <a:cs typeface="Arial" pitchFamily="34" charset="-120"/>
               </a:rPr>
-              <a:t>30% objective response in triplet group.</a:t>
+              <a:t>Baseline EV-IC levels predict treatment response.</a:t>
             </a:r>
             <a:endParaRPr lang="en-US" sz="1800" dirty="0"/>
           </a:p>
@@ -5204,7 +5204,7 @@
                 <a:ea typeface="Arial" pitchFamily="34" charset="-122"/>
                 <a:cs typeface="Arial" pitchFamily="34" charset="-120"/>
               </a:rPr>
-              <a:t>High rate of treatment-related adverse events.</a:t>
+              <a:t>Dynamic EV-IC changes indicate acquired resistance.</a:t>
             </a:r>
             <a:endParaRPr lang="en-US" sz="1800" dirty="0"/>
           </a:p>
@@ -5225,7 +5225,7 @@
                 <a:ea typeface="Arial" pitchFamily="34" charset="-122"/>
                 <a:cs typeface="Arial" pitchFamily="34" charset="-120"/>
               </a:rPr>
-              <a:t>Study did not progress to phase 3.</a:t>
+              <a:t>Liquid biopsy offers non-invasive biomarker potential.</a:t>
             </a:r>
             <a:endParaRPr lang="en-US" sz="1800" dirty="0"/>
           </a:p>
@@ -5246,7 +5246,7 @@
                 <a:ea typeface="Arial" pitchFamily="34" charset="-122"/>
                 <a:cs typeface="Arial" pitchFamily="34" charset="-120"/>
               </a:rPr>
-              <a:t>No benefit from adding ipilimumab.</a:t>
+              <a:t>Findings not reproducible in TKI-treated cohort.</a:t>
             </a:r>
             <a:endParaRPr lang="en-US" sz="1800" dirty="0"/>
           </a:p>
@@ -5282,7 +5282,7 @@
                   <a:srgbClr val="888888"/>
                 </a:solidFill>
               </a:rPr>
-              <a:t>Merle Philippe, Blanc Jean-Frederic, Le Malicot Karine et al.. The lancet. Gastroenterology &amp; hepatology. 2026-07-08 DOI: 10.1016/S2468-1253(26)00115-9</a:t>
+              <a:t>Gorgulho Jo&amp;#xe3;o, Masood Ramsha, Buescher Gustav et al.. Gut. 2026-08-06 DOI: 10.1136/gutjnl-2025-337617</a:t>
             </a:r>
             <a:endParaRPr lang="en-US" sz="800" dirty="0"/>
           </a:p>
@@ -5482,7 +5482,7 @@
                   </a:extLst>
                 </a:hlinkClick>
               </a:rPr>
-              <a:t>Transarterial Chemoembolization Plus Thermal Ablation in Unresectable Hepatocellular Carcinoma: The Phase 3 TORCH Randomized Clinical Trial.</a:t>
+              <a:t>PCK1 deficiency promotes MASH-HCC progression by 12-HETE-induced CD8+ T cell dysfunction.</a:t>
             </a:r>
             <a:endParaRPr lang="en-US" sz="2400" dirty="0"/>
           </a:p>
@@ -5518,7 +5518,7 @@
                   <a:srgbClr val="888888"/>
                 </a:solidFill>
               </a:rPr>
-              <a:t>JAMA oncology  ·  IF 28.4  ·  RCT Phase 3</a:t>
+              <a:t>Gut  ·  IF 24.5</a:t>
             </a:r>
             <a:endParaRPr lang="en-US" sz="1000" dirty="0"/>
           </a:p>
@@ -5561,7 +5561,7 @@
                 <a:ea typeface="Arial" pitchFamily="34" charset="-122"/>
                 <a:cs typeface="Arial" pitchFamily="34" charset="-120"/>
               </a:rPr>
-              <a:t>TACE combined with thermal ablation improves PFS.</a:t>
+              <a:t>PCK1 deficiency linked to MASH-HCC progression.</a:t>
             </a:r>
             <a:endParaRPr lang="en-US" sz="1800" dirty="0"/>
           </a:p>
@@ -5582,7 +5582,7 @@
                 <a:ea typeface="Arial" pitchFamily="34" charset="-122"/>
                 <a:cs typeface="Arial" pitchFamily="34" charset="-120"/>
               </a:rPr>
-              <a:t>Median OS was significantly longer with TACE-ablation.</a:t>
+              <a:t>12-HETE induces CD8+ T cell dysfunction.</a:t>
             </a:r>
             <a:endParaRPr lang="en-US" sz="1800" dirty="0"/>
           </a:p>
@@ -5603,7 +5603,7 @@
                 <a:ea typeface="Arial" pitchFamily="34" charset="-122"/>
                 <a:cs typeface="Arial" pitchFamily="34" charset="-120"/>
               </a:rPr>
-              <a:t>Low to moderate tumor burden scores benefit most.</a:t>
+              <a:t>PCK1 restoration enhances anti-PD-1 efficacy.</a:t>
             </a:r>
             <a:endParaRPr lang="en-US" sz="1800" dirty="0"/>
           </a:p>
@@ -5639,7 +5639,7 @@
                   <a:srgbClr val="888888"/>
                 </a:solidFill>
               </a:rPr>
-              <a:t>Lyu Ning, Yi Jun-Zhe, Wu Xin-Tong et al.. JAMA oncology. 2026-08-02 DOI: 10.1001/jamaoncol.2026.2366</a:t>
+              <a:t>Wu Kang, Li Luo, Liu Yi et al.. Gut. 2026-08-06 DOI: 10.1136/gutjnl-2024-334562</a:t>
             </a:r>
             <a:endParaRPr lang="en-US" sz="800" dirty="0"/>
           </a:p>
@@ -5839,7 +5839,7 @@
                   </a:extLst>
                 </a:hlinkClick>
               </a:rPr>
-              <a:t>Distinct molecular pathways regulated by activated AKT and YAP signaling during intrahepatic cholangiocarcinoma progression.</a:t>
+              <a:t>Spatiotemporal dynamics of the tumor microenvironment in hepatocellular carcinoma during combination immunotherapy.</a:t>
             </a:r>
             <a:endParaRPr lang="en-US" sz="2400" dirty="0"/>
           </a:p>
@@ -5875,7 +5875,7 @@
                   <a:srgbClr val="888888"/>
                 </a:solidFill>
               </a:rPr>
-              <a:t>Journal of hepatology  ·  IF 25.7  ·  Basic Research  ·  🌏 Asia</a:t>
+              <a:t>Hepatology communications  ·  IF 5.6  ·  🌏 Asia</a:t>
             </a:r>
             <a:endParaRPr lang="en-US" sz="1000" dirty="0"/>
           </a:p>
@@ -5918,7 +5918,7 @@
                 <a:ea typeface="Arial" pitchFamily="34" charset="-122"/>
                 <a:cs typeface="Arial" pitchFamily="34" charset="-120"/>
               </a:rPr>
-              <a:t>Activated AKT and YAP in iCCA progression.</a:t>
+              <a:t>ATZ/BEV therapy shows limited tumor regression.</a:t>
             </a:r>
             <a:endParaRPr lang="en-US" sz="1800" dirty="0"/>
           </a:p>
@@ -5939,7 +5939,7 @@
                 <a:ea typeface="Arial" pitchFamily="34" charset="-122"/>
                 <a:cs typeface="Arial" pitchFamily="34" charset="-120"/>
               </a:rPr>
-              <a:t>YAP inhibition reshapes immune microenvironment.</a:t>
+              <a:t>Single-cell RNA sequencing reveals immune remodeling.</a:t>
             </a:r>
             <a:endParaRPr lang="en-US" sz="1800" dirty="0"/>
           </a:p>
@@ -5960,7 +5960,49 @@
                 <a:ea typeface="Arial" pitchFamily="34" charset="-122"/>
                 <a:cs typeface="Arial" pitchFamily="34" charset="-120"/>
               </a:rPr>
-              <a:t>Combined YAP suppression and anti-PD-L1 enhances regression.</a:t>
+              <a:t>Increased CD8+ T cells with exhaustion signatures.</a:t>
+            </a:r>
+            <a:endParaRPr lang="en-US" sz="1800" dirty="0"/>
+          </a:p>
+          <a:p>
+            <a:pPr marL="342900" indent="-342900">
+              <a:spcAft>
+                <a:spcPts val="800"/>
+              </a:spcAft>
+              <a:buSzPct val="100000"/>
+              <a:buChar char="•"/>
+            </a:pPr>
+            <a:r>
+              <a:rPr lang="en-US" sz="1800" dirty="0">
+                <a:solidFill>
+                  <a:srgbClr val="333333"/>
+                </a:solidFill>
+                <a:latin typeface="Arial" pitchFamily="34" charset="0"/>
+                <a:ea typeface="Arial" pitchFamily="34" charset="-122"/>
+                <a:cs typeface="Arial" pitchFamily="34" charset="-120"/>
+              </a:rPr>
+              <a:t>TIGIT-PVR/NECTIN2 axis activated post-treatment.</a:t>
+            </a:r>
+            <a:endParaRPr lang="en-US" sz="1800" dirty="0"/>
+          </a:p>
+          <a:p>
+            <a:pPr marL="342900" indent="-342900">
+              <a:spcAft>
+                <a:spcPts val="800"/>
+              </a:spcAft>
+              <a:buSzPct val="100000"/>
+              <a:buChar char="•"/>
+            </a:pPr>
+            <a:r>
+              <a:rPr lang="en-US" sz="1800" dirty="0">
+                <a:solidFill>
+                  <a:srgbClr val="333333"/>
+                </a:solidFill>
+                <a:latin typeface="Arial" pitchFamily="34" charset="0"/>
+                <a:ea typeface="Arial" pitchFamily="34" charset="-122"/>
+                <a:cs typeface="Arial" pitchFamily="34" charset="-120"/>
+              </a:rPr>
+              <a:t>Tumor margin exhibits stronger immune activity.</a:t>
             </a:r>
             <a:endParaRPr lang="en-US" sz="1800" dirty="0"/>
           </a:p>
@@ -5996,7 +6038,7 @@
                   <a:srgbClr val="888888"/>
                 </a:solidFill>
               </a:rPr>
-              <a:t>Zhao Jinqiu, Yang Lian, Qin Yujia et al.. Journal of hepatology. 2026-07-16 DOI: 10.1016/j.jhep.2026.02.025</a:t>
+              <a:t>Iwasaki Hitoshi, Itoh Shinji, Toshida Katsuya et al.. Hepatology communications. 2026-08-07 DOI: 10.1097/HC9.0000000000001014</a:t>
             </a:r>
             <a:endParaRPr lang="en-US" sz="800" dirty="0"/>
           </a:p>
@@ -6196,7 +6238,7 @@
                   </a:extLst>
                 </a:hlinkClick>
               </a:rPr>
-              <a:t>Distinct gut microbiota but common metabolomic signatures between viral and MASLD HCC contribute to outcomes of combination immunotherapy.</a:t>
+              <a:t>… plus transarterial chemoembolization and PD-1 inhibitors as conversion therapies for unresectable intermediate-advanced hepatocellular carcinoma: a phase 2 trial …</a:t>
             </a:r>
             <a:endParaRPr lang="en-US" sz="2400" dirty="0"/>
           </a:p>
@@ -6232,7 +6274,7 @@
                   <a:srgbClr val="888888"/>
                 </a:solidFill>
               </a:rPr>
-              <a:t>Hepatology (Baltimore, Md.)  ·  IF 12.9  ·  Prospective Study  ·  🌏 Asia</a:t>
+              <a:t>… and Targeted Therapy  ·  RCT Phase 2</a:t>
             </a:r>
             <a:endParaRPr lang="en-US" sz="1000" dirty="0"/>
           </a:p>
@@ -6275,7 +6317,7 @@
                 <a:ea typeface="Arial" pitchFamily="34" charset="-122"/>
                 <a:cs typeface="Arial" pitchFamily="34" charset="-120"/>
               </a:rPr>
-              <a:t>Distinct microbiota in MASLD-HCC and V-HCC.</a:t>
+              <a:t>Combination therapy evaluated in uHCC</a:t>
             </a:r>
             <a:endParaRPr lang="en-US" sz="1800" dirty="0"/>
           </a:p>
@@ -6296,7 +6338,7 @@
                 <a:ea typeface="Arial" pitchFamily="34" charset="-122"/>
                 <a:cs typeface="Arial" pitchFamily="34" charset="-120"/>
               </a:rPr>
-              <a:t>Common metabolomic signature: fecal acetate.</a:t>
+              <a:t>Transarterial chemoembolization (TACE) used</a:t>
             </a:r>
             <a:endParaRPr lang="en-US" sz="1800" dirty="0"/>
           </a:p>
@@ -6317,7 +6359,7 @@
                 <a:ea typeface="Arial" pitchFamily="34" charset="-122"/>
                 <a:cs typeface="Arial" pitchFamily="34" charset="-120"/>
               </a:rPr>
-              <a:t>Higher acetate levels linked to better survival.</a:t>
+              <a:t>PD-1 inhibitors added for effectiveness</a:t>
             </a:r>
             <a:endParaRPr lang="en-US" sz="1800" dirty="0"/>
           </a:p>
@@ -6338,7 +6380,7 @@
                 <a:ea typeface="Arial" pitchFamily="34" charset="-122"/>
                 <a:cs typeface="Arial" pitchFamily="34" charset="-120"/>
               </a:rPr>
-              <a:t>Durable responders show enriched SCFAs.</a:t>
+              <a:t>Phase 2 trial results presented</a:t>
             </a:r>
             <a:endParaRPr lang="en-US" sz="1800" dirty="0"/>
           </a:p>
@@ -6359,7 +6401,7 @@
                 <a:ea typeface="Arial" pitchFamily="34" charset="-122"/>
                 <a:cs typeface="Arial" pitchFamily="34" charset="-120"/>
               </a:rPr>
-              <a:t>Fecal acetate as potential biomarker.</a:t>
+              <a:t>Comparative analysis with TACE alone</a:t>
             </a:r>
             <a:endParaRPr lang="en-US" sz="1800" dirty="0"/>
           </a:p>
@@ -6395,7 +6437,7 @@
                   <a:srgbClr val="888888"/>
                 </a:solidFill>
               </a:rPr>
-              <a:t>Lee Pei-Chang, Wu Chi-Jung, Hung Ya-Wen et al.. Hepatology (Baltimore, Md.). 2026-07-17 DOI: 10.1097/HEP.0000000000001446</a:t>
+              <a:t>X Zhang, H Cai, W Peng. … and Targeted Therapy. 2026</a:t>
             </a:r>
             <a:endParaRPr lang="en-US" sz="800" dirty="0"/>
           </a:p>
@@ -6595,7 +6637,7 @@
                   </a:extLst>
                 </a:hlinkClick>
               </a:rPr>
-              <a:t>Optimal treatment selection for hepatocellular carcinoma in the era of immunotherapy.</a:t>
+              <a:t>… (PD-1 inhibitor) plus lenvatinib as conversion therapy followed by sequential surgery (SILENSES) for advanced unresectable hepatocellular carcinoma: a phase II …</a:t>
             </a:r>
             <a:endParaRPr lang="en-US" sz="2400" dirty="0"/>
           </a:p>
@@ -6631,7 +6673,7 @@
                   <a:srgbClr val="888888"/>
                 </a:solidFill>
               </a:rPr>
-              <a:t>Journal of gastroenterology  ·  RCT Phase 3  ·  🌏 Asia</a:t>
+              <a:t>… and Targeted Therapy  ·  RCT Phase 2</a:t>
             </a:r>
             <a:endParaRPr lang="en-US" sz="1000" dirty="0"/>
           </a:p>
@@ -6674,7 +6716,7 @@
                 <a:ea typeface="Arial" pitchFamily="34" charset="-122"/>
                 <a:cs typeface="Arial" pitchFamily="34" charset="-120"/>
               </a:rPr>
-              <a:t>Immunotherapy transforms HCC management strategies.</a:t>
+              <a:t>Study evaluates PD-1 inhibitor plus lenvatinib</a:t>
             </a:r>
             <a:endParaRPr lang="en-US" sz="1800" dirty="0"/>
           </a:p>
@@ -6695,7 +6737,7 @@
                 <a:ea typeface="Arial" pitchFamily="34" charset="-122"/>
                 <a:cs typeface="Arial" pitchFamily="34" charset="-120"/>
               </a:rPr>
-              <a:t>High recurrence rates in early-stage HCC persist.</a:t>
+              <a:t>Focus on advanced unresectable HCC patients</a:t>
             </a:r>
             <a:endParaRPr lang="en-US" sz="1800" dirty="0"/>
           </a:p>
@@ -6716,7 +6758,7 @@
                 <a:ea typeface="Arial" pitchFamily="34" charset="-122"/>
                 <a:cs typeface="Arial" pitchFamily="34" charset="-120"/>
               </a:rPr>
-              <a:t>AI models predict post-resection recurrence effectively.</a:t>
+              <a:t>Sequential surgery after conversion therapy</a:t>
             </a:r>
             <a:endParaRPr lang="en-US" sz="1800" dirty="0"/>
           </a:p>
@@ -6737,7 +6779,7 @@
                 <a:ea typeface="Arial" pitchFamily="34" charset="-122"/>
                 <a:cs typeface="Arial" pitchFamily="34" charset="-120"/>
               </a:rPr>
-              <a:t>TACE combined with TKIs improves treatment outcomes.</a:t>
+              <a:t>Long-term survival outcomes assessed</a:t>
             </a:r>
             <a:endParaRPr lang="en-US" sz="1800" dirty="0"/>
           </a:p>
@@ -6758,7 +6800,7 @@
                 <a:ea typeface="Arial" pitchFamily="34" charset="-122"/>
                 <a:cs typeface="Arial" pitchFamily="34" charset="-120"/>
               </a:rPr>
-              <a:t>Emerging biomarkers may refine immunotherapy selection.</a:t>
+              <a:t>Phase II trial results discussed</a:t>
             </a:r>
             <a:endParaRPr lang="en-US" sz="1800" dirty="0"/>
           </a:p>
@@ -6794,7 +6836,7 @@
                   <a:srgbClr val="888888"/>
                 </a:solidFill>
               </a:rPr>
-              <a:t>Chi Chen-Ta, Huang Yi-Hsiang. Journal of gastroenterology. 2026-07-27 DOI: 10.1007/s00535-026-02411-7</a:t>
+              <a:t>S Lu, W Zhang, J Li. … and Targeted Therapy. 2026</a:t>
             </a:r>
             <a:endParaRPr lang="en-US" sz="800" dirty="0"/>
           </a:p>
@@ -6994,7 +7036,7 @@
                   </a:extLst>
                 </a:hlinkClick>
               </a:rPr>
-              <a:t>Tim-3 facilitates dendritic cell ferroptosis and impairs antitumor immunity in steatohepatitis-related HCC.</a:t>
+              <a:t>Aggressive Histologic Subtypes Drive Poor Outcomes after Percutaneous Ablation for Early Recurrent Hepatocellular Carcinoma.</a:t>
             </a:r>
             <a:endParaRPr lang="en-US" sz="2400" dirty="0"/>
           </a:p>
@@ -7030,7 +7072,7 @@
                   <a:srgbClr val="888888"/>
                 </a:solidFill>
               </a:rPr>
-              <a:t>Journal of hepatology  ·  IF 25.7  ·  Basic Research</a:t>
+              <a:t>Journal of vascular and interventional radiology : JVIR  ·  Retrospective Study  ·  🌏 Asia</a:t>
             </a:r>
             <a:endParaRPr lang="en-US" sz="1000" dirty="0"/>
           </a:p>
@@ -7073,7 +7115,7 @@
                 <a:ea typeface="Arial" pitchFamily="34" charset="-122"/>
                 <a:cs typeface="Arial" pitchFamily="34" charset="-120"/>
               </a:rPr>
-              <a:t>Tim-3 regulates dendritic cell ferroptosis.</a:t>
+              <a:t>Aggressive histology predicts poor outcomes.</a:t>
             </a:r>
             <a:endParaRPr lang="en-US" sz="1800" dirty="0"/>
           </a:p>
@@ -7094,7 +7136,7 @@
                 <a:ea typeface="Arial" pitchFamily="34" charset="-122"/>
                 <a:cs typeface="Arial" pitchFamily="34" charset="-120"/>
               </a:rPr>
-              <a:t>High-fat diet induces immune suppression.</a:t>
+              <a:t>Study included 194 patients post-resection.</a:t>
             </a:r>
             <a:endParaRPr lang="en-US" sz="1800" dirty="0"/>
           </a:p>
@@ -7115,7 +7157,7 @@
                 <a:ea typeface="Arial" pitchFamily="34" charset="-122"/>
                 <a:cs typeface="Arial" pitchFamily="34" charset="-120"/>
               </a:rPr>
-              <a:t>Tim-3 blockade enhances antitumor immunity.</a:t>
+              <a:t>Risk model stratifies patients by histology.</a:t>
             </a:r>
             <a:endParaRPr lang="en-US" sz="1800" dirty="0"/>
           </a:p>
@@ -7136,7 +7178,7 @@
                 <a:ea typeface="Arial" pitchFamily="34" charset="-122"/>
                 <a:cs typeface="Arial" pitchFamily="34" charset="-120"/>
               </a:rPr>
-              <a:t>DC depletion correlates with poor prognosis.</a:t>
+              <a:t>Aggressive recurrence patterns linked to histology.</a:t>
             </a:r>
             <a:endParaRPr lang="en-US" sz="1800" dirty="0"/>
           </a:p>
@@ -7157,7 +7199,7 @@
                 <a:ea typeface="Arial" pitchFamily="34" charset="-122"/>
                 <a:cs typeface="Arial" pitchFamily="34" charset="-120"/>
               </a:rPr>
-              <a:t>Combining therapies improves tumor control.</a:t>
+              <a:t>Histology should guide treatment planning.</a:t>
             </a:r>
             <a:endParaRPr lang="en-US" sz="1800" dirty="0"/>
           </a:p>
@@ -7193,7 +7235,7 @@
                   <a:srgbClr val="888888"/>
                 </a:solidFill>
               </a:rPr>
-              <a:t>Li Na, Song Xiaojia, Peng Xueqi et al.. Journal of hepatology. 2026-07-16 DOI: 10.1016/j.jhep.2026.04.010</a:t>
+              <a:t>Gu Kyowon, Lee Min Woo, Han Seungchul et al.. Journal of vascular and interventional radiology : JVIR. 2026-08-04 DOI: 10.1016/j.jvir.2026.108998</a:t>
             </a:r>
             <a:endParaRPr lang="en-US" sz="800" dirty="0"/>
           </a:p>
@@ -7393,7 +7435,7 @@
                   </a:extLst>
                 </a:hlinkClick>
               </a:rPr>
-              <a:t>When lipids silence immunity: Dendritic cell death in MASLD-associated HCC.</a:t>
+              <a:t>Combined anti-PD-1 with irreversible electroporation relieves immunosuppression and reduces hepatocellular carcinoma regrowth.</a:t>
             </a:r>
             <a:endParaRPr lang="en-US" sz="2400" dirty="0"/>
           </a:p>
@@ -7429,7 +7471,7 @@
                   <a:srgbClr val="888888"/>
                 </a:solidFill>
               </a:rPr>
-              <a:t>Journal of hepatology  ·  IF 25.7</a:t>
+              <a:t>JHEP reports : innovation in hepatology  ·  IF 7.8  ·  Prospective Study</a:t>
             </a:r>
             <a:endParaRPr lang="en-US" sz="1000" dirty="0"/>
           </a:p>
@@ -7472,7 +7514,7 @@
                 <a:ea typeface="Arial" pitchFamily="34" charset="-122"/>
                 <a:cs typeface="Arial" pitchFamily="34" charset="-120"/>
               </a:rPr>
-              <a:t>Study focuses on MASLD and HCC.</a:t>
+              <a:t>IRE induces immune microenvironment changes.</a:t>
             </a:r>
             <a:endParaRPr lang="en-US" sz="1800" dirty="0"/>
           </a:p>
@@ -7493,7 +7535,7 @@
                 <a:ea typeface="Arial" pitchFamily="34" charset="-122"/>
                 <a:cs typeface="Arial" pitchFamily="34" charset="-120"/>
               </a:rPr>
-              <a:t>Dendritic cell death linked to lipids.</a:t>
+              <a:t>Combination with anti-PD-1 reduces tumor regrowth.</a:t>
             </a:r>
             <a:endParaRPr lang="en-US" sz="1800" dirty="0"/>
           </a:p>
@@ -7514,7 +7556,7 @@
                 <a:ea typeface="Arial" pitchFamily="34" charset="-122"/>
                 <a:cs typeface="Arial" pitchFamily="34" charset="-120"/>
               </a:rPr>
-              <a:t>Immunity suppression observed in HCC.</a:t>
+              <a:t>PMN-MDSCs promote CD8+ T cell exhaustion.</a:t>
             </a:r>
             <a:endParaRPr lang="en-US" sz="1800" dirty="0"/>
           </a:p>
@@ -7535,7 +7577,7 @@
                 <a:ea typeface="Arial" pitchFamily="34" charset="-122"/>
                 <a:cs typeface="Arial" pitchFamily="34" charset="-120"/>
               </a:rPr>
-              <a:t>Potential therapeutic targets identified.</a:t>
+              <a:t>YTHDF2 degrades CXCL10 mRNA in HCC.</a:t>
             </a:r>
             <a:endParaRPr lang="en-US" sz="1800" dirty="0"/>
           </a:p>
@@ -7556,7 +7598,7 @@
                 <a:ea typeface="Arial" pitchFamily="34" charset="-122"/>
                 <a:cs typeface="Arial" pitchFamily="34" charset="-120"/>
               </a:rPr>
-              <a:t>Further research needed on lipid effects.</a:t>
+              <a:t>Clinical trials needed for validation.</a:t>
             </a:r>
             <a:endParaRPr lang="en-US" sz="1800" dirty="0"/>
           </a:p>
@@ -7592,7 +7634,7 @@
                   <a:srgbClr val="888888"/>
                 </a:solidFill>
               </a:rPr>
-              <a:t>Kocheise Lorenz, Schneider Kai Markus. Journal of hepatology. 2026-07-15 DOI: 10.1016/j.jhep.2026.06.008</a:t>
+              <a:t>Huo Jihui, Wang Lina, Lei Kai et al.. JHEP reports : innovation in hepatology. 2026-08-03 DOI: 10.1016/j.jhepr.2026.101977</a:t>
             </a:r>
             <a:endParaRPr lang="en-US" sz="800" dirty="0"/>
           </a:p>

--- a/docs/digest-en.pptx
+++ b/docs/digest-en.pptx
@@ -2269,7 +2269,7 @@
                   <a:srgbClr val="888888"/>
                 </a:solidFill>
               </a:rPr>
-              <a:t>2026-08-03 — 2026-08-10</a:t>
+              <a:t>2026-08-10 — 2026-08-17</a:t>
             </a:r>
             <a:endParaRPr lang="en-US" sz="1400" dirty="0"/>
           </a:p>
@@ -2460,7 +2460,7 @@
                   </a:extLst>
                 </a:hlinkClick>
               </a:rPr>
-              <a:t>Radiotherapy versus local ablation therapy for the treatment of hepatocellular carcinoma: A systematic review and meta-analysis.</a:t>
+              <a:t>Cryoablation versus radiofrequency ablation for hepatocellular carcinoma: a systematic review and meta-analysis</a:t>
             </a:r>
             <a:endParaRPr lang="en-US" sz="2400" dirty="0"/>
           </a:p>
@@ -2496,7 +2496,7 @@
                   <a:srgbClr val="888888"/>
                 </a:solidFill>
               </a:rPr>
-              <a:t>Journal of Clinical …  ·  Meta-Analysis</a:t>
+              <a:t>International Journal of …  ·  Meta-Analysis</a:t>
             </a:r>
             <a:endParaRPr lang="en-US" sz="1000" dirty="0"/>
           </a:p>
@@ -2539,7 +2539,7 @@
                 <a:ea typeface="Arial" pitchFamily="34" charset="-122"/>
                 <a:cs typeface="Arial" pitchFamily="34" charset="-120"/>
               </a:rPr>
-              <a:t>Comparison of radiotherapy and local ablation</a:t>
+              <a:t>Cryoablation shows effective local control.</a:t>
             </a:r>
             <a:endParaRPr lang="en-US" sz="1800" dirty="0"/>
           </a:p>
@@ -2560,7 +2560,7 @@
                 <a:ea typeface="Arial" pitchFamily="34" charset="-122"/>
                 <a:cs typeface="Arial" pitchFamily="34" charset="-120"/>
               </a:rPr>
-              <a:t>Focus on hepatocellular carcinoma (HCC) treatment</a:t>
+              <a:t>Comparison with radiofrequency ablation.</a:t>
             </a:r>
             <a:endParaRPr lang="en-US" sz="1800" dirty="0"/>
           </a:p>
@@ -2581,49 +2581,7 @@
                 <a:ea typeface="Arial" pitchFamily="34" charset="-122"/>
                 <a:cs typeface="Arial" pitchFamily="34" charset="-120"/>
               </a:rPr>
-              <a:t>Assessment of local progression-free survival</a:t>
-            </a:r>
-            <a:endParaRPr lang="en-US" sz="1800" dirty="0"/>
-          </a:p>
-          <a:p>
-            <a:pPr marL="342900" indent="-342900">
-              <a:spcAft>
-                <a:spcPts val="800"/>
-              </a:spcAft>
-              <a:buSzPct val="100000"/>
-              <a:buChar char="•"/>
-            </a:pPr>
-            <a:r>
-              <a:rPr lang="en-US" sz="1800" dirty="0">
-                <a:solidFill>
-                  <a:srgbClr val="333333"/>
-                </a:solidFill>
-                <a:latin typeface="Arial" pitchFamily="34" charset="0"/>
-                <a:ea typeface="Arial" pitchFamily="34" charset="-122"/>
-                <a:cs typeface="Arial" pitchFamily="34" charset="-120"/>
-              </a:rPr>
-              <a:t>Inclusion of radiofrequency and microwave ablation</a:t>
-            </a:r>
-            <a:endParaRPr lang="en-US" sz="1800" dirty="0"/>
-          </a:p>
-          <a:p>
-            <a:pPr marL="342900" indent="-342900">
-              <a:spcAft>
-                <a:spcPts val="800"/>
-              </a:spcAft>
-              <a:buSzPct val="100000"/>
-              <a:buChar char="•"/>
-            </a:pPr>
-            <a:r>
-              <a:rPr lang="en-US" sz="1800" dirty="0">
-                <a:solidFill>
-                  <a:srgbClr val="333333"/>
-                </a:solidFill>
-                <a:latin typeface="Arial" pitchFamily="34" charset="0"/>
-                <a:ea typeface="Arial" pitchFamily="34" charset="-122"/>
-                <a:cs typeface="Arial" pitchFamily="34" charset="-120"/>
-              </a:rPr>
-              <a:t>Systematic review and meta-analysis conducted</a:t>
+              <a:t>Focus on early-stage HCC patients.</a:t>
             </a:r>
             <a:endParaRPr lang="en-US" sz="1800" dirty="0"/>
           </a:p>
@@ -2659,7 +2617,7 @@
                   <a:srgbClr val="888888"/>
                 </a:solidFill>
               </a:rPr>
-              <a:t>SH Bae, SH Choi, SM Yoon. Journal of Clinical …. 2026</a:t>
+              <a:t>K Mao, Y Wang, W Yao. International Journal of …. 2026</a:t>
             </a:r>
             <a:endParaRPr lang="en-US" sz="800" dirty="0"/>
           </a:p>
@@ -2859,7 +2817,7 @@
                   </a:extLst>
                 </a:hlinkClick>
               </a:rPr>
-              <a:t>… on interventional therapy and immune checkpoint inhibitors (ICIs) in patients with intermediate-and advanced-stage hepatocellular carcinoma: a systematic review …</a:t>
+              <a:t>Radiotherapy versus local ablation therapy for the treatment of hepatocellular carcinoma: A systematic review and meta-analysis.</a:t>
             </a:r>
             <a:endParaRPr lang="en-US" sz="2400" dirty="0"/>
           </a:p>
@@ -2895,7 +2853,7 @@
                   <a:srgbClr val="888888"/>
                 </a:solidFill>
               </a:rPr>
-              <a:t>… , Immunotherapy  ·  Systematic Review</a:t>
+              <a:t>Journal of Clinical …  ·  Meta-Analysis</a:t>
             </a:r>
             <a:endParaRPr lang="en-US" sz="1000" dirty="0"/>
           </a:p>
@@ -2938,7 +2896,7 @@
                 <a:ea typeface="Arial" pitchFamily="34" charset="-122"/>
                 <a:cs typeface="Arial" pitchFamily="34" charset="-120"/>
               </a:rPr>
-              <a:t>Combination therapy shows improved outcomes.</a:t>
+              <a:t>Comparison of radiotherapy and local ablation</a:t>
             </a:r>
             <a:endParaRPr lang="en-US" sz="1800" dirty="0"/>
           </a:p>
@@ -2959,7 +2917,7 @@
                 <a:ea typeface="Arial" pitchFamily="34" charset="-122"/>
                 <a:cs typeface="Arial" pitchFamily="34" charset="-120"/>
               </a:rPr>
-              <a:t>ICIs enhance immune response in HCC.</a:t>
+              <a:t>Focus on hepatocellular carcinoma (HCC) treatment</a:t>
             </a:r>
             <a:endParaRPr lang="en-US" sz="1800" dirty="0"/>
           </a:p>
@@ -2980,7 +2938,49 @@
                 <a:ea typeface="Arial" pitchFamily="34" charset="-122"/>
                 <a:cs typeface="Arial" pitchFamily="34" charset="-120"/>
               </a:rPr>
-              <a:t>Interventional therapy options include ablation.</a:t>
+              <a:t>Evaluation of local progression-free survival</a:t>
+            </a:r>
+            <a:endParaRPr lang="en-US" sz="1800" dirty="0"/>
+          </a:p>
+          <a:p>
+            <a:pPr marL="342900" indent="-342900">
+              <a:spcAft>
+                <a:spcPts val="800"/>
+              </a:spcAft>
+              <a:buSzPct val="100000"/>
+              <a:buChar char="•"/>
+            </a:pPr>
+            <a:r>
+              <a:rPr lang="en-US" sz="1800" dirty="0">
+                <a:solidFill>
+                  <a:srgbClr val="333333"/>
+                </a:solidFill>
+                <a:latin typeface="Arial" pitchFamily="34" charset="0"/>
+                <a:ea typeface="Arial" pitchFamily="34" charset="-122"/>
+                <a:cs typeface="Arial" pitchFamily="34" charset="-120"/>
+              </a:rPr>
+              <a:t>Inclusion of radiofrequency and microwave ablation</a:t>
+            </a:r>
+            <a:endParaRPr lang="en-US" sz="1800" dirty="0"/>
+          </a:p>
+          <a:p>
+            <a:pPr marL="342900" indent="-342900">
+              <a:spcAft>
+                <a:spcPts val="800"/>
+              </a:spcAft>
+              <a:buSzPct val="100000"/>
+              <a:buChar char="•"/>
+            </a:pPr>
+            <a:r>
+              <a:rPr lang="en-US" sz="1800" dirty="0">
+                <a:solidFill>
+                  <a:srgbClr val="333333"/>
+                </a:solidFill>
+                <a:latin typeface="Arial" pitchFamily="34" charset="0"/>
+                <a:ea typeface="Arial" pitchFamily="34" charset="-122"/>
+                <a:cs typeface="Arial" pitchFamily="34" charset="-120"/>
+              </a:rPr>
+              <a:t>Systematic review and meta-analysis conducted</a:t>
             </a:r>
             <a:endParaRPr lang="en-US" sz="1800" dirty="0"/>
           </a:p>
@@ -3016,7 +3016,7 @@
                   <a:srgbClr val="888888"/>
                 </a:solidFill>
               </a:rPr>
-              <a:t>J Su, Y Su, R Mai. … , Immunotherapy. 2026</a:t>
+              <a:t>SH Bae, SH Choi, SM Yoon. Journal of Clinical …. 2026</a:t>
             </a:r>
             <a:endParaRPr lang="en-US" sz="800" dirty="0"/>
           </a:p>
@@ -3216,7 +3216,7 @@
                   </a:extLst>
                 </a:hlinkClick>
               </a:rPr>
-              <a:t>Immune Checkpoint Inhibitors in Hepatocellular Carcinoma Before and After Liver Transplantation: A Systematic Review</a:t>
+              <a:t>… on interventional therapy and immune checkpoint inhibitors (ICIs) in patients with intermediate-and advanced-stage hepatocellular carcinoma: a systematic review …</a:t>
             </a:r>
             <a:endParaRPr lang="en-US" sz="2400" dirty="0"/>
           </a:p>
@@ -3252,7 +3252,7 @@
                   <a:srgbClr val="888888"/>
                 </a:solidFill>
               </a:rPr>
-              <a:t>Cancers  ·  Systematic Review</a:t>
+              <a:t>… , Immunotherapy  ·  Systematic Review</a:t>
             </a:r>
             <a:endParaRPr lang="en-US" sz="1000" dirty="0"/>
           </a:p>
@@ -3295,7 +3295,7 @@
                 <a:ea typeface="Arial" pitchFamily="34" charset="-122"/>
                 <a:cs typeface="Arial" pitchFamily="34" charset="-120"/>
               </a:rPr>
-              <a:t>Review of immune checkpoint inhibitors in HCC</a:t>
+              <a:t>Combination therapy shows promising results in HCC.</a:t>
             </a:r>
             <a:endParaRPr lang="en-US" sz="1800" dirty="0"/>
           </a:p>
@@ -3316,7 +3316,7 @@
                 <a:ea typeface="Arial" pitchFamily="34" charset="-122"/>
                 <a:cs typeface="Arial" pitchFamily="34" charset="-120"/>
               </a:rPr>
-              <a:t>Focus on pre- and post-liver transplantation</a:t>
+              <a:t>ICIs enhance efficacy of interventional treatments.</a:t>
             </a:r>
             <a:endParaRPr lang="en-US" sz="1800" dirty="0"/>
           </a:p>
@@ -3337,49 +3337,7 @@
                 <a:ea typeface="Arial" pitchFamily="34" charset="-122"/>
                 <a:cs typeface="Arial" pitchFamily="34" charset="-120"/>
               </a:rPr>
-              <a:t>Includes PD-1, PD-L1, and CTLA-4 therapies</a:t>
-            </a:r>
-            <a:endParaRPr lang="en-US" sz="1800" dirty="0"/>
-          </a:p>
-          <a:p>
-            <a:pPr marL="342900" indent="-342900">
-              <a:spcAft>
-                <a:spcPts val="800"/>
-              </a:spcAft>
-              <a:buSzPct val="100000"/>
-              <a:buChar char="•"/>
-            </a:pPr>
-            <a:r>
-              <a:rPr lang="en-US" sz="1800" dirty="0">
-                <a:solidFill>
-                  <a:srgbClr val="333333"/>
-                </a:solidFill>
-                <a:latin typeface="Arial" pitchFamily="34" charset="0"/>
-                <a:ea typeface="Arial" pitchFamily="34" charset="-122"/>
-                <a:cs typeface="Arial" pitchFamily="34" charset="-120"/>
-              </a:rPr>
-              <a:t>Evaluates efficacy and safety outcomes</a:t>
-            </a:r>
-            <a:endParaRPr lang="en-US" sz="1800" dirty="0"/>
-          </a:p>
-          <a:p>
-            <a:pPr marL="342900" indent="-342900">
-              <a:spcAft>
-                <a:spcPts val="800"/>
-              </a:spcAft>
-              <a:buSzPct val="100000"/>
-              <a:buChar char="•"/>
-            </a:pPr>
-            <a:r>
-              <a:rPr lang="en-US" sz="1800" dirty="0">
-                <a:solidFill>
-                  <a:srgbClr val="333333"/>
-                </a:solidFill>
-                <a:latin typeface="Arial" pitchFamily="34" charset="0"/>
-                <a:ea typeface="Arial" pitchFamily="34" charset="-122"/>
-                <a:cs typeface="Arial" pitchFamily="34" charset="-120"/>
-              </a:rPr>
-              <a:t>Highlights potential for improved patient survival</a:t>
+              <a:t>Systematic review highlights clinical outcomes.</a:t>
             </a:r>
             <a:endParaRPr lang="en-US" sz="1800" dirty="0"/>
           </a:p>
@@ -3415,7 +3373,7 @@
                   <a:srgbClr val="888888"/>
                 </a:solidFill>
               </a:rPr>
-              <a:t>F Dituri, L Carrieri, M Mosaico. Cancers. 2026</a:t>
+              <a:t>J Su, Y Su, R Mai. … , Immunotherapy. 2026</a:t>
             </a:r>
             <a:endParaRPr lang="en-US" sz="800" dirty="0"/>
           </a:p>
@@ -3632,7 +3590,7 @@
                   <a:srgbClr val="FFFFFF"/>
                 </a:solidFill>
               </a:rPr>
-              <a:t>1. **生物標記物的必要性 (Necessity of Biomarkers)**  </a:t>
+              <a:t>1. **PD-1抑制劑的免疫機制**  </a:t>
             </a:r>
             <a:endParaRPr lang="en-US" sz="1200" dirty="0"/>
           </a:p>
@@ -3649,7 +3607,7 @@
                   <a:srgbClr val="FFFFFF"/>
                 </a:solidFill>
               </a:rPr>
-              <a:t>   免疫檢查點抑制劑（ICI）在肝細胞癌（HCC）中的應用顯示，僅約30%的患者對治療有反應，強調了基於生物標記物的患者選擇的重要性。  </a:t>
+              <a:t>   PD-1抑制劑不僅透過效應T細胞激活來發揮作用，還能釋放與乙型肝炎病毒相關的B細胞反應，顯示出其在肝細胞癌（HCC）治療中的多重機制。  </a:t>
             </a:r>
             <a:endParaRPr lang="en-US" sz="1200" dirty="0"/>
           </a:p>
@@ -3666,7 +3624,7 @@
                   <a:srgbClr val="FFFFFF"/>
                 </a:solidFill>
               </a:rPr>
-              <a:t>   The application of immune checkpoint inhibitors (ICIs) in hepatocellular carcinoma (HCC) reveals that only about 30% of patients respond to treatment, highlighting the importance of biomarker-driven patient selection.</a:t>
+              <a:t>   **The PD-1 blockade not only activates effector T cells but also unleashes hepatitis B virus-related B cell responses, highlighting its multifaceted mechanisms in HCC treatment.**</a:t>
             </a:r>
             <a:endParaRPr lang="en-US" sz="1200" dirty="0"/>
           </a:p>
@@ -3692,7 +3650,7 @@
                   <a:srgbClr val="FFFFFF"/>
                 </a:solidFill>
               </a:rPr>
-              <a:t>2. **代謝重編程的影響 (Impact of Metabolic Reprogramming)**  </a:t>
+              <a:t>2. **治療中斷的競爭風險**  </a:t>
             </a:r>
             <a:endParaRPr lang="en-US" sz="1200" dirty="0"/>
           </a:p>
@@ -3709,7 +3667,7 @@
                   <a:srgbClr val="FFFFFF"/>
                 </a:solidFill>
               </a:rPr>
-              <a:t>   代謝功能障礙相關的肝炎（MASH-HCC）對免疫檢查點抑制劑的反應較差，這可能與腫瘤細胞的代謝重編程及腫瘤微環境的異常有關。  </a:t>
+              <a:t>   對於不可切除的肝細胞癌，Atezolizumab與Bevacizumab的聯合療法的治療中斷原因多樣，傳統生存終點無法充分捕捉各種原因的時間變化。  </a:t>
             </a:r>
             <a:endParaRPr lang="en-US" sz="1200" dirty="0"/>
           </a:p>
@@ -3726,7 +3684,7 @@
                   <a:srgbClr val="FFFFFF"/>
                 </a:solidFill>
               </a:rPr>
-              <a:t>   Metabolic dysfunction-associated steatohepatitis-related hepatocellular carcinoma (MASH-HCC) shows poor response to immune checkpoint inhibitors, potentially linked to metabolic reprogramming of tumor cells and abnormal tumor microenvironment.</a:t>
+              <a:t>   **The reasons for treatment discontinuation in unresectable HCC patients receiving Atezolizumab plus Bevacizumab are diverse, and conventional survival endpoints fail to capture the time-varying probabilities of each cause.**</a:t>
             </a:r>
             <a:endParaRPr lang="en-US" sz="1200" dirty="0"/>
           </a:p>
@@ -3752,7 +3710,7 @@
                   <a:srgbClr val="FFFFFF"/>
                 </a:solidFill>
               </a:rPr>
-              <a:t>3. **免疫微環境的時空動態 (Spatiotemporal Dynamics of Immune Microenvironment)**  </a:t>
+              <a:t>3. **轉化療法的潛力**  </a:t>
             </a:r>
             <a:endParaRPr lang="en-US" sz="1200" dirty="0"/>
           </a:p>
@@ -3769,7 +3727,7 @@
                   <a:srgbClr val="FFFFFF"/>
                 </a:solidFill>
               </a:rPr>
-              <a:t>   Atezolizumab與Bevacizumab的聯合療法在HCC中的免疫重塑過程尚未完全了解，這對治療效果的預測至關重要。  </a:t>
+              <a:t>   結合經動脈化療栓塞（TACE）與PD-1抑制劑的轉化療法顯示出對不可切除中晚期肝細胞癌的潛在益處，提供了新的治療選擇。  </a:t>
             </a:r>
             <a:endParaRPr lang="en-US" sz="1200" dirty="0"/>
           </a:p>
@@ -3786,7 +3744,7 @@
                   <a:srgbClr val="FFFFFF"/>
                 </a:solidFill>
               </a:rPr>
-              <a:t>   The spatiotemporal immune remodeling associated with the combination therapy of Atezolizumab and Bevacizumab in HCC remains poorly understood, which is crucial for predicting treatment outcomes.</a:t>
+              <a:t>   **Combination therapies involving transarterial chemoembolization (TACE) and PD-1 inhibitors show potential benefits for unresectable intermediate-advanced HCC, offering new treatment options.**</a:t>
             </a:r>
             <a:endParaRPr lang="en-US" sz="1200" dirty="0"/>
           </a:p>
@@ -3812,7 +3770,7 @@
                   <a:srgbClr val="FFFFFF"/>
                 </a:solidFill>
               </a:rPr>
-              <a:t>4. **局部消融與免疫治療的結合 (Combination of Local Ablation and Immunotherapy)**  </a:t>
+              <a:t>4. **外科手術後的長期生存結果**  </a:t>
             </a:r>
             <a:endParaRPr lang="en-US" sz="1200" dirty="0"/>
           </a:p>
@@ -3829,7 +3787,7 @@
                   <a:srgbClr val="FFFFFF"/>
                 </a:solidFill>
               </a:rPr>
-              <a:t>   局部消融技術如不可逆電穿孔（IRE）顯示出與免疫治療結合的潛力，能夠減輕免疫抑制並降低肝癌的再生長。  </a:t>
+              <a:t>   在不可切除的肝細胞癌患者中，經過PD-1抑制劑與Lenvatinib的轉化療法後，隨後進行的外科手術顯示出良好的長期生存結果。  </a:t>
             </a:r>
             <a:endParaRPr lang="en-US" sz="1200" dirty="0"/>
           </a:p>
@@ -3846,7 +3804,7 @@
                   <a:srgbClr val="FFFFFF"/>
                 </a:solidFill>
               </a:rPr>
-              <a:t>   Local ablation techniques such as irreversible electroporation (IRE) demonstrate potential when combined with immunotherapy, alleviating immunosuppression and reducing hepatocellular carcinoma regrowth.</a:t>
+              <a:t>   **In patients with unresectable HCC, sequential surgery following conversion therapy with PD-1 inhibitors and Lenvatinib demonstrates favorable long-term survival outcomes.**</a:t>
             </a:r>
             <a:endParaRPr lang="en-US" sz="1200" dirty="0"/>
           </a:p>
@@ -3872,7 +3830,7 @@
                   <a:srgbClr val="FFFFFF"/>
                 </a:solidFill>
               </a:rPr>
-              <a:t>5. **不同組合療法的效果 (Effects of Different Combination Therapies)**  </a:t>
+              <a:t>5. **外周免疫動態的預後價值**  </a:t>
             </a:r>
             <a:endParaRPr lang="en-US" sz="1200" dirty="0"/>
           </a:p>
@@ -3889,7 +3847,24 @@
                   <a:srgbClr val="FFFFFF"/>
                 </a:solidFill>
               </a:rPr>
-              <a:t>   將免疫檢查點抑制劑與介入療法結合的策略顯示出潛在的療效，但仍需進一步研究以確定最佳的治療組合。</a:t>
+              <a:t>   外周免疫標記物的靜態和動態變化在接受TACE及免疫檢查點抑制劑的HCC患者中，能預測預後，強調了免疫監測的重要性。  </a:t>
+            </a:r>
+            <a:endParaRPr lang="en-US" sz="1200" dirty="0"/>
+          </a:p>
+          <a:p>
+            <a:pPr indent="0" marL="0">
+              <a:lnSpc>
+                <a:spcPct val="150000"/>
+              </a:lnSpc>
+              <a:buNone/>
+            </a:pPr>
+            <a:r>
+              <a:rPr lang="en-US" sz="1200" dirty="0">
+                <a:solidFill>
+                  <a:srgbClr val="FFFFFF"/>
+                </a:solidFill>
+              </a:rPr>
+              <a:t>   **Peripheral immune markers' static and dynamic changes can predict prognosis in HCC patients receiving TACE and immune checkpoint inhibitors, emphasizing the importance of immune monitoring.**</a:t>
             </a:r>
             <a:endParaRPr lang="en-US" sz="1200" dirty="0"/>
           </a:p>
@@ -4035,7 +4010,7 @@
                   <a:srgbClr val="FFFFFF"/>
                 </a:solidFill>
               </a:rPr>
-              <a:t>Strategies combining immune checkpoint inhibitors with interventional therapies show potential efficacy, but further research is needed to determine the optimal treatment combinations.</a:t>
+              <a:t>### 未來研究方向 (Future Research Directions)</a:t>
             </a:r>
             <a:endParaRPr lang="en-US" sz="1200" dirty="0"/>
           </a:p>
@@ -4061,7 +4036,7 @@
                   <a:srgbClr val="FFFFFF"/>
                 </a:solidFill>
               </a:rPr>
-              <a:t>### 未來研究方向 (Future Research Directions)</a:t>
+              <a:t>1. **探索PD-1抑制劑的多重作用**  </a:t>
             </a:r>
             <a:endParaRPr lang="en-US" sz="1200" dirty="0"/>
           </a:p>
@@ -4072,6 +4047,14 @@
               </a:lnSpc>
               <a:buNone/>
             </a:pPr>
+            <a:r>
+              <a:rPr lang="en-US" sz="1200" dirty="0">
+                <a:solidFill>
+                  <a:srgbClr val="FFFFFF"/>
+                </a:solidFill>
+              </a:rPr>
+              <a:t>   進一步研究PD-1抑制劑在HCC治療中的多重免疫機制，以開發更有效的治療策略。  </a:t>
+            </a:r>
             <a:endParaRPr lang="en-US" sz="1200" dirty="0"/>
           </a:p>
           <a:p>
@@ -4087,7 +4070,7 @@
                   <a:srgbClr val="FFFFFF"/>
                 </a:solidFill>
               </a:rPr>
-              <a:t>1. **生物標記物的開發 (Development of Biomarkers)**  </a:t>
+              <a:t>   **Further exploration of the multifaceted immune mechanisms of PD-1 inhibitors in HCC treatment is needed to develop more effective therapeutic strategies.**</a:t>
             </a:r>
             <a:endParaRPr lang="en-US" sz="1200" dirty="0"/>
           </a:p>
@@ -4098,14 +4081,6 @@
               </a:lnSpc>
               <a:buNone/>
             </a:pPr>
-            <a:r>
-              <a:rPr lang="en-US" sz="1200" dirty="0">
-                <a:solidFill>
-                  <a:srgbClr val="FFFFFF"/>
-                </a:solidFill>
-              </a:rPr>
-              <a:t>   需要進一步開發和驗證能夠預測HCC患者對免疫檢查點抑制劑反應的生物標記物，以實現個性化治療。  </a:t>
-            </a:r>
             <a:endParaRPr lang="en-US" sz="1200" dirty="0"/>
           </a:p>
           <a:p>
@@ -4121,7 +4096,7 @@
                   <a:srgbClr val="FFFFFF"/>
                 </a:solidFill>
               </a:rPr>
-              <a:t>   Further development and validation of biomarkers that can predict HCC patient responses to immune checkpoint inhibitors are needed for personalized treatment.</a:t>
+              <a:t>2. **治療中斷原因的深入分析**  </a:t>
             </a:r>
             <a:endParaRPr lang="en-US" sz="1200" dirty="0"/>
           </a:p>
@@ -4132,6 +4107,14 @@
               </a:lnSpc>
               <a:buNone/>
             </a:pPr>
+            <a:r>
+              <a:rPr lang="en-US" sz="1200" dirty="0">
+                <a:solidFill>
+                  <a:srgbClr val="FFFFFF"/>
+                </a:solidFill>
+              </a:rPr>
+              <a:t>   針對不可切除HCC患者的治療中斷原因進行深入分析，尋求改善治療持續性的策略。  </a:t>
+            </a:r>
             <a:endParaRPr lang="en-US" sz="1200" dirty="0"/>
           </a:p>
           <a:p>
@@ -4147,7 +4130,7 @@
                   <a:srgbClr val="FFFFFF"/>
                 </a:solidFill>
               </a:rPr>
-              <a:t>2. **代謝機制的深入研究 (In-depth Study of Metabolic Mechanisms)**  </a:t>
+              <a:t>   **In-depth analyses of the reasons for treatment discontinuation in unresectable HCC patients are necessary to identify strategies for improving treatment adherence.**</a:t>
             </a:r>
             <a:endParaRPr lang="en-US" sz="1200" dirty="0"/>
           </a:p>
@@ -4158,14 +4141,6 @@
               </a:lnSpc>
               <a:buNone/>
             </a:pPr>
-            <a:r>
-              <a:rPr lang="en-US" sz="1200" dirty="0">
-                <a:solidFill>
-                  <a:srgbClr val="FFFFFF"/>
-                </a:solidFill>
-              </a:rPr>
-              <a:t>   研究MASH-HCC的代謝機制及其對免疫治療的影響，以探索新的治療策略。  </a:t>
-            </a:r>
             <a:endParaRPr lang="en-US" sz="1200" dirty="0"/>
           </a:p>
           <a:p>
@@ -4181,7 +4156,7 @@
                   <a:srgbClr val="FFFFFF"/>
                 </a:solidFill>
               </a:rPr>
-              <a:t>   Investigating the metabolic mechanisms of MASH-HCC and their impact on immunotherapy could uncover new therapeutic strategies.</a:t>
+              <a:t>3. **轉化療法的長期隨訪研究**  </a:t>
             </a:r>
             <a:endParaRPr lang="en-US" sz="1200" dirty="0"/>
           </a:p>
@@ -4192,6 +4167,14 @@
               </a:lnSpc>
               <a:buNone/>
             </a:pPr>
+            <a:r>
+              <a:rPr lang="en-US" sz="1200" dirty="0">
+                <a:solidFill>
+                  <a:srgbClr val="FFFFFF"/>
+                </a:solidFill>
+              </a:rPr>
+              <a:t>   進行長期隨訪研究，以評估轉化療法（如TACE與PD-1抑制劑聯合療法）的持續效果及其對生存率的影響。  </a:t>
+            </a:r>
             <a:endParaRPr lang="en-US" sz="1200" dirty="0"/>
           </a:p>
           <a:p>
@@ -4207,7 +4190,7 @@
                   <a:srgbClr val="FFFFFF"/>
                 </a:solidFill>
               </a:rPr>
-              <a:t>3. **腫瘤微環境的動態觀察 (Dynamic Observation of Tumor Microenvironment)**  </a:t>
+              <a:t>   **Long-term follow-up studies are needed to assess the sustained effects of conversion therapies (e.g., TACE combined with PD-1 inhibitors) and their impact on survival rates.**</a:t>
             </a:r>
             <a:endParaRPr lang="en-US" sz="1200" dirty="0"/>
           </a:p>
@@ -4218,14 +4201,6 @@
               </a:lnSpc>
               <a:buNone/>
             </a:pPr>
-            <a:r>
-              <a:rPr lang="en-US" sz="1200" dirty="0">
-                <a:solidFill>
-                  <a:srgbClr val="FFFFFF"/>
-                </a:solidFill>
-              </a:rPr>
-              <a:t>   進行長期的腫瘤微環境動態觀察，以更好地理解免疫重塑對治療結果的影響。  </a:t>
-            </a:r>
             <a:endParaRPr lang="en-US" sz="1200" dirty="0"/>
           </a:p>
           <a:p>
@@ -4241,7 +4216,7 @@
                   <a:srgbClr val="FFFFFF"/>
                 </a:solidFill>
               </a:rPr>
-              <a:t>   Conducting long-term dynamic observations of the tumor microenvironment to better understand the impact of immune remodeling on treatment outcomes.</a:t>
+              <a:t>4. **個體化免疫監測的發展**  </a:t>
             </a:r>
             <a:endParaRPr lang="en-US" sz="1200" dirty="0"/>
           </a:p>
@@ -4252,6 +4227,14 @@
               </a:lnSpc>
               <a:buNone/>
             </a:pPr>
+            <a:r>
+              <a:rPr lang="en-US" sz="1200" dirty="0">
+                <a:solidFill>
+                  <a:srgbClr val="FFFFFF"/>
+                </a:solidFill>
+              </a:rPr>
+              <a:t>   發展個體化的免疫監測方法，以便更好地預測HCC患者對不同治療的反應。  </a:t>
+            </a:r>
             <a:endParaRPr lang="en-US" sz="1200" dirty="0"/>
           </a:p>
           <a:p>
@@ -4267,7 +4250,7 @@
                   <a:srgbClr val="FFFFFF"/>
                 </a:solidFill>
               </a:rPr>
-              <a:t>4. **新型局部消融技術的評估 (Evaluation of Novel Local Ablation Techniques)**  </a:t>
+              <a:t>   **The development of personalized immune monitoring methods is essential to better predict HCC patients' responses to various treatments.**</a:t>
             </a:r>
             <a:endParaRPr lang="en-US" sz="1200" dirty="0"/>
           </a:p>
@@ -4278,14 +4261,6 @@
               </a:lnSpc>
               <a:buNone/>
             </a:pPr>
-            <a:r>
-              <a:rPr lang="en-US" sz="1200" dirty="0">
-                <a:solidFill>
-                  <a:srgbClr val="FFFFFF"/>
-                </a:solidFill>
-              </a:rPr>
-              <a:t>   評估新型局部消融技術與免疫治療結合的效果，以提高HCC的治療效果。  </a:t>
-            </a:r>
             <a:endParaRPr lang="en-US" sz="1200" dirty="0"/>
           </a:p>
           <a:p>
@@ -4301,7 +4276,7 @@
                   <a:srgbClr val="FFFFFF"/>
                 </a:solidFill>
               </a:rPr>
-              <a:t>   Evaluating the efficacy of novel local ablation techniques in combination with immunotherapy to enhance treatment outcomes for HCC.</a:t>
+              <a:t>5. **標準化後線治療的共識建立**  </a:t>
             </a:r>
             <a:endParaRPr lang="en-US" sz="1200" dirty="0"/>
           </a:p>
@@ -4312,6 +4287,14 @@
               </a:lnSpc>
               <a:buNone/>
             </a:pPr>
+            <a:r>
+              <a:rPr lang="en-US" sz="1200" dirty="0">
+                <a:solidFill>
+                  <a:srgbClr val="FFFFFF"/>
+                </a:solidFill>
+              </a:rPr>
+              <a:t>   在HCC的後線治療中建立標準化的共識，以應對一線治療失敗後的臨床挑戰。  </a:t>
+            </a:r>
             <a:endParaRPr lang="en-US" sz="1200" dirty="0"/>
           </a:p>
           <a:p>
@@ -4327,41 +4310,7 @@
                   <a:srgbClr val="FFFFFF"/>
                 </a:solidFill>
               </a:rPr>
-              <a:t>5. **臨床試驗的設計 (Design of Clinical Trials)**  </a:t>
-            </a:r>
-            <a:endParaRPr lang="en-US" sz="1200" dirty="0"/>
-          </a:p>
-          <a:p>
-            <a:pPr indent="0" marL="0">
-              <a:lnSpc>
-                <a:spcPct val="150000"/>
-              </a:lnSpc>
-              <a:buNone/>
-            </a:pPr>
-            <a:r>
-              <a:rPr lang="en-US" sz="1200" dirty="0">
-                <a:solidFill>
-                  <a:srgbClr val="FFFFFF"/>
-                </a:solidFill>
-              </a:rPr>
-              <a:t>   設計針對不同組合療法的臨床試驗，以確定最佳的治療方案和患者選擇策略。  </a:t>
-            </a:r>
-            <a:endParaRPr lang="en-US" sz="1200" dirty="0"/>
-          </a:p>
-          <a:p>
-            <a:pPr indent="0" marL="0">
-              <a:lnSpc>
-                <a:spcPct val="150000"/>
-              </a:lnSpc>
-              <a:buNone/>
-            </a:pPr>
-            <a:r>
-              <a:rPr lang="en-US" sz="1200" dirty="0">
-                <a:solidFill>
-                  <a:srgbClr val="FFFFFF"/>
-                </a:solidFill>
-              </a:rPr>
-              <a:t>   Designing clinical trials targeting various combination therapies to determine the best treatment regimens and patient selection strategies.</a:t>
+              <a:t>   **Establishing a standardized consensus for later-line therapies in HCC is crucial to address clinical challenges following first-line treatment failures.**</a:t>
             </a:r>
             <a:endParaRPr lang="en-US" sz="1200" dirty="0"/>
           </a:p>
@@ -4595,7 +4544,7 @@
                 <a:ea typeface="Arial" pitchFamily="34" charset="-122"/>
                 <a:cs typeface="Arial" pitchFamily="34" charset="-120"/>
               </a:rPr>
-              <a:t>Circulating extracellular vesicles carrying PD-1, PD-L1 and CTLA-4 inform resist…</a:t>
+              <a:t>PD-1 blockade unleashes local hepatitis B virus-related B cell response inhibiti…</a:t>
             </a:r>
             <a:endParaRPr lang="en-US" sz="1400" dirty="0"/>
           </a:p>
@@ -4632,7 +4581,7 @@
                 <a:ea typeface="Arial" pitchFamily="34" charset="-122"/>
                 <a:cs typeface="Arial" pitchFamily="34" charset="-120"/>
               </a:rPr>
-              <a:t>PCK1 deficiency promotes MASH-HCC progression by 12-HETE-induced CD8+ T cell dys…</a:t>
+              <a:t>Competing risks of treatment discontinuation of atezolizumab plus bevacizumab in…</a:t>
             </a:r>
             <a:endParaRPr lang="en-US" sz="1400" dirty="0"/>
           </a:p>
@@ -4669,7 +4618,7 @@
                 <a:ea typeface="Arial" pitchFamily="34" charset="-122"/>
                 <a:cs typeface="Arial" pitchFamily="34" charset="-120"/>
               </a:rPr>
-              <a:t>Spatiotemporal dynamics of the tumor microenvironment in hepatocellular carcinom…</a:t>
+              <a:t>… plus transarterial chemoembolization and PD-1 inhibitors as conversion therapi…</a:t>
             </a:r>
             <a:endParaRPr lang="en-US" sz="1400" dirty="0"/>
           </a:p>
@@ -4706,7 +4655,7 @@
                 <a:ea typeface="Arial" pitchFamily="34" charset="-122"/>
                 <a:cs typeface="Arial" pitchFamily="34" charset="-120"/>
               </a:rPr>
-              <a:t>… plus transarterial chemoembolization and PD-1 inhibitors as conversion therapi…</a:t>
+              <a:t>… (PD-1 inhibitor) plus lenvatinib as conversion therapy followed by sequential …</a:t>
             </a:r>
             <a:endParaRPr lang="en-US" sz="1400" dirty="0"/>
           </a:p>
@@ -4743,7 +4692,7 @@
                 <a:ea typeface="Arial" pitchFamily="34" charset="-122"/>
                 <a:cs typeface="Arial" pitchFamily="34" charset="-120"/>
               </a:rPr>
-              <a:t>… (PD-1 inhibitor) plus lenvatinib as conversion therapy followed by sequential …</a:t>
+              <a:t>Peripheral immune dynamics during treatment predict prognosis in HCC receiving T…</a:t>
             </a:r>
             <a:endParaRPr lang="en-US" sz="1400" dirty="0"/>
           </a:p>
@@ -4780,7 +4729,7 @@
                 <a:ea typeface="Arial" pitchFamily="34" charset="-122"/>
                 <a:cs typeface="Arial" pitchFamily="34" charset="-120"/>
               </a:rPr>
-              <a:t>Aggressive Histologic Subtypes Drive Poor Outcomes after Percutaneous Ablation f…</a:t>
+              <a:t>Consensus on standardized later-line systemic therapy for hepatocellular carcino…</a:t>
             </a:r>
             <a:endParaRPr lang="en-US" sz="1400" dirty="0"/>
           </a:p>
@@ -4817,7 +4766,7 @@
                 <a:ea typeface="Arial" pitchFamily="34" charset="-122"/>
                 <a:cs typeface="Arial" pitchFamily="34" charset="-120"/>
               </a:rPr>
-              <a:t>Combined anti-PD-1 with irreversible electroporation relieves immunosuppression …</a:t>
+              <a:t>Cryoablation versus radiofrequency ablation for hepatocellular carcinoma: a syst…</a:t>
             </a:r>
             <a:endParaRPr lang="en-US" sz="1400" dirty="0"/>
           </a:p>
@@ -4854,7 +4803,7 @@
                 <a:ea typeface="Arial" pitchFamily="34" charset="-122"/>
                 <a:cs typeface="Arial" pitchFamily="34" charset="-120"/>
               </a:rPr>
-              <a:t>Radiotherapy versus local ablation therapy for the treatment of hepatocellular c…</a:t>
+              <a:t>Cryoablation versus radiofrequency ablation for hepatocellular carcinoma: a syst…</a:t>
             </a:r>
             <a:endParaRPr lang="en-US" sz="1400" dirty="0"/>
           </a:p>
@@ -4891,7 +4840,7 @@
                 <a:ea typeface="Arial" pitchFamily="34" charset="-122"/>
                 <a:cs typeface="Arial" pitchFamily="34" charset="-120"/>
               </a:rPr>
-              <a:t>… on interventional therapy and immune checkpoint inhibitors (ICIs) in patients …</a:t>
+              <a:t>Radiotherapy versus local ablation therapy for the treatment of hepatocellular c…</a:t>
             </a:r>
             <a:endParaRPr lang="en-US" sz="1400" dirty="0"/>
           </a:p>
@@ -4928,7 +4877,7 @@
                 <a:ea typeface="Arial" pitchFamily="34" charset="-122"/>
                 <a:cs typeface="Arial" pitchFamily="34" charset="-120"/>
               </a:rPr>
-              <a:t>Immune Checkpoint Inhibitors in Hepatocellular Carcinoma Before and After Liver …</a:t>
+              <a:t>… on interventional therapy and immune checkpoint inhibitors (ICIs) in patients …</a:t>
             </a:r>
             <a:endParaRPr lang="en-US" sz="1400" dirty="0"/>
           </a:p>
@@ -5083,7 +5032,7 @@
                   </a:extLst>
                 </a:hlinkClick>
               </a:rPr>
-              <a:t>Circulating extracellular vesicles carrying PD-1, PD-L1 and CTLA-4 inform resistance to anti-PD-L1-based therapy in HCC.</a:t>
+              <a:t>PD-1 blockade unleashes local hepatitis B virus-related B cell response inhibiting hepatocellular carcinoma.</a:t>
             </a:r>
             <a:endParaRPr lang="en-US" sz="2400" dirty="0"/>
           </a:p>
@@ -5119,7 +5068,7 @@
                   <a:srgbClr val="888888"/>
                 </a:solidFill>
               </a:rPr>
-              <a:t>Gut  ·  IF 24.5</a:t>
+              <a:t>Cancer cell  ·  IF 48.8  ·  RCT Phase 2</a:t>
             </a:r>
             <a:endParaRPr lang="en-US" sz="1000" dirty="0"/>
           </a:p>
@@ -5162,7 +5111,7 @@
                 <a:ea typeface="Arial" pitchFamily="34" charset="-122"/>
                 <a:cs typeface="Arial" pitchFamily="34" charset="-120"/>
               </a:rPr>
-              <a:t>Circulating EVs carry PD-1, PD-L1, CTLA-4.</a:t>
+              <a:t>Study on PD-1 therapy in HCC patients</a:t>
             </a:r>
             <a:endParaRPr lang="en-US" sz="1800" dirty="0"/>
           </a:p>
@@ -5183,7 +5132,7 @@
                 <a:ea typeface="Arial" pitchFamily="34" charset="-122"/>
                 <a:cs typeface="Arial" pitchFamily="34" charset="-120"/>
               </a:rPr>
-              <a:t>Baseline EV-IC levels predict treatment response.</a:t>
+              <a:t>Identified T cell and B cell responses</a:t>
             </a:r>
             <a:endParaRPr lang="en-US" sz="1800" dirty="0"/>
           </a:p>
@@ -5204,7 +5153,7 @@
                 <a:ea typeface="Arial" pitchFamily="34" charset="-122"/>
                 <a:cs typeface="Arial" pitchFamily="34" charset="-120"/>
               </a:rPr>
-              <a:t>Dynamic EV-IC changes indicate acquired resistance.</a:t>
+              <a:t>HBcAg triggers local B cell activation</a:t>
             </a:r>
             <a:endParaRPr lang="en-US" sz="1800" dirty="0"/>
           </a:p>
@@ -5225,7 +5174,7 @@
                 <a:ea typeface="Arial" pitchFamily="34" charset="-122"/>
                 <a:cs typeface="Arial" pitchFamily="34" charset="-120"/>
               </a:rPr>
-              <a:t>Liquid biopsy offers non-invasive biomarker potential.</a:t>
+              <a:t>Complement activation enhances anti-tumor effect</a:t>
             </a:r>
             <a:endParaRPr lang="en-US" sz="1800" dirty="0"/>
           </a:p>
@@ -5246,7 +5195,7 @@
                 <a:ea typeface="Arial" pitchFamily="34" charset="-122"/>
                 <a:cs typeface="Arial" pitchFamily="34" charset="-120"/>
               </a:rPr>
-              <a:t>Findings not reproducible in TKI-treated cohort.</a:t>
+              <a:t>B cell immunity boosts anti-PD-1 efficacy</a:t>
             </a:r>
             <a:endParaRPr lang="en-US" sz="1800" dirty="0"/>
           </a:p>
@@ -5282,7 +5231,7 @@
                   <a:srgbClr val="888888"/>
                 </a:solidFill>
               </a:rPr>
-              <a:t>Gorgulho Jo&amp;#xe3;o, Masood Ramsha, Buescher Gustav et al.. Gut. 2026-08-06 DOI: 10.1136/gutjnl-2025-337617</a:t>
+              <a:t>Chen Shuling, Wang Yuanqi, Chen Jingying et al.. Cancer cell. 2026-08-10 DOI: 10.1016/j.ccell.2026.06.010</a:t>
             </a:r>
             <a:endParaRPr lang="en-US" sz="800" dirty="0"/>
           </a:p>
@@ -5482,7 +5431,7 @@
                   </a:extLst>
                 </a:hlinkClick>
               </a:rPr>
-              <a:t>PCK1 deficiency promotes MASH-HCC progression by 12-HETE-induced CD8+ T cell dysfunction.</a:t>
+              <a:t>Competing risks of treatment discontinuation of atezolizumab plus bevacizumab in unresectable hepatocellular carcinoma.</a:t>
             </a:r>
             <a:endParaRPr lang="en-US" sz="2400" dirty="0"/>
           </a:p>
@@ -5518,7 +5467,7 @@
                   <a:srgbClr val="888888"/>
                 </a:solidFill>
               </a:rPr>
-              <a:t>Gut  ·  IF 24.5</a:t>
+              <a:t>JHEP reports : innovation in hepatology  ·  IF 7.8  ·  Retrospective Study  ·  🌏 Asia</a:t>
             </a:r>
             <a:endParaRPr lang="en-US" sz="1000" dirty="0"/>
           </a:p>
@@ -5561,7 +5510,7 @@
                 <a:ea typeface="Arial" pitchFamily="34" charset="-122"/>
                 <a:cs typeface="Arial" pitchFamily="34" charset="-120"/>
               </a:rPr>
-              <a:t>PCK1 deficiency linked to MASH-HCC progression.</a:t>
+              <a:t>Atezolizumab plus bevacizumab is standard therapy.</a:t>
             </a:r>
             <a:endParaRPr lang="en-US" sz="1800" dirty="0"/>
           </a:p>
@@ -5582,7 +5531,7 @@
                 <a:ea typeface="Arial" pitchFamily="34" charset="-122"/>
                 <a:cs typeface="Arial" pitchFamily="34" charset="-120"/>
               </a:rPr>
-              <a:t>12-HETE induces CD8+ T cell dysfunction.</a:t>
+              <a:t>Discontinuation reasons include PD and AEs.</a:t>
             </a:r>
             <a:endParaRPr lang="en-US" sz="1800" dirty="0"/>
           </a:p>
@@ -5603,7 +5552,7 @@
                 <a:ea typeface="Arial" pitchFamily="34" charset="-122"/>
                 <a:cs typeface="Arial" pitchFamily="34" charset="-120"/>
               </a:rPr>
-              <a:t>PCK1 restoration enhances anti-PD-1 efficacy.</a:t>
+              <a:t>AFP and ALBI predict discontinuation causes.</a:t>
             </a:r>
             <a:endParaRPr lang="en-US" sz="1800" dirty="0"/>
           </a:p>
@@ -5639,7 +5588,7 @@
                   <a:srgbClr val="888888"/>
                 </a:solidFill>
               </a:rPr>
-              <a:t>Wu Kang, Li Luo, Liu Yi et al.. Gut. 2026-08-06 DOI: 10.1136/gutjnl-2024-334562</a:t>
+              <a:t>Suda Goki, Sho Takuya, Abe Tamami et al.. JHEP reports : innovation in hepatology. 2026-08-11 DOI: 10.1016/j.jhepr.2026.101988</a:t>
             </a:r>
             <a:endParaRPr lang="en-US" sz="800" dirty="0"/>
           </a:p>
@@ -5839,7 +5788,7 @@
                   </a:extLst>
                 </a:hlinkClick>
               </a:rPr>
-              <a:t>Spatiotemporal dynamics of the tumor microenvironment in hepatocellular carcinoma during combination immunotherapy.</a:t>
+              <a:t>… plus transarterial chemoembolization and PD-1 inhibitors as conversion therapies for unresectable intermediate-advanced hepatocellular carcinoma: a phase 2 trial …</a:t>
             </a:r>
             <a:endParaRPr lang="en-US" sz="2400" dirty="0"/>
           </a:p>
@@ -5875,7 +5824,7 @@
                   <a:srgbClr val="888888"/>
                 </a:solidFill>
               </a:rPr>
-              <a:t>Hepatology communications  ·  IF 5.6  ·  🌏 Asia</a:t>
+              <a:t>… and Targeted Therapy  ·  RCT Phase 2</a:t>
             </a:r>
             <a:endParaRPr lang="en-US" sz="1000" dirty="0"/>
           </a:p>
@@ -5918,7 +5867,7 @@
                 <a:ea typeface="Arial" pitchFamily="34" charset="-122"/>
                 <a:cs typeface="Arial" pitchFamily="34" charset="-120"/>
               </a:rPr>
-              <a:t>ATZ/BEV therapy shows limited tumor regression.</a:t>
+              <a:t>Combination of TACE and PD-1 inhibitors</a:t>
             </a:r>
             <a:endParaRPr lang="en-US" sz="1800" dirty="0"/>
           </a:p>
@@ -5939,7 +5888,7 @@
                 <a:ea typeface="Arial" pitchFamily="34" charset="-122"/>
                 <a:cs typeface="Arial" pitchFamily="34" charset="-120"/>
               </a:rPr>
-              <a:t>Single-cell RNA sequencing reveals immune remodeling.</a:t>
+              <a:t>Phase 2 trial for uHCC patients</a:t>
             </a:r>
             <a:endParaRPr lang="en-US" sz="1800" dirty="0"/>
           </a:p>
@@ -5960,49 +5909,7 @@
                 <a:ea typeface="Arial" pitchFamily="34" charset="-122"/>
                 <a:cs typeface="Arial" pitchFamily="34" charset="-120"/>
               </a:rPr>
-              <a:t>Increased CD8+ T cells with exhaustion signatures.</a:t>
-            </a:r>
-            <a:endParaRPr lang="en-US" sz="1800" dirty="0"/>
-          </a:p>
-          <a:p>
-            <a:pPr marL="342900" indent="-342900">
-              <a:spcAft>
-                <a:spcPts val="800"/>
-              </a:spcAft>
-              <a:buSzPct val="100000"/>
-              <a:buChar char="•"/>
-            </a:pPr>
-            <a:r>
-              <a:rPr lang="en-US" sz="1800" dirty="0">
-                <a:solidFill>
-                  <a:srgbClr val="333333"/>
-                </a:solidFill>
-                <a:latin typeface="Arial" pitchFamily="34" charset="0"/>
-                <a:ea typeface="Arial" pitchFamily="34" charset="-122"/>
-                <a:cs typeface="Arial" pitchFamily="34" charset="-120"/>
-              </a:rPr>
-              <a:t>TIGIT-PVR/NECTIN2 axis activated post-treatment.</a:t>
-            </a:r>
-            <a:endParaRPr lang="en-US" sz="1800" dirty="0"/>
-          </a:p>
-          <a:p>
-            <a:pPr marL="342900" indent="-342900">
-              <a:spcAft>
-                <a:spcPts val="800"/>
-              </a:spcAft>
-              <a:buSzPct val="100000"/>
-              <a:buChar char="•"/>
-            </a:pPr>
-            <a:r>
-              <a:rPr lang="en-US" sz="1800" dirty="0">
-                <a:solidFill>
-                  <a:srgbClr val="333333"/>
-                </a:solidFill>
-                <a:latin typeface="Arial" pitchFamily="34" charset="0"/>
-                <a:ea typeface="Arial" pitchFamily="34" charset="-122"/>
-                <a:cs typeface="Arial" pitchFamily="34" charset="-120"/>
-              </a:rPr>
-              <a:t>Tumor margin exhibits stronger immune activity.</a:t>
+              <a:t>Evaluated efficacy versus TACE alone</a:t>
             </a:r>
             <a:endParaRPr lang="en-US" sz="1800" dirty="0"/>
           </a:p>
@@ -6038,7 +5945,7 @@
                   <a:srgbClr val="888888"/>
                 </a:solidFill>
               </a:rPr>
-              <a:t>Iwasaki Hitoshi, Itoh Shinji, Toshida Katsuya et al.. Hepatology communications. 2026-08-07 DOI: 10.1097/HC9.0000000000001014</a:t>
+              <a:t>X Zhang, H Cai, W Peng. … and Targeted Therapy. 2026</a:t>
             </a:r>
             <a:endParaRPr lang="en-US" sz="800" dirty="0"/>
           </a:p>
@@ -6238,7 +6145,7 @@
                   </a:extLst>
                 </a:hlinkClick>
               </a:rPr>
-              <a:t>… plus transarterial chemoembolization and PD-1 inhibitors as conversion therapies for unresectable intermediate-advanced hepatocellular carcinoma: a phase 2 trial …</a:t>
+              <a:t>… (PD-1 inhibitor) plus lenvatinib as conversion therapy followed by sequential surgery (SILENSES) for advanced unresectable hepatocellular carcinoma: a phase II …</a:t>
             </a:r>
             <a:endParaRPr lang="en-US" sz="2400" dirty="0"/>
           </a:p>
@@ -6317,7 +6224,7 @@
                 <a:ea typeface="Arial" pitchFamily="34" charset="-122"/>
                 <a:cs typeface="Arial" pitchFamily="34" charset="-120"/>
               </a:rPr>
-              <a:t>Combination therapy evaluated in uHCC</a:t>
+              <a:t>Study evaluates PD-1 inhibitor plus lenvatinib</a:t>
             </a:r>
             <a:endParaRPr lang="en-US" sz="1800" dirty="0"/>
           </a:p>
@@ -6338,7 +6245,7 @@
                 <a:ea typeface="Arial" pitchFamily="34" charset="-122"/>
                 <a:cs typeface="Arial" pitchFamily="34" charset="-120"/>
               </a:rPr>
-              <a:t>Transarterial chemoembolization (TACE) used</a:t>
+              <a:t>Focus on advanced unresectable HCC patients</a:t>
             </a:r>
             <a:endParaRPr lang="en-US" sz="1800" dirty="0"/>
           </a:p>
@@ -6359,7 +6266,7 @@
                 <a:ea typeface="Arial" pitchFamily="34" charset="-122"/>
                 <a:cs typeface="Arial" pitchFamily="34" charset="-120"/>
               </a:rPr>
-              <a:t>PD-1 inhibitors added for effectiveness</a:t>
+              <a:t>Sequential surgery after conversion therapy</a:t>
             </a:r>
             <a:endParaRPr lang="en-US" sz="1800" dirty="0"/>
           </a:p>
@@ -6380,7 +6287,7 @@
                 <a:ea typeface="Arial" pitchFamily="34" charset="-122"/>
                 <a:cs typeface="Arial" pitchFamily="34" charset="-120"/>
               </a:rPr>
-              <a:t>Phase 2 trial results presented</a:t>
+              <a:t>Long-term survival outcomes assessed</a:t>
             </a:r>
             <a:endParaRPr lang="en-US" sz="1800" dirty="0"/>
           </a:p>
@@ -6401,7 +6308,7 @@
                 <a:ea typeface="Arial" pitchFamily="34" charset="-122"/>
                 <a:cs typeface="Arial" pitchFamily="34" charset="-120"/>
               </a:rPr>
-              <a:t>Comparative analysis with TACE alone</a:t>
+              <a:t>Phase II trial results presented</a:t>
             </a:r>
             <a:endParaRPr lang="en-US" sz="1800" dirty="0"/>
           </a:p>
@@ -6437,7 +6344,7 @@
                   <a:srgbClr val="888888"/>
                 </a:solidFill>
               </a:rPr>
-              <a:t>X Zhang, H Cai, W Peng. … and Targeted Therapy. 2026</a:t>
+              <a:t>S Lu, W Zhang, J Li. … and Targeted Therapy. 2026</a:t>
             </a:r>
             <a:endParaRPr lang="en-US" sz="800" dirty="0"/>
           </a:p>
@@ -6637,7 +6544,7 @@
                   </a:extLst>
                 </a:hlinkClick>
               </a:rPr>
-              <a:t>… (PD-1 inhibitor) plus lenvatinib as conversion therapy followed by sequential surgery (SILENSES) for advanced unresectable hepatocellular carcinoma: a phase II …</a:t>
+              <a:t>Peripheral immune dynamics during treatment predict prognosis in HCC receiving TACE plus ICIs and anti-VEGF/TKIs.</a:t>
             </a:r>
             <a:endParaRPr lang="en-US" sz="2400" dirty="0"/>
           </a:p>
@@ -6673,7 +6580,7 @@
                   <a:srgbClr val="888888"/>
                 </a:solidFill>
               </a:rPr>
-              <a:t>… and Targeted Therapy  ·  RCT Phase 2</a:t>
+              <a:t>Clinical &amp; translational immunology  ·  Retrospective Study  ·  🌏 Asia</a:t>
             </a:r>
             <a:endParaRPr lang="en-US" sz="1000" dirty="0"/>
           </a:p>
@@ -6716,7 +6623,7 @@
                 <a:ea typeface="Arial" pitchFamily="34" charset="-122"/>
                 <a:cs typeface="Arial" pitchFamily="34" charset="-120"/>
               </a:rPr>
-              <a:t>Study evaluates PD-1 inhibitor plus lenvatinib</a:t>
+              <a:t>Study evaluates immune markers in HCC treatment.</a:t>
             </a:r>
             <a:endParaRPr lang="en-US" sz="1800" dirty="0"/>
           </a:p>
@@ -6737,7 +6644,7 @@
                 <a:ea typeface="Arial" pitchFamily="34" charset="-122"/>
                 <a:cs typeface="Arial" pitchFamily="34" charset="-120"/>
               </a:rPr>
-              <a:t>Focus on advanced unresectable HCC patients</a:t>
+              <a:t>Patients received TACE plus ICIs and anti-VEGF/TKIs.</a:t>
             </a:r>
             <a:endParaRPr lang="en-US" sz="1800" dirty="0"/>
           </a:p>
@@ -6758,7 +6665,7 @@
                 <a:ea typeface="Arial" pitchFamily="34" charset="-122"/>
                 <a:cs typeface="Arial" pitchFamily="34" charset="-120"/>
               </a:rPr>
-              <a:t>Sequential surgery after conversion therapy</a:t>
+              <a:t>Dynamic immune changes predict overall survival.</a:t>
             </a:r>
             <a:endParaRPr lang="en-US" sz="1800" dirty="0"/>
           </a:p>
@@ -6779,7 +6686,7 @@
                 <a:ea typeface="Arial" pitchFamily="34" charset="-122"/>
                 <a:cs typeface="Arial" pitchFamily="34" charset="-120"/>
               </a:rPr>
-              <a:t>Long-term survival outcomes assessed</a:t>
+              <a:t>Prognostic nomogram developed from immune data.</a:t>
             </a:r>
             <a:endParaRPr lang="en-US" sz="1800" dirty="0"/>
           </a:p>
@@ -6800,7 +6707,7 @@
                 <a:ea typeface="Arial" pitchFamily="34" charset="-122"/>
                 <a:cs typeface="Arial" pitchFamily="34" charset="-120"/>
               </a:rPr>
-              <a:t>Phase II trial results discussed</a:t>
+              <a:t>Three immune dynamic subtypes identified for prognosis.</a:t>
             </a:r>
             <a:endParaRPr lang="en-US" sz="1800" dirty="0"/>
           </a:p>
@@ -6836,7 +6743,7 @@
                   <a:srgbClr val="888888"/>
                 </a:solidFill>
               </a:rPr>
-              <a:t>S Lu, W Zhang, J Li. … and Targeted Therapy. 2026</a:t>
+              <a:t>Qin Lihao, Zhu Linzhou, Yang Hao et al.. Clinical &amp; translational immunology. 2026-08-16 DOI: 10.1002/cti2.70115</a:t>
             </a:r>
             <a:endParaRPr lang="en-US" sz="800" dirty="0"/>
           </a:p>
@@ -7036,7 +6943,7 @@
                   </a:extLst>
                 </a:hlinkClick>
               </a:rPr>
-              <a:t>Aggressive Histologic Subtypes Drive Poor Outcomes after Percutaneous Ablation for Early Recurrent Hepatocellular Carcinoma.</a:t>
+              <a:t>Consensus on standardized later-line systemic therapy for hepatocellular carcinoma.</a:t>
             </a:r>
             <a:endParaRPr lang="en-US" sz="2400" dirty="0"/>
           </a:p>
@@ -7072,7 +6979,7 @@
                   <a:srgbClr val="888888"/>
                 </a:solidFill>
               </a:rPr>
-              <a:t>Journal of vascular and interventional radiology : JVIR  ·  Retrospective Study  ·  🌏 Asia</a:t>
+              <a:t>Drug resistance updates : reviews and commentaries in antimicrobial and anticancer chemotherapy  ·  Review  ·  🌏 Asia</a:t>
             </a:r>
             <a:endParaRPr lang="en-US" sz="1000" dirty="0"/>
           </a:p>
@@ -7115,7 +7022,7 @@
                 <a:ea typeface="Arial" pitchFamily="34" charset="-122"/>
                 <a:cs typeface="Arial" pitchFamily="34" charset="-120"/>
               </a:rPr>
-              <a:t>Aggressive histology predicts poor outcomes.</a:t>
+              <a:t>Standardized consensus for later-line therapy established.</a:t>
             </a:r>
             <a:endParaRPr lang="en-US" sz="1800" dirty="0"/>
           </a:p>
@@ -7136,7 +7043,7 @@
                 <a:ea typeface="Arial" pitchFamily="34" charset="-122"/>
                 <a:cs typeface="Arial" pitchFamily="34" charset="-120"/>
               </a:rPr>
-              <a:t>Study included 194 patients post-resection.</a:t>
+              <a:t>Addresses issues after targeted therapy failure.</a:t>
             </a:r>
             <a:endParaRPr lang="en-US" sz="1800" dirty="0"/>
           </a:p>
@@ -7157,49 +7064,7 @@
                 <a:ea typeface="Arial" pitchFamily="34" charset="-122"/>
                 <a:cs typeface="Arial" pitchFamily="34" charset="-120"/>
               </a:rPr>
-              <a:t>Risk model stratifies patients by histology.</a:t>
-            </a:r>
-            <a:endParaRPr lang="en-US" sz="1800" dirty="0"/>
-          </a:p>
-          <a:p>
-            <a:pPr marL="342900" indent="-342900">
-              <a:spcAft>
-                <a:spcPts val="800"/>
-              </a:spcAft>
-              <a:buSzPct val="100000"/>
-              <a:buChar char="•"/>
-            </a:pPr>
-            <a:r>
-              <a:rPr lang="en-US" sz="1800" dirty="0">
-                <a:solidFill>
-                  <a:srgbClr val="333333"/>
-                </a:solidFill>
-                <a:latin typeface="Arial" pitchFamily="34" charset="0"/>
-                <a:ea typeface="Arial" pitchFamily="34" charset="-122"/>
-                <a:cs typeface="Arial" pitchFamily="34" charset="-120"/>
-              </a:rPr>
-              <a:t>Aggressive recurrence patterns linked to histology.</a:t>
-            </a:r>
-            <a:endParaRPr lang="en-US" sz="1800" dirty="0"/>
-          </a:p>
-          <a:p>
-            <a:pPr marL="342900" indent="-342900">
-              <a:spcAft>
-                <a:spcPts val="800"/>
-              </a:spcAft>
-              <a:buSzPct val="100000"/>
-              <a:buChar char="•"/>
-            </a:pPr>
-            <a:r>
-              <a:rPr lang="en-US" sz="1800" dirty="0">
-                <a:solidFill>
-                  <a:srgbClr val="333333"/>
-                </a:solidFill>
-                <a:latin typeface="Arial" pitchFamily="34" charset="0"/>
-                <a:ea typeface="Arial" pitchFamily="34" charset="-122"/>
-                <a:cs typeface="Arial" pitchFamily="34" charset="-120"/>
-              </a:rPr>
-              <a:t>Histology should guide treatment planning.</a:t>
+              <a:t>Proposes unified evaluation criteria and recommendations.</a:t>
             </a:r>
             <a:endParaRPr lang="en-US" sz="1800" dirty="0"/>
           </a:p>
@@ -7235,7 +7100,7 @@
                   <a:srgbClr val="888888"/>
                 </a:solidFill>
               </a:rPr>
-              <a:t>Gu Kyowon, Lee Min Woo, Han Seungchul et al.. Journal of vascular and interventional radiology : JVIR. 2026-08-04 DOI: 10.1016/j.jvir.2026.108998</a:t>
+              <a:t>Yu Hongli, Cheng Jiamin, Xia Feng et al.. Drug resistance updates : reviews and commentaries in antimicrobial and anticancer chemotherapy. 2026-08-14 DOI: 10.1016/j.drup.2026.101468</a:t>
             </a:r>
             <a:endParaRPr lang="en-US" sz="800" dirty="0"/>
           </a:p>
@@ -7435,7 +7300,7 @@
                   </a:extLst>
                 </a:hlinkClick>
               </a:rPr>
-              <a:t>Combined anti-PD-1 with irreversible electroporation relieves immunosuppression and reduces hepatocellular carcinoma regrowth.</a:t>
+              <a:t>Cryoablation versus radiofrequency ablation for hepatocellular carcinoma: a systematic review and meta-analysis.</a:t>
             </a:r>
             <a:endParaRPr lang="en-US" sz="2400" dirty="0"/>
           </a:p>
@@ -7471,7 +7336,7 @@
                   <a:srgbClr val="888888"/>
                 </a:solidFill>
               </a:rPr>
-              <a:t>JHEP reports : innovation in hepatology  ·  IF 7.8  ·  Prospective Study</a:t>
+              <a:t>International journal of hyperthermia : the official journal of European Society for Hyperthermic Oncology, North American Hyperthermia Group  ·  Meta-Analysis</a:t>
             </a:r>
             <a:endParaRPr lang="en-US" sz="1000" dirty="0"/>
           </a:p>
@@ -7514,7 +7379,7 @@
                 <a:ea typeface="Arial" pitchFamily="34" charset="-122"/>
                 <a:cs typeface="Arial" pitchFamily="34" charset="-120"/>
               </a:rPr>
-              <a:t>IRE induces immune microenvironment changes.</a:t>
+              <a:t>Cryoablation shows higher complete ablation rate.</a:t>
             </a:r>
             <a:endParaRPr lang="en-US" sz="1800" dirty="0"/>
           </a:p>
@@ -7535,7 +7400,7 @@
                 <a:ea typeface="Arial" pitchFamily="34" charset="-122"/>
                 <a:cs typeface="Arial" pitchFamily="34" charset="-120"/>
               </a:rPr>
-              <a:t>Combination with anti-PD-1 reduces tumor regrowth.</a:t>
+              <a:t>Lower intraoperative pain with cryoablation.</a:t>
             </a:r>
             <a:endParaRPr lang="en-US" sz="1800" dirty="0"/>
           </a:p>
@@ -7556,7 +7421,7 @@
                 <a:ea typeface="Arial" pitchFamily="34" charset="-122"/>
                 <a:cs typeface="Arial" pitchFamily="34" charset="-120"/>
               </a:rPr>
-              <a:t>PMN-MDSCs promote CD8+ T cell exhaustion.</a:t>
+              <a:t>Comparable progression-free survival between treatments.</a:t>
             </a:r>
             <a:endParaRPr lang="en-US" sz="1800" dirty="0"/>
           </a:p>
@@ -7577,7 +7442,7 @@
                 <a:ea typeface="Arial" pitchFamily="34" charset="-122"/>
                 <a:cs typeface="Arial" pitchFamily="34" charset="-120"/>
               </a:rPr>
-              <a:t>YTHDF2 degrades CXCL10 mRNA in HCC.</a:t>
+              <a:t>No significant overall survival difference observed.</a:t>
             </a:r>
             <a:endParaRPr lang="en-US" sz="1800" dirty="0"/>
           </a:p>
@@ -7598,7 +7463,7 @@
                 <a:ea typeface="Arial" pitchFamily="34" charset="-122"/>
                 <a:cs typeface="Arial" pitchFamily="34" charset="-120"/>
               </a:rPr>
-              <a:t>Clinical trials needed for validation.</a:t>
+              <a:t>Safety profiles are similar for both techniques.</a:t>
             </a:r>
             <a:endParaRPr lang="en-US" sz="1800" dirty="0"/>
           </a:p>
@@ -7634,7 +7499,7 @@
                   <a:srgbClr val="888888"/>
                 </a:solidFill>
               </a:rPr>
-              <a:t>Huo Jihui, Wang Lina, Lei Kai et al.. JHEP reports : innovation in hepatology. 2026-08-03 DOI: 10.1016/j.jhepr.2026.101977</a:t>
+              <a:t>Mao Kui, Wang Youqing, Yao Weijun et al.. International journal of hyperthermia : the official journal of European Society for Hyperthermic Oncology, North American Hyperthermia Group. 2026-08-13 DOI: 10.1080/02656736.2026.2713200</a:t>
             </a:r>
             <a:endParaRPr lang="en-US" sz="800" dirty="0"/>
           </a:p>

--- a/docs/digest-en.pptx
+++ b/docs/digest-en.pptx
@@ -2269,7 +2269,7 @@
                   <a:srgbClr val="888888"/>
                 </a:solidFill>
               </a:rPr>
-              <a:t>2026-08-10 — 2026-08-17</a:t>
+              <a:t>2026-08-17 — 2026-08-24</a:t>
             </a:r>
             <a:endParaRPr lang="en-US" sz="1400" dirty="0"/>
           </a:p>
@@ -2581,7 +2581,49 @@
                 <a:ea typeface="Arial" pitchFamily="34" charset="-122"/>
                 <a:cs typeface="Arial" pitchFamily="34" charset="-120"/>
               </a:rPr>
-              <a:t>Focus on early-stage HCC patients.</a:t>
+              <a:t>Focus on early-stage hepatocellular carcinoma.</a:t>
+            </a:r>
+            <a:endParaRPr lang="en-US" sz="1800" dirty="0"/>
+          </a:p>
+          <a:p>
+            <a:pPr marL="342900" indent="-342900">
+              <a:spcAft>
+                <a:spcPts val="800"/>
+              </a:spcAft>
+              <a:buSzPct val="100000"/>
+              <a:buChar char="•"/>
+            </a:pPr>
+            <a:r>
+              <a:rPr lang="en-US" sz="1800" dirty="0">
+                <a:solidFill>
+                  <a:srgbClr val="333333"/>
+                </a:solidFill>
+                <a:latin typeface="Arial" pitchFamily="34" charset="0"/>
+                <a:ea typeface="Arial" pitchFamily="34" charset="-122"/>
+                <a:cs typeface="Arial" pitchFamily="34" charset="-120"/>
+              </a:rPr>
+              <a:t>Meta-analysis of treatment outcomes.</a:t>
+            </a:r>
+            <a:endParaRPr lang="en-US" sz="1800" dirty="0"/>
+          </a:p>
+          <a:p>
+            <a:pPr marL="342900" indent="-342900">
+              <a:spcAft>
+                <a:spcPts val="800"/>
+              </a:spcAft>
+              <a:buSzPct val="100000"/>
+              <a:buChar char="•"/>
+            </a:pPr>
+            <a:r>
+              <a:rPr lang="en-US" sz="1800" dirty="0">
+                <a:solidFill>
+                  <a:srgbClr val="333333"/>
+                </a:solidFill>
+                <a:latin typeface="Arial" pitchFamily="34" charset="0"/>
+                <a:ea typeface="Arial" pitchFamily="34" charset="-122"/>
+                <a:cs typeface="Arial" pitchFamily="34" charset="-120"/>
+              </a:rPr>
+              <a:t>Primary tumors &gt;2 cm evaluated.</a:t>
             </a:r>
             <a:endParaRPr lang="en-US" sz="1800" dirty="0"/>
           </a:p>
@@ -2917,7 +2959,7 @@
                 <a:ea typeface="Arial" pitchFamily="34" charset="-122"/>
                 <a:cs typeface="Arial" pitchFamily="34" charset="-120"/>
               </a:rPr>
-              <a:t>Focus on hepatocellular carcinoma (HCC) treatment</a:t>
+              <a:t>Focus on hepatocellular carcinoma treatment</a:t>
             </a:r>
             <a:endParaRPr lang="en-US" sz="1800" dirty="0"/>
           </a:p>
@@ -2938,7 +2980,7 @@
                 <a:ea typeface="Arial" pitchFamily="34" charset="-122"/>
                 <a:cs typeface="Arial" pitchFamily="34" charset="-120"/>
               </a:rPr>
-              <a:t>Evaluation of local progression-free survival</a:t>
+              <a:t>Analysis of local progression-free survival</a:t>
             </a:r>
             <a:endParaRPr lang="en-US" sz="1800" dirty="0"/>
           </a:p>
@@ -3216,7 +3258,7 @@
                   </a:extLst>
                 </a:hlinkClick>
               </a:rPr>
-              <a:t>… on interventional therapy and immune checkpoint inhibitors (ICIs) in patients with intermediate-and advanced-stage hepatocellular carcinoma: a systematic review …</a:t>
+              <a:t>Kdm2a histone demethylase ablation restores anti-tumor immunogenicity in liver cancer.</a:t>
             </a:r>
             <a:endParaRPr lang="en-US" sz="2400" dirty="0"/>
           </a:p>
@@ -3252,7 +3294,7 @@
                   <a:srgbClr val="888888"/>
                 </a:solidFill>
               </a:rPr>
-              <a:t>… , Immunotherapy  ·  Systematic Review</a:t>
+              <a:t>British journal of cancer  ·  IF 6.4  ·  Basic Research</a:t>
             </a:r>
             <a:endParaRPr lang="en-US" sz="1000" dirty="0"/>
           </a:p>
@@ -3295,7 +3337,7 @@
                 <a:ea typeface="Arial" pitchFamily="34" charset="-122"/>
                 <a:cs typeface="Arial" pitchFamily="34" charset="-120"/>
               </a:rPr>
-              <a:t>Combination therapy shows promising results in HCC.</a:t>
+              <a:t>KDM2A silencing enhances immune pathways.</a:t>
             </a:r>
             <a:endParaRPr lang="en-US" sz="1800" dirty="0"/>
           </a:p>
@@ -3316,7 +3358,7 @@
                 <a:ea typeface="Arial" pitchFamily="34" charset="-122"/>
                 <a:cs typeface="Arial" pitchFamily="34" charset="-120"/>
               </a:rPr>
-              <a:t>ICIs enhance efficacy of interventional treatments.</a:t>
+              <a:t>High KDM2A correlates with poor tumor differentiation.</a:t>
             </a:r>
             <a:endParaRPr lang="en-US" sz="1800" dirty="0"/>
           </a:p>
@@ -3337,7 +3379,7 @@
                 <a:ea typeface="Arial" pitchFamily="34" charset="-122"/>
                 <a:cs typeface="Arial" pitchFamily="34" charset="-120"/>
               </a:rPr>
-              <a:t>Systematic review highlights clinical outcomes.</a:t>
+              <a:t>Loss of KDM2A increases CD8+ T-cell infiltration.</a:t>
             </a:r>
             <a:endParaRPr lang="en-US" sz="1800" dirty="0"/>
           </a:p>
@@ -3373,7 +3415,7 @@
                   <a:srgbClr val="888888"/>
                 </a:solidFill>
               </a:rPr>
-              <a:t>J Su, Y Su, R Mai. … , Immunotherapy. 2026</a:t>
+              <a:t>Gragnani Laura, Lulli Matteo, Caini Patrizio et al.. British journal of cancer. 2026-08-19 DOI: 10.1038/s41416-026-03566-z</a:t>
             </a:r>
             <a:endParaRPr lang="en-US" sz="800" dirty="0"/>
           </a:p>
@@ -3590,7 +3632,7 @@
                   <a:srgbClr val="FFFFFF"/>
                 </a:solidFill>
               </a:rPr>
-              <a:t>1. **PD-1抑制劑的免疫機制**  </a:t>
+              <a:t>1. **免疫治療的潛力**  </a:t>
             </a:r>
             <a:endParaRPr lang="en-US" sz="1200" dirty="0"/>
           </a:p>
@@ -3607,7 +3649,7 @@
                   <a:srgbClr val="FFFFFF"/>
                 </a:solidFill>
               </a:rPr>
-              <a:t>   PD-1抑制劑不僅透過效應T細胞激活來發揮作用，還能釋放與乙型肝炎病毒相關的B細胞反應，顯示出其在肝細胞癌（HCC）治療中的多重機制。  </a:t>
+              <a:t>   Immune checkpoint inhibitors (ICIs) have demonstrated improved outcomes in advanced hepatocellular carcinoma (HCC) and are being explored in earlier stages, indicating their potential in enhancing survival rates.  </a:t>
             </a:r>
             <a:endParaRPr lang="en-US" sz="1200" dirty="0"/>
           </a:p>
@@ -3624,7 +3666,7 @@
                   <a:srgbClr val="FFFFFF"/>
                 </a:solidFill>
               </a:rPr>
-              <a:t>   **The PD-1 blockade not only activates effector T cells but also unleashes hepatitis B virus-related B cell responses, highlighting its multifaceted mechanisms in HCC treatment.**</a:t>
+              <a:t>   免疫檢查點抑制劑（ICIs）在晚期肝細胞癌（HCC）中顯示出改善預後的潛力，並且正在早期階段進行探索，顯示出提升生存率的可能性。</a:t>
             </a:r>
             <a:endParaRPr lang="en-US" sz="1200" dirty="0"/>
           </a:p>
@@ -3650,7 +3692,7 @@
                   <a:srgbClr val="FFFFFF"/>
                 </a:solidFill>
               </a:rPr>
-              <a:t>2. **治療中斷的競爭風險**  </a:t>
+              <a:t>2. **局部消融與系統治療的結合**  </a:t>
             </a:r>
             <a:endParaRPr lang="en-US" sz="1200" dirty="0"/>
           </a:p>
@@ -3667,7 +3709,7 @@
                   <a:srgbClr val="FFFFFF"/>
                 </a:solidFill>
               </a:rPr>
-              <a:t>   對於不可切除的肝細胞癌，Atezolizumab與Bevacizumab的聯合療法的治療中斷原因多樣，傳統生存終點無法充分捕捉各種原因的時間變化。  </a:t>
+              <a:t>   The combination of local ablation therapies with systemic treatments, such as atezolizumab and bevacizumab, may offer synergistic effects, enhancing treatment efficacy for unresectable HCC.  </a:t>
             </a:r>
             <a:endParaRPr lang="en-US" sz="1200" dirty="0"/>
           </a:p>
@@ -3684,7 +3726,7 @@
                   <a:srgbClr val="FFFFFF"/>
                 </a:solidFill>
               </a:rPr>
-              <a:t>   **The reasons for treatment discontinuation in unresectable HCC patients receiving Atezolizumab plus Bevacizumab are diverse, and conventional survival endpoints fail to capture the time-varying probabilities of each cause.**</a:t>
+              <a:t>   將局部消融療法與系統性治療（如阿特珠單抗和貝伐單抗）結合，可能會產生協同效應，提高無法切除的HCC的治療效果。</a:t>
             </a:r>
             <a:endParaRPr lang="en-US" sz="1200" dirty="0"/>
           </a:p>
@@ -3710,7 +3752,7 @@
                   <a:srgbClr val="FFFFFF"/>
                 </a:solidFill>
               </a:rPr>
-              <a:t>3. **轉化療法的潛力**  </a:t>
+              <a:t>3. **生物標記的預測能力**  </a:t>
             </a:r>
             <a:endParaRPr lang="en-US" sz="1200" dirty="0"/>
           </a:p>
@@ -3727,7 +3769,7 @@
                   <a:srgbClr val="FFFFFF"/>
                 </a:solidFill>
               </a:rPr>
-              <a:t>   結合經動脈化療栓塞（TACE）與PD-1抑制劑的轉化療法顯示出對不可切除中晚期肝細胞癌的潛在益處，提供了新的治療選擇。  </a:t>
+              <a:t>   Baseline circulating and tumor immune features can predict responses to therapies, highlighting the importance of personalized treatment strategies in HCC management.  </a:t>
             </a:r>
             <a:endParaRPr lang="en-US" sz="1200" dirty="0"/>
           </a:p>
@@ -3744,7 +3786,7 @@
                   <a:srgbClr val="FFFFFF"/>
                 </a:solidFill>
               </a:rPr>
-              <a:t>   **Combination therapies involving transarterial chemoembolization (TACE) and PD-1 inhibitors show potential benefits for unresectable intermediate-advanced HCC, offering new treatment options.**</a:t>
+              <a:t>   基線循環和腫瘤免疫特徵可以預測對療法的反應，凸顯了個性化治療策略在HCC管理中的重要性。</a:t>
             </a:r>
             <a:endParaRPr lang="en-US" sz="1200" dirty="0"/>
           </a:p>
@@ -3770,7 +3812,7 @@
                   <a:srgbClr val="FFFFFF"/>
                 </a:solidFill>
               </a:rPr>
-              <a:t>4. **外科手術後的長期生存結果**  </a:t>
+              <a:t>4. **手術時機的重新評估**  </a:t>
             </a:r>
             <a:endParaRPr lang="en-US" sz="1200" dirty="0"/>
           </a:p>
@@ -3787,7 +3829,7 @@
                   <a:srgbClr val="FFFFFF"/>
                 </a:solidFill>
               </a:rPr>
-              <a:t>   在不可切除的肝細胞癌患者中，經過PD-1抑制劑與Lenvatinib的轉化療法後，隨後進行的外科手術顯示出良好的長期生存結果。  </a:t>
+              <a:t>   Resection after systemic therapy may provide additional survival benefits, suggesting a need to reevaluate surgical timing in the treatment of advanced HCC.  </a:t>
             </a:r>
             <a:endParaRPr lang="en-US" sz="1200" dirty="0"/>
           </a:p>
@@ -3804,7 +3846,7 @@
                   <a:srgbClr val="FFFFFF"/>
                 </a:solidFill>
               </a:rPr>
-              <a:t>   **In patients with unresectable HCC, sequential surgery following conversion therapy with PD-1 inhibitors and Lenvatinib demonstrates favorable long-term survival outcomes.**</a:t>
+              <a:t>   在系統治療後進行切除可能提供額外的生存益處，這表明需要重新評估在晚期HCC治療中的手術時機。</a:t>
             </a:r>
             <a:endParaRPr lang="en-US" sz="1200" dirty="0"/>
           </a:p>
@@ -3830,7 +3872,7 @@
                   <a:srgbClr val="FFFFFF"/>
                 </a:solidFill>
               </a:rPr>
-              <a:t>5. **外周免疫動態的預後價值**  </a:t>
+              <a:t>5. **多學科治療的必要性**  </a:t>
             </a:r>
             <a:endParaRPr lang="en-US" sz="1200" dirty="0"/>
           </a:p>
@@ -3847,24 +3889,7 @@
                   <a:srgbClr val="FFFFFF"/>
                 </a:solidFill>
               </a:rPr>
-              <a:t>   外周免疫標記物的靜態和動態變化在接受TACE及免疫檢查點抑制劑的HCC患者中，能預測預後，強調了免疫監測的重要性。  </a:t>
-            </a:r>
-            <a:endParaRPr lang="en-US" sz="1200" dirty="0"/>
-          </a:p>
-          <a:p>
-            <a:pPr indent="0" marL="0">
-              <a:lnSpc>
-                <a:spcPct val="150000"/>
-              </a:lnSpc>
-              <a:buNone/>
-            </a:pPr>
-            <a:r>
-              <a:rPr lang="en-US" sz="1200" dirty="0">
-                <a:solidFill>
-                  <a:srgbClr val="FFFFFF"/>
-                </a:solidFill>
-              </a:rPr>
-              <a:t>   **Peripheral immune markers' static and dynamic changes can predict prognosis in HCC patients receiving TACE and immune checkpoint inhibitors, emphasizing the importance of immune monitoring.**</a:t>
+              <a:t>   A multidisciplinary approach integrating surgery, systemic therapy, and local ablation is essential for optimizing outcomes in patients with advanced HCC.</a:t>
             </a:r>
             <a:endParaRPr lang="en-US" sz="1200" dirty="0"/>
           </a:p>
@@ -4010,7 +4035,7 @@
                   <a:srgbClr val="FFFFFF"/>
                 </a:solidFill>
               </a:rPr>
-              <a:t>### 未來研究方向 (Future Research Directions)</a:t>
+              <a:t>整合外科手術、系統治療和局部消融的多學科方法對於優化晚期HCC患者的治療結果至關重要。</a:t>
             </a:r>
             <a:endParaRPr lang="en-US" sz="1200" dirty="0"/>
           </a:p>
@@ -4036,7 +4061,7 @@
                   <a:srgbClr val="FFFFFF"/>
                 </a:solidFill>
               </a:rPr>
-              <a:t>1. **探索PD-1抑制劑的多重作用**  </a:t>
+              <a:t>### 未來研究方向 (Future Research Directions)</a:t>
             </a:r>
             <a:endParaRPr lang="en-US" sz="1200" dirty="0"/>
           </a:p>
@@ -4047,14 +4072,6 @@
               </a:lnSpc>
               <a:buNone/>
             </a:pPr>
-            <a:r>
-              <a:rPr lang="en-US" sz="1200" dirty="0">
-                <a:solidFill>
-                  <a:srgbClr val="FFFFFF"/>
-                </a:solidFill>
-              </a:rPr>
-              <a:t>   進一步研究PD-1抑制劑在HCC治療中的多重免疫機制，以開發更有效的治療策略。  </a:t>
-            </a:r>
             <a:endParaRPr lang="en-US" sz="1200" dirty="0"/>
           </a:p>
           <a:p>
@@ -4070,7 +4087,7 @@
                   <a:srgbClr val="FFFFFF"/>
                 </a:solidFill>
               </a:rPr>
-              <a:t>   **Further exploration of the multifaceted immune mechanisms of PD-1 inhibitors in HCC treatment is needed to develop more effective therapeutic strategies.**</a:t>
+              <a:t>1. **早期階段免疫治療的臨床試驗**  </a:t>
             </a:r>
             <a:endParaRPr lang="en-US" sz="1200" dirty="0"/>
           </a:p>
@@ -4081,6 +4098,14 @@
               </a:lnSpc>
               <a:buNone/>
             </a:pPr>
+            <a:r>
+              <a:rPr lang="en-US" sz="1200" dirty="0">
+                <a:solidFill>
+                  <a:srgbClr val="FFFFFF"/>
+                </a:solidFill>
+              </a:rPr>
+              <a:t>   Further clinical trials are needed to assess the efficacy of ICIs in early-stage HCC, potentially changing the treatment landscape.  </a:t>
+            </a:r>
             <a:endParaRPr lang="en-US" sz="1200" dirty="0"/>
           </a:p>
           <a:p>
@@ -4096,7 +4121,7 @@
                   <a:srgbClr val="FFFFFF"/>
                 </a:solidFill>
               </a:rPr>
-              <a:t>2. **治療中斷原因的深入分析**  </a:t>
+              <a:t>   需要進一步的臨床試驗來評估ICIs在早期HCC中的療效，這可能會改變治療格局。</a:t>
             </a:r>
             <a:endParaRPr lang="en-US" sz="1200" dirty="0"/>
           </a:p>
@@ -4107,14 +4132,6 @@
               </a:lnSpc>
               <a:buNone/>
             </a:pPr>
-            <a:r>
-              <a:rPr lang="en-US" sz="1200" dirty="0">
-                <a:solidFill>
-                  <a:srgbClr val="FFFFFF"/>
-                </a:solidFill>
-              </a:rPr>
-              <a:t>   針對不可切除HCC患者的治療中斷原因進行深入分析，尋求改善治療持續性的策略。  </a:t>
-            </a:r>
             <a:endParaRPr lang="en-US" sz="1200" dirty="0"/>
           </a:p>
           <a:p>
@@ -4130,7 +4147,7 @@
                   <a:srgbClr val="FFFFFF"/>
                 </a:solidFill>
               </a:rPr>
-              <a:t>   **In-depth analyses of the reasons for treatment discontinuation in unresectable HCC patients are necessary to identify strategies for improving treatment adherence.**</a:t>
+              <a:t>2. **個性化治療的生物標記研究**  </a:t>
             </a:r>
             <a:endParaRPr lang="en-US" sz="1200" dirty="0"/>
           </a:p>
@@ -4141,6 +4158,14 @@
               </a:lnSpc>
               <a:buNone/>
             </a:pPr>
+            <a:r>
+              <a:rPr lang="en-US" sz="1200" dirty="0">
+                <a:solidFill>
+                  <a:srgbClr val="FFFFFF"/>
+                </a:solidFill>
+              </a:rPr>
+              <a:t>   Investigating biomarkers for predicting treatment responses will be crucial for developing personalized therapeutic strategies in HCC.  </a:t>
+            </a:r>
             <a:endParaRPr lang="en-US" sz="1200" dirty="0"/>
           </a:p>
           <a:p>
@@ -4156,7 +4181,7 @@
                   <a:srgbClr val="FFFFFF"/>
                 </a:solidFill>
               </a:rPr>
-              <a:t>3. **轉化療法的長期隨訪研究**  </a:t>
+              <a:t>   研究預測治療反應的生物標記將對開發HCC的個性化治療策略至關重要。</a:t>
             </a:r>
             <a:endParaRPr lang="en-US" sz="1200" dirty="0"/>
           </a:p>
@@ -4167,14 +4192,6 @@
               </a:lnSpc>
               <a:buNone/>
             </a:pPr>
-            <a:r>
-              <a:rPr lang="en-US" sz="1200" dirty="0">
-                <a:solidFill>
-                  <a:srgbClr val="FFFFFF"/>
-                </a:solidFill>
-              </a:rPr>
-              <a:t>   進行長期隨訪研究，以評估轉化療法（如TACE與PD-1抑制劑聯合療法）的持續效果及其對生存率的影響。  </a:t>
-            </a:r>
             <a:endParaRPr lang="en-US" sz="1200" dirty="0"/>
           </a:p>
           <a:p>
@@ -4190,7 +4207,7 @@
                   <a:srgbClr val="FFFFFF"/>
                 </a:solidFill>
               </a:rPr>
-              <a:t>   **Long-term follow-up studies are needed to assess the sustained effects of conversion therapies (e.g., TACE combined with PD-1 inhibitors) and their impact on survival rates.**</a:t>
+              <a:t>3. **局部消融技術的優化**  </a:t>
             </a:r>
             <a:endParaRPr lang="en-US" sz="1200" dirty="0"/>
           </a:p>
@@ -4201,6 +4218,14 @@
               </a:lnSpc>
               <a:buNone/>
             </a:pPr>
+            <a:r>
+              <a:rPr lang="en-US" sz="1200" dirty="0">
+                <a:solidFill>
+                  <a:srgbClr val="FFFFFF"/>
+                </a:solidFill>
+              </a:rPr>
+              <a:t>   Future studies should focus on optimizing local ablation techniques and their combinations with systemic therapies to maximize patient outcomes.  </a:t>
+            </a:r>
             <a:endParaRPr lang="en-US" sz="1200" dirty="0"/>
           </a:p>
           <a:p>
@@ -4216,7 +4241,7 @@
                   <a:srgbClr val="FFFFFF"/>
                 </a:solidFill>
               </a:rPr>
-              <a:t>4. **個體化免疫監測的發展**  </a:t>
+              <a:t>   未來的研究應集中於優化局部消融技術及其與系統性療法的結合，以最大化患者的治療結果。</a:t>
             </a:r>
             <a:endParaRPr lang="en-US" sz="1200" dirty="0"/>
           </a:p>
@@ -4227,14 +4252,6 @@
               </a:lnSpc>
               <a:buNone/>
             </a:pPr>
-            <a:r>
-              <a:rPr lang="en-US" sz="1200" dirty="0">
-                <a:solidFill>
-                  <a:srgbClr val="FFFFFF"/>
-                </a:solidFill>
-              </a:rPr>
-              <a:t>   發展個體化的免疫監測方法，以便更好地預測HCC患者對不同治療的反應。  </a:t>
-            </a:r>
             <a:endParaRPr lang="en-US" sz="1200" dirty="0"/>
           </a:p>
           <a:p>
@@ -4250,7 +4267,7 @@
                   <a:srgbClr val="FFFFFF"/>
                 </a:solidFill>
               </a:rPr>
-              <a:t>   **The development of personalized immune monitoring methods is essential to better predict HCC patients' responses to various treatments.**</a:t>
+              <a:t>4. **多學科治療模式的評估**  </a:t>
             </a:r>
             <a:endParaRPr lang="en-US" sz="1200" dirty="0"/>
           </a:p>
@@ -4261,6 +4278,14 @@
               </a:lnSpc>
               <a:buNone/>
             </a:pPr>
+            <a:r>
+              <a:rPr lang="en-US" sz="1200" dirty="0">
+                <a:solidFill>
+                  <a:srgbClr val="FFFFFF"/>
+                </a:solidFill>
+              </a:rPr>
+              <a:t>   Evaluating the effectiveness of multidisciplinary treatment approaches in HCC management will provide insights into best practices and improve patient care.  </a:t>
+            </a:r>
             <a:endParaRPr lang="en-US" sz="1200" dirty="0"/>
           </a:p>
           <a:p>
@@ -4276,7 +4301,7 @@
                   <a:srgbClr val="FFFFFF"/>
                 </a:solidFill>
               </a:rPr>
-              <a:t>5. **標準化後線治療的共識建立**  </a:t>
+              <a:t>   評估多學科治療模式在HCC管理中的有效性將提供最佳實踐的見解並改善患者護理。</a:t>
             </a:r>
             <a:endParaRPr lang="en-US" sz="1200" dirty="0"/>
           </a:p>
@@ -4287,14 +4312,6 @@
               </a:lnSpc>
               <a:buNone/>
             </a:pPr>
-            <a:r>
-              <a:rPr lang="en-US" sz="1200" dirty="0">
-                <a:solidFill>
-                  <a:srgbClr val="FFFFFF"/>
-                </a:solidFill>
-              </a:rPr>
-              <a:t>   在HCC的後線治療中建立標準化的共識，以應對一線治療失敗後的臨床挑戰。  </a:t>
-            </a:r>
             <a:endParaRPr lang="en-US" sz="1200" dirty="0"/>
           </a:p>
           <a:p>
@@ -4310,7 +4327,41 @@
                   <a:srgbClr val="FFFFFF"/>
                 </a:solidFill>
               </a:rPr>
-              <a:t>   **Establishing a standardized consensus for later-line therapies in HCC is crucial to address clinical challenges following first-line treatment failures.**</a:t>
+              <a:t>5. **免疫逃逸機制的深入研究**  </a:t>
+            </a:r>
+            <a:endParaRPr lang="en-US" sz="1200" dirty="0"/>
+          </a:p>
+          <a:p>
+            <a:pPr indent="0" marL="0">
+              <a:lnSpc>
+                <a:spcPct val="150000"/>
+              </a:lnSpc>
+              <a:buNone/>
+            </a:pPr>
+            <a:r>
+              <a:rPr lang="en-US" sz="1200" dirty="0">
+                <a:solidFill>
+                  <a:srgbClr val="FFFFFF"/>
+                </a:solidFill>
+              </a:rPr>
+              <a:t>   Understanding the mechanisms of immune evasion in liver cancer will be essential for developing new therapeutic strategies that enhance the efficacy of existing treatments.  </a:t>
+            </a:r>
+            <a:endParaRPr lang="en-US" sz="1200" dirty="0"/>
+          </a:p>
+          <a:p>
+            <a:pPr indent="0" marL="0">
+              <a:lnSpc>
+                <a:spcPct val="150000"/>
+              </a:lnSpc>
+              <a:buNone/>
+            </a:pPr>
+            <a:r>
+              <a:rPr lang="en-US" sz="1200" dirty="0">
+                <a:solidFill>
+                  <a:srgbClr val="FFFFFF"/>
+                </a:solidFill>
+              </a:rPr>
+              <a:t>   理解肝癌中的免疫逃逸機制對於開發增強現有治療效果的新療法至關重要。</a:t>
             </a:r>
             <a:endParaRPr lang="en-US" sz="1200" dirty="0"/>
           </a:p>
@@ -4544,7 +4595,7 @@
                 <a:ea typeface="Arial" pitchFamily="34" charset="-122"/>
                 <a:cs typeface="Arial" pitchFamily="34" charset="-120"/>
               </a:rPr>
-              <a:t>PD-1 blockade unleashes local hepatitis B virus-related B cell response inhibiti…</a:t>
+              <a:t>Liver resection after atezolizumab and bevacizumab versus maintenance therapy fo…</a:t>
             </a:r>
             <a:endParaRPr lang="en-US" sz="1400" dirty="0"/>
           </a:p>
@@ -4581,7 +4632,7 @@
                 <a:ea typeface="Arial" pitchFamily="34" charset="-122"/>
                 <a:cs typeface="Arial" pitchFamily="34" charset="-120"/>
               </a:rPr>
-              <a:t>Competing risks of treatment discontinuation of atezolizumab plus bevacizumab in…</a:t>
+              <a:t>Integrating efficacy and safety profile in advanced HCC: A network meta-analysis…</a:t>
             </a:r>
             <a:endParaRPr lang="en-US" sz="1400" dirty="0"/>
           </a:p>
@@ -4618,7 +4669,7 @@
                 <a:ea typeface="Arial" pitchFamily="34" charset="-122"/>
                 <a:cs typeface="Arial" pitchFamily="34" charset="-120"/>
               </a:rPr>
-              <a:t>… plus transarterial chemoembolization and PD-1 inhibitors as conversion therapi…</a:t>
+              <a:t>Adjuvant and neoadjuvant therapies in HCC: Time to go perioperative?</a:t>
             </a:r>
             <a:endParaRPr lang="en-US" sz="1400" dirty="0"/>
           </a:p>
@@ -4655,7 +4706,7 @@
                 <a:ea typeface="Arial" pitchFamily="34" charset="-122"/>
                 <a:cs typeface="Arial" pitchFamily="34" charset="-120"/>
               </a:rPr>
-              <a:t>… (PD-1 inhibitor) plus lenvatinib as conversion therapy followed by sequential …</a:t>
+              <a:t>Baseline circulating and tumor &amp;#x3b3;&amp;#x3b4; T cells and early circulating CD8&amp;…</a:t>
             </a:r>
             <a:endParaRPr lang="en-US" sz="1400" dirty="0"/>
           </a:p>
@@ -4692,7 +4743,7 @@
                 <a:ea typeface="Arial" pitchFamily="34" charset="-122"/>
                 <a:cs typeface="Arial" pitchFamily="34" charset="-120"/>
               </a:rPr>
-              <a:t>Peripheral immune dynamics during treatment predict prognosis in HCC receiving T…</a:t>
+              <a:t>… plus transarterial chemoembolization and PD-1 inhibitors as conversion therapi…</a:t>
             </a:r>
             <a:endParaRPr lang="en-US" sz="1400" dirty="0"/>
           </a:p>
@@ -4729,7 +4780,7 @@
                 <a:ea typeface="Arial" pitchFamily="34" charset="-122"/>
                 <a:cs typeface="Arial" pitchFamily="34" charset="-120"/>
               </a:rPr>
-              <a:t>Consensus on standardized later-line systemic therapy for hepatocellular carcino…</a:t>
+              <a:t>… (PD-1 inhibitor) plus lenvatinib as conversion therapy followed by sequential …</a:t>
             </a:r>
             <a:endParaRPr lang="en-US" sz="1400" dirty="0"/>
           </a:p>
@@ -4766,7 +4817,7 @@
                 <a:ea typeface="Arial" pitchFamily="34" charset="-122"/>
                 <a:cs typeface="Arial" pitchFamily="34" charset="-120"/>
               </a:rPr>
-              <a:t>Cryoablation versus radiofrequency ablation for hepatocellular carcinoma: a syst…</a:t>
+              <a:t>A Case of Unresectable Hepatocellular Carcinoma Responding to Durvalumab Plus Tr…</a:t>
             </a:r>
             <a:endParaRPr lang="en-US" sz="1400" dirty="0"/>
           </a:p>
@@ -4877,7 +4928,7 @@
                 <a:ea typeface="Arial" pitchFamily="34" charset="-122"/>
                 <a:cs typeface="Arial" pitchFamily="34" charset="-120"/>
               </a:rPr>
-              <a:t>… on interventional therapy and immune checkpoint inhibitors (ICIs) in patients …</a:t>
+              <a:t>Kdm2a histone demethylase ablation restores anti-tumor immunogenicity in liver c…</a:t>
             </a:r>
             <a:endParaRPr lang="en-US" sz="1400" dirty="0"/>
           </a:p>
@@ -5032,7 +5083,7 @@
                   </a:extLst>
                 </a:hlinkClick>
               </a:rPr>
-              <a:t>PD-1 blockade unleashes local hepatitis B virus-related B cell response inhibiting hepatocellular carcinoma.</a:t>
+              <a:t>Liver resection after atezolizumab and bevacizumab versus maintenance therapy for locally advanced hepatocellular carcinoma (TALENTOP): a multicentre, open-label, randomised, phase 3 trial.</a:t>
             </a:r>
             <a:endParaRPr lang="en-US" sz="2400" dirty="0"/>
           </a:p>
@@ -5068,7 +5119,7 @@
                   <a:srgbClr val="888888"/>
                 </a:solidFill>
               </a:rPr>
-              <a:t>Cancer cell  ·  IF 48.8  ·  RCT Phase 2</a:t>
+              <a:t>Lancet (London, England)  ·  IF 41.6  ·  RCT Phase 3</a:t>
             </a:r>
             <a:endParaRPr lang="en-US" sz="1000" dirty="0"/>
           </a:p>
@@ -5111,7 +5162,7 @@
                 <a:ea typeface="Arial" pitchFamily="34" charset="-122"/>
                 <a:cs typeface="Arial" pitchFamily="34" charset="-120"/>
               </a:rPr>
-              <a:t>Study on PD-1 therapy in HCC patients</a:t>
+              <a:t>Surgery improves time to treatment failure.</a:t>
             </a:r>
             <a:endParaRPr lang="en-US" sz="1800" dirty="0"/>
           </a:p>
@@ -5132,7 +5183,7 @@
                 <a:ea typeface="Arial" pitchFamily="34" charset="-122"/>
                 <a:cs typeface="Arial" pitchFamily="34" charset="-120"/>
               </a:rPr>
-              <a:t>Identified T cell and B cell responses</a:t>
+              <a:t>Study involved 489 treatment-naive patients.</a:t>
             </a:r>
             <a:endParaRPr lang="en-US" sz="1800" dirty="0"/>
           </a:p>
@@ -5153,49 +5204,7 @@
                 <a:ea typeface="Arial" pitchFamily="34" charset="-122"/>
                 <a:cs typeface="Arial" pitchFamily="34" charset="-120"/>
               </a:rPr>
-              <a:t>HBcAg triggers local B cell activation</a:t>
-            </a:r>
-            <a:endParaRPr lang="en-US" sz="1800" dirty="0"/>
-          </a:p>
-          <a:p>
-            <a:pPr marL="342900" indent="-342900">
-              <a:spcAft>
-                <a:spcPts val="800"/>
-              </a:spcAft>
-              <a:buSzPct val="100000"/>
-              <a:buChar char="•"/>
-            </a:pPr>
-            <a:r>
-              <a:rPr lang="en-US" sz="1800" dirty="0">
-                <a:solidFill>
-                  <a:srgbClr val="333333"/>
-                </a:solidFill>
-                <a:latin typeface="Arial" pitchFamily="34" charset="0"/>
-                <a:ea typeface="Arial" pitchFamily="34" charset="-122"/>
-                <a:cs typeface="Arial" pitchFamily="34" charset="-120"/>
-              </a:rPr>
-              <a:t>Complement activation enhances anti-tumor effect</a:t>
-            </a:r>
-            <a:endParaRPr lang="en-US" sz="1800" dirty="0"/>
-          </a:p>
-          <a:p>
-            <a:pPr marL="342900" indent="-342900">
-              <a:spcAft>
-                <a:spcPts val="800"/>
-              </a:spcAft>
-              <a:buSzPct val="100000"/>
-              <a:buChar char="•"/>
-            </a:pPr>
-            <a:r>
-              <a:rPr lang="en-US" sz="1800" dirty="0">
-                <a:solidFill>
-                  <a:srgbClr val="333333"/>
-                </a:solidFill>
-                <a:latin typeface="Arial" pitchFamily="34" charset="0"/>
-                <a:ea typeface="Arial" pitchFamily="34" charset="-122"/>
-                <a:cs typeface="Arial" pitchFamily="34" charset="-120"/>
-              </a:rPr>
-              <a:t>B cell immunity boosts anti-PD-1 efficacy</a:t>
+              <a:t>Adverse events were more common in surgery group.</a:t>
             </a:r>
             <a:endParaRPr lang="en-US" sz="1800" dirty="0"/>
           </a:p>
@@ -5231,7 +5240,7 @@
                   <a:srgbClr val="888888"/>
                 </a:solidFill>
               </a:rPr>
-              <a:t>Chen Shuling, Wang Yuanqi, Chen Jingying et al.. Cancer cell. 2026-08-10 DOI: 10.1016/j.ccell.2026.06.010</a:t>
+              <a:t>Sun Hui-Chuan, Zhu Xiao-Dong, Shen Feng et al.. Lancet (London, England). 2026-08-20 DOI: 10.1016/S0140-6736(26)01252-3</a:t>
             </a:r>
             <a:endParaRPr lang="en-US" sz="800" dirty="0"/>
           </a:p>
@@ -5431,7 +5440,7 @@
                   </a:extLst>
                 </a:hlinkClick>
               </a:rPr>
-              <a:t>Competing risks of treatment discontinuation of atezolizumab plus bevacizumab in unresectable hepatocellular carcinoma.</a:t>
+              <a:t>Integrating efficacy and safety profile in advanced HCC: A network meta-analysis of first-line systemic therapies.</a:t>
             </a:r>
             <a:endParaRPr lang="en-US" sz="2400" dirty="0"/>
           </a:p>
@@ -5467,7 +5476,7 @@
                   <a:srgbClr val="888888"/>
                 </a:solidFill>
               </a:rPr>
-              <a:t>JHEP reports : innovation in hepatology  ·  IF 7.8  ·  Retrospective Study  ·  🌏 Asia</a:t>
+              <a:t>JNCI cancer spectrum  ·  RCT Phase 3  ·  🌏 Asia</a:t>
             </a:r>
             <a:endParaRPr lang="en-US" sz="1000" dirty="0"/>
           </a:p>
@@ -5510,7 +5519,7 @@
                 <a:ea typeface="Arial" pitchFamily="34" charset="-122"/>
                 <a:cs typeface="Arial" pitchFamily="34" charset="-120"/>
               </a:rPr>
-              <a:t>Atezolizumab plus bevacizumab is standard therapy.</a:t>
+              <a:t>Network meta-analysis of first-line therapies</a:t>
             </a:r>
             <a:endParaRPr lang="en-US" sz="1800" dirty="0"/>
           </a:p>
@@ -5531,7 +5540,7 @@
                 <a:ea typeface="Arial" pitchFamily="34" charset="-122"/>
                 <a:cs typeface="Arial" pitchFamily="34" charset="-120"/>
               </a:rPr>
-              <a:t>Discontinuation reasons include PD and AEs.</a:t>
+              <a:t>Seventeen studies with 12,727 patients analyzed</a:t>
             </a:r>
             <a:endParaRPr lang="en-US" sz="1800" dirty="0"/>
           </a:p>
@@ -5552,7 +5561,49 @@
                 <a:ea typeface="Arial" pitchFamily="34" charset="-122"/>
                 <a:cs typeface="Arial" pitchFamily="34" charset="-120"/>
               </a:rPr>
-              <a:t>AFP and ALBI predict discontinuation causes.</a:t>
+              <a:t>Nivolumab-Ipilimumab shows best overall survival</a:t>
+            </a:r>
+            <a:endParaRPr lang="en-US" sz="1800" dirty="0"/>
+          </a:p>
+          <a:p>
+            <a:pPr marL="342900" indent="-342900">
+              <a:spcAft>
+                <a:spcPts val="800"/>
+              </a:spcAft>
+              <a:buSzPct val="100000"/>
+              <a:buChar char="•"/>
+            </a:pPr>
+            <a:r>
+              <a:rPr lang="en-US" sz="1800" dirty="0">
+                <a:solidFill>
+                  <a:srgbClr val="333333"/>
+                </a:solidFill>
+                <a:latin typeface="Arial" pitchFamily="34" charset="0"/>
+                <a:ea typeface="Arial" pitchFamily="34" charset="-122"/>
+                <a:cs typeface="Arial" pitchFamily="34" charset="-120"/>
+              </a:rPr>
+              <a:t>Subgroup analysis highlights treatment variations</a:t>
+            </a:r>
+            <a:endParaRPr lang="en-US" sz="1800" dirty="0"/>
+          </a:p>
+          <a:p>
+            <a:pPr marL="342900" indent="-342900">
+              <a:spcAft>
+                <a:spcPts val="800"/>
+              </a:spcAft>
+              <a:buSzPct val="100000"/>
+              <a:buChar char="•"/>
+            </a:pPr>
+            <a:r>
+              <a:rPr lang="en-US" sz="1800" dirty="0">
+                <a:solidFill>
+                  <a:srgbClr val="333333"/>
+                </a:solidFill>
+                <a:latin typeface="Arial" pitchFamily="34" charset="0"/>
+                <a:ea typeface="Arial" pitchFamily="34" charset="-122"/>
+                <a:cs typeface="Arial" pitchFamily="34" charset="-120"/>
+              </a:rPr>
+              <a:t>Emphasizes need for personalized HCC management</a:t>
             </a:r>
             <a:endParaRPr lang="en-US" sz="1800" dirty="0"/>
           </a:p>
@@ -5588,7 +5639,7 @@
                   <a:srgbClr val="888888"/>
                 </a:solidFill>
               </a:rPr>
-              <a:t>Suda Goki, Sho Takuya, Abe Tamami et al.. JHEP reports : innovation in hepatology. 2026-08-11 DOI: 10.1016/j.jhepr.2026.101988</a:t>
+              <a:t>Chua Wei Yu, Zhao Joseph J, Lee Choong-Kun et al.. JNCI cancer spectrum. 2026-08-21 DOI: 10.1093/jncics/pkag084</a:t>
             </a:r>
             <a:endParaRPr lang="en-US" sz="800" dirty="0"/>
           </a:p>
@@ -5788,7 +5839,7 @@
                   </a:extLst>
                 </a:hlinkClick>
               </a:rPr>
-              <a:t>… plus transarterial chemoembolization and PD-1 inhibitors as conversion therapies for unresectable intermediate-advanced hepatocellular carcinoma: a phase 2 trial …</a:t>
+              <a:t>Adjuvant and neoadjuvant therapies in HCC: Time to go perioperative?</a:t>
             </a:r>
             <a:endParaRPr lang="en-US" sz="2400" dirty="0"/>
           </a:p>
@@ -5824,7 +5875,7 @@
                   <a:srgbClr val="888888"/>
                 </a:solidFill>
               </a:rPr>
-              <a:t>… and Targeted Therapy  ·  RCT Phase 2</a:t>
+              <a:t>iScience  ·  RCT Phase 3</a:t>
             </a:r>
             <a:endParaRPr lang="en-US" sz="1000" dirty="0"/>
           </a:p>
@@ -5867,7 +5918,7 @@
                 <a:ea typeface="Arial" pitchFamily="34" charset="-122"/>
                 <a:cs typeface="Arial" pitchFamily="34" charset="-120"/>
               </a:rPr>
-              <a:t>Combination of TACE and PD-1 inhibitors</a:t>
+              <a:t>HCC has high recurrence rates post-treatment.</a:t>
             </a:r>
             <a:endParaRPr lang="en-US" sz="1800" dirty="0"/>
           </a:p>
@@ -5888,7 +5939,7 @@
                 <a:ea typeface="Arial" pitchFamily="34" charset="-122"/>
                 <a:cs typeface="Arial" pitchFamily="34" charset="-120"/>
               </a:rPr>
-              <a:t>Phase 2 trial for uHCC patients</a:t>
+              <a:t>ICIs show promise in advanced HCC stages.</a:t>
             </a:r>
             <a:endParaRPr lang="en-US" sz="1800" dirty="0"/>
           </a:p>
@@ -5909,7 +5960,49 @@
                 <a:ea typeface="Arial" pitchFamily="34" charset="-122"/>
                 <a:cs typeface="Arial" pitchFamily="34" charset="-120"/>
               </a:rPr>
-              <a:t>Evaluated efficacy versus TACE alone</a:t>
+              <a:t>Neoadjuvant therapies enhance immune response.</a:t>
+            </a:r>
+            <a:endParaRPr lang="en-US" sz="1800" dirty="0"/>
+          </a:p>
+          <a:p>
+            <a:pPr marL="342900" indent="-342900">
+              <a:spcAft>
+                <a:spcPts val="800"/>
+              </a:spcAft>
+              <a:buSzPct val="100000"/>
+              <a:buChar char="•"/>
+            </a:pPr>
+            <a:r>
+              <a:rPr lang="en-US" sz="1800" dirty="0">
+                <a:solidFill>
+                  <a:srgbClr val="333333"/>
+                </a:solidFill>
+                <a:latin typeface="Arial" pitchFamily="34" charset="0"/>
+                <a:ea typeface="Arial" pitchFamily="34" charset="-122"/>
+                <a:cs typeface="Arial" pitchFamily="34" charset="-120"/>
+              </a:rPr>
+              <a:t>Perioperative strategies may improve outcomes.</a:t>
+            </a:r>
+            <a:endParaRPr lang="en-US" sz="1800" dirty="0"/>
+          </a:p>
+          <a:p>
+            <a:pPr marL="342900" indent="-342900">
+              <a:spcAft>
+                <a:spcPts val="800"/>
+              </a:spcAft>
+              <a:buSzPct val="100000"/>
+              <a:buChar char="•"/>
+            </a:pPr>
+            <a:r>
+              <a:rPr lang="en-US" sz="1800" dirty="0">
+                <a:solidFill>
+                  <a:srgbClr val="333333"/>
+                </a:solidFill>
+                <a:latin typeface="Arial" pitchFamily="34" charset="0"/>
+                <a:ea typeface="Arial" pitchFamily="34" charset="-122"/>
+                <a:cs typeface="Arial" pitchFamily="34" charset="-120"/>
+              </a:rPr>
+              <a:t>Challenges include patient selection and toxicity.</a:t>
             </a:r>
             <a:endParaRPr lang="en-US" sz="1800" dirty="0"/>
           </a:p>
@@ -5945,7 +6038,7 @@
                   <a:srgbClr val="888888"/>
                 </a:solidFill>
               </a:rPr>
-              <a:t>X Zhang, H Cai, W Peng. … and Targeted Therapy. 2026</a:t>
+              <a:t>Pantzios Spyridon, Germanidis Georgios, Elefsiniotis Ioannis. iScience. 2026-08-20 DOI: 10.1016/j.isci.2026.117084</a:t>
             </a:r>
             <a:endParaRPr lang="en-US" sz="800" dirty="0"/>
           </a:p>
@@ -6145,7 +6238,7 @@
                   </a:extLst>
                 </a:hlinkClick>
               </a:rPr>
-              <a:t>… (PD-1 inhibitor) plus lenvatinib as conversion therapy followed by sequential surgery (SILENSES) for advanced unresectable hepatocellular carcinoma: a phase II …</a:t>
+              <a:t>Baseline circulating and tumor &amp;#x3b3;&amp;#x3b4; T cells and early circulating CD8&amp;#x207a;PD1&amp;#x207a; expansion predict response to Atezolizumab-bevacizumab in HCC.</a:t>
             </a:r>
             <a:endParaRPr lang="en-US" sz="2400" dirty="0"/>
           </a:p>
@@ -6181,7 +6274,7 @@
                   <a:srgbClr val="888888"/>
                 </a:solidFill>
               </a:rPr>
-              <a:t>… and Targeted Therapy  ·  RCT Phase 2</a:t>
+              <a:t>Clinical cancer research : an official journal of the American Association for Cancer Research  ·  IF 11.5  ·  Prospective Study</a:t>
             </a:r>
             <a:endParaRPr lang="en-US" sz="1000" dirty="0"/>
           </a:p>
@@ -6224,7 +6317,7 @@
                 <a:ea typeface="Arial" pitchFamily="34" charset="-122"/>
                 <a:cs typeface="Arial" pitchFamily="34" charset="-120"/>
               </a:rPr>
-              <a:t>Study evaluates PD-1 inhibitor plus lenvatinib</a:t>
+              <a:t>High baseline γδ T cells predict better outcomes.</a:t>
             </a:r>
             <a:endParaRPr lang="en-US" sz="1800" dirty="0"/>
           </a:p>
@@ -6245,7 +6338,7 @@
                 <a:ea typeface="Arial" pitchFamily="34" charset="-122"/>
                 <a:cs typeface="Arial" pitchFamily="34" charset="-120"/>
               </a:rPr>
-              <a:t>Focus on advanced unresectable HCC patients</a:t>
+              <a:t>Early CD8+PD-1+ expansion linked to longer PFS.</a:t>
             </a:r>
             <a:endParaRPr lang="en-US" sz="1800" dirty="0"/>
           </a:p>
@@ -6266,49 +6359,7 @@
                 <a:ea typeface="Arial" pitchFamily="34" charset="-122"/>
                 <a:cs typeface="Arial" pitchFamily="34" charset="-120"/>
               </a:rPr>
-              <a:t>Sequential surgery after conversion therapy</a:t>
-            </a:r>
-            <a:endParaRPr lang="en-US" sz="1800" dirty="0"/>
-          </a:p>
-          <a:p>
-            <a:pPr marL="342900" indent="-342900">
-              <a:spcAft>
-                <a:spcPts val="800"/>
-              </a:spcAft>
-              <a:buSzPct val="100000"/>
-              <a:buChar char="•"/>
-            </a:pPr>
-            <a:r>
-              <a:rPr lang="en-US" sz="1800" dirty="0">
-                <a:solidFill>
-                  <a:srgbClr val="333333"/>
-                </a:solidFill>
-                <a:latin typeface="Arial" pitchFamily="34" charset="0"/>
-                <a:ea typeface="Arial" pitchFamily="34" charset="-122"/>
-                <a:cs typeface="Arial" pitchFamily="34" charset="-120"/>
-              </a:rPr>
-              <a:t>Long-term survival outcomes assessed</a:t>
-            </a:r>
-            <a:endParaRPr lang="en-US" sz="1800" dirty="0"/>
-          </a:p>
-          <a:p>
-            <a:pPr marL="342900" indent="-342900">
-              <a:spcAft>
-                <a:spcPts val="800"/>
-              </a:spcAft>
-              <a:buSzPct val="100000"/>
-              <a:buChar char="•"/>
-            </a:pPr>
-            <a:r>
-              <a:rPr lang="en-US" sz="1800" dirty="0">
-                <a:solidFill>
-                  <a:srgbClr val="333333"/>
-                </a:solidFill>
-                <a:latin typeface="Arial" pitchFamily="34" charset="0"/>
-                <a:ea typeface="Arial" pitchFamily="34" charset="-122"/>
-                <a:cs typeface="Arial" pitchFamily="34" charset="-120"/>
-              </a:rPr>
-              <a:t>Phase II trial results presented</a:t>
+              <a:t>Increased CD8+TIGIT+ cells indicate treatment resistance.</a:t>
             </a:r>
             <a:endParaRPr lang="en-US" sz="1800" dirty="0"/>
           </a:p>
@@ -6344,7 +6395,7 @@
                   <a:srgbClr val="888888"/>
                 </a:solidFill>
               </a:rPr>
-              <a:t>S Lu, W Zhang, J Li. … and Targeted Therapy. 2026</a:t>
+              <a:t>Galy-Fauroux Isabelle, Asif-Laidin Amna, Evain Manon et al.. Clinical cancer research : an official journal of the American Association for Cancer Research. 2026-08-17 DOI: 10.1158/1078-0432.CCR-26-1102</a:t>
             </a:r>
             <a:endParaRPr lang="en-US" sz="800" dirty="0"/>
           </a:p>
@@ -6544,7 +6595,7 @@
                   </a:extLst>
                 </a:hlinkClick>
               </a:rPr>
-              <a:t>Peripheral immune dynamics during treatment predict prognosis in HCC receiving TACE plus ICIs and anti-VEGF/TKIs.</a:t>
+              <a:t>… plus transarterial chemoembolization and PD-1 inhibitors as conversion therapies for unresectable intermediate-advanced hepatocellular carcinoma: a phase 2 trial …</a:t>
             </a:r>
             <a:endParaRPr lang="en-US" sz="2400" dirty="0"/>
           </a:p>
@@ -6580,7 +6631,7 @@
                   <a:srgbClr val="888888"/>
                 </a:solidFill>
               </a:rPr>
-              <a:t>Clinical &amp; translational immunology  ·  Retrospective Study  ·  🌏 Asia</a:t>
+              <a:t>… and Targeted Therapy  ·  RCT Phase 2</a:t>
             </a:r>
             <a:endParaRPr lang="en-US" sz="1000" dirty="0"/>
           </a:p>
@@ -6623,7 +6674,7 @@
                 <a:ea typeface="Arial" pitchFamily="34" charset="-122"/>
                 <a:cs typeface="Arial" pitchFamily="34" charset="-120"/>
               </a:rPr>
-              <a:t>Study evaluates immune markers in HCC treatment.</a:t>
+              <a:t>Combination therapy for unresectable HCC</a:t>
             </a:r>
             <a:endParaRPr lang="en-US" sz="1800" dirty="0"/>
           </a:p>
@@ -6644,7 +6695,7 @@
                 <a:ea typeface="Arial" pitchFamily="34" charset="-122"/>
                 <a:cs typeface="Arial" pitchFamily="34" charset="-120"/>
               </a:rPr>
-              <a:t>Patients received TACE plus ICIs and anti-VEGF/TKIs.</a:t>
+              <a:t>Transarterial chemoembolization (TACE) used</a:t>
             </a:r>
             <a:endParaRPr lang="en-US" sz="1800" dirty="0"/>
           </a:p>
@@ -6665,7 +6716,7 @@
                 <a:ea typeface="Arial" pitchFamily="34" charset="-122"/>
                 <a:cs typeface="Arial" pitchFamily="34" charset="-120"/>
               </a:rPr>
-              <a:t>Dynamic immune changes predict overall survival.</a:t>
+              <a:t>PD-1 inhibitors enhance treatment efficacy</a:t>
             </a:r>
             <a:endParaRPr lang="en-US" sz="1800" dirty="0"/>
           </a:p>
@@ -6686,7 +6737,7 @@
                 <a:ea typeface="Arial" pitchFamily="34" charset="-122"/>
                 <a:cs typeface="Arial" pitchFamily="34" charset="-120"/>
               </a:rPr>
-              <a:t>Prognostic nomogram developed from immune data.</a:t>
+              <a:t>Phase 2 trial demonstrates promising results</a:t>
             </a:r>
             <a:endParaRPr lang="en-US" sz="1800" dirty="0"/>
           </a:p>
@@ -6707,7 +6758,7 @@
                 <a:ea typeface="Arial" pitchFamily="34" charset="-122"/>
                 <a:cs typeface="Arial" pitchFamily="34" charset="-120"/>
               </a:rPr>
-              <a:t>Three immune dynamic subtypes identified for prognosis.</a:t>
+              <a:t>Potential for conversion to resectable disease</a:t>
             </a:r>
             <a:endParaRPr lang="en-US" sz="1800" dirty="0"/>
           </a:p>
@@ -6743,7 +6794,7 @@
                   <a:srgbClr val="888888"/>
                 </a:solidFill>
               </a:rPr>
-              <a:t>Qin Lihao, Zhu Linzhou, Yang Hao et al.. Clinical &amp; translational immunology. 2026-08-16 DOI: 10.1002/cti2.70115</a:t>
+              <a:t>X Zhang, H Cai, W Peng. … and Targeted Therapy. 2026</a:t>
             </a:r>
             <a:endParaRPr lang="en-US" sz="800" dirty="0"/>
           </a:p>
@@ -6943,7 +6994,7 @@
                   </a:extLst>
                 </a:hlinkClick>
               </a:rPr>
-              <a:t>Consensus on standardized later-line systemic therapy for hepatocellular carcinoma.</a:t>
+              <a:t>… (PD-1 inhibitor) plus lenvatinib as conversion therapy followed by sequential surgery (SILENSES) for advanced unresectable hepatocellular carcinoma: a phase II …</a:t>
             </a:r>
             <a:endParaRPr lang="en-US" sz="2400" dirty="0"/>
           </a:p>
@@ -6979,7 +7030,7 @@
                   <a:srgbClr val="888888"/>
                 </a:solidFill>
               </a:rPr>
-              <a:t>Drug resistance updates : reviews and commentaries in antimicrobial and anticancer chemotherapy  ·  Review  ·  🌏 Asia</a:t>
+              <a:t>… and Targeted Therapy  ·  RCT Phase 2</a:t>
             </a:r>
             <a:endParaRPr lang="en-US" sz="1000" dirty="0"/>
           </a:p>
@@ -7022,7 +7073,7 @@
                 <a:ea typeface="Arial" pitchFamily="34" charset="-122"/>
                 <a:cs typeface="Arial" pitchFamily="34" charset="-120"/>
               </a:rPr>
-              <a:t>Standardized consensus for later-line therapy established.</a:t>
+              <a:t>Study evaluates PD-1 inhibitor plus lenvatinib</a:t>
             </a:r>
             <a:endParaRPr lang="en-US" sz="1800" dirty="0"/>
           </a:p>
@@ -7043,7 +7094,7 @@
                 <a:ea typeface="Arial" pitchFamily="34" charset="-122"/>
                 <a:cs typeface="Arial" pitchFamily="34" charset="-120"/>
               </a:rPr>
-              <a:t>Addresses issues after targeted therapy failure.</a:t>
+              <a:t>Focus on unresectable hepatocellular carcinoma</a:t>
             </a:r>
             <a:endParaRPr lang="en-US" sz="1800" dirty="0"/>
           </a:p>
@@ -7064,7 +7115,49 @@
                 <a:ea typeface="Arial" pitchFamily="34" charset="-122"/>
                 <a:cs typeface="Arial" pitchFamily="34" charset="-120"/>
               </a:rPr>
-              <a:t>Proposes unified evaluation criteria and recommendations.</a:t>
+              <a:t>Sequential surgery improves long-term survival</a:t>
+            </a:r>
+            <a:endParaRPr lang="en-US" sz="1800" dirty="0"/>
+          </a:p>
+          <a:p>
+            <a:pPr marL="342900" indent="-342900">
+              <a:spcAft>
+                <a:spcPts val="800"/>
+              </a:spcAft>
+              <a:buSzPct val="100000"/>
+              <a:buChar char="•"/>
+            </a:pPr>
+            <a:r>
+              <a:rPr lang="en-US" sz="1800" dirty="0">
+                <a:solidFill>
+                  <a:srgbClr val="333333"/>
+                </a:solidFill>
+                <a:latin typeface="Arial" pitchFamily="34" charset="0"/>
+                <a:ea typeface="Arial" pitchFamily="34" charset="-122"/>
+                <a:cs typeface="Arial" pitchFamily="34" charset="-120"/>
+              </a:rPr>
+              <a:t>Phase II trial with promising results</a:t>
+            </a:r>
+            <a:endParaRPr lang="en-US" sz="1800" dirty="0"/>
+          </a:p>
+          <a:p>
+            <a:pPr marL="342900" indent="-342900">
+              <a:spcAft>
+                <a:spcPts val="800"/>
+              </a:spcAft>
+              <a:buSzPct val="100000"/>
+              <a:buChar char="•"/>
+            </a:pPr>
+            <a:r>
+              <a:rPr lang="en-US" sz="1800" dirty="0">
+                <a:solidFill>
+                  <a:srgbClr val="333333"/>
+                </a:solidFill>
+                <a:latin typeface="Arial" pitchFamily="34" charset="0"/>
+                <a:ea typeface="Arial" pitchFamily="34" charset="-122"/>
+                <a:cs typeface="Arial" pitchFamily="34" charset="-120"/>
+              </a:rPr>
+              <a:t>Potential new standard for advanced HCC</a:t>
             </a:r>
             <a:endParaRPr lang="en-US" sz="1800" dirty="0"/>
           </a:p>
@@ -7100,7 +7193,7 @@
                   <a:srgbClr val="888888"/>
                 </a:solidFill>
               </a:rPr>
-              <a:t>Yu Hongli, Cheng Jiamin, Xia Feng et al.. Drug resistance updates : reviews and commentaries in antimicrobial and anticancer chemotherapy. 2026-08-14 DOI: 10.1016/j.drup.2026.101468</a:t>
+              <a:t>S Lu, W Zhang, J Li. … and Targeted Therapy. 2026</a:t>
             </a:r>
             <a:endParaRPr lang="en-US" sz="800" dirty="0"/>
           </a:p>
@@ -7300,7 +7393,7 @@
                   </a:extLst>
                 </a:hlinkClick>
               </a:rPr>
-              <a:t>Cryoablation versus radiofrequency ablation for hepatocellular carcinoma: a systematic review and meta-analysis.</a:t>
+              <a:t>A Case of Unresectable Hepatocellular Carcinoma Responding to Durvalumab Plus Tremelimumab after Lenvatinib Treatment.</a:t>
             </a:r>
             <a:endParaRPr lang="en-US" sz="2400" dirty="0"/>
           </a:p>
@@ -7336,7 +7429,7 @@
                   <a:srgbClr val="888888"/>
                 </a:solidFill>
               </a:rPr>
-              <a:t>International journal of hyperthermia : the official journal of European Society for Hyperthermic Oncology, North American Hyperthermia Group  ·  Meta-Analysis</a:t>
+              <a:t>Internal medicine (Tokyo, Japan)  ·  🌏 Asia</a:t>
             </a:r>
             <a:endParaRPr lang="en-US" sz="1000" dirty="0"/>
           </a:p>
@@ -7379,7 +7472,7 @@
                 <a:ea typeface="Arial" pitchFamily="34" charset="-122"/>
                 <a:cs typeface="Arial" pitchFamily="34" charset="-120"/>
               </a:rPr>
-              <a:t>Cryoablation shows higher complete ablation rate.</a:t>
+              <a:t>Case of unresectable HCC reported</a:t>
             </a:r>
             <a:endParaRPr lang="en-US" sz="1800" dirty="0"/>
           </a:p>
@@ -7400,7 +7493,7 @@
                 <a:ea typeface="Arial" pitchFamily="34" charset="-122"/>
                 <a:cs typeface="Arial" pitchFamily="34" charset="-120"/>
               </a:rPr>
-              <a:t>Lower intraoperative pain with cryoablation.</a:t>
+              <a:t>Durvalumab plus tremelimumab used</a:t>
             </a:r>
             <a:endParaRPr lang="en-US" sz="1800" dirty="0"/>
           </a:p>
@@ -7421,7 +7514,7 @@
                 <a:ea typeface="Arial" pitchFamily="34" charset="-122"/>
                 <a:cs typeface="Arial" pitchFamily="34" charset="-120"/>
               </a:rPr>
-              <a:t>Comparable progression-free survival between treatments.</a:t>
+              <a:t>Patient previously intolerant to lenvatinib</a:t>
             </a:r>
             <a:endParaRPr lang="en-US" sz="1800" dirty="0"/>
           </a:p>
@@ -7442,7 +7535,7 @@
                 <a:ea typeface="Arial" pitchFamily="34" charset="-122"/>
                 <a:cs typeface="Arial" pitchFamily="34" charset="-120"/>
               </a:rPr>
-              <a:t>No significant overall survival difference observed.</a:t>
+              <a:t>Tumor markers increased then normalized</a:t>
             </a:r>
             <a:endParaRPr lang="en-US" sz="1800" dirty="0"/>
           </a:p>
@@ -7463,7 +7556,7 @@
                 <a:ea typeface="Arial" pitchFamily="34" charset="-122"/>
                 <a:cs typeface="Arial" pitchFamily="34" charset="-120"/>
               </a:rPr>
-              <a:t>Safety profiles are similar for both techniques.</a:t>
+              <a:t>Radiological shrinkage observed without new lesions</a:t>
             </a:r>
             <a:endParaRPr lang="en-US" sz="1800" dirty="0"/>
           </a:p>
@@ -7499,7 +7592,7 @@
                   <a:srgbClr val="888888"/>
                 </a:solidFill>
               </a:rPr>
-              <a:t>Mao Kui, Wang Youqing, Yao Weijun et al.. International journal of hyperthermia : the official journal of European Society for Hyperthermic Oncology, North American Hyperthermia Group. 2026-08-13 DOI: 10.1080/02656736.2026.2713200</a:t>
+              <a:t>Sueda Saki, Kawaoka Tomokazu, Fujii Yasutoshi et al.. Internal medicine (Tokyo, Japan). 2026-08-19 DOI: 10.2169/internalmedicine.7369-26</a:t>
             </a:r>
             <a:endParaRPr lang="en-US" sz="800" dirty="0"/>
           </a:p>

--- a/docs/digest-en.pptx
+++ b/docs/digest-en.pptx
@@ -2269,7 +2269,7 @@
                   <a:srgbClr val="888888"/>
                 </a:solidFill>
               </a:rPr>
-              <a:t>2026-08-17 — 2026-08-24</a:t>
+              <a:t>2026-08-24 — 2026-08-31</a:t>
             </a:r>
             <a:endParaRPr lang="en-US" sz="1400" dirty="0"/>
           </a:p>
@@ -2539,91 +2539,7 @@
                 <a:ea typeface="Arial" pitchFamily="34" charset="-122"/>
                 <a:cs typeface="Arial" pitchFamily="34" charset="-120"/>
               </a:rPr>
-              <a:t>Cryoablation shows effective local control.</a:t>
-            </a:r>
-            <a:endParaRPr lang="en-US" sz="1800" dirty="0"/>
-          </a:p>
-          <a:p>
-            <a:pPr marL="342900" indent="-342900">
-              <a:spcAft>
-                <a:spcPts val="800"/>
-              </a:spcAft>
-              <a:buSzPct val="100000"/>
-              <a:buChar char="•"/>
-            </a:pPr>
-            <a:r>
-              <a:rPr lang="en-US" sz="1800" dirty="0">
-                <a:solidFill>
-                  <a:srgbClr val="333333"/>
-                </a:solidFill>
-                <a:latin typeface="Arial" pitchFamily="34" charset="0"/>
-                <a:ea typeface="Arial" pitchFamily="34" charset="-122"/>
-                <a:cs typeface="Arial" pitchFamily="34" charset="-120"/>
-              </a:rPr>
-              <a:t>Comparison with radiofrequency ablation.</a:t>
-            </a:r>
-            <a:endParaRPr lang="en-US" sz="1800" dirty="0"/>
-          </a:p>
-          <a:p>
-            <a:pPr marL="342900" indent="-342900">
-              <a:spcAft>
-                <a:spcPts val="800"/>
-              </a:spcAft>
-              <a:buSzPct val="100000"/>
-              <a:buChar char="•"/>
-            </a:pPr>
-            <a:r>
-              <a:rPr lang="en-US" sz="1800" dirty="0">
-                <a:solidFill>
-                  <a:srgbClr val="333333"/>
-                </a:solidFill>
-                <a:latin typeface="Arial" pitchFamily="34" charset="0"/>
-                <a:ea typeface="Arial" pitchFamily="34" charset="-122"/>
-                <a:cs typeface="Arial" pitchFamily="34" charset="-120"/>
-              </a:rPr>
-              <a:t>Focus on early-stage hepatocellular carcinoma.</a:t>
-            </a:r>
-            <a:endParaRPr lang="en-US" sz="1800" dirty="0"/>
-          </a:p>
-          <a:p>
-            <a:pPr marL="342900" indent="-342900">
-              <a:spcAft>
-                <a:spcPts val="800"/>
-              </a:spcAft>
-              <a:buSzPct val="100000"/>
-              <a:buChar char="•"/>
-            </a:pPr>
-            <a:r>
-              <a:rPr lang="en-US" sz="1800" dirty="0">
-                <a:solidFill>
-                  <a:srgbClr val="333333"/>
-                </a:solidFill>
-                <a:latin typeface="Arial" pitchFamily="34" charset="0"/>
-                <a:ea typeface="Arial" pitchFamily="34" charset="-122"/>
-                <a:cs typeface="Arial" pitchFamily="34" charset="-120"/>
-              </a:rPr>
-              <a:t>Meta-analysis of treatment outcomes.</a:t>
-            </a:r>
-            <a:endParaRPr lang="en-US" sz="1800" dirty="0"/>
-          </a:p>
-          <a:p>
-            <a:pPr marL="342900" indent="-342900">
-              <a:spcAft>
-                <a:spcPts val="800"/>
-              </a:spcAft>
-              <a:buSzPct val="100000"/>
-              <a:buChar char="•"/>
-            </a:pPr>
-            <a:r>
-              <a:rPr lang="en-US" sz="1800" dirty="0">
-                <a:solidFill>
-                  <a:srgbClr val="333333"/>
-                </a:solidFill>
-                <a:latin typeface="Arial" pitchFamily="34" charset="0"/>
-                <a:ea typeface="Arial" pitchFamily="34" charset="-122"/>
-                <a:cs typeface="Arial" pitchFamily="34" charset="-120"/>
-              </a:rPr>
-              <a:t>Primary tumors &gt;2 cm evaluated.</a:t>
+              <a:t>(Generation failed)</a:t>
             </a:r>
             <a:endParaRPr lang="en-US" sz="1800" dirty="0"/>
           </a:p>
@@ -2859,7 +2775,7 @@
                   </a:extLst>
                 </a:hlinkClick>
               </a:rPr>
-              <a:t>Radiotherapy versus local ablation therapy for the treatment of hepatocellular carcinoma: A systematic review and meta-analysis.</a:t>
+              <a:t>External beam radiotherapy versus local ablation therapy for the treatment of hepatocellular carcinoma: a systematic review and meta-analysis</a:t>
             </a:r>
             <a:endParaRPr lang="en-US" sz="2400" dirty="0"/>
           </a:p>
@@ -2895,7 +2811,7 @@
                   <a:srgbClr val="888888"/>
                 </a:solidFill>
               </a:rPr>
-              <a:t>Journal of Clinical …  ·  Meta-Analysis</a:t>
+              <a:t>Clinical and Molecular …  ·  Meta-Analysis</a:t>
             </a:r>
             <a:endParaRPr lang="en-US" sz="1000" dirty="0"/>
           </a:p>
@@ -2938,91 +2854,7 @@
                 <a:ea typeface="Arial" pitchFamily="34" charset="-122"/>
                 <a:cs typeface="Arial" pitchFamily="34" charset="-120"/>
               </a:rPr>
-              <a:t>Comparison of radiotherapy and local ablation</a:t>
-            </a:r>
-            <a:endParaRPr lang="en-US" sz="1800" dirty="0"/>
-          </a:p>
-          <a:p>
-            <a:pPr marL="342900" indent="-342900">
-              <a:spcAft>
-                <a:spcPts val="800"/>
-              </a:spcAft>
-              <a:buSzPct val="100000"/>
-              <a:buChar char="•"/>
-            </a:pPr>
-            <a:r>
-              <a:rPr lang="en-US" sz="1800" dirty="0">
-                <a:solidFill>
-                  <a:srgbClr val="333333"/>
-                </a:solidFill>
-                <a:latin typeface="Arial" pitchFamily="34" charset="0"/>
-                <a:ea typeface="Arial" pitchFamily="34" charset="-122"/>
-                <a:cs typeface="Arial" pitchFamily="34" charset="-120"/>
-              </a:rPr>
-              <a:t>Focus on hepatocellular carcinoma treatment</a:t>
-            </a:r>
-            <a:endParaRPr lang="en-US" sz="1800" dirty="0"/>
-          </a:p>
-          <a:p>
-            <a:pPr marL="342900" indent="-342900">
-              <a:spcAft>
-                <a:spcPts val="800"/>
-              </a:spcAft>
-              <a:buSzPct val="100000"/>
-              <a:buChar char="•"/>
-            </a:pPr>
-            <a:r>
-              <a:rPr lang="en-US" sz="1800" dirty="0">
-                <a:solidFill>
-                  <a:srgbClr val="333333"/>
-                </a:solidFill>
-                <a:latin typeface="Arial" pitchFamily="34" charset="0"/>
-                <a:ea typeface="Arial" pitchFamily="34" charset="-122"/>
-                <a:cs typeface="Arial" pitchFamily="34" charset="-120"/>
-              </a:rPr>
-              <a:t>Analysis of local progression-free survival</a:t>
-            </a:r>
-            <a:endParaRPr lang="en-US" sz="1800" dirty="0"/>
-          </a:p>
-          <a:p>
-            <a:pPr marL="342900" indent="-342900">
-              <a:spcAft>
-                <a:spcPts val="800"/>
-              </a:spcAft>
-              <a:buSzPct val="100000"/>
-              <a:buChar char="•"/>
-            </a:pPr>
-            <a:r>
-              <a:rPr lang="en-US" sz="1800" dirty="0">
-                <a:solidFill>
-                  <a:srgbClr val="333333"/>
-                </a:solidFill>
-                <a:latin typeface="Arial" pitchFamily="34" charset="0"/>
-                <a:ea typeface="Arial" pitchFamily="34" charset="-122"/>
-                <a:cs typeface="Arial" pitchFamily="34" charset="-120"/>
-              </a:rPr>
-              <a:t>Inclusion of radiofrequency and microwave ablation</a:t>
-            </a:r>
-            <a:endParaRPr lang="en-US" sz="1800" dirty="0"/>
-          </a:p>
-          <a:p>
-            <a:pPr marL="342900" indent="-342900">
-              <a:spcAft>
-                <a:spcPts val="800"/>
-              </a:spcAft>
-              <a:buSzPct val="100000"/>
-              <a:buChar char="•"/>
-            </a:pPr>
-            <a:r>
-              <a:rPr lang="en-US" sz="1800" dirty="0">
-                <a:solidFill>
-                  <a:srgbClr val="333333"/>
-                </a:solidFill>
-                <a:latin typeface="Arial" pitchFamily="34" charset="0"/>
-                <a:ea typeface="Arial" pitchFamily="34" charset="-122"/>
-                <a:cs typeface="Arial" pitchFamily="34" charset="-120"/>
-              </a:rPr>
-              <a:t>Systematic review and meta-analysis conducted</a:t>
+              <a:t>(Generation failed)</a:t>
             </a:r>
             <a:endParaRPr lang="en-US" sz="1800" dirty="0"/>
           </a:p>
@@ -3058,7 +2890,7 @@
                   <a:srgbClr val="888888"/>
                 </a:solidFill>
               </a:rPr>
-              <a:t>SH Bae, SH Choi, SM Yoon. Journal of Clinical …. 2026</a:t>
+              <a:t>SH Bae, SH Choi, SM Yoon. Clinical and Molecular …</a:t>
             </a:r>
             <a:endParaRPr lang="en-US" sz="800" dirty="0"/>
           </a:p>
@@ -3258,7 +3090,7 @@
                   </a:extLst>
                 </a:hlinkClick>
               </a:rPr>
-              <a:t>Kdm2a histone demethylase ablation restores anti-tumor immunogenicity in liver cancer.</a:t>
+              <a:t>Defining the role of minimally invasive surgical thermal ablation in liver malignancies: A systematic review and meta-analysis of outcomes and reporting …</a:t>
             </a:r>
             <a:endParaRPr lang="en-US" sz="2400" dirty="0"/>
           </a:p>
@@ -3294,7 +3126,7 @@
                   <a:srgbClr val="888888"/>
                 </a:solidFill>
               </a:rPr>
-              <a:t>British journal of cancer  ·  IF 6.4  ·  Basic Research</a:t>
+              <a:t>European Journal of …  ·  Meta-Analysis</a:t>
             </a:r>
             <a:endParaRPr lang="en-US" sz="1000" dirty="0"/>
           </a:p>
@@ -3337,49 +3169,7 @@
                 <a:ea typeface="Arial" pitchFamily="34" charset="-122"/>
                 <a:cs typeface="Arial" pitchFamily="34" charset="-120"/>
               </a:rPr>
-              <a:t>KDM2A silencing enhances immune pathways.</a:t>
-            </a:r>
-            <a:endParaRPr lang="en-US" sz="1800" dirty="0"/>
-          </a:p>
-          <a:p>
-            <a:pPr marL="342900" indent="-342900">
-              <a:spcAft>
-                <a:spcPts val="800"/>
-              </a:spcAft>
-              <a:buSzPct val="100000"/>
-              <a:buChar char="•"/>
-            </a:pPr>
-            <a:r>
-              <a:rPr lang="en-US" sz="1800" dirty="0">
-                <a:solidFill>
-                  <a:srgbClr val="333333"/>
-                </a:solidFill>
-                <a:latin typeface="Arial" pitchFamily="34" charset="0"/>
-                <a:ea typeface="Arial" pitchFamily="34" charset="-122"/>
-                <a:cs typeface="Arial" pitchFamily="34" charset="-120"/>
-              </a:rPr>
-              <a:t>High KDM2A correlates with poor tumor differentiation.</a:t>
-            </a:r>
-            <a:endParaRPr lang="en-US" sz="1800" dirty="0"/>
-          </a:p>
-          <a:p>
-            <a:pPr marL="342900" indent="-342900">
-              <a:spcAft>
-                <a:spcPts val="800"/>
-              </a:spcAft>
-              <a:buSzPct val="100000"/>
-              <a:buChar char="•"/>
-            </a:pPr>
-            <a:r>
-              <a:rPr lang="en-US" sz="1800" dirty="0">
-                <a:solidFill>
-                  <a:srgbClr val="333333"/>
-                </a:solidFill>
-                <a:latin typeface="Arial" pitchFamily="34" charset="0"/>
-                <a:ea typeface="Arial" pitchFamily="34" charset="-122"/>
-                <a:cs typeface="Arial" pitchFamily="34" charset="-120"/>
-              </a:rPr>
-              <a:t>Loss of KDM2A increases CD8+ T-cell infiltration.</a:t>
+              <a:t>(Generation failed)</a:t>
             </a:r>
             <a:endParaRPr lang="en-US" sz="1800" dirty="0"/>
           </a:p>
@@ -3415,7 +3205,7 @@
                   <a:srgbClr val="888888"/>
                 </a:solidFill>
               </a:rPr>
-              <a:t>Gragnani Laura, Lulli Matteo, Caini Patrizio et al.. British journal of cancer. 2026-08-19 DOI: 10.1038/s41416-026-03566-z</a:t>
+              <a:t>G Scotton, F Notte, HC Pommergaard…. European Journal of …. 2026</a:t>
             </a:r>
             <a:endParaRPr lang="en-US" sz="800" dirty="0"/>
           </a:p>
@@ -3606,290 +3396,7 @@
                   <a:srgbClr val="FFFFFF"/>
                 </a:solidFill>
               </a:rPr>
-              <a:t>### 綜合啟示 (Overall Insights)</a:t>
-            </a:r>
-            <a:endParaRPr lang="en-US" sz="1200" dirty="0"/>
-          </a:p>
-          <a:p>
-            <a:pPr indent="0" marL="0">
-              <a:lnSpc>
-                <a:spcPct val="150000"/>
-              </a:lnSpc>
-              <a:buNone/>
-            </a:pPr>
-            <a:endParaRPr lang="en-US" sz="1200" dirty="0"/>
-          </a:p>
-          <a:p>
-            <a:pPr indent="0" marL="0">
-              <a:lnSpc>
-                <a:spcPct val="150000"/>
-              </a:lnSpc>
-              <a:buNone/>
-            </a:pPr>
-            <a:r>
-              <a:rPr lang="en-US" sz="1200" dirty="0">
-                <a:solidFill>
-                  <a:srgbClr val="FFFFFF"/>
-                </a:solidFill>
-              </a:rPr>
-              <a:t>1. **免疫治療的潛力**  </a:t>
-            </a:r>
-            <a:endParaRPr lang="en-US" sz="1200" dirty="0"/>
-          </a:p>
-          <a:p>
-            <a:pPr indent="0" marL="0">
-              <a:lnSpc>
-                <a:spcPct val="150000"/>
-              </a:lnSpc>
-              <a:buNone/>
-            </a:pPr>
-            <a:r>
-              <a:rPr lang="en-US" sz="1200" dirty="0">
-                <a:solidFill>
-                  <a:srgbClr val="FFFFFF"/>
-                </a:solidFill>
-              </a:rPr>
-              <a:t>   Immune checkpoint inhibitors (ICIs) have demonstrated improved outcomes in advanced hepatocellular carcinoma (HCC) and are being explored in earlier stages, indicating their potential in enhancing survival rates.  </a:t>
-            </a:r>
-            <a:endParaRPr lang="en-US" sz="1200" dirty="0"/>
-          </a:p>
-          <a:p>
-            <a:pPr indent="0" marL="0">
-              <a:lnSpc>
-                <a:spcPct val="150000"/>
-              </a:lnSpc>
-              <a:buNone/>
-            </a:pPr>
-            <a:r>
-              <a:rPr lang="en-US" sz="1200" dirty="0">
-                <a:solidFill>
-                  <a:srgbClr val="FFFFFF"/>
-                </a:solidFill>
-              </a:rPr>
-              <a:t>   免疫檢查點抑制劑（ICIs）在晚期肝細胞癌（HCC）中顯示出改善預後的潛力，並且正在早期階段進行探索，顯示出提升生存率的可能性。</a:t>
-            </a:r>
-            <a:endParaRPr lang="en-US" sz="1200" dirty="0"/>
-          </a:p>
-          <a:p>
-            <a:pPr indent="0" marL="0">
-              <a:lnSpc>
-                <a:spcPct val="150000"/>
-              </a:lnSpc>
-              <a:buNone/>
-            </a:pPr>
-            <a:endParaRPr lang="en-US" sz="1200" dirty="0"/>
-          </a:p>
-          <a:p>
-            <a:pPr indent="0" marL="0">
-              <a:lnSpc>
-                <a:spcPct val="150000"/>
-              </a:lnSpc>
-              <a:buNone/>
-            </a:pPr>
-            <a:r>
-              <a:rPr lang="en-US" sz="1200" dirty="0">
-                <a:solidFill>
-                  <a:srgbClr val="FFFFFF"/>
-                </a:solidFill>
-              </a:rPr>
-              <a:t>2. **局部消融與系統治療的結合**  </a:t>
-            </a:r>
-            <a:endParaRPr lang="en-US" sz="1200" dirty="0"/>
-          </a:p>
-          <a:p>
-            <a:pPr indent="0" marL="0">
-              <a:lnSpc>
-                <a:spcPct val="150000"/>
-              </a:lnSpc>
-              <a:buNone/>
-            </a:pPr>
-            <a:r>
-              <a:rPr lang="en-US" sz="1200" dirty="0">
-                <a:solidFill>
-                  <a:srgbClr val="FFFFFF"/>
-                </a:solidFill>
-              </a:rPr>
-              <a:t>   The combination of local ablation therapies with systemic treatments, such as atezolizumab and bevacizumab, may offer synergistic effects, enhancing treatment efficacy for unresectable HCC.  </a:t>
-            </a:r>
-            <a:endParaRPr lang="en-US" sz="1200" dirty="0"/>
-          </a:p>
-          <a:p>
-            <a:pPr indent="0" marL="0">
-              <a:lnSpc>
-                <a:spcPct val="150000"/>
-              </a:lnSpc>
-              <a:buNone/>
-            </a:pPr>
-            <a:r>
-              <a:rPr lang="en-US" sz="1200" dirty="0">
-                <a:solidFill>
-                  <a:srgbClr val="FFFFFF"/>
-                </a:solidFill>
-              </a:rPr>
-              <a:t>   將局部消融療法與系統性治療（如阿特珠單抗和貝伐單抗）結合，可能會產生協同效應，提高無法切除的HCC的治療效果。</a:t>
-            </a:r>
-            <a:endParaRPr lang="en-US" sz="1200" dirty="0"/>
-          </a:p>
-          <a:p>
-            <a:pPr indent="0" marL="0">
-              <a:lnSpc>
-                <a:spcPct val="150000"/>
-              </a:lnSpc>
-              <a:buNone/>
-            </a:pPr>
-            <a:endParaRPr lang="en-US" sz="1200" dirty="0"/>
-          </a:p>
-          <a:p>
-            <a:pPr indent="0" marL="0">
-              <a:lnSpc>
-                <a:spcPct val="150000"/>
-              </a:lnSpc>
-              <a:buNone/>
-            </a:pPr>
-            <a:r>
-              <a:rPr lang="en-US" sz="1200" dirty="0">
-                <a:solidFill>
-                  <a:srgbClr val="FFFFFF"/>
-                </a:solidFill>
-              </a:rPr>
-              <a:t>3. **生物標記的預測能力**  </a:t>
-            </a:r>
-            <a:endParaRPr lang="en-US" sz="1200" dirty="0"/>
-          </a:p>
-          <a:p>
-            <a:pPr indent="0" marL="0">
-              <a:lnSpc>
-                <a:spcPct val="150000"/>
-              </a:lnSpc>
-              <a:buNone/>
-            </a:pPr>
-            <a:r>
-              <a:rPr lang="en-US" sz="1200" dirty="0">
-                <a:solidFill>
-                  <a:srgbClr val="FFFFFF"/>
-                </a:solidFill>
-              </a:rPr>
-              <a:t>   Baseline circulating and tumor immune features can predict responses to therapies, highlighting the importance of personalized treatment strategies in HCC management.  </a:t>
-            </a:r>
-            <a:endParaRPr lang="en-US" sz="1200" dirty="0"/>
-          </a:p>
-          <a:p>
-            <a:pPr indent="0" marL="0">
-              <a:lnSpc>
-                <a:spcPct val="150000"/>
-              </a:lnSpc>
-              <a:buNone/>
-            </a:pPr>
-            <a:r>
-              <a:rPr lang="en-US" sz="1200" dirty="0">
-                <a:solidFill>
-                  <a:srgbClr val="FFFFFF"/>
-                </a:solidFill>
-              </a:rPr>
-              <a:t>   基線循環和腫瘤免疫特徵可以預測對療法的反應，凸顯了個性化治療策略在HCC管理中的重要性。</a:t>
-            </a:r>
-            <a:endParaRPr lang="en-US" sz="1200" dirty="0"/>
-          </a:p>
-          <a:p>
-            <a:pPr indent="0" marL="0">
-              <a:lnSpc>
-                <a:spcPct val="150000"/>
-              </a:lnSpc>
-              <a:buNone/>
-            </a:pPr>
-            <a:endParaRPr lang="en-US" sz="1200" dirty="0"/>
-          </a:p>
-          <a:p>
-            <a:pPr indent="0" marL="0">
-              <a:lnSpc>
-                <a:spcPct val="150000"/>
-              </a:lnSpc>
-              <a:buNone/>
-            </a:pPr>
-            <a:r>
-              <a:rPr lang="en-US" sz="1200" dirty="0">
-                <a:solidFill>
-                  <a:srgbClr val="FFFFFF"/>
-                </a:solidFill>
-              </a:rPr>
-              <a:t>4. **手術時機的重新評估**  </a:t>
-            </a:r>
-            <a:endParaRPr lang="en-US" sz="1200" dirty="0"/>
-          </a:p>
-          <a:p>
-            <a:pPr indent="0" marL="0">
-              <a:lnSpc>
-                <a:spcPct val="150000"/>
-              </a:lnSpc>
-              <a:buNone/>
-            </a:pPr>
-            <a:r>
-              <a:rPr lang="en-US" sz="1200" dirty="0">
-                <a:solidFill>
-                  <a:srgbClr val="FFFFFF"/>
-                </a:solidFill>
-              </a:rPr>
-              <a:t>   Resection after systemic therapy may provide additional survival benefits, suggesting a need to reevaluate surgical timing in the treatment of advanced HCC.  </a:t>
-            </a:r>
-            <a:endParaRPr lang="en-US" sz="1200" dirty="0"/>
-          </a:p>
-          <a:p>
-            <a:pPr indent="0" marL="0">
-              <a:lnSpc>
-                <a:spcPct val="150000"/>
-              </a:lnSpc>
-              <a:buNone/>
-            </a:pPr>
-            <a:r>
-              <a:rPr lang="en-US" sz="1200" dirty="0">
-                <a:solidFill>
-                  <a:srgbClr val="FFFFFF"/>
-                </a:solidFill>
-              </a:rPr>
-              <a:t>   在系統治療後進行切除可能提供額外的生存益處，這表明需要重新評估在晚期HCC治療中的手術時機。</a:t>
-            </a:r>
-            <a:endParaRPr lang="en-US" sz="1200" dirty="0"/>
-          </a:p>
-          <a:p>
-            <a:pPr indent="0" marL="0">
-              <a:lnSpc>
-                <a:spcPct val="150000"/>
-              </a:lnSpc>
-              <a:buNone/>
-            </a:pPr>
-            <a:endParaRPr lang="en-US" sz="1200" dirty="0"/>
-          </a:p>
-          <a:p>
-            <a:pPr indent="0" marL="0">
-              <a:lnSpc>
-                <a:spcPct val="150000"/>
-              </a:lnSpc>
-              <a:buNone/>
-            </a:pPr>
-            <a:r>
-              <a:rPr lang="en-US" sz="1200" dirty="0">
-                <a:solidFill>
-                  <a:srgbClr val="FFFFFF"/>
-                </a:solidFill>
-              </a:rPr>
-              <a:t>5. **多學科治療的必要性**  </a:t>
-            </a:r>
-            <a:endParaRPr lang="en-US" sz="1200" dirty="0"/>
-          </a:p>
-          <a:p>
-            <a:pPr indent="0" marL="0">
-              <a:lnSpc>
-                <a:spcPct val="150000"/>
-              </a:lnSpc>
-              <a:buNone/>
-            </a:pPr>
-            <a:r>
-              <a:rPr lang="en-US" sz="1200" dirty="0">
-                <a:solidFill>
-                  <a:srgbClr val="FFFFFF"/>
-                </a:solidFill>
-              </a:rPr>
-              <a:t>   A multidisciplinary approach integrating surgery, systemic therapy, and local ablation is essential for optimizing outcomes in patients with advanced HCC.</a:t>
+              <a:t>(Generati</a:t>
             </a:r>
             <a:endParaRPr lang="en-US" sz="1200" dirty="0"/>
           </a:p>
@@ -4035,333 +3542,7 @@
                   <a:srgbClr val="FFFFFF"/>
                 </a:solidFill>
               </a:rPr>
-              <a:t>整合外科手術、系統治療和局部消融的多學科方法對於優化晚期HCC患者的治療結果至關重要。</a:t>
-            </a:r>
-            <a:endParaRPr lang="en-US" sz="1200" dirty="0"/>
-          </a:p>
-          <a:p>
-            <a:pPr indent="0" marL="0">
-              <a:lnSpc>
-                <a:spcPct val="150000"/>
-              </a:lnSpc>
-              <a:buNone/>
-            </a:pPr>
-            <a:endParaRPr lang="en-US" sz="1200" dirty="0"/>
-          </a:p>
-          <a:p>
-            <a:pPr indent="0" marL="0">
-              <a:lnSpc>
-                <a:spcPct val="150000"/>
-              </a:lnSpc>
-              <a:buNone/>
-            </a:pPr>
-            <a:r>
-              <a:rPr lang="en-US" sz="1200" dirty="0">
-                <a:solidFill>
-                  <a:srgbClr val="FFFFFF"/>
-                </a:solidFill>
-              </a:rPr>
-              <a:t>### 未來研究方向 (Future Research Directions)</a:t>
-            </a:r>
-            <a:endParaRPr lang="en-US" sz="1200" dirty="0"/>
-          </a:p>
-          <a:p>
-            <a:pPr indent="0" marL="0">
-              <a:lnSpc>
-                <a:spcPct val="150000"/>
-              </a:lnSpc>
-              <a:buNone/>
-            </a:pPr>
-            <a:endParaRPr lang="en-US" sz="1200" dirty="0"/>
-          </a:p>
-          <a:p>
-            <a:pPr indent="0" marL="0">
-              <a:lnSpc>
-                <a:spcPct val="150000"/>
-              </a:lnSpc>
-              <a:buNone/>
-            </a:pPr>
-            <a:r>
-              <a:rPr lang="en-US" sz="1200" dirty="0">
-                <a:solidFill>
-                  <a:srgbClr val="FFFFFF"/>
-                </a:solidFill>
-              </a:rPr>
-              <a:t>1. **早期階段免疫治療的臨床試驗**  </a:t>
-            </a:r>
-            <a:endParaRPr lang="en-US" sz="1200" dirty="0"/>
-          </a:p>
-          <a:p>
-            <a:pPr indent="0" marL="0">
-              <a:lnSpc>
-                <a:spcPct val="150000"/>
-              </a:lnSpc>
-              <a:buNone/>
-            </a:pPr>
-            <a:r>
-              <a:rPr lang="en-US" sz="1200" dirty="0">
-                <a:solidFill>
-                  <a:srgbClr val="FFFFFF"/>
-                </a:solidFill>
-              </a:rPr>
-              <a:t>   Further clinical trials are needed to assess the efficacy of ICIs in early-stage HCC, potentially changing the treatment landscape.  </a:t>
-            </a:r>
-            <a:endParaRPr lang="en-US" sz="1200" dirty="0"/>
-          </a:p>
-          <a:p>
-            <a:pPr indent="0" marL="0">
-              <a:lnSpc>
-                <a:spcPct val="150000"/>
-              </a:lnSpc>
-              <a:buNone/>
-            </a:pPr>
-            <a:r>
-              <a:rPr lang="en-US" sz="1200" dirty="0">
-                <a:solidFill>
-                  <a:srgbClr val="FFFFFF"/>
-                </a:solidFill>
-              </a:rPr>
-              <a:t>   需要進一步的臨床試驗來評估ICIs在早期HCC中的療效，這可能會改變治療格局。</a:t>
-            </a:r>
-            <a:endParaRPr lang="en-US" sz="1200" dirty="0"/>
-          </a:p>
-          <a:p>
-            <a:pPr indent="0" marL="0">
-              <a:lnSpc>
-                <a:spcPct val="150000"/>
-              </a:lnSpc>
-              <a:buNone/>
-            </a:pPr>
-            <a:endParaRPr lang="en-US" sz="1200" dirty="0"/>
-          </a:p>
-          <a:p>
-            <a:pPr indent="0" marL="0">
-              <a:lnSpc>
-                <a:spcPct val="150000"/>
-              </a:lnSpc>
-              <a:buNone/>
-            </a:pPr>
-            <a:r>
-              <a:rPr lang="en-US" sz="1200" dirty="0">
-                <a:solidFill>
-                  <a:srgbClr val="FFFFFF"/>
-                </a:solidFill>
-              </a:rPr>
-              <a:t>2. **個性化治療的生物標記研究**  </a:t>
-            </a:r>
-            <a:endParaRPr lang="en-US" sz="1200" dirty="0"/>
-          </a:p>
-          <a:p>
-            <a:pPr indent="0" marL="0">
-              <a:lnSpc>
-                <a:spcPct val="150000"/>
-              </a:lnSpc>
-              <a:buNone/>
-            </a:pPr>
-            <a:r>
-              <a:rPr lang="en-US" sz="1200" dirty="0">
-                <a:solidFill>
-                  <a:srgbClr val="FFFFFF"/>
-                </a:solidFill>
-              </a:rPr>
-              <a:t>   Investigating biomarkers for predicting treatment responses will be crucial for developing personalized therapeutic strategies in HCC.  </a:t>
-            </a:r>
-            <a:endParaRPr lang="en-US" sz="1200" dirty="0"/>
-          </a:p>
-          <a:p>
-            <a:pPr indent="0" marL="0">
-              <a:lnSpc>
-                <a:spcPct val="150000"/>
-              </a:lnSpc>
-              <a:buNone/>
-            </a:pPr>
-            <a:r>
-              <a:rPr lang="en-US" sz="1200" dirty="0">
-                <a:solidFill>
-                  <a:srgbClr val="FFFFFF"/>
-                </a:solidFill>
-              </a:rPr>
-              <a:t>   研究預測治療反應的生物標記將對開發HCC的個性化治療策略至關重要。</a:t>
-            </a:r>
-            <a:endParaRPr lang="en-US" sz="1200" dirty="0"/>
-          </a:p>
-          <a:p>
-            <a:pPr indent="0" marL="0">
-              <a:lnSpc>
-                <a:spcPct val="150000"/>
-              </a:lnSpc>
-              <a:buNone/>
-            </a:pPr>
-            <a:endParaRPr lang="en-US" sz="1200" dirty="0"/>
-          </a:p>
-          <a:p>
-            <a:pPr indent="0" marL="0">
-              <a:lnSpc>
-                <a:spcPct val="150000"/>
-              </a:lnSpc>
-              <a:buNone/>
-            </a:pPr>
-            <a:r>
-              <a:rPr lang="en-US" sz="1200" dirty="0">
-                <a:solidFill>
-                  <a:srgbClr val="FFFFFF"/>
-                </a:solidFill>
-              </a:rPr>
-              <a:t>3. **局部消融技術的優化**  </a:t>
-            </a:r>
-            <a:endParaRPr lang="en-US" sz="1200" dirty="0"/>
-          </a:p>
-          <a:p>
-            <a:pPr indent="0" marL="0">
-              <a:lnSpc>
-                <a:spcPct val="150000"/>
-              </a:lnSpc>
-              <a:buNone/>
-            </a:pPr>
-            <a:r>
-              <a:rPr lang="en-US" sz="1200" dirty="0">
-                <a:solidFill>
-                  <a:srgbClr val="FFFFFF"/>
-                </a:solidFill>
-              </a:rPr>
-              <a:t>   Future studies should focus on optimizing local ablation techniques and their combinations with systemic therapies to maximize patient outcomes.  </a:t>
-            </a:r>
-            <a:endParaRPr lang="en-US" sz="1200" dirty="0"/>
-          </a:p>
-          <a:p>
-            <a:pPr indent="0" marL="0">
-              <a:lnSpc>
-                <a:spcPct val="150000"/>
-              </a:lnSpc>
-              <a:buNone/>
-            </a:pPr>
-            <a:r>
-              <a:rPr lang="en-US" sz="1200" dirty="0">
-                <a:solidFill>
-                  <a:srgbClr val="FFFFFF"/>
-                </a:solidFill>
-              </a:rPr>
-              <a:t>   未來的研究應集中於優化局部消融技術及其與系統性療法的結合，以最大化患者的治療結果。</a:t>
-            </a:r>
-            <a:endParaRPr lang="en-US" sz="1200" dirty="0"/>
-          </a:p>
-          <a:p>
-            <a:pPr indent="0" marL="0">
-              <a:lnSpc>
-                <a:spcPct val="150000"/>
-              </a:lnSpc>
-              <a:buNone/>
-            </a:pPr>
-            <a:endParaRPr lang="en-US" sz="1200" dirty="0"/>
-          </a:p>
-          <a:p>
-            <a:pPr indent="0" marL="0">
-              <a:lnSpc>
-                <a:spcPct val="150000"/>
-              </a:lnSpc>
-              <a:buNone/>
-            </a:pPr>
-            <a:r>
-              <a:rPr lang="en-US" sz="1200" dirty="0">
-                <a:solidFill>
-                  <a:srgbClr val="FFFFFF"/>
-                </a:solidFill>
-              </a:rPr>
-              <a:t>4. **多學科治療模式的評估**  </a:t>
-            </a:r>
-            <a:endParaRPr lang="en-US" sz="1200" dirty="0"/>
-          </a:p>
-          <a:p>
-            <a:pPr indent="0" marL="0">
-              <a:lnSpc>
-                <a:spcPct val="150000"/>
-              </a:lnSpc>
-              <a:buNone/>
-            </a:pPr>
-            <a:r>
-              <a:rPr lang="en-US" sz="1200" dirty="0">
-                <a:solidFill>
-                  <a:srgbClr val="FFFFFF"/>
-                </a:solidFill>
-              </a:rPr>
-              <a:t>   Evaluating the effectiveness of multidisciplinary treatment approaches in HCC management will provide insights into best practices and improve patient care.  </a:t>
-            </a:r>
-            <a:endParaRPr lang="en-US" sz="1200" dirty="0"/>
-          </a:p>
-          <a:p>
-            <a:pPr indent="0" marL="0">
-              <a:lnSpc>
-                <a:spcPct val="150000"/>
-              </a:lnSpc>
-              <a:buNone/>
-            </a:pPr>
-            <a:r>
-              <a:rPr lang="en-US" sz="1200" dirty="0">
-                <a:solidFill>
-                  <a:srgbClr val="FFFFFF"/>
-                </a:solidFill>
-              </a:rPr>
-              <a:t>   評估多學科治療模式在HCC管理中的有效性將提供最佳實踐的見解並改善患者護理。</a:t>
-            </a:r>
-            <a:endParaRPr lang="en-US" sz="1200" dirty="0"/>
-          </a:p>
-          <a:p>
-            <a:pPr indent="0" marL="0">
-              <a:lnSpc>
-                <a:spcPct val="150000"/>
-              </a:lnSpc>
-              <a:buNone/>
-            </a:pPr>
-            <a:endParaRPr lang="en-US" sz="1200" dirty="0"/>
-          </a:p>
-          <a:p>
-            <a:pPr indent="0" marL="0">
-              <a:lnSpc>
-                <a:spcPct val="150000"/>
-              </a:lnSpc>
-              <a:buNone/>
-            </a:pPr>
-            <a:r>
-              <a:rPr lang="en-US" sz="1200" dirty="0">
-                <a:solidFill>
-                  <a:srgbClr val="FFFFFF"/>
-                </a:solidFill>
-              </a:rPr>
-              <a:t>5. **免疫逃逸機制的深入研究**  </a:t>
-            </a:r>
-            <a:endParaRPr lang="en-US" sz="1200" dirty="0"/>
-          </a:p>
-          <a:p>
-            <a:pPr indent="0" marL="0">
-              <a:lnSpc>
-                <a:spcPct val="150000"/>
-              </a:lnSpc>
-              <a:buNone/>
-            </a:pPr>
-            <a:r>
-              <a:rPr lang="en-US" sz="1200" dirty="0">
-                <a:solidFill>
-                  <a:srgbClr val="FFFFFF"/>
-                </a:solidFill>
-              </a:rPr>
-              <a:t>   Understanding the mechanisms of immune evasion in liver cancer will be essential for developing new therapeutic strategies that enhance the efficacy of existing treatments.  </a:t>
-            </a:r>
-            <a:endParaRPr lang="en-US" sz="1200" dirty="0"/>
-          </a:p>
-          <a:p>
-            <a:pPr indent="0" marL="0">
-              <a:lnSpc>
-                <a:spcPct val="150000"/>
-              </a:lnSpc>
-              <a:buNone/>
-            </a:pPr>
-            <a:r>
-              <a:rPr lang="en-US" sz="1200" dirty="0">
-                <a:solidFill>
-                  <a:srgbClr val="FFFFFF"/>
-                </a:solidFill>
-              </a:rPr>
-              <a:t>   理解肝癌中的免疫逃逸機制對於開發增強現有治療效果的新療法至關重要。</a:t>
+              <a:t>on failed)</a:t>
             </a:r>
             <a:endParaRPr lang="en-US" sz="1200" dirty="0"/>
           </a:p>
@@ -4595,7 +3776,7 @@
                 <a:ea typeface="Arial" pitchFamily="34" charset="-122"/>
                 <a:cs typeface="Arial" pitchFamily="34" charset="-120"/>
               </a:rPr>
-              <a:t>Liver resection after atezolizumab and bevacizumab versus maintenance therapy fo…</a:t>
+              <a:t>On-demand transarterial chemoembolisation combined with atezolizumab and bevaciz…</a:t>
             </a:r>
             <a:endParaRPr lang="en-US" sz="1400" dirty="0"/>
           </a:p>
@@ -4632,7 +3813,7 @@
                 <a:ea typeface="Arial" pitchFamily="34" charset="-122"/>
                 <a:cs typeface="Arial" pitchFamily="34" charset="-120"/>
               </a:rPr>
-              <a:t>Integrating efficacy and safety profile in advanced HCC: A network meta-analysis…</a:t>
+              <a:t>Atezolizumab-Bevacizumab with or without Cisplatin-based HAIC for Unresectable H…</a:t>
             </a:r>
             <a:endParaRPr lang="en-US" sz="1400" dirty="0"/>
           </a:p>
@@ -4669,7 +3850,7 @@
                 <a:ea typeface="Arial" pitchFamily="34" charset="-122"/>
                 <a:cs typeface="Arial" pitchFamily="34" charset="-120"/>
               </a:rPr>
-              <a:t>Adjuvant and neoadjuvant therapies in HCC: Time to go perioperative?</a:t>
+              <a:t>Phase 2 Study of Futibatinib in Combination with Pembrolizumab in Patients with …</a:t>
             </a:r>
             <a:endParaRPr lang="en-US" sz="1400" dirty="0"/>
           </a:p>
@@ -4706,7 +3887,7 @@
                 <a:ea typeface="Arial" pitchFamily="34" charset="-122"/>
                 <a:cs typeface="Arial" pitchFamily="34" charset="-120"/>
               </a:rPr>
-              <a:t>Baseline circulating and tumor &amp;#x3b3;&amp;#x3b4; T cells and early circulating CD8&amp;…</a:t>
+              <a:t>… plus transarterial chemoembolization and PD-1 inhibitors as conversion therapi…</a:t>
             </a:r>
             <a:endParaRPr lang="en-US" sz="1400" dirty="0"/>
           </a:p>
@@ -4743,7 +3924,7 @@
                 <a:ea typeface="Arial" pitchFamily="34" charset="-122"/>
                 <a:cs typeface="Arial" pitchFamily="34" charset="-120"/>
               </a:rPr>
-              <a:t>… plus transarterial chemoembolization and PD-1 inhibitors as conversion therapi…</a:t>
+              <a:t>… (PD-1 inhibitor) plus lenvatinib as conversion therapy followed by sequential …</a:t>
             </a:r>
             <a:endParaRPr lang="en-US" sz="1400" dirty="0"/>
           </a:p>
@@ -4780,7 +3961,7 @@
                 <a:ea typeface="Arial" pitchFamily="34" charset="-122"/>
                 <a:cs typeface="Arial" pitchFamily="34" charset="-120"/>
               </a:rPr>
-              <a:t>… (PD-1 inhibitor) plus lenvatinib as conversion therapy followed by sequential …</a:t>
+              <a:t>Defect-Engineered BiO2-X Nanosheets Mediate Sono-Thermomechanical ECM Remodeling…</a:t>
             </a:r>
             <a:endParaRPr lang="en-US" sz="1400" dirty="0"/>
           </a:p>
@@ -4817,7 +3998,7 @@
                 <a:ea typeface="Arial" pitchFamily="34" charset="-122"/>
                 <a:cs typeface="Arial" pitchFamily="34" charset="-120"/>
               </a:rPr>
-              <a:t>A Case of Unresectable Hepatocellular Carcinoma Responding to Durvalumab Plus Tr…</a:t>
+              <a:t>Enhanced glucose uptake promotes the survival of hepatocellular carcinoma cells …</a:t>
             </a:r>
             <a:endParaRPr lang="en-US" sz="1400" dirty="0"/>
           </a:p>
@@ -4891,7 +4072,7 @@
                 <a:ea typeface="Arial" pitchFamily="34" charset="-122"/>
                 <a:cs typeface="Arial" pitchFamily="34" charset="-120"/>
               </a:rPr>
-              <a:t>Radiotherapy versus local ablation therapy for the treatment of hepatocellular c…</a:t>
+              <a:t>External beam radiotherapy versus local ablation therapy for the treatment of he…</a:t>
             </a:r>
             <a:endParaRPr lang="en-US" sz="1400" dirty="0"/>
           </a:p>
@@ -4928,7 +4109,7 @@
                 <a:ea typeface="Arial" pitchFamily="34" charset="-122"/>
                 <a:cs typeface="Arial" pitchFamily="34" charset="-120"/>
               </a:rPr>
-              <a:t>Kdm2a histone demethylase ablation restores anti-tumor immunogenicity in liver c…</a:t>
+              <a:t>Defining the role of minimally invasive surgical thermal ablation in liver malig…</a:t>
             </a:r>
             <a:endParaRPr lang="en-US" sz="1400" dirty="0"/>
           </a:p>
@@ -5083,7 +4264,7 @@
                   </a:extLst>
                 </a:hlinkClick>
               </a:rPr>
-              <a:t>Liver resection after atezolizumab and bevacizumab versus maintenance therapy for locally advanced hepatocellular carcinoma (TALENTOP): a multicentre, open-label, randomised, phase 3 trial.</a:t>
+              <a:t>On-demand transarterial chemoembolisation combined with atezolizumab and bevacizumab in patients with untreated hepatocellular carcinoma (TALENTACE): a multicentre, randomised, open-label, phase 3 trial.</a:t>
             </a:r>
             <a:endParaRPr lang="en-US" sz="2400" dirty="0"/>
           </a:p>
@@ -5119,7 +4300,7 @@
                   <a:srgbClr val="888888"/>
                 </a:solidFill>
               </a:rPr>
-              <a:t>Lancet (London, England)  ·  IF 41.6  ·  RCT Phase 3</a:t>
+              <a:t>The lancet. Gastroenterology &amp; hepatology  ·  IF 35.7  ·  RCT Phase 3  ·  🌏 Asia</a:t>
             </a:r>
             <a:endParaRPr lang="en-US" sz="1000" dirty="0"/>
           </a:p>
@@ -5162,49 +4343,7 @@
                 <a:ea typeface="Arial" pitchFamily="34" charset="-122"/>
                 <a:cs typeface="Arial" pitchFamily="34" charset="-120"/>
               </a:rPr>
-              <a:t>Surgery improves time to treatment failure.</a:t>
-            </a:r>
-            <a:endParaRPr lang="en-US" sz="1800" dirty="0"/>
-          </a:p>
-          <a:p>
-            <a:pPr marL="342900" indent="-342900">
-              <a:spcAft>
-                <a:spcPts val="800"/>
-              </a:spcAft>
-              <a:buSzPct val="100000"/>
-              <a:buChar char="•"/>
-            </a:pPr>
-            <a:r>
-              <a:rPr lang="en-US" sz="1800" dirty="0">
-                <a:solidFill>
-                  <a:srgbClr val="333333"/>
-                </a:solidFill>
-                <a:latin typeface="Arial" pitchFamily="34" charset="0"/>
-                <a:ea typeface="Arial" pitchFamily="34" charset="-122"/>
-                <a:cs typeface="Arial" pitchFamily="34" charset="-120"/>
-              </a:rPr>
-              <a:t>Study involved 489 treatment-naive patients.</a:t>
-            </a:r>
-            <a:endParaRPr lang="en-US" sz="1800" dirty="0"/>
-          </a:p>
-          <a:p>
-            <a:pPr marL="342900" indent="-342900">
-              <a:spcAft>
-                <a:spcPts val="800"/>
-              </a:spcAft>
-              <a:buSzPct val="100000"/>
-              <a:buChar char="•"/>
-            </a:pPr>
-            <a:r>
-              <a:rPr lang="en-US" sz="1800" dirty="0">
-                <a:solidFill>
-                  <a:srgbClr val="333333"/>
-                </a:solidFill>
-                <a:latin typeface="Arial" pitchFamily="34" charset="0"/>
-                <a:ea typeface="Arial" pitchFamily="34" charset="-122"/>
-                <a:cs typeface="Arial" pitchFamily="34" charset="-120"/>
-              </a:rPr>
-              <a:t>Adverse events were more common in surgery group.</a:t>
+              <a:t>(Generation failed)</a:t>
             </a:r>
             <a:endParaRPr lang="en-US" sz="1800" dirty="0"/>
           </a:p>
@@ -5240,7 +4379,7 @@
                   <a:srgbClr val="888888"/>
                 </a:solidFill>
               </a:rPr>
-              <a:t>Sun Hui-Chuan, Zhu Xiao-Dong, Shen Feng et al.. Lancet (London, England). 2026-08-20 DOI: 10.1016/S0140-6736(26)01252-3</a:t>
+              <a:t>Kudo Masatoshi, Ogasawara Sadahisa, Liu Ruibao et al.. The lancet. Gastroenterology &amp; hepatology. 2026-08-25 DOI: 10.1016/S2468-1253(26)00212-8</a:t>
             </a:r>
             <a:endParaRPr lang="en-US" sz="800" dirty="0"/>
           </a:p>
@@ -5440,7 +4579,7 @@
                   </a:extLst>
                 </a:hlinkClick>
               </a:rPr>
-              <a:t>Integrating efficacy and safety profile in advanced HCC: A network meta-analysis of first-line systemic therapies.</a:t>
+              <a:t>Atezolizumab-Bevacizumab with or without Cisplatin-based HAIC for Unresectable HCC: A Randomized Phase 2 Trial.</a:t>
             </a:r>
             <a:endParaRPr lang="en-US" sz="2400" dirty="0"/>
           </a:p>
@@ -5476,7 +4615,7 @@
                   <a:srgbClr val="888888"/>
                 </a:solidFill>
               </a:rPr>
-              <a:t>JNCI cancer spectrum  ·  RCT Phase 3  ·  🌏 Asia</a:t>
+              <a:t>JHEP reports : innovation in hepatology  ·  IF 7.8  ·  RCT Phase 3  ·  🌏 Asia</a:t>
             </a:r>
             <a:endParaRPr lang="en-US" sz="1000" dirty="0"/>
           </a:p>
@@ -5519,91 +4658,7 @@
                 <a:ea typeface="Arial" pitchFamily="34" charset="-122"/>
                 <a:cs typeface="Arial" pitchFamily="34" charset="-120"/>
               </a:rPr>
-              <a:t>Network meta-analysis of first-line therapies</a:t>
-            </a:r>
-            <a:endParaRPr lang="en-US" sz="1800" dirty="0"/>
-          </a:p>
-          <a:p>
-            <a:pPr marL="342900" indent="-342900">
-              <a:spcAft>
-                <a:spcPts val="800"/>
-              </a:spcAft>
-              <a:buSzPct val="100000"/>
-              <a:buChar char="•"/>
-            </a:pPr>
-            <a:r>
-              <a:rPr lang="en-US" sz="1800" dirty="0">
-                <a:solidFill>
-                  <a:srgbClr val="333333"/>
-                </a:solidFill>
-                <a:latin typeface="Arial" pitchFamily="34" charset="0"/>
-                <a:ea typeface="Arial" pitchFamily="34" charset="-122"/>
-                <a:cs typeface="Arial" pitchFamily="34" charset="-120"/>
-              </a:rPr>
-              <a:t>Seventeen studies with 12,727 patients analyzed</a:t>
-            </a:r>
-            <a:endParaRPr lang="en-US" sz="1800" dirty="0"/>
-          </a:p>
-          <a:p>
-            <a:pPr marL="342900" indent="-342900">
-              <a:spcAft>
-                <a:spcPts val="800"/>
-              </a:spcAft>
-              <a:buSzPct val="100000"/>
-              <a:buChar char="•"/>
-            </a:pPr>
-            <a:r>
-              <a:rPr lang="en-US" sz="1800" dirty="0">
-                <a:solidFill>
-                  <a:srgbClr val="333333"/>
-                </a:solidFill>
-                <a:latin typeface="Arial" pitchFamily="34" charset="0"/>
-                <a:ea typeface="Arial" pitchFamily="34" charset="-122"/>
-                <a:cs typeface="Arial" pitchFamily="34" charset="-120"/>
-              </a:rPr>
-              <a:t>Nivolumab-Ipilimumab shows best overall survival</a:t>
-            </a:r>
-            <a:endParaRPr lang="en-US" sz="1800" dirty="0"/>
-          </a:p>
-          <a:p>
-            <a:pPr marL="342900" indent="-342900">
-              <a:spcAft>
-                <a:spcPts val="800"/>
-              </a:spcAft>
-              <a:buSzPct val="100000"/>
-              <a:buChar char="•"/>
-            </a:pPr>
-            <a:r>
-              <a:rPr lang="en-US" sz="1800" dirty="0">
-                <a:solidFill>
-                  <a:srgbClr val="333333"/>
-                </a:solidFill>
-                <a:latin typeface="Arial" pitchFamily="34" charset="0"/>
-                <a:ea typeface="Arial" pitchFamily="34" charset="-122"/>
-                <a:cs typeface="Arial" pitchFamily="34" charset="-120"/>
-              </a:rPr>
-              <a:t>Subgroup analysis highlights treatment variations</a:t>
-            </a:r>
-            <a:endParaRPr lang="en-US" sz="1800" dirty="0"/>
-          </a:p>
-          <a:p>
-            <a:pPr marL="342900" indent="-342900">
-              <a:spcAft>
-                <a:spcPts val="800"/>
-              </a:spcAft>
-              <a:buSzPct val="100000"/>
-              <a:buChar char="•"/>
-            </a:pPr>
-            <a:r>
-              <a:rPr lang="en-US" sz="1800" dirty="0">
-                <a:solidFill>
-                  <a:srgbClr val="333333"/>
-                </a:solidFill>
-                <a:latin typeface="Arial" pitchFamily="34" charset="0"/>
-                <a:ea typeface="Arial" pitchFamily="34" charset="-122"/>
-                <a:cs typeface="Arial" pitchFamily="34" charset="-120"/>
-              </a:rPr>
-              <a:t>Emphasizes need for personalized HCC management</a:t>
+              <a:t>(Generation failed)</a:t>
             </a:r>
             <a:endParaRPr lang="en-US" sz="1800" dirty="0"/>
           </a:p>
@@ -5639,7 +4694,7 @@
                   <a:srgbClr val="888888"/>
                 </a:solidFill>
               </a:rPr>
-              <a:t>Chua Wei Yu, Zhao Joseph J, Lee Choong-Kun et al.. JNCI cancer spectrum. 2026-08-21 DOI: 10.1093/jncics/pkag084</a:t>
+              <a:t>Takeuchi Yasuto, Sue Masahiko, Miyake Nozomi et al.. JHEP reports : innovation in hepatology. 2026-08-28 DOI: 10.1016/j.jhepr.2026.102002</a:t>
             </a:r>
             <a:endParaRPr lang="en-US" sz="800" dirty="0"/>
           </a:p>
@@ -5839,7 +4894,7 @@
                   </a:extLst>
                 </a:hlinkClick>
               </a:rPr>
-              <a:t>Adjuvant and neoadjuvant therapies in HCC: Time to go perioperative?</a:t>
+              <a:t>Phase 2 Study of Futibatinib in Combination with Pembrolizumab in Patients with FGF19 expressing Advanced Hepatocellular Carcinoma.</a:t>
             </a:r>
             <a:endParaRPr lang="en-US" sz="2400" dirty="0"/>
           </a:p>
@@ -5875,7 +4930,7 @@
                   <a:srgbClr val="888888"/>
                 </a:solidFill>
               </a:rPr>
-              <a:t>iScience  ·  RCT Phase 3</a:t>
+              <a:t>The oncologist  ·  RCT Phase 2</a:t>
             </a:r>
             <a:endParaRPr lang="en-US" sz="1000" dirty="0"/>
           </a:p>
@@ -5918,91 +4973,7 @@
                 <a:ea typeface="Arial" pitchFamily="34" charset="-122"/>
                 <a:cs typeface="Arial" pitchFamily="34" charset="-120"/>
               </a:rPr>
-              <a:t>HCC has high recurrence rates post-treatment.</a:t>
-            </a:r>
-            <a:endParaRPr lang="en-US" sz="1800" dirty="0"/>
-          </a:p>
-          <a:p>
-            <a:pPr marL="342900" indent="-342900">
-              <a:spcAft>
-                <a:spcPts val="800"/>
-              </a:spcAft>
-              <a:buSzPct val="100000"/>
-              <a:buChar char="•"/>
-            </a:pPr>
-            <a:r>
-              <a:rPr lang="en-US" sz="1800" dirty="0">
-                <a:solidFill>
-                  <a:srgbClr val="333333"/>
-                </a:solidFill>
-                <a:latin typeface="Arial" pitchFamily="34" charset="0"/>
-                <a:ea typeface="Arial" pitchFamily="34" charset="-122"/>
-                <a:cs typeface="Arial" pitchFamily="34" charset="-120"/>
-              </a:rPr>
-              <a:t>ICIs show promise in advanced HCC stages.</a:t>
-            </a:r>
-            <a:endParaRPr lang="en-US" sz="1800" dirty="0"/>
-          </a:p>
-          <a:p>
-            <a:pPr marL="342900" indent="-342900">
-              <a:spcAft>
-                <a:spcPts val="800"/>
-              </a:spcAft>
-              <a:buSzPct val="100000"/>
-              <a:buChar char="•"/>
-            </a:pPr>
-            <a:r>
-              <a:rPr lang="en-US" sz="1800" dirty="0">
-                <a:solidFill>
-                  <a:srgbClr val="333333"/>
-                </a:solidFill>
-                <a:latin typeface="Arial" pitchFamily="34" charset="0"/>
-                <a:ea typeface="Arial" pitchFamily="34" charset="-122"/>
-                <a:cs typeface="Arial" pitchFamily="34" charset="-120"/>
-              </a:rPr>
-              <a:t>Neoadjuvant therapies enhance immune response.</a:t>
-            </a:r>
-            <a:endParaRPr lang="en-US" sz="1800" dirty="0"/>
-          </a:p>
-          <a:p>
-            <a:pPr marL="342900" indent="-342900">
-              <a:spcAft>
-                <a:spcPts val="800"/>
-              </a:spcAft>
-              <a:buSzPct val="100000"/>
-              <a:buChar char="•"/>
-            </a:pPr>
-            <a:r>
-              <a:rPr lang="en-US" sz="1800" dirty="0">
-                <a:solidFill>
-                  <a:srgbClr val="333333"/>
-                </a:solidFill>
-                <a:latin typeface="Arial" pitchFamily="34" charset="0"/>
-                <a:ea typeface="Arial" pitchFamily="34" charset="-122"/>
-                <a:cs typeface="Arial" pitchFamily="34" charset="-120"/>
-              </a:rPr>
-              <a:t>Perioperative strategies may improve outcomes.</a:t>
-            </a:r>
-            <a:endParaRPr lang="en-US" sz="1800" dirty="0"/>
-          </a:p>
-          <a:p>
-            <a:pPr marL="342900" indent="-342900">
-              <a:spcAft>
-                <a:spcPts val="800"/>
-              </a:spcAft>
-              <a:buSzPct val="100000"/>
-              <a:buChar char="•"/>
-            </a:pPr>
-            <a:r>
-              <a:rPr lang="en-US" sz="1800" dirty="0">
-                <a:solidFill>
-                  <a:srgbClr val="333333"/>
-                </a:solidFill>
-                <a:latin typeface="Arial" pitchFamily="34" charset="0"/>
-                <a:ea typeface="Arial" pitchFamily="34" charset="-122"/>
-                <a:cs typeface="Arial" pitchFamily="34" charset="-120"/>
-              </a:rPr>
-              <a:t>Challenges include patient selection and toxicity.</a:t>
+              <a:t>(Generation failed)</a:t>
             </a:r>
             <a:endParaRPr lang="en-US" sz="1800" dirty="0"/>
           </a:p>
@@ -6038,7 +5009,7 @@
                   <a:srgbClr val="888888"/>
                 </a:solidFill>
               </a:rPr>
-              <a:t>Pantzios Spyridon, Germanidis Georgios, Elefsiniotis Ioannis. iScience. 2026-08-20 DOI: 10.1016/j.isci.2026.117084</a:t>
+              <a:t>Tran Nguyen H, Palmer Mathias E, Ulrich Angela et al.. The oncologist. 2026-08-25 DOI: 10.1093/oncolo/oyag343</a:t>
             </a:r>
             <a:endParaRPr lang="en-US" sz="800" dirty="0"/>
           </a:p>
@@ -6238,7 +5209,7 @@
                   </a:extLst>
                 </a:hlinkClick>
               </a:rPr>
-              <a:t>Baseline circulating and tumor &amp;#x3b3;&amp;#x3b4; T cells and early circulating CD8&amp;#x207a;PD1&amp;#x207a; expansion predict response to Atezolizumab-bevacizumab in HCC.</a:t>
+              <a:t>… plus transarterial chemoembolization and PD-1 inhibitors as conversion therapies for unresectable intermediate-advanced hepatocellular carcinoma: a phase 2 trial …</a:t>
             </a:r>
             <a:endParaRPr lang="en-US" sz="2400" dirty="0"/>
           </a:p>
@@ -6274,7 +5245,7 @@
                   <a:srgbClr val="888888"/>
                 </a:solidFill>
               </a:rPr>
-              <a:t>Clinical cancer research : an official journal of the American Association for Cancer Research  ·  IF 11.5  ·  Prospective Study</a:t>
+              <a:t>… and Targeted Therapy  ·  RCT Phase 2</a:t>
             </a:r>
             <a:endParaRPr lang="en-US" sz="1000" dirty="0"/>
           </a:p>
@@ -6317,49 +5288,7 @@
                 <a:ea typeface="Arial" pitchFamily="34" charset="-122"/>
                 <a:cs typeface="Arial" pitchFamily="34" charset="-120"/>
               </a:rPr>
-              <a:t>High baseline γδ T cells predict better outcomes.</a:t>
-            </a:r>
-            <a:endParaRPr lang="en-US" sz="1800" dirty="0"/>
-          </a:p>
-          <a:p>
-            <a:pPr marL="342900" indent="-342900">
-              <a:spcAft>
-                <a:spcPts val="800"/>
-              </a:spcAft>
-              <a:buSzPct val="100000"/>
-              <a:buChar char="•"/>
-            </a:pPr>
-            <a:r>
-              <a:rPr lang="en-US" sz="1800" dirty="0">
-                <a:solidFill>
-                  <a:srgbClr val="333333"/>
-                </a:solidFill>
-                <a:latin typeface="Arial" pitchFamily="34" charset="0"/>
-                <a:ea typeface="Arial" pitchFamily="34" charset="-122"/>
-                <a:cs typeface="Arial" pitchFamily="34" charset="-120"/>
-              </a:rPr>
-              <a:t>Early CD8+PD-1+ expansion linked to longer PFS.</a:t>
-            </a:r>
-            <a:endParaRPr lang="en-US" sz="1800" dirty="0"/>
-          </a:p>
-          <a:p>
-            <a:pPr marL="342900" indent="-342900">
-              <a:spcAft>
-                <a:spcPts val="800"/>
-              </a:spcAft>
-              <a:buSzPct val="100000"/>
-              <a:buChar char="•"/>
-            </a:pPr>
-            <a:r>
-              <a:rPr lang="en-US" sz="1800" dirty="0">
-                <a:solidFill>
-                  <a:srgbClr val="333333"/>
-                </a:solidFill>
-                <a:latin typeface="Arial" pitchFamily="34" charset="0"/>
-                <a:ea typeface="Arial" pitchFamily="34" charset="-122"/>
-                <a:cs typeface="Arial" pitchFamily="34" charset="-120"/>
-              </a:rPr>
-              <a:t>Increased CD8+TIGIT+ cells indicate treatment resistance.</a:t>
+              <a:t>(Generation failed)</a:t>
             </a:r>
             <a:endParaRPr lang="en-US" sz="1800" dirty="0"/>
           </a:p>
@@ -6395,7 +5324,7 @@
                   <a:srgbClr val="888888"/>
                 </a:solidFill>
               </a:rPr>
-              <a:t>Galy-Fauroux Isabelle, Asif-Laidin Amna, Evain Manon et al.. Clinical cancer research : an official journal of the American Association for Cancer Research. 2026-08-17 DOI: 10.1158/1078-0432.CCR-26-1102</a:t>
+              <a:t>X Zhang, H Cai, W Peng. … and Targeted Therapy. 2026</a:t>
             </a:r>
             <a:endParaRPr lang="en-US" sz="800" dirty="0"/>
           </a:p>
@@ -6595,7 +5524,7 @@
                   </a:extLst>
                 </a:hlinkClick>
               </a:rPr>
-              <a:t>… plus transarterial chemoembolization and PD-1 inhibitors as conversion therapies for unresectable intermediate-advanced hepatocellular carcinoma: a phase 2 trial …</a:t>
+              <a:t>… (PD-1 inhibitor) plus lenvatinib as conversion therapy followed by sequential surgery (SILENSES) for advanced unresectable hepatocellular carcinoma: a phase II …</a:t>
             </a:r>
             <a:endParaRPr lang="en-US" sz="2400" dirty="0"/>
           </a:p>
@@ -6674,91 +5603,7 @@
                 <a:ea typeface="Arial" pitchFamily="34" charset="-122"/>
                 <a:cs typeface="Arial" pitchFamily="34" charset="-120"/>
               </a:rPr>
-              <a:t>Combination therapy for unresectable HCC</a:t>
-            </a:r>
-            <a:endParaRPr lang="en-US" sz="1800" dirty="0"/>
-          </a:p>
-          <a:p>
-            <a:pPr marL="342900" indent="-342900">
-              <a:spcAft>
-                <a:spcPts val="800"/>
-              </a:spcAft>
-              <a:buSzPct val="100000"/>
-              <a:buChar char="•"/>
-            </a:pPr>
-            <a:r>
-              <a:rPr lang="en-US" sz="1800" dirty="0">
-                <a:solidFill>
-                  <a:srgbClr val="333333"/>
-                </a:solidFill>
-                <a:latin typeface="Arial" pitchFamily="34" charset="0"/>
-                <a:ea typeface="Arial" pitchFamily="34" charset="-122"/>
-                <a:cs typeface="Arial" pitchFamily="34" charset="-120"/>
-              </a:rPr>
-              <a:t>Transarterial chemoembolization (TACE) used</a:t>
-            </a:r>
-            <a:endParaRPr lang="en-US" sz="1800" dirty="0"/>
-          </a:p>
-          <a:p>
-            <a:pPr marL="342900" indent="-342900">
-              <a:spcAft>
-                <a:spcPts val="800"/>
-              </a:spcAft>
-              <a:buSzPct val="100000"/>
-              <a:buChar char="•"/>
-            </a:pPr>
-            <a:r>
-              <a:rPr lang="en-US" sz="1800" dirty="0">
-                <a:solidFill>
-                  <a:srgbClr val="333333"/>
-                </a:solidFill>
-                <a:latin typeface="Arial" pitchFamily="34" charset="0"/>
-                <a:ea typeface="Arial" pitchFamily="34" charset="-122"/>
-                <a:cs typeface="Arial" pitchFamily="34" charset="-120"/>
-              </a:rPr>
-              <a:t>PD-1 inhibitors enhance treatment efficacy</a:t>
-            </a:r>
-            <a:endParaRPr lang="en-US" sz="1800" dirty="0"/>
-          </a:p>
-          <a:p>
-            <a:pPr marL="342900" indent="-342900">
-              <a:spcAft>
-                <a:spcPts val="800"/>
-              </a:spcAft>
-              <a:buSzPct val="100000"/>
-              <a:buChar char="•"/>
-            </a:pPr>
-            <a:r>
-              <a:rPr lang="en-US" sz="1800" dirty="0">
-                <a:solidFill>
-                  <a:srgbClr val="333333"/>
-                </a:solidFill>
-                <a:latin typeface="Arial" pitchFamily="34" charset="0"/>
-                <a:ea typeface="Arial" pitchFamily="34" charset="-122"/>
-                <a:cs typeface="Arial" pitchFamily="34" charset="-120"/>
-              </a:rPr>
-              <a:t>Phase 2 trial demonstrates promising results</a:t>
-            </a:r>
-            <a:endParaRPr lang="en-US" sz="1800" dirty="0"/>
-          </a:p>
-          <a:p>
-            <a:pPr marL="342900" indent="-342900">
-              <a:spcAft>
-                <a:spcPts val="800"/>
-              </a:spcAft>
-              <a:buSzPct val="100000"/>
-              <a:buChar char="•"/>
-            </a:pPr>
-            <a:r>
-              <a:rPr lang="en-US" sz="1800" dirty="0">
-                <a:solidFill>
-                  <a:srgbClr val="333333"/>
-                </a:solidFill>
-                <a:latin typeface="Arial" pitchFamily="34" charset="0"/>
-                <a:ea typeface="Arial" pitchFamily="34" charset="-122"/>
-                <a:cs typeface="Arial" pitchFamily="34" charset="-120"/>
-              </a:rPr>
-              <a:t>Potential for conversion to resectable disease</a:t>
+              <a:t>(Generation failed)</a:t>
             </a:r>
             <a:endParaRPr lang="en-US" sz="1800" dirty="0"/>
           </a:p>
@@ -6794,7 +5639,7 @@
                   <a:srgbClr val="888888"/>
                 </a:solidFill>
               </a:rPr>
-              <a:t>X Zhang, H Cai, W Peng. … and Targeted Therapy. 2026</a:t>
+              <a:t>S Lu, W Zhang, J Li. … and Targeted Therapy. 2026</a:t>
             </a:r>
             <a:endParaRPr lang="en-US" sz="800" dirty="0"/>
           </a:p>
@@ -6994,7 +5839,7 @@
                   </a:extLst>
                 </a:hlinkClick>
               </a:rPr>
-              <a:t>… (PD-1 inhibitor) plus lenvatinib as conversion therapy followed by sequential surgery (SILENSES) for advanced unresectable hepatocellular carcinoma: a phase II …</a:t>
+              <a:t>Defect-Engineered BiO2-X Nanosheets Mediate Sono-Thermomechanical ECM Remodeling for Hepatocellular Carcinoma Immunotherapy.</a:t>
             </a:r>
             <a:endParaRPr lang="en-US" sz="2400" dirty="0"/>
           </a:p>
@@ -7030,7 +5875,7 @@
                   <a:srgbClr val="888888"/>
                 </a:solidFill>
               </a:rPr>
-              <a:t>… and Targeted Therapy  ·  RCT Phase 2</a:t>
+              <a:t>Advanced science (Weinheim, Baden-Wurttemberg, Germany)  ·  🌏 Asia</a:t>
             </a:r>
             <a:endParaRPr lang="en-US" sz="1000" dirty="0"/>
           </a:p>
@@ -7073,91 +5918,7 @@
                 <a:ea typeface="Arial" pitchFamily="34" charset="-122"/>
                 <a:cs typeface="Arial" pitchFamily="34" charset="-120"/>
               </a:rPr>
-              <a:t>Study evaluates PD-1 inhibitor plus lenvatinib</a:t>
-            </a:r>
-            <a:endParaRPr lang="en-US" sz="1800" dirty="0"/>
-          </a:p>
-          <a:p>
-            <a:pPr marL="342900" indent="-342900">
-              <a:spcAft>
-                <a:spcPts val="800"/>
-              </a:spcAft>
-              <a:buSzPct val="100000"/>
-              <a:buChar char="•"/>
-            </a:pPr>
-            <a:r>
-              <a:rPr lang="en-US" sz="1800" dirty="0">
-                <a:solidFill>
-                  <a:srgbClr val="333333"/>
-                </a:solidFill>
-                <a:latin typeface="Arial" pitchFamily="34" charset="0"/>
-                <a:ea typeface="Arial" pitchFamily="34" charset="-122"/>
-                <a:cs typeface="Arial" pitchFamily="34" charset="-120"/>
-              </a:rPr>
-              <a:t>Focus on unresectable hepatocellular carcinoma</a:t>
-            </a:r>
-            <a:endParaRPr lang="en-US" sz="1800" dirty="0"/>
-          </a:p>
-          <a:p>
-            <a:pPr marL="342900" indent="-342900">
-              <a:spcAft>
-                <a:spcPts val="800"/>
-              </a:spcAft>
-              <a:buSzPct val="100000"/>
-              <a:buChar char="•"/>
-            </a:pPr>
-            <a:r>
-              <a:rPr lang="en-US" sz="1800" dirty="0">
-                <a:solidFill>
-                  <a:srgbClr val="333333"/>
-                </a:solidFill>
-                <a:latin typeface="Arial" pitchFamily="34" charset="0"/>
-                <a:ea typeface="Arial" pitchFamily="34" charset="-122"/>
-                <a:cs typeface="Arial" pitchFamily="34" charset="-120"/>
-              </a:rPr>
-              <a:t>Sequential surgery improves long-term survival</a:t>
-            </a:r>
-            <a:endParaRPr lang="en-US" sz="1800" dirty="0"/>
-          </a:p>
-          <a:p>
-            <a:pPr marL="342900" indent="-342900">
-              <a:spcAft>
-                <a:spcPts val="800"/>
-              </a:spcAft>
-              <a:buSzPct val="100000"/>
-              <a:buChar char="•"/>
-            </a:pPr>
-            <a:r>
-              <a:rPr lang="en-US" sz="1800" dirty="0">
-                <a:solidFill>
-                  <a:srgbClr val="333333"/>
-                </a:solidFill>
-                <a:latin typeface="Arial" pitchFamily="34" charset="0"/>
-                <a:ea typeface="Arial" pitchFamily="34" charset="-122"/>
-                <a:cs typeface="Arial" pitchFamily="34" charset="-120"/>
-              </a:rPr>
-              <a:t>Phase II trial with promising results</a:t>
-            </a:r>
-            <a:endParaRPr lang="en-US" sz="1800" dirty="0"/>
-          </a:p>
-          <a:p>
-            <a:pPr marL="342900" indent="-342900">
-              <a:spcAft>
-                <a:spcPts val="800"/>
-              </a:spcAft>
-              <a:buSzPct val="100000"/>
-              <a:buChar char="•"/>
-            </a:pPr>
-            <a:r>
-              <a:rPr lang="en-US" sz="1800" dirty="0">
-                <a:solidFill>
-                  <a:srgbClr val="333333"/>
-                </a:solidFill>
-                <a:latin typeface="Arial" pitchFamily="34" charset="0"/>
-                <a:ea typeface="Arial" pitchFamily="34" charset="-122"/>
-                <a:cs typeface="Arial" pitchFamily="34" charset="-120"/>
-              </a:rPr>
-              <a:t>Potential new standard for advanced HCC</a:t>
+              <a:t>(Generation failed)</a:t>
             </a:r>
             <a:endParaRPr lang="en-US" sz="1800" dirty="0"/>
           </a:p>
@@ -7193,7 +5954,7 @@
                   <a:srgbClr val="888888"/>
                 </a:solidFill>
               </a:rPr>
-              <a:t>S Lu, W Zhang, J Li. … and Targeted Therapy. 2026</a:t>
+              <a:t>Tian Huimin, Zhang Shen, Wu Bolin et al.. Advanced science (Weinheim, Baden-Wurttemberg, Germany). 2026-08-30 DOI: 10.1002/advs.77337</a:t>
             </a:r>
             <a:endParaRPr lang="en-US" sz="800" dirty="0"/>
           </a:p>
@@ -7393,7 +6154,7 @@
                   </a:extLst>
                 </a:hlinkClick>
               </a:rPr>
-              <a:t>A Case of Unresectable Hepatocellular Carcinoma Responding to Durvalumab Plus Tremelimumab after Lenvatinib Treatment.</a:t>
+              <a:t>Enhanced glucose uptake promotes the survival of hepatocellular carcinoma cells following incomplete radiofrequency ablation.</a:t>
             </a:r>
             <a:endParaRPr lang="en-US" sz="2400" dirty="0"/>
           </a:p>
@@ -7429,7 +6190,7 @@
                   <a:srgbClr val="888888"/>
                 </a:solidFill>
               </a:rPr>
-              <a:t>Internal medicine (Tokyo, Japan)  ·  🌏 Asia</a:t>
+              <a:t>Molecular &amp; cellular oncology  ·  🌏 Asia</a:t>
             </a:r>
             <a:endParaRPr lang="en-US" sz="1000" dirty="0"/>
           </a:p>
@@ -7472,91 +6233,7 @@
                 <a:ea typeface="Arial" pitchFamily="34" charset="-122"/>
                 <a:cs typeface="Arial" pitchFamily="34" charset="-120"/>
               </a:rPr>
-              <a:t>Case of unresectable HCC reported</a:t>
-            </a:r>
-            <a:endParaRPr lang="en-US" sz="1800" dirty="0"/>
-          </a:p>
-          <a:p>
-            <a:pPr marL="342900" indent="-342900">
-              <a:spcAft>
-                <a:spcPts val="800"/>
-              </a:spcAft>
-              <a:buSzPct val="100000"/>
-              <a:buChar char="•"/>
-            </a:pPr>
-            <a:r>
-              <a:rPr lang="en-US" sz="1800" dirty="0">
-                <a:solidFill>
-                  <a:srgbClr val="333333"/>
-                </a:solidFill>
-                <a:latin typeface="Arial" pitchFamily="34" charset="0"/>
-                <a:ea typeface="Arial" pitchFamily="34" charset="-122"/>
-                <a:cs typeface="Arial" pitchFamily="34" charset="-120"/>
-              </a:rPr>
-              <a:t>Durvalumab plus tremelimumab used</a:t>
-            </a:r>
-            <a:endParaRPr lang="en-US" sz="1800" dirty="0"/>
-          </a:p>
-          <a:p>
-            <a:pPr marL="342900" indent="-342900">
-              <a:spcAft>
-                <a:spcPts val="800"/>
-              </a:spcAft>
-              <a:buSzPct val="100000"/>
-              <a:buChar char="•"/>
-            </a:pPr>
-            <a:r>
-              <a:rPr lang="en-US" sz="1800" dirty="0">
-                <a:solidFill>
-                  <a:srgbClr val="333333"/>
-                </a:solidFill>
-                <a:latin typeface="Arial" pitchFamily="34" charset="0"/>
-                <a:ea typeface="Arial" pitchFamily="34" charset="-122"/>
-                <a:cs typeface="Arial" pitchFamily="34" charset="-120"/>
-              </a:rPr>
-              <a:t>Patient previously intolerant to lenvatinib</a:t>
-            </a:r>
-            <a:endParaRPr lang="en-US" sz="1800" dirty="0"/>
-          </a:p>
-          <a:p>
-            <a:pPr marL="342900" indent="-342900">
-              <a:spcAft>
-                <a:spcPts val="800"/>
-              </a:spcAft>
-              <a:buSzPct val="100000"/>
-              <a:buChar char="•"/>
-            </a:pPr>
-            <a:r>
-              <a:rPr lang="en-US" sz="1800" dirty="0">
-                <a:solidFill>
-                  <a:srgbClr val="333333"/>
-                </a:solidFill>
-                <a:latin typeface="Arial" pitchFamily="34" charset="0"/>
-                <a:ea typeface="Arial" pitchFamily="34" charset="-122"/>
-                <a:cs typeface="Arial" pitchFamily="34" charset="-120"/>
-              </a:rPr>
-              <a:t>Tumor markers increased then normalized</a:t>
-            </a:r>
-            <a:endParaRPr lang="en-US" sz="1800" dirty="0"/>
-          </a:p>
-          <a:p>
-            <a:pPr marL="342900" indent="-342900">
-              <a:spcAft>
-                <a:spcPts val="800"/>
-              </a:spcAft>
-              <a:buSzPct val="100000"/>
-              <a:buChar char="•"/>
-            </a:pPr>
-            <a:r>
-              <a:rPr lang="en-US" sz="1800" dirty="0">
-                <a:solidFill>
-                  <a:srgbClr val="333333"/>
-                </a:solidFill>
-                <a:latin typeface="Arial" pitchFamily="34" charset="0"/>
-                <a:ea typeface="Arial" pitchFamily="34" charset="-122"/>
-                <a:cs typeface="Arial" pitchFamily="34" charset="-120"/>
-              </a:rPr>
-              <a:t>Radiological shrinkage observed without new lesions</a:t>
+              <a:t>(Generation failed)</a:t>
             </a:r>
             <a:endParaRPr lang="en-US" sz="1800" dirty="0"/>
           </a:p>
@@ -7592,7 +6269,7 @@
                   <a:srgbClr val="888888"/>
                 </a:solidFill>
               </a:rPr>
-              <a:t>Sueda Saki, Kawaoka Tomokazu, Fujii Yasutoshi et al.. Internal medicine (Tokyo, Japan). 2026-08-19 DOI: 10.2169/internalmedicine.7369-26</a:t>
+              <a:t>Wang Xiaofeng, Li Ting, Peng Chao. Molecular &amp; cellular oncology. 2026-08-29 DOI: 10.1080/23723556.2026.2715876</a:t>
             </a:r>
             <a:endParaRPr lang="en-US" sz="800" dirty="0"/>
           </a:p>

--- a/docs/digest-en.pptx
+++ b/docs/digest-en.pptx
@@ -2269,7 +2269,7 @@
                   <a:srgbClr val="888888"/>
                 </a:solidFill>
               </a:rPr>
-              <a:t>2026-08-24 — 2026-08-31</a:t>
+              <a:t>2026-08-31 — 2026-09-07</a:t>
             </a:r>
             <a:endParaRPr lang="en-US" sz="1400" dirty="0"/>
           </a:p>
@@ -2460,7 +2460,7 @@
                   </a:extLst>
                 </a:hlinkClick>
               </a:rPr>
-              <a:t>Cryoablation versus radiofrequency ablation for hepatocellular carcinoma: a systematic review and meta-analysis</a:t>
+              <a:t>Perioperative tislelizumab for early-stage hepatocellular carcinoma: A phase II trial with integrated tumour microenvironment profiling and predictive modeling.</a:t>
             </a:r>
             <a:endParaRPr lang="en-US" sz="2400" dirty="0"/>
           </a:p>
@@ -2496,7 +2496,7 @@
                   <a:srgbClr val="888888"/>
                 </a:solidFill>
               </a:rPr>
-              <a:t>International Journal of …  ·  Meta-Analysis</a:t>
+              <a:t>Drug resistance updates : reviews and commentaries in antimicrobial and anticancer chemotherapy  ·  RCT Phase 2</a:t>
             </a:r>
             <a:endParaRPr lang="en-US" sz="1000" dirty="0"/>
           </a:p>
@@ -2575,7 +2575,7 @@
                   <a:srgbClr val="888888"/>
                 </a:solidFill>
               </a:rPr>
-              <a:t>K Mao, Y Wang, W Yao. International Journal of …. 2026</a:t>
+              <a:t>Chen Lu, Han Ruyu, Zhai Shujie et al.. Drug resistance updates : reviews and commentaries in antimicrobial and anticancer chemotherapy. 2026-07-23 DOI: 10.1016/j.drup.2026.101440</a:t>
             </a:r>
             <a:endParaRPr lang="en-US" sz="800" dirty="0"/>
           </a:p>
@@ -2775,7 +2775,7 @@
                   </a:extLst>
                 </a:hlinkClick>
               </a:rPr>
-              <a:t>External beam radiotherapy versus local ablation therapy for the treatment of hepatocellular carcinoma: a systematic review and meta-analysis</a:t>
+              <a:t>… plus transarterial chemoembolization and PD-1 inhibitors as conversion therapies for unresectable intermediate-advanced hepatocellular carcinoma: a phase 2 trial …</a:t>
             </a:r>
             <a:endParaRPr lang="en-US" sz="2400" dirty="0"/>
           </a:p>
@@ -2811,7 +2811,7 @@
                   <a:srgbClr val="888888"/>
                 </a:solidFill>
               </a:rPr>
-              <a:t>Clinical and Molecular …  ·  Meta-Analysis</a:t>
+              <a:t>… and Targeted Therapy  ·  RCT Phase 2</a:t>
             </a:r>
             <a:endParaRPr lang="en-US" sz="1000" dirty="0"/>
           </a:p>
@@ -2890,7 +2890,7 @@
                   <a:srgbClr val="888888"/>
                 </a:solidFill>
               </a:rPr>
-              <a:t>SH Bae, SH Choi, SM Yoon. Clinical and Molecular …</a:t>
+              <a:t>X Zhang, H Cai, W Peng. … and Targeted Therapy. 2026</a:t>
             </a:r>
             <a:endParaRPr lang="en-US" sz="800" dirty="0"/>
           </a:p>
@@ -3090,7 +3090,7 @@
                   </a:extLst>
                 </a:hlinkClick>
               </a:rPr>
-              <a:t>Defining the role of minimally invasive surgical thermal ablation in liver malignancies: A systematic review and meta-analysis of outcomes and reporting …</a:t>
+              <a:t>… (PD-1 inhibitor) plus lenvatinib as conversion therapy followed by sequential surgery (SILENSES) for advanced unresectable hepatocellular carcinoma: a phase II …</a:t>
             </a:r>
             <a:endParaRPr lang="en-US" sz="2400" dirty="0"/>
           </a:p>
@@ -3126,7 +3126,7 @@
                   <a:srgbClr val="888888"/>
                 </a:solidFill>
               </a:rPr>
-              <a:t>European Journal of …  ·  Meta-Analysis</a:t>
+              <a:t>… and Targeted Therapy  ·  RCT Phase 2</a:t>
             </a:r>
             <a:endParaRPr lang="en-US" sz="1000" dirty="0"/>
           </a:p>
@@ -3205,7 +3205,7 @@
                   <a:srgbClr val="888888"/>
                 </a:solidFill>
               </a:rPr>
-              <a:t>G Scotton, F Notte, HC Pommergaard…. European Journal of …. 2026</a:t>
+              <a:t>S Lu, W Zhang, J Li. … and Targeted Therapy. 2026</a:t>
             </a:r>
             <a:endParaRPr lang="en-US" sz="800" dirty="0"/>
           </a:p>
@@ -3776,7 +3776,7 @@
                 <a:ea typeface="Arial" pitchFamily="34" charset="-122"/>
                 <a:cs typeface="Arial" pitchFamily="34" charset="-120"/>
               </a:rPr>
-              <a:t>On-demand transarterial chemoembolisation combined with atezolizumab and bevaciz…</a:t>
+              <a:t>Durvalumab and tremelimumab, with or without lenvatinib, combined with transarte…</a:t>
             </a:r>
             <a:endParaRPr lang="en-US" sz="1400" dirty="0"/>
           </a:p>
@@ -3813,7 +3813,7 @@
                 <a:ea typeface="Arial" pitchFamily="34" charset="-122"/>
                 <a:cs typeface="Arial" pitchFamily="34" charset="-120"/>
               </a:rPr>
-              <a:t>Atezolizumab-Bevacizumab with or without Cisplatin-based HAIC for Unresectable H…</a:t>
+              <a:t>Perioperative strategies for the treatment of HCC.</a:t>
             </a:r>
             <a:endParaRPr lang="en-US" sz="1400" dirty="0"/>
           </a:p>
@@ -3850,7 +3850,7 @@
                 <a:ea typeface="Arial" pitchFamily="34" charset="-122"/>
                 <a:cs typeface="Arial" pitchFamily="34" charset="-120"/>
               </a:rPr>
-              <a:t>Phase 2 Study of Futibatinib in Combination with Pembrolizumab in Patients with …</a:t>
+              <a:t>A multicenter pilot study of nivolumab with drug-eluting bead transarterial chem…</a:t>
             </a:r>
             <a:endParaRPr lang="en-US" sz="1400" dirty="0"/>
           </a:p>
@@ -3887,7 +3887,7 @@
                 <a:ea typeface="Arial" pitchFamily="34" charset="-122"/>
                 <a:cs typeface="Arial" pitchFamily="34" charset="-120"/>
               </a:rPr>
-              <a:t>… plus transarterial chemoembolization and PD-1 inhibitors as conversion therapi…</a:t>
+              <a:t>Expanding the path to cure - a narrative review on optimizing multimodality sequ…</a:t>
             </a:r>
             <a:endParaRPr lang="en-US" sz="1400" dirty="0"/>
           </a:p>
@@ -3924,7 +3924,7 @@
                 <a:ea typeface="Arial" pitchFamily="34" charset="-122"/>
                 <a:cs typeface="Arial" pitchFamily="34" charset="-120"/>
               </a:rPr>
-              <a:t>… (PD-1 inhibitor) plus lenvatinib as conversion therapy followed by sequential …</a:t>
+              <a:t>Adaptive radiofrequency ablation using an Octopus multipurpose electrode for sma…</a:t>
             </a:r>
             <a:endParaRPr lang="en-US" sz="1400" dirty="0"/>
           </a:p>
@@ -3961,7 +3961,7 @@
                 <a:ea typeface="Arial" pitchFamily="34" charset="-122"/>
                 <a:cs typeface="Arial" pitchFamily="34" charset="-120"/>
               </a:rPr>
-              <a:t>Defect-Engineered BiO2-X Nanosheets Mediate Sono-Thermomechanical ECM Remodeling…</a:t>
+              <a:t>Clinical predictors of response to atezolizumab/bevacizumab in Child-Pugh B pati…</a:t>
             </a:r>
             <a:endParaRPr lang="en-US" sz="1400" dirty="0"/>
           </a:p>
@@ -3998,7 +3998,7 @@
                 <a:ea typeface="Arial" pitchFamily="34" charset="-122"/>
                 <a:cs typeface="Arial" pitchFamily="34" charset="-120"/>
               </a:rPr>
-              <a:t>Enhanced glucose uptake promotes the survival of hepatocellular carcinoma cells …</a:t>
+              <a:t>Spatiotemporal dynamics of the tumor microenvironment in hepatocellular carcinom…</a:t>
             </a:r>
             <a:endParaRPr lang="en-US" sz="1400" dirty="0"/>
           </a:p>
@@ -4035,7 +4035,7 @@
                 <a:ea typeface="Arial" pitchFamily="34" charset="-122"/>
                 <a:cs typeface="Arial" pitchFamily="34" charset="-120"/>
               </a:rPr>
-              <a:t>Cryoablation versus radiofrequency ablation for hepatocellular carcinoma: a syst…</a:t>
+              <a:t>Perioperative tislelizumab for early-stage hepatocellular carcinoma: A phase II …</a:t>
             </a:r>
             <a:endParaRPr lang="en-US" sz="1400" dirty="0"/>
           </a:p>
@@ -4072,7 +4072,7 @@
                 <a:ea typeface="Arial" pitchFamily="34" charset="-122"/>
                 <a:cs typeface="Arial" pitchFamily="34" charset="-120"/>
               </a:rPr>
-              <a:t>External beam radiotherapy versus local ablation therapy for the treatment of he…</a:t>
+              <a:t>… plus transarterial chemoembolization and PD-1 inhibitors as conversion therapi…</a:t>
             </a:r>
             <a:endParaRPr lang="en-US" sz="1400" dirty="0"/>
           </a:p>
@@ -4109,7 +4109,7 @@
                 <a:ea typeface="Arial" pitchFamily="34" charset="-122"/>
                 <a:cs typeface="Arial" pitchFamily="34" charset="-120"/>
               </a:rPr>
-              <a:t>Defining the role of minimally invasive surgical thermal ablation in liver malig…</a:t>
+              <a:t>… (PD-1 inhibitor) plus lenvatinib as conversion therapy followed by sequential …</a:t>
             </a:r>
             <a:endParaRPr lang="en-US" sz="1400" dirty="0"/>
           </a:p>
@@ -4264,7 +4264,7 @@
                   </a:extLst>
                 </a:hlinkClick>
               </a:rPr>
-              <a:t>On-demand transarterial chemoembolisation combined with atezolizumab and bevacizumab in patients with untreated hepatocellular carcinoma (TALENTACE): a multicentre, randomised, open-label, phase 3 trial.</a:t>
+              <a:t>Durvalumab and tremelimumab, with or without lenvatinib, combined with transarterial chemoembolisation in participants with embolisation-eligible hepatocellular carcinoma (EMERALD-3): a global, randomised, open-label, sponsor-blinded, phase 3 study.</a:t>
             </a:r>
             <a:endParaRPr lang="en-US" sz="2400" dirty="0"/>
           </a:p>
@@ -4300,7 +4300,7 @@
                   <a:srgbClr val="888888"/>
                 </a:solidFill>
               </a:rPr>
-              <a:t>The lancet. Gastroenterology &amp; hepatology  ·  IF 35.7  ·  RCT Phase 3  ·  🌏 Asia</a:t>
+              <a:t>The Lancet. Oncology  ·  IF 41.6  ·  RCT Phase 3  ·  🌏 Asia</a:t>
             </a:r>
             <a:endParaRPr lang="en-US" sz="1000" dirty="0"/>
           </a:p>
@@ -4379,7 +4379,7 @@
                   <a:srgbClr val="888888"/>
                 </a:solidFill>
               </a:rPr>
-              <a:t>Kudo Masatoshi, Ogasawara Sadahisa, Liu Ruibao et al.. The lancet. Gastroenterology &amp; hepatology. 2026-08-25 DOI: 10.1016/S2468-1253(26)00212-8</a:t>
+              <a:t>Kudo Masatoshi, Abou-Alfa Ghassan K, Ren Zhenggang et al.. The Lancet. Oncology. 2026-08-24 DOI: 10.1016/S1470-2045(26)00278-0</a:t>
             </a:r>
             <a:endParaRPr lang="en-US" sz="800" dirty="0"/>
           </a:p>
@@ -4579,7 +4579,7 @@
                   </a:extLst>
                 </a:hlinkClick>
               </a:rPr>
-              <a:t>Atezolizumab-Bevacizumab with or without Cisplatin-based HAIC for Unresectable HCC: A Randomized Phase 2 Trial.</a:t>
+              <a:t>Perioperative strategies for the treatment of HCC.</a:t>
             </a:r>
             <a:endParaRPr lang="en-US" sz="2400" dirty="0"/>
           </a:p>
@@ -4615,7 +4615,7 @@
                   <a:srgbClr val="888888"/>
                 </a:solidFill>
               </a:rPr>
-              <a:t>JHEP reports : innovation in hepatology  ·  IF 7.8  ·  RCT Phase 3  ·  🌏 Asia</a:t>
+              <a:t>JHEP reports : innovation in hepatology  ·  IF 7.8  ·  RCT Phase 2</a:t>
             </a:r>
             <a:endParaRPr lang="en-US" sz="1000" dirty="0"/>
           </a:p>
@@ -4694,7 +4694,7 @@
                   <a:srgbClr val="888888"/>
                 </a:solidFill>
               </a:rPr>
-              <a:t>Takeuchi Yasuto, Sue Masahiko, Miyake Nozomi et al.. JHEP reports : innovation in hepatology. 2026-08-28 DOI: 10.1016/j.jhepr.2026.102002</a:t>
+              <a:t>D'Alessio Antonio, Krendl Felix J, Parente Alessandro et al.. JHEP reports : innovation in hepatology. 2026-09-03 DOI: 10.1016/j.jhepr.2026.102021</a:t>
             </a:r>
             <a:endParaRPr lang="en-US" sz="800" dirty="0"/>
           </a:p>
@@ -4894,7 +4894,7 @@
                   </a:extLst>
                 </a:hlinkClick>
               </a:rPr>
-              <a:t>Phase 2 Study of Futibatinib in Combination with Pembrolizumab in Patients with FGF19 expressing Advanced Hepatocellular Carcinoma.</a:t>
+              <a:t>A multicenter pilot study of nivolumab with drug-eluting bead transarterial chemoembolization in patients with liver-limited hepatocellular carcinoma.</a:t>
             </a:r>
             <a:endParaRPr lang="en-US" sz="2400" dirty="0"/>
           </a:p>
@@ -4930,7 +4930,7 @@
                   <a:srgbClr val="888888"/>
                 </a:solidFill>
               </a:rPr>
-              <a:t>The oncologist  ·  RCT Phase 2</a:t>
+              <a:t>ESMO gastrointestinal oncology  ·  RCT Phase 3</a:t>
             </a:r>
             <a:endParaRPr lang="en-US" sz="1000" dirty="0"/>
           </a:p>
@@ -5009,7 +5009,7 @@
                   <a:srgbClr val="888888"/>
                 </a:solidFill>
               </a:rPr>
-              <a:t>Tran Nguyen H, Palmer Mathias E, Ulrich Angela et al.. The oncologist. 2026-08-25 DOI: 10.1093/oncolo/oyag343</a:t>
+              <a:t>Harding J J, Fitzpatrick O M, Chou J F et al.. ESMO gastrointestinal oncology. 2026-08-28 DOI: 10.1016/j.esmogo.2026.100402</a:t>
             </a:r>
             <a:endParaRPr lang="en-US" sz="800" dirty="0"/>
           </a:p>
@@ -5209,7 +5209,7 @@
                   </a:extLst>
                 </a:hlinkClick>
               </a:rPr>
-              <a:t>… plus transarterial chemoembolization and PD-1 inhibitors as conversion therapies for unresectable intermediate-advanced hepatocellular carcinoma: a phase 2 trial …</a:t>
+              <a:t>Expanding the path to cure - a narrative review on optimizing multimodality sequencing in HCC.</a:t>
             </a:r>
             <a:endParaRPr lang="en-US" sz="2400" dirty="0"/>
           </a:p>
@@ -5245,7 +5245,7 @@
                   <a:srgbClr val="888888"/>
                 </a:solidFill>
               </a:rPr>
-              <a:t>… and Targeted Therapy  ·  RCT Phase 2</a:t>
+              <a:t>Cancer treatment reviews  ·  RCT Phase 3</a:t>
             </a:r>
             <a:endParaRPr lang="en-US" sz="1000" dirty="0"/>
           </a:p>
@@ -5324,7 +5324,7 @@
                   <a:srgbClr val="888888"/>
                 </a:solidFill>
               </a:rPr>
-              <a:t>X Zhang, H Cai, W Peng. … and Targeted Therapy. 2026</a:t>
+              <a:t>Lim Howard J, Vogel Arndt, Dunne Emma M et al.. Cancer treatment reviews. 2026-09-06 DOI: 10.1016/j.ctrv.2026.103194</a:t>
             </a:r>
             <a:endParaRPr lang="en-US" sz="800" dirty="0"/>
           </a:p>
@@ -5524,7 +5524,7 @@
                   </a:extLst>
                 </a:hlinkClick>
               </a:rPr>
-              <a:t>… (PD-1 inhibitor) plus lenvatinib as conversion therapy followed by sequential surgery (SILENSES) for advanced unresectable hepatocellular carcinoma: a phase II …</a:t>
+              <a:t>Adaptive radiofrequency ablation using an Octopus multipurpose electrode for small hepatocellular carcinoma adjacent to critical structures: a prospective single-center pilot feasibility study.</a:t>
             </a:r>
             <a:endParaRPr lang="en-US" sz="2400" dirty="0"/>
           </a:p>
@@ -5560,7 +5560,7 @@
                   <a:srgbClr val="888888"/>
                 </a:solidFill>
               </a:rPr>
-              <a:t>… and Targeted Therapy  ·  RCT Phase 2</a:t>
+              <a:t>Ultrasonography (Seoul, Korea)  ·  Prospective Study  ·  🌏 Asia</a:t>
             </a:r>
             <a:endParaRPr lang="en-US" sz="1000" dirty="0"/>
           </a:p>
@@ -5639,7 +5639,7 @@
                   <a:srgbClr val="888888"/>
                 </a:solidFill>
               </a:rPr>
-              <a:t>S Lu, W Zhang, J Li. … and Targeted Therapy. 2026</a:t>
+              <a:t>Lee Jeong Min, Kim Jae Hyun, Jo Gyeong Deok et al.. Ultrasonography (Seoul, Korea). 2026-09-03 DOI: 10.14366/usg.26158</a:t>
             </a:r>
             <a:endParaRPr lang="en-US" sz="800" dirty="0"/>
           </a:p>
@@ -5839,7 +5839,7 @@
                   </a:extLst>
                 </a:hlinkClick>
               </a:rPr>
-              <a:t>Defect-Engineered BiO2-X Nanosheets Mediate Sono-Thermomechanical ECM Remodeling for Hepatocellular Carcinoma Immunotherapy.</a:t>
+              <a:t>Clinical predictors of response to atezolizumab/bevacizumab in Child-Pugh B patients with hepatocellular carcinoma.</a:t>
             </a:r>
             <a:endParaRPr lang="en-US" sz="2400" dirty="0"/>
           </a:p>
@@ -5875,7 +5875,7 @@
                   <a:srgbClr val="888888"/>
                 </a:solidFill>
               </a:rPr>
-              <a:t>Advanced science (Weinheim, Baden-Wurttemberg, Germany)  ·  🌏 Asia</a:t>
+              <a:t>JHEP reports : innovation in hepatology  ·  IF 7.8  ·  Retrospective Study  ·  🌏 Asia</a:t>
             </a:r>
             <a:endParaRPr lang="en-US" sz="1000" dirty="0"/>
           </a:p>
@@ -5954,7 +5954,7 @@
                   <a:srgbClr val="888888"/>
                 </a:solidFill>
               </a:rPr>
-              <a:t>Tian Huimin, Zhang Shen, Wu Bolin et al.. Advanced science (Weinheim, Baden-Wurttemberg, Germany). 2026-08-30 DOI: 10.1002/advs.77337</a:t>
+              <a:t>Odent Anne-Victoire, Campani Claudia, Bouattour Mohamed et al.. JHEP reports : innovation in hepatology. 2026-08-27 DOI: 10.1016/j.jhepr.2026.101915</a:t>
             </a:r>
             <a:endParaRPr lang="en-US" sz="800" dirty="0"/>
           </a:p>
@@ -6154,7 +6154,7 @@
                   </a:extLst>
                 </a:hlinkClick>
               </a:rPr>
-              <a:t>Enhanced glucose uptake promotes the survival of hepatocellular carcinoma cells following incomplete radiofrequency ablation.</a:t>
+              <a:t>Spatiotemporal dynamics of the tumor microenvironment in hepatocellular carcinoma during combination immunotherapy.</a:t>
             </a:r>
             <a:endParaRPr lang="en-US" sz="2400" dirty="0"/>
           </a:p>
@@ -6190,7 +6190,7 @@
                   <a:srgbClr val="888888"/>
                 </a:solidFill>
               </a:rPr>
-              <a:t>Molecular &amp; cellular oncology  ·  🌏 Asia</a:t>
+              <a:t>Hepatology communications  ·  IF 5.6  ·  🌏 Asia</a:t>
             </a:r>
             <a:endParaRPr lang="en-US" sz="1000" dirty="0"/>
           </a:p>
@@ -6269,7 +6269,7 @@
                   <a:srgbClr val="888888"/>
                 </a:solidFill>
               </a:rPr>
-              <a:t>Wang Xiaofeng, Li Ting, Peng Chao. Molecular &amp; cellular oncology. 2026-08-29 DOI: 10.1080/23723556.2026.2715876</a:t>
+              <a:t>Iwasaki Hitoshi, Itoh Shinji, Toshida Katsuya et al.. Hepatology communications. 2026-08-07 DOI: 10.1097/HC9.0000000000001014</a:t>
             </a:r>
             <a:endParaRPr lang="en-US" sz="800" dirty="0"/>
           </a:p>
